--- a/docs/Sentinel-final-pitch.pptx
+++ b/docs/Sentinel-final-pitch.pptx
@@ -199,7 +199,7 @@
             </a:lvl1pPr>
           </a:lstStyle>
           <a:p>
-            <a:fld id="{665CB654-6198-4212-A711-96AA5A8DB821}" type="datetimeFigureOut">
+            <a:fld id="{592D12D2-935B-49E8-BF1E-3F0C487C06CE}" type="datetimeFigureOut">
               <a:rPr lang="en-MY" smtClean="0"/>
               <a:t>24/9/2026</a:t>
             </a:fld>
@@ -358,7 +358,7 @@
             </a:lvl1pPr>
           </a:lstStyle>
           <a:p>
-            <a:fld id="{9ED7B76F-B3BD-4F0D-8114-EFC19D398380}" type="slidenum">
+            <a:fld id="{21F61A80-68B1-422B-9D68-85FD71C666C5}" type="slidenum">
               <a:rPr lang="en-MY" smtClean="0"/>
               <a:t>‹#›</a:t>
             </a:fld>
@@ -369,7 +369,7 @@
     </p:spTree>
     <p:extLst>
       <p:ext uri="{BB962C8B-B14F-4D97-AF65-F5344CB8AC3E}">
-        <p14:creationId xmlns:p14="http://schemas.microsoft.com/office/powerpoint/2010/main" val="2645294980"/>
+        <p14:creationId xmlns:p14="http://schemas.microsoft.com/office/powerpoint/2010/main" val="1018011492"/>
       </p:ext>
     </p:extLst>
   </p:cSld>
@@ -536,7 +536,7 @@
           <a:bodyPr/>
           <a:lstStyle/>
           <a:p>
-            <a:fld id="{9ED7B76F-B3BD-4F0D-8114-EFC19D398380}" type="slidenum">
+            <a:fld id="{21F61A80-68B1-422B-9D68-85FD71C666C5}" type="slidenum">
               <a:rPr lang="en-MY" smtClean="0"/>
               <a:t>1</a:t>
             </a:fld>
@@ -547,7 +547,7 @@
     </p:spTree>
     <p:extLst>
       <p:ext uri="{BB962C8B-B14F-4D97-AF65-F5344CB8AC3E}">
-        <p14:creationId xmlns:p14="http://schemas.microsoft.com/office/powerpoint/2010/main" val="1451372670"/>
+        <p14:creationId xmlns:p14="http://schemas.microsoft.com/office/powerpoint/2010/main" val="4291143848"/>
       </p:ext>
     </p:extLst>
   </p:cSld>
@@ -624,7 +624,7 @@
           <a:bodyPr/>
           <a:lstStyle/>
           <a:p>
-            <a:fld id="{9ED7B76F-B3BD-4F0D-8114-EFC19D398380}" type="slidenum">
+            <a:fld id="{21F61A80-68B1-422B-9D68-85FD71C666C5}" type="slidenum">
               <a:rPr lang="en-MY" smtClean="0"/>
               <a:t>10</a:t>
             </a:fld>
@@ -635,7 +635,7 @@
     </p:spTree>
     <p:extLst>
       <p:ext uri="{BB962C8B-B14F-4D97-AF65-F5344CB8AC3E}">
-        <p14:creationId xmlns:p14="http://schemas.microsoft.com/office/powerpoint/2010/main" val="1859837402"/>
+        <p14:creationId xmlns:p14="http://schemas.microsoft.com/office/powerpoint/2010/main" val="4257150790"/>
       </p:ext>
     </p:extLst>
   </p:cSld>
@@ -691,7 +691,7 @@
           <a:p>
             <a:r>
               <a:rPr lang="en-US"/>
-              <a:t>A shipping desk gets five kinds of mail in one inbox. For a document check someone compares the Shipping Instruction against the draft Bill of Lading - seven fields, by hand. Miss one and it's a correction, a delay, rework. And there's a fourth case the statement names: sometimes the check can't be done - an unreadable scan, a blank field, the wrong document. That has to reach a person with the reason, not be guessed at. Sentinel does all four. (0:15-0:40)</a:t>
+              <a:t>Why we built it: a shipping desk gets five kinds of mail in one inbox, and for every document check a person compares the Shipping Instruction against the draft Bill of Lading - seven fields, by hand. At a conservative estimate that is about four minutes a pair and twenty seconds to triage each email; this inbox alone is a day and a half of desk work. Miss one field and it's a correction, a delay, rework. And there's a fourth case the statement names: sometimes the check can't be done - an unreadable scan, a blank field, the wrong document. That has to reach a person with the reason, not be guessed at. Sentinel does all four. (0:15-0:40)</a:t>
             </a:r>
             <a:endParaRPr lang="en-MY"/>
           </a:p>
@@ -712,7 +712,7 @@
           <a:bodyPr/>
           <a:lstStyle/>
           <a:p>
-            <a:fld id="{9ED7B76F-B3BD-4F0D-8114-EFC19D398380}" type="slidenum">
+            <a:fld id="{21F61A80-68B1-422B-9D68-85FD71C666C5}" type="slidenum">
               <a:rPr lang="en-MY" smtClean="0"/>
               <a:t>2</a:t>
             </a:fld>
@@ -723,7 +723,7 @@
     </p:spTree>
     <p:extLst>
       <p:ext uri="{BB962C8B-B14F-4D97-AF65-F5344CB8AC3E}">
-        <p14:creationId xmlns:p14="http://schemas.microsoft.com/office/powerpoint/2010/main" val="1822523164"/>
+        <p14:creationId xmlns:p14="http://schemas.microsoft.com/office/powerpoint/2010/main" val="966233640"/>
       </p:ext>
     </p:extLst>
   </p:cSld>
@@ -779,7 +779,7 @@
           <a:p>
             <a:r>
               <a:rPr lang="en-US"/>
-              <a:t>This is the whole inbox, live on Render and Vercel - not a sample, the organisers' 520 emails. Every email classified, every document pair compared, every case Sentinel can't decide sent to a person with the reason attached. Thirteen seconds. You'll press the button yourself in a minute. Do not say the accuracy here - that is slide 6. (0:40-1:05)</a:t>
+              <a:t>This is the whole inbox, live on Render and Vercel - not a sample, the organisers' 520 emails. Every email classified, every document pair compared, every case Sentinel can't decide sent to a person with the reason attached. Thirteen seconds. And this is how a desk uses it, four steps: run the inbox, open a flagged case, confirm it or correct one field or re-upload the corrected document, send the drafted reply. Do not say the accuracy here - that is slide 6. (0:40-1:05)</a:t>
             </a:r>
             <a:endParaRPr lang="en-MY"/>
           </a:p>
@@ -800,7 +800,7 @@
           <a:bodyPr/>
           <a:lstStyle/>
           <a:p>
-            <a:fld id="{9ED7B76F-B3BD-4F0D-8114-EFC19D398380}" type="slidenum">
+            <a:fld id="{21F61A80-68B1-422B-9D68-85FD71C666C5}" type="slidenum">
               <a:rPr lang="en-MY" smtClean="0"/>
               <a:t>3</a:t>
             </a:fld>
@@ -811,7 +811,7 @@
     </p:spTree>
     <p:extLst>
       <p:ext uri="{BB962C8B-B14F-4D97-AF65-F5344CB8AC3E}">
-        <p14:creationId xmlns:p14="http://schemas.microsoft.com/office/powerpoint/2010/main" val="3019124358"/>
+        <p14:creationId xmlns:p14="http://schemas.microsoft.com/office/powerpoint/2010/main" val="1839013987"/>
       </p:ext>
     </p:extLst>
   </p:cSld>
@@ -888,7 +888,7 @@
           <a:bodyPr/>
           <a:lstStyle/>
           <a:p>
-            <a:fld id="{9ED7B76F-B3BD-4F0D-8114-EFC19D398380}" type="slidenum">
+            <a:fld id="{21F61A80-68B1-422B-9D68-85FD71C666C5}" type="slidenum">
               <a:rPr lang="en-MY" smtClean="0"/>
               <a:t>4</a:t>
             </a:fld>
@@ -899,7 +899,7 @@
     </p:spTree>
     <p:extLst>
       <p:ext uri="{BB962C8B-B14F-4D97-AF65-F5344CB8AC3E}">
-        <p14:creationId xmlns:p14="http://schemas.microsoft.com/office/powerpoint/2010/main" val="1915543079"/>
+        <p14:creationId xmlns:p14="http://schemas.microsoft.com/office/powerpoint/2010/main" val="217516439"/>
       </p:ext>
     </p:extLst>
   </p:cSld>
@@ -955,7 +955,7 @@
           <a:p>
             <a:r>
               <a:rPr lang="en-US"/>
-              <a:t>A judge in the first round said we use AI less than most teams. True, and measured. On this inbox the rules answer all 520 and the scoring is all-or-nothing per email, so a model that is almost always right costs places. The model goes only where the rules admit they can't read: an ambiguous email, a label we've never seen, a scanned page. On documents with wording we invented, rules alone send 168 of 188 cases to a human; with the model, two - and false discrepancies stay at zero, because nothing the model says is adopted until we find it again in the source. You'll see both in the demo: a scan read out for the reviewer, and four unknown labels read on request. (1:40-2:20)</a:t>
+              <a:t>Never say 'we use less AI'. Say: the AI is reserved for the cases the rules cannot handle - and the system performs just as well. A judge in the first round said we use AI less than most teams. True, and measured. On this inbox the rules answer all 520 and the scoring is all-or-nothing per email, so a model that is almost always right costs places. The model goes only where the rules admit they can't read: an ambiguous email, a label we've never seen, a scanned page. On documents with wording we invented, rules alone send 168 of 188 cases to a human; with the model, two - and false discrepancies stay at zero, because nothing the model says is adopted until we find it again in the source. You'll see both in the demo: a scan read out for the reviewer, and four unknown labels read on request. (1:40-2:20)</a:t>
             </a:r>
             <a:endParaRPr lang="en-MY"/>
           </a:p>
@@ -976,7 +976,7 @@
           <a:bodyPr/>
           <a:lstStyle/>
           <a:p>
-            <a:fld id="{9ED7B76F-B3BD-4F0D-8114-EFC19D398380}" type="slidenum">
+            <a:fld id="{21F61A80-68B1-422B-9D68-85FD71C666C5}" type="slidenum">
               <a:rPr lang="en-MY" smtClean="0"/>
               <a:t>5</a:t>
             </a:fld>
@@ -987,7 +987,7 @@
     </p:spTree>
     <p:extLst>
       <p:ext uri="{BB962C8B-B14F-4D97-AF65-F5344CB8AC3E}">
-        <p14:creationId xmlns:p14="http://schemas.microsoft.com/office/powerpoint/2010/main" val="825658002"/>
+        <p14:creationId xmlns:p14="http://schemas.microsoft.com/office/powerpoint/2010/main" val="3833377137"/>
       </p:ext>
     </p:extLst>
   </p:cSld>
@@ -1064,7 +1064,7 @@
           <a:bodyPr/>
           <a:lstStyle/>
           <a:p>
-            <a:fld id="{9ED7B76F-B3BD-4F0D-8114-EFC19D398380}" type="slidenum">
+            <a:fld id="{21F61A80-68B1-422B-9D68-85FD71C666C5}" type="slidenum">
               <a:rPr lang="en-MY" smtClean="0"/>
               <a:t>6</a:t>
             </a:fld>
@@ -1075,7 +1075,7 @@
     </p:spTree>
     <p:extLst>
       <p:ext uri="{BB962C8B-B14F-4D97-AF65-F5344CB8AC3E}">
-        <p14:creationId xmlns:p14="http://schemas.microsoft.com/office/powerpoint/2010/main" val="610951104"/>
+        <p14:creationId xmlns:p14="http://schemas.microsoft.com/office/powerpoint/2010/main" val="1879101604"/>
       </p:ext>
     </p:extLst>
   </p:cSld>
@@ -1152,7 +1152,7 @@
           <a:bodyPr/>
           <a:lstStyle/>
           <a:p>
-            <a:fld id="{9ED7B76F-B3BD-4F0D-8114-EFC19D398380}" type="slidenum">
+            <a:fld id="{21F61A80-68B1-422B-9D68-85FD71C666C5}" type="slidenum">
               <a:rPr lang="en-MY" smtClean="0"/>
               <a:t>7</a:t>
             </a:fld>
@@ -1163,7 +1163,7 @@
     </p:spTree>
     <p:extLst>
       <p:ext uri="{BB962C8B-B14F-4D97-AF65-F5344CB8AC3E}">
-        <p14:creationId xmlns:p14="http://schemas.microsoft.com/office/powerpoint/2010/main" val="975346833"/>
+        <p14:creationId xmlns:p14="http://schemas.microsoft.com/office/powerpoint/2010/main" val="1150897354"/>
       </p:ext>
     </p:extLst>
   </p:cSld>
@@ -1219,7 +1219,7 @@
           <a:p>
             <a:r>
               <a:rPr lang="en-US"/>
-              <a:t>Every other checker shows you a verdict. This one shows you the line, lets you correct a single field, groups the same shipper's repeated mistakes, and drafts the reply from the corrected outcome - not the stale one. Fifteen seconds; the demo already did the work. (4:25-4:40)</a:t>
+              <a:t>At the top-ten stage everyone meets the brief, so this is the slide to slow down on - thirty seconds. Five things the others mostly don't have: the sender re-sends a fixed document and you re-upload it on the case, the check runs again and the old answer stays on record; a scan still goes to a person but already read out by the model; correcting a field shows this shipper's history on that field; the original document is one click away from every value; and the reply is drafted from what the reviewer decided, not the stale answer. (4:10-4:40)</a:t>
             </a:r>
             <a:endParaRPr lang="en-MY"/>
           </a:p>
@@ -1240,7 +1240,7 @@
           <a:bodyPr/>
           <a:lstStyle/>
           <a:p>
-            <a:fld id="{9ED7B76F-B3BD-4F0D-8114-EFC19D398380}" type="slidenum">
+            <a:fld id="{21F61A80-68B1-422B-9D68-85FD71C666C5}" type="slidenum">
               <a:rPr lang="en-MY" smtClean="0"/>
               <a:t>8</a:t>
             </a:fld>
@@ -1251,7 +1251,7 @@
     </p:spTree>
     <p:extLst>
       <p:ext uri="{BB962C8B-B14F-4D97-AF65-F5344CB8AC3E}">
-        <p14:creationId xmlns:p14="http://schemas.microsoft.com/office/powerpoint/2010/main" val="384433492"/>
+        <p14:creationId xmlns:p14="http://schemas.microsoft.com/office/powerpoint/2010/main" val="3851826723"/>
       </p:ext>
     </p:extLst>
   </p:cSld>
@@ -1328,7 +1328,7 @@
           <a:bodyPr/>
           <a:lstStyle/>
           <a:p>
-            <a:fld id="{9ED7B76F-B3BD-4F0D-8114-EFC19D398380}" type="slidenum">
+            <a:fld id="{21F61A80-68B1-422B-9D68-85FD71C666C5}" type="slidenum">
               <a:rPr lang="en-MY" smtClean="0"/>
               <a:t>9</a:t>
             </a:fld>
@@ -1339,7 +1339,7 @@
     </p:spTree>
     <p:extLst>
       <p:ext uri="{BB962C8B-B14F-4D97-AF65-F5344CB8AC3E}">
-        <p14:creationId xmlns:p14="http://schemas.microsoft.com/office/powerpoint/2010/main" val="576049738"/>
+        <p14:creationId xmlns:p14="http://schemas.microsoft.com/office/powerpoint/2010/main" val="1588068160"/>
       </p:ext>
     </p:extLst>
   </p:cSld>
@@ -1371,7 +1371,7 @@
           <p:cNvPr id="2" name="Title 1">
             <a:extLst>
               <a:ext uri="{FF2B5EF4-FFF2-40B4-BE49-F238E27FC236}">
-                <a16:creationId xmlns:a16="http://schemas.microsoft.com/office/drawing/2014/main" id="{3B6FABF8-CE87-4581-E9FE-200AA370FE93}"/>
+                <a16:creationId xmlns:a16="http://schemas.microsoft.com/office/drawing/2014/main" id="{686CC9FC-85CD-1FCB-2B8B-B1C956648C32}"/>
               </a:ext>
             </a:extLst>
           </p:cNvPr>
@@ -1409,7 +1409,7 @@
           <p:cNvPr id="3" name="Subtitle 2">
             <a:extLst>
               <a:ext uri="{FF2B5EF4-FFF2-40B4-BE49-F238E27FC236}">
-                <a16:creationId xmlns:a16="http://schemas.microsoft.com/office/drawing/2014/main" id="{B4E0ABDD-441D-421E-FE47-F73B44D5A19B}"/>
+                <a16:creationId xmlns:a16="http://schemas.microsoft.com/office/drawing/2014/main" id="{32EFD356-D93D-C4D7-75E1-0CC1E3A26ECA}"/>
               </a:ext>
             </a:extLst>
           </p:cNvPr>
@@ -1480,7 +1480,7 @@
           <p:cNvPr id="4" name="Date Placeholder 3">
             <a:extLst>
               <a:ext uri="{FF2B5EF4-FFF2-40B4-BE49-F238E27FC236}">
-                <a16:creationId xmlns:a16="http://schemas.microsoft.com/office/drawing/2014/main" id="{4FDEEFD2-91F4-5FBB-0D05-0AAACC776C7B}"/>
+                <a16:creationId xmlns:a16="http://schemas.microsoft.com/office/drawing/2014/main" id="{24980623-15B8-71E2-5338-54BCE67E659B}"/>
               </a:ext>
             </a:extLst>
           </p:cNvPr>
@@ -1496,7 +1496,7 @@
           <a:bodyPr/>
           <a:lstStyle/>
           <a:p>
-            <a:fld id="{3D5D1A14-1EE2-4E92-B4FE-304EE26A3F66}" type="datetimeFigureOut">
+            <a:fld id="{2F8D26A6-D71B-4538-BE7E-D2A35FE8C500}" type="datetimeFigureOut">
               <a:rPr lang="en-MY" smtClean="0"/>
               <a:t>24/9/2026</a:t>
             </a:fld>
@@ -1509,7 +1509,7 @@
           <p:cNvPr id="5" name="Footer Placeholder 4">
             <a:extLst>
               <a:ext uri="{FF2B5EF4-FFF2-40B4-BE49-F238E27FC236}">
-                <a16:creationId xmlns:a16="http://schemas.microsoft.com/office/drawing/2014/main" id="{65F3753A-9EF0-AB22-B237-D56724D94AD5}"/>
+                <a16:creationId xmlns:a16="http://schemas.microsoft.com/office/drawing/2014/main" id="{E72EC12D-2DDA-2C56-2F70-EFBC3FBA8437}"/>
               </a:ext>
             </a:extLst>
           </p:cNvPr>
@@ -1534,7 +1534,7 @@
           <p:cNvPr id="6" name="Slide Number Placeholder 5">
             <a:extLst>
               <a:ext uri="{FF2B5EF4-FFF2-40B4-BE49-F238E27FC236}">
-                <a16:creationId xmlns:a16="http://schemas.microsoft.com/office/drawing/2014/main" id="{143A7B2A-9330-703B-5076-86D8AEA50F3C}"/>
+                <a16:creationId xmlns:a16="http://schemas.microsoft.com/office/drawing/2014/main" id="{07BEA3D9-0A18-698E-81BA-826D2308A65B}"/>
               </a:ext>
             </a:extLst>
           </p:cNvPr>
@@ -1550,7 +1550,7 @@
           <a:bodyPr/>
           <a:lstStyle/>
           <a:p>
-            <a:fld id="{C3AED862-024E-41DA-81A7-2FE9CB15877D}" type="slidenum">
+            <a:fld id="{3A1571EA-3779-4ED8-A27C-B0EAA1CBA9CE}" type="slidenum">
               <a:rPr lang="en-MY" smtClean="0"/>
               <a:t>‹#›</a:t>
             </a:fld>
@@ -1561,7 +1561,7 @@
     </p:spTree>
     <p:extLst>
       <p:ext uri="{BB962C8B-B14F-4D97-AF65-F5344CB8AC3E}">
-        <p14:creationId xmlns:p14="http://schemas.microsoft.com/office/powerpoint/2010/main" val="4247354257"/>
+        <p14:creationId xmlns:p14="http://schemas.microsoft.com/office/powerpoint/2010/main" val="1553467972"/>
       </p:ext>
     </p:extLst>
   </p:cSld>
@@ -1593,7 +1593,7 @@
           <p:cNvPr id="2" name="Title 1">
             <a:extLst>
               <a:ext uri="{FF2B5EF4-FFF2-40B4-BE49-F238E27FC236}">
-                <a16:creationId xmlns:a16="http://schemas.microsoft.com/office/drawing/2014/main" id="{E8741EA4-3A57-FD85-3E51-3188339C25FE}"/>
+                <a16:creationId xmlns:a16="http://schemas.microsoft.com/office/drawing/2014/main" id="{ECC59A2F-1856-0EC6-5771-C53BBE2126F3}"/>
               </a:ext>
             </a:extLst>
           </p:cNvPr>
@@ -1622,7 +1622,7 @@
           <p:cNvPr id="3" name="Vertical Text Placeholder 2">
             <a:extLst>
               <a:ext uri="{FF2B5EF4-FFF2-40B4-BE49-F238E27FC236}">
-                <a16:creationId xmlns:a16="http://schemas.microsoft.com/office/drawing/2014/main" id="{B9A7E264-8A27-B97B-1461-A64B5F416314}"/>
+                <a16:creationId xmlns:a16="http://schemas.microsoft.com/office/drawing/2014/main" id="{14628F09-881E-7BA0-38D4-031A79D17012}"/>
               </a:ext>
             </a:extLst>
           </p:cNvPr>
@@ -1680,7 +1680,7 @@
           <p:cNvPr id="4" name="Date Placeholder 3">
             <a:extLst>
               <a:ext uri="{FF2B5EF4-FFF2-40B4-BE49-F238E27FC236}">
-                <a16:creationId xmlns:a16="http://schemas.microsoft.com/office/drawing/2014/main" id="{5538A968-E026-75CE-1134-5E501F457F06}"/>
+                <a16:creationId xmlns:a16="http://schemas.microsoft.com/office/drawing/2014/main" id="{79E449A9-7395-EAD7-A978-6117EC91000D}"/>
               </a:ext>
             </a:extLst>
           </p:cNvPr>
@@ -1696,7 +1696,7 @@
           <a:bodyPr/>
           <a:lstStyle/>
           <a:p>
-            <a:fld id="{3D5D1A14-1EE2-4E92-B4FE-304EE26A3F66}" type="datetimeFigureOut">
+            <a:fld id="{2F8D26A6-D71B-4538-BE7E-D2A35FE8C500}" type="datetimeFigureOut">
               <a:rPr lang="en-MY" smtClean="0"/>
               <a:t>24/9/2026</a:t>
             </a:fld>
@@ -1709,7 +1709,7 @@
           <p:cNvPr id="5" name="Footer Placeholder 4">
             <a:extLst>
               <a:ext uri="{FF2B5EF4-FFF2-40B4-BE49-F238E27FC236}">
-                <a16:creationId xmlns:a16="http://schemas.microsoft.com/office/drawing/2014/main" id="{56DAF037-6C39-C715-7B92-C9D145855177}"/>
+                <a16:creationId xmlns:a16="http://schemas.microsoft.com/office/drawing/2014/main" id="{B4270686-63C5-2C96-35D9-1115F792AF58}"/>
               </a:ext>
             </a:extLst>
           </p:cNvPr>
@@ -1734,7 +1734,7 @@
           <p:cNvPr id="6" name="Slide Number Placeholder 5">
             <a:extLst>
               <a:ext uri="{FF2B5EF4-FFF2-40B4-BE49-F238E27FC236}">
-                <a16:creationId xmlns:a16="http://schemas.microsoft.com/office/drawing/2014/main" id="{DA2C53EB-60C7-4EFE-8801-7FF942D94D41}"/>
+                <a16:creationId xmlns:a16="http://schemas.microsoft.com/office/drawing/2014/main" id="{1E0348DC-BCE1-D3F0-4514-CE5391B0E8A4}"/>
               </a:ext>
             </a:extLst>
           </p:cNvPr>
@@ -1750,7 +1750,7 @@
           <a:bodyPr/>
           <a:lstStyle/>
           <a:p>
-            <a:fld id="{C3AED862-024E-41DA-81A7-2FE9CB15877D}" type="slidenum">
+            <a:fld id="{3A1571EA-3779-4ED8-A27C-B0EAA1CBA9CE}" type="slidenum">
               <a:rPr lang="en-MY" smtClean="0"/>
               <a:t>‹#›</a:t>
             </a:fld>
@@ -1761,7 +1761,7 @@
     </p:spTree>
     <p:extLst>
       <p:ext uri="{BB962C8B-B14F-4D97-AF65-F5344CB8AC3E}">
-        <p14:creationId xmlns:p14="http://schemas.microsoft.com/office/powerpoint/2010/main" val="164559848"/>
+        <p14:creationId xmlns:p14="http://schemas.microsoft.com/office/powerpoint/2010/main" val="2304108578"/>
       </p:ext>
     </p:extLst>
   </p:cSld>
@@ -1793,7 +1793,7 @@
           <p:cNvPr id="2" name="Vertical Title 1">
             <a:extLst>
               <a:ext uri="{FF2B5EF4-FFF2-40B4-BE49-F238E27FC236}">
-                <a16:creationId xmlns:a16="http://schemas.microsoft.com/office/drawing/2014/main" id="{22AA4FC2-830E-2E7C-7774-BF159DD594CC}"/>
+                <a16:creationId xmlns:a16="http://schemas.microsoft.com/office/drawing/2014/main" id="{C797B5DB-3C13-A7EA-D2E7-CD589CDDCB52}"/>
               </a:ext>
             </a:extLst>
           </p:cNvPr>
@@ -1827,7 +1827,7 @@
           <p:cNvPr id="3" name="Vertical Text Placeholder 2">
             <a:extLst>
               <a:ext uri="{FF2B5EF4-FFF2-40B4-BE49-F238E27FC236}">
-                <a16:creationId xmlns:a16="http://schemas.microsoft.com/office/drawing/2014/main" id="{1122E747-D248-251F-BFEE-FA1867907B74}"/>
+                <a16:creationId xmlns:a16="http://schemas.microsoft.com/office/drawing/2014/main" id="{CC52690E-804E-05B8-C094-7CB34921D760}"/>
               </a:ext>
             </a:extLst>
           </p:cNvPr>
@@ -1890,7 +1890,7 @@
           <p:cNvPr id="4" name="Date Placeholder 3">
             <a:extLst>
               <a:ext uri="{FF2B5EF4-FFF2-40B4-BE49-F238E27FC236}">
-                <a16:creationId xmlns:a16="http://schemas.microsoft.com/office/drawing/2014/main" id="{6ED24FEF-762C-B873-2CB5-6FE9C3E5D950}"/>
+                <a16:creationId xmlns:a16="http://schemas.microsoft.com/office/drawing/2014/main" id="{72C68D13-FDFF-B1C8-01ED-06180EF0BC34}"/>
               </a:ext>
             </a:extLst>
           </p:cNvPr>
@@ -1906,7 +1906,7 @@
           <a:bodyPr/>
           <a:lstStyle/>
           <a:p>
-            <a:fld id="{3D5D1A14-1EE2-4E92-B4FE-304EE26A3F66}" type="datetimeFigureOut">
+            <a:fld id="{2F8D26A6-D71B-4538-BE7E-D2A35FE8C500}" type="datetimeFigureOut">
               <a:rPr lang="en-MY" smtClean="0"/>
               <a:t>24/9/2026</a:t>
             </a:fld>
@@ -1919,7 +1919,7 @@
           <p:cNvPr id="5" name="Footer Placeholder 4">
             <a:extLst>
               <a:ext uri="{FF2B5EF4-FFF2-40B4-BE49-F238E27FC236}">
-                <a16:creationId xmlns:a16="http://schemas.microsoft.com/office/drawing/2014/main" id="{A807BBD0-1492-EE96-50FD-AE808D8489E3}"/>
+                <a16:creationId xmlns:a16="http://schemas.microsoft.com/office/drawing/2014/main" id="{819CE22C-68F6-0D57-A1A0-0D9D6E65AC76}"/>
               </a:ext>
             </a:extLst>
           </p:cNvPr>
@@ -1944,7 +1944,7 @@
           <p:cNvPr id="6" name="Slide Number Placeholder 5">
             <a:extLst>
               <a:ext uri="{FF2B5EF4-FFF2-40B4-BE49-F238E27FC236}">
-                <a16:creationId xmlns:a16="http://schemas.microsoft.com/office/drawing/2014/main" id="{663530D5-23DD-3045-F135-DBBB64937AC4}"/>
+                <a16:creationId xmlns:a16="http://schemas.microsoft.com/office/drawing/2014/main" id="{500C94AB-11EF-8B96-DA2A-4953DCDD1F42}"/>
               </a:ext>
             </a:extLst>
           </p:cNvPr>
@@ -1960,7 +1960,7 @@
           <a:bodyPr/>
           <a:lstStyle/>
           <a:p>
-            <a:fld id="{C3AED862-024E-41DA-81A7-2FE9CB15877D}" type="slidenum">
+            <a:fld id="{3A1571EA-3779-4ED8-A27C-B0EAA1CBA9CE}" type="slidenum">
               <a:rPr lang="en-MY" smtClean="0"/>
               <a:t>‹#›</a:t>
             </a:fld>
@@ -1971,7 +1971,7 @@
     </p:spTree>
     <p:extLst>
       <p:ext uri="{BB962C8B-B14F-4D97-AF65-F5344CB8AC3E}">
-        <p14:creationId xmlns:p14="http://schemas.microsoft.com/office/powerpoint/2010/main" val="3654758781"/>
+        <p14:creationId xmlns:p14="http://schemas.microsoft.com/office/powerpoint/2010/main" val="950173206"/>
       </p:ext>
     </p:extLst>
   </p:cSld>
@@ -2003,7 +2003,7 @@
           <p:cNvPr id="2" name="Title 1">
             <a:extLst>
               <a:ext uri="{FF2B5EF4-FFF2-40B4-BE49-F238E27FC236}">
-                <a16:creationId xmlns:a16="http://schemas.microsoft.com/office/drawing/2014/main" id="{A8F284F7-68D3-4A89-9724-284BCD4FCDA5}"/>
+                <a16:creationId xmlns:a16="http://schemas.microsoft.com/office/drawing/2014/main" id="{9B620C09-64EE-4F98-E127-92E992DA418F}"/>
               </a:ext>
             </a:extLst>
           </p:cNvPr>
@@ -2032,7 +2032,7 @@
           <p:cNvPr id="3" name="Content Placeholder 2">
             <a:extLst>
               <a:ext uri="{FF2B5EF4-FFF2-40B4-BE49-F238E27FC236}">
-                <a16:creationId xmlns:a16="http://schemas.microsoft.com/office/drawing/2014/main" id="{15335988-A780-5C4D-B05B-DCCA049D1131}"/>
+                <a16:creationId xmlns:a16="http://schemas.microsoft.com/office/drawing/2014/main" id="{E58E8323-0378-D6D5-C708-0609029FC75B}"/>
               </a:ext>
             </a:extLst>
           </p:cNvPr>
@@ -2090,7 +2090,7 @@
           <p:cNvPr id="4" name="Date Placeholder 3">
             <a:extLst>
               <a:ext uri="{FF2B5EF4-FFF2-40B4-BE49-F238E27FC236}">
-                <a16:creationId xmlns:a16="http://schemas.microsoft.com/office/drawing/2014/main" id="{438332E5-F26C-47AE-7D93-112F4D199E13}"/>
+                <a16:creationId xmlns:a16="http://schemas.microsoft.com/office/drawing/2014/main" id="{83117E4D-8376-A8F7-B588-6EFF3201A14F}"/>
               </a:ext>
             </a:extLst>
           </p:cNvPr>
@@ -2106,7 +2106,7 @@
           <a:bodyPr/>
           <a:lstStyle/>
           <a:p>
-            <a:fld id="{3D5D1A14-1EE2-4E92-B4FE-304EE26A3F66}" type="datetimeFigureOut">
+            <a:fld id="{2F8D26A6-D71B-4538-BE7E-D2A35FE8C500}" type="datetimeFigureOut">
               <a:rPr lang="en-MY" smtClean="0"/>
               <a:t>24/9/2026</a:t>
             </a:fld>
@@ -2119,7 +2119,7 @@
           <p:cNvPr id="5" name="Footer Placeholder 4">
             <a:extLst>
               <a:ext uri="{FF2B5EF4-FFF2-40B4-BE49-F238E27FC236}">
-                <a16:creationId xmlns:a16="http://schemas.microsoft.com/office/drawing/2014/main" id="{A33FFACA-E62A-F90D-D4F5-1247022E70C1}"/>
+                <a16:creationId xmlns:a16="http://schemas.microsoft.com/office/drawing/2014/main" id="{55C14C2B-F51D-CA8F-9356-684F8631193F}"/>
               </a:ext>
             </a:extLst>
           </p:cNvPr>
@@ -2144,7 +2144,7 @@
           <p:cNvPr id="6" name="Slide Number Placeholder 5">
             <a:extLst>
               <a:ext uri="{FF2B5EF4-FFF2-40B4-BE49-F238E27FC236}">
-                <a16:creationId xmlns:a16="http://schemas.microsoft.com/office/drawing/2014/main" id="{CA455B31-E309-479A-E225-E5578C1C63B4}"/>
+                <a16:creationId xmlns:a16="http://schemas.microsoft.com/office/drawing/2014/main" id="{66353F87-7097-7B58-18BF-3219EC9E2BD5}"/>
               </a:ext>
             </a:extLst>
           </p:cNvPr>
@@ -2160,7 +2160,7 @@
           <a:bodyPr/>
           <a:lstStyle/>
           <a:p>
-            <a:fld id="{C3AED862-024E-41DA-81A7-2FE9CB15877D}" type="slidenum">
+            <a:fld id="{3A1571EA-3779-4ED8-A27C-B0EAA1CBA9CE}" type="slidenum">
               <a:rPr lang="en-MY" smtClean="0"/>
               <a:t>‹#›</a:t>
             </a:fld>
@@ -2171,7 +2171,7 @@
     </p:spTree>
     <p:extLst>
       <p:ext uri="{BB962C8B-B14F-4D97-AF65-F5344CB8AC3E}">
-        <p14:creationId xmlns:p14="http://schemas.microsoft.com/office/powerpoint/2010/main" val="3379437603"/>
+        <p14:creationId xmlns:p14="http://schemas.microsoft.com/office/powerpoint/2010/main" val="1999681918"/>
       </p:ext>
     </p:extLst>
   </p:cSld>
@@ -2203,7 +2203,7 @@
           <p:cNvPr id="2" name="Title 1">
             <a:extLst>
               <a:ext uri="{FF2B5EF4-FFF2-40B4-BE49-F238E27FC236}">
-                <a16:creationId xmlns:a16="http://schemas.microsoft.com/office/drawing/2014/main" id="{EC1389D2-7159-8B64-481C-FE32FB2E01BB}"/>
+                <a16:creationId xmlns:a16="http://schemas.microsoft.com/office/drawing/2014/main" id="{7F23EE73-0C43-16FA-1D49-DDB1F392A9BA}"/>
               </a:ext>
             </a:extLst>
           </p:cNvPr>
@@ -2241,7 +2241,7 @@
           <p:cNvPr id="3" name="Text Placeholder 2">
             <a:extLst>
               <a:ext uri="{FF2B5EF4-FFF2-40B4-BE49-F238E27FC236}">
-                <a16:creationId xmlns:a16="http://schemas.microsoft.com/office/drawing/2014/main" id="{9EB89A49-B4A8-DAE1-CB4C-6785BFC77083}"/>
+                <a16:creationId xmlns:a16="http://schemas.microsoft.com/office/drawing/2014/main" id="{53657038-E67F-A147-6C5B-6394E166D75C}"/>
               </a:ext>
             </a:extLst>
           </p:cNvPr>
@@ -2366,7 +2366,7 @@
           <p:cNvPr id="4" name="Date Placeholder 3">
             <a:extLst>
               <a:ext uri="{FF2B5EF4-FFF2-40B4-BE49-F238E27FC236}">
-                <a16:creationId xmlns:a16="http://schemas.microsoft.com/office/drawing/2014/main" id="{01ACA4BD-C788-CDCD-B0FC-46B44BB1A1EF}"/>
+                <a16:creationId xmlns:a16="http://schemas.microsoft.com/office/drawing/2014/main" id="{E5F8EE7C-0EDD-D017-D7AD-7F4C2053336F}"/>
               </a:ext>
             </a:extLst>
           </p:cNvPr>
@@ -2382,7 +2382,7 @@
           <a:bodyPr/>
           <a:lstStyle/>
           <a:p>
-            <a:fld id="{3D5D1A14-1EE2-4E92-B4FE-304EE26A3F66}" type="datetimeFigureOut">
+            <a:fld id="{2F8D26A6-D71B-4538-BE7E-D2A35FE8C500}" type="datetimeFigureOut">
               <a:rPr lang="en-MY" smtClean="0"/>
               <a:t>24/9/2026</a:t>
             </a:fld>
@@ -2395,7 +2395,7 @@
           <p:cNvPr id="5" name="Footer Placeholder 4">
             <a:extLst>
               <a:ext uri="{FF2B5EF4-FFF2-40B4-BE49-F238E27FC236}">
-                <a16:creationId xmlns:a16="http://schemas.microsoft.com/office/drawing/2014/main" id="{DA1AB0ED-5926-1527-43AB-BC0B4AD031EF}"/>
+                <a16:creationId xmlns:a16="http://schemas.microsoft.com/office/drawing/2014/main" id="{E1ABE3C9-6F6C-1B81-9909-8E7255E27944}"/>
               </a:ext>
             </a:extLst>
           </p:cNvPr>
@@ -2420,7 +2420,7 @@
           <p:cNvPr id="6" name="Slide Number Placeholder 5">
             <a:extLst>
               <a:ext uri="{FF2B5EF4-FFF2-40B4-BE49-F238E27FC236}">
-                <a16:creationId xmlns:a16="http://schemas.microsoft.com/office/drawing/2014/main" id="{48E7B8C3-B9DA-EF79-C678-962BA94E62D0}"/>
+                <a16:creationId xmlns:a16="http://schemas.microsoft.com/office/drawing/2014/main" id="{A391389A-F1D1-0724-EE4C-FE31D43D9E4C}"/>
               </a:ext>
             </a:extLst>
           </p:cNvPr>
@@ -2436,7 +2436,7 @@
           <a:bodyPr/>
           <a:lstStyle/>
           <a:p>
-            <a:fld id="{C3AED862-024E-41DA-81A7-2FE9CB15877D}" type="slidenum">
+            <a:fld id="{3A1571EA-3779-4ED8-A27C-B0EAA1CBA9CE}" type="slidenum">
               <a:rPr lang="en-MY" smtClean="0"/>
               <a:t>‹#›</a:t>
             </a:fld>
@@ -2447,7 +2447,7 @@
     </p:spTree>
     <p:extLst>
       <p:ext uri="{BB962C8B-B14F-4D97-AF65-F5344CB8AC3E}">
-        <p14:creationId xmlns:p14="http://schemas.microsoft.com/office/powerpoint/2010/main" val="2510010278"/>
+        <p14:creationId xmlns:p14="http://schemas.microsoft.com/office/powerpoint/2010/main" val="1275454861"/>
       </p:ext>
     </p:extLst>
   </p:cSld>
@@ -2479,7 +2479,7 @@
           <p:cNvPr id="2" name="Title 1">
             <a:extLst>
               <a:ext uri="{FF2B5EF4-FFF2-40B4-BE49-F238E27FC236}">
-                <a16:creationId xmlns:a16="http://schemas.microsoft.com/office/drawing/2014/main" id="{6148B277-0A60-4AFC-E03D-AB010A3744E7}"/>
+                <a16:creationId xmlns:a16="http://schemas.microsoft.com/office/drawing/2014/main" id="{1A4C2AC4-B386-B674-3BC1-BAE12A74AB44}"/>
               </a:ext>
             </a:extLst>
           </p:cNvPr>
@@ -2508,7 +2508,7 @@
           <p:cNvPr id="3" name="Content Placeholder 2">
             <a:extLst>
               <a:ext uri="{FF2B5EF4-FFF2-40B4-BE49-F238E27FC236}">
-                <a16:creationId xmlns:a16="http://schemas.microsoft.com/office/drawing/2014/main" id="{934994C6-648C-55E2-6154-56F17AA06544}"/>
+                <a16:creationId xmlns:a16="http://schemas.microsoft.com/office/drawing/2014/main" id="{ABADD1D7-5DFC-44EF-103E-D8C80A8F4678}"/>
               </a:ext>
             </a:extLst>
           </p:cNvPr>
@@ -2571,7 +2571,7 @@
           <p:cNvPr id="4" name="Content Placeholder 3">
             <a:extLst>
               <a:ext uri="{FF2B5EF4-FFF2-40B4-BE49-F238E27FC236}">
-                <a16:creationId xmlns:a16="http://schemas.microsoft.com/office/drawing/2014/main" id="{05E439CF-59E0-480B-6BA4-987F9B2EB3A0}"/>
+                <a16:creationId xmlns:a16="http://schemas.microsoft.com/office/drawing/2014/main" id="{80523931-5A72-EC64-1F14-1212A54BFB04}"/>
               </a:ext>
             </a:extLst>
           </p:cNvPr>
@@ -2634,7 +2634,7 @@
           <p:cNvPr id="5" name="Date Placeholder 4">
             <a:extLst>
               <a:ext uri="{FF2B5EF4-FFF2-40B4-BE49-F238E27FC236}">
-                <a16:creationId xmlns:a16="http://schemas.microsoft.com/office/drawing/2014/main" id="{40624883-3780-8FA1-436E-471BC99326B1}"/>
+                <a16:creationId xmlns:a16="http://schemas.microsoft.com/office/drawing/2014/main" id="{5317711C-1E25-1A5F-AAFD-E08D5EEC7470}"/>
               </a:ext>
             </a:extLst>
           </p:cNvPr>
@@ -2650,7 +2650,7 @@
           <a:bodyPr/>
           <a:lstStyle/>
           <a:p>
-            <a:fld id="{3D5D1A14-1EE2-4E92-B4FE-304EE26A3F66}" type="datetimeFigureOut">
+            <a:fld id="{2F8D26A6-D71B-4538-BE7E-D2A35FE8C500}" type="datetimeFigureOut">
               <a:rPr lang="en-MY" smtClean="0"/>
               <a:t>24/9/2026</a:t>
             </a:fld>
@@ -2663,7 +2663,7 @@
           <p:cNvPr id="6" name="Footer Placeholder 5">
             <a:extLst>
               <a:ext uri="{FF2B5EF4-FFF2-40B4-BE49-F238E27FC236}">
-                <a16:creationId xmlns:a16="http://schemas.microsoft.com/office/drawing/2014/main" id="{B3AFB9AE-AE95-7C7C-55A4-5533C58B3DC2}"/>
+                <a16:creationId xmlns:a16="http://schemas.microsoft.com/office/drawing/2014/main" id="{07F32876-7EFF-6C5C-8965-9CF11B136184}"/>
               </a:ext>
             </a:extLst>
           </p:cNvPr>
@@ -2688,7 +2688,7 @@
           <p:cNvPr id="7" name="Slide Number Placeholder 6">
             <a:extLst>
               <a:ext uri="{FF2B5EF4-FFF2-40B4-BE49-F238E27FC236}">
-                <a16:creationId xmlns:a16="http://schemas.microsoft.com/office/drawing/2014/main" id="{C1A8917E-35EC-FC28-F2EA-015CA6AFC4E5}"/>
+                <a16:creationId xmlns:a16="http://schemas.microsoft.com/office/drawing/2014/main" id="{ED819C50-EDA7-CD83-965F-FF59C69B4972}"/>
               </a:ext>
             </a:extLst>
           </p:cNvPr>
@@ -2704,7 +2704,7 @@
           <a:bodyPr/>
           <a:lstStyle/>
           <a:p>
-            <a:fld id="{C3AED862-024E-41DA-81A7-2FE9CB15877D}" type="slidenum">
+            <a:fld id="{3A1571EA-3779-4ED8-A27C-B0EAA1CBA9CE}" type="slidenum">
               <a:rPr lang="en-MY" smtClean="0"/>
               <a:t>‹#›</a:t>
             </a:fld>
@@ -2715,7 +2715,7 @@
     </p:spTree>
     <p:extLst>
       <p:ext uri="{BB962C8B-B14F-4D97-AF65-F5344CB8AC3E}">
-        <p14:creationId xmlns:p14="http://schemas.microsoft.com/office/powerpoint/2010/main" val="851594687"/>
+        <p14:creationId xmlns:p14="http://schemas.microsoft.com/office/powerpoint/2010/main" val="3875219953"/>
       </p:ext>
     </p:extLst>
   </p:cSld>
@@ -2747,7 +2747,7 @@
           <p:cNvPr id="2" name="Title 1">
             <a:extLst>
               <a:ext uri="{FF2B5EF4-FFF2-40B4-BE49-F238E27FC236}">
-                <a16:creationId xmlns:a16="http://schemas.microsoft.com/office/drawing/2014/main" id="{5E79C28F-B4E5-6F69-9336-C6097D1CD868}"/>
+                <a16:creationId xmlns:a16="http://schemas.microsoft.com/office/drawing/2014/main" id="{D31E9EAF-92EC-B4B3-668F-DBE0CDFD4870}"/>
               </a:ext>
             </a:extLst>
           </p:cNvPr>
@@ -2781,7 +2781,7 @@
           <p:cNvPr id="3" name="Text Placeholder 2">
             <a:extLst>
               <a:ext uri="{FF2B5EF4-FFF2-40B4-BE49-F238E27FC236}">
-                <a16:creationId xmlns:a16="http://schemas.microsoft.com/office/drawing/2014/main" id="{B292AE4C-8B70-5279-8A28-E9FF09E60A30}"/>
+                <a16:creationId xmlns:a16="http://schemas.microsoft.com/office/drawing/2014/main" id="{82E63AA3-0A68-5F62-3CB9-3FDFB00D5E24}"/>
               </a:ext>
             </a:extLst>
           </p:cNvPr>
@@ -2852,7 +2852,7 @@
           <p:cNvPr id="4" name="Content Placeholder 3">
             <a:extLst>
               <a:ext uri="{FF2B5EF4-FFF2-40B4-BE49-F238E27FC236}">
-                <a16:creationId xmlns:a16="http://schemas.microsoft.com/office/drawing/2014/main" id="{C927A1B6-9F8A-4DB9-75FD-3880219E283B}"/>
+                <a16:creationId xmlns:a16="http://schemas.microsoft.com/office/drawing/2014/main" id="{1D9C4D1E-3392-6F55-6E4C-A1EA7ABED16C}"/>
               </a:ext>
             </a:extLst>
           </p:cNvPr>
@@ -2915,7 +2915,7 @@
           <p:cNvPr id="5" name="Text Placeholder 4">
             <a:extLst>
               <a:ext uri="{FF2B5EF4-FFF2-40B4-BE49-F238E27FC236}">
-                <a16:creationId xmlns:a16="http://schemas.microsoft.com/office/drawing/2014/main" id="{8A8C7E7A-7848-DC21-4EBF-F5F499EC0718}"/>
+                <a16:creationId xmlns:a16="http://schemas.microsoft.com/office/drawing/2014/main" id="{8FC3261C-221D-9223-654F-EF428AF401AD}"/>
               </a:ext>
             </a:extLst>
           </p:cNvPr>
@@ -2986,7 +2986,7 @@
           <p:cNvPr id="6" name="Content Placeholder 5">
             <a:extLst>
               <a:ext uri="{FF2B5EF4-FFF2-40B4-BE49-F238E27FC236}">
-                <a16:creationId xmlns:a16="http://schemas.microsoft.com/office/drawing/2014/main" id="{4E753958-609A-03F0-9DA9-C1157D71D330}"/>
+                <a16:creationId xmlns:a16="http://schemas.microsoft.com/office/drawing/2014/main" id="{D6A78D58-5C7D-E701-3A5B-EDCD29D9F5BD}"/>
               </a:ext>
             </a:extLst>
           </p:cNvPr>
@@ -3049,7 +3049,7 @@
           <p:cNvPr id="7" name="Date Placeholder 6">
             <a:extLst>
               <a:ext uri="{FF2B5EF4-FFF2-40B4-BE49-F238E27FC236}">
-                <a16:creationId xmlns:a16="http://schemas.microsoft.com/office/drawing/2014/main" id="{4054395C-83BA-A86B-1673-AE3E9C48247C}"/>
+                <a16:creationId xmlns:a16="http://schemas.microsoft.com/office/drawing/2014/main" id="{22D4F4A8-AC9F-5609-1E38-4C2BBE4F9A5B}"/>
               </a:ext>
             </a:extLst>
           </p:cNvPr>
@@ -3065,7 +3065,7 @@
           <a:bodyPr/>
           <a:lstStyle/>
           <a:p>
-            <a:fld id="{3D5D1A14-1EE2-4E92-B4FE-304EE26A3F66}" type="datetimeFigureOut">
+            <a:fld id="{2F8D26A6-D71B-4538-BE7E-D2A35FE8C500}" type="datetimeFigureOut">
               <a:rPr lang="en-MY" smtClean="0"/>
               <a:t>24/9/2026</a:t>
             </a:fld>
@@ -3078,7 +3078,7 @@
           <p:cNvPr id="8" name="Footer Placeholder 7">
             <a:extLst>
               <a:ext uri="{FF2B5EF4-FFF2-40B4-BE49-F238E27FC236}">
-                <a16:creationId xmlns:a16="http://schemas.microsoft.com/office/drawing/2014/main" id="{DCC1455E-DB9A-1140-D834-191458EAD4BF}"/>
+                <a16:creationId xmlns:a16="http://schemas.microsoft.com/office/drawing/2014/main" id="{6199F672-CA61-8F20-01FF-68EE92292478}"/>
               </a:ext>
             </a:extLst>
           </p:cNvPr>
@@ -3103,7 +3103,7 @@
           <p:cNvPr id="9" name="Slide Number Placeholder 8">
             <a:extLst>
               <a:ext uri="{FF2B5EF4-FFF2-40B4-BE49-F238E27FC236}">
-                <a16:creationId xmlns:a16="http://schemas.microsoft.com/office/drawing/2014/main" id="{D597D2FE-CDD9-7C1D-16D6-9B402C74E58A}"/>
+                <a16:creationId xmlns:a16="http://schemas.microsoft.com/office/drawing/2014/main" id="{CC789F15-7F6E-16B5-43D3-2D679A9FE041}"/>
               </a:ext>
             </a:extLst>
           </p:cNvPr>
@@ -3119,7 +3119,7 @@
           <a:bodyPr/>
           <a:lstStyle/>
           <a:p>
-            <a:fld id="{C3AED862-024E-41DA-81A7-2FE9CB15877D}" type="slidenum">
+            <a:fld id="{3A1571EA-3779-4ED8-A27C-B0EAA1CBA9CE}" type="slidenum">
               <a:rPr lang="en-MY" smtClean="0"/>
               <a:t>‹#›</a:t>
             </a:fld>
@@ -3130,7 +3130,7 @@
     </p:spTree>
     <p:extLst>
       <p:ext uri="{BB962C8B-B14F-4D97-AF65-F5344CB8AC3E}">
-        <p14:creationId xmlns:p14="http://schemas.microsoft.com/office/powerpoint/2010/main" val="4217287487"/>
+        <p14:creationId xmlns:p14="http://schemas.microsoft.com/office/powerpoint/2010/main" val="3818558036"/>
       </p:ext>
     </p:extLst>
   </p:cSld>
@@ -3162,7 +3162,7 @@
           <p:cNvPr id="2" name="Title 1">
             <a:extLst>
               <a:ext uri="{FF2B5EF4-FFF2-40B4-BE49-F238E27FC236}">
-                <a16:creationId xmlns:a16="http://schemas.microsoft.com/office/drawing/2014/main" id="{15C0CA4C-883F-277E-284F-8F4E81E14795}"/>
+                <a16:creationId xmlns:a16="http://schemas.microsoft.com/office/drawing/2014/main" id="{8912A4DF-AC8D-B685-35A5-2725D019BC88}"/>
               </a:ext>
             </a:extLst>
           </p:cNvPr>
@@ -3191,7 +3191,7 @@
           <p:cNvPr id="3" name="Date Placeholder 2">
             <a:extLst>
               <a:ext uri="{FF2B5EF4-FFF2-40B4-BE49-F238E27FC236}">
-                <a16:creationId xmlns:a16="http://schemas.microsoft.com/office/drawing/2014/main" id="{3E1EE01D-918D-CE52-938A-A56DD06DAE98}"/>
+                <a16:creationId xmlns:a16="http://schemas.microsoft.com/office/drawing/2014/main" id="{0308B965-5D73-14E2-E2D8-6A6F0A5E4539}"/>
               </a:ext>
             </a:extLst>
           </p:cNvPr>
@@ -3207,7 +3207,7 @@
           <a:bodyPr/>
           <a:lstStyle/>
           <a:p>
-            <a:fld id="{3D5D1A14-1EE2-4E92-B4FE-304EE26A3F66}" type="datetimeFigureOut">
+            <a:fld id="{2F8D26A6-D71B-4538-BE7E-D2A35FE8C500}" type="datetimeFigureOut">
               <a:rPr lang="en-MY" smtClean="0"/>
               <a:t>24/9/2026</a:t>
             </a:fld>
@@ -3220,7 +3220,7 @@
           <p:cNvPr id="4" name="Footer Placeholder 3">
             <a:extLst>
               <a:ext uri="{FF2B5EF4-FFF2-40B4-BE49-F238E27FC236}">
-                <a16:creationId xmlns:a16="http://schemas.microsoft.com/office/drawing/2014/main" id="{F28E0214-6409-A0D2-9AD3-801ADBDF6A5D}"/>
+                <a16:creationId xmlns:a16="http://schemas.microsoft.com/office/drawing/2014/main" id="{F6B60080-C673-1CDC-B779-B964784BE37C}"/>
               </a:ext>
             </a:extLst>
           </p:cNvPr>
@@ -3245,7 +3245,7 @@
           <p:cNvPr id="5" name="Slide Number Placeholder 4">
             <a:extLst>
               <a:ext uri="{FF2B5EF4-FFF2-40B4-BE49-F238E27FC236}">
-                <a16:creationId xmlns:a16="http://schemas.microsoft.com/office/drawing/2014/main" id="{F3CAA409-8D5A-CDB7-847C-91552B4C0489}"/>
+                <a16:creationId xmlns:a16="http://schemas.microsoft.com/office/drawing/2014/main" id="{5D656AF1-B230-2462-582E-2FBF5CE9F297}"/>
               </a:ext>
             </a:extLst>
           </p:cNvPr>
@@ -3261,7 +3261,7 @@
           <a:bodyPr/>
           <a:lstStyle/>
           <a:p>
-            <a:fld id="{C3AED862-024E-41DA-81A7-2FE9CB15877D}" type="slidenum">
+            <a:fld id="{3A1571EA-3779-4ED8-A27C-B0EAA1CBA9CE}" type="slidenum">
               <a:rPr lang="en-MY" smtClean="0"/>
               <a:t>‹#›</a:t>
             </a:fld>
@@ -3272,7 +3272,7 @@
     </p:spTree>
     <p:extLst>
       <p:ext uri="{BB962C8B-B14F-4D97-AF65-F5344CB8AC3E}">
-        <p14:creationId xmlns:p14="http://schemas.microsoft.com/office/powerpoint/2010/main" val="3153302154"/>
+        <p14:creationId xmlns:p14="http://schemas.microsoft.com/office/powerpoint/2010/main" val="1715134392"/>
       </p:ext>
     </p:extLst>
   </p:cSld>
@@ -3304,7 +3304,7 @@
           <p:cNvPr id="2" name="Date Placeholder 1">
             <a:extLst>
               <a:ext uri="{FF2B5EF4-FFF2-40B4-BE49-F238E27FC236}">
-                <a16:creationId xmlns:a16="http://schemas.microsoft.com/office/drawing/2014/main" id="{3A3E2CCB-3D1D-9CA2-70D0-AF69EBA56F5E}"/>
+                <a16:creationId xmlns:a16="http://schemas.microsoft.com/office/drawing/2014/main" id="{0B4F3FEB-F1B2-B4A5-5F8A-8979177BEE73}"/>
               </a:ext>
             </a:extLst>
           </p:cNvPr>
@@ -3320,7 +3320,7 @@
           <a:bodyPr/>
           <a:lstStyle/>
           <a:p>
-            <a:fld id="{3D5D1A14-1EE2-4E92-B4FE-304EE26A3F66}" type="datetimeFigureOut">
+            <a:fld id="{2F8D26A6-D71B-4538-BE7E-D2A35FE8C500}" type="datetimeFigureOut">
               <a:rPr lang="en-MY" smtClean="0"/>
               <a:t>24/9/2026</a:t>
             </a:fld>
@@ -3333,7 +3333,7 @@
           <p:cNvPr id="3" name="Footer Placeholder 2">
             <a:extLst>
               <a:ext uri="{FF2B5EF4-FFF2-40B4-BE49-F238E27FC236}">
-                <a16:creationId xmlns:a16="http://schemas.microsoft.com/office/drawing/2014/main" id="{72F25564-5996-02D3-92CC-A0E6EB2D938C}"/>
+                <a16:creationId xmlns:a16="http://schemas.microsoft.com/office/drawing/2014/main" id="{84115850-7D30-F05E-4F34-BB3B79145506}"/>
               </a:ext>
             </a:extLst>
           </p:cNvPr>
@@ -3358,7 +3358,7 @@
           <p:cNvPr id="4" name="Slide Number Placeholder 3">
             <a:extLst>
               <a:ext uri="{FF2B5EF4-FFF2-40B4-BE49-F238E27FC236}">
-                <a16:creationId xmlns:a16="http://schemas.microsoft.com/office/drawing/2014/main" id="{D20D788C-66E0-E830-2975-D1062BAFB47B}"/>
+                <a16:creationId xmlns:a16="http://schemas.microsoft.com/office/drawing/2014/main" id="{0C6DBCCA-1AF8-A7F4-33DA-6354CA81E505}"/>
               </a:ext>
             </a:extLst>
           </p:cNvPr>
@@ -3374,7 +3374,7 @@
           <a:bodyPr/>
           <a:lstStyle/>
           <a:p>
-            <a:fld id="{C3AED862-024E-41DA-81A7-2FE9CB15877D}" type="slidenum">
+            <a:fld id="{3A1571EA-3779-4ED8-A27C-B0EAA1CBA9CE}" type="slidenum">
               <a:rPr lang="en-MY" smtClean="0"/>
               <a:t>‹#›</a:t>
             </a:fld>
@@ -3385,7 +3385,7 @@
     </p:spTree>
     <p:extLst>
       <p:ext uri="{BB962C8B-B14F-4D97-AF65-F5344CB8AC3E}">
-        <p14:creationId xmlns:p14="http://schemas.microsoft.com/office/powerpoint/2010/main" val="3802334596"/>
+        <p14:creationId xmlns:p14="http://schemas.microsoft.com/office/powerpoint/2010/main" val="1658236945"/>
       </p:ext>
     </p:extLst>
   </p:cSld>
@@ -3417,7 +3417,7 @@
           <p:cNvPr id="2" name="Title 1">
             <a:extLst>
               <a:ext uri="{FF2B5EF4-FFF2-40B4-BE49-F238E27FC236}">
-                <a16:creationId xmlns:a16="http://schemas.microsoft.com/office/drawing/2014/main" id="{9CF7EF69-F69E-D828-B2D5-2DC1F5DCEE9B}"/>
+                <a16:creationId xmlns:a16="http://schemas.microsoft.com/office/drawing/2014/main" id="{105FD0A8-4BDE-DB82-89F2-817042BB153C}"/>
               </a:ext>
             </a:extLst>
           </p:cNvPr>
@@ -3455,7 +3455,7 @@
           <p:cNvPr id="3" name="Content Placeholder 2">
             <a:extLst>
               <a:ext uri="{FF2B5EF4-FFF2-40B4-BE49-F238E27FC236}">
-                <a16:creationId xmlns:a16="http://schemas.microsoft.com/office/drawing/2014/main" id="{BB207C3C-08CD-655E-D35C-C9E820F780F1}"/>
+                <a16:creationId xmlns:a16="http://schemas.microsoft.com/office/drawing/2014/main" id="{2B1780A2-D2F0-73DA-7259-4B91C4DEDE6E}"/>
               </a:ext>
             </a:extLst>
           </p:cNvPr>
@@ -3546,7 +3546,7 @@
           <p:cNvPr id="4" name="Text Placeholder 3">
             <a:extLst>
               <a:ext uri="{FF2B5EF4-FFF2-40B4-BE49-F238E27FC236}">
-                <a16:creationId xmlns:a16="http://schemas.microsoft.com/office/drawing/2014/main" id="{2B425ADC-B3CE-B77E-592D-E9B0E3E1C120}"/>
+                <a16:creationId xmlns:a16="http://schemas.microsoft.com/office/drawing/2014/main" id="{3AA70730-9B95-696E-38C0-7B1F8D460B00}"/>
               </a:ext>
             </a:extLst>
           </p:cNvPr>
@@ -3617,7 +3617,7 @@
           <p:cNvPr id="5" name="Date Placeholder 4">
             <a:extLst>
               <a:ext uri="{FF2B5EF4-FFF2-40B4-BE49-F238E27FC236}">
-                <a16:creationId xmlns:a16="http://schemas.microsoft.com/office/drawing/2014/main" id="{F7B4B95D-F608-67B5-13E3-1C9DF757A47A}"/>
+                <a16:creationId xmlns:a16="http://schemas.microsoft.com/office/drawing/2014/main" id="{745A39B1-B87C-A9C9-6CD4-B33A0EF05004}"/>
               </a:ext>
             </a:extLst>
           </p:cNvPr>
@@ -3633,7 +3633,7 @@
           <a:bodyPr/>
           <a:lstStyle/>
           <a:p>
-            <a:fld id="{3D5D1A14-1EE2-4E92-B4FE-304EE26A3F66}" type="datetimeFigureOut">
+            <a:fld id="{2F8D26A6-D71B-4538-BE7E-D2A35FE8C500}" type="datetimeFigureOut">
               <a:rPr lang="en-MY" smtClean="0"/>
               <a:t>24/9/2026</a:t>
             </a:fld>
@@ -3646,7 +3646,7 @@
           <p:cNvPr id="6" name="Footer Placeholder 5">
             <a:extLst>
               <a:ext uri="{FF2B5EF4-FFF2-40B4-BE49-F238E27FC236}">
-                <a16:creationId xmlns:a16="http://schemas.microsoft.com/office/drawing/2014/main" id="{31457E1C-9549-3059-0462-D869E83EBE0E}"/>
+                <a16:creationId xmlns:a16="http://schemas.microsoft.com/office/drawing/2014/main" id="{5261FCB0-ACD3-26A1-9312-3FCB1B237BDD}"/>
               </a:ext>
             </a:extLst>
           </p:cNvPr>
@@ -3671,7 +3671,7 @@
           <p:cNvPr id="7" name="Slide Number Placeholder 6">
             <a:extLst>
               <a:ext uri="{FF2B5EF4-FFF2-40B4-BE49-F238E27FC236}">
-                <a16:creationId xmlns:a16="http://schemas.microsoft.com/office/drawing/2014/main" id="{C32AD905-583D-C576-E177-86FBA1CBE35A}"/>
+                <a16:creationId xmlns:a16="http://schemas.microsoft.com/office/drawing/2014/main" id="{41D74D84-18C2-AB84-50D5-7F1E02D55B81}"/>
               </a:ext>
             </a:extLst>
           </p:cNvPr>
@@ -3687,7 +3687,7 @@
           <a:bodyPr/>
           <a:lstStyle/>
           <a:p>
-            <a:fld id="{C3AED862-024E-41DA-81A7-2FE9CB15877D}" type="slidenum">
+            <a:fld id="{3A1571EA-3779-4ED8-A27C-B0EAA1CBA9CE}" type="slidenum">
               <a:rPr lang="en-MY" smtClean="0"/>
               <a:t>‹#›</a:t>
             </a:fld>
@@ -3698,7 +3698,7 @@
     </p:spTree>
     <p:extLst>
       <p:ext uri="{BB962C8B-B14F-4D97-AF65-F5344CB8AC3E}">
-        <p14:creationId xmlns:p14="http://schemas.microsoft.com/office/powerpoint/2010/main" val="1965467850"/>
+        <p14:creationId xmlns:p14="http://schemas.microsoft.com/office/powerpoint/2010/main" val="1906720132"/>
       </p:ext>
     </p:extLst>
   </p:cSld>
@@ -3730,7 +3730,7 @@
           <p:cNvPr id="2" name="Title 1">
             <a:extLst>
               <a:ext uri="{FF2B5EF4-FFF2-40B4-BE49-F238E27FC236}">
-                <a16:creationId xmlns:a16="http://schemas.microsoft.com/office/drawing/2014/main" id="{F7CAB5D8-4EEA-B1D9-1F35-413CE0FDC408}"/>
+                <a16:creationId xmlns:a16="http://schemas.microsoft.com/office/drawing/2014/main" id="{49CE2EAB-8EB8-5809-B09E-C5A0A68D27F3}"/>
               </a:ext>
             </a:extLst>
           </p:cNvPr>
@@ -3768,7 +3768,7 @@
           <p:cNvPr id="3" name="Picture Placeholder 2">
             <a:extLst>
               <a:ext uri="{FF2B5EF4-FFF2-40B4-BE49-F238E27FC236}">
-                <a16:creationId xmlns:a16="http://schemas.microsoft.com/office/drawing/2014/main" id="{3E80417E-CFFD-D8A8-EB78-EE9D0E7F930D}"/>
+                <a16:creationId xmlns:a16="http://schemas.microsoft.com/office/drawing/2014/main" id="{3B8E499D-8849-39FF-0382-9CFF05A0719C}"/>
               </a:ext>
             </a:extLst>
           </p:cNvPr>
@@ -3835,7 +3835,7 @@
           <p:cNvPr id="4" name="Text Placeholder 3">
             <a:extLst>
               <a:ext uri="{FF2B5EF4-FFF2-40B4-BE49-F238E27FC236}">
-                <a16:creationId xmlns:a16="http://schemas.microsoft.com/office/drawing/2014/main" id="{5190F6CA-C0CF-0876-37DD-DF5FF4366E41}"/>
+                <a16:creationId xmlns:a16="http://schemas.microsoft.com/office/drawing/2014/main" id="{1E4AE888-E2D5-CA38-BA31-6F24910AD44D}"/>
               </a:ext>
             </a:extLst>
           </p:cNvPr>
@@ -3906,7 +3906,7 @@
           <p:cNvPr id="5" name="Date Placeholder 4">
             <a:extLst>
               <a:ext uri="{FF2B5EF4-FFF2-40B4-BE49-F238E27FC236}">
-                <a16:creationId xmlns:a16="http://schemas.microsoft.com/office/drawing/2014/main" id="{ABAF9F37-027E-FEDD-36F2-D7784B1AA8E3}"/>
+                <a16:creationId xmlns:a16="http://schemas.microsoft.com/office/drawing/2014/main" id="{D62CCA2A-DD7C-0253-3FF5-7DEDD211D120}"/>
               </a:ext>
             </a:extLst>
           </p:cNvPr>
@@ -3922,7 +3922,7 @@
           <a:bodyPr/>
           <a:lstStyle/>
           <a:p>
-            <a:fld id="{3D5D1A14-1EE2-4E92-B4FE-304EE26A3F66}" type="datetimeFigureOut">
+            <a:fld id="{2F8D26A6-D71B-4538-BE7E-D2A35FE8C500}" type="datetimeFigureOut">
               <a:rPr lang="en-MY" smtClean="0"/>
               <a:t>24/9/2026</a:t>
             </a:fld>
@@ -3935,7 +3935,7 @@
           <p:cNvPr id="6" name="Footer Placeholder 5">
             <a:extLst>
               <a:ext uri="{FF2B5EF4-FFF2-40B4-BE49-F238E27FC236}">
-                <a16:creationId xmlns:a16="http://schemas.microsoft.com/office/drawing/2014/main" id="{AA12D354-0205-80BA-0D5D-339CA2E1A1BC}"/>
+                <a16:creationId xmlns:a16="http://schemas.microsoft.com/office/drawing/2014/main" id="{5B00417B-837E-4429-405B-2209D41A0354}"/>
               </a:ext>
             </a:extLst>
           </p:cNvPr>
@@ -3960,7 +3960,7 @@
           <p:cNvPr id="7" name="Slide Number Placeholder 6">
             <a:extLst>
               <a:ext uri="{FF2B5EF4-FFF2-40B4-BE49-F238E27FC236}">
-                <a16:creationId xmlns:a16="http://schemas.microsoft.com/office/drawing/2014/main" id="{EBFCCE91-7461-D7E8-3D36-BCE46ACD3B7E}"/>
+                <a16:creationId xmlns:a16="http://schemas.microsoft.com/office/drawing/2014/main" id="{DE762FA2-6CE3-E274-4B6C-2EDA6EE660C6}"/>
               </a:ext>
             </a:extLst>
           </p:cNvPr>
@@ -3976,7 +3976,7 @@
           <a:bodyPr/>
           <a:lstStyle/>
           <a:p>
-            <a:fld id="{C3AED862-024E-41DA-81A7-2FE9CB15877D}" type="slidenum">
+            <a:fld id="{3A1571EA-3779-4ED8-A27C-B0EAA1CBA9CE}" type="slidenum">
               <a:rPr lang="en-MY" smtClean="0"/>
               <a:t>‹#›</a:t>
             </a:fld>
@@ -3987,7 +3987,7 @@
     </p:spTree>
     <p:extLst>
       <p:ext uri="{BB962C8B-B14F-4D97-AF65-F5344CB8AC3E}">
-        <p14:creationId xmlns:p14="http://schemas.microsoft.com/office/powerpoint/2010/main" val="2775128465"/>
+        <p14:creationId xmlns:p14="http://schemas.microsoft.com/office/powerpoint/2010/main" val="881667646"/>
       </p:ext>
     </p:extLst>
   </p:cSld>
@@ -4024,7 +4024,7 @@
           <p:cNvPr id="2" name="Title Placeholder 1">
             <a:extLst>
               <a:ext uri="{FF2B5EF4-FFF2-40B4-BE49-F238E27FC236}">
-                <a16:creationId xmlns:a16="http://schemas.microsoft.com/office/drawing/2014/main" id="{CA983453-8157-7340-CDD7-6E9AC931A24E}"/>
+                <a16:creationId xmlns:a16="http://schemas.microsoft.com/office/drawing/2014/main" id="{0A23BD1A-37C8-8331-A9AB-6E2AB9766420}"/>
               </a:ext>
             </a:extLst>
           </p:cNvPr>
@@ -4063,7 +4063,7 @@
           <p:cNvPr id="3" name="Text Placeholder 2">
             <a:extLst>
               <a:ext uri="{FF2B5EF4-FFF2-40B4-BE49-F238E27FC236}">
-                <a16:creationId xmlns:a16="http://schemas.microsoft.com/office/drawing/2014/main" id="{ABF5C709-878F-67DF-5C30-62B0CE10E4DB}"/>
+                <a16:creationId xmlns:a16="http://schemas.microsoft.com/office/drawing/2014/main" id="{8AA7ACD9-0A91-47F1-6E7F-668571C3E313}"/>
               </a:ext>
             </a:extLst>
           </p:cNvPr>
@@ -4131,7 +4131,7 @@
           <p:cNvPr id="4" name="Date Placeholder 3">
             <a:extLst>
               <a:ext uri="{FF2B5EF4-FFF2-40B4-BE49-F238E27FC236}">
-                <a16:creationId xmlns:a16="http://schemas.microsoft.com/office/drawing/2014/main" id="{1E305A2C-8322-28AC-EE8D-A98846DD042F}"/>
+                <a16:creationId xmlns:a16="http://schemas.microsoft.com/office/drawing/2014/main" id="{DD49AE63-1565-10AC-91FF-007FC2788FF4}"/>
               </a:ext>
             </a:extLst>
           </p:cNvPr>
@@ -4165,7 +4165,7 @@
             </a:lvl1pPr>
           </a:lstStyle>
           <a:p>
-            <a:fld id="{3D5D1A14-1EE2-4E92-B4FE-304EE26A3F66}" type="datetimeFigureOut">
+            <a:fld id="{2F8D26A6-D71B-4538-BE7E-D2A35FE8C500}" type="datetimeFigureOut">
               <a:rPr lang="en-MY" smtClean="0"/>
               <a:t>24/9/2026</a:t>
             </a:fld>
@@ -4178,7 +4178,7 @@
           <p:cNvPr id="5" name="Footer Placeholder 4">
             <a:extLst>
               <a:ext uri="{FF2B5EF4-FFF2-40B4-BE49-F238E27FC236}">
-                <a16:creationId xmlns:a16="http://schemas.microsoft.com/office/drawing/2014/main" id="{9DCBC6F9-5738-1F38-EFF1-772176B6B70C}"/>
+                <a16:creationId xmlns:a16="http://schemas.microsoft.com/office/drawing/2014/main" id="{B5A60928-FB6D-3A7F-D452-5ACB74753CD7}"/>
               </a:ext>
             </a:extLst>
           </p:cNvPr>
@@ -4221,7 +4221,7 @@
           <p:cNvPr id="6" name="Slide Number Placeholder 5">
             <a:extLst>
               <a:ext uri="{FF2B5EF4-FFF2-40B4-BE49-F238E27FC236}">
-                <a16:creationId xmlns:a16="http://schemas.microsoft.com/office/drawing/2014/main" id="{20761C6B-E757-3F1E-F75F-D0A75ACCA995}"/>
+                <a16:creationId xmlns:a16="http://schemas.microsoft.com/office/drawing/2014/main" id="{E0BBF07E-1364-8772-1087-DA776997BEC5}"/>
               </a:ext>
             </a:extLst>
           </p:cNvPr>
@@ -4255,7 +4255,7 @@
             </a:lvl1pPr>
           </a:lstStyle>
           <a:p>
-            <a:fld id="{C3AED862-024E-41DA-81A7-2FE9CB15877D}" type="slidenum">
+            <a:fld id="{3A1571EA-3779-4ED8-A27C-B0EAA1CBA9CE}" type="slidenum">
               <a:rPr lang="en-MY" smtClean="0"/>
               <a:t>‹#›</a:t>
             </a:fld>
@@ -4266,7 +4266,7 @@
     </p:spTree>
     <p:extLst>
       <p:ext uri="{BB962C8B-B14F-4D97-AF65-F5344CB8AC3E}">
-        <p14:creationId xmlns:p14="http://schemas.microsoft.com/office/powerpoint/2010/main" val="1674910211"/>
+        <p14:creationId xmlns:p14="http://schemas.microsoft.com/office/powerpoint/2010/main" val="1452899008"/>
       </p:ext>
     </p:extLst>
   </p:cSld>
@@ -4597,7 +4597,7 @@
           <p:cNvPr id="2" name="TextBox 1">
             <a:extLst>
               <a:ext uri="{FF2B5EF4-FFF2-40B4-BE49-F238E27FC236}">
-                <a16:creationId xmlns:a16="http://schemas.microsoft.com/office/drawing/2014/main" id="{47E3DE10-207D-09B2-FACF-0DC8721DF6B3}"/>
+                <a16:creationId xmlns:a16="http://schemas.microsoft.com/office/drawing/2014/main" id="{04688185-681C-B34E-810A-0A8877458AB1}"/>
               </a:ext>
             </a:extLst>
           </p:cNvPr>
@@ -4637,7 +4637,7 @@
           <p:cNvPr id="3" name="TextBox 2">
             <a:extLst>
               <a:ext uri="{FF2B5EF4-FFF2-40B4-BE49-F238E27FC236}">
-                <a16:creationId xmlns:a16="http://schemas.microsoft.com/office/drawing/2014/main" id="{52D8CF0F-60E7-5C52-3E73-7B2FA19BF283}"/>
+                <a16:creationId xmlns:a16="http://schemas.microsoft.com/office/drawing/2014/main" id="{51568EAB-E7D6-8521-1BE2-FA84676E2452}"/>
               </a:ext>
             </a:extLst>
           </p:cNvPr>
@@ -4683,7 +4683,7 @@
           <p:cNvPr id="4" name="TextBox 3">
             <a:extLst>
               <a:ext uri="{FF2B5EF4-FFF2-40B4-BE49-F238E27FC236}">
-                <a16:creationId xmlns:a16="http://schemas.microsoft.com/office/drawing/2014/main" id="{A8FFCEDB-EDA9-9918-79AF-708BC8909F20}"/>
+                <a16:creationId xmlns:a16="http://schemas.microsoft.com/office/drawing/2014/main" id="{1F2D47D5-2481-95B1-4CC3-8CD19FCA3166}"/>
               </a:ext>
             </a:extLst>
           </p:cNvPr>
@@ -4729,7 +4729,7 @@
           <p:cNvPr id="5" name="TextBox 4">
             <a:extLst>
               <a:ext uri="{FF2B5EF4-FFF2-40B4-BE49-F238E27FC236}">
-                <a16:creationId xmlns:a16="http://schemas.microsoft.com/office/drawing/2014/main" id="{BC6BAB37-9222-47A5-5164-DF507D1A40D2}"/>
+                <a16:creationId xmlns:a16="http://schemas.microsoft.com/office/drawing/2014/main" id="{1B0FD74F-7A65-AF98-B07E-04AB0F9AFF3C}"/>
               </a:ext>
             </a:extLst>
           </p:cNvPr>
@@ -4775,7 +4775,7 @@
           <p:cNvPr id="6" name="TextBox 5">
             <a:extLst>
               <a:ext uri="{FF2B5EF4-FFF2-40B4-BE49-F238E27FC236}">
-                <a16:creationId xmlns:a16="http://schemas.microsoft.com/office/drawing/2014/main" id="{99C6E92A-1BF1-C622-871C-A2CA6B2F993F}"/>
+                <a16:creationId xmlns:a16="http://schemas.microsoft.com/office/drawing/2014/main" id="{C7D69BDF-93F1-2297-291F-21D4BAA5099E}"/>
               </a:ext>
             </a:extLst>
           </p:cNvPr>
@@ -4815,7 +4815,7 @@
           <p:cNvPr id="7" name="TextBox 6">
             <a:extLst>
               <a:ext uri="{FF2B5EF4-FFF2-40B4-BE49-F238E27FC236}">
-                <a16:creationId xmlns:a16="http://schemas.microsoft.com/office/drawing/2014/main" id="{E2FE2169-1C15-A37D-DD6E-32937C516D6C}"/>
+                <a16:creationId xmlns:a16="http://schemas.microsoft.com/office/drawing/2014/main" id="{982AF74C-62FF-3ADC-854D-55A7B87A5293}"/>
               </a:ext>
             </a:extLst>
           </p:cNvPr>
@@ -4860,7 +4860,7 @@
     </p:spTree>
     <p:extLst>
       <p:ext uri="{BB962C8B-B14F-4D97-AF65-F5344CB8AC3E}">
-        <p14:creationId xmlns:p14="http://schemas.microsoft.com/office/powerpoint/2010/main" val="138250535"/>
+        <p14:creationId xmlns:p14="http://schemas.microsoft.com/office/powerpoint/2010/main" val="2007751059"/>
       </p:ext>
     </p:extLst>
   </p:cSld>
@@ -4900,7 +4900,7 @@
           <p:cNvPr id="2" name="TextBox 1">
             <a:extLst>
               <a:ext uri="{FF2B5EF4-FFF2-40B4-BE49-F238E27FC236}">
-                <a16:creationId xmlns:a16="http://schemas.microsoft.com/office/drawing/2014/main" id="{7A608786-5998-A83A-AC45-9F128E268305}"/>
+                <a16:creationId xmlns:a16="http://schemas.microsoft.com/office/drawing/2014/main" id="{85225ABB-F83B-7C1B-9319-97F9C972F146}"/>
               </a:ext>
             </a:extLst>
           </p:cNvPr>
@@ -4947,7 +4947,7 @@
           <p:cNvPr id="3" name="TextBox 2">
             <a:extLst>
               <a:ext uri="{FF2B5EF4-FFF2-40B4-BE49-F238E27FC236}">
-                <a16:creationId xmlns:a16="http://schemas.microsoft.com/office/drawing/2014/main" id="{0BA21938-34D9-F132-4809-C0B83E3DC61F}"/>
+                <a16:creationId xmlns:a16="http://schemas.microsoft.com/office/drawing/2014/main" id="{AB59134A-766F-CC39-5370-E1D4761D6BE5}"/>
               </a:ext>
             </a:extLst>
           </p:cNvPr>
@@ -4988,7 +4988,7 @@
           <p:cNvPr id="4" name="TextBox 3">
             <a:extLst>
               <a:ext uri="{FF2B5EF4-FFF2-40B4-BE49-F238E27FC236}">
-                <a16:creationId xmlns:a16="http://schemas.microsoft.com/office/drawing/2014/main" id="{6B3AE39B-DDEB-3D32-C05C-58E295E7A705}"/>
+                <a16:creationId xmlns:a16="http://schemas.microsoft.com/office/drawing/2014/main" id="{202F9563-F324-610B-1360-28668B9BE730}"/>
               </a:ext>
             </a:extLst>
           </p:cNvPr>
@@ -5027,7 +5027,7 @@
     </p:spTree>
     <p:extLst>
       <p:ext uri="{BB962C8B-B14F-4D97-AF65-F5344CB8AC3E}">
-        <p14:creationId xmlns:p14="http://schemas.microsoft.com/office/powerpoint/2010/main" val="1364286150"/>
+        <p14:creationId xmlns:p14="http://schemas.microsoft.com/office/powerpoint/2010/main" val="2554288377"/>
       </p:ext>
     </p:extLst>
   </p:cSld>
@@ -5067,7 +5067,7 @@
           <p:cNvPr id="2" name="TextBox 1">
             <a:extLst>
               <a:ext uri="{FF2B5EF4-FFF2-40B4-BE49-F238E27FC236}">
-                <a16:creationId xmlns:a16="http://schemas.microsoft.com/office/drawing/2014/main" id="{B7F64AF6-07F3-7C85-B416-5656605CD3B7}"/>
+                <a16:creationId xmlns:a16="http://schemas.microsoft.com/office/drawing/2014/main" id="{155ED394-EAE2-B73B-E5FF-50C696B3B0A4}"/>
               </a:ext>
             </a:extLst>
           </p:cNvPr>
@@ -5113,7 +5113,7 @@
           <p:cNvPr id="3" name="Rectangle: Rounded Corners 2">
             <a:extLst>
               <a:ext uri="{FF2B5EF4-FFF2-40B4-BE49-F238E27FC236}">
-                <a16:creationId xmlns:a16="http://schemas.microsoft.com/office/drawing/2014/main" id="{336B3AC9-CD63-45EE-4BDD-F6FA8337680C}"/>
+                <a16:creationId xmlns:a16="http://schemas.microsoft.com/office/drawing/2014/main" id="{9BF4ABDB-995D-31DE-3B13-3789C1A37E78}"/>
               </a:ext>
             </a:extLst>
           </p:cNvPr>
@@ -5183,7 +5183,7 @@
           <p:cNvPr id="4" name="Oval 3">
             <a:extLst>
               <a:ext uri="{FF2B5EF4-FFF2-40B4-BE49-F238E27FC236}">
-                <a16:creationId xmlns:a16="http://schemas.microsoft.com/office/drawing/2014/main" id="{90756D41-49FF-46B4-DE82-7F6B1A84ED0D}"/>
+                <a16:creationId xmlns:a16="http://schemas.microsoft.com/office/drawing/2014/main" id="{8EE34568-2BEF-B4DC-3EB5-8D8F0F0D075D}"/>
               </a:ext>
             </a:extLst>
           </p:cNvPr>
@@ -5259,7 +5259,7 @@
           <p:cNvPr id="5" name="TextBox 4">
             <a:extLst>
               <a:ext uri="{FF2B5EF4-FFF2-40B4-BE49-F238E27FC236}">
-                <a16:creationId xmlns:a16="http://schemas.microsoft.com/office/drawing/2014/main" id="{D6E3F0A2-903F-31E0-D7C7-BD00C4460004}"/>
+                <a16:creationId xmlns:a16="http://schemas.microsoft.com/office/drawing/2014/main" id="{FEAA5F87-A9CD-DB72-D6C4-CD93FEAB0FFA}"/>
               </a:ext>
             </a:extLst>
           </p:cNvPr>
@@ -5299,7 +5299,7 @@
           <p:cNvPr id="6" name="TextBox 5">
             <a:extLst>
               <a:ext uri="{FF2B5EF4-FFF2-40B4-BE49-F238E27FC236}">
-                <a16:creationId xmlns:a16="http://schemas.microsoft.com/office/drawing/2014/main" id="{62628E8D-5693-2491-67A0-3D4CA9A6F644}"/>
+                <a16:creationId xmlns:a16="http://schemas.microsoft.com/office/drawing/2014/main" id="{F78D9F93-08F4-D9AD-0D58-ED7D621A6459}"/>
               </a:ext>
             </a:extLst>
           </p:cNvPr>
@@ -5339,7 +5339,7 @@
           <p:cNvPr id="7" name="Rectangle: Rounded Corners 6">
             <a:extLst>
               <a:ext uri="{FF2B5EF4-FFF2-40B4-BE49-F238E27FC236}">
-                <a16:creationId xmlns:a16="http://schemas.microsoft.com/office/drawing/2014/main" id="{1C8C4BFA-8786-85BD-CDA5-7D0E6EB7B5A7}"/>
+                <a16:creationId xmlns:a16="http://schemas.microsoft.com/office/drawing/2014/main" id="{01D93166-7B04-76BB-ECA4-ADEA8F4340DE}"/>
               </a:ext>
             </a:extLst>
           </p:cNvPr>
@@ -5409,7 +5409,7 @@
           <p:cNvPr id="8" name="Oval 7">
             <a:extLst>
               <a:ext uri="{FF2B5EF4-FFF2-40B4-BE49-F238E27FC236}">
-                <a16:creationId xmlns:a16="http://schemas.microsoft.com/office/drawing/2014/main" id="{984530E5-58B9-FEF1-D76C-EF640074D865}"/>
+                <a16:creationId xmlns:a16="http://schemas.microsoft.com/office/drawing/2014/main" id="{B3BFCEDA-DEA8-2BDE-BD18-56DAD6F4DEF7}"/>
               </a:ext>
             </a:extLst>
           </p:cNvPr>
@@ -5485,7 +5485,7 @@
           <p:cNvPr id="9" name="TextBox 8">
             <a:extLst>
               <a:ext uri="{FF2B5EF4-FFF2-40B4-BE49-F238E27FC236}">
-                <a16:creationId xmlns:a16="http://schemas.microsoft.com/office/drawing/2014/main" id="{C66C2B9A-8D14-A9E5-28B9-12B09D987B38}"/>
+                <a16:creationId xmlns:a16="http://schemas.microsoft.com/office/drawing/2014/main" id="{FC4CC75F-136A-8DFB-2878-3C10E175A096}"/>
               </a:ext>
             </a:extLst>
           </p:cNvPr>
@@ -5525,7 +5525,7 @@
           <p:cNvPr id="10" name="TextBox 9">
             <a:extLst>
               <a:ext uri="{FF2B5EF4-FFF2-40B4-BE49-F238E27FC236}">
-                <a16:creationId xmlns:a16="http://schemas.microsoft.com/office/drawing/2014/main" id="{09E11D71-2D30-9789-1C54-6A0182278A0D}"/>
+                <a16:creationId xmlns:a16="http://schemas.microsoft.com/office/drawing/2014/main" id="{05305E01-A1DE-22F3-C14D-48B5A0A2504A}"/>
               </a:ext>
             </a:extLst>
           </p:cNvPr>
@@ -5571,7 +5571,7 @@
           <p:cNvPr id="11" name="Rectangle: Rounded Corners 10">
             <a:extLst>
               <a:ext uri="{FF2B5EF4-FFF2-40B4-BE49-F238E27FC236}">
-                <a16:creationId xmlns:a16="http://schemas.microsoft.com/office/drawing/2014/main" id="{783D1827-4D91-ED73-9874-133BAE26AD5A}"/>
+                <a16:creationId xmlns:a16="http://schemas.microsoft.com/office/drawing/2014/main" id="{A7779ABA-ACD1-F11C-7459-68684860B058}"/>
               </a:ext>
             </a:extLst>
           </p:cNvPr>
@@ -5641,7 +5641,7 @@
           <p:cNvPr id="12" name="Oval 11">
             <a:extLst>
               <a:ext uri="{FF2B5EF4-FFF2-40B4-BE49-F238E27FC236}">
-                <a16:creationId xmlns:a16="http://schemas.microsoft.com/office/drawing/2014/main" id="{8DC051C7-36F5-9004-5E9C-11027B402D58}"/>
+                <a16:creationId xmlns:a16="http://schemas.microsoft.com/office/drawing/2014/main" id="{FC29447A-8E9B-3EB7-7E3C-93584493EFD6}"/>
               </a:ext>
             </a:extLst>
           </p:cNvPr>
@@ -5717,7 +5717,7 @@
           <p:cNvPr id="13" name="TextBox 12">
             <a:extLst>
               <a:ext uri="{FF2B5EF4-FFF2-40B4-BE49-F238E27FC236}">
-                <a16:creationId xmlns:a16="http://schemas.microsoft.com/office/drawing/2014/main" id="{95317139-9CB0-914E-6D2D-B24DDC67FF42}"/>
+                <a16:creationId xmlns:a16="http://schemas.microsoft.com/office/drawing/2014/main" id="{821A25C5-1F69-C158-D2B6-386EBF239FBE}"/>
               </a:ext>
             </a:extLst>
           </p:cNvPr>
@@ -5757,7 +5757,7 @@
           <p:cNvPr id="14" name="TextBox 13">
             <a:extLst>
               <a:ext uri="{FF2B5EF4-FFF2-40B4-BE49-F238E27FC236}">
-                <a16:creationId xmlns:a16="http://schemas.microsoft.com/office/drawing/2014/main" id="{51D9963B-5CD0-EB47-2745-CE28D2A4D30A}"/>
+                <a16:creationId xmlns:a16="http://schemas.microsoft.com/office/drawing/2014/main" id="{6496D5D2-2E50-B42D-80DF-6B79133BA98F}"/>
               </a:ext>
             </a:extLst>
           </p:cNvPr>
@@ -5803,7 +5803,7 @@
           <p:cNvPr id="15" name="Rectangle: Rounded Corners 14">
             <a:extLst>
               <a:ext uri="{FF2B5EF4-FFF2-40B4-BE49-F238E27FC236}">
-                <a16:creationId xmlns:a16="http://schemas.microsoft.com/office/drawing/2014/main" id="{28C6DA60-E50D-6CC4-0AAC-26F9A3FC3683}"/>
+                <a16:creationId xmlns:a16="http://schemas.microsoft.com/office/drawing/2014/main" id="{09529E7B-4E89-D09A-DFE8-83652183BDCE}"/>
               </a:ext>
             </a:extLst>
           </p:cNvPr>
@@ -5873,7 +5873,7 @@
           <p:cNvPr id="16" name="Oval 15">
             <a:extLst>
               <a:ext uri="{FF2B5EF4-FFF2-40B4-BE49-F238E27FC236}">
-                <a16:creationId xmlns:a16="http://schemas.microsoft.com/office/drawing/2014/main" id="{9A33FE28-6255-314A-38BE-F879E83BD6F2}"/>
+                <a16:creationId xmlns:a16="http://schemas.microsoft.com/office/drawing/2014/main" id="{699CE4F5-89CD-83DA-2414-5C9065B4B087}"/>
               </a:ext>
             </a:extLst>
           </p:cNvPr>
@@ -5949,7 +5949,7 @@
           <p:cNvPr id="17" name="TextBox 16">
             <a:extLst>
               <a:ext uri="{FF2B5EF4-FFF2-40B4-BE49-F238E27FC236}">
-                <a16:creationId xmlns:a16="http://schemas.microsoft.com/office/drawing/2014/main" id="{3F2AAC89-5226-1F5A-6269-4FE29EB2D050}"/>
+                <a16:creationId xmlns:a16="http://schemas.microsoft.com/office/drawing/2014/main" id="{997993B5-4333-0281-DAD8-97958FE50A7F}"/>
               </a:ext>
             </a:extLst>
           </p:cNvPr>
@@ -5989,7 +5989,7 @@
           <p:cNvPr id="18" name="TextBox 17">
             <a:extLst>
               <a:ext uri="{FF2B5EF4-FFF2-40B4-BE49-F238E27FC236}">
-                <a16:creationId xmlns:a16="http://schemas.microsoft.com/office/drawing/2014/main" id="{6E89322D-3D80-2FF6-276A-62595170D00C}"/>
+                <a16:creationId xmlns:a16="http://schemas.microsoft.com/office/drawing/2014/main" id="{6B3445B8-F7AF-69F7-0957-10E0F0D5D7E6}"/>
               </a:ext>
             </a:extLst>
           </p:cNvPr>
@@ -6035,7 +6035,7 @@
           <p:cNvPr id="19" name="TextBox 18">
             <a:extLst>
               <a:ext uri="{FF2B5EF4-FFF2-40B4-BE49-F238E27FC236}">
-                <a16:creationId xmlns:a16="http://schemas.microsoft.com/office/drawing/2014/main" id="{0419B6F2-E242-EA0A-6357-AA9AEB1D4D91}"/>
+                <a16:creationId xmlns:a16="http://schemas.microsoft.com/office/drawing/2014/main" id="{D64E800A-F043-AA62-316E-5071C3FC342F}"/>
               </a:ext>
             </a:extLst>
           </p:cNvPr>
@@ -6044,7 +6044,7 @@
         </p:nvSpPr>
         <p:spPr>
           <a:xfrm>
-            <a:off x="609600" y="3403600"/>
+            <a:off x="609600" y="3378200"/>
             <a:ext cx="10972800" cy="300082"/>
           </a:xfrm>
           <a:prstGeom prst="rect">
@@ -6059,17 +6059,17 @@
           <a:lstStyle/>
           <a:p>
             <a:r>
-              <a:rPr lang="en-US" sz="1200">
-                <a:solidFill>
-                  <a:srgbClr val="6B7280"/>
+              <a:rPr lang="en-US" sz="1150">
+                <a:solidFill>
+                  <a:srgbClr val="1F2430"/>
                 </a:solidFill>
                 <a:latin typeface="Calibri" panose="020F0502020204030204" pitchFamily="34" charset="0"/>
               </a:rPr>
-              <a:t>The organisers' own four capabilities. The SI is the reference; the goal is to catch incorrect details before the draft is finalised.</a:t>
-            </a:r>
-            <a:endParaRPr lang="en-MY" sz="1200">
+              <a:t>Why we built it: today a documentation clerk does this by hand - about 4 minutes per SI/BL pair and 20 seconds to triage each email (a conservative estimate, not a measurement) - and a missed field becomes a correction, a delay, rework.</a:t>
+            </a:r>
+            <a:endParaRPr lang="en-MY" sz="1150">
               <a:solidFill>
-                <a:srgbClr val="6B7280"/>
+                <a:srgbClr val="1F2430"/>
               </a:solidFill>
               <a:latin typeface="Calibri" panose="020F0502020204030204" pitchFamily="34" charset="0"/>
             </a:endParaRPr>
@@ -6081,7 +6081,7 @@
           <p:cNvPr id="20" name="TextBox 19">
             <a:extLst>
               <a:ext uri="{FF2B5EF4-FFF2-40B4-BE49-F238E27FC236}">
-                <a16:creationId xmlns:a16="http://schemas.microsoft.com/office/drawing/2014/main" id="{B151FF69-8F6E-854E-3D8C-E072759BA8F7}"/>
+                <a16:creationId xmlns:a16="http://schemas.microsoft.com/office/drawing/2014/main" id="{CE6290B6-92E5-DDE1-4A45-86EBDE78BD5E}"/>
               </a:ext>
             </a:extLst>
           </p:cNvPr>
@@ -6127,7 +6127,7 @@
           <p:cNvPr id="21" name="TextBox 20">
             <a:extLst>
               <a:ext uri="{FF2B5EF4-FFF2-40B4-BE49-F238E27FC236}">
-                <a16:creationId xmlns:a16="http://schemas.microsoft.com/office/drawing/2014/main" id="{9F06BD75-CD9D-4903-DC59-5A5B5E55EBC0}"/>
+                <a16:creationId xmlns:a16="http://schemas.microsoft.com/office/drawing/2014/main" id="{6CF3586E-6E8C-F9B0-AD56-857489101578}"/>
               </a:ext>
             </a:extLst>
           </p:cNvPr>
@@ -6173,7 +6173,7 @@
           <p:cNvPr id="22" name="TextBox 21">
             <a:extLst>
               <a:ext uri="{FF2B5EF4-FFF2-40B4-BE49-F238E27FC236}">
-                <a16:creationId xmlns:a16="http://schemas.microsoft.com/office/drawing/2014/main" id="{42D076DB-522E-FBBE-3EB9-0EBD1797E990}"/>
+                <a16:creationId xmlns:a16="http://schemas.microsoft.com/office/drawing/2014/main" id="{7E65143E-E947-7E61-8233-219E9BAB8CFD}"/>
               </a:ext>
             </a:extLst>
           </p:cNvPr>
@@ -6219,7 +6219,7 @@
           <p:cNvPr id="23" name="TextBox 22">
             <a:extLst>
               <a:ext uri="{FF2B5EF4-FFF2-40B4-BE49-F238E27FC236}">
-                <a16:creationId xmlns:a16="http://schemas.microsoft.com/office/drawing/2014/main" id="{726DCCB7-A2B0-69D6-0E0F-FC714AACBBCA}"/>
+                <a16:creationId xmlns:a16="http://schemas.microsoft.com/office/drawing/2014/main" id="{288B3E9E-02E1-18E1-94D6-67CFB87DA086}"/>
               </a:ext>
             </a:extLst>
           </p:cNvPr>
@@ -6265,7 +6265,7 @@
           <p:cNvPr id="24" name="TextBox 23">
             <a:extLst>
               <a:ext uri="{FF2B5EF4-FFF2-40B4-BE49-F238E27FC236}">
-                <a16:creationId xmlns:a16="http://schemas.microsoft.com/office/drawing/2014/main" id="{7BA41D7B-6FB4-0CD3-F042-D0BACEFFB7C2}"/>
+                <a16:creationId xmlns:a16="http://schemas.microsoft.com/office/drawing/2014/main" id="{6890D010-EBCC-C972-24E7-AC0EDE13A5DC}"/>
               </a:ext>
             </a:extLst>
           </p:cNvPr>
@@ -6311,7 +6311,7 @@
           <p:cNvPr id="25" name="TextBox 24">
             <a:extLst>
               <a:ext uri="{FF2B5EF4-FFF2-40B4-BE49-F238E27FC236}">
-                <a16:creationId xmlns:a16="http://schemas.microsoft.com/office/drawing/2014/main" id="{4F1FD76E-735E-0458-4E84-CA0166EAD2FA}"/>
+                <a16:creationId xmlns:a16="http://schemas.microsoft.com/office/drawing/2014/main" id="{BED1208B-B573-1B59-EFE6-A30711210E28}"/>
               </a:ext>
             </a:extLst>
           </p:cNvPr>
@@ -6357,7 +6357,7 @@
           <p:cNvPr id="26" name="Rectangle: Rounded Corners 25">
             <a:extLst>
               <a:ext uri="{FF2B5EF4-FFF2-40B4-BE49-F238E27FC236}">
-                <a16:creationId xmlns:a16="http://schemas.microsoft.com/office/drawing/2014/main" id="{20990368-7D34-B023-0655-FCD6C8765885}"/>
+                <a16:creationId xmlns:a16="http://schemas.microsoft.com/office/drawing/2014/main" id="{2D174602-3BE8-1A03-4EED-0AFB74E41F72}"/>
               </a:ext>
             </a:extLst>
           </p:cNvPr>
@@ -6427,7 +6427,7 @@
           <p:cNvPr id="27" name="TextBox 26">
             <a:extLst>
               <a:ext uri="{FF2B5EF4-FFF2-40B4-BE49-F238E27FC236}">
-                <a16:creationId xmlns:a16="http://schemas.microsoft.com/office/drawing/2014/main" id="{C4DD5677-D30A-E2E2-5095-BF233199C798}"/>
+                <a16:creationId xmlns:a16="http://schemas.microsoft.com/office/drawing/2014/main" id="{C77247F8-7C2B-071B-78B6-727628AB7857}"/>
               </a:ext>
             </a:extLst>
           </p:cNvPr>
@@ -6473,7 +6473,7 @@
           <p:cNvPr id="28" name="TextBox 27">
             <a:extLst>
               <a:ext uri="{FF2B5EF4-FFF2-40B4-BE49-F238E27FC236}">
-                <a16:creationId xmlns:a16="http://schemas.microsoft.com/office/drawing/2014/main" id="{66332F32-448D-4BCF-9680-B5E44EA58701}"/>
+                <a16:creationId xmlns:a16="http://schemas.microsoft.com/office/drawing/2014/main" id="{A70982EC-AAE6-473E-E60F-56FA31B64A3C}"/>
               </a:ext>
             </a:extLst>
           </p:cNvPr>
@@ -6518,7 +6518,7 @@
     </p:spTree>
     <p:extLst>
       <p:ext uri="{BB962C8B-B14F-4D97-AF65-F5344CB8AC3E}">
-        <p14:creationId xmlns:p14="http://schemas.microsoft.com/office/powerpoint/2010/main" val="2714817090"/>
+        <p14:creationId xmlns:p14="http://schemas.microsoft.com/office/powerpoint/2010/main" val="3699902665"/>
       </p:ext>
     </p:extLst>
   </p:cSld>
@@ -6558,7 +6558,7 @@
           <p:cNvPr id="2" name="TextBox 1">
             <a:extLst>
               <a:ext uri="{FF2B5EF4-FFF2-40B4-BE49-F238E27FC236}">
-                <a16:creationId xmlns:a16="http://schemas.microsoft.com/office/drawing/2014/main" id="{720B4F02-BA5B-93F5-AAAE-82F4AD7DED7F}"/>
+                <a16:creationId xmlns:a16="http://schemas.microsoft.com/office/drawing/2014/main" id="{AD43D84F-5A8B-7685-1146-1338948D88F1}"/>
               </a:ext>
             </a:extLst>
           </p:cNvPr>
@@ -6604,7 +6604,7 @@
           <p:cNvPr id="4" name="Picture 3">
             <a:extLst>
               <a:ext uri="{FF2B5EF4-FFF2-40B4-BE49-F238E27FC236}">
-                <a16:creationId xmlns:a16="http://schemas.microsoft.com/office/drawing/2014/main" id="{4D85ABE0-F8D6-3831-3056-0FCC928A5BCF}"/>
+                <a16:creationId xmlns:a16="http://schemas.microsoft.com/office/drawing/2014/main" id="{B39AEFDB-A4F0-9301-8DDB-39A69CB7EAAC}"/>
               </a:ext>
             </a:extLst>
           </p:cNvPr>
@@ -6645,7 +6645,7 @@
           <p:cNvPr id="5" name="TextBox 4">
             <a:extLst>
               <a:ext uri="{FF2B5EF4-FFF2-40B4-BE49-F238E27FC236}">
-                <a16:creationId xmlns:a16="http://schemas.microsoft.com/office/drawing/2014/main" id="{639E5150-CC67-83FC-FAD3-21676905821E}"/>
+                <a16:creationId xmlns:a16="http://schemas.microsoft.com/office/drawing/2014/main" id="{C107C9FD-4F4A-918F-07DF-32992E4F16B1}"/>
               </a:ext>
             </a:extLst>
           </p:cNvPr>
@@ -6685,7 +6685,7 @@
           <p:cNvPr id="6" name="TextBox 5">
             <a:extLst>
               <a:ext uri="{FF2B5EF4-FFF2-40B4-BE49-F238E27FC236}">
-                <a16:creationId xmlns:a16="http://schemas.microsoft.com/office/drawing/2014/main" id="{6429D772-AEFF-1B9E-3E78-208F0DB633DC}"/>
+                <a16:creationId xmlns:a16="http://schemas.microsoft.com/office/drawing/2014/main" id="{8DAAAD95-132B-4F8A-A18D-2CABC9FD7194}"/>
               </a:ext>
             </a:extLst>
           </p:cNvPr>
@@ -6725,7 +6725,7 @@
           <p:cNvPr id="7" name="TextBox 6">
             <a:extLst>
               <a:ext uri="{FF2B5EF4-FFF2-40B4-BE49-F238E27FC236}">
-                <a16:creationId xmlns:a16="http://schemas.microsoft.com/office/drawing/2014/main" id="{6639CAEE-0806-8826-7E7D-85441623287A}"/>
+                <a16:creationId xmlns:a16="http://schemas.microsoft.com/office/drawing/2014/main" id="{E8ADE83B-7E2F-6548-0462-364E35F53722}"/>
               </a:ext>
             </a:extLst>
           </p:cNvPr>
@@ -6765,7 +6765,7 @@
           <p:cNvPr id="8" name="TextBox 7">
             <a:extLst>
               <a:ext uri="{FF2B5EF4-FFF2-40B4-BE49-F238E27FC236}">
-                <a16:creationId xmlns:a16="http://schemas.microsoft.com/office/drawing/2014/main" id="{4EC2C78E-BF9C-902A-3940-8B6B0965F85D}"/>
+                <a16:creationId xmlns:a16="http://schemas.microsoft.com/office/drawing/2014/main" id="{E01A2123-0637-9355-7D07-8C7E66503E9D}"/>
               </a:ext>
             </a:extLst>
           </p:cNvPr>
@@ -6811,7 +6811,7 @@
           <p:cNvPr id="9" name="TextBox 8">
             <a:extLst>
               <a:ext uri="{FF2B5EF4-FFF2-40B4-BE49-F238E27FC236}">
-                <a16:creationId xmlns:a16="http://schemas.microsoft.com/office/drawing/2014/main" id="{1411D413-9B28-EDE4-A8C1-6691BB8A595E}"/>
+                <a16:creationId xmlns:a16="http://schemas.microsoft.com/office/drawing/2014/main" id="{67FF3DC6-6984-502A-CBAA-D59705E4278D}"/>
               </a:ext>
             </a:extLst>
           </p:cNvPr>
@@ -6851,7 +6851,7 @@
           <p:cNvPr id="10" name="TextBox 9">
             <a:extLst>
               <a:ext uri="{FF2B5EF4-FFF2-40B4-BE49-F238E27FC236}">
-                <a16:creationId xmlns:a16="http://schemas.microsoft.com/office/drawing/2014/main" id="{37EDB249-71C6-521E-553F-756D9AB69F7A}"/>
+                <a16:creationId xmlns:a16="http://schemas.microsoft.com/office/drawing/2014/main" id="{52667BCF-44AD-DDED-EDA6-818D91EFC955}"/>
               </a:ext>
             </a:extLst>
           </p:cNvPr>
@@ -6897,7 +6897,7 @@
           <p:cNvPr id="11" name="TextBox 10">
             <a:extLst>
               <a:ext uri="{FF2B5EF4-FFF2-40B4-BE49-F238E27FC236}">
-                <a16:creationId xmlns:a16="http://schemas.microsoft.com/office/drawing/2014/main" id="{3DD15C58-B364-BCB8-DCB9-0934341814D3}"/>
+                <a16:creationId xmlns:a16="http://schemas.microsoft.com/office/drawing/2014/main" id="{9295EE4C-66A0-181A-96DA-F211AA160F7A}"/>
               </a:ext>
             </a:extLst>
           </p:cNvPr>
@@ -6937,7 +6937,7 @@
           <p:cNvPr id="12" name="TextBox 11">
             <a:extLst>
               <a:ext uri="{FF2B5EF4-FFF2-40B4-BE49-F238E27FC236}">
-                <a16:creationId xmlns:a16="http://schemas.microsoft.com/office/drawing/2014/main" id="{DEDDD999-18D6-2357-D6A1-794CAA60D93D}"/>
+                <a16:creationId xmlns:a16="http://schemas.microsoft.com/office/drawing/2014/main" id="{CA1399FD-C70D-68F7-36FC-12CE0573971A}"/>
               </a:ext>
             </a:extLst>
           </p:cNvPr>
@@ -6983,7 +6983,7 @@
           <p:cNvPr id="13" name="TextBox 12">
             <a:extLst>
               <a:ext uri="{FF2B5EF4-FFF2-40B4-BE49-F238E27FC236}">
-                <a16:creationId xmlns:a16="http://schemas.microsoft.com/office/drawing/2014/main" id="{3BE0A213-8DBC-FB1F-010A-678566BBBEEF}"/>
+                <a16:creationId xmlns:a16="http://schemas.microsoft.com/office/drawing/2014/main" id="{FDCAB584-D163-5A5F-6F28-5A4676360938}"/>
               </a:ext>
             </a:extLst>
           </p:cNvPr>
@@ -6992,7 +6992,7 @@
         </p:nvSpPr>
         <p:spPr>
           <a:xfrm>
-            <a:off x="609600" y="5740400"/>
+            <a:off x="609600" y="5715000"/>
             <a:ext cx="10972800" cy="300082"/>
           </a:xfrm>
           <a:prstGeom prst="rect">
@@ -7007,14 +7007,20 @@
           <a:lstStyle/>
           <a:p>
             <a:r>
-              <a:rPr lang="en-MY" sz="1100">
-                <a:solidFill>
-                  <a:srgbClr val="6B7280"/>
+              <a:rPr lang="en-US" sz="1150">
+                <a:solidFill>
+                  <a:srgbClr val="1F2430"/>
                 </a:solidFill>
                 <a:latin typeface="Calibri" panose="020F0502020204030204" pitchFamily="34" charset="0"/>
               </a:rPr>
-              <a:t>duocode-sentinel.vercel.app · sdoc-sentinel-api.onrender.com - deployed from the repository by the committed render.yaml and vercel.json.</a:t>
-            </a:r>
+              <a:t>How a desk uses it:   1  Run the inbox   ·   2  Open a flagged case   ·   3  Confirm it, correct a single field, or re-upload the corrected document   ·   4  Send the drafted reply</a:t>
+            </a:r>
+            <a:endParaRPr lang="en-MY" sz="1150">
+              <a:solidFill>
+                <a:srgbClr val="1F2430"/>
+              </a:solidFill>
+              <a:latin typeface="Calibri" panose="020F0502020204030204" pitchFamily="34" charset="0"/>
+            </a:endParaRPr>
           </a:p>
         </p:txBody>
       </p:sp>
@@ -7023,7 +7029,7 @@
           <p:cNvPr id="14" name="TextBox 13">
             <a:extLst>
               <a:ext uri="{FF2B5EF4-FFF2-40B4-BE49-F238E27FC236}">
-                <a16:creationId xmlns:a16="http://schemas.microsoft.com/office/drawing/2014/main" id="{C0E3F026-8250-91EA-8386-730FCD63D92C}"/>
+                <a16:creationId xmlns:a16="http://schemas.microsoft.com/office/drawing/2014/main" id="{14CC8A3B-5EC3-7DE0-F0C3-5F1B7AAB73A2}"/>
               </a:ext>
             </a:extLst>
           </p:cNvPr>
@@ -7062,7 +7068,7 @@
     </p:spTree>
     <p:extLst>
       <p:ext uri="{BB962C8B-B14F-4D97-AF65-F5344CB8AC3E}">
-        <p14:creationId xmlns:p14="http://schemas.microsoft.com/office/powerpoint/2010/main" val="1345112154"/>
+        <p14:creationId xmlns:p14="http://schemas.microsoft.com/office/powerpoint/2010/main" val="1220596969"/>
       </p:ext>
     </p:extLst>
   </p:cSld>
@@ -7102,7 +7108,7 @@
           <p:cNvPr id="2" name="TextBox 1">
             <a:extLst>
               <a:ext uri="{FF2B5EF4-FFF2-40B4-BE49-F238E27FC236}">
-                <a16:creationId xmlns:a16="http://schemas.microsoft.com/office/drawing/2014/main" id="{065EFC2B-41CA-DBF3-1D87-E578B9C4BC28}"/>
+                <a16:creationId xmlns:a16="http://schemas.microsoft.com/office/drawing/2014/main" id="{705210E2-601F-E436-7829-E814D3EA6B90}"/>
               </a:ext>
             </a:extLst>
           </p:cNvPr>
@@ -7142,7 +7148,7 @@
           <p:cNvPr id="3" name="Rectangle: Rounded Corners 2">
             <a:extLst>
               <a:ext uri="{FF2B5EF4-FFF2-40B4-BE49-F238E27FC236}">
-                <a16:creationId xmlns:a16="http://schemas.microsoft.com/office/drawing/2014/main" id="{39C32F9D-8557-0772-8CC2-79736CB854D4}"/>
+                <a16:creationId xmlns:a16="http://schemas.microsoft.com/office/drawing/2014/main" id="{60A5824E-E493-86C3-36B0-457917776671}"/>
               </a:ext>
             </a:extLst>
           </p:cNvPr>
@@ -7220,7 +7226,7 @@
           <p:cNvPr id="4" name="Straight Connector 3">
             <a:extLst>
               <a:ext uri="{FF2B5EF4-FFF2-40B4-BE49-F238E27FC236}">
-                <a16:creationId xmlns:a16="http://schemas.microsoft.com/office/drawing/2014/main" id="{4FADACCE-B7B3-C685-E45E-7791A9FC2FB2}"/>
+                <a16:creationId xmlns:a16="http://schemas.microsoft.com/office/drawing/2014/main" id="{4389B498-9609-20EB-1B68-5F9191CE8B21}"/>
               </a:ext>
             </a:extLst>
           </p:cNvPr>
@@ -7262,7 +7268,7 @@
           <p:cNvPr id="5" name="Rectangle: Rounded Corners 4">
             <a:extLst>
               <a:ext uri="{FF2B5EF4-FFF2-40B4-BE49-F238E27FC236}">
-                <a16:creationId xmlns:a16="http://schemas.microsoft.com/office/drawing/2014/main" id="{F90E9877-801E-33B9-2A56-3813EF50A954}"/>
+                <a16:creationId xmlns:a16="http://schemas.microsoft.com/office/drawing/2014/main" id="{9700954B-1423-972A-92A1-B5E494485D66}"/>
               </a:ext>
             </a:extLst>
           </p:cNvPr>
@@ -7340,7 +7346,7 @@
           <p:cNvPr id="6" name="Straight Connector 5">
             <a:extLst>
               <a:ext uri="{FF2B5EF4-FFF2-40B4-BE49-F238E27FC236}">
-                <a16:creationId xmlns:a16="http://schemas.microsoft.com/office/drawing/2014/main" id="{979C24F3-A844-C9A0-461A-27C4AD66A942}"/>
+                <a16:creationId xmlns:a16="http://schemas.microsoft.com/office/drawing/2014/main" id="{0BD93353-9F52-B126-B37E-C81D9FB509C1}"/>
               </a:ext>
             </a:extLst>
           </p:cNvPr>
@@ -7382,7 +7388,7 @@
           <p:cNvPr id="7" name="Rectangle: Rounded Corners 6">
             <a:extLst>
               <a:ext uri="{FF2B5EF4-FFF2-40B4-BE49-F238E27FC236}">
-                <a16:creationId xmlns:a16="http://schemas.microsoft.com/office/drawing/2014/main" id="{34E56A55-DCAF-52C5-2999-8D2612B7DB7C}"/>
+                <a16:creationId xmlns:a16="http://schemas.microsoft.com/office/drawing/2014/main" id="{86C72DA4-1D4F-C20F-A311-5A8307320CDA}"/>
               </a:ext>
             </a:extLst>
           </p:cNvPr>
@@ -7460,7 +7466,7 @@
           <p:cNvPr id="8" name="Straight Connector 7">
             <a:extLst>
               <a:ext uri="{FF2B5EF4-FFF2-40B4-BE49-F238E27FC236}">
-                <a16:creationId xmlns:a16="http://schemas.microsoft.com/office/drawing/2014/main" id="{6ABB396F-FB9D-2C88-A9C1-18838BAB7834}"/>
+                <a16:creationId xmlns:a16="http://schemas.microsoft.com/office/drawing/2014/main" id="{2C595D6C-4653-C985-26E3-5992F8B3FB29}"/>
               </a:ext>
             </a:extLst>
           </p:cNvPr>
@@ -7502,7 +7508,7 @@
           <p:cNvPr id="9" name="Rectangle: Rounded Corners 8">
             <a:extLst>
               <a:ext uri="{FF2B5EF4-FFF2-40B4-BE49-F238E27FC236}">
-                <a16:creationId xmlns:a16="http://schemas.microsoft.com/office/drawing/2014/main" id="{57BBF386-7089-A0EE-DC0F-16D54F4096BF}"/>
+                <a16:creationId xmlns:a16="http://schemas.microsoft.com/office/drawing/2014/main" id="{8CFCD73A-4C3B-B69A-D703-ADA60986DFF2}"/>
               </a:ext>
             </a:extLst>
           </p:cNvPr>
@@ -7580,7 +7586,7 @@
           <p:cNvPr id="10" name="Straight Connector 9">
             <a:extLst>
               <a:ext uri="{FF2B5EF4-FFF2-40B4-BE49-F238E27FC236}">
-                <a16:creationId xmlns:a16="http://schemas.microsoft.com/office/drawing/2014/main" id="{136EA03A-6294-E848-95A1-4F1A0558590B}"/>
+                <a16:creationId xmlns:a16="http://schemas.microsoft.com/office/drawing/2014/main" id="{6E295A24-E05E-D7D0-0891-8AC0DBE0878A}"/>
               </a:ext>
             </a:extLst>
           </p:cNvPr>
@@ -7622,7 +7628,7 @@
           <p:cNvPr id="11" name="Rectangle: Rounded Corners 10">
             <a:extLst>
               <a:ext uri="{FF2B5EF4-FFF2-40B4-BE49-F238E27FC236}">
-                <a16:creationId xmlns:a16="http://schemas.microsoft.com/office/drawing/2014/main" id="{B63CC564-8B9C-46CF-B900-287F8972F1C3}"/>
+                <a16:creationId xmlns:a16="http://schemas.microsoft.com/office/drawing/2014/main" id="{65B568CD-DAF8-9F18-BAAE-559CF785EBAE}"/>
               </a:ext>
             </a:extLst>
           </p:cNvPr>
@@ -7700,7 +7706,7 @@
           <p:cNvPr id="12" name="Straight Connector 11">
             <a:extLst>
               <a:ext uri="{FF2B5EF4-FFF2-40B4-BE49-F238E27FC236}">
-                <a16:creationId xmlns:a16="http://schemas.microsoft.com/office/drawing/2014/main" id="{1A713E5B-4B82-4E74-B9F3-995A45075AC8}"/>
+                <a16:creationId xmlns:a16="http://schemas.microsoft.com/office/drawing/2014/main" id="{FC6C8729-E9DB-DBC4-E40F-500924B62702}"/>
               </a:ext>
             </a:extLst>
           </p:cNvPr>
@@ -7742,7 +7748,7 @@
           <p:cNvPr id="13" name="Rectangle: Rounded Corners 12">
             <a:extLst>
               <a:ext uri="{FF2B5EF4-FFF2-40B4-BE49-F238E27FC236}">
-                <a16:creationId xmlns:a16="http://schemas.microsoft.com/office/drawing/2014/main" id="{4DC00A6D-191D-9FB8-1655-437BA96B0FCB}"/>
+                <a16:creationId xmlns:a16="http://schemas.microsoft.com/office/drawing/2014/main" id="{3C0278A6-4C2F-5C97-1974-880A6915CC12}"/>
               </a:ext>
             </a:extLst>
           </p:cNvPr>
@@ -7820,7 +7826,7 @@
           <p:cNvPr id="14" name="Straight Connector 13">
             <a:extLst>
               <a:ext uri="{FF2B5EF4-FFF2-40B4-BE49-F238E27FC236}">
-                <a16:creationId xmlns:a16="http://schemas.microsoft.com/office/drawing/2014/main" id="{DD4E3524-74B1-61EA-EC0F-093CDD704E29}"/>
+                <a16:creationId xmlns:a16="http://schemas.microsoft.com/office/drawing/2014/main" id="{3AC4D31B-65EA-753F-FDA9-C21133F00C51}"/>
               </a:ext>
             </a:extLst>
           </p:cNvPr>
@@ -7863,7 +7869,7 @@
           <p:cNvPr id="15" name="TextBox 14">
             <a:extLst>
               <a:ext uri="{FF2B5EF4-FFF2-40B4-BE49-F238E27FC236}">
-                <a16:creationId xmlns:a16="http://schemas.microsoft.com/office/drawing/2014/main" id="{44E33244-FA64-A95D-936F-FEE2B852A912}"/>
+                <a16:creationId xmlns:a16="http://schemas.microsoft.com/office/drawing/2014/main" id="{FE1E9ED4-FE6E-3826-5728-6F8C0DF3195C}"/>
               </a:ext>
             </a:extLst>
           </p:cNvPr>
@@ -7904,7 +7910,7 @@
           <p:cNvPr id="16" name="TextBox 15">
             <a:extLst>
               <a:ext uri="{FF2B5EF4-FFF2-40B4-BE49-F238E27FC236}">
-                <a16:creationId xmlns:a16="http://schemas.microsoft.com/office/drawing/2014/main" id="{5F82947C-28A4-9931-7E26-D0150607763C}"/>
+                <a16:creationId xmlns:a16="http://schemas.microsoft.com/office/drawing/2014/main" id="{45BB0B3F-B584-28E9-A031-94589BEDFE3D}"/>
               </a:ext>
             </a:extLst>
           </p:cNvPr>
@@ -7950,7 +7956,7 @@
           <p:cNvPr id="17" name="Rectangle: Rounded Corners 16">
             <a:extLst>
               <a:ext uri="{FF2B5EF4-FFF2-40B4-BE49-F238E27FC236}">
-                <a16:creationId xmlns:a16="http://schemas.microsoft.com/office/drawing/2014/main" id="{EEB151C9-4134-EB0A-0346-82A7E63EB719}"/>
+                <a16:creationId xmlns:a16="http://schemas.microsoft.com/office/drawing/2014/main" id="{CA57345F-E631-5C5E-05D5-EB6E9EC2A020}"/>
               </a:ext>
             </a:extLst>
           </p:cNvPr>
@@ -8020,7 +8026,7 @@
           <p:cNvPr id="18" name="TextBox 17">
             <a:extLst>
               <a:ext uri="{FF2B5EF4-FFF2-40B4-BE49-F238E27FC236}">
-                <a16:creationId xmlns:a16="http://schemas.microsoft.com/office/drawing/2014/main" id="{AA99DC06-DA52-CBD5-92C6-744D60C3A8F1}"/>
+                <a16:creationId xmlns:a16="http://schemas.microsoft.com/office/drawing/2014/main" id="{B6B7DF2C-40E1-152A-A702-6200F13AEB0F}"/>
               </a:ext>
             </a:extLst>
           </p:cNvPr>
@@ -8066,7 +8072,7 @@
           <p:cNvPr id="19" name="TextBox 18">
             <a:extLst>
               <a:ext uri="{FF2B5EF4-FFF2-40B4-BE49-F238E27FC236}">
-                <a16:creationId xmlns:a16="http://schemas.microsoft.com/office/drawing/2014/main" id="{8EA12B2C-61C2-AB69-D905-59D7A294FDD5}"/>
+                <a16:creationId xmlns:a16="http://schemas.microsoft.com/office/drawing/2014/main" id="{EE5DFF2B-E755-F292-2AE9-58FB050BB0C6}"/>
               </a:ext>
             </a:extLst>
           </p:cNvPr>
@@ -8112,7 +8118,7 @@
           <p:cNvPr id="20" name="Rectangle: Rounded Corners 19">
             <a:extLst>
               <a:ext uri="{FF2B5EF4-FFF2-40B4-BE49-F238E27FC236}">
-                <a16:creationId xmlns:a16="http://schemas.microsoft.com/office/drawing/2014/main" id="{2E246042-A189-CA4B-CF6D-8BDA5BC1A79A}"/>
+                <a16:creationId xmlns:a16="http://schemas.microsoft.com/office/drawing/2014/main" id="{B43EA754-3CC1-2F41-FEBB-D97E7A88E6A2}"/>
               </a:ext>
             </a:extLst>
           </p:cNvPr>
@@ -8182,7 +8188,7 @@
           <p:cNvPr id="21" name="TextBox 20">
             <a:extLst>
               <a:ext uri="{FF2B5EF4-FFF2-40B4-BE49-F238E27FC236}">
-                <a16:creationId xmlns:a16="http://schemas.microsoft.com/office/drawing/2014/main" id="{BBCA0344-277F-34F7-E11B-43FBE70CE5AB}"/>
+                <a16:creationId xmlns:a16="http://schemas.microsoft.com/office/drawing/2014/main" id="{BAAE596F-436E-6D1C-8626-5EC395EDC526}"/>
               </a:ext>
             </a:extLst>
           </p:cNvPr>
@@ -8222,7 +8228,7 @@
           <p:cNvPr id="22" name="TextBox 21">
             <a:extLst>
               <a:ext uri="{FF2B5EF4-FFF2-40B4-BE49-F238E27FC236}">
-                <a16:creationId xmlns:a16="http://schemas.microsoft.com/office/drawing/2014/main" id="{A476A62E-5720-C103-2737-72236A4F01E2}"/>
+                <a16:creationId xmlns:a16="http://schemas.microsoft.com/office/drawing/2014/main" id="{7BBB9AA5-53C0-6D06-E82A-B402228F5BAF}"/>
               </a:ext>
             </a:extLst>
           </p:cNvPr>
@@ -8268,7 +8274,7 @@
           <p:cNvPr id="23" name="Rectangle: Rounded Corners 22">
             <a:extLst>
               <a:ext uri="{FF2B5EF4-FFF2-40B4-BE49-F238E27FC236}">
-                <a16:creationId xmlns:a16="http://schemas.microsoft.com/office/drawing/2014/main" id="{59BBC391-2145-C053-125D-211F9B420E8D}"/>
+                <a16:creationId xmlns:a16="http://schemas.microsoft.com/office/drawing/2014/main" id="{F8D7BF01-4221-CCE9-6386-1BA4027FB55F}"/>
               </a:ext>
             </a:extLst>
           </p:cNvPr>
@@ -8338,7 +8344,7 @@
           <p:cNvPr id="24" name="TextBox 23">
             <a:extLst>
               <a:ext uri="{FF2B5EF4-FFF2-40B4-BE49-F238E27FC236}">
-                <a16:creationId xmlns:a16="http://schemas.microsoft.com/office/drawing/2014/main" id="{3ACFCBA4-A8A7-46EE-8E59-27E7E7891FD6}"/>
+                <a16:creationId xmlns:a16="http://schemas.microsoft.com/office/drawing/2014/main" id="{883F700B-6F27-5486-1430-74F16503E3C2}"/>
               </a:ext>
             </a:extLst>
           </p:cNvPr>
@@ -8378,7 +8384,7 @@
           <p:cNvPr id="25" name="TextBox 24">
             <a:extLst>
               <a:ext uri="{FF2B5EF4-FFF2-40B4-BE49-F238E27FC236}">
-                <a16:creationId xmlns:a16="http://schemas.microsoft.com/office/drawing/2014/main" id="{068D8E07-C4A6-5E3E-7B94-1B85B7813FC2}"/>
+                <a16:creationId xmlns:a16="http://schemas.microsoft.com/office/drawing/2014/main" id="{B4A64297-CF63-1392-ED5B-218253132056}"/>
               </a:ext>
             </a:extLst>
           </p:cNvPr>
@@ -8424,7 +8430,7 @@
           <p:cNvPr id="26" name="TextBox 25">
             <a:extLst>
               <a:ext uri="{FF2B5EF4-FFF2-40B4-BE49-F238E27FC236}">
-                <a16:creationId xmlns:a16="http://schemas.microsoft.com/office/drawing/2014/main" id="{1B8D7B75-15FD-2912-D22B-BEA00D03181F}"/>
+                <a16:creationId xmlns:a16="http://schemas.microsoft.com/office/drawing/2014/main" id="{D153B89B-B970-E337-3027-C6A8987A682C}"/>
               </a:ext>
             </a:extLst>
           </p:cNvPr>
@@ -8470,7 +8476,7 @@
           <p:cNvPr id="27" name="TextBox 26">
             <a:extLst>
               <a:ext uri="{FF2B5EF4-FFF2-40B4-BE49-F238E27FC236}">
-                <a16:creationId xmlns:a16="http://schemas.microsoft.com/office/drawing/2014/main" id="{573F9127-DCA7-812C-2C9D-D56F2214E3D7}"/>
+                <a16:creationId xmlns:a16="http://schemas.microsoft.com/office/drawing/2014/main" id="{C6DFEC5C-6B4C-E46D-E634-68A35670CDF6}"/>
               </a:ext>
             </a:extLst>
           </p:cNvPr>
@@ -8509,7 +8515,7 @@
     </p:spTree>
     <p:extLst>
       <p:ext uri="{BB962C8B-B14F-4D97-AF65-F5344CB8AC3E}">
-        <p14:creationId xmlns:p14="http://schemas.microsoft.com/office/powerpoint/2010/main" val="3887469736"/>
+        <p14:creationId xmlns:p14="http://schemas.microsoft.com/office/powerpoint/2010/main" val="1782283618"/>
       </p:ext>
     </p:extLst>
   </p:cSld>
@@ -8549,7 +8555,7 @@
           <p:cNvPr id="2" name="TextBox 1">
             <a:extLst>
               <a:ext uri="{FF2B5EF4-FFF2-40B4-BE49-F238E27FC236}">
-                <a16:creationId xmlns:a16="http://schemas.microsoft.com/office/drawing/2014/main" id="{803C6697-6C1D-0E5A-28D7-763ED1E689AE}"/>
+                <a16:creationId xmlns:a16="http://schemas.microsoft.com/office/drawing/2014/main" id="{CAFB1CD9-D6D1-D2ED-8C0F-9D9BD01967DA}"/>
               </a:ext>
             </a:extLst>
           </p:cNvPr>
@@ -8595,7 +8601,7 @@
           <p:cNvPr id="3" name="Oval 2">
             <a:extLst>
               <a:ext uri="{FF2B5EF4-FFF2-40B4-BE49-F238E27FC236}">
-                <a16:creationId xmlns:a16="http://schemas.microsoft.com/office/drawing/2014/main" id="{04866B18-0FD4-0F75-BB6D-A4DD8D907E0E}"/>
+                <a16:creationId xmlns:a16="http://schemas.microsoft.com/office/drawing/2014/main" id="{962AED0B-9F4C-C6C9-5BBF-9DBB023811F6}"/>
               </a:ext>
             </a:extLst>
           </p:cNvPr>
@@ -8671,7 +8677,7 @@
           <p:cNvPr id="4" name="TextBox 3">
             <a:extLst>
               <a:ext uri="{FF2B5EF4-FFF2-40B4-BE49-F238E27FC236}">
-                <a16:creationId xmlns:a16="http://schemas.microsoft.com/office/drawing/2014/main" id="{30E22211-0671-7187-FA45-31363A97AE60}"/>
+                <a16:creationId xmlns:a16="http://schemas.microsoft.com/office/drawing/2014/main" id="{27159FF5-CB36-5287-5577-AA7F2C18E208}"/>
               </a:ext>
             </a:extLst>
           </p:cNvPr>
@@ -8717,7 +8723,7 @@
           <p:cNvPr id="5" name="TextBox 4">
             <a:extLst>
               <a:ext uri="{FF2B5EF4-FFF2-40B4-BE49-F238E27FC236}">
-                <a16:creationId xmlns:a16="http://schemas.microsoft.com/office/drawing/2014/main" id="{7679415B-9136-60DD-A540-9C54E210AF8E}"/>
+                <a16:creationId xmlns:a16="http://schemas.microsoft.com/office/drawing/2014/main" id="{6DE69856-5847-64C1-300E-C9E633953501}"/>
               </a:ext>
             </a:extLst>
           </p:cNvPr>
@@ -8763,7 +8769,7 @@
           <p:cNvPr id="6" name="Oval 5">
             <a:extLst>
               <a:ext uri="{FF2B5EF4-FFF2-40B4-BE49-F238E27FC236}">
-                <a16:creationId xmlns:a16="http://schemas.microsoft.com/office/drawing/2014/main" id="{C0F38589-49AE-00DB-ED91-F00CBB7ED11F}"/>
+                <a16:creationId xmlns:a16="http://schemas.microsoft.com/office/drawing/2014/main" id="{0DC57F6D-BB3A-A59B-8571-59E4B23CEF89}"/>
               </a:ext>
             </a:extLst>
           </p:cNvPr>
@@ -8839,7 +8845,7 @@
           <p:cNvPr id="7" name="TextBox 6">
             <a:extLst>
               <a:ext uri="{FF2B5EF4-FFF2-40B4-BE49-F238E27FC236}">
-                <a16:creationId xmlns:a16="http://schemas.microsoft.com/office/drawing/2014/main" id="{D971A8F2-C2C8-01F3-06E9-B85F6B56C20B}"/>
+                <a16:creationId xmlns:a16="http://schemas.microsoft.com/office/drawing/2014/main" id="{5845C49A-E799-8A15-5692-534E5E10EBE5}"/>
               </a:ext>
             </a:extLst>
           </p:cNvPr>
@@ -8885,7 +8891,7 @@
           <p:cNvPr id="8" name="TextBox 7">
             <a:extLst>
               <a:ext uri="{FF2B5EF4-FFF2-40B4-BE49-F238E27FC236}">
-                <a16:creationId xmlns:a16="http://schemas.microsoft.com/office/drawing/2014/main" id="{6C98A002-17A8-52D5-5061-4E88F5F655A6}"/>
+                <a16:creationId xmlns:a16="http://schemas.microsoft.com/office/drawing/2014/main" id="{96CE63B4-5855-882F-4536-5011E0A9DF1E}"/>
               </a:ext>
             </a:extLst>
           </p:cNvPr>
@@ -8931,7 +8937,7 @@
           <p:cNvPr id="9" name="Oval 8">
             <a:extLst>
               <a:ext uri="{FF2B5EF4-FFF2-40B4-BE49-F238E27FC236}">
-                <a16:creationId xmlns:a16="http://schemas.microsoft.com/office/drawing/2014/main" id="{D861E4A2-431D-E146-C949-CB69A7A30EAF}"/>
+                <a16:creationId xmlns:a16="http://schemas.microsoft.com/office/drawing/2014/main" id="{52AB324B-7053-C306-F6B9-46F2A818E094}"/>
               </a:ext>
             </a:extLst>
           </p:cNvPr>
@@ -9007,7 +9013,7 @@
           <p:cNvPr id="10" name="TextBox 9">
             <a:extLst>
               <a:ext uri="{FF2B5EF4-FFF2-40B4-BE49-F238E27FC236}">
-                <a16:creationId xmlns:a16="http://schemas.microsoft.com/office/drawing/2014/main" id="{6364EF5A-4F5E-C556-CB65-C23B6D392ABE}"/>
+                <a16:creationId xmlns:a16="http://schemas.microsoft.com/office/drawing/2014/main" id="{D7B1E7F6-F198-175C-9990-E67FBF484FE5}"/>
               </a:ext>
             </a:extLst>
           </p:cNvPr>
@@ -9053,7 +9059,7 @@
           <p:cNvPr id="11" name="TextBox 10">
             <a:extLst>
               <a:ext uri="{FF2B5EF4-FFF2-40B4-BE49-F238E27FC236}">
-                <a16:creationId xmlns:a16="http://schemas.microsoft.com/office/drawing/2014/main" id="{B1F7A0D3-1E18-AA30-C7DE-6E29BB68AA12}"/>
+                <a16:creationId xmlns:a16="http://schemas.microsoft.com/office/drawing/2014/main" id="{EB0B4AEA-972B-4836-E1AD-C75395FDAA66}"/>
               </a:ext>
             </a:extLst>
           </p:cNvPr>
@@ -9099,7 +9105,7 @@
           <p:cNvPr id="12" name="TextBox 11">
             <a:extLst>
               <a:ext uri="{FF2B5EF4-FFF2-40B4-BE49-F238E27FC236}">
-                <a16:creationId xmlns:a16="http://schemas.microsoft.com/office/drawing/2014/main" id="{B49FFF05-C334-1B10-BA1C-9ECFE75BD56D}"/>
+                <a16:creationId xmlns:a16="http://schemas.microsoft.com/office/drawing/2014/main" id="{820AD510-FDB3-66D8-327A-FD31C7EF2B91}"/>
               </a:ext>
             </a:extLst>
           </p:cNvPr>
@@ -9145,7 +9151,7 @@
           <p:cNvPr id="13" name="Rectangle: Rounded Corners 12">
             <a:extLst>
               <a:ext uri="{FF2B5EF4-FFF2-40B4-BE49-F238E27FC236}">
-                <a16:creationId xmlns:a16="http://schemas.microsoft.com/office/drawing/2014/main" id="{216FE3E6-B9F0-F6EC-E238-854265D50E5A}"/>
+                <a16:creationId xmlns:a16="http://schemas.microsoft.com/office/drawing/2014/main" id="{1AD2C984-4A87-6DE0-D1E5-210D67806E14}"/>
               </a:ext>
             </a:extLst>
           </p:cNvPr>
@@ -9215,7 +9221,7 @@
           <p:cNvPr id="14" name="TextBox 13">
             <a:extLst>
               <a:ext uri="{FF2B5EF4-FFF2-40B4-BE49-F238E27FC236}">
-                <a16:creationId xmlns:a16="http://schemas.microsoft.com/office/drawing/2014/main" id="{87508D42-7752-76B0-F9A3-DEC20F8CFF37}"/>
+                <a16:creationId xmlns:a16="http://schemas.microsoft.com/office/drawing/2014/main" id="{99C3BFC0-5A23-E2B1-66A9-158F6A69B6E0}"/>
               </a:ext>
             </a:extLst>
           </p:cNvPr>
@@ -9256,7 +9262,7 @@
           <p:cNvPr id="15" name="TextBox 14">
             <a:extLst>
               <a:ext uri="{FF2B5EF4-FFF2-40B4-BE49-F238E27FC236}">
-                <a16:creationId xmlns:a16="http://schemas.microsoft.com/office/drawing/2014/main" id="{0A4AB2F7-FCF1-2936-FF6D-C72D56F7844F}"/>
+                <a16:creationId xmlns:a16="http://schemas.microsoft.com/office/drawing/2014/main" id="{B27D22E1-1A0B-5989-CCB6-98AA6748722C}"/>
               </a:ext>
             </a:extLst>
           </p:cNvPr>
@@ -9297,7 +9303,7 @@
           <p:cNvPr id="16" name="TextBox 15">
             <a:extLst>
               <a:ext uri="{FF2B5EF4-FFF2-40B4-BE49-F238E27FC236}">
-                <a16:creationId xmlns:a16="http://schemas.microsoft.com/office/drawing/2014/main" id="{96C5147D-4BB4-DDB9-97EB-ADA4C60C3645}"/>
+                <a16:creationId xmlns:a16="http://schemas.microsoft.com/office/drawing/2014/main" id="{1B227F73-56C3-F808-7B26-1CA4C0A738B1}"/>
               </a:ext>
             </a:extLst>
           </p:cNvPr>
@@ -9337,7 +9343,7 @@
           <p:cNvPr id="17" name="TextBox 16">
             <a:extLst>
               <a:ext uri="{FF2B5EF4-FFF2-40B4-BE49-F238E27FC236}">
-                <a16:creationId xmlns:a16="http://schemas.microsoft.com/office/drawing/2014/main" id="{78F8709E-F3F6-E11E-9B34-7C68AB5F7CE9}"/>
+                <a16:creationId xmlns:a16="http://schemas.microsoft.com/office/drawing/2014/main" id="{F47F7929-D7C4-028C-53E4-CB3048027614}"/>
               </a:ext>
             </a:extLst>
           </p:cNvPr>
@@ -9383,7 +9389,7 @@
           <p:cNvPr id="18" name="TextBox 17">
             <a:extLst>
               <a:ext uri="{FF2B5EF4-FFF2-40B4-BE49-F238E27FC236}">
-                <a16:creationId xmlns:a16="http://schemas.microsoft.com/office/drawing/2014/main" id="{EF691F02-744C-4F5C-02C6-D11EB977E782}"/>
+                <a16:creationId xmlns:a16="http://schemas.microsoft.com/office/drawing/2014/main" id="{343D4037-E95C-C9F9-9673-6B6704950B71}"/>
               </a:ext>
             </a:extLst>
           </p:cNvPr>
@@ -9429,7 +9435,7 @@
           <p:cNvPr id="19" name="Rectangle: Rounded Corners 18">
             <a:extLst>
               <a:ext uri="{FF2B5EF4-FFF2-40B4-BE49-F238E27FC236}">
-                <a16:creationId xmlns:a16="http://schemas.microsoft.com/office/drawing/2014/main" id="{49BB3F4C-2A0A-A306-B2E1-0AEF9B8B0BCA}"/>
+                <a16:creationId xmlns:a16="http://schemas.microsoft.com/office/drawing/2014/main" id="{6454FCD0-B0EC-4096-6EF2-6B1643EDF26D}"/>
               </a:ext>
             </a:extLst>
           </p:cNvPr>
@@ -9499,7 +9505,7 @@
           <p:cNvPr id="20" name="TextBox 19">
             <a:extLst>
               <a:ext uri="{FF2B5EF4-FFF2-40B4-BE49-F238E27FC236}">
-                <a16:creationId xmlns:a16="http://schemas.microsoft.com/office/drawing/2014/main" id="{8FC89E20-7F78-62CD-E6A5-5CB35CD7421A}"/>
+                <a16:creationId xmlns:a16="http://schemas.microsoft.com/office/drawing/2014/main" id="{679D6760-0D40-025E-DE44-984863C822DC}"/>
               </a:ext>
             </a:extLst>
           </p:cNvPr>
@@ -9545,7 +9551,7 @@
           <p:cNvPr id="21" name="TextBox 20">
             <a:extLst>
               <a:ext uri="{FF2B5EF4-FFF2-40B4-BE49-F238E27FC236}">
-                <a16:creationId xmlns:a16="http://schemas.microsoft.com/office/drawing/2014/main" id="{D3D31C88-201F-202E-3A0F-4C78C201E158}"/>
+                <a16:creationId xmlns:a16="http://schemas.microsoft.com/office/drawing/2014/main" id="{00EA700B-8363-4AA9-E3A2-E9E824C3052D}"/>
               </a:ext>
             </a:extLst>
           </p:cNvPr>
@@ -9584,7 +9590,7 @@
     </p:spTree>
     <p:extLst>
       <p:ext uri="{BB962C8B-B14F-4D97-AF65-F5344CB8AC3E}">
-        <p14:creationId xmlns:p14="http://schemas.microsoft.com/office/powerpoint/2010/main" val="2386186350"/>
+        <p14:creationId xmlns:p14="http://schemas.microsoft.com/office/powerpoint/2010/main" val="3233756946"/>
       </p:ext>
     </p:extLst>
   </p:cSld>
@@ -9624,7 +9630,7 @@
           <p:cNvPr id="2" name="TextBox 1">
             <a:extLst>
               <a:ext uri="{FF2B5EF4-FFF2-40B4-BE49-F238E27FC236}">
-                <a16:creationId xmlns:a16="http://schemas.microsoft.com/office/drawing/2014/main" id="{93FD31E3-4223-9847-2159-A886B194CFFC}"/>
+                <a16:creationId xmlns:a16="http://schemas.microsoft.com/office/drawing/2014/main" id="{B083DEC8-4B15-A868-DE93-7782D4B06137}"/>
               </a:ext>
             </a:extLst>
           </p:cNvPr>
@@ -9670,7 +9676,7 @@
           <p:cNvPr id="3" name="Rectangle: Rounded Corners 2">
             <a:extLst>
               <a:ext uri="{FF2B5EF4-FFF2-40B4-BE49-F238E27FC236}">
-                <a16:creationId xmlns:a16="http://schemas.microsoft.com/office/drawing/2014/main" id="{0874BEAB-2256-2813-F6D9-FFE380D69649}"/>
+                <a16:creationId xmlns:a16="http://schemas.microsoft.com/office/drawing/2014/main" id="{E99D0CC1-4E90-FDA7-DC68-C24B3579448E}"/>
               </a:ext>
             </a:extLst>
           </p:cNvPr>
@@ -9740,7 +9746,7 @@
           <p:cNvPr id="4" name="TextBox 3">
             <a:extLst>
               <a:ext uri="{FF2B5EF4-FFF2-40B4-BE49-F238E27FC236}">
-                <a16:creationId xmlns:a16="http://schemas.microsoft.com/office/drawing/2014/main" id="{8687C8B5-2320-906C-859F-8F0698A4FC7D}"/>
+                <a16:creationId xmlns:a16="http://schemas.microsoft.com/office/drawing/2014/main" id="{63CB9491-737E-BDFA-D52F-34F7FABB058B}"/>
               </a:ext>
             </a:extLst>
           </p:cNvPr>
@@ -9780,7 +9786,7 @@
           <p:cNvPr id="5" name="TextBox 4">
             <a:extLst>
               <a:ext uri="{FF2B5EF4-FFF2-40B4-BE49-F238E27FC236}">
-                <a16:creationId xmlns:a16="http://schemas.microsoft.com/office/drawing/2014/main" id="{59DA03E7-0F6E-F424-540F-FF850279D25A}"/>
+                <a16:creationId xmlns:a16="http://schemas.microsoft.com/office/drawing/2014/main" id="{C59AD20D-CC9B-39CE-2B00-3777976A59EE}"/>
               </a:ext>
             </a:extLst>
           </p:cNvPr>
@@ -9826,7 +9832,7 @@
           <p:cNvPr id="6" name="Rectangle: Rounded Corners 5">
             <a:extLst>
               <a:ext uri="{FF2B5EF4-FFF2-40B4-BE49-F238E27FC236}">
-                <a16:creationId xmlns:a16="http://schemas.microsoft.com/office/drawing/2014/main" id="{AA0A3163-821F-A073-64AA-EA045276B9A9}"/>
+                <a16:creationId xmlns:a16="http://schemas.microsoft.com/office/drawing/2014/main" id="{D3ED4F47-0D85-08F7-7C38-76ABB94039CD}"/>
               </a:ext>
             </a:extLst>
           </p:cNvPr>
@@ -9896,7 +9902,7 @@
           <p:cNvPr id="7" name="TextBox 6">
             <a:extLst>
               <a:ext uri="{FF2B5EF4-FFF2-40B4-BE49-F238E27FC236}">
-                <a16:creationId xmlns:a16="http://schemas.microsoft.com/office/drawing/2014/main" id="{112AC709-4318-8C90-2BB5-B4459D85757C}"/>
+                <a16:creationId xmlns:a16="http://schemas.microsoft.com/office/drawing/2014/main" id="{6F14A506-C458-DB3E-4D7F-A5373A12727C}"/>
               </a:ext>
             </a:extLst>
           </p:cNvPr>
@@ -9936,7 +9942,7 @@
           <p:cNvPr id="8" name="TextBox 7">
             <a:extLst>
               <a:ext uri="{FF2B5EF4-FFF2-40B4-BE49-F238E27FC236}">
-                <a16:creationId xmlns:a16="http://schemas.microsoft.com/office/drawing/2014/main" id="{1D79C96E-6F98-4AA7-650C-0B66919736FF}"/>
+                <a16:creationId xmlns:a16="http://schemas.microsoft.com/office/drawing/2014/main" id="{94CA03B4-9243-75BF-1E2F-31DF474BC2F9}"/>
               </a:ext>
             </a:extLst>
           </p:cNvPr>
@@ -9982,7 +9988,7 @@
           <p:cNvPr id="9" name="Rectangle: Rounded Corners 8">
             <a:extLst>
               <a:ext uri="{FF2B5EF4-FFF2-40B4-BE49-F238E27FC236}">
-                <a16:creationId xmlns:a16="http://schemas.microsoft.com/office/drawing/2014/main" id="{129E185C-3384-2FEB-2D09-C02B4D24E0F0}"/>
+                <a16:creationId xmlns:a16="http://schemas.microsoft.com/office/drawing/2014/main" id="{6F60F3FF-7C01-4F8C-C790-80BFB15DEB48}"/>
               </a:ext>
             </a:extLst>
           </p:cNvPr>
@@ -10052,7 +10058,7 @@
           <p:cNvPr id="10" name="TextBox 9">
             <a:extLst>
               <a:ext uri="{FF2B5EF4-FFF2-40B4-BE49-F238E27FC236}">
-                <a16:creationId xmlns:a16="http://schemas.microsoft.com/office/drawing/2014/main" id="{CE9F4573-8A87-C9D7-3EDC-0C7AB91106BF}"/>
+                <a16:creationId xmlns:a16="http://schemas.microsoft.com/office/drawing/2014/main" id="{DEEE0929-96B0-281F-1BEE-B41C6430B388}"/>
               </a:ext>
             </a:extLst>
           </p:cNvPr>
@@ -10092,7 +10098,7 @@
           <p:cNvPr id="11" name="TextBox 10">
             <a:extLst>
               <a:ext uri="{FF2B5EF4-FFF2-40B4-BE49-F238E27FC236}">
-                <a16:creationId xmlns:a16="http://schemas.microsoft.com/office/drawing/2014/main" id="{917EAF4A-E651-3DBF-A3B4-198C66086FA9}"/>
+                <a16:creationId xmlns:a16="http://schemas.microsoft.com/office/drawing/2014/main" id="{EA231BF5-B316-C032-B52F-168851CB5BE8}"/>
               </a:ext>
             </a:extLst>
           </p:cNvPr>
@@ -10138,7 +10144,7 @@
           <p:cNvPr id="12" name="Rectangle: Rounded Corners 11">
             <a:extLst>
               <a:ext uri="{FF2B5EF4-FFF2-40B4-BE49-F238E27FC236}">
-                <a16:creationId xmlns:a16="http://schemas.microsoft.com/office/drawing/2014/main" id="{ADCB26E8-4967-606A-E930-402E64226C3F}"/>
+                <a16:creationId xmlns:a16="http://schemas.microsoft.com/office/drawing/2014/main" id="{CC037217-0643-4E79-67DB-A55402FB4680}"/>
               </a:ext>
             </a:extLst>
           </p:cNvPr>
@@ -10208,7 +10214,7 @@
           <p:cNvPr id="13" name="TextBox 12">
             <a:extLst>
               <a:ext uri="{FF2B5EF4-FFF2-40B4-BE49-F238E27FC236}">
-                <a16:creationId xmlns:a16="http://schemas.microsoft.com/office/drawing/2014/main" id="{F701DEE3-08FF-8812-C261-03D18AA55A23}"/>
+                <a16:creationId xmlns:a16="http://schemas.microsoft.com/office/drawing/2014/main" id="{825D4B8B-F73D-AB3C-B759-DBF23E98C357}"/>
               </a:ext>
             </a:extLst>
           </p:cNvPr>
@@ -10248,7 +10254,7 @@
           <p:cNvPr id="14" name="TextBox 13">
             <a:extLst>
               <a:ext uri="{FF2B5EF4-FFF2-40B4-BE49-F238E27FC236}">
-                <a16:creationId xmlns:a16="http://schemas.microsoft.com/office/drawing/2014/main" id="{4F4203CB-9537-79D3-5F7E-A34857EAC61B}"/>
+                <a16:creationId xmlns:a16="http://schemas.microsoft.com/office/drawing/2014/main" id="{84F76765-C96B-30B6-0C28-84419440260C}"/>
               </a:ext>
             </a:extLst>
           </p:cNvPr>
@@ -10294,7 +10300,7 @@
           <p:cNvPr id="15" name="Rectangle: Rounded Corners 14">
             <a:extLst>
               <a:ext uri="{FF2B5EF4-FFF2-40B4-BE49-F238E27FC236}">
-                <a16:creationId xmlns:a16="http://schemas.microsoft.com/office/drawing/2014/main" id="{3EAC2738-62BC-0F4A-D43B-29DF799D13D5}"/>
+                <a16:creationId xmlns:a16="http://schemas.microsoft.com/office/drawing/2014/main" id="{E2204F93-9FD6-CA9F-600C-E2533024A9AA}"/>
               </a:ext>
             </a:extLst>
           </p:cNvPr>
@@ -10364,7 +10370,7 @@
           <p:cNvPr id="16" name="TextBox 15">
             <a:extLst>
               <a:ext uri="{FF2B5EF4-FFF2-40B4-BE49-F238E27FC236}">
-                <a16:creationId xmlns:a16="http://schemas.microsoft.com/office/drawing/2014/main" id="{66BD5936-45A3-2ABE-ADB5-0436D6117826}"/>
+                <a16:creationId xmlns:a16="http://schemas.microsoft.com/office/drawing/2014/main" id="{6A8212FB-227D-53FB-1A62-DDC989A5F306}"/>
               </a:ext>
             </a:extLst>
           </p:cNvPr>
@@ -10404,7 +10410,7 @@
           <p:cNvPr id="17" name="TextBox 16">
             <a:extLst>
               <a:ext uri="{FF2B5EF4-FFF2-40B4-BE49-F238E27FC236}">
-                <a16:creationId xmlns:a16="http://schemas.microsoft.com/office/drawing/2014/main" id="{0C4396BA-8907-5301-4ECF-88FBD5B15B30}"/>
+                <a16:creationId xmlns:a16="http://schemas.microsoft.com/office/drawing/2014/main" id="{D4BE6B6E-A481-96B4-E85A-BBB334EBB6F6}"/>
               </a:ext>
             </a:extLst>
           </p:cNvPr>
@@ -10469,7 +10475,7 @@
           <p:cNvPr id="18" name="TextBox 17">
             <a:extLst>
               <a:ext uri="{FF2B5EF4-FFF2-40B4-BE49-F238E27FC236}">
-                <a16:creationId xmlns:a16="http://schemas.microsoft.com/office/drawing/2014/main" id="{C4CFD30E-B1AE-F4A4-26CE-DF1610691690}"/>
+                <a16:creationId xmlns:a16="http://schemas.microsoft.com/office/drawing/2014/main" id="{D096255A-517A-E6B4-2D85-C691891DB3E7}"/>
               </a:ext>
             </a:extLst>
           </p:cNvPr>
@@ -10515,7 +10521,7 @@
           <p:cNvPr id="19" name="TextBox 18">
             <a:extLst>
               <a:ext uri="{FF2B5EF4-FFF2-40B4-BE49-F238E27FC236}">
-                <a16:creationId xmlns:a16="http://schemas.microsoft.com/office/drawing/2014/main" id="{F0162692-723C-6FBB-1695-1E6F5933369A}"/>
+                <a16:creationId xmlns:a16="http://schemas.microsoft.com/office/drawing/2014/main" id="{8357D6AC-1677-BBFD-B1CA-7775A150E5FA}"/>
               </a:ext>
             </a:extLst>
           </p:cNvPr>
@@ -10561,7 +10567,7 @@
           <p:cNvPr id="20" name="TextBox 19">
             <a:extLst>
               <a:ext uri="{FF2B5EF4-FFF2-40B4-BE49-F238E27FC236}">
-                <a16:creationId xmlns:a16="http://schemas.microsoft.com/office/drawing/2014/main" id="{986AA309-E2D1-19EB-648B-F44BD8146CC7}"/>
+                <a16:creationId xmlns:a16="http://schemas.microsoft.com/office/drawing/2014/main" id="{9AD529C0-4237-7AF9-0EE1-52D403638FE1}"/>
               </a:ext>
             </a:extLst>
           </p:cNvPr>
@@ -10606,7 +10612,7 @@
     </p:spTree>
     <p:extLst>
       <p:ext uri="{BB962C8B-B14F-4D97-AF65-F5344CB8AC3E}">
-        <p14:creationId xmlns:p14="http://schemas.microsoft.com/office/powerpoint/2010/main" val="409971176"/>
+        <p14:creationId xmlns:p14="http://schemas.microsoft.com/office/powerpoint/2010/main" val="513068102"/>
       </p:ext>
     </p:extLst>
   </p:cSld>
@@ -10646,7 +10652,7 @@
           <p:cNvPr id="2" name="TextBox 1">
             <a:extLst>
               <a:ext uri="{FF2B5EF4-FFF2-40B4-BE49-F238E27FC236}">
-                <a16:creationId xmlns:a16="http://schemas.microsoft.com/office/drawing/2014/main" id="{0CCDC2BE-E76D-E028-5C76-A7626E46A29C}"/>
+                <a16:creationId xmlns:a16="http://schemas.microsoft.com/office/drawing/2014/main" id="{AB0769EA-E699-9CA5-A518-4A2A9A41BE24}"/>
               </a:ext>
             </a:extLst>
           </p:cNvPr>
@@ -10686,7 +10692,7 @@
           <p:cNvPr id="3" name="TextBox 2">
             <a:extLst>
               <a:ext uri="{FF2B5EF4-FFF2-40B4-BE49-F238E27FC236}">
-                <a16:creationId xmlns:a16="http://schemas.microsoft.com/office/drawing/2014/main" id="{0686F2CC-F1A1-E8FE-5C84-8AA4E6A84348}"/>
+                <a16:creationId xmlns:a16="http://schemas.microsoft.com/office/drawing/2014/main" id="{5881A2C1-D09D-0BD7-4433-EBDB5B1F1C29}"/>
               </a:ext>
             </a:extLst>
           </p:cNvPr>
@@ -10732,7 +10738,7 @@
           <p:cNvPr id="4" name="Oval 3">
             <a:extLst>
               <a:ext uri="{FF2B5EF4-FFF2-40B4-BE49-F238E27FC236}">
-                <a16:creationId xmlns:a16="http://schemas.microsoft.com/office/drawing/2014/main" id="{7041BBFA-0C88-585D-DC87-71434917F96D}"/>
+                <a16:creationId xmlns:a16="http://schemas.microsoft.com/office/drawing/2014/main" id="{AC3F65EF-1758-6BB6-529A-F854F08D1C80}"/>
               </a:ext>
             </a:extLst>
           </p:cNvPr>
@@ -10808,7 +10814,7 @@
           <p:cNvPr id="5" name="TextBox 4">
             <a:extLst>
               <a:ext uri="{FF2B5EF4-FFF2-40B4-BE49-F238E27FC236}">
-                <a16:creationId xmlns:a16="http://schemas.microsoft.com/office/drawing/2014/main" id="{470E8F7A-5915-D1ED-AAA3-EE1DB4259AB8}"/>
+                <a16:creationId xmlns:a16="http://schemas.microsoft.com/office/drawing/2014/main" id="{BB6C4AE5-C918-ACE3-8092-1AFA39CCE60A}"/>
               </a:ext>
             </a:extLst>
           </p:cNvPr>
@@ -10854,7 +10860,7 @@
           <p:cNvPr id="6" name="Oval 5">
             <a:extLst>
               <a:ext uri="{FF2B5EF4-FFF2-40B4-BE49-F238E27FC236}">
-                <a16:creationId xmlns:a16="http://schemas.microsoft.com/office/drawing/2014/main" id="{A7A15DB8-B014-96E5-8609-84F06C8B5659}"/>
+                <a16:creationId xmlns:a16="http://schemas.microsoft.com/office/drawing/2014/main" id="{E27029DA-BB52-1FCD-276F-AA915D1B3F30}"/>
               </a:ext>
             </a:extLst>
           </p:cNvPr>
@@ -10930,7 +10936,7 @@
           <p:cNvPr id="7" name="TextBox 6">
             <a:extLst>
               <a:ext uri="{FF2B5EF4-FFF2-40B4-BE49-F238E27FC236}">
-                <a16:creationId xmlns:a16="http://schemas.microsoft.com/office/drawing/2014/main" id="{EEFEB5AA-36A7-F161-4AE8-950855185136}"/>
+                <a16:creationId xmlns:a16="http://schemas.microsoft.com/office/drawing/2014/main" id="{A1A8CEDE-3942-8E21-3EF3-01EC57AFFD07}"/>
               </a:ext>
             </a:extLst>
           </p:cNvPr>
@@ -10976,7 +10982,7 @@
           <p:cNvPr id="8" name="Oval 7">
             <a:extLst>
               <a:ext uri="{FF2B5EF4-FFF2-40B4-BE49-F238E27FC236}">
-                <a16:creationId xmlns:a16="http://schemas.microsoft.com/office/drawing/2014/main" id="{6226C8A5-F0FE-0279-62DD-F2E330F3061A}"/>
+                <a16:creationId xmlns:a16="http://schemas.microsoft.com/office/drawing/2014/main" id="{43C0904F-1215-726A-B2F1-45C7A4BD5B3C}"/>
               </a:ext>
             </a:extLst>
           </p:cNvPr>
@@ -11052,7 +11058,7 @@
           <p:cNvPr id="9" name="TextBox 8">
             <a:extLst>
               <a:ext uri="{FF2B5EF4-FFF2-40B4-BE49-F238E27FC236}">
-                <a16:creationId xmlns:a16="http://schemas.microsoft.com/office/drawing/2014/main" id="{7F3FC030-F60C-579B-C031-D35A31984C20}"/>
+                <a16:creationId xmlns:a16="http://schemas.microsoft.com/office/drawing/2014/main" id="{18D79AF6-CC6B-9D07-0550-B46B7EC8FE7D}"/>
               </a:ext>
             </a:extLst>
           </p:cNvPr>
@@ -11098,7 +11104,7 @@
           <p:cNvPr id="10" name="Oval 9">
             <a:extLst>
               <a:ext uri="{FF2B5EF4-FFF2-40B4-BE49-F238E27FC236}">
-                <a16:creationId xmlns:a16="http://schemas.microsoft.com/office/drawing/2014/main" id="{E5D6D556-523B-86D6-B5BF-CE2D74343955}"/>
+                <a16:creationId xmlns:a16="http://schemas.microsoft.com/office/drawing/2014/main" id="{2A45EEDA-6464-D86A-12B3-E08F54920F90}"/>
               </a:ext>
             </a:extLst>
           </p:cNvPr>
@@ -11174,7 +11180,7 @@
           <p:cNvPr id="11" name="TextBox 10">
             <a:extLst>
               <a:ext uri="{FF2B5EF4-FFF2-40B4-BE49-F238E27FC236}">
-                <a16:creationId xmlns:a16="http://schemas.microsoft.com/office/drawing/2014/main" id="{6C9AD358-4E5F-B538-6267-86EE9563D790}"/>
+                <a16:creationId xmlns:a16="http://schemas.microsoft.com/office/drawing/2014/main" id="{47223473-0096-EC57-1996-4C02A929076B}"/>
               </a:ext>
             </a:extLst>
           </p:cNvPr>
@@ -11220,7 +11226,7 @@
           <p:cNvPr id="12" name="Oval 11">
             <a:extLst>
               <a:ext uri="{FF2B5EF4-FFF2-40B4-BE49-F238E27FC236}">
-                <a16:creationId xmlns:a16="http://schemas.microsoft.com/office/drawing/2014/main" id="{1822F9DC-7626-0882-19DD-15845A800924}"/>
+                <a16:creationId xmlns:a16="http://schemas.microsoft.com/office/drawing/2014/main" id="{5382F9AE-45CC-7770-BBE1-AA4AA357E351}"/>
               </a:ext>
             </a:extLst>
           </p:cNvPr>
@@ -11296,7 +11302,7 @@
           <p:cNvPr id="13" name="TextBox 12">
             <a:extLst>
               <a:ext uri="{FF2B5EF4-FFF2-40B4-BE49-F238E27FC236}">
-                <a16:creationId xmlns:a16="http://schemas.microsoft.com/office/drawing/2014/main" id="{049B884A-4017-7D16-931B-A0A2A822BF08}"/>
+                <a16:creationId xmlns:a16="http://schemas.microsoft.com/office/drawing/2014/main" id="{8EED635F-AFFC-379F-F623-5501E1BC5174}"/>
               </a:ext>
             </a:extLst>
           </p:cNvPr>
@@ -11342,7 +11348,7 @@
           <p:cNvPr id="15" name="Picture 14">
             <a:extLst>
               <a:ext uri="{FF2B5EF4-FFF2-40B4-BE49-F238E27FC236}">
-                <a16:creationId xmlns:a16="http://schemas.microsoft.com/office/drawing/2014/main" id="{EC9B5C11-9EA9-1985-3505-77F9D98FE130}"/>
+                <a16:creationId xmlns:a16="http://schemas.microsoft.com/office/drawing/2014/main" id="{7F6F7046-D363-E936-35B8-C2C77878A2E8}"/>
               </a:ext>
             </a:extLst>
           </p:cNvPr>
@@ -11383,7 +11389,7 @@
           <p:cNvPr id="16" name="TextBox 15">
             <a:extLst>
               <a:ext uri="{FF2B5EF4-FFF2-40B4-BE49-F238E27FC236}">
-                <a16:creationId xmlns:a16="http://schemas.microsoft.com/office/drawing/2014/main" id="{E477F25D-8F4A-70FD-6FCC-F97482A9B0FC}"/>
+                <a16:creationId xmlns:a16="http://schemas.microsoft.com/office/drawing/2014/main" id="{7F1EB5F6-C7C6-E60D-0A6F-CBAA2F77111D}"/>
               </a:ext>
             </a:extLst>
           </p:cNvPr>
@@ -11427,7 +11433,7 @@
     </p:spTree>
     <p:extLst>
       <p:ext uri="{BB962C8B-B14F-4D97-AF65-F5344CB8AC3E}">
-        <p14:creationId xmlns:p14="http://schemas.microsoft.com/office/powerpoint/2010/main" val="1190387608"/>
+        <p14:creationId xmlns:p14="http://schemas.microsoft.com/office/powerpoint/2010/main" val="1037793958"/>
       </p:ext>
     </p:extLst>
   </p:cSld>
@@ -11467,7 +11473,7 @@
           <p:cNvPr id="2" name="TextBox 1">
             <a:extLst>
               <a:ext uri="{FF2B5EF4-FFF2-40B4-BE49-F238E27FC236}">
-                <a16:creationId xmlns:a16="http://schemas.microsoft.com/office/drawing/2014/main" id="{52295240-EE2C-1E1D-274A-4B994B4C31BB}"/>
+                <a16:creationId xmlns:a16="http://schemas.microsoft.com/office/drawing/2014/main" id="{0361A244-F027-F4DF-B51B-DA1B9B51D349}"/>
               </a:ext>
             </a:extLst>
           </p:cNvPr>
@@ -11497,58 +11503,93 @@
                 </a:solidFill>
                 <a:latin typeface="Cambria" panose="02040503050406030204" pitchFamily="18" charset="0"/>
               </a:rPr>
-              <a:t>What a reviewer gets</a:t>
-            </a:r>
-          </a:p>
-        </p:txBody>
-      </p:sp>
-      <p:pic>
-        <p:nvPicPr>
-          <p:cNvPr id="4" name="Picture 3">
-            <a:extLst>
-              <a:ext uri="{FF2B5EF4-FFF2-40B4-BE49-F238E27FC236}">
-                <a16:creationId xmlns:a16="http://schemas.microsoft.com/office/drawing/2014/main" id="{A4654793-5F34-66D5-AD29-64332EE2E529}"/>
-              </a:ext>
-            </a:extLst>
-          </p:cNvPr>
-          <p:cNvPicPr>
-            <a:picLocks/>
-          </p:cNvPicPr>
-          <p:nvPr/>
-        </p:nvPicPr>
-        <p:blipFill>
-          <a:blip r:embed="rId3">
-            <a:extLst>
-              <a:ext uri="{28A0092B-C50C-407E-A947-70E740481C1C}">
-                <a14:useLocalDpi xmlns:a14="http://schemas.microsoft.com/office/drawing/2010/main" val="0"/>
-              </a:ext>
-            </a:extLst>
-          </a:blip>
-          <a:stretch>
-            <a:fillRect/>
-          </a:stretch>
-        </p:blipFill>
+              <a:t>What makes it different</a:t>
+            </a:r>
+          </a:p>
+        </p:txBody>
+      </p:sp>
+      <p:sp>
+        <p:nvSpPr>
+          <p:cNvPr id="3" name="Oval 2">
+            <a:extLst>
+              <a:ext uri="{FF2B5EF4-FFF2-40B4-BE49-F238E27FC236}">
+                <a16:creationId xmlns:a16="http://schemas.microsoft.com/office/drawing/2014/main" id="{3AC75AD2-E50B-A0C0-5B79-BAC6611C6B19}"/>
+              </a:ext>
+            </a:extLst>
+          </p:cNvPr>
+          <p:cNvSpPr/>
+          <p:nvPr/>
+        </p:nvSpPr>
         <p:spPr>
           <a:xfrm>
             <a:off x="609600" y="1219200"/>
-            <a:ext cx="3669792" cy="3276600"/>
-          </a:xfrm>
-          <a:prstGeom prst="rect">
-            <a:avLst/>
-          </a:prstGeom>
-          <a:ln w="9525">
-            <a:solidFill>
-              <a:srgbClr val="D1D5DB"/>
-            </a:solidFill>
+            <a:ext cx="330200" cy="330200"/>
+          </a:xfrm>
+          <a:prstGeom prst="ellipse">
+            <a:avLst/>
+          </a:prstGeom>
+          <a:solidFill>
+            <a:srgbClr val="D9A441"/>
+          </a:solidFill>
+          <a:ln w="19050" cap="flat" cmpd="sng" algn="ctr">
+            <a:noFill/>
+            <a:prstDash val="solid"/>
+            <a:miter lim="800000"/>
           </a:ln>
-        </p:spPr>
-      </p:pic>
-      <p:sp>
-        <p:nvSpPr>
-          <p:cNvPr id="5" name="TextBox 4">
-            <a:extLst>
-              <a:ext uri="{FF2B5EF4-FFF2-40B4-BE49-F238E27FC236}">
-                <a16:creationId xmlns:a16="http://schemas.microsoft.com/office/drawing/2014/main" id="{4C7F1A74-127B-053F-CF57-75C97518C089}"/>
+          <a:effectLst/>
+          <a:extLst>
+            <a:ext uri="{91240B29-F687-4F45-9708-019B960494DF}">
+              <a14:hiddenLine xmlns:a14="http://schemas.microsoft.com/office/drawing/2010/main" w="19050" cap="flat" cmpd="sng" algn="ctr">
+                <a:solidFill>
+                  <a:schemeClr val="accent1">
+                    <a:shade val="15000"/>
+                  </a:schemeClr>
+                </a:solidFill>
+                <a:prstDash val="solid"/>
+                <a:miter lim="800000"/>
+              </a14:hiddenLine>
+            </a:ext>
+          </a:extLst>
+        </p:spPr>
+        <p:style>
+          <a:lnRef idx="2">
+            <a:schemeClr val="accent1">
+              <a:shade val="15000"/>
+            </a:schemeClr>
+          </a:lnRef>
+          <a:fillRef idx="1">
+            <a:schemeClr val="accent1"/>
+          </a:fillRef>
+          <a:effectRef idx="0">
+            <a:schemeClr val="accent1"/>
+          </a:effectRef>
+          <a:fontRef idx="minor">
+            <a:schemeClr val="lt1"/>
+          </a:fontRef>
+        </p:style>
+        <p:txBody>
+          <a:bodyPr lIns="0" tIns="0" rIns="0" bIns="0" rtlCol="0" anchor="ctr"/>
+          <a:lstStyle/>
+          <a:p>
+            <a:pPr algn="ctr"/>
+            <a:r>
+              <a:rPr lang="en-MY" sz="1170" b="1">
+                <a:solidFill>
+                  <a:srgbClr val="1F2430"/>
+                </a:solidFill>
+                <a:latin typeface="Calibri" panose="020F0502020204030204" pitchFamily="34" charset="0"/>
+              </a:rPr>
+              <a:t>1</a:t>
+            </a:r>
+          </a:p>
+        </p:txBody>
+      </p:sp>
+      <p:sp>
+        <p:nvSpPr>
+          <p:cNvPr id="4" name="TextBox 3">
+            <a:extLst>
+              <a:ext uri="{FF2B5EF4-FFF2-40B4-BE49-F238E27FC236}">
+                <a16:creationId xmlns:a16="http://schemas.microsoft.com/office/drawing/2014/main" id="{C05F72C1-3DEC-11E2-A1E9-81BF16D29016}"/>
               </a:ext>
             </a:extLst>
           </p:cNvPr>
@@ -11557,8 +11598,8 @@
         </p:nvSpPr>
         <p:spPr>
           <a:xfrm>
-            <a:off x="609600" y="4648200"/>
-            <a:ext cx="5334000" cy="300082"/>
+            <a:off x="1066800" y="1193800"/>
+            <a:ext cx="5588000" cy="300082"/>
           </a:xfrm>
           <a:prstGeom prst="rect">
             <a:avLst/>
@@ -11572,13 +11613,53 @@
           <a:lstStyle/>
           <a:p>
             <a:r>
-              <a:rPr lang="en-US" sz="1100">
-                <a:solidFill>
-                  <a:srgbClr val="6B7280"/>
+              <a:rPr lang="en-MY" b="1">
+                <a:solidFill>
+                  <a:srgbClr val="1F2430"/>
                 </a:solidFill>
                 <a:latin typeface="Calibri" panose="020F0502020204030204" pitchFamily="34" charset="0"/>
               </a:rPr>
-              <a:t>A mismatch: the two fields that differ, and under every value the document, the line and the label it was read from.</a:t>
+              <a:t>Correct by re-upload</a:t>
+            </a:r>
+          </a:p>
+        </p:txBody>
+      </p:sp>
+      <p:sp>
+        <p:nvSpPr>
+          <p:cNvPr id="5" name="TextBox 4">
+            <a:extLst>
+              <a:ext uri="{FF2B5EF4-FFF2-40B4-BE49-F238E27FC236}">
+                <a16:creationId xmlns:a16="http://schemas.microsoft.com/office/drawing/2014/main" id="{B84D7421-C657-CFAD-09D0-726232C6DE9F}"/>
+              </a:ext>
+            </a:extLst>
+          </p:cNvPr>
+          <p:cNvSpPr txBox="1"/>
+          <p:nvPr/>
+        </p:nvSpPr>
+        <p:spPr>
+          <a:xfrm>
+            <a:off x="1066800" y="1473200"/>
+            <a:ext cx="5588000" cy="300082"/>
+          </a:xfrm>
+          <a:prstGeom prst="rect">
+            <a:avLst/>
+          </a:prstGeom>
+          <a:noFill/>
+        </p:spPr>
+        <p:txBody>
+          <a:bodyPr vert="horz" wrap="square" lIns="0" tIns="0" rIns="0" bIns="0" rtlCol="0" anchor="t">
+            <a:noAutofit/>
+          </a:bodyPr>
+          <a:lstStyle/>
+          <a:p>
+            <a:r>
+              <a:rPr lang="en-US" sz="1100">
+                <a:solidFill>
+                  <a:srgbClr val="6B7280"/>
+                </a:solidFill>
+                <a:latin typeface="Calibri" panose="020F0502020204030204" pitchFamily="34" charset="0"/>
+              </a:rPr>
+              <a:t>The sender re-sends a fixed SI or BL? Attach it on the case and the same check runs again. The old answer stays on record.</a:t>
             </a:r>
             <a:endParaRPr lang="en-MY" sz="1100">
               <a:solidFill>
@@ -11589,53 +11670,88 @@
           </a:p>
         </p:txBody>
       </p:sp>
-      <p:pic>
-        <p:nvPicPr>
-          <p:cNvPr id="7" name="Picture 6">
-            <a:extLst>
-              <a:ext uri="{FF2B5EF4-FFF2-40B4-BE49-F238E27FC236}">
-                <a16:creationId xmlns:a16="http://schemas.microsoft.com/office/drawing/2014/main" id="{E2C8B5C3-AC4B-6690-B493-E7426EF5CA01}"/>
-              </a:ext>
-            </a:extLst>
-          </p:cNvPr>
-          <p:cNvPicPr>
-            <a:picLocks/>
-          </p:cNvPicPr>
-          <p:nvPr/>
-        </p:nvPicPr>
-        <p:blipFill>
-          <a:blip r:embed="rId4">
-            <a:extLst>
-              <a:ext uri="{28A0092B-C50C-407E-A947-70E740481C1C}">
-                <a14:useLocalDpi xmlns:a14="http://schemas.microsoft.com/office/drawing/2010/main" val="0"/>
-              </a:ext>
-            </a:extLst>
-          </a:blip>
-          <a:stretch>
-            <a:fillRect/>
-          </a:stretch>
-        </p:blipFill>
-        <p:spPr>
-          <a:xfrm>
-            <a:off x="6248400" y="1219200"/>
-            <a:ext cx="5334000" cy="2074333"/>
-          </a:xfrm>
-          <a:prstGeom prst="rect">
-            <a:avLst/>
-          </a:prstGeom>
-          <a:ln w="9525">
-            <a:solidFill>
-              <a:srgbClr val="D1D5DB"/>
-            </a:solidFill>
+      <p:sp>
+        <p:nvSpPr>
+          <p:cNvPr id="6" name="Oval 5">
+            <a:extLst>
+              <a:ext uri="{FF2B5EF4-FFF2-40B4-BE49-F238E27FC236}">
+                <a16:creationId xmlns:a16="http://schemas.microsoft.com/office/drawing/2014/main" id="{A9C5D531-C8ED-7A37-3486-0669E6662FBE}"/>
+              </a:ext>
+            </a:extLst>
+          </p:cNvPr>
+          <p:cNvSpPr/>
+          <p:nvPr/>
+        </p:nvSpPr>
+        <p:spPr>
+          <a:xfrm>
+            <a:off x="609600" y="2082800"/>
+            <a:ext cx="330200" cy="330200"/>
+          </a:xfrm>
+          <a:prstGeom prst="ellipse">
+            <a:avLst/>
+          </a:prstGeom>
+          <a:solidFill>
+            <a:srgbClr val="D9A441"/>
+          </a:solidFill>
+          <a:ln w="19050" cap="flat" cmpd="sng" algn="ctr">
+            <a:noFill/>
+            <a:prstDash val="solid"/>
+            <a:miter lim="800000"/>
           </a:ln>
-        </p:spPr>
-      </p:pic>
-      <p:sp>
-        <p:nvSpPr>
-          <p:cNvPr id="8" name="TextBox 7">
-            <a:extLst>
-              <a:ext uri="{FF2B5EF4-FFF2-40B4-BE49-F238E27FC236}">
-                <a16:creationId xmlns:a16="http://schemas.microsoft.com/office/drawing/2014/main" id="{3F7B5AF6-0799-2482-E39A-2B0002951705}"/>
+          <a:effectLst/>
+          <a:extLst>
+            <a:ext uri="{91240B29-F687-4F45-9708-019B960494DF}">
+              <a14:hiddenLine xmlns:a14="http://schemas.microsoft.com/office/drawing/2010/main" w="19050" cap="flat" cmpd="sng" algn="ctr">
+                <a:solidFill>
+                  <a:schemeClr val="accent1">
+                    <a:shade val="15000"/>
+                  </a:schemeClr>
+                </a:solidFill>
+                <a:prstDash val="solid"/>
+                <a:miter lim="800000"/>
+              </a14:hiddenLine>
+            </a:ext>
+          </a:extLst>
+        </p:spPr>
+        <p:style>
+          <a:lnRef idx="2">
+            <a:schemeClr val="accent1">
+              <a:shade val="15000"/>
+            </a:schemeClr>
+          </a:lnRef>
+          <a:fillRef idx="1">
+            <a:schemeClr val="accent1"/>
+          </a:fillRef>
+          <a:effectRef idx="0">
+            <a:schemeClr val="accent1"/>
+          </a:effectRef>
+          <a:fontRef idx="minor">
+            <a:schemeClr val="lt1"/>
+          </a:fontRef>
+        </p:style>
+        <p:txBody>
+          <a:bodyPr lIns="0" tIns="0" rIns="0" bIns="0" rtlCol="0" anchor="ctr"/>
+          <a:lstStyle/>
+          <a:p>
+            <a:pPr algn="ctr"/>
+            <a:r>
+              <a:rPr lang="en-MY" sz="1170" b="1">
+                <a:solidFill>
+                  <a:srgbClr val="1F2430"/>
+                </a:solidFill>
+                <a:latin typeface="Calibri" panose="020F0502020204030204" pitchFamily="34" charset="0"/>
+              </a:rPr>
+              <a:t>2</a:t>
+            </a:r>
+          </a:p>
+        </p:txBody>
+      </p:sp>
+      <p:sp>
+        <p:nvSpPr>
+          <p:cNvPr id="7" name="TextBox 6">
+            <a:extLst>
+              <a:ext uri="{FF2B5EF4-FFF2-40B4-BE49-F238E27FC236}">
+                <a16:creationId xmlns:a16="http://schemas.microsoft.com/office/drawing/2014/main" id="{9CDAA1BC-700D-EB24-5E07-E5A0A4B021CF}"/>
               </a:ext>
             </a:extLst>
           </p:cNvPr>
@@ -11644,8 +11760,8 @@
         </p:nvSpPr>
         <p:spPr>
           <a:xfrm>
-            <a:off x="6248400" y="4648200"/>
-            <a:ext cx="5334000" cy="300082"/>
+            <a:off x="1066800" y="2057400"/>
+            <a:ext cx="5588000" cy="300082"/>
           </a:xfrm>
           <a:prstGeom prst="rect">
             <a:avLst/>
@@ -11659,13 +11775,59 @@
           <a:lstStyle/>
           <a:p>
             <a:r>
-              <a:rPr lang="en-US" sz="1100">
-                <a:solidFill>
-                  <a:srgbClr val="6B7280"/>
+              <a:rPr lang="en-US" b="1">
+                <a:solidFill>
+                  <a:srgbClr val="1F2430"/>
                 </a:solidFill>
                 <a:latin typeface="Calibri" panose="020F0502020204030204" pitchFamily="34" charset="0"/>
               </a:rPr>
-              <a:t>A scan: the model's reading as reviewer evidence, marked as such - nothing entered the comparison.</a:t>
+              <a:t>Scans read out for the reviewer</a:t>
+            </a:r>
+            <a:endParaRPr lang="en-MY" b="1">
+              <a:solidFill>
+                <a:srgbClr val="1F2430"/>
+              </a:solidFill>
+              <a:latin typeface="Calibri" panose="020F0502020204030204" pitchFamily="34" charset="0"/>
+            </a:endParaRPr>
+          </a:p>
+        </p:txBody>
+      </p:sp>
+      <p:sp>
+        <p:nvSpPr>
+          <p:cNvPr id="8" name="TextBox 7">
+            <a:extLst>
+              <a:ext uri="{FF2B5EF4-FFF2-40B4-BE49-F238E27FC236}">
+                <a16:creationId xmlns:a16="http://schemas.microsoft.com/office/drawing/2014/main" id="{F3910C63-3416-AAF1-BBF6-BECFD56EF6A0}"/>
+              </a:ext>
+            </a:extLst>
+          </p:cNvPr>
+          <p:cNvSpPr txBox="1"/>
+          <p:nvPr/>
+        </p:nvSpPr>
+        <p:spPr>
+          <a:xfrm>
+            <a:off x="1066800" y="2336800"/>
+            <a:ext cx="5588000" cy="300082"/>
+          </a:xfrm>
+          <a:prstGeom prst="rect">
+            <a:avLst/>
+          </a:prstGeom>
+          <a:noFill/>
+        </p:spPr>
+        <p:txBody>
+          <a:bodyPr vert="horz" wrap="square" lIns="0" tIns="0" rIns="0" bIns="0" rtlCol="0" anchor="t">
+            <a:noAutofit/>
+          </a:bodyPr>
+          <a:lstStyle/>
+          <a:p>
+            <a:r>
+              <a:rPr lang="en-US" sz="1100">
+                <a:solidFill>
+                  <a:srgbClr val="6B7280"/>
+                </a:solidFill>
+                <a:latin typeface="Calibri" panose="020F0502020204030204" pitchFamily="34" charset="0"/>
+              </a:rPr>
+              <a:t>An image-only PDF still goes to a person - but with the seven fields already read by the model, marked as evidence, not a verdict.</a:t>
             </a:r>
             <a:endParaRPr lang="en-MY" sz="1100">
               <a:solidFill>
@@ -11678,10 +11840,86 @@
       </p:sp>
       <p:sp>
         <p:nvSpPr>
-          <p:cNvPr id="9" name="TextBox 8">
-            <a:extLst>
-              <a:ext uri="{FF2B5EF4-FFF2-40B4-BE49-F238E27FC236}">
-                <a16:creationId xmlns:a16="http://schemas.microsoft.com/office/drawing/2014/main" id="{905C8990-005D-30D5-982B-011DB0B08EBE}"/>
+          <p:cNvPr id="9" name="Oval 8">
+            <a:extLst>
+              <a:ext uri="{FF2B5EF4-FFF2-40B4-BE49-F238E27FC236}">
+                <a16:creationId xmlns:a16="http://schemas.microsoft.com/office/drawing/2014/main" id="{2641CD8E-D788-FD4B-5222-ACE4099FEEE6}"/>
+              </a:ext>
+            </a:extLst>
+          </p:cNvPr>
+          <p:cNvSpPr/>
+          <p:nvPr/>
+        </p:nvSpPr>
+        <p:spPr>
+          <a:xfrm>
+            <a:off x="609600" y="2946400"/>
+            <a:ext cx="330200" cy="330200"/>
+          </a:xfrm>
+          <a:prstGeom prst="ellipse">
+            <a:avLst/>
+          </a:prstGeom>
+          <a:solidFill>
+            <a:srgbClr val="D9A441"/>
+          </a:solidFill>
+          <a:ln w="19050" cap="flat" cmpd="sng" algn="ctr">
+            <a:noFill/>
+            <a:prstDash val="solid"/>
+            <a:miter lim="800000"/>
+          </a:ln>
+          <a:effectLst/>
+          <a:extLst>
+            <a:ext uri="{91240B29-F687-4F45-9708-019B960494DF}">
+              <a14:hiddenLine xmlns:a14="http://schemas.microsoft.com/office/drawing/2010/main" w="19050" cap="flat" cmpd="sng" algn="ctr">
+                <a:solidFill>
+                  <a:schemeClr val="accent1">
+                    <a:shade val="15000"/>
+                  </a:schemeClr>
+                </a:solidFill>
+                <a:prstDash val="solid"/>
+                <a:miter lim="800000"/>
+              </a14:hiddenLine>
+            </a:ext>
+          </a:extLst>
+        </p:spPr>
+        <p:style>
+          <a:lnRef idx="2">
+            <a:schemeClr val="accent1">
+              <a:shade val="15000"/>
+            </a:schemeClr>
+          </a:lnRef>
+          <a:fillRef idx="1">
+            <a:schemeClr val="accent1"/>
+          </a:fillRef>
+          <a:effectRef idx="0">
+            <a:schemeClr val="accent1"/>
+          </a:effectRef>
+          <a:fontRef idx="minor">
+            <a:schemeClr val="lt1"/>
+          </a:fontRef>
+        </p:style>
+        <p:txBody>
+          <a:bodyPr lIns="0" tIns="0" rIns="0" bIns="0" rtlCol="0" anchor="ctr"/>
+          <a:lstStyle/>
+          <a:p>
+            <a:pPr algn="ctr"/>
+            <a:r>
+              <a:rPr lang="en-MY" sz="1170" b="1">
+                <a:solidFill>
+                  <a:srgbClr val="1F2430"/>
+                </a:solidFill>
+                <a:latin typeface="Calibri" panose="020F0502020204030204" pitchFamily="34" charset="0"/>
+              </a:rPr>
+              <a:t>3</a:t>
+            </a:r>
+          </a:p>
+        </p:txBody>
+      </p:sp>
+      <p:sp>
+        <p:nvSpPr>
+          <p:cNvPr id="10" name="TextBox 9">
+            <a:extLst>
+              <a:ext uri="{FF2B5EF4-FFF2-40B4-BE49-F238E27FC236}">
+                <a16:creationId xmlns:a16="http://schemas.microsoft.com/office/drawing/2014/main" id="{36B2F309-7043-6823-CFA0-172ABBDCC853}"/>
               </a:ext>
             </a:extLst>
           </p:cNvPr>
@@ -11690,8 +11928,8 @@
         </p:nvSpPr>
         <p:spPr>
           <a:xfrm>
-            <a:off x="609600" y="5181600"/>
-            <a:ext cx="10972800" cy="300082"/>
+            <a:off x="1066800" y="2921000"/>
+            <a:ext cx="5588000" cy="300082"/>
           </a:xfrm>
           <a:prstGeom prst="rect">
             <a:avLst/>
@@ -11704,87 +11942,599 @@
           </a:bodyPr>
           <a:lstStyle/>
           <a:p>
-            <a:pPr marL="177800" indent="-177800">
-              <a:spcAft>
-                <a:spcPts val="300"/>
-              </a:spcAft>
-              <a:buClr>
-                <a:srgbClr val="D9A441"/>
-              </a:buClr>
-              <a:buFont typeface="+mj-lt"/>
-              <a:buChar char="•"/>
-            </a:pPr>
-            <a:r>
-              <a:rPr lang="en-US" sz="1150">
+            <a:r>
+              <a:rPr lang="en-US" b="1">
                 <a:solidFill>
                   <a:srgbClr val="1F2430"/>
                 </a:solidFill>
                 <a:latin typeface="Calibri" panose="020F0502020204030204" pitchFamily="34" charset="0"/>
               </a:rPr>
-              <a:t>Correct a single field, with how often this shipper was wrong on it beside the box</a:t>
-            </a:r>
-          </a:p>
-          <a:p>
-            <a:pPr marL="177800" indent="-177800">
-              <a:spcAft>
-                <a:spcPts val="300"/>
-              </a:spcAft>
-              <a:buClr>
-                <a:srgbClr val="D9A441"/>
-              </a:buClr>
-              <a:buFont typeface="+mj-lt"/>
-              <a:buChar char="•"/>
-            </a:pPr>
-            <a:r>
-              <a:rPr lang="en-US" sz="1150">
-                <a:solidFill>
-                  <a:srgbClr val="1F2430"/>
+              <a:t>Shipper history on the field</a:t>
+            </a:r>
+            <a:endParaRPr lang="en-MY" b="1">
+              <a:solidFill>
+                <a:srgbClr val="1F2430"/>
+              </a:solidFill>
+              <a:latin typeface="Calibri" panose="020F0502020204030204" pitchFamily="34" charset="0"/>
+            </a:endParaRPr>
+          </a:p>
+        </p:txBody>
+      </p:sp>
+      <p:sp>
+        <p:nvSpPr>
+          <p:cNvPr id="11" name="TextBox 10">
+            <a:extLst>
+              <a:ext uri="{FF2B5EF4-FFF2-40B4-BE49-F238E27FC236}">
+                <a16:creationId xmlns:a16="http://schemas.microsoft.com/office/drawing/2014/main" id="{17DBB224-D5BB-F090-AADD-C76D84E361A2}"/>
+              </a:ext>
+            </a:extLst>
+          </p:cNvPr>
+          <p:cNvSpPr txBox="1"/>
+          <p:nvPr/>
+        </p:nvSpPr>
+        <p:spPr>
+          <a:xfrm>
+            <a:off x="1066800" y="3200400"/>
+            <a:ext cx="5588000" cy="300082"/>
+          </a:xfrm>
+          <a:prstGeom prst="rect">
+            <a:avLst/>
+          </a:prstGeom>
+          <a:noFill/>
+        </p:spPr>
+        <p:txBody>
+          <a:bodyPr vert="horz" wrap="square" lIns="0" tIns="0" rIns="0" bIns="0" rtlCol="0" anchor="t">
+            <a:noAutofit/>
+          </a:bodyPr>
+          <a:lstStyle/>
+          <a:p>
+            <a:r>
+              <a:rPr lang="en-US" sz="1100">
+                <a:solidFill>
+                  <a:srgbClr val="6B7280"/>
                 </a:solidFill>
                 <a:latin typeface="Calibri" panose="020F0502020204030204" pitchFamily="34" charset="0"/>
               </a:rPr>
-              <a:t>Patterns worth a second look: the same shipper's repeated mistakes, grouped</a:t>
-            </a:r>
-          </a:p>
-          <a:p>
-            <a:pPr marL="177800" indent="-177800">
-              <a:spcAft>
-                <a:spcPts val="300"/>
-              </a:spcAft>
-              <a:buClr>
-                <a:srgbClr val="D9A441"/>
-              </a:buClr>
-              <a:buFont typeface="+mj-lt"/>
-              <a:buChar char="•"/>
-            </a:pPr>
-            <a:r>
-              <a:rPr lang="en-US" sz="1150">
+              <a:t>Correcting a field shows how often this shipper was wrong on that same field before. A count, not a guess.</a:t>
+            </a:r>
+            <a:endParaRPr lang="en-MY" sz="1100">
+              <a:solidFill>
+                <a:srgbClr val="6B7280"/>
+              </a:solidFill>
+              <a:latin typeface="Calibri" panose="020F0502020204030204" pitchFamily="34" charset="0"/>
+            </a:endParaRPr>
+          </a:p>
+        </p:txBody>
+      </p:sp>
+      <p:sp>
+        <p:nvSpPr>
+          <p:cNvPr id="12" name="Oval 11">
+            <a:extLst>
+              <a:ext uri="{FF2B5EF4-FFF2-40B4-BE49-F238E27FC236}">
+                <a16:creationId xmlns:a16="http://schemas.microsoft.com/office/drawing/2014/main" id="{CA55D6EC-49B0-50BF-30B1-1EF9EF6A90C7}"/>
+              </a:ext>
+            </a:extLst>
+          </p:cNvPr>
+          <p:cNvSpPr/>
+          <p:nvPr/>
+        </p:nvSpPr>
+        <p:spPr>
+          <a:xfrm>
+            <a:off x="609600" y="3810000"/>
+            <a:ext cx="330200" cy="330200"/>
+          </a:xfrm>
+          <a:prstGeom prst="ellipse">
+            <a:avLst/>
+          </a:prstGeom>
+          <a:solidFill>
+            <a:srgbClr val="D9A441"/>
+          </a:solidFill>
+          <a:ln w="19050" cap="flat" cmpd="sng" algn="ctr">
+            <a:noFill/>
+            <a:prstDash val="solid"/>
+            <a:miter lim="800000"/>
+          </a:ln>
+          <a:effectLst/>
+          <a:extLst>
+            <a:ext uri="{91240B29-F687-4F45-9708-019B960494DF}">
+              <a14:hiddenLine xmlns:a14="http://schemas.microsoft.com/office/drawing/2010/main" w="19050" cap="flat" cmpd="sng" algn="ctr">
+                <a:solidFill>
+                  <a:schemeClr val="accent1">
+                    <a:shade val="15000"/>
+                  </a:schemeClr>
+                </a:solidFill>
+                <a:prstDash val="solid"/>
+                <a:miter lim="800000"/>
+              </a14:hiddenLine>
+            </a:ext>
+          </a:extLst>
+        </p:spPr>
+        <p:style>
+          <a:lnRef idx="2">
+            <a:schemeClr val="accent1">
+              <a:shade val="15000"/>
+            </a:schemeClr>
+          </a:lnRef>
+          <a:fillRef idx="1">
+            <a:schemeClr val="accent1"/>
+          </a:fillRef>
+          <a:effectRef idx="0">
+            <a:schemeClr val="accent1"/>
+          </a:effectRef>
+          <a:fontRef idx="minor">
+            <a:schemeClr val="lt1"/>
+          </a:fontRef>
+        </p:style>
+        <p:txBody>
+          <a:bodyPr lIns="0" tIns="0" rIns="0" bIns="0" rtlCol="0" anchor="ctr"/>
+          <a:lstStyle/>
+          <a:p>
+            <a:pPr algn="ctr"/>
+            <a:r>
+              <a:rPr lang="en-MY" sz="1170" b="1">
                 <a:solidFill>
                   <a:srgbClr val="1F2430"/>
                 </a:solidFill>
                 <a:latin typeface="Calibri" panose="020F0502020204030204" pitchFamily="34" charset="0"/>
               </a:rPr>
-              <a:t>A reply draft built from the corrected outcome, not the stale one</a:t>
-            </a:r>
-          </a:p>
-          <a:p>
-            <a:pPr marL="177800" indent="-177800">
-              <a:spcAft>
-                <a:spcPts val="300"/>
-              </a:spcAft>
-              <a:buClr>
-                <a:srgbClr val="D9A441"/>
-              </a:buClr>
-              <a:buFont typeface="+mj-lt"/>
-              <a:buChar char="•"/>
-            </a:pPr>
-            <a:r>
-              <a:rPr lang="en-US" sz="1150">
+              <a:t>4</a:t>
+            </a:r>
+          </a:p>
+        </p:txBody>
+      </p:sp>
+      <p:sp>
+        <p:nvSpPr>
+          <p:cNvPr id="13" name="TextBox 12">
+            <a:extLst>
+              <a:ext uri="{FF2B5EF4-FFF2-40B4-BE49-F238E27FC236}">
+                <a16:creationId xmlns:a16="http://schemas.microsoft.com/office/drawing/2014/main" id="{F5AAAE46-66FE-3DDC-9D9C-4E4BC7DF0296}"/>
+              </a:ext>
+            </a:extLst>
+          </p:cNvPr>
+          <p:cNvSpPr txBox="1"/>
+          <p:nvPr/>
+        </p:nvSpPr>
+        <p:spPr>
+          <a:xfrm>
+            <a:off x="1066800" y="3784600"/>
+            <a:ext cx="5588000" cy="300082"/>
+          </a:xfrm>
+          <a:prstGeom prst="rect">
+            <a:avLst/>
+          </a:prstGeom>
+          <a:noFill/>
+        </p:spPr>
+        <p:txBody>
+          <a:bodyPr vert="horz" wrap="square" lIns="0" tIns="0" rIns="0" bIns="0" rtlCol="0" anchor="t">
+            <a:noAutofit/>
+          </a:bodyPr>
+          <a:lstStyle/>
+          <a:p>
+            <a:r>
+              <a:rPr lang="en-US" b="1">
                 <a:solidFill>
                   <a:srgbClr val="1F2430"/>
                 </a:solidFill>
                 <a:latin typeface="Calibri" panose="020F0502020204030204" pitchFamily="34" charset="0"/>
               </a:rPr>
-              <a:t>Every escalation carries the reason and what to do about it</a:t>
+              <a:t>The original, one click away</a:t>
+            </a:r>
+            <a:endParaRPr lang="en-MY" b="1">
+              <a:solidFill>
+                <a:srgbClr val="1F2430"/>
+              </a:solidFill>
+              <a:latin typeface="Calibri" panose="020F0502020204030204" pitchFamily="34" charset="0"/>
+            </a:endParaRPr>
+          </a:p>
+        </p:txBody>
+      </p:sp>
+      <p:sp>
+        <p:nvSpPr>
+          <p:cNvPr id="14" name="TextBox 13">
+            <a:extLst>
+              <a:ext uri="{FF2B5EF4-FFF2-40B4-BE49-F238E27FC236}">
+                <a16:creationId xmlns:a16="http://schemas.microsoft.com/office/drawing/2014/main" id="{085032E0-6489-1F95-FE19-9A5392963135}"/>
+              </a:ext>
+            </a:extLst>
+          </p:cNvPr>
+          <p:cNvSpPr txBox="1"/>
+          <p:nvPr/>
+        </p:nvSpPr>
+        <p:spPr>
+          <a:xfrm>
+            <a:off x="1066800" y="4064000"/>
+            <a:ext cx="5588000" cy="300082"/>
+          </a:xfrm>
+          <a:prstGeom prst="rect">
+            <a:avLst/>
+          </a:prstGeom>
+          <a:noFill/>
+        </p:spPr>
+        <p:txBody>
+          <a:bodyPr vert="horz" wrap="square" lIns="0" tIns="0" rIns="0" bIns="0" rtlCol="0" anchor="t">
+            <a:noAutofit/>
+          </a:bodyPr>
+          <a:lstStyle/>
+          <a:p>
+            <a:r>
+              <a:rPr lang="en-US" sz="1100">
+                <a:solidFill>
+                  <a:srgbClr val="6B7280"/>
+                </a:solidFill>
+                <a:latin typeface="Calibri" panose="020F0502020204030204" pitchFamily="34" charset="0"/>
+              </a:rPr>
+              <a:t>Every value carries its line, and the source document opens beside it.</a:t>
+            </a:r>
+            <a:endParaRPr lang="en-MY" sz="1100">
+              <a:solidFill>
+                <a:srgbClr val="6B7280"/>
+              </a:solidFill>
+              <a:latin typeface="Calibri" panose="020F0502020204030204" pitchFamily="34" charset="0"/>
+            </a:endParaRPr>
+          </a:p>
+        </p:txBody>
+      </p:sp>
+      <p:sp>
+        <p:nvSpPr>
+          <p:cNvPr id="15" name="Oval 14">
+            <a:extLst>
+              <a:ext uri="{FF2B5EF4-FFF2-40B4-BE49-F238E27FC236}">
+                <a16:creationId xmlns:a16="http://schemas.microsoft.com/office/drawing/2014/main" id="{45E3243F-F3BD-96FD-7973-8E668BE1F9CA}"/>
+              </a:ext>
+            </a:extLst>
+          </p:cNvPr>
+          <p:cNvSpPr/>
+          <p:nvPr/>
+        </p:nvSpPr>
+        <p:spPr>
+          <a:xfrm>
+            <a:off x="609600" y="4673600"/>
+            <a:ext cx="330200" cy="330200"/>
+          </a:xfrm>
+          <a:prstGeom prst="ellipse">
+            <a:avLst/>
+          </a:prstGeom>
+          <a:solidFill>
+            <a:srgbClr val="D9A441"/>
+          </a:solidFill>
+          <a:ln w="19050" cap="flat" cmpd="sng" algn="ctr">
+            <a:noFill/>
+            <a:prstDash val="solid"/>
+            <a:miter lim="800000"/>
+          </a:ln>
+          <a:effectLst/>
+          <a:extLst>
+            <a:ext uri="{91240B29-F687-4F45-9708-019B960494DF}">
+              <a14:hiddenLine xmlns:a14="http://schemas.microsoft.com/office/drawing/2010/main" w="19050" cap="flat" cmpd="sng" algn="ctr">
+                <a:solidFill>
+                  <a:schemeClr val="accent1">
+                    <a:shade val="15000"/>
+                  </a:schemeClr>
+                </a:solidFill>
+                <a:prstDash val="solid"/>
+                <a:miter lim="800000"/>
+              </a14:hiddenLine>
+            </a:ext>
+          </a:extLst>
+        </p:spPr>
+        <p:style>
+          <a:lnRef idx="2">
+            <a:schemeClr val="accent1">
+              <a:shade val="15000"/>
+            </a:schemeClr>
+          </a:lnRef>
+          <a:fillRef idx="1">
+            <a:schemeClr val="accent1"/>
+          </a:fillRef>
+          <a:effectRef idx="0">
+            <a:schemeClr val="accent1"/>
+          </a:effectRef>
+          <a:fontRef idx="minor">
+            <a:schemeClr val="lt1"/>
+          </a:fontRef>
+        </p:style>
+        <p:txBody>
+          <a:bodyPr lIns="0" tIns="0" rIns="0" bIns="0" rtlCol="0" anchor="ctr"/>
+          <a:lstStyle/>
+          <a:p>
+            <a:pPr algn="ctr"/>
+            <a:r>
+              <a:rPr lang="en-MY" sz="1170" b="1">
+                <a:solidFill>
+                  <a:srgbClr val="1F2430"/>
+                </a:solidFill>
+                <a:latin typeface="Calibri" panose="020F0502020204030204" pitchFamily="34" charset="0"/>
+              </a:rPr>
+              <a:t>5</a:t>
+            </a:r>
+          </a:p>
+        </p:txBody>
+      </p:sp>
+      <p:sp>
+        <p:nvSpPr>
+          <p:cNvPr id="16" name="TextBox 15">
+            <a:extLst>
+              <a:ext uri="{FF2B5EF4-FFF2-40B4-BE49-F238E27FC236}">
+                <a16:creationId xmlns:a16="http://schemas.microsoft.com/office/drawing/2014/main" id="{E65204F4-DBB9-78AB-2BE7-89739FC41C8D}"/>
+              </a:ext>
+            </a:extLst>
+          </p:cNvPr>
+          <p:cNvSpPr txBox="1"/>
+          <p:nvPr/>
+        </p:nvSpPr>
+        <p:spPr>
+          <a:xfrm>
+            <a:off x="1066800" y="4648200"/>
+            <a:ext cx="5588000" cy="300082"/>
+          </a:xfrm>
+          <a:prstGeom prst="rect">
+            <a:avLst/>
+          </a:prstGeom>
+          <a:noFill/>
+        </p:spPr>
+        <p:txBody>
+          <a:bodyPr vert="horz" wrap="square" lIns="0" tIns="0" rIns="0" bIns="0" rtlCol="0" anchor="t">
+            <a:noAutofit/>
+          </a:bodyPr>
+          <a:lstStyle/>
+          <a:p>
+            <a:r>
+              <a:rPr lang="en-US" b="1">
+                <a:solidFill>
+                  <a:srgbClr val="1F2430"/>
+                </a:solidFill>
+                <a:latin typeface="Calibri" panose="020F0502020204030204" pitchFamily="34" charset="0"/>
+              </a:rPr>
+              <a:t>A reply drafted from the corrected outcome</a:t>
+            </a:r>
+            <a:endParaRPr lang="en-MY" b="1">
+              <a:solidFill>
+                <a:srgbClr val="1F2430"/>
+              </a:solidFill>
+              <a:latin typeface="Calibri" panose="020F0502020204030204" pitchFamily="34" charset="0"/>
+            </a:endParaRPr>
+          </a:p>
+        </p:txBody>
+      </p:sp>
+      <p:sp>
+        <p:nvSpPr>
+          <p:cNvPr id="17" name="TextBox 16">
+            <a:extLst>
+              <a:ext uri="{FF2B5EF4-FFF2-40B4-BE49-F238E27FC236}">
+                <a16:creationId xmlns:a16="http://schemas.microsoft.com/office/drawing/2014/main" id="{C1519ECA-C2B2-426B-F335-8450EFC22E7D}"/>
+              </a:ext>
+            </a:extLst>
+          </p:cNvPr>
+          <p:cNvSpPr txBox="1"/>
+          <p:nvPr/>
+        </p:nvSpPr>
+        <p:spPr>
+          <a:xfrm>
+            <a:off x="1066800" y="4927600"/>
+            <a:ext cx="5588000" cy="300082"/>
+          </a:xfrm>
+          <a:prstGeom prst="rect">
+            <a:avLst/>
+          </a:prstGeom>
+          <a:noFill/>
+        </p:spPr>
+        <p:txBody>
+          <a:bodyPr vert="horz" wrap="square" lIns="0" tIns="0" rIns="0" bIns="0" rtlCol="0" anchor="t">
+            <a:noAutofit/>
+          </a:bodyPr>
+          <a:lstStyle/>
+          <a:p>
+            <a:r>
+              <a:rPr lang="en-US" sz="1100">
+                <a:solidFill>
+                  <a:srgbClr val="6B7280"/>
+                </a:solidFill>
+                <a:latin typeface="Calibri" panose="020F0502020204030204" pitchFamily="34" charset="0"/>
+              </a:rPr>
+              <a:t>Subject and body ready, built from what the reviewer decided - not the stale answer. A person still presses send.</a:t>
+            </a:r>
+            <a:endParaRPr lang="en-MY" sz="1100">
+              <a:solidFill>
+                <a:srgbClr val="6B7280"/>
+              </a:solidFill>
+              <a:latin typeface="Calibri" panose="020F0502020204030204" pitchFamily="34" charset="0"/>
+            </a:endParaRPr>
+          </a:p>
+        </p:txBody>
+      </p:sp>
+      <p:pic>
+        <p:nvPicPr>
+          <p:cNvPr id="19" name="Picture 18">
+            <a:extLst>
+              <a:ext uri="{FF2B5EF4-FFF2-40B4-BE49-F238E27FC236}">
+                <a16:creationId xmlns:a16="http://schemas.microsoft.com/office/drawing/2014/main" id="{D7B028DE-82FE-871B-D738-3DB358EBECAA}"/>
+              </a:ext>
+            </a:extLst>
+          </p:cNvPr>
+          <p:cNvPicPr>
+            <a:picLocks/>
+          </p:cNvPicPr>
+          <p:nvPr/>
+        </p:nvPicPr>
+        <p:blipFill>
+          <a:blip r:embed="rId3">
+            <a:extLst>
+              <a:ext uri="{28A0092B-C50C-407E-A947-70E740481C1C}">
+                <a14:useLocalDpi xmlns:a14="http://schemas.microsoft.com/office/drawing/2010/main" val="0"/>
+              </a:ext>
+            </a:extLst>
+          </a:blip>
+          <a:stretch>
+            <a:fillRect/>
+          </a:stretch>
+        </p:blipFill>
+        <p:spPr>
+          <a:xfrm>
+            <a:off x="6858000" y="1219200"/>
+            <a:ext cx="4724400" cy="1837267"/>
+          </a:xfrm>
+          <a:prstGeom prst="rect">
+            <a:avLst/>
+          </a:prstGeom>
+          <a:ln w="9525">
+            <a:solidFill>
+              <a:srgbClr val="D1D5DB"/>
+            </a:solidFill>
+          </a:ln>
+        </p:spPr>
+      </p:pic>
+      <p:sp>
+        <p:nvSpPr>
+          <p:cNvPr id="20" name="TextBox 19">
+            <a:extLst>
+              <a:ext uri="{FF2B5EF4-FFF2-40B4-BE49-F238E27FC236}">
+                <a16:creationId xmlns:a16="http://schemas.microsoft.com/office/drawing/2014/main" id="{87AE7AD1-426C-4D04-DA2F-1AD46E680297}"/>
+              </a:ext>
+            </a:extLst>
+          </p:cNvPr>
+          <p:cNvSpPr txBox="1"/>
+          <p:nvPr/>
+        </p:nvSpPr>
+        <p:spPr>
+          <a:xfrm>
+            <a:off x="6858000" y="4318000"/>
+            <a:ext cx="4724400" cy="300082"/>
+          </a:xfrm>
+          <a:prstGeom prst="rect">
+            <a:avLst/>
+          </a:prstGeom>
+          <a:noFill/>
+        </p:spPr>
+        <p:txBody>
+          <a:bodyPr vert="horz" wrap="square" lIns="0" tIns="0" rIns="0" bIns="0" rtlCol="0" anchor="t">
+            <a:noAutofit/>
+          </a:bodyPr>
+          <a:lstStyle/>
+          <a:p>
+            <a:r>
+              <a:rPr lang="en-US" sz="1050">
+                <a:solidFill>
+                  <a:srgbClr val="6B7280"/>
+                </a:solidFill>
+                <a:latin typeface="Calibri" panose="020F0502020204030204" pitchFamily="34" charset="0"/>
+              </a:rPr>
+              <a:t>The scan read-out, as the reviewer sees it: seven fields, the model's confidence, and the sentence that none of it entered the comparison.</a:t>
+            </a:r>
+            <a:endParaRPr lang="en-MY" sz="1050">
+              <a:solidFill>
+                <a:srgbClr val="6B7280"/>
+              </a:solidFill>
+              <a:latin typeface="Calibri" panose="020F0502020204030204" pitchFamily="34" charset="0"/>
+            </a:endParaRPr>
+          </a:p>
+        </p:txBody>
+      </p:sp>
+      <p:sp>
+        <p:nvSpPr>
+          <p:cNvPr id="21" name="Rectangle: Rounded Corners 20">
+            <a:extLst>
+              <a:ext uri="{FF2B5EF4-FFF2-40B4-BE49-F238E27FC236}">
+                <a16:creationId xmlns:a16="http://schemas.microsoft.com/office/drawing/2014/main" id="{51FF6AE3-08E3-2176-ACCF-E61549E5E729}"/>
+              </a:ext>
+            </a:extLst>
+          </p:cNvPr>
+          <p:cNvSpPr/>
+          <p:nvPr/>
+        </p:nvSpPr>
+        <p:spPr>
+          <a:xfrm>
+            <a:off x="609600" y="5588000"/>
+            <a:ext cx="10972800" cy="508000"/>
+          </a:xfrm>
+          <a:prstGeom prst="roundRect">
+            <a:avLst>
+              <a:gd name="adj" fmla="val 15000"/>
+            </a:avLst>
+          </a:prstGeom>
+          <a:solidFill>
+            <a:srgbClr val="FFF4E0"/>
+          </a:solidFill>
+          <a:ln w="19050" cap="flat" cmpd="sng" algn="ctr">
+            <a:noFill/>
+            <a:prstDash val="solid"/>
+            <a:miter lim="800000"/>
+          </a:ln>
+          <a:effectLst/>
+          <a:extLst>
+            <a:ext uri="{91240B29-F687-4F45-9708-019B960494DF}">
+              <a14:hiddenLine xmlns:a14="http://schemas.microsoft.com/office/drawing/2010/main" w="19050" cap="flat" cmpd="sng" algn="ctr">
+                <a:solidFill>
+                  <a:schemeClr val="accent1">
+                    <a:shade val="15000"/>
+                  </a:schemeClr>
+                </a:solidFill>
+                <a:prstDash val="solid"/>
+                <a:miter lim="800000"/>
+              </a14:hiddenLine>
+            </a:ext>
+          </a:extLst>
+        </p:spPr>
+        <p:style>
+          <a:lnRef idx="2">
+            <a:schemeClr val="accent1">
+              <a:shade val="15000"/>
+            </a:schemeClr>
+          </a:lnRef>
+          <a:fillRef idx="1">
+            <a:schemeClr val="accent1"/>
+          </a:fillRef>
+          <a:effectRef idx="0">
+            <a:schemeClr val="accent1"/>
+          </a:effectRef>
+          <a:fontRef idx="minor">
+            <a:schemeClr val="lt1"/>
+          </a:fontRef>
+        </p:style>
+        <p:txBody>
+          <a:bodyPr rtlCol="0" anchor="ctr"/>
+          <a:lstStyle/>
+          <a:p>
+            <a:pPr algn="ctr"/>
+            <a:endParaRPr lang="en-MY"/>
+          </a:p>
+        </p:txBody>
+      </p:sp>
+      <p:sp>
+        <p:nvSpPr>
+          <p:cNvPr id="22" name="TextBox 21">
+            <a:extLst>
+              <a:ext uri="{FF2B5EF4-FFF2-40B4-BE49-F238E27FC236}">
+                <a16:creationId xmlns:a16="http://schemas.microsoft.com/office/drawing/2014/main" id="{04749409-1CF9-4C9C-993A-6609C9CD1D78}"/>
+              </a:ext>
+            </a:extLst>
+          </p:cNvPr>
+          <p:cNvSpPr txBox="1"/>
+          <p:nvPr/>
+        </p:nvSpPr>
+        <p:spPr>
+          <a:xfrm>
+            <a:off x="812800" y="5664200"/>
+            <a:ext cx="10566400" cy="300082"/>
+          </a:xfrm>
+          <a:prstGeom prst="rect">
+            <a:avLst/>
+          </a:prstGeom>
+          <a:noFill/>
+        </p:spPr>
+        <p:txBody>
+          <a:bodyPr vert="horz" wrap="square" lIns="0" tIns="0" rIns="0" bIns="0" rtlCol="0" anchor="ctr">
+            <a:noAutofit/>
+          </a:bodyPr>
+          <a:lstStyle/>
+          <a:p>
+            <a:r>
+              <a:rPr lang="en-US" sz="1150">
+                <a:solidFill>
+                  <a:srgbClr val="1F2430"/>
+                </a:solidFill>
+                <a:latin typeface="Calibri" panose="020F0502020204030204" pitchFamily="34" charset="0"/>
+              </a:rPr>
+              <a:t>Every flag carries the line it came from. Every escalation carries the reason and what to do about it. Most teams at this stage meet the brief; these are the things a reviewer actually uses.</a:t>
             </a:r>
             <a:endParaRPr lang="en-MY" sz="1150">
               <a:solidFill>
@@ -11797,10 +12547,10 @@
       </p:sp>
       <p:sp>
         <p:nvSpPr>
-          <p:cNvPr id="10" name="TextBox 9">
-            <a:extLst>
-              <a:ext uri="{FF2B5EF4-FFF2-40B4-BE49-F238E27FC236}">
-                <a16:creationId xmlns:a16="http://schemas.microsoft.com/office/drawing/2014/main" id="{81C2AD9A-F560-794F-4852-F9A2F3A9A529}"/>
+          <p:cNvPr id="23" name="TextBox 22">
+            <a:extLst>
+              <a:ext uri="{FF2B5EF4-FFF2-40B4-BE49-F238E27FC236}">
+                <a16:creationId xmlns:a16="http://schemas.microsoft.com/office/drawing/2014/main" id="{4B46A69B-E70D-0C8E-D9B8-24161E95C137}"/>
               </a:ext>
             </a:extLst>
           </p:cNvPr>
@@ -11845,7 +12595,7 @@
     </p:spTree>
     <p:extLst>
       <p:ext uri="{BB962C8B-B14F-4D97-AF65-F5344CB8AC3E}">
-        <p14:creationId xmlns:p14="http://schemas.microsoft.com/office/powerpoint/2010/main" val="2021327142"/>
+        <p14:creationId xmlns:p14="http://schemas.microsoft.com/office/powerpoint/2010/main" val="2596078402"/>
       </p:ext>
     </p:extLst>
   </p:cSld>
@@ -11885,7 +12635,7 @@
           <p:cNvPr id="2" name="TextBox 1">
             <a:extLst>
               <a:ext uri="{FF2B5EF4-FFF2-40B4-BE49-F238E27FC236}">
-                <a16:creationId xmlns:a16="http://schemas.microsoft.com/office/drawing/2014/main" id="{4A2FE522-F611-302F-BE1C-753F6ECC4044}"/>
+                <a16:creationId xmlns:a16="http://schemas.microsoft.com/office/drawing/2014/main" id="{D4F84BD4-CA6D-DD44-CEB0-727AE5B5BD7B}"/>
               </a:ext>
             </a:extLst>
           </p:cNvPr>
@@ -11931,7 +12681,7 @@
           <p:cNvPr id="3" name="Rectangle: Rounded Corners 2">
             <a:extLst>
               <a:ext uri="{FF2B5EF4-FFF2-40B4-BE49-F238E27FC236}">
-                <a16:creationId xmlns:a16="http://schemas.microsoft.com/office/drawing/2014/main" id="{D4D8DE76-4DF3-842D-1898-15B878C78BBF}"/>
+                <a16:creationId xmlns:a16="http://schemas.microsoft.com/office/drawing/2014/main" id="{14D35C28-96BC-FDDE-A400-9A38795C4C6B}"/>
               </a:ext>
             </a:extLst>
           </p:cNvPr>
@@ -12001,7 +12751,7 @@
           <p:cNvPr id="4" name="TextBox 3">
             <a:extLst>
               <a:ext uri="{FF2B5EF4-FFF2-40B4-BE49-F238E27FC236}">
-                <a16:creationId xmlns:a16="http://schemas.microsoft.com/office/drawing/2014/main" id="{C9141647-3370-6A65-7570-B7CA95625640}"/>
+                <a16:creationId xmlns:a16="http://schemas.microsoft.com/office/drawing/2014/main" id="{C1B49AE9-D6C8-5B0A-85D8-2130E8BBABE0}"/>
               </a:ext>
             </a:extLst>
           </p:cNvPr>
@@ -12041,7 +12791,7 @@
           <p:cNvPr id="5" name="TextBox 4">
             <a:extLst>
               <a:ext uri="{FF2B5EF4-FFF2-40B4-BE49-F238E27FC236}">
-                <a16:creationId xmlns:a16="http://schemas.microsoft.com/office/drawing/2014/main" id="{03696699-9FAB-FA2F-96B5-CDFFD66FD227}"/>
+                <a16:creationId xmlns:a16="http://schemas.microsoft.com/office/drawing/2014/main" id="{D180FBA5-E946-8E47-2878-B0B147F0E73A}"/>
               </a:ext>
             </a:extLst>
           </p:cNvPr>
@@ -12082,7 +12832,7 @@
           <p:cNvPr id="6" name="TextBox 5">
             <a:extLst>
               <a:ext uri="{FF2B5EF4-FFF2-40B4-BE49-F238E27FC236}">
-                <a16:creationId xmlns:a16="http://schemas.microsoft.com/office/drawing/2014/main" id="{C46D364B-E195-B359-B1E6-15C66987DF62}"/>
+                <a16:creationId xmlns:a16="http://schemas.microsoft.com/office/drawing/2014/main" id="{852ED602-2886-7D3D-029A-2E800583FAE8}"/>
               </a:ext>
             </a:extLst>
           </p:cNvPr>
@@ -12122,7 +12872,7 @@
           <p:cNvPr id="7" name="TextBox 6">
             <a:extLst>
               <a:ext uri="{FF2B5EF4-FFF2-40B4-BE49-F238E27FC236}">
-                <a16:creationId xmlns:a16="http://schemas.microsoft.com/office/drawing/2014/main" id="{4E417D21-E64B-FE73-E299-83E3539011A9}"/>
+                <a16:creationId xmlns:a16="http://schemas.microsoft.com/office/drawing/2014/main" id="{6AF2C088-8D31-CF3D-EF81-7421717E9CC3}"/>
               </a:ext>
             </a:extLst>
           </p:cNvPr>
@@ -12168,7 +12918,7 @@
           <p:cNvPr id="8" name="TextBox 7">
             <a:extLst>
               <a:ext uri="{FF2B5EF4-FFF2-40B4-BE49-F238E27FC236}">
-                <a16:creationId xmlns:a16="http://schemas.microsoft.com/office/drawing/2014/main" id="{3B9E32D3-E922-CC74-678F-6DB72E372B69}"/>
+                <a16:creationId xmlns:a16="http://schemas.microsoft.com/office/drawing/2014/main" id="{E6FA07E7-9ED3-88B7-0A23-7C74EB3913BC}"/>
               </a:ext>
             </a:extLst>
           </p:cNvPr>
@@ -12214,7 +12964,7 @@
           <p:cNvPr id="9" name="TextBox 8">
             <a:extLst>
               <a:ext uri="{FF2B5EF4-FFF2-40B4-BE49-F238E27FC236}">
-                <a16:creationId xmlns:a16="http://schemas.microsoft.com/office/drawing/2014/main" id="{F0E37033-327A-CFB9-335A-B550E1FE606B}"/>
+                <a16:creationId xmlns:a16="http://schemas.microsoft.com/office/drawing/2014/main" id="{082C4F84-0129-0A85-BBC8-80F88CE739CE}"/>
               </a:ext>
             </a:extLst>
           </p:cNvPr>
@@ -12260,7 +13010,7 @@
           <p:cNvPr id="10" name="Table 9">
             <a:extLst>
               <a:ext uri="{FF2B5EF4-FFF2-40B4-BE49-F238E27FC236}">
-                <a16:creationId xmlns:a16="http://schemas.microsoft.com/office/drawing/2014/main" id="{CF6B7342-722B-41E9-B537-0AF512BAD039}"/>
+                <a16:creationId xmlns:a16="http://schemas.microsoft.com/office/drawing/2014/main" id="{FAAD3784-CD8C-E73B-1625-194C9ECE5FD1}"/>
               </a:ext>
             </a:extLst>
           </p:cNvPr>
@@ -12270,7 +13020,7 @@
           <p:nvPr>
             <p:extLst>
               <p:ext uri="{D42A27DB-BD31-4B8C-83A1-F6EECF244321}">
-                <p14:modId xmlns:p14="http://schemas.microsoft.com/office/powerpoint/2010/main" val="2033717764"/>
+                <p14:modId xmlns:p14="http://schemas.microsoft.com/office/powerpoint/2010/main" val="67259051"/>
               </p:ext>
             </p:extLst>
           </p:nvPr>
@@ -12289,21 +13039,21 @@
                 <a:gridCol w="1905000">
                   <a:extLst>
                     <a:ext uri="{9D8B030D-6E8A-4147-A177-3AD203B41FA5}">
-                      <a16:colId xmlns:a16="http://schemas.microsoft.com/office/drawing/2014/main" val="1864668623"/>
+                      <a16:colId xmlns:a16="http://schemas.microsoft.com/office/drawing/2014/main" val="1415162259"/>
                     </a:ext>
                   </a:extLst>
                 </a:gridCol>
                 <a:gridCol w="2413000">
                   <a:extLst>
                     <a:ext uri="{9D8B030D-6E8A-4147-A177-3AD203B41FA5}">
-                      <a16:colId xmlns:a16="http://schemas.microsoft.com/office/drawing/2014/main" val="3511986980"/>
+                      <a16:colId xmlns:a16="http://schemas.microsoft.com/office/drawing/2014/main" val="1375915125"/>
                     </a:ext>
                   </a:extLst>
                 </a:gridCol>
                 <a:gridCol w="2032000">
                   <a:extLst>
                     <a:ext uri="{9D8B030D-6E8A-4147-A177-3AD203B41FA5}">
-                      <a16:colId xmlns:a16="http://schemas.microsoft.com/office/drawing/2014/main" val="1041118216"/>
+                      <a16:colId xmlns:a16="http://schemas.microsoft.com/office/drawing/2014/main" val="4199924233"/>
                     </a:ext>
                   </a:extLst>
                 </a:gridCol>
@@ -12377,7 +13127,7 @@
                 </a:tc>
                 <a:extLst>
                   <a:ext uri="{0D108BD9-81ED-4DB2-BD59-A6C34878D82A}">
-                    <a16:rowId xmlns:a16="http://schemas.microsoft.com/office/drawing/2014/main" val="3763817224"/>
+                    <a16:rowId xmlns:a16="http://schemas.microsoft.com/office/drawing/2014/main" val="361054233"/>
                   </a:ext>
                 </a:extLst>
               </a:tr>
@@ -12462,7 +13212,7 @@
                 </a:tc>
                 <a:extLst>
                   <a:ext uri="{0D108BD9-81ED-4DB2-BD59-A6C34878D82A}">
-                    <a16:rowId xmlns:a16="http://schemas.microsoft.com/office/drawing/2014/main" val="1148197845"/>
+                    <a16:rowId xmlns:a16="http://schemas.microsoft.com/office/drawing/2014/main" val="2959678648"/>
                   </a:ext>
                 </a:extLst>
               </a:tr>
@@ -12541,7 +13291,7 @@
                 </a:tc>
                 <a:extLst>
                   <a:ext uri="{0D108BD9-81ED-4DB2-BD59-A6C34878D82A}">
-                    <a16:rowId xmlns:a16="http://schemas.microsoft.com/office/drawing/2014/main" val="1774220442"/>
+                    <a16:rowId xmlns:a16="http://schemas.microsoft.com/office/drawing/2014/main" val="568926261"/>
                   </a:ext>
                 </a:extLst>
               </a:tr>
@@ -12620,7 +13370,7 @@
                 </a:tc>
                 <a:extLst>
                   <a:ext uri="{0D108BD9-81ED-4DB2-BD59-A6C34878D82A}">
-                    <a16:rowId xmlns:a16="http://schemas.microsoft.com/office/drawing/2014/main" val="541968793"/>
+                    <a16:rowId xmlns:a16="http://schemas.microsoft.com/office/drawing/2014/main" val="2167205588"/>
                   </a:ext>
                 </a:extLst>
               </a:tr>
@@ -12633,7 +13383,7 @@
           <p:cNvPr id="11" name="Rectangle: Rounded Corners 10">
             <a:extLst>
               <a:ext uri="{FF2B5EF4-FFF2-40B4-BE49-F238E27FC236}">
-                <a16:creationId xmlns:a16="http://schemas.microsoft.com/office/drawing/2014/main" id="{EEC6087C-8985-CCAD-000E-ACDA3A050384}"/>
+                <a16:creationId xmlns:a16="http://schemas.microsoft.com/office/drawing/2014/main" id="{FDD5AE3E-7485-7FE6-35CB-972C69FB3EBB}"/>
               </a:ext>
             </a:extLst>
           </p:cNvPr>
@@ -12703,7 +13453,7 @@
           <p:cNvPr id="12" name="TextBox 11">
             <a:extLst>
               <a:ext uri="{FF2B5EF4-FFF2-40B4-BE49-F238E27FC236}">
-                <a16:creationId xmlns:a16="http://schemas.microsoft.com/office/drawing/2014/main" id="{59FD35A6-6EF0-EBC2-32D7-BA169543B696}"/>
+                <a16:creationId xmlns:a16="http://schemas.microsoft.com/office/drawing/2014/main" id="{BC72DD2B-6904-FEC6-991A-D600661159FB}"/>
               </a:ext>
             </a:extLst>
           </p:cNvPr>
@@ -12743,7 +13493,7 @@
           <p:cNvPr id="13" name="Oval 12">
             <a:extLst>
               <a:ext uri="{FF2B5EF4-FFF2-40B4-BE49-F238E27FC236}">
-                <a16:creationId xmlns:a16="http://schemas.microsoft.com/office/drawing/2014/main" id="{B91493BB-16BA-1486-4D6C-1AAA9162C332}"/>
+                <a16:creationId xmlns:a16="http://schemas.microsoft.com/office/drawing/2014/main" id="{1C9E7BD2-7DAC-E8DA-303B-83B78E631E0F}"/>
               </a:ext>
             </a:extLst>
           </p:cNvPr>
@@ -12819,7 +13569,7 @@
           <p:cNvPr id="14" name="TextBox 13">
             <a:extLst>
               <a:ext uri="{FF2B5EF4-FFF2-40B4-BE49-F238E27FC236}">
-                <a16:creationId xmlns:a16="http://schemas.microsoft.com/office/drawing/2014/main" id="{E172F4AB-343A-0A9E-2E95-08B28F22FC7F}"/>
+                <a16:creationId xmlns:a16="http://schemas.microsoft.com/office/drawing/2014/main" id="{5B379FDB-4825-4C63-15DB-DFFD6141B638}"/>
               </a:ext>
             </a:extLst>
           </p:cNvPr>
@@ -12859,7 +13609,7 @@
           <p:cNvPr id="15" name="TextBox 14">
             <a:extLst>
               <a:ext uri="{FF2B5EF4-FFF2-40B4-BE49-F238E27FC236}">
-                <a16:creationId xmlns:a16="http://schemas.microsoft.com/office/drawing/2014/main" id="{1F0F8F5A-5E63-E8A7-4D99-87D2DC71D2CB}"/>
+                <a16:creationId xmlns:a16="http://schemas.microsoft.com/office/drawing/2014/main" id="{3D8B4E7E-0C81-4C8E-905F-0B0B1F180CCC}"/>
               </a:ext>
             </a:extLst>
           </p:cNvPr>
@@ -12905,7 +13655,7 @@
           <p:cNvPr id="16" name="Oval 15">
             <a:extLst>
               <a:ext uri="{FF2B5EF4-FFF2-40B4-BE49-F238E27FC236}">
-                <a16:creationId xmlns:a16="http://schemas.microsoft.com/office/drawing/2014/main" id="{8BAD0236-6D9B-08CA-C7F9-3D147D5948D2}"/>
+                <a16:creationId xmlns:a16="http://schemas.microsoft.com/office/drawing/2014/main" id="{E3E4FE72-245A-7029-1621-C3FC2A00496F}"/>
               </a:ext>
             </a:extLst>
           </p:cNvPr>
@@ -12981,7 +13731,7 @@
           <p:cNvPr id="17" name="TextBox 16">
             <a:extLst>
               <a:ext uri="{FF2B5EF4-FFF2-40B4-BE49-F238E27FC236}">
-                <a16:creationId xmlns:a16="http://schemas.microsoft.com/office/drawing/2014/main" id="{0FEA2C60-BA41-B0E2-A9F0-1490AE3D8714}"/>
+                <a16:creationId xmlns:a16="http://schemas.microsoft.com/office/drawing/2014/main" id="{9B39274F-859B-89CA-E981-525B0B112806}"/>
               </a:ext>
             </a:extLst>
           </p:cNvPr>
@@ -13027,7 +13777,7 @@
           <p:cNvPr id="18" name="TextBox 17">
             <a:extLst>
               <a:ext uri="{FF2B5EF4-FFF2-40B4-BE49-F238E27FC236}">
-                <a16:creationId xmlns:a16="http://schemas.microsoft.com/office/drawing/2014/main" id="{FE9250AF-7927-00C9-3905-A417BE391D9E}"/>
+                <a16:creationId xmlns:a16="http://schemas.microsoft.com/office/drawing/2014/main" id="{05EF6F5D-2A52-6EEF-87BB-C89164CAB1B1}"/>
               </a:ext>
             </a:extLst>
           </p:cNvPr>
@@ -13073,7 +13823,7 @@
           <p:cNvPr id="19" name="Oval 18">
             <a:extLst>
               <a:ext uri="{FF2B5EF4-FFF2-40B4-BE49-F238E27FC236}">
-                <a16:creationId xmlns:a16="http://schemas.microsoft.com/office/drawing/2014/main" id="{536CE384-5F4A-FDB5-D73C-D6B28684C82B}"/>
+                <a16:creationId xmlns:a16="http://schemas.microsoft.com/office/drawing/2014/main" id="{0C4AB10C-676E-8543-00AF-F111C5D7EF3F}"/>
               </a:ext>
             </a:extLst>
           </p:cNvPr>
@@ -13149,7 +13899,7 @@
           <p:cNvPr id="20" name="TextBox 19">
             <a:extLst>
               <a:ext uri="{FF2B5EF4-FFF2-40B4-BE49-F238E27FC236}">
-                <a16:creationId xmlns:a16="http://schemas.microsoft.com/office/drawing/2014/main" id="{26CDB9FD-3B0F-10A4-31D4-AE4779B70913}"/>
+                <a16:creationId xmlns:a16="http://schemas.microsoft.com/office/drawing/2014/main" id="{47A67589-3FF5-5FB0-B389-E299FDCB5DFA}"/>
               </a:ext>
             </a:extLst>
           </p:cNvPr>
@@ -13189,7 +13939,7 @@
           <p:cNvPr id="21" name="TextBox 20">
             <a:extLst>
               <a:ext uri="{FF2B5EF4-FFF2-40B4-BE49-F238E27FC236}">
-                <a16:creationId xmlns:a16="http://schemas.microsoft.com/office/drawing/2014/main" id="{3F9AEF3F-9996-1D32-FA64-A9872CE10E1E}"/>
+                <a16:creationId xmlns:a16="http://schemas.microsoft.com/office/drawing/2014/main" id="{645290EE-B362-CD2F-794A-5C18E1D36B6E}"/>
               </a:ext>
             </a:extLst>
           </p:cNvPr>
@@ -13235,7 +13985,7 @@
           <p:cNvPr id="22" name="TextBox 21">
             <a:extLst>
               <a:ext uri="{FF2B5EF4-FFF2-40B4-BE49-F238E27FC236}">
-                <a16:creationId xmlns:a16="http://schemas.microsoft.com/office/drawing/2014/main" id="{9121A0B2-6757-9C81-9501-D2E791590572}"/>
+                <a16:creationId xmlns:a16="http://schemas.microsoft.com/office/drawing/2014/main" id="{119025DA-FC0B-AAF1-B955-7410E0AB95DA}"/>
               </a:ext>
             </a:extLst>
           </p:cNvPr>
@@ -13281,7 +14031,7 @@
           <p:cNvPr id="23" name="TextBox 22">
             <a:extLst>
               <a:ext uri="{FF2B5EF4-FFF2-40B4-BE49-F238E27FC236}">
-                <a16:creationId xmlns:a16="http://schemas.microsoft.com/office/drawing/2014/main" id="{D12304D8-CDD5-CC4F-D847-64B094B61E40}"/>
+                <a16:creationId xmlns:a16="http://schemas.microsoft.com/office/drawing/2014/main" id="{EA1E6289-F853-5D8B-0D3D-56F270878E4A}"/>
               </a:ext>
             </a:extLst>
           </p:cNvPr>
@@ -13320,7 +14070,7 @@
     </p:spTree>
     <p:extLst>
       <p:ext uri="{BB962C8B-B14F-4D97-AF65-F5344CB8AC3E}">
-        <p14:creationId xmlns:p14="http://schemas.microsoft.com/office/powerpoint/2010/main" val="374981556"/>
+        <p14:creationId xmlns:p14="http://schemas.microsoft.com/office/powerpoint/2010/main" val="1732380028"/>
       </p:ext>
     </p:extLst>
   </p:cSld>

--- a/docs/Sentinel-final-pitch.pptx
+++ b/docs/Sentinel-final-pitch.pptx
@@ -199,9 +199,9 @@
             </a:lvl1pPr>
           </a:lstStyle>
           <a:p>
-            <a:fld id="{592D12D2-935B-49E8-BF1E-3F0C487C06CE}" type="datetimeFigureOut">
+            <a:fld id="{C4464093-04F1-4DE5-AE18-503D8D710CF4}" type="datetimeFigureOut">
               <a:rPr lang="en-MY" smtClean="0"/>
-              <a:t>24/9/2026</a:t>
+              <a:t>25/9/2026</a:t>
             </a:fld>
             <a:endParaRPr lang="en-MY"/>
           </a:p>
@@ -358,7 +358,7 @@
             </a:lvl1pPr>
           </a:lstStyle>
           <a:p>
-            <a:fld id="{21F61A80-68B1-422B-9D68-85FD71C666C5}" type="slidenum">
+            <a:fld id="{31CE5959-8D78-4F7D-90FC-9D0056708953}" type="slidenum">
               <a:rPr lang="en-MY" smtClean="0"/>
               <a:t>‹#›</a:t>
             </a:fld>
@@ -369,7 +369,7 @@
     </p:spTree>
     <p:extLst>
       <p:ext uri="{BB962C8B-B14F-4D97-AF65-F5344CB8AC3E}">
-        <p14:creationId xmlns:p14="http://schemas.microsoft.com/office/powerpoint/2010/main" val="1018011492"/>
+        <p14:creationId xmlns:p14="http://schemas.microsoft.com/office/powerpoint/2010/main" val="2233926280"/>
       </p:ext>
     </p:extLst>
   </p:cSld>
@@ -536,7 +536,7 @@
           <a:bodyPr/>
           <a:lstStyle/>
           <a:p>
-            <a:fld id="{21F61A80-68B1-422B-9D68-85FD71C666C5}" type="slidenum">
+            <a:fld id="{31CE5959-8D78-4F7D-90FC-9D0056708953}" type="slidenum">
               <a:rPr lang="en-MY" smtClean="0"/>
               <a:t>1</a:t>
             </a:fld>
@@ -547,7 +547,7 @@
     </p:spTree>
     <p:extLst>
       <p:ext uri="{BB962C8B-B14F-4D97-AF65-F5344CB8AC3E}">
-        <p14:creationId xmlns:p14="http://schemas.microsoft.com/office/powerpoint/2010/main" val="4291143848"/>
+        <p14:creationId xmlns:p14="http://schemas.microsoft.com/office/powerpoint/2010/main" val="3951941528"/>
       </p:ext>
     </p:extLst>
   </p:cSld>
@@ -624,7 +624,7 @@
           <a:bodyPr/>
           <a:lstStyle/>
           <a:p>
-            <a:fld id="{21F61A80-68B1-422B-9D68-85FD71C666C5}" type="slidenum">
+            <a:fld id="{31CE5959-8D78-4F7D-90FC-9D0056708953}" type="slidenum">
               <a:rPr lang="en-MY" smtClean="0"/>
               <a:t>10</a:t>
             </a:fld>
@@ -635,7 +635,7 @@
     </p:spTree>
     <p:extLst>
       <p:ext uri="{BB962C8B-B14F-4D97-AF65-F5344CB8AC3E}">
-        <p14:creationId xmlns:p14="http://schemas.microsoft.com/office/powerpoint/2010/main" val="4257150790"/>
+        <p14:creationId xmlns:p14="http://schemas.microsoft.com/office/powerpoint/2010/main" val="2661622829"/>
       </p:ext>
     </p:extLst>
   </p:cSld>
@@ -712,7 +712,7 @@
           <a:bodyPr/>
           <a:lstStyle/>
           <a:p>
-            <a:fld id="{21F61A80-68B1-422B-9D68-85FD71C666C5}" type="slidenum">
+            <a:fld id="{31CE5959-8D78-4F7D-90FC-9D0056708953}" type="slidenum">
               <a:rPr lang="en-MY" smtClean="0"/>
               <a:t>2</a:t>
             </a:fld>
@@ -723,7 +723,7 @@
     </p:spTree>
     <p:extLst>
       <p:ext uri="{BB962C8B-B14F-4D97-AF65-F5344CB8AC3E}">
-        <p14:creationId xmlns:p14="http://schemas.microsoft.com/office/powerpoint/2010/main" val="966233640"/>
+        <p14:creationId xmlns:p14="http://schemas.microsoft.com/office/powerpoint/2010/main" val="621469268"/>
       </p:ext>
     </p:extLst>
   </p:cSld>
@@ -800,7 +800,7 @@
           <a:bodyPr/>
           <a:lstStyle/>
           <a:p>
-            <a:fld id="{21F61A80-68B1-422B-9D68-85FD71C666C5}" type="slidenum">
+            <a:fld id="{31CE5959-8D78-4F7D-90FC-9D0056708953}" type="slidenum">
               <a:rPr lang="en-MY" smtClean="0"/>
               <a:t>3</a:t>
             </a:fld>
@@ -811,7 +811,7 @@
     </p:spTree>
     <p:extLst>
       <p:ext uri="{BB962C8B-B14F-4D97-AF65-F5344CB8AC3E}">
-        <p14:creationId xmlns:p14="http://schemas.microsoft.com/office/powerpoint/2010/main" val="1839013987"/>
+        <p14:creationId xmlns:p14="http://schemas.microsoft.com/office/powerpoint/2010/main" val="3628427592"/>
       </p:ext>
     </p:extLst>
   </p:cSld>
@@ -888,7 +888,7 @@
           <a:bodyPr/>
           <a:lstStyle/>
           <a:p>
-            <a:fld id="{21F61A80-68B1-422B-9D68-85FD71C666C5}" type="slidenum">
+            <a:fld id="{31CE5959-8D78-4F7D-90FC-9D0056708953}" type="slidenum">
               <a:rPr lang="en-MY" smtClean="0"/>
               <a:t>4</a:t>
             </a:fld>
@@ -899,7 +899,7 @@
     </p:spTree>
     <p:extLst>
       <p:ext uri="{BB962C8B-B14F-4D97-AF65-F5344CB8AC3E}">
-        <p14:creationId xmlns:p14="http://schemas.microsoft.com/office/powerpoint/2010/main" val="217516439"/>
+        <p14:creationId xmlns:p14="http://schemas.microsoft.com/office/powerpoint/2010/main" val="4019959480"/>
       </p:ext>
     </p:extLst>
   </p:cSld>
@@ -976,7 +976,7 @@
           <a:bodyPr/>
           <a:lstStyle/>
           <a:p>
-            <a:fld id="{21F61A80-68B1-422B-9D68-85FD71C666C5}" type="slidenum">
+            <a:fld id="{31CE5959-8D78-4F7D-90FC-9D0056708953}" type="slidenum">
               <a:rPr lang="en-MY" smtClean="0"/>
               <a:t>5</a:t>
             </a:fld>
@@ -987,7 +987,7 @@
     </p:spTree>
     <p:extLst>
       <p:ext uri="{BB962C8B-B14F-4D97-AF65-F5344CB8AC3E}">
-        <p14:creationId xmlns:p14="http://schemas.microsoft.com/office/powerpoint/2010/main" val="3833377137"/>
+        <p14:creationId xmlns:p14="http://schemas.microsoft.com/office/powerpoint/2010/main" val="1504468129"/>
       </p:ext>
     </p:extLst>
   </p:cSld>
@@ -1064,7 +1064,7 @@
           <a:bodyPr/>
           <a:lstStyle/>
           <a:p>
-            <a:fld id="{21F61A80-68B1-422B-9D68-85FD71C666C5}" type="slidenum">
+            <a:fld id="{31CE5959-8D78-4F7D-90FC-9D0056708953}" type="slidenum">
               <a:rPr lang="en-MY" smtClean="0"/>
               <a:t>6</a:t>
             </a:fld>
@@ -1075,7 +1075,7 @@
     </p:spTree>
     <p:extLst>
       <p:ext uri="{BB962C8B-B14F-4D97-AF65-F5344CB8AC3E}">
-        <p14:creationId xmlns:p14="http://schemas.microsoft.com/office/powerpoint/2010/main" val="1879101604"/>
+        <p14:creationId xmlns:p14="http://schemas.microsoft.com/office/powerpoint/2010/main" val="1395165698"/>
       </p:ext>
     </p:extLst>
   </p:cSld>
@@ -1152,7 +1152,7 @@
           <a:bodyPr/>
           <a:lstStyle/>
           <a:p>
-            <a:fld id="{21F61A80-68B1-422B-9D68-85FD71C666C5}" type="slidenum">
+            <a:fld id="{31CE5959-8D78-4F7D-90FC-9D0056708953}" type="slidenum">
               <a:rPr lang="en-MY" smtClean="0"/>
               <a:t>7</a:t>
             </a:fld>
@@ -1163,7 +1163,7 @@
     </p:spTree>
     <p:extLst>
       <p:ext uri="{BB962C8B-B14F-4D97-AF65-F5344CB8AC3E}">
-        <p14:creationId xmlns:p14="http://schemas.microsoft.com/office/powerpoint/2010/main" val="1150897354"/>
+        <p14:creationId xmlns:p14="http://schemas.microsoft.com/office/powerpoint/2010/main" val="1458456525"/>
       </p:ext>
     </p:extLst>
   </p:cSld>
@@ -1240,7 +1240,7 @@
           <a:bodyPr/>
           <a:lstStyle/>
           <a:p>
-            <a:fld id="{21F61A80-68B1-422B-9D68-85FD71C666C5}" type="slidenum">
+            <a:fld id="{31CE5959-8D78-4F7D-90FC-9D0056708953}" type="slidenum">
               <a:rPr lang="en-MY" smtClean="0"/>
               <a:t>8</a:t>
             </a:fld>
@@ -1251,7 +1251,7 @@
     </p:spTree>
     <p:extLst>
       <p:ext uri="{BB962C8B-B14F-4D97-AF65-F5344CB8AC3E}">
-        <p14:creationId xmlns:p14="http://schemas.microsoft.com/office/powerpoint/2010/main" val="3851826723"/>
+        <p14:creationId xmlns:p14="http://schemas.microsoft.com/office/powerpoint/2010/main" val="2078771823"/>
       </p:ext>
     </p:extLst>
   </p:cSld>
@@ -1328,7 +1328,7 @@
           <a:bodyPr/>
           <a:lstStyle/>
           <a:p>
-            <a:fld id="{21F61A80-68B1-422B-9D68-85FD71C666C5}" type="slidenum">
+            <a:fld id="{31CE5959-8D78-4F7D-90FC-9D0056708953}" type="slidenum">
               <a:rPr lang="en-MY" smtClean="0"/>
               <a:t>9</a:t>
             </a:fld>
@@ -1339,7 +1339,7 @@
     </p:spTree>
     <p:extLst>
       <p:ext uri="{BB962C8B-B14F-4D97-AF65-F5344CB8AC3E}">
-        <p14:creationId xmlns:p14="http://schemas.microsoft.com/office/powerpoint/2010/main" val="1588068160"/>
+        <p14:creationId xmlns:p14="http://schemas.microsoft.com/office/powerpoint/2010/main" val="2392852950"/>
       </p:ext>
     </p:extLst>
   </p:cSld>
@@ -1371,7 +1371,7 @@
           <p:cNvPr id="2" name="Title 1">
             <a:extLst>
               <a:ext uri="{FF2B5EF4-FFF2-40B4-BE49-F238E27FC236}">
-                <a16:creationId xmlns:a16="http://schemas.microsoft.com/office/drawing/2014/main" id="{686CC9FC-85CD-1FCB-2B8B-B1C956648C32}"/>
+                <a16:creationId xmlns:a16="http://schemas.microsoft.com/office/drawing/2014/main" id="{187905FA-6DBD-BF96-093D-6DE6E88828D9}"/>
               </a:ext>
             </a:extLst>
           </p:cNvPr>
@@ -1409,7 +1409,7 @@
           <p:cNvPr id="3" name="Subtitle 2">
             <a:extLst>
               <a:ext uri="{FF2B5EF4-FFF2-40B4-BE49-F238E27FC236}">
-                <a16:creationId xmlns:a16="http://schemas.microsoft.com/office/drawing/2014/main" id="{32EFD356-D93D-C4D7-75E1-0CC1E3A26ECA}"/>
+                <a16:creationId xmlns:a16="http://schemas.microsoft.com/office/drawing/2014/main" id="{51B1925D-262C-D5C3-4FDA-2FFBB6C412A2}"/>
               </a:ext>
             </a:extLst>
           </p:cNvPr>
@@ -1480,7 +1480,7 @@
           <p:cNvPr id="4" name="Date Placeholder 3">
             <a:extLst>
               <a:ext uri="{FF2B5EF4-FFF2-40B4-BE49-F238E27FC236}">
-                <a16:creationId xmlns:a16="http://schemas.microsoft.com/office/drawing/2014/main" id="{24980623-15B8-71E2-5338-54BCE67E659B}"/>
+                <a16:creationId xmlns:a16="http://schemas.microsoft.com/office/drawing/2014/main" id="{F682E625-AD49-1E93-FDE2-8A2D4E09BA53}"/>
               </a:ext>
             </a:extLst>
           </p:cNvPr>
@@ -1496,9 +1496,9 @@
           <a:bodyPr/>
           <a:lstStyle/>
           <a:p>
-            <a:fld id="{2F8D26A6-D71B-4538-BE7E-D2A35FE8C500}" type="datetimeFigureOut">
+            <a:fld id="{75E84C95-8086-4385-A8BA-6F560668E2C3}" type="datetimeFigureOut">
               <a:rPr lang="en-MY" smtClean="0"/>
-              <a:t>24/9/2026</a:t>
+              <a:t>25/9/2026</a:t>
             </a:fld>
             <a:endParaRPr lang="en-MY"/>
           </a:p>
@@ -1509,7 +1509,7 @@
           <p:cNvPr id="5" name="Footer Placeholder 4">
             <a:extLst>
               <a:ext uri="{FF2B5EF4-FFF2-40B4-BE49-F238E27FC236}">
-                <a16:creationId xmlns:a16="http://schemas.microsoft.com/office/drawing/2014/main" id="{E72EC12D-2DDA-2C56-2F70-EFBC3FBA8437}"/>
+                <a16:creationId xmlns:a16="http://schemas.microsoft.com/office/drawing/2014/main" id="{8D2AB30D-BA00-A59F-1200-268247BE1FA2}"/>
               </a:ext>
             </a:extLst>
           </p:cNvPr>
@@ -1534,7 +1534,7 @@
           <p:cNvPr id="6" name="Slide Number Placeholder 5">
             <a:extLst>
               <a:ext uri="{FF2B5EF4-FFF2-40B4-BE49-F238E27FC236}">
-                <a16:creationId xmlns:a16="http://schemas.microsoft.com/office/drawing/2014/main" id="{07BEA3D9-0A18-698E-81BA-826D2308A65B}"/>
+                <a16:creationId xmlns:a16="http://schemas.microsoft.com/office/drawing/2014/main" id="{FE783E19-02C7-08ED-8D70-52D8185CE5C1}"/>
               </a:ext>
             </a:extLst>
           </p:cNvPr>
@@ -1550,7 +1550,7 @@
           <a:bodyPr/>
           <a:lstStyle/>
           <a:p>
-            <a:fld id="{3A1571EA-3779-4ED8-A27C-B0EAA1CBA9CE}" type="slidenum">
+            <a:fld id="{8BC4A4B2-CAF2-40F7-91B4-6AE8933782A6}" type="slidenum">
               <a:rPr lang="en-MY" smtClean="0"/>
               <a:t>‹#›</a:t>
             </a:fld>
@@ -1561,7 +1561,7 @@
     </p:spTree>
     <p:extLst>
       <p:ext uri="{BB962C8B-B14F-4D97-AF65-F5344CB8AC3E}">
-        <p14:creationId xmlns:p14="http://schemas.microsoft.com/office/powerpoint/2010/main" val="1553467972"/>
+        <p14:creationId xmlns:p14="http://schemas.microsoft.com/office/powerpoint/2010/main" val="3345836673"/>
       </p:ext>
     </p:extLst>
   </p:cSld>
@@ -1593,7 +1593,7 @@
           <p:cNvPr id="2" name="Title 1">
             <a:extLst>
               <a:ext uri="{FF2B5EF4-FFF2-40B4-BE49-F238E27FC236}">
-                <a16:creationId xmlns:a16="http://schemas.microsoft.com/office/drawing/2014/main" id="{ECC59A2F-1856-0EC6-5771-C53BBE2126F3}"/>
+                <a16:creationId xmlns:a16="http://schemas.microsoft.com/office/drawing/2014/main" id="{E631A8F7-9377-CF94-B47D-CE49CD757133}"/>
               </a:ext>
             </a:extLst>
           </p:cNvPr>
@@ -1622,7 +1622,7 @@
           <p:cNvPr id="3" name="Vertical Text Placeholder 2">
             <a:extLst>
               <a:ext uri="{FF2B5EF4-FFF2-40B4-BE49-F238E27FC236}">
-                <a16:creationId xmlns:a16="http://schemas.microsoft.com/office/drawing/2014/main" id="{14628F09-881E-7BA0-38D4-031A79D17012}"/>
+                <a16:creationId xmlns:a16="http://schemas.microsoft.com/office/drawing/2014/main" id="{95AF1562-9D9D-9110-4D40-4D6840CAE231}"/>
               </a:ext>
             </a:extLst>
           </p:cNvPr>
@@ -1680,7 +1680,7 @@
           <p:cNvPr id="4" name="Date Placeholder 3">
             <a:extLst>
               <a:ext uri="{FF2B5EF4-FFF2-40B4-BE49-F238E27FC236}">
-                <a16:creationId xmlns:a16="http://schemas.microsoft.com/office/drawing/2014/main" id="{79E449A9-7395-EAD7-A978-6117EC91000D}"/>
+                <a16:creationId xmlns:a16="http://schemas.microsoft.com/office/drawing/2014/main" id="{46D921A8-89CD-62A3-63A2-DF354C5D3884}"/>
               </a:ext>
             </a:extLst>
           </p:cNvPr>
@@ -1696,9 +1696,9 @@
           <a:bodyPr/>
           <a:lstStyle/>
           <a:p>
-            <a:fld id="{2F8D26A6-D71B-4538-BE7E-D2A35FE8C500}" type="datetimeFigureOut">
+            <a:fld id="{75E84C95-8086-4385-A8BA-6F560668E2C3}" type="datetimeFigureOut">
               <a:rPr lang="en-MY" smtClean="0"/>
-              <a:t>24/9/2026</a:t>
+              <a:t>25/9/2026</a:t>
             </a:fld>
             <a:endParaRPr lang="en-MY"/>
           </a:p>
@@ -1709,7 +1709,7 @@
           <p:cNvPr id="5" name="Footer Placeholder 4">
             <a:extLst>
               <a:ext uri="{FF2B5EF4-FFF2-40B4-BE49-F238E27FC236}">
-                <a16:creationId xmlns:a16="http://schemas.microsoft.com/office/drawing/2014/main" id="{B4270686-63C5-2C96-35D9-1115F792AF58}"/>
+                <a16:creationId xmlns:a16="http://schemas.microsoft.com/office/drawing/2014/main" id="{52408572-1F88-ECF8-2632-F1C754D79786}"/>
               </a:ext>
             </a:extLst>
           </p:cNvPr>
@@ -1734,7 +1734,7 @@
           <p:cNvPr id="6" name="Slide Number Placeholder 5">
             <a:extLst>
               <a:ext uri="{FF2B5EF4-FFF2-40B4-BE49-F238E27FC236}">
-                <a16:creationId xmlns:a16="http://schemas.microsoft.com/office/drawing/2014/main" id="{1E0348DC-BCE1-D3F0-4514-CE5391B0E8A4}"/>
+                <a16:creationId xmlns:a16="http://schemas.microsoft.com/office/drawing/2014/main" id="{91554B32-4784-34F3-904B-0215EF7321F1}"/>
               </a:ext>
             </a:extLst>
           </p:cNvPr>
@@ -1750,7 +1750,7 @@
           <a:bodyPr/>
           <a:lstStyle/>
           <a:p>
-            <a:fld id="{3A1571EA-3779-4ED8-A27C-B0EAA1CBA9CE}" type="slidenum">
+            <a:fld id="{8BC4A4B2-CAF2-40F7-91B4-6AE8933782A6}" type="slidenum">
               <a:rPr lang="en-MY" smtClean="0"/>
               <a:t>‹#›</a:t>
             </a:fld>
@@ -1761,7 +1761,7 @@
     </p:spTree>
     <p:extLst>
       <p:ext uri="{BB962C8B-B14F-4D97-AF65-F5344CB8AC3E}">
-        <p14:creationId xmlns:p14="http://schemas.microsoft.com/office/powerpoint/2010/main" val="2304108578"/>
+        <p14:creationId xmlns:p14="http://schemas.microsoft.com/office/powerpoint/2010/main" val="1200186969"/>
       </p:ext>
     </p:extLst>
   </p:cSld>
@@ -1793,7 +1793,7 @@
           <p:cNvPr id="2" name="Vertical Title 1">
             <a:extLst>
               <a:ext uri="{FF2B5EF4-FFF2-40B4-BE49-F238E27FC236}">
-                <a16:creationId xmlns:a16="http://schemas.microsoft.com/office/drawing/2014/main" id="{C797B5DB-3C13-A7EA-D2E7-CD589CDDCB52}"/>
+                <a16:creationId xmlns:a16="http://schemas.microsoft.com/office/drawing/2014/main" id="{4D9A5454-5387-5257-BDE8-8FA54C893BE8}"/>
               </a:ext>
             </a:extLst>
           </p:cNvPr>
@@ -1827,7 +1827,7 @@
           <p:cNvPr id="3" name="Vertical Text Placeholder 2">
             <a:extLst>
               <a:ext uri="{FF2B5EF4-FFF2-40B4-BE49-F238E27FC236}">
-                <a16:creationId xmlns:a16="http://schemas.microsoft.com/office/drawing/2014/main" id="{CC52690E-804E-05B8-C094-7CB34921D760}"/>
+                <a16:creationId xmlns:a16="http://schemas.microsoft.com/office/drawing/2014/main" id="{60563EEC-CBF2-905C-4D77-56E6A9F5DA0D}"/>
               </a:ext>
             </a:extLst>
           </p:cNvPr>
@@ -1890,7 +1890,7 @@
           <p:cNvPr id="4" name="Date Placeholder 3">
             <a:extLst>
               <a:ext uri="{FF2B5EF4-FFF2-40B4-BE49-F238E27FC236}">
-                <a16:creationId xmlns:a16="http://schemas.microsoft.com/office/drawing/2014/main" id="{72C68D13-FDFF-B1C8-01ED-06180EF0BC34}"/>
+                <a16:creationId xmlns:a16="http://schemas.microsoft.com/office/drawing/2014/main" id="{08FC06FD-2FB3-7A82-20AB-C9A811E53E58}"/>
               </a:ext>
             </a:extLst>
           </p:cNvPr>
@@ -1906,9 +1906,9 @@
           <a:bodyPr/>
           <a:lstStyle/>
           <a:p>
-            <a:fld id="{2F8D26A6-D71B-4538-BE7E-D2A35FE8C500}" type="datetimeFigureOut">
+            <a:fld id="{75E84C95-8086-4385-A8BA-6F560668E2C3}" type="datetimeFigureOut">
               <a:rPr lang="en-MY" smtClean="0"/>
-              <a:t>24/9/2026</a:t>
+              <a:t>25/9/2026</a:t>
             </a:fld>
             <a:endParaRPr lang="en-MY"/>
           </a:p>
@@ -1919,7 +1919,7 @@
           <p:cNvPr id="5" name="Footer Placeholder 4">
             <a:extLst>
               <a:ext uri="{FF2B5EF4-FFF2-40B4-BE49-F238E27FC236}">
-                <a16:creationId xmlns:a16="http://schemas.microsoft.com/office/drawing/2014/main" id="{819CE22C-68F6-0D57-A1A0-0D9D6E65AC76}"/>
+                <a16:creationId xmlns:a16="http://schemas.microsoft.com/office/drawing/2014/main" id="{CC1CFECA-F609-97DE-7CD4-F45FAB07B6B4}"/>
               </a:ext>
             </a:extLst>
           </p:cNvPr>
@@ -1944,7 +1944,7 @@
           <p:cNvPr id="6" name="Slide Number Placeholder 5">
             <a:extLst>
               <a:ext uri="{FF2B5EF4-FFF2-40B4-BE49-F238E27FC236}">
-                <a16:creationId xmlns:a16="http://schemas.microsoft.com/office/drawing/2014/main" id="{500C94AB-11EF-8B96-DA2A-4953DCDD1F42}"/>
+                <a16:creationId xmlns:a16="http://schemas.microsoft.com/office/drawing/2014/main" id="{182FAD25-7DF7-B784-17B3-0A5E10A788EF}"/>
               </a:ext>
             </a:extLst>
           </p:cNvPr>
@@ -1960,7 +1960,7 @@
           <a:bodyPr/>
           <a:lstStyle/>
           <a:p>
-            <a:fld id="{3A1571EA-3779-4ED8-A27C-B0EAA1CBA9CE}" type="slidenum">
+            <a:fld id="{8BC4A4B2-CAF2-40F7-91B4-6AE8933782A6}" type="slidenum">
               <a:rPr lang="en-MY" smtClean="0"/>
               <a:t>‹#›</a:t>
             </a:fld>
@@ -1971,7 +1971,7 @@
     </p:spTree>
     <p:extLst>
       <p:ext uri="{BB962C8B-B14F-4D97-AF65-F5344CB8AC3E}">
-        <p14:creationId xmlns:p14="http://schemas.microsoft.com/office/powerpoint/2010/main" val="950173206"/>
+        <p14:creationId xmlns:p14="http://schemas.microsoft.com/office/powerpoint/2010/main" val="703866454"/>
       </p:ext>
     </p:extLst>
   </p:cSld>
@@ -2003,7 +2003,7 @@
           <p:cNvPr id="2" name="Title 1">
             <a:extLst>
               <a:ext uri="{FF2B5EF4-FFF2-40B4-BE49-F238E27FC236}">
-                <a16:creationId xmlns:a16="http://schemas.microsoft.com/office/drawing/2014/main" id="{9B620C09-64EE-4F98-E127-92E992DA418F}"/>
+                <a16:creationId xmlns:a16="http://schemas.microsoft.com/office/drawing/2014/main" id="{BBD72D02-A620-4A9F-9570-E7CC9B2A01EF}"/>
               </a:ext>
             </a:extLst>
           </p:cNvPr>
@@ -2032,7 +2032,7 @@
           <p:cNvPr id="3" name="Content Placeholder 2">
             <a:extLst>
               <a:ext uri="{FF2B5EF4-FFF2-40B4-BE49-F238E27FC236}">
-                <a16:creationId xmlns:a16="http://schemas.microsoft.com/office/drawing/2014/main" id="{E58E8323-0378-D6D5-C708-0609029FC75B}"/>
+                <a16:creationId xmlns:a16="http://schemas.microsoft.com/office/drawing/2014/main" id="{2244C46F-1879-B290-4669-447BF7E3E4F4}"/>
               </a:ext>
             </a:extLst>
           </p:cNvPr>
@@ -2090,7 +2090,7 @@
           <p:cNvPr id="4" name="Date Placeholder 3">
             <a:extLst>
               <a:ext uri="{FF2B5EF4-FFF2-40B4-BE49-F238E27FC236}">
-                <a16:creationId xmlns:a16="http://schemas.microsoft.com/office/drawing/2014/main" id="{83117E4D-8376-A8F7-B588-6EFF3201A14F}"/>
+                <a16:creationId xmlns:a16="http://schemas.microsoft.com/office/drawing/2014/main" id="{25C7D08E-DCD0-4EAB-EF98-EB269751004F}"/>
               </a:ext>
             </a:extLst>
           </p:cNvPr>
@@ -2106,9 +2106,9 @@
           <a:bodyPr/>
           <a:lstStyle/>
           <a:p>
-            <a:fld id="{2F8D26A6-D71B-4538-BE7E-D2A35FE8C500}" type="datetimeFigureOut">
+            <a:fld id="{75E84C95-8086-4385-A8BA-6F560668E2C3}" type="datetimeFigureOut">
               <a:rPr lang="en-MY" smtClean="0"/>
-              <a:t>24/9/2026</a:t>
+              <a:t>25/9/2026</a:t>
             </a:fld>
             <a:endParaRPr lang="en-MY"/>
           </a:p>
@@ -2119,7 +2119,7 @@
           <p:cNvPr id="5" name="Footer Placeholder 4">
             <a:extLst>
               <a:ext uri="{FF2B5EF4-FFF2-40B4-BE49-F238E27FC236}">
-                <a16:creationId xmlns:a16="http://schemas.microsoft.com/office/drawing/2014/main" id="{55C14C2B-F51D-CA8F-9356-684F8631193F}"/>
+                <a16:creationId xmlns:a16="http://schemas.microsoft.com/office/drawing/2014/main" id="{B47B41EC-6930-2DF7-4BC9-5B9CA6461E00}"/>
               </a:ext>
             </a:extLst>
           </p:cNvPr>
@@ -2144,7 +2144,7 @@
           <p:cNvPr id="6" name="Slide Number Placeholder 5">
             <a:extLst>
               <a:ext uri="{FF2B5EF4-FFF2-40B4-BE49-F238E27FC236}">
-                <a16:creationId xmlns:a16="http://schemas.microsoft.com/office/drawing/2014/main" id="{66353F87-7097-7B58-18BF-3219EC9E2BD5}"/>
+                <a16:creationId xmlns:a16="http://schemas.microsoft.com/office/drawing/2014/main" id="{09B90177-C872-ECEE-9CCA-75C2654FADB4}"/>
               </a:ext>
             </a:extLst>
           </p:cNvPr>
@@ -2160,7 +2160,7 @@
           <a:bodyPr/>
           <a:lstStyle/>
           <a:p>
-            <a:fld id="{3A1571EA-3779-4ED8-A27C-B0EAA1CBA9CE}" type="slidenum">
+            <a:fld id="{8BC4A4B2-CAF2-40F7-91B4-6AE8933782A6}" type="slidenum">
               <a:rPr lang="en-MY" smtClean="0"/>
               <a:t>‹#›</a:t>
             </a:fld>
@@ -2171,7 +2171,7 @@
     </p:spTree>
     <p:extLst>
       <p:ext uri="{BB962C8B-B14F-4D97-AF65-F5344CB8AC3E}">
-        <p14:creationId xmlns:p14="http://schemas.microsoft.com/office/powerpoint/2010/main" val="1999681918"/>
+        <p14:creationId xmlns:p14="http://schemas.microsoft.com/office/powerpoint/2010/main" val="1677957556"/>
       </p:ext>
     </p:extLst>
   </p:cSld>
@@ -2203,7 +2203,7 @@
           <p:cNvPr id="2" name="Title 1">
             <a:extLst>
               <a:ext uri="{FF2B5EF4-FFF2-40B4-BE49-F238E27FC236}">
-                <a16:creationId xmlns:a16="http://schemas.microsoft.com/office/drawing/2014/main" id="{7F23EE73-0C43-16FA-1D49-DDB1F392A9BA}"/>
+                <a16:creationId xmlns:a16="http://schemas.microsoft.com/office/drawing/2014/main" id="{76F49AEB-95DF-3BA5-57E6-AE6B84BDAE10}"/>
               </a:ext>
             </a:extLst>
           </p:cNvPr>
@@ -2241,7 +2241,7 @@
           <p:cNvPr id="3" name="Text Placeholder 2">
             <a:extLst>
               <a:ext uri="{FF2B5EF4-FFF2-40B4-BE49-F238E27FC236}">
-                <a16:creationId xmlns:a16="http://schemas.microsoft.com/office/drawing/2014/main" id="{53657038-E67F-A147-6C5B-6394E166D75C}"/>
+                <a16:creationId xmlns:a16="http://schemas.microsoft.com/office/drawing/2014/main" id="{44D64FB8-270B-1453-55DD-33C9A099AD25}"/>
               </a:ext>
             </a:extLst>
           </p:cNvPr>
@@ -2366,7 +2366,7 @@
           <p:cNvPr id="4" name="Date Placeholder 3">
             <a:extLst>
               <a:ext uri="{FF2B5EF4-FFF2-40B4-BE49-F238E27FC236}">
-                <a16:creationId xmlns:a16="http://schemas.microsoft.com/office/drawing/2014/main" id="{E5F8EE7C-0EDD-D017-D7AD-7F4C2053336F}"/>
+                <a16:creationId xmlns:a16="http://schemas.microsoft.com/office/drawing/2014/main" id="{0D8D4DA3-0CE5-9E32-92D0-D2CF968B4CD3}"/>
               </a:ext>
             </a:extLst>
           </p:cNvPr>
@@ -2382,9 +2382,9 @@
           <a:bodyPr/>
           <a:lstStyle/>
           <a:p>
-            <a:fld id="{2F8D26A6-D71B-4538-BE7E-D2A35FE8C500}" type="datetimeFigureOut">
+            <a:fld id="{75E84C95-8086-4385-A8BA-6F560668E2C3}" type="datetimeFigureOut">
               <a:rPr lang="en-MY" smtClean="0"/>
-              <a:t>24/9/2026</a:t>
+              <a:t>25/9/2026</a:t>
             </a:fld>
             <a:endParaRPr lang="en-MY"/>
           </a:p>
@@ -2395,7 +2395,7 @@
           <p:cNvPr id="5" name="Footer Placeholder 4">
             <a:extLst>
               <a:ext uri="{FF2B5EF4-FFF2-40B4-BE49-F238E27FC236}">
-                <a16:creationId xmlns:a16="http://schemas.microsoft.com/office/drawing/2014/main" id="{E1ABE3C9-6F6C-1B81-9909-8E7255E27944}"/>
+                <a16:creationId xmlns:a16="http://schemas.microsoft.com/office/drawing/2014/main" id="{96C74B1E-21F5-0A55-74CB-F82D8BD0F725}"/>
               </a:ext>
             </a:extLst>
           </p:cNvPr>
@@ -2420,7 +2420,7 @@
           <p:cNvPr id="6" name="Slide Number Placeholder 5">
             <a:extLst>
               <a:ext uri="{FF2B5EF4-FFF2-40B4-BE49-F238E27FC236}">
-                <a16:creationId xmlns:a16="http://schemas.microsoft.com/office/drawing/2014/main" id="{A391389A-F1D1-0724-EE4C-FE31D43D9E4C}"/>
+                <a16:creationId xmlns:a16="http://schemas.microsoft.com/office/drawing/2014/main" id="{5E823E72-22E9-59E8-74D1-76A68ECEC790}"/>
               </a:ext>
             </a:extLst>
           </p:cNvPr>
@@ -2436,7 +2436,7 @@
           <a:bodyPr/>
           <a:lstStyle/>
           <a:p>
-            <a:fld id="{3A1571EA-3779-4ED8-A27C-B0EAA1CBA9CE}" type="slidenum">
+            <a:fld id="{8BC4A4B2-CAF2-40F7-91B4-6AE8933782A6}" type="slidenum">
               <a:rPr lang="en-MY" smtClean="0"/>
               <a:t>‹#›</a:t>
             </a:fld>
@@ -2447,7 +2447,7 @@
     </p:spTree>
     <p:extLst>
       <p:ext uri="{BB962C8B-B14F-4D97-AF65-F5344CB8AC3E}">
-        <p14:creationId xmlns:p14="http://schemas.microsoft.com/office/powerpoint/2010/main" val="1275454861"/>
+        <p14:creationId xmlns:p14="http://schemas.microsoft.com/office/powerpoint/2010/main" val="2038400480"/>
       </p:ext>
     </p:extLst>
   </p:cSld>
@@ -2479,7 +2479,7 @@
           <p:cNvPr id="2" name="Title 1">
             <a:extLst>
               <a:ext uri="{FF2B5EF4-FFF2-40B4-BE49-F238E27FC236}">
-                <a16:creationId xmlns:a16="http://schemas.microsoft.com/office/drawing/2014/main" id="{1A4C2AC4-B386-B674-3BC1-BAE12A74AB44}"/>
+                <a16:creationId xmlns:a16="http://schemas.microsoft.com/office/drawing/2014/main" id="{85F1D265-B9C1-0B20-E800-A12EFF0A0E28}"/>
               </a:ext>
             </a:extLst>
           </p:cNvPr>
@@ -2508,7 +2508,7 @@
           <p:cNvPr id="3" name="Content Placeholder 2">
             <a:extLst>
               <a:ext uri="{FF2B5EF4-FFF2-40B4-BE49-F238E27FC236}">
-                <a16:creationId xmlns:a16="http://schemas.microsoft.com/office/drawing/2014/main" id="{ABADD1D7-5DFC-44EF-103E-D8C80A8F4678}"/>
+                <a16:creationId xmlns:a16="http://schemas.microsoft.com/office/drawing/2014/main" id="{C8D8AE97-0523-B584-4E22-C9B59203767B}"/>
               </a:ext>
             </a:extLst>
           </p:cNvPr>
@@ -2571,7 +2571,7 @@
           <p:cNvPr id="4" name="Content Placeholder 3">
             <a:extLst>
               <a:ext uri="{FF2B5EF4-FFF2-40B4-BE49-F238E27FC236}">
-                <a16:creationId xmlns:a16="http://schemas.microsoft.com/office/drawing/2014/main" id="{80523931-5A72-EC64-1F14-1212A54BFB04}"/>
+                <a16:creationId xmlns:a16="http://schemas.microsoft.com/office/drawing/2014/main" id="{4A726C0C-C9DA-70CC-EDE3-FCF31698C273}"/>
               </a:ext>
             </a:extLst>
           </p:cNvPr>
@@ -2634,7 +2634,7 @@
           <p:cNvPr id="5" name="Date Placeholder 4">
             <a:extLst>
               <a:ext uri="{FF2B5EF4-FFF2-40B4-BE49-F238E27FC236}">
-                <a16:creationId xmlns:a16="http://schemas.microsoft.com/office/drawing/2014/main" id="{5317711C-1E25-1A5F-AAFD-E08D5EEC7470}"/>
+                <a16:creationId xmlns:a16="http://schemas.microsoft.com/office/drawing/2014/main" id="{2640D745-E51A-17B2-5899-5FD88F63D311}"/>
               </a:ext>
             </a:extLst>
           </p:cNvPr>
@@ -2650,9 +2650,9 @@
           <a:bodyPr/>
           <a:lstStyle/>
           <a:p>
-            <a:fld id="{2F8D26A6-D71B-4538-BE7E-D2A35FE8C500}" type="datetimeFigureOut">
+            <a:fld id="{75E84C95-8086-4385-A8BA-6F560668E2C3}" type="datetimeFigureOut">
               <a:rPr lang="en-MY" smtClean="0"/>
-              <a:t>24/9/2026</a:t>
+              <a:t>25/9/2026</a:t>
             </a:fld>
             <a:endParaRPr lang="en-MY"/>
           </a:p>
@@ -2663,7 +2663,7 @@
           <p:cNvPr id="6" name="Footer Placeholder 5">
             <a:extLst>
               <a:ext uri="{FF2B5EF4-FFF2-40B4-BE49-F238E27FC236}">
-                <a16:creationId xmlns:a16="http://schemas.microsoft.com/office/drawing/2014/main" id="{07F32876-7EFF-6C5C-8965-9CF11B136184}"/>
+                <a16:creationId xmlns:a16="http://schemas.microsoft.com/office/drawing/2014/main" id="{A3ADAE41-0024-28D6-E861-53E4DD21B6EB}"/>
               </a:ext>
             </a:extLst>
           </p:cNvPr>
@@ -2688,7 +2688,7 @@
           <p:cNvPr id="7" name="Slide Number Placeholder 6">
             <a:extLst>
               <a:ext uri="{FF2B5EF4-FFF2-40B4-BE49-F238E27FC236}">
-                <a16:creationId xmlns:a16="http://schemas.microsoft.com/office/drawing/2014/main" id="{ED819C50-EDA7-CD83-965F-FF59C69B4972}"/>
+                <a16:creationId xmlns:a16="http://schemas.microsoft.com/office/drawing/2014/main" id="{4A9CCD8A-9669-AA62-1709-AADB7E5F4F02}"/>
               </a:ext>
             </a:extLst>
           </p:cNvPr>
@@ -2704,7 +2704,7 @@
           <a:bodyPr/>
           <a:lstStyle/>
           <a:p>
-            <a:fld id="{3A1571EA-3779-4ED8-A27C-B0EAA1CBA9CE}" type="slidenum">
+            <a:fld id="{8BC4A4B2-CAF2-40F7-91B4-6AE8933782A6}" type="slidenum">
               <a:rPr lang="en-MY" smtClean="0"/>
               <a:t>‹#›</a:t>
             </a:fld>
@@ -2715,7 +2715,7 @@
     </p:spTree>
     <p:extLst>
       <p:ext uri="{BB962C8B-B14F-4D97-AF65-F5344CB8AC3E}">
-        <p14:creationId xmlns:p14="http://schemas.microsoft.com/office/powerpoint/2010/main" val="3875219953"/>
+        <p14:creationId xmlns:p14="http://schemas.microsoft.com/office/powerpoint/2010/main" val="1622186721"/>
       </p:ext>
     </p:extLst>
   </p:cSld>
@@ -2747,7 +2747,7 @@
           <p:cNvPr id="2" name="Title 1">
             <a:extLst>
               <a:ext uri="{FF2B5EF4-FFF2-40B4-BE49-F238E27FC236}">
-                <a16:creationId xmlns:a16="http://schemas.microsoft.com/office/drawing/2014/main" id="{D31E9EAF-92EC-B4B3-668F-DBE0CDFD4870}"/>
+                <a16:creationId xmlns:a16="http://schemas.microsoft.com/office/drawing/2014/main" id="{F8D2F994-8693-542E-3214-9ED198F9FBB3}"/>
               </a:ext>
             </a:extLst>
           </p:cNvPr>
@@ -2781,7 +2781,7 @@
           <p:cNvPr id="3" name="Text Placeholder 2">
             <a:extLst>
               <a:ext uri="{FF2B5EF4-FFF2-40B4-BE49-F238E27FC236}">
-                <a16:creationId xmlns:a16="http://schemas.microsoft.com/office/drawing/2014/main" id="{82E63AA3-0A68-5F62-3CB9-3FDFB00D5E24}"/>
+                <a16:creationId xmlns:a16="http://schemas.microsoft.com/office/drawing/2014/main" id="{62BC8352-3EDA-EA41-EE37-80FFCC02145F}"/>
               </a:ext>
             </a:extLst>
           </p:cNvPr>
@@ -2852,7 +2852,7 @@
           <p:cNvPr id="4" name="Content Placeholder 3">
             <a:extLst>
               <a:ext uri="{FF2B5EF4-FFF2-40B4-BE49-F238E27FC236}">
-                <a16:creationId xmlns:a16="http://schemas.microsoft.com/office/drawing/2014/main" id="{1D9C4D1E-3392-6F55-6E4C-A1EA7ABED16C}"/>
+                <a16:creationId xmlns:a16="http://schemas.microsoft.com/office/drawing/2014/main" id="{98A6507D-3940-28CB-5537-474B1CB03E27}"/>
               </a:ext>
             </a:extLst>
           </p:cNvPr>
@@ -2915,7 +2915,7 @@
           <p:cNvPr id="5" name="Text Placeholder 4">
             <a:extLst>
               <a:ext uri="{FF2B5EF4-FFF2-40B4-BE49-F238E27FC236}">
-                <a16:creationId xmlns:a16="http://schemas.microsoft.com/office/drawing/2014/main" id="{8FC3261C-221D-9223-654F-EF428AF401AD}"/>
+                <a16:creationId xmlns:a16="http://schemas.microsoft.com/office/drawing/2014/main" id="{3316A71A-16EA-9472-3B26-0663BAD66F11}"/>
               </a:ext>
             </a:extLst>
           </p:cNvPr>
@@ -2986,7 +2986,7 @@
           <p:cNvPr id="6" name="Content Placeholder 5">
             <a:extLst>
               <a:ext uri="{FF2B5EF4-FFF2-40B4-BE49-F238E27FC236}">
-                <a16:creationId xmlns:a16="http://schemas.microsoft.com/office/drawing/2014/main" id="{D6A78D58-5C7D-E701-3A5B-EDCD29D9F5BD}"/>
+                <a16:creationId xmlns:a16="http://schemas.microsoft.com/office/drawing/2014/main" id="{F75C11D8-B223-AF9E-9790-5BFA10888AD2}"/>
               </a:ext>
             </a:extLst>
           </p:cNvPr>
@@ -3049,7 +3049,7 @@
           <p:cNvPr id="7" name="Date Placeholder 6">
             <a:extLst>
               <a:ext uri="{FF2B5EF4-FFF2-40B4-BE49-F238E27FC236}">
-                <a16:creationId xmlns:a16="http://schemas.microsoft.com/office/drawing/2014/main" id="{22D4F4A8-AC9F-5609-1E38-4C2BBE4F9A5B}"/>
+                <a16:creationId xmlns:a16="http://schemas.microsoft.com/office/drawing/2014/main" id="{1E4A2A44-B09D-D70E-945E-1D5005C76558}"/>
               </a:ext>
             </a:extLst>
           </p:cNvPr>
@@ -3065,9 +3065,9 @@
           <a:bodyPr/>
           <a:lstStyle/>
           <a:p>
-            <a:fld id="{2F8D26A6-D71B-4538-BE7E-D2A35FE8C500}" type="datetimeFigureOut">
+            <a:fld id="{75E84C95-8086-4385-A8BA-6F560668E2C3}" type="datetimeFigureOut">
               <a:rPr lang="en-MY" smtClean="0"/>
-              <a:t>24/9/2026</a:t>
+              <a:t>25/9/2026</a:t>
             </a:fld>
             <a:endParaRPr lang="en-MY"/>
           </a:p>
@@ -3078,7 +3078,7 @@
           <p:cNvPr id="8" name="Footer Placeholder 7">
             <a:extLst>
               <a:ext uri="{FF2B5EF4-FFF2-40B4-BE49-F238E27FC236}">
-                <a16:creationId xmlns:a16="http://schemas.microsoft.com/office/drawing/2014/main" id="{6199F672-CA61-8F20-01FF-68EE92292478}"/>
+                <a16:creationId xmlns:a16="http://schemas.microsoft.com/office/drawing/2014/main" id="{1650082C-11C0-9746-415E-FF3A41859864}"/>
               </a:ext>
             </a:extLst>
           </p:cNvPr>
@@ -3103,7 +3103,7 @@
           <p:cNvPr id="9" name="Slide Number Placeholder 8">
             <a:extLst>
               <a:ext uri="{FF2B5EF4-FFF2-40B4-BE49-F238E27FC236}">
-                <a16:creationId xmlns:a16="http://schemas.microsoft.com/office/drawing/2014/main" id="{CC789F15-7F6E-16B5-43D3-2D679A9FE041}"/>
+                <a16:creationId xmlns:a16="http://schemas.microsoft.com/office/drawing/2014/main" id="{C8552E4F-395A-24C8-382D-FC8DE19631C0}"/>
               </a:ext>
             </a:extLst>
           </p:cNvPr>
@@ -3119,7 +3119,7 @@
           <a:bodyPr/>
           <a:lstStyle/>
           <a:p>
-            <a:fld id="{3A1571EA-3779-4ED8-A27C-B0EAA1CBA9CE}" type="slidenum">
+            <a:fld id="{8BC4A4B2-CAF2-40F7-91B4-6AE8933782A6}" type="slidenum">
               <a:rPr lang="en-MY" smtClean="0"/>
               <a:t>‹#›</a:t>
             </a:fld>
@@ -3130,7 +3130,7 @@
     </p:spTree>
     <p:extLst>
       <p:ext uri="{BB962C8B-B14F-4D97-AF65-F5344CB8AC3E}">
-        <p14:creationId xmlns:p14="http://schemas.microsoft.com/office/powerpoint/2010/main" val="3818558036"/>
+        <p14:creationId xmlns:p14="http://schemas.microsoft.com/office/powerpoint/2010/main" val="21832589"/>
       </p:ext>
     </p:extLst>
   </p:cSld>
@@ -3162,7 +3162,7 @@
           <p:cNvPr id="2" name="Title 1">
             <a:extLst>
               <a:ext uri="{FF2B5EF4-FFF2-40B4-BE49-F238E27FC236}">
-                <a16:creationId xmlns:a16="http://schemas.microsoft.com/office/drawing/2014/main" id="{8912A4DF-AC8D-B685-35A5-2725D019BC88}"/>
+                <a16:creationId xmlns:a16="http://schemas.microsoft.com/office/drawing/2014/main" id="{672B0EC1-F0CD-3622-F907-6422F8CD87DE}"/>
               </a:ext>
             </a:extLst>
           </p:cNvPr>
@@ -3191,7 +3191,7 @@
           <p:cNvPr id="3" name="Date Placeholder 2">
             <a:extLst>
               <a:ext uri="{FF2B5EF4-FFF2-40B4-BE49-F238E27FC236}">
-                <a16:creationId xmlns:a16="http://schemas.microsoft.com/office/drawing/2014/main" id="{0308B965-5D73-14E2-E2D8-6A6F0A5E4539}"/>
+                <a16:creationId xmlns:a16="http://schemas.microsoft.com/office/drawing/2014/main" id="{9F40030C-0311-E272-D4DA-B2D527CEFA92}"/>
               </a:ext>
             </a:extLst>
           </p:cNvPr>
@@ -3207,9 +3207,9 @@
           <a:bodyPr/>
           <a:lstStyle/>
           <a:p>
-            <a:fld id="{2F8D26A6-D71B-4538-BE7E-D2A35FE8C500}" type="datetimeFigureOut">
+            <a:fld id="{75E84C95-8086-4385-A8BA-6F560668E2C3}" type="datetimeFigureOut">
               <a:rPr lang="en-MY" smtClean="0"/>
-              <a:t>24/9/2026</a:t>
+              <a:t>25/9/2026</a:t>
             </a:fld>
             <a:endParaRPr lang="en-MY"/>
           </a:p>
@@ -3220,7 +3220,7 @@
           <p:cNvPr id="4" name="Footer Placeholder 3">
             <a:extLst>
               <a:ext uri="{FF2B5EF4-FFF2-40B4-BE49-F238E27FC236}">
-                <a16:creationId xmlns:a16="http://schemas.microsoft.com/office/drawing/2014/main" id="{F6B60080-C673-1CDC-B779-B964784BE37C}"/>
+                <a16:creationId xmlns:a16="http://schemas.microsoft.com/office/drawing/2014/main" id="{AA962ADE-FC5E-B142-6096-8E3F13B04621}"/>
               </a:ext>
             </a:extLst>
           </p:cNvPr>
@@ -3245,7 +3245,7 @@
           <p:cNvPr id="5" name="Slide Number Placeholder 4">
             <a:extLst>
               <a:ext uri="{FF2B5EF4-FFF2-40B4-BE49-F238E27FC236}">
-                <a16:creationId xmlns:a16="http://schemas.microsoft.com/office/drawing/2014/main" id="{5D656AF1-B230-2462-582E-2FBF5CE9F297}"/>
+                <a16:creationId xmlns:a16="http://schemas.microsoft.com/office/drawing/2014/main" id="{A81E6FD6-51AB-5A00-B4D2-1DBCF1F9F87E}"/>
               </a:ext>
             </a:extLst>
           </p:cNvPr>
@@ -3261,7 +3261,7 @@
           <a:bodyPr/>
           <a:lstStyle/>
           <a:p>
-            <a:fld id="{3A1571EA-3779-4ED8-A27C-B0EAA1CBA9CE}" type="slidenum">
+            <a:fld id="{8BC4A4B2-CAF2-40F7-91B4-6AE8933782A6}" type="slidenum">
               <a:rPr lang="en-MY" smtClean="0"/>
               <a:t>‹#›</a:t>
             </a:fld>
@@ -3272,7 +3272,7 @@
     </p:spTree>
     <p:extLst>
       <p:ext uri="{BB962C8B-B14F-4D97-AF65-F5344CB8AC3E}">
-        <p14:creationId xmlns:p14="http://schemas.microsoft.com/office/powerpoint/2010/main" val="1715134392"/>
+        <p14:creationId xmlns:p14="http://schemas.microsoft.com/office/powerpoint/2010/main" val="1440973876"/>
       </p:ext>
     </p:extLst>
   </p:cSld>
@@ -3304,7 +3304,7 @@
           <p:cNvPr id="2" name="Date Placeholder 1">
             <a:extLst>
               <a:ext uri="{FF2B5EF4-FFF2-40B4-BE49-F238E27FC236}">
-                <a16:creationId xmlns:a16="http://schemas.microsoft.com/office/drawing/2014/main" id="{0B4F3FEB-F1B2-B4A5-5F8A-8979177BEE73}"/>
+                <a16:creationId xmlns:a16="http://schemas.microsoft.com/office/drawing/2014/main" id="{AE12028E-CBFB-FE7A-9846-96D709CE830C}"/>
               </a:ext>
             </a:extLst>
           </p:cNvPr>
@@ -3320,9 +3320,9 @@
           <a:bodyPr/>
           <a:lstStyle/>
           <a:p>
-            <a:fld id="{2F8D26A6-D71B-4538-BE7E-D2A35FE8C500}" type="datetimeFigureOut">
+            <a:fld id="{75E84C95-8086-4385-A8BA-6F560668E2C3}" type="datetimeFigureOut">
               <a:rPr lang="en-MY" smtClean="0"/>
-              <a:t>24/9/2026</a:t>
+              <a:t>25/9/2026</a:t>
             </a:fld>
             <a:endParaRPr lang="en-MY"/>
           </a:p>
@@ -3333,7 +3333,7 @@
           <p:cNvPr id="3" name="Footer Placeholder 2">
             <a:extLst>
               <a:ext uri="{FF2B5EF4-FFF2-40B4-BE49-F238E27FC236}">
-                <a16:creationId xmlns:a16="http://schemas.microsoft.com/office/drawing/2014/main" id="{84115850-7D30-F05E-4F34-BB3B79145506}"/>
+                <a16:creationId xmlns:a16="http://schemas.microsoft.com/office/drawing/2014/main" id="{ECB41F3B-753E-7E35-99C9-D6839094484C}"/>
               </a:ext>
             </a:extLst>
           </p:cNvPr>
@@ -3358,7 +3358,7 @@
           <p:cNvPr id="4" name="Slide Number Placeholder 3">
             <a:extLst>
               <a:ext uri="{FF2B5EF4-FFF2-40B4-BE49-F238E27FC236}">
-                <a16:creationId xmlns:a16="http://schemas.microsoft.com/office/drawing/2014/main" id="{0C6DBCCA-1AF8-A7F4-33DA-6354CA81E505}"/>
+                <a16:creationId xmlns:a16="http://schemas.microsoft.com/office/drawing/2014/main" id="{9B265FCF-C759-D3D1-9BD5-2423D8CD9767}"/>
               </a:ext>
             </a:extLst>
           </p:cNvPr>
@@ -3374,7 +3374,7 @@
           <a:bodyPr/>
           <a:lstStyle/>
           <a:p>
-            <a:fld id="{3A1571EA-3779-4ED8-A27C-B0EAA1CBA9CE}" type="slidenum">
+            <a:fld id="{8BC4A4B2-CAF2-40F7-91B4-6AE8933782A6}" type="slidenum">
               <a:rPr lang="en-MY" smtClean="0"/>
               <a:t>‹#›</a:t>
             </a:fld>
@@ -3385,7 +3385,7 @@
     </p:spTree>
     <p:extLst>
       <p:ext uri="{BB962C8B-B14F-4D97-AF65-F5344CB8AC3E}">
-        <p14:creationId xmlns:p14="http://schemas.microsoft.com/office/powerpoint/2010/main" val="1658236945"/>
+        <p14:creationId xmlns:p14="http://schemas.microsoft.com/office/powerpoint/2010/main" val="2406687361"/>
       </p:ext>
     </p:extLst>
   </p:cSld>
@@ -3417,7 +3417,7 @@
           <p:cNvPr id="2" name="Title 1">
             <a:extLst>
               <a:ext uri="{FF2B5EF4-FFF2-40B4-BE49-F238E27FC236}">
-                <a16:creationId xmlns:a16="http://schemas.microsoft.com/office/drawing/2014/main" id="{105FD0A8-4BDE-DB82-89F2-817042BB153C}"/>
+                <a16:creationId xmlns:a16="http://schemas.microsoft.com/office/drawing/2014/main" id="{B5B73133-6D20-804F-720C-007E69C80AE8}"/>
               </a:ext>
             </a:extLst>
           </p:cNvPr>
@@ -3455,7 +3455,7 @@
           <p:cNvPr id="3" name="Content Placeholder 2">
             <a:extLst>
               <a:ext uri="{FF2B5EF4-FFF2-40B4-BE49-F238E27FC236}">
-                <a16:creationId xmlns:a16="http://schemas.microsoft.com/office/drawing/2014/main" id="{2B1780A2-D2F0-73DA-7259-4B91C4DEDE6E}"/>
+                <a16:creationId xmlns:a16="http://schemas.microsoft.com/office/drawing/2014/main" id="{C9A604B3-1AC1-14C9-63D2-E24B9B634FA5}"/>
               </a:ext>
             </a:extLst>
           </p:cNvPr>
@@ -3546,7 +3546,7 @@
           <p:cNvPr id="4" name="Text Placeholder 3">
             <a:extLst>
               <a:ext uri="{FF2B5EF4-FFF2-40B4-BE49-F238E27FC236}">
-                <a16:creationId xmlns:a16="http://schemas.microsoft.com/office/drawing/2014/main" id="{3AA70730-9B95-696E-38C0-7B1F8D460B00}"/>
+                <a16:creationId xmlns:a16="http://schemas.microsoft.com/office/drawing/2014/main" id="{5302ED57-AC14-63B6-C835-8991F3C0D370}"/>
               </a:ext>
             </a:extLst>
           </p:cNvPr>
@@ -3617,7 +3617,7 @@
           <p:cNvPr id="5" name="Date Placeholder 4">
             <a:extLst>
               <a:ext uri="{FF2B5EF4-FFF2-40B4-BE49-F238E27FC236}">
-                <a16:creationId xmlns:a16="http://schemas.microsoft.com/office/drawing/2014/main" id="{745A39B1-B87C-A9C9-6CD4-B33A0EF05004}"/>
+                <a16:creationId xmlns:a16="http://schemas.microsoft.com/office/drawing/2014/main" id="{C9B88963-B1B0-8BCF-49F8-98AC5BB143E0}"/>
               </a:ext>
             </a:extLst>
           </p:cNvPr>
@@ -3633,9 +3633,9 @@
           <a:bodyPr/>
           <a:lstStyle/>
           <a:p>
-            <a:fld id="{2F8D26A6-D71B-4538-BE7E-D2A35FE8C500}" type="datetimeFigureOut">
+            <a:fld id="{75E84C95-8086-4385-A8BA-6F560668E2C3}" type="datetimeFigureOut">
               <a:rPr lang="en-MY" smtClean="0"/>
-              <a:t>24/9/2026</a:t>
+              <a:t>25/9/2026</a:t>
             </a:fld>
             <a:endParaRPr lang="en-MY"/>
           </a:p>
@@ -3646,7 +3646,7 @@
           <p:cNvPr id="6" name="Footer Placeholder 5">
             <a:extLst>
               <a:ext uri="{FF2B5EF4-FFF2-40B4-BE49-F238E27FC236}">
-                <a16:creationId xmlns:a16="http://schemas.microsoft.com/office/drawing/2014/main" id="{5261FCB0-ACD3-26A1-9312-3FCB1B237BDD}"/>
+                <a16:creationId xmlns:a16="http://schemas.microsoft.com/office/drawing/2014/main" id="{DD512C86-45F1-5DFA-8460-5EF4A9DD7220}"/>
               </a:ext>
             </a:extLst>
           </p:cNvPr>
@@ -3671,7 +3671,7 @@
           <p:cNvPr id="7" name="Slide Number Placeholder 6">
             <a:extLst>
               <a:ext uri="{FF2B5EF4-FFF2-40B4-BE49-F238E27FC236}">
-                <a16:creationId xmlns:a16="http://schemas.microsoft.com/office/drawing/2014/main" id="{41D74D84-18C2-AB84-50D5-7F1E02D55B81}"/>
+                <a16:creationId xmlns:a16="http://schemas.microsoft.com/office/drawing/2014/main" id="{B853922B-EEF5-D37B-64D6-28CEDB446FC7}"/>
               </a:ext>
             </a:extLst>
           </p:cNvPr>
@@ -3687,7 +3687,7 @@
           <a:bodyPr/>
           <a:lstStyle/>
           <a:p>
-            <a:fld id="{3A1571EA-3779-4ED8-A27C-B0EAA1CBA9CE}" type="slidenum">
+            <a:fld id="{8BC4A4B2-CAF2-40F7-91B4-6AE8933782A6}" type="slidenum">
               <a:rPr lang="en-MY" smtClean="0"/>
               <a:t>‹#›</a:t>
             </a:fld>
@@ -3698,7 +3698,7 @@
     </p:spTree>
     <p:extLst>
       <p:ext uri="{BB962C8B-B14F-4D97-AF65-F5344CB8AC3E}">
-        <p14:creationId xmlns:p14="http://schemas.microsoft.com/office/powerpoint/2010/main" val="1906720132"/>
+        <p14:creationId xmlns:p14="http://schemas.microsoft.com/office/powerpoint/2010/main" val="1973147054"/>
       </p:ext>
     </p:extLst>
   </p:cSld>
@@ -3730,7 +3730,7 @@
           <p:cNvPr id="2" name="Title 1">
             <a:extLst>
               <a:ext uri="{FF2B5EF4-FFF2-40B4-BE49-F238E27FC236}">
-                <a16:creationId xmlns:a16="http://schemas.microsoft.com/office/drawing/2014/main" id="{49CE2EAB-8EB8-5809-B09E-C5A0A68D27F3}"/>
+                <a16:creationId xmlns:a16="http://schemas.microsoft.com/office/drawing/2014/main" id="{48256F1F-7360-2B11-8823-E96D1888184F}"/>
               </a:ext>
             </a:extLst>
           </p:cNvPr>
@@ -3768,7 +3768,7 @@
           <p:cNvPr id="3" name="Picture Placeholder 2">
             <a:extLst>
               <a:ext uri="{FF2B5EF4-FFF2-40B4-BE49-F238E27FC236}">
-                <a16:creationId xmlns:a16="http://schemas.microsoft.com/office/drawing/2014/main" id="{3B8E499D-8849-39FF-0382-9CFF05A0719C}"/>
+                <a16:creationId xmlns:a16="http://schemas.microsoft.com/office/drawing/2014/main" id="{3593B6C9-EC9F-2F4A-C930-31DA55721AE7}"/>
               </a:ext>
             </a:extLst>
           </p:cNvPr>
@@ -3835,7 +3835,7 @@
           <p:cNvPr id="4" name="Text Placeholder 3">
             <a:extLst>
               <a:ext uri="{FF2B5EF4-FFF2-40B4-BE49-F238E27FC236}">
-                <a16:creationId xmlns:a16="http://schemas.microsoft.com/office/drawing/2014/main" id="{1E4AE888-E2D5-CA38-BA31-6F24910AD44D}"/>
+                <a16:creationId xmlns:a16="http://schemas.microsoft.com/office/drawing/2014/main" id="{EB0D36C1-6F90-3B75-57AD-C4D1A6618431}"/>
               </a:ext>
             </a:extLst>
           </p:cNvPr>
@@ -3906,7 +3906,7 @@
           <p:cNvPr id="5" name="Date Placeholder 4">
             <a:extLst>
               <a:ext uri="{FF2B5EF4-FFF2-40B4-BE49-F238E27FC236}">
-                <a16:creationId xmlns:a16="http://schemas.microsoft.com/office/drawing/2014/main" id="{D62CCA2A-DD7C-0253-3FF5-7DEDD211D120}"/>
+                <a16:creationId xmlns:a16="http://schemas.microsoft.com/office/drawing/2014/main" id="{874AFF72-856F-AC7F-BCD5-399A5B58B399}"/>
               </a:ext>
             </a:extLst>
           </p:cNvPr>
@@ -3922,9 +3922,9 @@
           <a:bodyPr/>
           <a:lstStyle/>
           <a:p>
-            <a:fld id="{2F8D26A6-D71B-4538-BE7E-D2A35FE8C500}" type="datetimeFigureOut">
+            <a:fld id="{75E84C95-8086-4385-A8BA-6F560668E2C3}" type="datetimeFigureOut">
               <a:rPr lang="en-MY" smtClean="0"/>
-              <a:t>24/9/2026</a:t>
+              <a:t>25/9/2026</a:t>
             </a:fld>
             <a:endParaRPr lang="en-MY"/>
           </a:p>
@@ -3935,7 +3935,7 @@
           <p:cNvPr id="6" name="Footer Placeholder 5">
             <a:extLst>
               <a:ext uri="{FF2B5EF4-FFF2-40B4-BE49-F238E27FC236}">
-                <a16:creationId xmlns:a16="http://schemas.microsoft.com/office/drawing/2014/main" id="{5B00417B-837E-4429-405B-2209D41A0354}"/>
+                <a16:creationId xmlns:a16="http://schemas.microsoft.com/office/drawing/2014/main" id="{8389BB72-78E4-8F4E-AD16-6B650CBDC0CF}"/>
               </a:ext>
             </a:extLst>
           </p:cNvPr>
@@ -3960,7 +3960,7 @@
           <p:cNvPr id="7" name="Slide Number Placeholder 6">
             <a:extLst>
               <a:ext uri="{FF2B5EF4-FFF2-40B4-BE49-F238E27FC236}">
-                <a16:creationId xmlns:a16="http://schemas.microsoft.com/office/drawing/2014/main" id="{DE762FA2-6CE3-E274-4B6C-2EDA6EE660C6}"/>
+                <a16:creationId xmlns:a16="http://schemas.microsoft.com/office/drawing/2014/main" id="{57362080-6B06-0CE3-5772-D46F136578BF}"/>
               </a:ext>
             </a:extLst>
           </p:cNvPr>
@@ -3976,7 +3976,7 @@
           <a:bodyPr/>
           <a:lstStyle/>
           <a:p>
-            <a:fld id="{3A1571EA-3779-4ED8-A27C-B0EAA1CBA9CE}" type="slidenum">
+            <a:fld id="{8BC4A4B2-CAF2-40F7-91B4-6AE8933782A6}" type="slidenum">
               <a:rPr lang="en-MY" smtClean="0"/>
               <a:t>‹#›</a:t>
             </a:fld>
@@ -3987,7 +3987,7 @@
     </p:spTree>
     <p:extLst>
       <p:ext uri="{BB962C8B-B14F-4D97-AF65-F5344CB8AC3E}">
-        <p14:creationId xmlns:p14="http://schemas.microsoft.com/office/powerpoint/2010/main" val="881667646"/>
+        <p14:creationId xmlns:p14="http://schemas.microsoft.com/office/powerpoint/2010/main" val="644368543"/>
       </p:ext>
     </p:extLst>
   </p:cSld>
@@ -4024,7 +4024,7 @@
           <p:cNvPr id="2" name="Title Placeholder 1">
             <a:extLst>
               <a:ext uri="{FF2B5EF4-FFF2-40B4-BE49-F238E27FC236}">
-                <a16:creationId xmlns:a16="http://schemas.microsoft.com/office/drawing/2014/main" id="{0A23BD1A-37C8-8331-A9AB-6E2AB9766420}"/>
+                <a16:creationId xmlns:a16="http://schemas.microsoft.com/office/drawing/2014/main" id="{D0F0146B-DB96-7D77-3955-4399C1135FD2}"/>
               </a:ext>
             </a:extLst>
           </p:cNvPr>
@@ -4063,7 +4063,7 @@
           <p:cNvPr id="3" name="Text Placeholder 2">
             <a:extLst>
               <a:ext uri="{FF2B5EF4-FFF2-40B4-BE49-F238E27FC236}">
-                <a16:creationId xmlns:a16="http://schemas.microsoft.com/office/drawing/2014/main" id="{8AA7ACD9-0A91-47F1-6E7F-668571C3E313}"/>
+                <a16:creationId xmlns:a16="http://schemas.microsoft.com/office/drawing/2014/main" id="{E3CBBABB-573A-17E2-5E58-C90F21059058}"/>
               </a:ext>
             </a:extLst>
           </p:cNvPr>
@@ -4131,7 +4131,7 @@
           <p:cNvPr id="4" name="Date Placeholder 3">
             <a:extLst>
               <a:ext uri="{FF2B5EF4-FFF2-40B4-BE49-F238E27FC236}">
-                <a16:creationId xmlns:a16="http://schemas.microsoft.com/office/drawing/2014/main" id="{DD49AE63-1565-10AC-91FF-007FC2788FF4}"/>
+                <a16:creationId xmlns:a16="http://schemas.microsoft.com/office/drawing/2014/main" id="{2028028C-4A72-0171-4210-ABBB4360BC54}"/>
               </a:ext>
             </a:extLst>
           </p:cNvPr>
@@ -4165,9 +4165,9 @@
             </a:lvl1pPr>
           </a:lstStyle>
           <a:p>
-            <a:fld id="{2F8D26A6-D71B-4538-BE7E-D2A35FE8C500}" type="datetimeFigureOut">
+            <a:fld id="{75E84C95-8086-4385-A8BA-6F560668E2C3}" type="datetimeFigureOut">
               <a:rPr lang="en-MY" smtClean="0"/>
-              <a:t>24/9/2026</a:t>
+              <a:t>25/9/2026</a:t>
             </a:fld>
             <a:endParaRPr lang="en-MY"/>
           </a:p>
@@ -4178,7 +4178,7 @@
           <p:cNvPr id="5" name="Footer Placeholder 4">
             <a:extLst>
               <a:ext uri="{FF2B5EF4-FFF2-40B4-BE49-F238E27FC236}">
-                <a16:creationId xmlns:a16="http://schemas.microsoft.com/office/drawing/2014/main" id="{B5A60928-FB6D-3A7F-D452-5ACB74753CD7}"/>
+                <a16:creationId xmlns:a16="http://schemas.microsoft.com/office/drawing/2014/main" id="{15E180C4-0CCC-101E-59B9-7390C1EDBE36}"/>
               </a:ext>
             </a:extLst>
           </p:cNvPr>
@@ -4221,7 +4221,7 @@
           <p:cNvPr id="6" name="Slide Number Placeholder 5">
             <a:extLst>
               <a:ext uri="{FF2B5EF4-FFF2-40B4-BE49-F238E27FC236}">
-                <a16:creationId xmlns:a16="http://schemas.microsoft.com/office/drawing/2014/main" id="{E0BBF07E-1364-8772-1087-DA776997BEC5}"/>
+                <a16:creationId xmlns:a16="http://schemas.microsoft.com/office/drawing/2014/main" id="{E9A0CC83-49EF-A163-E374-1B0868C0FB1F}"/>
               </a:ext>
             </a:extLst>
           </p:cNvPr>
@@ -4255,7 +4255,7 @@
             </a:lvl1pPr>
           </a:lstStyle>
           <a:p>
-            <a:fld id="{3A1571EA-3779-4ED8-A27C-B0EAA1CBA9CE}" type="slidenum">
+            <a:fld id="{8BC4A4B2-CAF2-40F7-91B4-6AE8933782A6}" type="slidenum">
               <a:rPr lang="en-MY" smtClean="0"/>
               <a:t>‹#›</a:t>
             </a:fld>
@@ -4266,7 +4266,7 @@
     </p:spTree>
     <p:extLst>
       <p:ext uri="{BB962C8B-B14F-4D97-AF65-F5344CB8AC3E}">
-        <p14:creationId xmlns:p14="http://schemas.microsoft.com/office/powerpoint/2010/main" val="1452899008"/>
+        <p14:creationId xmlns:p14="http://schemas.microsoft.com/office/powerpoint/2010/main" val="242825060"/>
       </p:ext>
     </p:extLst>
   </p:cSld>
@@ -4597,7 +4597,7 @@
           <p:cNvPr id="2" name="TextBox 1">
             <a:extLst>
               <a:ext uri="{FF2B5EF4-FFF2-40B4-BE49-F238E27FC236}">
-                <a16:creationId xmlns:a16="http://schemas.microsoft.com/office/drawing/2014/main" id="{04688185-681C-B34E-810A-0A8877458AB1}"/>
+                <a16:creationId xmlns:a16="http://schemas.microsoft.com/office/drawing/2014/main" id="{C9F1DEFF-2BF6-A073-5950-66C70587A778}"/>
               </a:ext>
             </a:extLst>
           </p:cNvPr>
@@ -4637,7 +4637,7 @@
           <p:cNvPr id="3" name="TextBox 2">
             <a:extLst>
               <a:ext uri="{FF2B5EF4-FFF2-40B4-BE49-F238E27FC236}">
-                <a16:creationId xmlns:a16="http://schemas.microsoft.com/office/drawing/2014/main" id="{51568EAB-E7D6-8521-1BE2-FA84676E2452}"/>
+                <a16:creationId xmlns:a16="http://schemas.microsoft.com/office/drawing/2014/main" id="{AD0CB622-2DA3-2312-A9EE-2EE5A5A714B5}"/>
               </a:ext>
             </a:extLst>
           </p:cNvPr>
@@ -4683,7 +4683,7 @@
           <p:cNvPr id="4" name="TextBox 3">
             <a:extLst>
               <a:ext uri="{FF2B5EF4-FFF2-40B4-BE49-F238E27FC236}">
-                <a16:creationId xmlns:a16="http://schemas.microsoft.com/office/drawing/2014/main" id="{1F2D47D5-2481-95B1-4CC3-8CD19FCA3166}"/>
+                <a16:creationId xmlns:a16="http://schemas.microsoft.com/office/drawing/2014/main" id="{258BB32D-9412-17AB-927C-D83235978EA5}"/>
               </a:ext>
             </a:extLst>
           </p:cNvPr>
@@ -4729,7 +4729,7 @@
           <p:cNvPr id="5" name="TextBox 4">
             <a:extLst>
               <a:ext uri="{FF2B5EF4-FFF2-40B4-BE49-F238E27FC236}">
-                <a16:creationId xmlns:a16="http://schemas.microsoft.com/office/drawing/2014/main" id="{1B0FD74F-7A65-AF98-B07E-04AB0F9AFF3C}"/>
+                <a16:creationId xmlns:a16="http://schemas.microsoft.com/office/drawing/2014/main" id="{D81FF64F-2BE7-D58E-C517-320BC145D724}"/>
               </a:ext>
             </a:extLst>
           </p:cNvPr>
@@ -4775,7 +4775,7 @@
           <p:cNvPr id="6" name="TextBox 5">
             <a:extLst>
               <a:ext uri="{FF2B5EF4-FFF2-40B4-BE49-F238E27FC236}">
-                <a16:creationId xmlns:a16="http://schemas.microsoft.com/office/drawing/2014/main" id="{C7D69BDF-93F1-2297-291F-21D4BAA5099E}"/>
+                <a16:creationId xmlns:a16="http://schemas.microsoft.com/office/drawing/2014/main" id="{15BDB901-D66E-F877-D56A-3356C73A27EA}"/>
               </a:ext>
             </a:extLst>
           </p:cNvPr>
@@ -4815,7 +4815,7 @@
           <p:cNvPr id="7" name="TextBox 6">
             <a:extLst>
               <a:ext uri="{FF2B5EF4-FFF2-40B4-BE49-F238E27FC236}">
-                <a16:creationId xmlns:a16="http://schemas.microsoft.com/office/drawing/2014/main" id="{982AF74C-62FF-3ADC-854D-55A7B87A5293}"/>
+                <a16:creationId xmlns:a16="http://schemas.microsoft.com/office/drawing/2014/main" id="{B6355805-38F5-AADD-F740-D999FAE7FE6D}"/>
               </a:ext>
             </a:extLst>
           </p:cNvPr>
@@ -4860,7 +4860,7 @@
     </p:spTree>
     <p:extLst>
       <p:ext uri="{BB962C8B-B14F-4D97-AF65-F5344CB8AC3E}">
-        <p14:creationId xmlns:p14="http://schemas.microsoft.com/office/powerpoint/2010/main" val="2007751059"/>
+        <p14:creationId xmlns:p14="http://schemas.microsoft.com/office/powerpoint/2010/main" val="1641223872"/>
       </p:ext>
     </p:extLst>
   </p:cSld>
@@ -4900,7 +4900,7 @@
           <p:cNvPr id="2" name="TextBox 1">
             <a:extLst>
               <a:ext uri="{FF2B5EF4-FFF2-40B4-BE49-F238E27FC236}">
-                <a16:creationId xmlns:a16="http://schemas.microsoft.com/office/drawing/2014/main" id="{85225ABB-F83B-7C1B-9319-97F9C972F146}"/>
+                <a16:creationId xmlns:a16="http://schemas.microsoft.com/office/drawing/2014/main" id="{98F9FF10-4078-B6F7-737B-35D484C8F19B}"/>
               </a:ext>
             </a:extLst>
           </p:cNvPr>
@@ -4947,7 +4947,7 @@
           <p:cNvPr id="3" name="TextBox 2">
             <a:extLst>
               <a:ext uri="{FF2B5EF4-FFF2-40B4-BE49-F238E27FC236}">
-                <a16:creationId xmlns:a16="http://schemas.microsoft.com/office/drawing/2014/main" id="{AB59134A-766F-CC39-5370-E1D4761D6BE5}"/>
+                <a16:creationId xmlns:a16="http://schemas.microsoft.com/office/drawing/2014/main" id="{65DFFAFF-C10C-3691-64FA-63711ECE6907}"/>
               </a:ext>
             </a:extLst>
           </p:cNvPr>
@@ -4988,7 +4988,7 @@
           <p:cNvPr id="4" name="TextBox 3">
             <a:extLst>
               <a:ext uri="{FF2B5EF4-FFF2-40B4-BE49-F238E27FC236}">
-                <a16:creationId xmlns:a16="http://schemas.microsoft.com/office/drawing/2014/main" id="{202F9563-F324-610B-1360-28668B9BE730}"/>
+                <a16:creationId xmlns:a16="http://schemas.microsoft.com/office/drawing/2014/main" id="{A0AC3F5D-5DA3-E0A6-B2F5-308711CF43D6}"/>
               </a:ext>
             </a:extLst>
           </p:cNvPr>
@@ -5027,7 +5027,7 @@
     </p:spTree>
     <p:extLst>
       <p:ext uri="{BB962C8B-B14F-4D97-AF65-F5344CB8AC3E}">
-        <p14:creationId xmlns:p14="http://schemas.microsoft.com/office/powerpoint/2010/main" val="2554288377"/>
+        <p14:creationId xmlns:p14="http://schemas.microsoft.com/office/powerpoint/2010/main" val="3966682004"/>
       </p:ext>
     </p:extLst>
   </p:cSld>
@@ -5067,7 +5067,7 @@
           <p:cNvPr id="2" name="TextBox 1">
             <a:extLst>
               <a:ext uri="{FF2B5EF4-FFF2-40B4-BE49-F238E27FC236}">
-                <a16:creationId xmlns:a16="http://schemas.microsoft.com/office/drawing/2014/main" id="{155ED394-EAE2-B73B-E5FF-50C696B3B0A4}"/>
+                <a16:creationId xmlns:a16="http://schemas.microsoft.com/office/drawing/2014/main" id="{5EF6032B-14A9-DD7C-7C23-88DCA7A579AE}"/>
               </a:ext>
             </a:extLst>
           </p:cNvPr>
@@ -5113,7 +5113,7 @@
           <p:cNvPr id="3" name="Rectangle: Rounded Corners 2">
             <a:extLst>
               <a:ext uri="{FF2B5EF4-FFF2-40B4-BE49-F238E27FC236}">
-                <a16:creationId xmlns:a16="http://schemas.microsoft.com/office/drawing/2014/main" id="{9BF4ABDB-995D-31DE-3B13-3789C1A37E78}"/>
+                <a16:creationId xmlns:a16="http://schemas.microsoft.com/office/drawing/2014/main" id="{135E3853-F5D6-46B5-DB55-82D1675E5DF1}"/>
               </a:ext>
             </a:extLst>
           </p:cNvPr>
@@ -5183,7 +5183,7 @@
           <p:cNvPr id="4" name="Oval 3">
             <a:extLst>
               <a:ext uri="{FF2B5EF4-FFF2-40B4-BE49-F238E27FC236}">
-                <a16:creationId xmlns:a16="http://schemas.microsoft.com/office/drawing/2014/main" id="{8EE34568-2BEF-B4DC-3EB5-8D8F0F0D075D}"/>
+                <a16:creationId xmlns:a16="http://schemas.microsoft.com/office/drawing/2014/main" id="{CBA11C2A-A00A-630A-47AC-FDA0EA0B5131}"/>
               </a:ext>
             </a:extLst>
           </p:cNvPr>
@@ -5259,7 +5259,7 @@
           <p:cNvPr id="5" name="TextBox 4">
             <a:extLst>
               <a:ext uri="{FF2B5EF4-FFF2-40B4-BE49-F238E27FC236}">
-                <a16:creationId xmlns:a16="http://schemas.microsoft.com/office/drawing/2014/main" id="{FEAA5F87-A9CD-DB72-D6C4-CD93FEAB0FFA}"/>
+                <a16:creationId xmlns:a16="http://schemas.microsoft.com/office/drawing/2014/main" id="{1D8C8661-BE60-911A-3CCF-A317E330902C}"/>
               </a:ext>
             </a:extLst>
           </p:cNvPr>
@@ -5299,7 +5299,7 @@
           <p:cNvPr id="6" name="TextBox 5">
             <a:extLst>
               <a:ext uri="{FF2B5EF4-FFF2-40B4-BE49-F238E27FC236}">
-                <a16:creationId xmlns:a16="http://schemas.microsoft.com/office/drawing/2014/main" id="{F78D9F93-08F4-D9AD-0D58-ED7D621A6459}"/>
+                <a16:creationId xmlns:a16="http://schemas.microsoft.com/office/drawing/2014/main" id="{155F8971-9AF2-DBBF-1E2E-8ECD803958BD}"/>
               </a:ext>
             </a:extLst>
           </p:cNvPr>
@@ -5339,7 +5339,7 @@
           <p:cNvPr id="7" name="Rectangle: Rounded Corners 6">
             <a:extLst>
               <a:ext uri="{FF2B5EF4-FFF2-40B4-BE49-F238E27FC236}">
-                <a16:creationId xmlns:a16="http://schemas.microsoft.com/office/drawing/2014/main" id="{01D93166-7B04-76BB-ECA4-ADEA8F4340DE}"/>
+                <a16:creationId xmlns:a16="http://schemas.microsoft.com/office/drawing/2014/main" id="{0DEA6959-D12A-F5BE-925F-E740154395E4}"/>
               </a:ext>
             </a:extLst>
           </p:cNvPr>
@@ -5409,7 +5409,7 @@
           <p:cNvPr id="8" name="Oval 7">
             <a:extLst>
               <a:ext uri="{FF2B5EF4-FFF2-40B4-BE49-F238E27FC236}">
-                <a16:creationId xmlns:a16="http://schemas.microsoft.com/office/drawing/2014/main" id="{B3BFCEDA-DEA8-2BDE-BD18-56DAD6F4DEF7}"/>
+                <a16:creationId xmlns:a16="http://schemas.microsoft.com/office/drawing/2014/main" id="{C6FDEB1B-63ED-CDE6-E1C8-DC1A54C26904}"/>
               </a:ext>
             </a:extLst>
           </p:cNvPr>
@@ -5485,7 +5485,7 @@
           <p:cNvPr id="9" name="TextBox 8">
             <a:extLst>
               <a:ext uri="{FF2B5EF4-FFF2-40B4-BE49-F238E27FC236}">
-                <a16:creationId xmlns:a16="http://schemas.microsoft.com/office/drawing/2014/main" id="{FC4CC75F-136A-8DFB-2878-3C10E175A096}"/>
+                <a16:creationId xmlns:a16="http://schemas.microsoft.com/office/drawing/2014/main" id="{4388E605-5306-D094-CAB6-0DFF6CF8F72D}"/>
               </a:ext>
             </a:extLst>
           </p:cNvPr>
@@ -5525,7 +5525,7 @@
           <p:cNvPr id="10" name="TextBox 9">
             <a:extLst>
               <a:ext uri="{FF2B5EF4-FFF2-40B4-BE49-F238E27FC236}">
-                <a16:creationId xmlns:a16="http://schemas.microsoft.com/office/drawing/2014/main" id="{05305E01-A1DE-22F3-C14D-48B5A0A2504A}"/>
+                <a16:creationId xmlns:a16="http://schemas.microsoft.com/office/drawing/2014/main" id="{0D327335-AE18-0BE8-46E1-F01A482F6883}"/>
               </a:ext>
             </a:extLst>
           </p:cNvPr>
@@ -5571,7 +5571,7 @@
           <p:cNvPr id="11" name="Rectangle: Rounded Corners 10">
             <a:extLst>
               <a:ext uri="{FF2B5EF4-FFF2-40B4-BE49-F238E27FC236}">
-                <a16:creationId xmlns:a16="http://schemas.microsoft.com/office/drawing/2014/main" id="{A7779ABA-ACD1-F11C-7459-68684860B058}"/>
+                <a16:creationId xmlns:a16="http://schemas.microsoft.com/office/drawing/2014/main" id="{651BF659-0343-B2A9-A855-07F8471793C3}"/>
               </a:ext>
             </a:extLst>
           </p:cNvPr>
@@ -5641,7 +5641,7 @@
           <p:cNvPr id="12" name="Oval 11">
             <a:extLst>
               <a:ext uri="{FF2B5EF4-FFF2-40B4-BE49-F238E27FC236}">
-                <a16:creationId xmlns:a16="http://schemas.microsoft.com/office/drawing/2014/main" id="{FC29447A-8E9B-3EB7-7E3C-93584493EFD6}"/>
+                <a16:creationId xmlns:a16="http://schemas.microsoft.com/office/drawing/2014/main" id="{C07584C7-FEA7-EBEE-C236-CEC3DB676916}"/>
               </a:ext>
             </a:extLst>
           </p:cNvPr>
@@ -5717,7 +5717,7 @@
           <p:cNvPr id="13" name="TextBox 12">
             <a:extLst>
               <a:ext uri="{FF2B5EF4-FFF2-40B4-BE49-F238E27FC236}">
-                <a16:creationId xmlns:a16="http://schemas.microsoft.com/office/drawing/2014/main" id="{821A25C5-1F69-C158-D2B6-386EBF239FBE}"/>
+                <a16:creationId xmlns:a16="http://schemas.microsoft.com/office/drawing/2014/main" id="{2E75113C-FDAC-430F-0DBB-1CC1078FF387}"/>
               </a:ext>
             </a:extLst>
           </p:cNvPr>
@@ -5757,7 +5757,7 @@
           <p:cNvPr id="14" name="TextBox 13">
             <a:extLst>
               <a:ext uri="{FF2B5EF4-FFF2-40B4-BE49-F238E27FC236}">
-                <a16:creationId xmlns:a16="http://schemas.microsoft.com/office/drawing/2014/main" id="{6496D5D2-2E50-B42D-80DF-6B79133BA98F}"/>
+                <a16:creationId xmlns:a16="http://schemas.microsoft.com/office/drawing/2014/main" id="{96DAC7D9-ADBF-B48F-C684-F6096CBDBE4F}"/>
               </a:ext>
             </a:extLst>
           </p:cNvPr>
@@ -5803,7 +5803,7 @@
           <p:cNvPr id="15" name="Rectangle: Rounded Corners 14">
             <a:extLst>
               <a:ext uri="{FF2B5EF4-FFF2-40B4-BE49-F238E27FC236}">
-                <a16:creationId xmlns:a16="http://schemas.microsoft.com/office/drawing/2014/main" id="{09529E7B-4E89-D09A-DFE8-83652183BDCE}"/>
+                <a16:creationId xmlns:a16="http://schemas.microsoft.com/office/drawing/2014/main" id="{F38B8F90-47FA-CAE1-3ED6-662377AA65CD}"/>
               </a:ext>
             </a:extLst>
           </p:cNvPr>
@@ -5873,7 +5873,7 @@
           <p:cNvPr id="16" name="Oval 15">
             <a:extLst>
               <a:ext uri="{FF2B5EF4-FFF2-40B4-BE49-F238E27FC236}">
-                <a16:creationId xmlns:a16="http://schemas.microsoft.com/office/drawing/2014/main" id="{699CE4F5-89CD-83DA-2414-5C9065B4B087}"/>
+                <a16:creationId xmlns:a16="http://schemas.microsoft.com/office/drawing/2014/main" id="{1F900C07-8F2E-340A-F69A-EA8A15F6D247}"/>
               </a:ext>
             </a:extLst>
           </p:cNvPr>
@@ -5949,7 +5949,7 @@
           <p:cNvPr id="17" name="TextBox 16">
             <a:extLst>
               <a:ext uri="{FF2B5EF4-FFF2-40B4-BE49-F238E27FC236}">
-                <a16:creationId xmlns:a16="http://schemas.microsoft.com/office/drawing/2014/main" id="{997993B5-4333-0281-DAD8-97958FE50A7F}"/>
+                <a16:creationId xmlns:a16="http://schemas.microsoft.com/office/drawing/2014/main" id="{FCBD32BB-7E75-C5E3-435A-2280E0B55DB0}"/>
               </a:ext>
             </a:extLst>
           </p:cNvPr>
@@ -5989,7 +5989,7 @@
           <p:cNvPr id="18" name="TextBox 17">
             <a:extLst>
               <a:ext uri="{FF2B5EF4-FFF2-40B4-BE49-F238E27FC236}">
-                <a16:creationId xmlns:a16="http://schemas.microsoft.com/office/drawing/2014/main" id="{6B3445B8-F7AF-69F7-0957-10E0F0D5D7E6}"/>
+                <a16:creationId xmlns:a16="http://schemas.microsoft.com/office/drawing/2014/main" id="{020A3B65-7CF4-F129-2EC9-53280FE13F2C}"/>
               </a:ext>
             </a:extLst>
           </p:cNvPr>
@@ -6035,7 +6035,7 @@
           <p:cNvPr id="19" name="TextBox 18">
             <a:extLst>
               <a:ext uri="{FF2B5EF4-FFF2-40B4-BE49-F238E27FC236}">
-                <a16:creationId xmlns:a16="http://schemas.microsoft.com/office/drawing/2014/main" id="{D64E800A-F043-AA62-316E-5071C3FC342F}"/>
+                <a16:creationId xmlns:a16="http://schemas.microsoft.com/office/drawing/2014/main" id="{B52A5287-FE6B-5D99-AB1B-EB205949C03B}"/>
               </a:ext>
             </a:extLst>
           </p:cNvPr>
@@ -6081,7 +6081,7 @@
           <p:cNvPr id="20" name="TextBox 19">
             <a:extLst>
               <a:ext uri="{FF2B5EF4-FFF2-40B4-BE49-F238E27FC236}">
-                <a16:creationId xmlns:a16="http://schemas.microsoft.com/office/drawing/2014/main" id="{CE6290B6-92E5-DDE1-4A45-86EBDE78BD5E}"/>
+                <a16:creationId xmlns:a16="http://schemas.microsoft.com/office/drawing/2014/main" id="{74C9C63E-BBC2-BD44-56B5-7F3DA756A320}"/>
               </a:ext>
             </a:extLst>
           </p:cNvPr>
@@ -6127,7 +6127,7 @@
           <p:cNvPr id="21" name="TextBox 20">
             <a:extLst>
               <a:ext uri="{FF2B5EF4-FFF2-40B4-BE49-F238E27FC236}">
-                <a16:creationId xmlns:a16="http://schemas.microsoft.com/office/drawing/2014/main" id="{6CF3586E-6E8C-F9B0-AD56-857489101578}"/>
+                <a16:creationId xmlns:a16="http://schemas.microsoft.com/office/drawing/2014/main" id="{0CF74D31-F935-C763-39E7-63BFB9B5BC18}"/>
               </a:ext>
             </a:extLst>
           </p:cNvPr>
@@ -6173,7 +6173,7 @@
           <p:cNvPr id="22" name="TextBox 21">
             <a:extLst>
               <a:ext uri="{FF2B5EF4-FFF2-40B4-BE49-F238E27FC236}">
-                <a16:creationId xmlns:a16="http://schemas.microsoft.com/office/drawing/2014/main" id="{7E65143E-E947-7E61-8233-219E9BAB8CFD}"/>
+                <a16:creationId xmlns:a16="http://schemas.microsoft.com/office/drawing/2014/main" id="{65C62AC8-63C4-5C01-434C-0E7F37CE4DB1}"/>
               </a:ext>
             </a:extLst>
           </p:cNvPr>
@@ -6219,7 +6219,7 @@
           <p:cNvPr id="23" name="TextBox 22">
             <a:extLst>
               <a:ext uri="{FF2B5EF4-FFF2-40B4-BE49-F238E27FC236}">
-                <a16:creationId xmlns:a16="http://schemas.microsoft.com/office/drawing/2014/main" id="{288B3E9E-02E1-18E1-94D6-67CFB87DA086}"/>
+                <a16:creationId xmlns:a16="http://schemas.microsoft.com/office/drawing/2014/main" id="{7F332BC5-5282-B74F-0197-62982E97E319}"/>
               </a:ext>
             </a:extLst>
           </p:cNvPr>
@@ -6265,7 +6265,7 @@
           <p:cNvPr id="24" name="TextBox 23">
             <a:extLst>
               <a:ext uri="{FF2B5EF4-FFF2-40B4-BE49-F238E27FC236}">
-                <a16:creationId xmlns:a16="http://schemas.microsoft.com/office/drawing/2014/main" id="{6890D010-EBCC-C972-24E7-AC0EDE13A5DC}"/>
+                <a16:creationId xmlns:a16="http://schemas.microsoft.com/office/drawing/2014/main" id="{4A2409BA-261B-6B11-7D92-8A878AC216DB}"/>
               </a:ext>
             </a:extLst>
           </p:cNvPr>
@@ -6311,7 +6311,7 @@
           <p:cNvPr id="25" name="TextBox 24">
             <a:extLst>
               <a:ext uri="{FF2B5EF4-FFF2-40B4-BE49-F238E27FC236}">
-                <a16:creationId xmlns:a16="http://schemas.microsoft.com/office/drawing/2014/main" id="{BED1208B-B573-1B59-EFE6-A30711210E28}"/>
+                <a16:creationId xmlns:a16="http://schemas.microsoft.com/office/drawing/2014/main" id="{71E28FE0-01CF-D24A-ABD8-6096E9BE6050}"/>
               </a:ext>
             </a:extLst>
           </p:cNvPr>
@@ -6357,7 +6357,7 @@
           <p:cNvPr id="26" name="Rectangle: Rounded Corners 25">
             <a:extLst>
               <a:ext uri="{FF2B5EF4-FFF2-40B4-BE49-F238E27FC236}">
-                <a16:creationId xmlns:a16="http://schemas.microsoft.com/office/drawing/2014/main" id="{2D174602-3BE8-1A03-4EED-0AFB74E41F72}"/>
+                <a16:creationId xmlns:a16="http://schemas.microsoft.com/office/drawing/2014/main" id="{C2F04F24-3AC5-8C4F-67BA-66416F29F805}"/>
               </a:ext>
             </a:extLst>
           </p:cNvPr>
@@ -6427,7 +6427,7 @@
           <p:cNvPr id="27" name="TextBox 26">
             <a:extLst>
               <a:ext uri="{FF2B5EF4-FFF2-40B4-BE49-F238E27FC236}">
-                <a16:creationId xmlns:a16="http://schemas.microsoft.com/office/drawing/2014/main" id="{C77247F8-7C2B-071B-78B6-727628AB7857}"/>
+                <a16:creationId xmlns:a16="http://schemas.microsoft.com/office/drawing/2014/main" id="{6427ED9F-40C7-2EF1-BB79-33B063FE96CD}"/>
               </a:ext>
             </a:extLst>
           </p:cNvPr>
@@ -6473,7 +6473,7 @@
           <p:cNvPr id="28" name="TextBox 27">
             <a:extLst>
               <a:ext uri="{FF2B5EF4-FFF2-40B4-BE49-F238E27FC236}">
-                <a16:creationId xmlns:a16="http://schemas.microsoft.com/office/drawing/2014/main" id="{A70982EC-AAE6-473E-E60F-56FA31B64A3C}"/>
+                <a16:creationId xmlns:a16="http://schemas.microsoft.com/office/drawing/2014/main" id="{B47C50BB-1BAD-1B82-5429-7337F4357CD6}"/>
               </a:ext>
             </a:extLst>
           </p:cNvPr>
@@ -6518,7 +6518,7 @@
     </p:spTree>
     <p:extLst>
       <p:ext uri="{BB962C8B-B14F-4D97-AF65-F5344CB8AC3E}">
-        <p14:creationId xmlns:p14="http://schemas.microsoft.com/office/powerpoint/2010/main" val="3699902665"/>
+        <p14:creationId xmlns:p14="http://schemas.microsoft.com/office/powerpoint/2010/main" val="4125452464"/>
       </p:ext>
     </p:extLst>
   </p:cSld>
@@ -6558,7 +6558,7 @@
           <p:cNvPr id="2" name="TextBox 1">
             <a:extLst>
               <a:ext uri="{FF2B5EF4-FFF2-40B4-BE49-F238E27FC236}">
-                <a16:creationId xmlns:a16="http://schemas.microsoft.com/office/drawing/2014/main" id="{AD43D84F-5A8B-7685-1146-1338948D88F1}"/>
+                <a16:creationId xmlns:a16="http://schemas.microsoft.com/office/drawing/2014/main" id="{7521A7F5-19BE-1F18-C3A4-1A602085A6C3}"/>
               </a:ext>
             </a:extLst>
           </p:cNvPr>
@@ -6604,7 +6604,7 @@
           <p:cNvPr id="4" name="Picture 3">
             <a:extLst>
               <a:ext uri="{FF2B5EF4-FFF2-40B4-BE49-F238E27FC236}">
-                <a16:creationId xmlns:a16="http://schemas.microsoft.com/office/drawing/2014/main" id="{B39AEFDB-A4F0-9301-8DDB-39A69CB7EAAC}"/>
+                <a16:creationId xmlns:a16="http://schemas.microsoft.com/office/drawing/2014/main" id="{42B119A9-5AE6-3456-2FC3-8ABFECC7162D}"/>
               </a:ext>
             </a:extLst>
           </p:cNvPr>
@@ -6645,7 +6645,7 @@
           <p:cNvPr id="5" name="TextBox 4">
             <a:extLst>
               <a:ext uri="{FF2B5EF4-FFF2-40B4-BE49-F238E27FC236}">
-                <a16:creationId xmlns:a16="http://schemas.microsoft.com/office/drawing/2014/main" id="{C107C9FD-4F4A-918F-07DF-32992E4F16B1}"/>
+                <a16:creationId xmlns:a16="http://schemas.microsoft.com/office/drawing/2014/main" id="{63EFA53F-33FD-C55E-C9A0-4EF254912AEE}"/>
               </a:ext>
             </a:extLst>
           </p:cNvPr>
@@ -6685,7 +6685,7 @@
           <p:cNvPr id="6" name="TextBox 5">
             <a:extLst>
               <a:ext uri="{FF2B5EF4-FFF2-40B4-BE49-F238E27FC236}">
-                <a16:creationId xmlns:a16="http://schemas.microsoft.com/office/drawing/2014/main" id="{8DAAAD95-132B-4F8A-A18D-2CABC9FD7194}"/>
+                <a16:creationId xmlns:a16="http://schemas.microsoft.com/office/drawing/2014/main" id="{D0A17D09-63FC-C9E3-E1C4-EF7D261AFB1F}"/>
               </a:ext>
             </a:extLst>
           </p:cNvPr>
@@ -6725,7 +6725,7 @@
           <p:cNvPr id="7" name="TextBox 6">
             <a:extLst>
               <a:ext uri="{FF2B5EF4-FFF2-40B4-BE49-F238E27FC236}">
-                <a16:creationId xmlns:a16="http://schemas.microsoft.com/office/drawing/2014/main" id="{E8ADE83B-7E2F-6548-0462-364E35F53722}"/>
+                <a16:creationId xmlns:a16="http://schemas.microsoft.com/office/drawing/2014/main" id="{BA22583C-082A-C08D-403A-EBC8B75F0801}"/>
               </a:ext>
             </a:extLst>
           </p:cNvPr>
@@ -6765,7 +6765,7 @@
           <p:cNvPr id="8" name="TextBox 7">
             <a:extLst>
               <a:ext uri="{FF2B5EF4-FFF2-40B4-BE49-F238E27FC236}">
-                <a16:creationId xmlns:a16="http://schemas.microsoft.com/office/drawing/2014/main" id="{E01A2123-0637-9355-7D07-8C7E66503E9D}"/>
+                <a16:creationId xmlns:a16="http://schemas.microsoft.com/office/drawing/2014/main" id="{918AD824-7F82-12C0-4F44-DC0C0787FBFF}"/>
               </a:ext>
             </a:extLst>
           </p:cNvPr>
@@ -6811,7 +6811,7 @@
           <p:cNvPr id="9" name="TextBox 8">
             <a:extLst>
               <a:ext uri="{FF2B5EF4-FFF2-40B4-BE49-F238E27FC236}">
-                <a16:creationId xmlns:a16="http://schemas.microsoft.com/office/drawing/2014/main" id="{67FF3DC6-6984-502A-CBAA-D59705E4278D}"/>
+                <a16:creationId xmlns:a16="http://schemas.microsoft.com/office/drawing/2014/main" id="{EF2CBF0F-E652-7DBA-335D-FD7F9104266E}"/>
               </a:ext>
             </a:extLst>
           </p:cNvPr>
@@ -6851,7 +6851,7 @@
           <p:cNvPr id="10" name="TextBox 9">
             <a:extLst>
               <a:ext uri="{FF2B5EF4-FFF2-40B4-BE49-F238E27FC236}">
-                <a16:creationId xmlns:a16="http://schemas.microsoft.com/office/drawing/2014/main" id="{52667BCF-44AD-DDED-EDA6-818D91EFC955}"/>
+                <a16:creationId xmlns:a16="http://schemas.microsoft.com/office/drawing/2014/main" id="{53BAB283-F634-C18E-E978-858C569B4C4A}"/>
               </a:ext>
             </a:extLst>
           </p:cNvPr>
@@ -6897,7 +6897,7 @@
           <p:cNvPr id="11" name="TextBox 10">
             <a:extLst>
               <a:ext uri="{FF2B5EF4-FFF2-40B4-BE49-F238E27FC236}">
-                <a16:creationId xmlns:a16="http://schemas.microsoft.com/office/drawing/2014/main" id="{9295EE4C-66A0-181A-96DA-F211AA160F7A}"/>
+                <a16:creationId xmlns:a16="http://schemas.microsoft.com/office/drawing/2014/main" id="{98E4572D-E4A2-C558-FAD4-A35BA0475767}"/>
               </a:ext>
             </a:extLst>
           </p:cNvPr>
@@ -6937,7 +6937,7 @@
           <p:cNvPr id="12" name="TextBox 11">
             <a:extLst>
               <a:ext uri="{FF2B5EF4-FFF2-40B4-BE49-F238E27FC236}">
-                <a16:creationId xmlns:a16="http://schemas.microsoft.com/office/drawing/2014/main" id="{CA1399FD-C70D-68F7-36FC-12CE0573971A}"/>
+                <a16:creationId xmlns:a16="http://schemas.microsoft.com/office/drawing/2014/main" id="{1347DCDE-FF64-11BF-8567-2BEAB5E6552F}"/>
               </a:ext>
             </a:extLst>
           </p:cNvPr>
@@ -6983,7 +6983,7 @@
           <p:cNvPr id="13" name="TextBox 12">
             <a:extLst>
               <a:ext uri="{FF2B5EF4-FFF2-40B4-BE49-F238E27FC236}">
-                <a16:creationId xmlns:a16="http://schemas.microsoft.com/office/drawing/2014/main" id="{FDCAB584-D163-5A5F-6F28-5A4676360938}"/>
+                <a16:creationId xmlns:a16="http://schemas.microsoft.com/office/drawing/2014/main" id="{98172A61-515D-F4EA-A69B-687419DAB6AD}"/>
               </a:ext>
             </a:extLst>
           </p:cNvPr>
@@ -7029,7 +7029,7 @@
           <p:cNvPr id="14" name="TextBox 13">
             <a:extLst>
               <a:ext uri="{FF2B5EF4-FFF2-40B4-BE49-F238E27FC236}">
-                <a16:creationId xmlns:a16="http://schemas.microsoft.com/office/drawing/2014/main" id="{14CC8A3B-5EC3-7DE0-F0C3-5F1B7AAB73A2}"/>
+                <a16:creationId xmlns:a16="http://schemas.microsoft.com/office/drawing/2014/main" id="{9764678D-BEE0-8191-3EC1-2B341228BF3E}"/>
               </a:ext>
             </a:extLst>
           </p:cNvPr>
@@ -7068,7 +7068,7 @@
     </p:spTree>
     <p:extLst>
       <p:ext uri="{BB962C8B-B14F-4D97-AF65-F5344CB8AC3E}">
-        <p14:creationId xmlns:p14="http://schemas.microsoft.com/office/powerpoint/2010/main" val="1220596969"/>
+        <p14:creationId xmlns:p14="http://schemas.microsoft.com/office/powerpoint/2010/main" val="1366074484"/>
       </p:ext>
     </p:extLst>
   </p:cSld>
@@ -7108,7 +7108,7 @@
           <p:cNvPr id="2" name="TextBox 1">
             <a:extLst>
               <a:ext uri="{FF2B5EF4-FFF2-40B4-BE49-F238E27FC236}">
-                <a16:creationId xmlns:a16="http://schemas.microsoft.com/office/drawing/2014/main" id="{705210E2-601F-E436-7829-E814D3EA6B90}"/>
+                <a16:creationId xmlns:a16="http://schemas.microsoft.com/office/drawing/2014/main" id="{2E5126D0-CC1F-7B16-F409-F9FD224DB77D}"/>
               </a:ext>
             </a:extLst>
           </p:cNvPr>
@@ -7148,7 +7148,7 @@
           <p:cNvPr id="3" name="Rectangle: Rounded Corners 2">
             <a:extLst>
               <a:ext uri="{FF2B5EF4-FFF2-40B4-BE49-F238E27FC236}">
-                <a16:creationId xmlns:a16="http://schemas.microsoft.com/office/drawing/2014/main" id="{60A5824E-E493-86C3-36B0-457917776671}"/>
+                <a16:creationId xmlns:a16="http://schemas.microsoft.com/office/drawing/2014/main" id="{541DFD23-95A8-65A1-8A77-42DE114E7D3F}"/>
               </a:ext>
             </a:extLst>
           </p:cNvPr>
@@ -7226,7 +7226,7 @@
           <p:cNvPr id="4" name="Straight Connector 3">
             <a:extLst>
               <a:ext uri="{FF2B5EF4-FFF2-40B4-BE49-F238E27FC236}">
-                <a16:creationId xmlns:a16="http://schemas.microsoft.com/office/drawing/2014/main" id="{4389B498-9609-20EB-1B68-5F9191CE8B21}"/>
+                <a16:creationId xmlns:a16="http://schemas.microsoft.com/office/drawing/2014/main" id="{FDB3BD81-94D1-0438-3CCB-77A71B0B5D36}"/>
               </a:ext>
             </a:extLst>
           </p:cNvPr>
@@ -7268,7 +7268,7 @@
           <p:cNvPr id="5" name="Rectangle: Rounded Corners 4">
             <a:extLst>
               <a:ext uri="{FF2B5EF4-FFF2-40B4-BE49-F238E27FC236}">
-                <a16:creationId xmlns:a16="http://schemas.microsoft.com/office/drawing/2014/main" id="{9700954B-1423-972A-92A1-B5E494485D66}"/>
+                <a16:creationId xmlns:a16="http://schemas.microsoft.com/office/drawing/2014/main" id="{789885A9-0BF8-BAF0-A8B6-0A2E8E807B03}"/>
               </a:ext>
             </a:extLst>
           </p:cNvPr>
@@ -7346,7 +7346,7 @@
           <p:cNvPr id="6" name="Straight Connector 5">
             <a:extLst>
               <a:ext uri="{FF2B5EF4-FFF2-40B4-BE49-F238E27FC236}">
-                <a16:creationId xmlns:a16="http://schemas.microsoft.com/office/drawing/2014/main" id="{0BD93353-9F52-B126-B37E-C81D9FB509C1}"/>
+                <a16:creationId xmlns:a16="http://schemas.microsoft.com/office/drawing/2014/main" id="{983B57B0-8F19-BC4B-38EC-BA8F7BC65ED0}"/>
               </a:ext>
             </a:extLst>
           </p:cNvPr>
@@ -7388,7 +7388,7 @@
           <p:cNvPr id="7" name="Rectangle: Rounded Corners 6">
             <a:extLst>
               <a:ext uri="{FF2B5EF4-FFF2-40B4-BE49-F238E27FC236}">
-                <a16:creationId xmlns:a16="http://schemas.microsoft.com/office/drawing/2014/main" id="{86C72DA4-1D4F-C20F-A311-5A8307320CDA}"/>
+                <a16:creationId xmlns:a16="http://schemas.microsoft.com/office/drawing/2014/main" id="{8BED0539-84E9-7A03-7629-33D4028C8AE3}"/>
               </a:ext>
             </a:extLst>
           </p:cNvPr>
@@ -7466,7 +7466,7 @@
           <p:cNvPr id="8" name="Straight Connector 7">
             <a:extLst>
               <a:ext uri="{FF2B5EF4-FFF2-40B4-BE49-F238E27FC236}">
-                <a16:creationId xmlns:a16="http://schemas.microsoft.com/office/drawing/2014/main" id="{2C595D6C-4653-C985-26E3-5992F8B3FB29}"/>
+                <a16:creationId xmlns:a16="http://schemas.microsoft.com/office/drawing/2014/main" id="{6F451D47-5685-2D5E-C347-929A4EF4C97A}"/>
               </a:ext>
             </a:extLst>
           </p:cNvPr>
@@ -7508,7 +7508,7 @@
           <p:cNvPr id="9" name="Rectangle: Rounded Corners 8">
             <a:extLst>
               <a:ext uri="{FF2B5EF4-FFF2-40B4-BE49-F238E27FC236}">
-                <a16:creationId xmlns:a16="http://schemas.microsoft.com/office/drawing/2014/main" id="{8CFCD73A-4C3B-B69A-D703-ADA60986DFF2}"/>
+                <a16:creationId xmlns:a16="http://schemas.microsoft.com/office/drawing/2014/main" id="{8D240A4C-6055-0E7F-578A-3E0B2489C8CA}"/>
               </a:ext>
             </a:extLst>
           </p:cNvPr>
@@ -7586,7 +7586,7 @@
           <p:cNvPr id="10" name="Straight Connector 9">
             <a:extLst>
               <a:ext uri="{FF2B5EF4-FFF2-40B4-BE49-F238E27FC236}">
-                <a16:creationId xmlns:a16="http://schemas.microsoft.com/office/drawing/2014/main" id="{6E295A24-E05E-D7D0-0891-8AC0DBE0878A}"/>
+                <a16:creationId xmlns:a16="http://schemas.microsoft.com/office/drawing/2014/main" id="{B2C7DCBE-C3BC-D4B2-DC52-E840DD9F4218}"/>
               </a:ext>
             </a:extLst>
           </p:cNvPr>
@@ -7628,7 +7628,7 @@
           <p:cNvPr id="11" name="Rectangle: Rounded Corners 10">
             <a:extLst>
               <a:ext uri="{FF2B5EF4-FFF2-40B4-BE49-F238E27FC236}">
-                <a16:creationId xmlns:a16="http://schemas.microsoft.com/office/drawing/2014/main" id="{65B568CD-DAF8-9F18-BAAE-559CF785EBAE}"/>
+                <a16:creationId xmlns:a16="http://schemas.microsoft.com/office/drawing/2014/main" id="{C67698B5-A410-FE3E-8260-7C296BBB21AD}"/>
               </a:ext>
             </a:extLst>
           </p:cNvPr>
@@ -7706,7 +7706,7 @@
           <p:cNvPr id="12" name="Straight Connector 11">
             <a:extLst>
               <a:ext uri="{FF2B5EF4-FFF2-40B4-BE49-F238E27FC236}">
-                <a16:creationId xmlns:a16="http://schemas.microsoft.com/office/drawing/2014/main" id="{FC6C8729-E9DB-DBC4-E40F-500924B62702}"/>
+                <a16:creationId xmlns:a16="http://schemas.microsoft.com/office/drawing/2014/main" id="{A0C13F1D-0AF2-2254-D180-BDA419285193}"/>
               </a:ext>
             </a:extLst>
           </p:cNvPr>
@@ -7748,7 +7748,7 @@
           <p:cNvPr id="13" name="Rectangle: Rounded Corners 12">
             <a:extLst>
               <a:ext uri="{FF2B5EF4-FFF2-40B4-BE49-F238E27FC236}">
-                <a16:creationId xmlns:a16="http://schemas.microsoft.com/office/drawing/2014/main" id="{3C0278A6-4C2F-5C97-1974-880A6915CC12}"/>
+                <a16:creationId xmlns:a16="http://schemas.microsoft.com/office/drawing/2014/main" id="{50850153-50B6-C973-2594-BA57D74A8F35}"/>
               </a:ext>
             </a:extLst>
           </p:cNvPr>
@@ -7826,7 +7826,7 @@
           <p:cNvPr id="14" name="Straight Connector 13">
             <a:extLst>
               <a:ext uri="{FF2B5EF4-FFF2-40B4-BE49-F238E27FC236}">
-                <a16:creationId xmlns:a16="http://schemas.microsoft.com/office/drawing/2014/main" id="{3AC4D31B-65EA-753F-FDA9-C21133F00C51}"/>
+                <a16:creationId xmlns:a16="http://schemas.microsoft.com/office/drawing/2014/main" id="{F25B0960-7F81-222D-394A-5037E390D177}"/>
               </a:ext>
             </a:extLst>
           </p:cNvPr>
@@ -7869,7 +7869,7 @@
           <p:cNvPr id="15" name="TextBox 14">
             <a:extLst>
               <a:ext uri="{FF2B5EF4-FFF2-40B4-BE49-F238E27FC236}">
-                <a16:creationId xmlns:a16="http://schemas.microsoft.com/office/drawing/2014/main" id="{FE1E9ED4-FE6E-3826-5728-6F8C0DF3195C}"/>
+                <a16:creationId xmlns:a16="http://schemas.microsoft.com/office/drawing/2014/main" id="{2FFB93AD-BBFD-DF91-051B-6F18983AC0E9}"/>
               </a:ext>
             </a:extLst>
           </p:cNvPr>
@@ -7910,7 +7910,7 @@
           <p:cNvPr id="16" name="TextBox 15">
             <a:extLst>
               <a:ext uri="{FF2B5EF4-FFF2-40B4-BE49-F238E27FC236}">
-                <a16:creationId xmlns:a16="http://schemas.microsoft.com/office/drawing/2014/main" id="{45BB0B3F-B584-28E9-A031-94589BEDFE3D}"/>
+                <a16:creationId xmlns:a16="http://schemas.microsoft.com/office/drawing/2014/main" id="{AB5D4198-F56E-6897-22A3-B532C6B338D3}"/>
               </a:ext>
             </a:extLst>
           </p:cNvPr>
@@ -7956,7 +7956,7 @@
           <p:cNvPr id="17" name="Rectangle: Rounded Corners 16">
             <a:extLst>
               <a:ext uri="{FF2B5EF4-FFF2-40B4-BE49-F238E27FC236}">
-                <a16:creationId xmlns:a16="http://schemas.microsoft.com/office/drawing/2014/main" id="{CA57345F-E631-5C5E-05D5-EB6E9EC2A020}"/>
+                <a16:creationId xmlns:a16="http://schemas.microsoft.com/office/drawing/2014/main" id="{8646491D-15CC-5C95-2A78-00A6F6EEA703}"/>
               </a:ext>
             </a:extLst>
           </p:cNvPr>
@@ -8026,7 +8026,7 @@
           <p:cNvPr id="18" name="TextBox 17">
             <a:extLst>
               <a:ext uri="{FF2B5EF4-FFF2-40B4-BE49-F238E27FC236}">
-                <a16:creationId xmlns:a16="http://schemas.microsoft.com/office/drawing/2014/main" id="{B6B7DF2C-40E1-152A-A702-6200F13AEB0F}"/>
+                <a16:creationId xmlns:a16="http://schemas.microsoft.com/office/drawing/2014/main" id="{F4E951E9-167C-959D-D90A-997B8F2DCE24}"/>
               </a:ext>
             </a:extLst>
           </p:cNvPr>
@@ -8072,7 +8072,7 @@
           <p:cNvPr id="19" name="TextBox 18">
             <a:extLst>
               <a:ext uri="{FF2B5EF4-FFF2-40B4-BE49-F238E27FC236}">
-                <a16:creationId xmlns:a16="http://schemas.microsoft.com/office/drawing/2014/main" id="{EE5DFF2B-E755-F292-2AE9-58FB050BB0C6}"/>
+                <a16:creationId xmlns:a16="http://schemas.microsoft.com/office/drawing/2014/main" id="{989AC09C-0049-FF78-9469-1E34525A2CCC}"/>
               </a:ext>
             </a:extLst>
           </p:cNvPr>
@@ -8118,7 +8118,7 @@
           <p:cNvPr id="20" name="Rectangle: Rounded Corners 19">
             <a:extLst>
               <a:ext uri="{FF2B5EF4-FFF2-40B4-BE49-F238E27FC236}">
-                <a16:creationId xmlns:a16="http://schemas.microsoft.com/office/drawing/2014/main" id="{B43EA754-3CC1-2F41-FEBB-D97E7A88E6A2}"/>
+                <a16:creationId xmlns:a16="http://schemas.microsoft.com/office/drawing/2014/main" id="{3E2EB29E-E484-D442-F609-37FDAE51D4FC}"/>
               </a:ext>
             </a:extLst>
           </p:cNvPr>
@@ -8188,7 +8188,7 @@
           <p:cNvPr id="21" name="TextBox 20">
             <a:extLst>
               <a:ext uri="{FF2B5EF4-FFF2-40B4-BE49-F238E27FC236}">
-                <a16:creationId xmlns:a16="http://schemas.microsoft.com/office/drawing/2014/main" id="{BAAE596F-436E-6D1C-8626-5EC395EDC526}"/>
+                <a16:creationId xmlns:a16="http://schemas.microsoft.com/office/drawing/2014/main" id="{31975213-927D-B2F9-BB15-C933DCFD596F}"/>
               </a:ext>
             </a:extLst>
           </p:cNvPr>
@@ -8228,7 +8228,7 @@
           <p:cNvPr id="22" name="TextBox 21">
             <a:extLst>
               <a:ext uri="{FF2B5EF4-FFF2-40B4-BE49-F238E27FC236}">
-                <a16:creationId xmlns:a16="http://schemas.microsoft.com/office/drawing/2014/main" id="{7BBB9AA5-53C0-6D06-E82A-B402228F5BAF}"/>
+                <a16:creationId xmlns:a16="http://schemas.microsoft.com/office/drawing/2014/main" id="{58C815C4-FCE2-5CAF-1AD3-5A9F83F48BE0}"/>
               </a:ext>
             </a:extLst>
           </p:cNvPr>
@@ -8274,7 +8274,7 @@
           <p:cNvPr id="23" name="Rectangle: Rounded Corners 22">
             <a:extLst>
               <a:ext uri="{FF2B5EF4-FFF2-40B4-BE49-F238E27FC236}">
-                <a16:creationId xmlns:a16="http://schemas.microsoft.com/office/drawing/2014/main" id="{F8D7BF01-4221-CCE9-6386-1BA4027FB55F}"/>
+                <a16:creationId xmlns:a16="http://schemas.microsoft.com/office/drawing/2014/main" id="{0DAFFB10-BEBC-E72F-3025-C9B7500BBF34}"/>
               </a:ext>
             </a:extLst>
           </p:cNvPr>
@@ -8344,7 +8344,7 @@
           <p:cNvPr id="24" name="TextBox 23">
             <a:extLst>
               <a:ext uri="{FF2B5EF4-FFF2-40B4-BE49-F238E27FC236}">
-                <a16:creationId xmlns:a16="http://schemas.microsoft.com/office/drawing/2014/main" id="{883F700B-6F27-5486-1430-74F16503E3C2}"/>
+                <a16:creationId xmlns:a16="http://schemas.microsoft.com/office/drawing/2014/main" id="{7C7B5C12-2184-38D1-86CA-3D9766402A5C}"/>
               </a:ext>
             </a:extLst>
           </p:cNvPr>
@@ -8384,7 +8384,7 @@
           <p:cNvPr id="25" name="TextBox 24">
             <a:extLst>
               <a:ext uri="{FF2B5EF4-FFF2-40B4-BE49-F238E27FC236}">
-                <a16:creationId xmlns:a16="http://schemas.microsoft.com/office/drawing/2014/main" id="{B4A64297-CF63-1392-ED5B-218253132056}"/>
+                <a16:creationId xmlns:a16="http://schemas.microsoft.com/office/drawing/2014/main" id="{CF53E6B4-4BD4-F3AB-5191-C817FABBAEF7}"/>
               </a:ext>
             </a:extLst>
           </p:cNvPr>
@@ -8430,7 +8430,7 @@
           <p:cNvPr id="26" name="TextBox 25">
             <a:extLst>
               <a:ext uri="{FF2B5EF4-FFF2-40B4-BE49-F238E27FC236}">
-                <a16:creationId xmlns:a16="http://schemas.microsoft.com/office/drawing/2014/main" id="{D153B89B-B970-E337-3027-C6A8987A682C}"/>
+                <a16:creationId xmlns:a16="http://schemas.microsoft.com/office/drawing/2014/main" id="{611A7903-8423-D11C-6D1B-CE242BA033C4}"/>
               </a:ext>
             </a:extLst>
           </p:cNvPr>
@@ -8476,7 +8476,7 @@
           <p:cNvPr id="27" name="TextBox 26">
             <a:extLst>
               <a:ext uri="{FF2B5EF4-FFF2-40B4-BE49-F238E27FC236}">
-                <a16:creationId xmlns:a16="http://schemas.microsoft.com/office/drawing/2014/main" id="{C6DFEC5C-6B4C-E46D-E634-68A35670CDF6}"/>
+                <a16:creationId xmlns:a16="http://schemas.microsoft.com/office/drawing/2014/main" id="{26505982-A62F-F87A-2DAD-138BB74ECE73}"/>
               </a:ext>
             </a:extLst>
           </p:cNvPr>
@@ -8515,7 +8515,7 @@
     </p:spTree>
     <p:extLst>
       <p:ext uri="{BB962C8B-B14F-4D97-AF65-F5344CB8AC3E}">
-        <p14:creationId xmlns:p14="http://schemas.microsoft.com/office/powerpoint/2010/main" val="1782283618"/>
+        <p14:creationId xmlns:p14="http://schemas.microsoft.com/office/powerpoint/2010/main" val="3010893638"/>
       </p:ext>
     </p:extLst>
   </p:cSld>
@@ -8555,7 +8555,7 @@
           <p:cNvPr id="2" name="TextBox 1">
             <a:extLst>
               <a:ext uri="{FF2B5EF4-FFF2-40B4-BE49-F238E27FC236}">
-                <a16:creationId xmlns:a16="http://schemas.microsoft.com/office/drawing/2014/main" id="{CAFB1CD9-D6D1-D2ED-8C0F-9D9BD01967DA}"/>
+                <a16:creationId xmlns:a16="http://schemas.microsoft.com/office/drawing/2014/main" id="{872786C1-FC1C-5EC3-21C6-75EAE58FD9DD}"/>
               </a:ext>
             </a:extLst>
           </p:cNvPr>
@@ -8601,7 +8601,7 @@
           <p:cNvPr id="3" name="Oval 2">
             <a:extLst>
               <a:ext uri="{FF2B5EF4-FFF2-40B4-BE49-F238E27FC236}">
-                <a16:creationId xmlns:a16="http://schemas.microsoft.com/office/drawing/2014/main" id="{962AED0B-9F4C-C6C9-5BBF-9DBB023811F6}"/>
+                <a16:creationId xmlns:a16="http://schemas.microsoft.com/office/drawing/2014/main" id="{33564687-120A-AA40-6B21-C52F2DCDA949}"/>
               </a:ext>
             </a:extLst>
           </p:cNvPr>
@@ -8677,7 +8677,7 @@
           <p:cNvPr id="4" name="TextBox 3">
             <a:extLst>
               <a:ext uri="{FF2B5EF4-FFF2-40B4-BE49-F238E27FC236}">
-                <a16:creationId xmlns:a16="http://schemas.microsoft.com/office/drawing/2014/main" id="{27159FF5-CB36-5287-5577-AA7F2C18E208}"/>
+                <a16:creationId xmlns:a16="http://schemas.microsoft.com/office/drawing/2014/main" id="{185A989F-76CE-FB0A-1258-378A14585D18}"/>
               </a:ext>
             </a:extLst>
           </p:cNvPr>
@@ -8723,7 +8723,7 @@
           <p:cNvPr id="5" name="TextBox 4">
             <a:extLst>
               <a:ext uri="{FF2B5EF4-FFF2-40B4-BE49-F238E27FC236}">
-                <a16:creationId xmlns:a16="http://schemas.microsoft.com/office/drawing/2014/main" id="{6DE69856-5847-64C1-300E-C9E633953501}"/>
+                <a16:creationId xmlns:a16="http://schemas.microsoft.com/office/drawing/2014/main" id="{665A588F-8FD0-679F-6132-478F7A8A0A1E}"/>
               </a:ext>
             </a:extLst>
           </p:cNvPr>
@@ -8769,7 +8769,7 @@
           <p:cNvPr id="6" name="Oval 5">
             <a:extLst>
               <a:ext uri="{FF2B5EF4-FFF2-40B4-BE49-F238E27FC236}">
-                <a16:creationId xmlns:a16="http://schemas.microsoft.com/office/drawing/2014/main" id="{0DC57F6D-BB3A-A59B-8571-59E4B23CEF89}"/>
+                <a16:creationId xmlns:a16="http://schemas.microsoft.com/office/drawing/2014/main" id="{AA6B03BB-C3BE-7C5B-E1AB-CF0263CCCEB2}"/>
               </a:ext>
             </a:extLst>
           </p:cNvPr>
@@ -8845,7 +8845,7 @@
           <p:cNvPr id="7" name="TextBox 6">
             <a:extLst>
               <a:ext uri="{FF2B5EF4-FFF2-40B4-BE49-F238E27FC236}">
-                <a16:creationId xmlns:a16="http://schemas.microsoft.com/office/drawing/2014/main" id="{5845C49A-E799-8A15-5692-534E5E10EBE5}"/>
+                <a16:creationId xmlns:a16="http://schemas.microsoft.com/office/drawing/2014/main" id="{8770DBE9-74EA-2D6B-C8C9-CCB616DE604C}"/>
               </a:ext>
             </a:extLst>
           </p:cNvPr>
@@ -8891,7 +8891,7 @@
           <p:cNvPr id="8" name="TextBox 7">
             <a:extLst>
               <a:ext uri="{FF2B5EF4-FFF2-40B4-BE49-F238E27FC236}">
-                <a16:creationId xmlns:a16="http://schemas.microsoft.com/office/drawing/2014/main" id="{96CE63B4-5855-882F-4536-5011E0A9DF1E}"/>
+                <a16:creationId xmlns:a16="http://schemas.microsoft.com/office/drawing/2014/main" id="{D646C673-FBBE-7942-0DDE-0CC4679843F3}"/>
               </a:ext>
             </a:extLst>
           </p:cNvPr>
@@ -8937,7 +8937,7 @@
           <p:cNvPr id="9" name="Oval 8">
             <a:extLst>
               <a:ext uri="{FF2B5EF4-FFF2-40B4-BE49-F238E27FC236}">
-                <a16:creationId xmlns:a16="http://schemas.microsoft.com/office/drawing/2014/main" id="{52AB324B-7053-C306-F6B9-46F2A818E094}"/>
+                <a16:creationId xmlns:a16="http://schemas.microsoft.com/office/drawing/2014/main" id="{F417B6B4-890E-93FD-3996-7A6EC64ACB0D}"/>
               </a:ext>
             </a:extLst>
           </p:cNvPr>
@@ -9013,7 +9013,7 @@
           <p:cNvPr id="10" name="TextBox 9">
             <a:extLst>
               <a:ext uri="{FF2B5EF4-FFF2-40B4-BE49-F238E27FC236}">
-                <a16:creationId xmlns:a16="http://schemas.microsoft.com/office/drawing/2014/main" id="{D7B1E7F6-F198-175C-9990-E67FBF484FE5}"/>
+                <a16:creationId xmlns:a16="http://schemas.microsoft.com/office/drawing/2014/main" id="{4BEE0B44-C4F6-72A6-7641-CB9731A27123}"/>
               </a:ext>
             </a:extLst>
           </p:cNvPr>
@@ -9059,7 +9059,7 @@
           <p:cNvPr id="11" name="TextBox 10">
             <a:extLst>
               <a:ext uri="{FF2B5EF4-FFF2-40B4-BE49-F238E27FC236}">
-                <a16:creationId xmlns:a16="http://schemas.microsoft.com/office/drawing/2014/main" id="{EB0B4AEA-972B-4836-E1AD-C75395FDAA66}"/>
+                <a16:creationId xmlns:a16="http://schemas.microsoft.com/office/drawing/2014/main" id="{F9C50713-EE6F-5CB3-6EBE-472DD83C9BDA}"/>
               </a:ext>
             </a:extLst>
           </p:cNvPr>
@@ -9105,7 +9105,7 @@
           <p:cNvPr id="12" name="TextBox 11">
             <a:extLst>
               <a:ext uri="{FF2B5EF4-FFF2-40B4-BE49-F238E27FC236}">
-                <a16:creationId xmlns:a16="http://schemas.microsoft.com/office/drawing/2014/main" id="{820AD510-FDB3-66D8-327A-FD31C7EF2B91}"/>
+                <a16:creationId xmlns:a16="http://schemas.microsoft.com/office/drawing/2014/main" id="{AC18F73F-7AE0-2CD2-5302-E1031E0A88C7}"/>
               </a:ext>
             </a:extLst>
           </p:cNvPr>
@@ -9151,7 +9151,7 @@
           <p:cNvPr id="13" name="Rectangle: Rounded Corners 12">
             <a:extLst>
               <a:ext uri="{FF2B5EF4-FFF2-40B4-BE49-F238E27FC236}">
-                <a16:creationId xmlns:a16="http://schemas.microsoft.com/office/drawing/2014/main" id="{1AD2C984-4A87-6DE0-D1E5-210D67806E14}"/>
+                <a16:creationId xmlns:a16="http://schemas.microsoft.com/office/drawing/2014/main" id="{19417101-718D-F66C-7B63-3C84ABFE6D22}"/>
               </a:ext>
             </a:extLst>
           </p:cNvPr>
@@ -9221,7 +9221,7 @@
           <p:cNvPr id="14" name="TextBox 13">
             <a:extLst>
               <a:ext uri="{FF2B5EF4-FFF2-40B4-BE49-F238E27FC236}">
-                <a16:creationId xmlns:a16="http://schemas.microsoft.com/office/drawing/2014/main" id="{99C3BFC0-5A23-E2B1-66A9-158F6A69B6E0}"/>
+                <a16:creationId xmlns:a16="http://schemas.microsoft.com/office/drawing/2014/main" id="{C81EB399-8862-5C6B-4D96-BE7F9471EB7A}"/>
               </a:ext>
             </a:extLst>
           </p:cNvPr>
@@ -9262,7 +9262,7 @@
           <p:cNvPr id="15" name="TextBox 14">
             <a:extLst>
               <a:ext uri="{FF2B5EF4-FFF2-40B4-BE49-F238E27FC236}">
-                <a16:creationId xmlns:a16="http://schemas.microsoft.com/office/drawing/2014/main" id="{B27D22E1-1A0B-5989-CCB6-98AA6748722C}"/>
+                <a16:creationId xmlns:a16="http://schemas.microsoft.com/office/drawing/2014/main" id="{6D4DABCF-805F-A61C-6398-BFEE85707039}"/>
               </a:ext>
             </a:extLst>
           </p:cNvPr>
@@ -9303,7 +9303,7 @@
           <p:cNvPr id="16" name="TextBox 15">
             <a:extLst>
               <a:ext uri="{FF2B5EF4-FFF2-40B4-BE49-F238E27FC236}">
-                <a16:creationId xmlns:a16="http://schemas.microsoft.com/office/drawing/2014/main" id="{1B227F73-56C3-F808-7B26-1CA4C0A738B1}"/>
+                <a16:creationId xmlns:a16="http://schemas.microsoft.com/office/drawing/2014/main" id="{94DB2374-B730-A8E0-FA15-D51BD71AAA5C}"/>
               </a:ext>
             </a:extLst>
           </p:cNvPr>
@@ -9343,7 +9343,7 @@
           <p:cNvPr id="17" name="TextBox 16">
             <a:extLst>
               <a:ext uri="{FF2B5EF4-FFF2-40B4-BE49-F238E27FC236}">
-                <a16:creationId xmlns:a16="http://schemas.microsoft.com/office/drawing/2014/main" id="{F47F7929-D7C4-028C-53E4-CB3048027614}"/>
+                <a16:creationId xmlns:a16="http://schemas.microsoft.com/office/drawing/2014/main" id="{49A536C5-7FB1-672D-CDF0-C1AEB675DEE5}"/>
               </a:ext>
             </a:extLst>
           </p:cNvPr>
@@ -9389,7 +9389,7 @@
           <p:cNvPr id="18" name="TextBox 17">
             <a:extLst>
               <a:ext uri="{FF2B5EF4-FFF2-40B4-BE49-F238E27FC236}">
-                <a16:creationId xmlns:a16="http://schemas.microsoft.com/office/drawing/2014/main" id="{343D4037-E95C-C9F9-9673-6B6704950B71}"/>
+                <a16:creationId xmlns:a16="http://schemas.microsoft.com/office/drawing/2014/main" id="{FA938686-D823-0CAA-2753-13C67EEC4EEE}"/>
               </a:ext>
             </a:extLst>
           </p:cNvPr>
@@ -9435,7 +9435,7 @@
           <p:cNvPr id="19" name="Rectangle: Rounded Corners 18">
             <a:extLst>
               <a:ext uri="{FF2B5EF4-FFF2-40B4-BE49-F238E27FC236}">
-                <a16:creationId xmlns:a16="http://schemas.microsoft.com/office/drawing/2014/main" id="{6454FCD0-B0EC-4096-6EF2-6B1643EDF26D}"/>
+                <a16:creationId xmlns:a16="http://schemas.microsoft.com/office/drawing/2014/main" id="{1E3AAEF9-E41C-4272-B2E2-E9415AC11DC5}"/>
               </a:ext>
             </a:extLst>
           </p:cNvPr>
@@ -9505,7 +9505,7 @@
           <p:cNvPr id="20" name="TextBox 19">
             <a:extLst>
               <a:ext uri="{FF2B5EF4-FFF2-40B4-BE49-F238E27FC236}">
-                <a16:creationId xmlns:a16="http://schemas.microsoft.com/office/drawing/2014/main" id="{679D6760-0D40-025E-DE44-984863C822DC}"/>
+                <a16:creationId xmlns:a16="http://schemas.microsoft.com/office/drawing/2014/main" id="{5F1DE9B5-8378-A2D0-A9F5-E6C3727DA2AF}"/>
               </a:ext>
             </a:extLst>
           </p:cNvPr>
@@ -9551,7 +9551,7 @@
           <p:cNvPr id="21" name="TextBox 20">
             <a:extLst>
               <a:ext uri="{FF2B5EF4-FFF2-40B4-BE49-F238E27FC236}">
-                <a16:creationId xmlns:a16="http://schemas.microsoft.com/office/drawing/2014/main" id="{00EA700B-8363-4AA9-E3A2-E9E824C3052D}"/>
+                <a16:creationId xmlns:a16="http://schemas.microsoft.com/office/drawing/2014/main" id="{1C33414C-C24D-B225-F100-90224D9BBE4C}"/>
               </a:ext>
             </a:extLst>
           </p:cNvPr>
@@ -9590,7 +9590,7 @@
     </p:spTree>
     <p:extLst>
       <p:ext uri="{BB962C8B-B14F-4D97-AF65-F5344CB8AC3E}">
-        <p14:creationId xmlns:p14="http://schemas.microsoft.com/office/powerpoint/2010/main" val="3233756946"/>
+        <p14:creationId xmlns:p14="http://schemas.microsoft.com/office/powerpoint/2010/main" val="13898962"/>
       </p:ext>
     </p:extLst>
   </p:cSld>
@@ -9630,7 +9630,7 @@
           <p:cNvPr id="2" name="TextBox 1">
             <a:extLst>
               <a:ext uri="{FF2B5EF4-FFF2-40B4-BE49-F238E27FC236}">
-                <a16:creationId xmlns:a16="http://schemas.microsoft.com/office/drawing/2014/main" id="{B083DEC8-4B15-A868-DE93-7782D4B06137}"/>
+                <a16:creationId xmlns:a16="http://schemas.microsoft.com/office/drawing/2014/main" id="{8F5FAC9A-03FE-A6F2-9A6A-A588F6651788}"/>
               </a:ext>
             </a:extLst>
           </p:cNvPr>
@@ -9676,7 +9676,7 @@
           <p:cNvPr id="3" name="Rectangle: Rounded Corners 2">
             <a:extLst>
               <a:ext uri="{FF2B5EF4-FFF2-40B4-BE49-F238E27FC236}">
-                <a16:creationId xmlns:a16="http://schemas.microsoft.com/office/drawing/2014/main" id="{E99D0CC1-4E90-FDA7-DC68-C24B3579448E}"/>
+                <a16:creationId xmlns:a16="http://schemas.microsoft.com/office/drawing/2014/main" id="{F5BF5507-53DB-3DAF-2E04-5259D36AC9BD}"/>
               </a:ext>
             </a:extLst>
           </p:cNvPr>
@@ -9746,7 +9746,7 @@
           <p:cNvPr id="4" name="TextBox 3">
             <a:extLst>
               <a:ext uri="{FF2B5EF4-FFF2-40B4-BE49-F238E27FC236}">
-                <a16:creationId xmlns:a16="http://schemas.microsoft.com/office/drawing/2014/main" id="{63CB9491-737E-BDFA-D52F-34F7FABB058B}"/>
+                <a16:creationId xmlns:a16="http://schemas.microsoft.com/office/drawing/2014/main" id="{CE654227-4418-FB1F-8182-FF0F6FFD3612}"/>
               </a:ext>
             </a:extLst>
           </p:cNvPr>
@@ -9786,7 +9786,7 @@
           <p:cNvPr id="5" name="TextBox 4">
             <a:extLst>
               <a:ext uri="{FF2B5EF4-FFF2-40B4-BE49-F238E27FC236}">
-                <a16:creationId xmlns:a16="http://schemas.microsoft.com/office/drawing/2014/main" id="{C59AD20D-CC9B-39CE-2B00-3777976A59EE}"/>
+                <a16:creationId xmlns:a16="http://schemas.microsoft.com/office/drawing/2014/main" id="{6C53714E-3847-3352-C9A2-DA881454B01E}"/>
               </a:ext>
             </a:extLst>
           </p:cNvPr>
@@ -9832,7 +9832,7 @@
           <p:cNvPr id="6" name="Rectangle: Rounded Corners 5">
             <a:extLst>
               <a:ext uri="{FF2B5EF4-FFF2-40B4-BE49-F238E27FC236}">
-                <a16:creationId xmlns:a16="http://schemas.microsoft.com/office/drawing/2014/main" id="{D3ED4F47-0D85-08F7-7C38-76ABB94039CD}"/>
+                <a16:creationId xmlns:a16="http://schemas.microsoft.com/office/drawing/2014/main" id="{1B13D61B-BD1E-2093-92D0-B6589F072514}"/>
               </a:ext>
             </a:extLst>
           </p:cNvPr>
@@ -9902,7 +9902,7 @@
           <p:cNvPr id="7" name="TextBox 6">
             <a:extLst>
               <a:ext uri="{FF2B5EF4-FFF2-40B4-BE49-F238E27FC236}">
-                <a16:creationId xmlns:a16="http://schemas.microsoft.com/office/drawing/2014/main" id="{6F14A506-C458-DB3E-4D7F-A5373A12727C}"/>
+                <a16:creationId xmlns:a16="http://schemas.microsoft.com/office/drawing/2014/main" id="{8373FA97-66DE-1239-0952-DE65CB75713E}"/>
               </a:ext>
             </a:extLst>
           </p:cNvPr>
@@ -9942,7 +9942,7 @@
           <p:cNvPr id="8" name="TextBox 7">
             <a:extLst>
               <a:ext uri="{FF2B5EF4-FFF2-40B4-BE49-F238E27FC236}">
-                <a16:creationId xmlns:a16="http://schemas.microsoft.com/office/drawing/2014/main" id="{94CA03B4-9243-75BF-1E2F-31DF474BC2F9}"/>
+                <a16:creationId xmlns:a16="http://schemas.microsoft.com/office/drawing/2014/main" id="{E0B0EE62-6AFA-B66E-53E9-A10690405EF6}"/>
               </a:ext>
             </a:extLst>
           </p:cNvPr>
@@ -9988,7 +9988,7 @@
           <p:cNvPr id="9" name="Rectangle: Rounded Corners 8">
             <a:extLst>
               <a:ext uri="{FF2B5EF4-FFF2-40B4-BE49-F238E27FC236}">
-                <a16:creationId xmlns:a16="http://schemas.microsoft.com/office/drawing/2014/main" id="{6F60F3FF-7C01-4F8C-C790-80BFB15DEB48}"/>
+                <a16:creationId xmlns:a16="http://schemas.microsoft.com/office/drawing/2014/main" id="{D4F70512-B0E0-06B1-972C-1DC39BE97AD6}"/>
               </a:ext>
             </a:extLst>
           </p:cNvPr>
@@ -10058,7 +10058,7 @@
           <p:cNvPr id="10" name="TextBox 9">
             <a:extLst>
               <a:ext uri="{FF2B5EF4-FFF2-40B4-BE49-F238E27FC236}">
-                <a16:creationId xmlns:a16="http://schemas.microsoft.com/office/drawing/2014/main" id="{DEEE0929-96B0-281F-1BEE-B41C6430B388}"/>
+                <a16:creationId xmlns:a16="http://schemas.microsoft.com/office/drawing/2014/main" id="{3E2F35B5-4065-03F3-4335-C8C20DF2F72B}"/>
               </a:ext>
             </a:extLst>
           </p:cNvPr>
@@ -10098,7 +10098,7 @@
           <p:cNvPr id="11" name="TextBox 10">
             <a:extLst>
               <a:ext uri="{FF2B5EF4-FFF2-40B4-BE49-F238E27FC236}">
-                <a16:creationId xmlns:a16="http://schemas.microsoft.com/office/drawing/2014/main" id="{EA231BF5-B316-C032-B52F-168851CB5BE8}"/>
+                <a16:creationId xmlns:a16="http://schemas.microsoft.com/office/drawing/2014/main" id="{E56B8937-8211-253A-389D-7A66E025CA1B}"/>
               </a:ext>
             </a:extLst>
           </p:cNvPr>
@@ -10144,7 +10144,7 @@
           <p:cNvPr id="12" name="Rectangle: Rounded Corners 11">
             <a:extLst>
               <a:ext uri="{FF2B5EF4-FFF2-40B4-BE49-F238E27FC236}">
-                <a16:creationId xmlns:a16="http://schemas.microsoft.com/office/drawing/2014/main" id="{CC037217-0643-4E79-67DB-A55402FB4680}"/>
+                <a16:creationId xmlns:a16="http://schemas.microsoft.com/office/drawing/2014/main" id="{3D207A52-D8AF-8F02-56A4-52F51314E4CF}"/>
               </a:ext>
             </a:extLst>
           </p:cNvPr>
@@ -10214,7 +10214,7 @@
           <p:cNvPr id="13" name="TextBox 12">
             <a:extLst>
               <a:ext uri="{FF2B5EF4-FFF2-40B4-BE49-F238E27FC236}">
-                <a16:creationId xmlns:a16="http://schemas.microsoft.com/office/drawing/2014/main" id="{825D4B8B-F73D-AB3C-B759-DBF23E98C357}"/>
+                <a16:creationId xmlns:a16="http://schemas.microsoft.com/office/drawing/2014/main" id="{D19C6A37-C63B-AAB0-C748-ADAF39302138}"/>
               </a:ext>
             </a:extLst>
           </p:cNvPr>
@@ -10254,7 +10254,7 @@
           <p:cNvPr id="14" name="TextBox 13">
             <a:extLst>
               <a:ext uri="{FF2B5EF4-FFF2-40B4-BE49-F238E27FC236}">
-                <a16:creationId xmlns:a16="http://schemas.microsoft.com/office/drawing/2014/main" id="{84F76765-C96B-30B6-0C28-84419440260C}"/>
+                <a16:creationId xmlns:a16="http://schemas.microsoft.com/office/drawing/2014/main" id="{0BF38BB1-F92E-A2B6-2A4F-2E4E5E73F09A}"/>
               </a:ext>
             </a:extLst>
           </p:cNvPr>
@@ -10284,7 +10284,7 @@
                 </a:solidFill>
                 <a:latin typeface="Calibri" panose="020F0502020204030204" pitchFamily="34" charset="0"/>
               </a:rPr>
-              <a:t>596 tests, 0 failing; CI on every push; a container that runs as a non-root user with no secret baked in; every value carries its evidence.</a:t>
+              <a:t>646 tests, 0 failing; CI on every push; a container that runs as a non-root user with no secret baked in; every value carries its evidence.</a:t>
             </a:r>
             <a:endParaRPr lang="en-MY" sz="1150">
               <a:solidFill>
@@ -10300,7 +10300,7 @@
           <p:cNvPr id="15" name="Rectangle: Rounded Corners 14">
             <a:extLst>
               <a:ext uri="{FF2B5EF4-FFF2-40B4-BE49-F238E27FC236}">
-                <a16:creationId xmlns:a16="http://schemas.microsoft.com/office/drawing/2014/main" id="{E2204F93-9FD6-CA9F-600C-E2533024A9AA}"/>
+                <a16:creationId xmlns:a16="http://schemas.microsoft.com/office/drawing/2014/main" id="{136F8D87-0104-B015-2FF3-C4CCC799C81C}"/>
               </a:ext>
             </a:extLst>
           </p:cNvPr>
@@ -10370,7 +10370,7 @@
           <p:cNvPr id="16" name="TextBox 15">
             <a:extLst>
               <a:ext uri="{FF2B5EF4-FFF2-40B4-BE49-F238E27FC236}">
-                <a16:creationId xmlns:a16="http://schemas.microsoft.com/office/drawing/2014/main" id="{6A8212FB-227D-53FB-1A62-DDC989A5F306}"/>
+                <a16:creationId xmlns:a16="http://schemas.microsoft.com/office/drawing/2014/main" id="{4859EE87-6684-D704-0940-041DDE055C8D}"/>
               </a:ext>
             </a:extLst>
           </p:cNvPr>
@@ -10410,7 +10410,7 @@
           <p:cNvPr id="17" name="TextBox 16">
             <a:extLst>
               <a:ext uri="{FF2B5EF4-FFF2-40B4-BE49-F238E27FC236}">
-                <a16:creationId xmlns:a16="http://schemas.microsoft.com/office/drawing/2014/main" id="{D4BE6B6E-A481-96B4-E85A-BBB334EBB6F6}"/>
+                <a16:creationId xmlns:a16="http://schemas.microsoft.com/office/drawing/2014/main" id="{A3C2D713-8CC2-C8C1-C297-2B66CE8FF1D9}"/>
               </a:ext>
             </a:extLst>
           </p:cNvPr>
@@ -10459,7 +10459,7 @@
                 </a:solidFill>
                 <a:latin typeface="Calibri" panose="020F0502020204030204" pitchFamily="34" charset="0"/>
               </a:rPr>
-              <a:t>The obvious guard would flag 92% of genuine party fields - worse than the gap - so it stays open and written down (ADVERSARIAL.md 5.2).</a:t>
+              <a:t>The obvious guard would flag 114 of 124 SI/BL pairs (92%) - worse than the gap - so it stays open and written down (ADVERSARIAL.md 5.2).</a:t>
             </a:r>
             <a:endParaRPr lang="en-MY" sz="1150">
               <a:solidFill>
@@ -10475,7 +10475,7 @@
           <p:cNvPr id="18" name="TextBox 17">
             <a:extLst>
               <a:ext uri="{FF2B5EF4-FFF2-40B4-BE49-F238E27FC236}">
-                <a16:creationId xmlns:a16="http://schemas.microsoft.com/office/drawing/2014/main" id="{D096255A-517A-E6B4-2D85-C691891DB3E7}"/>
+                <a16:creationId xmlns:a16="http://schemas.microsoft.com/office/drawing/2014/main" id="{4A8BE140-D809-61E2-B0AB-D5CECF19A6B7}"/>
               </a:ext>
             </a:extLst>
           </p:cNvPr>
@@ -10521,7 +10521,7 @@
           <p:cNvPr id="19" name="TextBox 18">
             <a:extLst>
               <a:ext uri="{FF2B5EF4-FFF2-40B4-BE49-F238E27FC236}">
-                <a16:creationId xmlns:a16="http://schemas.microsoft.com/office/drawing/2014/main" id="{8357D6AC-1677-BBFD-B1CA-7775A150E5FA}"/>
+                <a16:creationId xmlns:a16="http://schemas.microsoft.com/office/drawing/2014/main" id="{A0C0B225-41F2-204C-1E4D-F4048919720D}"/>
               </a:ext>
             </a:extLst>
           </p:cNvPr>
@@ -10567,7 +10567,7 @@
           <p:cNvPr id="20" name="TextBox 19">
             <a:extLst>
               <a:ext uri="{FF2B5EF4-FFF2-40B4-BE49-F238E27FC236}">
-                <a16:creationId xmlns:a16="http://schemas.microsoft.com/office/drawing/2014/main" id="{9AD529C0-4237-7AF9-0EE1-52D403638FE1}"/>
+                <a16:creationId xmlns:a16="http://schemas.microsoft.com/office/drawing/2014/main" id="{1C371124-B5EE-673D-257F-C958AD863836}"/>
               </a:ext>
             </a:extLst>
           </p:cNvPr>
@@ -10612,7 +10612,7 @@
     </p:spTree>
     <p:extLst>
       <p:ext uri="{BB962C8B-B14F-4D97-AF65-F5344CB8AC3E}">
-        <p14:creationId xmlns:p14="http://schemas.microsoft.com/office/powerpoint/2010/main" val="513068102"/>
+        <p14:creationId xmlns:p14="http://schemas.microsoft.com/office/powerpoint/2010/main" val="2106182432"/>
       </p:ext>
     </p:extLst>
   </p:cSld>
@@ -10652,7 +10652,7 @@
           <p:cNvPr id="2" name="TextBox 1">
             <a:extLst>
               <a:ext uri="{FF2B5EF4-FFF2-40B4-BE49-F238E27FC236}">
-                <a16:creationId xmlns:a16="http://schemas.microsoft.com/office/drawing/2014/main" id="{AB0769EA-E699-9CA5-A518-4A2A9A41BE24}"/>
+                <a16:creationId xmlns:a16="http://schemas.microsoft.com/office/drawing/2014/main" id="{8BE6607F-D76A-9472-749B-5BB26D078AC2}"/>
               </a:ext>
             </a:extLst>
           </p:cNvPr>
@@ -10692,7 +10692,7 @@
           <p:cNvPr id="3" name="TextBox 2">
             <a:extLst>
               <a:ext uri="{FF2B5EF4-FFF2-40B4-BE49-F238E27FC236}">
-                <a16:creationId xmlns:a16="http://schemas.microsoft.com/office/drawing/2014/main" id="{5881A2C1-D09D-0BD7-4433-EBDB5B1F1C29}"/>
+                <a16:creationId xmlns:a16="http://schemas.microsoft.com/office/drawing/2014/main" id="{DEE56B81-CF31-0953-D074-FE6972E77410}"/>
               </a:ext>
             </a:extLst>
           </p:cNvPr>
@@ -10738,7 +10738,7 @@
           <p:cNvPr id="4" name="Oval 3">
             <a:extLst>
               <a:ext uri="{FF2B5EF4-FFF2-40B4-BE49-F238E27FC236}">
-                <a16:creationId xmlns:a16="http://schemas.microsoft.com/office/drawing/2014/main" id="{AC3F65EF-1758-6BB6-529A-F854F08D1C80}"/>
+                <a16:creationId xmlns:a16="http://schemas.microsoft.com/office/drawing/2014/main" id="{CB5DDD60-B4F0-145E-647B-607AB321D923}"/>
               </a:ext>
             </a:extLst>
           </p:cNvPr>
@@ -10814,7 +10814,7 @@
           <p:cNvPr id="5" name="TextBox 4">
             <a:extLst>
               <a:ext uri="{FF2B5EF4-FFF2-40B4-BE49-F238E27FC236}">
-                <a16:creationId xmlns:a16="http://schemas.microsoft.com/office/drawing/2014/main" id="{BB6C4AE5-C918-ACE3-8092-1AFA39CCE60A}"/>
+                <a16:creationId xmlns:a16="http://schemas.microsoft.com/office/drawing/2014/main" id="{D318096A-E99D-5EF2-766B-E40669BA4314}"/>
               </a:ext>
             </a:extLst>
           </p:cNvPr>
@@ -10844,7 +10844,7 @@
                 </a:solidFill>
                 <a:latin typeface="Calibri" panose="020F0502020204030204" pitchFamily="34" charset="0"/>
               </a:rPr>
-              <a:t>Start a run with the model tier on - the organisers' full inbox, 520 emails</a:t>
+              <a:t>Start a run with the model tier on - then Before / With Sentinel: the inbox as it arrived, and what it made of it</a:t>
             </a:r>
             <a:endParaRPr lang="en-MY" sz="1300">
               <a:solidFill>
@@ -10860,7 +10860,7 @@
           <p:cNvPr id="6" name="Oval 5">
             <a:extLst>
               <a:ext uri="{FF2B5EF4-FFF2-40B4-BE49-F238E27FC236}">
-                <a16:creationId xmlns:a16="http://schemas.microsoft.com/office/drawing/2014/main" id="{E27029DA-BB52-1FCD-276F-AA915D1B3F30}"/>
+                <a16:creationId xmlns:a16="http://schemas.microsoft.com/office/drawing/2014/main" id="{E78AFCFB-60C1-F22C-9CD1-E4F5A90B1439}"/>
               </a:ext>
             </a:extLst>
           </p:cNvPr>
@@ -10936,7 +10936,7 @@
           <p:cNvPr id="7" name="TextBox 6">
             <a:extLst>
               <a:ext uri="{FF2B5EF4-FFF2-40B4-BE49-F238E27FC236}">
-                <a16:creationId xmlns:a16="http://schemas.microsoft.com/office/drawing/2014/main" id="{A1A8CEDE-3942-8E21-3EF3-01EC57AFFD07}"/>
+                <a16:creationId xmlns:a16="http://schemas.microsoft.com/office/drawing/2014/main" id="{FB9C4DEA-C53D-26E1-10D7-E1FC56942AE7}"/>
               </a:ext>
             </a:extLst>
           </p:cNvPr>
@@ -10966,7 +10966,7 @@
                 </a:solidFill>
                 <a:latin typeface="Calibri" panose="020F0502020204030204" pitchFamily="34" charset="0"/>
               </a:rPr>
-              <a:t>Patterns worth a second look - one shipper, one field, six times</a:t>
+              <a:t>Patterns worth a second look - one shipper, one field, seven times</a:t>
             </a:r>
             <a:endParaRPr lang="en-MY" sz="1300">
               <a:solidFill>
@@ -10982,7 +10982,7 @@
           <p:cNvPr id="8" name="Oval 7">
             <a:extLst>
               <a:ext uri="{FF2B5EF4-FFF2-40B4-BE49-F238E27FC236}">
-                <a16:creationId xmlns:a16="http://schemas.microsoft.com/office/drawing/2014/main" id="{43C0904F-1215-726A-B2F1-45C7A4BD5B3C}"/>
+                <a16:creationId xmlns:a16="http://schemas.microsoft.com/office/drawing/2014/main" id="{63BAFCA6-61E0-03D5-DE05-8850E5E78258}"/>
               </a:ext>
             </a:extLst>
           </p:cNvPr>
@@ -11058,7 +11058,7 @@
           <p:cNvPr id="9" name="TextBox 8">
             <a:extLst>
               <a:ext uri="{FF2B5EF4-FFF2-40B4-BE49-F238E27FC236}">
-                <a16:creationId xmlns:a16="http://schemas.microsoft.com/office/drawing/2014/main" id="{18D79AF6-CC6B-9D07-0550-B46B7EC8FE7D}"/>
+                <a16:creationId xmlns:a16="http://schemas.microsoft.com/office/drawing/2014/main" id="{1FEB793D-8F68-B90B-3D58-31C845516115}"/>
               </a:ext>
             </a:extLst>
           </p:cNvPr>
@@ -11104,7 +11104,7 @@
           <p:cNvPr id="10" name="Oval 9">
             <a:extLst>
               <a:ext uri="{FF2B5EF4-FFF2-40B4-BE49-F238E27FC236}">
-                <a16:creationId xmlns:a16="http://schemas.microsoft.com/office/drawing/2014/main" id="{2A45EEDA-6464-D86A-12B3-E08F54920F90}"/>
+                <a16:creationId xmlns:a16="http://schemas.microsoft.com/office/drawing/2014/main" id="{6B2FCB43-B278-E5D3-5C27-CB4B92344B9C}"/>
               </a:ext>
             </a:extLst>
           </p:cNvPr>
@@ -11180,7 +11180,7 @@
           <p:cNvPr id="11" name="TextBox 10">
             <a:extLst>
               <a:ext uri="{FF2B5EF4-FFF2-40B4-BE49-F238E27FC236}">
-                <a16:creationId xmlns:a16="http://schemas.microsoft.com/office/drawing/2014/main" id="{47223473-0096-EC57-1996-4C02A929076B}"/>
+                <a16:creationId xmlns:a16="http://schemas.microsoft.com/office/drawing/2014/main" id="{380B84F0-0C5A-4FC3-D1D7-800DB0DA8A49}"/>
               </a:ext>
             </a:extLst>
           </p:cNvPr>
@@ -11226,7 +11226,7 @@
           <p:cNvPr id="12" name="Oval 11">
             <a:extLst>
               <a:ext uri="{FF2B5EF4-FFF2-40B4-BE49-F238E27FC236}">
-                <a16:creationId xmlns:a16="http://schemas.microsoft.com/office/drawing/2014/main" id="{5382F9AE-45CC-7770-BBE1-AA4AA357E351}"/>
+                <a16:creationId xmlns:a16="http://schemas.microsoft.com/office/drawing/2014/main" id="{74A6C2D7-A2C8-DF99-25FC-D33EC4D7FA72}"/>
               </a:ext>
             </a:extLst>
           </p:cNvPr>
@@ -11302,7 +11302,7 @@
           <p:cNvPr id="13" name="TextBox 12">
             <a:extLst>
               <a:ext uri="{FF2B5EF4-FFF2-40B4-BE49-F238E27FC236}">
-                <a16:creationId xmlns:a16="http://schemas.microsoft.com/office/drawing/2014/main" id="{8EED635F-AFFC-379F-F623-5501E1BC5174}"/>
+                <a16:creationId xmlns:a16="http://schemas.microsoft.com/office/drawing/2014/main" id="{EEF8C26C-C76A-FE1A-C6CD-B8A5C8F90403}"/>
               </a:ext>
             </a:extLst>
           </p:cNvPr>
@@ -11348,7 +11348,7 @@
           <p:cNvPr id="15" name="Picture 14">
             <a:extLst>
               <a:ext uri="{FF2B5EF4-FFF2-40B4-BE49-F238E27FC236}">
-                <a16:creationId xmlns:a16="http://schemas.microsoft.com/office/drawing/2014/main" id="{7F6F7046-D363-E936-35B8-C2C77878A2E8}"/>
+                <a16:creationId xmlns:a16="http://schemas.microsoft.com/office/drawing/2014/main" id="{9D79940C-0F45-14F2-0D5D-B9AC7D04D709}"/>
               </a:ext>
             </a:extLst>
           </p:cNvPr>
@@ -11389,7 +11389,7 @@
           <p:cNvPr id="16" name="TextBox 15">
             <a:extLst>
               <a:ext uri="{FF2B5EF4-FFF2-40B4-BE49-F238E27FC236}">
-                <a16:creationId xmlns:a16="http://schemas.microsoft.com/office/drawing/2014/main" id="{7F1EB5F6-C7C6-E60D-0A6F-CBAA2F77111D}"/>
+                <a16:creationId xmlns:a16="http://schemas.microsoft.com/office/drawing/2014/main" id="{8F407935-C17E-F1FC-C3FB-5E12ABD7D975}"/>
               </a:ext>
             </a:extLst>
           </p:cNvPr>
@@ -11433,7 +11433,7 @@
     </p:spTree>
     <p:extLst>
       <p:ext uri="{BB962C8B-B14F-4D97-AF65-F5344CB8AC3E}">
-        <p14:creationId xmlns:p14="http://schemas.microsoft.com/office/powerpoint/2010/main" val="1037793958"/>
+        <p14:creationId xmlns:p14="http://schemas.microsoft.com/office/powerpoint/2010/main" val="1555293019"/>
       </p:ext>
     </p:extLst>
   </p:cSld>
@@ -11473,7 +11473,7 @@
           <p:cNvPr id="2" name="TextBox 1">
             <a:extLst>
               <a:ext uri="{FF2B5EF4-FFF2-40B4-BE49-F238E27FC236}">
-                <a16:creationId xmlns:a16="http://schemas.microsoft.com/office/drawing/2014/main" id="{0361A244-F027-F4DF-B51B-DA1B9B51D349}"/>
+                <a16:creationId xmlns:a16="http://schemas.microsoft.com/office/drawing/2014/main" id="{00F96944-B085-7D21-1F0B-6A50CBD319D4}"/>
               </a:ext>
             </a:extLst>
           </p:cNvPr>
@@ -11513,7 +11513,7 @@
           <p:cNvPr id="3" name="Oval 2">
             <a:extLst>
               <a:ext uri="{FF2B5EF4-FFF2-40B4-BE49-F238E27FC236}">
-                <a16:creationId xmlns:a16="http://schemas.microsoft.com/office/drawing/2014/main" id="{3AC75AD2-E50B-A0C0-5B79-BAC6611C6B19}"/>
+                <a16:creationId xmlns:a16="http://schemas.microsoft.com/office/drawing/2014/main" id="{BC1C1934-6A70-850A-B4F6-D4F1C4C2FE5C}"/>
               </a:ext>
             </a:extLst>
           </p:cNvPr>
@@ -11589,7 +11589,7 @@
           <p:cNvPr id="4" name="TextBox 3">
             <a:extLst>
               <a:ext uri="{FF2B5EF4-FFF2-40B4-BE49-F238E27FC236}">
-                <a16:creationId xmlns:a16="http://schemas.microsoft.com/office/drawing/2014/main" id="{C05F72C1-3DEC-11E2-A1E9-81BF16D29016}"/>
+                <a16:creationId xmlns:a16="http://schemas.microsoft.com/office/drawing/2014/main" id="{919EC386-E423-8D4C-114D-68B0DA691AF2}"/>
               </a:ext>
             </a:extLst>
           </p:cNvPr>
@@ -11629,7 +11629,7 @@
           <p:cNvPr id="5" name="TextBox 4">
             <a:extLst>
               <a:ext uri="{FF2B5EF4-FFF2-40B4-BE49-F238E27FC236}">
-                <a16:creationId xmlns:a16="http://schemas.microsoft.com/office/drawing/2014/main" id="{B84D7421-C657-CFAD-09D0-726232C6DE9F}"/>
+                <a16:creationId xmlns:a16="http://schemas.microsoft.com/office/drawing/2014/main" id="{0328FAD0-0187-B7FA-C666-38354CBB1D9E}"/>
               </a:ext>
             </a:extLst>
           </p:cNvPr>
@@ -11675,7 +11675,7 @@
           <p:cNvPr id="6" name="Oval 5">
             <a:extLst>
               <a:ext uri="{FF2B5EF4-FFF2-40B4-BE49-F238E27FC236}">
-                <a16:creationId xmlns:a16="http://schemas.microsoft.com/office/drawing/2014/main" id="{A9C5D531-C8ED-7A37-3486-0669E6662FBE}"/>
+                <a16:creationId xmlns:a16="http://schemas.microsoft.com/office/drawing/2014/main" id="{F55C6E76-59BD-BD57-CE65-83EAE1466D08}"/>
               </a:ext>
             </a:extLst>
           </p:cNvPr>
@@ -11751,7 +11751,7 @@
           <p:cNvPr id="7" name="TextBox 6">
             <a:extLst>
               <a:ext uri="{FF2B5EF4-FFF2-40B4-BE49-F238E27FC236}">
-                <a16:creationId xmlns:a16="http://schemas.microsoft.com/office/drawing/2014/main" id="{9CDAA1BC-700D-EB24-5E07-E5A0A4B021CF}"/>
+                <a16:creationId xmlns:a16="http://schemas.microsoft.com/office/drawing/2014/main" id="{480095FB-B955-719B-B5FF-29EA6BA9FD76}"/>
               </a:ext>
             </a:extLst>
           </p:cNvPr>
@@ -11797,7 +11797,7 @@
           <p:cNvPr id="8" name="TextBox 7">
             <a:extLst>
               <a:ext uri="{FF2B5EF4-FFF2-40B4-BE49-F238E27FC236}">
-                <a16:creationId xmlns:a16="http://schemas.microsoft.com/office/drawing/2014/main" id="{F3910C63-3416-AAF1-BBF6-BECFD56EF6A0}"/>
+                <a16:creationId xmlns:a16="http://schemas.microsoft.com/office/drawing/2014/main" id="{C19FB67A-9D84-FF1A-2167-96EA8ACF71BA}"/>
               </a:ext>
             </a:extLst>
           </p:cNvPr>
@@ -11843,7 +11843,7 @@
           <p:cNvPr id="9" name="Oval 8">
             <a:extLst>
               <a:ext uri="{FF2B5EF4-FFF2-40B4-BE49-F238E27FC236}">
-                <a16:creationId xmlns:a16="http://schemas.microsoft.com/office/drawing/2014/main" id="{2641CD8E-D788-FD4B-5222-ACE4099FEEE6}"/>
+                <a16:creationId xmlns:a16="http://schemas.microsoft.com/office/drawing/2014/main" id="{5A70A33D-9E9D-A7B2-CA79-F656F23ADC34}"/>
               </a:ext>
             </a:extLst>
           </p:cNvPr>
@@ -11919,7 +11919,7 @@
           <p:cNvPr id="10" name="TextBox 9">
             <a:extLst>
               <a:ext uri="{FF2B5EF4-FFF2-40B4-BE49-F238E27FC236}">
-                <a16:creationId xmlns:a16="http://schemas.microsoft.com/office/drawing/2014/main" id="{36B2F309-7043-6823-CFA0-172ABBDCC853}"/>
+                <a16:creationId xmlns:a16="http://schemas.microsoft.com/office/drawing/2014/main" id="{A1165E49-195B-D982-E30C-70A3234AC40D}"/>
               </a:ext>
             </a:extLst>
           </p:cNvPr>
@@ -11965,7 +11965,7 @@
           <p:cNvPr id="11" name="TextBox 10">
             <a:extLst>
               <a:ext uri="{FF2B5EF4-FFF2-40B4-BE49-F238E27FC236}">
-                <a16:creationId xmlns:a16="http://schemas.microsoft.com/office/drawing/2014/main" id="{17DBB224-D5BB-F090-AADD-C76D84E361A2}"/>
+                <a16:creationId xmlns:a16="http://schemas.microsoft.com/office/drawing/2014/main" id="{2E41658C-D1C5-1F20-B98F-DD47AA2E6B00}"/>
               </a:ext>
             </a:extLst>
           </p:cNvPr>
@@ -12011,7 +12011,7 @@
           <p:cNvPr id="12" name="Oval 11">
             <a:extLst>
               <a:ext uri="{FF2B5EF4-FFF2-40B4-BE49-F238E27FC236}">
-                <a16:creationId xmlns:a16="http://schemas.microsoft.com/office/drawing/2014/main" id="{CA55D6EC-49B0-50BF-30B1-1EF9EF6A90C7}"/>
+                <a16:creationId xmlns:a16="http://schemas.microsoft.com/office/drawing/2014/main" id="{0843AE3B-9DCA-CC4A-3854-A0BF7BC3B1B9}"/>
               </a:ext>
             </a:extLst>
           </p:cNvPr>
@@ -12087,7 +12087,7 @@
           <p:cNvPr id="13" name="TextBox 12">
             <a:extLst>
               <a:ext uri="{FF2B5EF4-FFF2-40B4-BE49-F238E27FC236}">
-                <a16:creationId xmlns:a16="http://schemas.microsoft.com/office/drawing/2014/main" id="{F5AAAE46-66FE-3DDC-9D9C-4E4BC7DF0296}"/>
+                <a16:creationId xmlns:a16="http://schemas.microsoft.com/office/drawing/2014/main" id="{0F7DD32E-B369-0472-FA56-76AB2CA7F62D}"/>
               </a:ext>
             </a:extLst>
           </p:cNvPr>
@@ -12133,7 +12133,7 @@
           <p:cNvPr id="14" name="TextBox 13">
             <a:extLst>
               <a:ext uri="{FF2B5EF4-FFF2-40B4-BE49-F238E27FC236}">
-                <a16:creationId xmlns:a16="http://schemas.microsoft.com/office/drawing/2014/main" id="{085032E0-6489-1F95-FE19-9A5392963135}"/>
+                <a16:creationId xmlns:a16="http://schemas.microsoft.com/office/drawing/2014/main" id="{2BBE61AD-E8D1-AD1C-4C09-E34D0ADD340D}"/>
               </a:ext>
             </a:extLst>
           </p:cNvPr>
@@ -12179,7 +12179,7 @@
           <p:cNvPr id="15" name="Oval 14">
             <a:extLst>
               <a:ext uri="{FF2B5EF4-FFF2-40B4-BE49-F238E27FC236}">
-                <a16:creationId xmlns:a16="http://schemas.microsoft.com/office/drawing/2014/main" id="{45E3243F-F3BD-96FD-7973-8E668BE1F9CA}"/>
+                <a16:creationId xmlns:a16="http://schemas.microsoft.com/office/drawing/2014/main" id="{BAE8C221-C32B-97CE-39F0-2503C6C92A71}"/>
               </a:ext>
             </a:extLst>
           </p:cNvPr>
@@ -12255,7 +12255,7 @@
           <p:cNvPr id="16" name="TextBox 15">
             <a:extLst>
               <a:ext uri="{FF2B5EF4-FFF2-40B4-BE49-F238E27FC236}">
-                <a16:creationId xmlns:a16="http://schemas.microsoft.com/office/drawing/2014/main" id="{E65204F4-DBB9-78AB-2BE7-89739FC41C8D}"/>
+                <a16:creationId xmlns:a16="http://schemas.microsoft.com/office/drawing/2014/main" id="{7DE96077-AE11-593F-9DA1-54EF5B2EA4A4}"/>
               </a:ext>
             </a:extLst>
           </p:cNvPr>
@@ -12301,7 +12301,7 @@
           <p:cNvPr id="17" name="TextBox 16">
             <a:extLst>
               <a:ext uri="{FF2B5EF4-FFF2-40B4-BE49-F238E27FC236}">
-                <a16:creationId xmlns:a16="http://schemas.microsoft.com/office/drawing/2014/main" id="{C1519ECA-C2B2-426B-F335-8450EFC22E7D}"/>
+                <a16:creationId xmlns:a16="http://schemas.microsoft.com/office/drawing/2014/main" id="{4182330A-2E4B-7C62-286D-8EA43F9029A5}"/>
               </a:ext>
             </a:extLst>
           </p:cNvPr>
@@ -12347,7 +12347,7 @@
           <p:cNvPr id="19" name="Picture 18">
             <a:extLst>
               <a:ext uri="{FF2B5EF4-FFF2-40B4-BE49-F238E27FC236}">
-                <a16:creationId xmlns:a16="http://schemas.microsoft.com/office/drawing/2014/main" id="{D7B028DE-82FE-871B-D738-3DB358EBECAA}"/>
+                <a16:creationId xmlns:a16="http://schemas.microsoft.com/office/drawing/2014/main" id="{593519BC-56F3-DAB6-253F-223BE0A07FBF}"/>
               </a:ext>
             </a:extLst>
           </p:cNvPr>
@@ -12371,7 +12371,7 @@
         <p:spPr>
           <a:xfrm>
             <a:off x="6858000" y="1219200"/>
-            <a:ext cx="4724400" cy="1837267"/>
+            <a:ext cx="4724400" cy="1637479"/>
           </a:xfrm>
           <a:prstGeom prst="rect">
             <a:avLst/>
@@ -12388,7 +12388,7 @@
           <p:cNvPr id="20" name="TextBox 19">
             <a:extLst>
               <a:ext uri="{FF2B5EF4-FFF2-40B4-BE49-F238E27FC236}">
-                <a16:creationId xmlns:a16="http://schemas.microsoft.com/office/drawing/2014/main" id="{87AE7AD1-426C-4D04-DA2F-1AD46E680297}"/>
+                <a16:creationId xmlns:a16="http://schemas.microsoft.com/office/drawing/2014/main" id="{9C0B8DA1-8601-FF51-022B-FB3B1D528DF6}"/>
               </a:ext>
             </a:extLst>
           </p:cNvPr>
@@ -12434,7 +12434,7 @@
           <p:cNvPr id="21" name="Rectangle: Rounded Corners 20">
             <a:extLst>
               <a:ext uri="{FF2B5EF4-FFF2-40B4-BE49-F238E27FC236}">
-                <a16:creationId xmlns:a16="http://schemas.microsoft.com/office/drawing/2014/main" id="{51FF6AE3-08E3-2176-ACCF-E61549E5E729}"/>
+                <a16:creationId xmlns:a16="http://schemas.microsoft.com/office/drawing/2014/main" id="{B512E677-71BC-8ED8-5F91-2C82B7FCEFA5}"/>
               </a:ext>
             </a:extLst>
           </p:cNvPr>
@@ -12504,7 +12504,7 @@
           <p:cNvPr id="22" name="TextBox 21">
             <a:extLst>
               <a:ext uri="{FF2B5EF4-FFF2-40B4-BE49-F238E27FC236}">
-                <a16:creationId xmlns:a16="http://schemas.microsoft.com/office/drawing/2014/main" id="{04749409-1CF9-4C9C-993A-6609C9CD1D78}"/>
+                <a16:creationId xmlns:a16="http://schemas.microsoft.com/office/drawing/2014/main" id="{9F40B439-FA69-FA7F-B28C-71849E3053DF}"/>
               </a:ext>
             </a:extLst>
           </p:cNvPr>
@@ -12550,7 +12550,7 @@
           <p:cNvPr id="23" name="TextBox 22">
             <a:extLst>
               <a:ext uri="{FF2B5EF4-FFF2-40B4-BE49-F238E27FC236}">
-                <a16:creationId xmlns:a16="http://schemas.microsoft.com/office/drawing/2014/main" id="{4B46A69B-E70D-0C8E-D9B8-24161E95C137}"/>
+                <a16:creationId xmlns:a16="http://schemas.microsoft.com/office/drawing/2014/main" id="{AE721930-133F-C1DB-A8BB-246024515018}"/>
               </a:ext>
             </a:extLst>
           </p:cNvPr>
@@ -12595,7 +12595,7 @@
     </p:spTree>
     <p:extLst>
       <p:ext uri="{BB962C8B-B14F-4D97-AF65-F5344CB8AC3E}">
-        <p14:creationId xmlns:p14="http://schemas.microsoft.com/office/powerpoint/2010/main" val="2596078402"/>
+        <p14:creationId xmlns:p14="http://schemas.microsoft.com/office/powerpoint/2010/main" val="3939252150"/>
       </p:ext>
     </p:extLst>
   </p:cSld>
@@ -12635,7 +12635,7 @@
           <p:cNvPr id="2" name="TextBox 1">
             <a:extLst>
               <a:ext uri="{FF2B5EF4-FFF2-40B4-BE49-F238E27FC236}">
-                <a16:creationId xmlns:a16="http://schemas.microsoft.com/office/drawing/2014/main" id="{D4F84BD4-CA6D-DD44-CEB0-727AE5B5BD7B}"/>
+                <a16:creationId xmlns:a16="http://schemas.microsoft.com/office/drawing/2014/main" id="{FCFBDF0C-03B0-8E26-41CD-4D025C5022E6}"/>
               </a:ext>
             </a:extLst>
           </p:cNvPr>
@@ -12681,7 +12681,7 @@
           <p:cNvPr id="3" name="Rectangle: Rounded Corners 2">
             <a:extLst>
               <a:ext uri="{FF2B5EF4-FFF2-40B4-BE49-F238E27FC236}">
-                <a16:creationId xmlns:a16="http://schemas.microsoft.com/office/drawing/2014/main" id="{14D35C28-96BC-FDDE-A400-9A38795C4C6B}"/>
+                <a16:creationId xmlns:a16="http://schemas.microsoft.com/office/drawing/2014/main" id="{4D28F5AB-959B-2035-516D-3D116227F55B}"/>
               </a:ext>
             </a:extLst>
           </p:cNvPr>
@@ -12751,7 +12751,7 @@
           <p:cNvPr id="4" name="TextBox 3">
             <a:extLst>
               <a:ext uri="{FF2B5EF4-FFF2-40B4-BE49-F238E27FC236}">
-                <a16:creationId xmlns:a16="http://schemas.microsoft.com/office/drawing/2014/main" id="{C1B49AE9-D6C8-5B0A-85D8-2130E8BBABE0}"/>
+                <a16:creationId xmlns:a16="http://schemas.microsoft.com/office/drawing/2014/main" id="{3D6006A5-25F9-D285-9684-E443C1B42C9D}"/>
               </a:ext>
             </a:extLst>
           </p:cNvPr>
@@ -12791,7 +12791,7 @@
           <p:cNvPr id="5" name="TextBox 4">
             <a:extLst>
               <a:ext uri="{FF2B5EF4-FFF2-40B4-BE49-F238E27FC236}">
-                <a16:creationId xmlns:a16="http://schemas.microsoft.com/office/drawing/2014/main" id="{D180FBA5-E946-8E47-2878-B0B147F0E73A}"/>
+                <a16:creationId xmlns:a16="http://schemas.microsoft.com/office/drawing/2014/main" id="{CCC75A23-21CD-BD00-AB1C-45050F30C966}"/>
               </a:ext>
             </a:extLst>
           </p:cNvPr>
@@ -12832,7 +12832,7 @@
           <p:cNvPr id="6" name="TextBox 5">
             <a:extLst>
               <a:ext uri="{FF2B5EF4-FFF2-40B4-BE49-F238E27FC236}">
-                <a16:creationId xmlns:a16="http://schemas.microsoft.com/office/drawing/2014/main" id="{852ED602-2886-7D3D-029A-2E800583FAE8}"/>
+                <a16:creationId xmlns:a16="http://schemas.microsoft.com/office/drawing/2014/main" id="{FF48D0D3-FAF5-DAE0-B532-6107F13C4124}"/>
               </a:ext>
             </a:extLst>
           </p:cNvPr>
@@ -12872,7 +12872,7 @@
           <p:cNvPr id="7" name="TextBox 6">
             <a:extLst>
               <a:ext uri="{FF2B5EF4-FFF2-40B4-BE49-F238E27FC236}">
-                <a16:creationId xmlns:a16="http://schemas.microsoft.com/office/drawing/2014/main" id="{6AF2C088-8D31-CF3D-EF81-7421717E9CC3}"/>
+                <a16:creationId xmlns:a16="http://schemas.microsoft.com/office/drawing/2014/main" id="{6EF3249C-6353-3429-C40D-C8F77F0EA422}"/>
               </a:ext>
             </a:extLst>
           </p:cNvPr>
@@ -12918,7 +12918,7 @@
           <p:cNvPr id="8" name="TextBox 7">
             <a:extLst>
               <a:ext uri="{FF2B5EF4-FFF2-40B4-BE49-F238E27FC236}">
-                <a16:creationId xmlns:a16="http://schemas.microsoft.com/office/drawing/2014/main" id="{E6FA07E7-9ED3-88B7-0A23-7C74EB3913BC}"/>
+                <a16:creationId xmlns:a16="http://schemas.microsoft.com/office/drawing/2014/main" id="{06911DF7-DBE5-24D3-CFBB-452B94AC345F}"/>
               </a:ext>
             </a:extLst>
           </p:cNvPr>
@@ -12964,7 +12964,7 @@
           <p:cNvPr id="9" name="TextBox 8">
             <a:extLst>
               <a:ext uri="{FF2B5EF4-FFF2-40B4-BE49-F238E27FC236}">
-                <a16:creationId xmlns:a16="http://schemas.microsoft.com/office/drawing/2014/main" id="{082C4F84-0129-0A85-BBC8-80F88CE739CE}"/>
+                <a16:creationId xmlns:a16="http://schemas.microsoft.com/office/drawing/2014/main" id="{0781AF71-E0FB-EB11-FEE5-28AB61404BE8}"/>
               </a:ext>
             </a:extLst>
           </p:cNvPr>
@@ -13010,7 +13010,7 @@
           <p:cNvPr id="10" name="Table 9">
             <a:extLst>
               <a:ext uri="{FF2B5EF4-FFF2-40B4-BE49-F238E27FC236}">
-                <a16:creationId xmlns:a16="http://schemas.microsoft.com/office/drawing/2014/main" id="{FAAD3784-CD8C-E73B-1625-194C9ECE5FD1}"/>
+                <a16:creationId xmlns:a16="http://schemas.microsoft.com/office/drawing/2014/main" id="{5B5C0859-5EEF-323F-00F4-7E37CE64C467}"/>
               </a:ext>
             </a:extLst>
           </p:cNvPr>
@@ -13020,7 +13020,7 @@
           <p:nvPr>
             <p:extLst>
               <p:ext uri="{D42A27DB-BD31-4B8C-83A1-F6EECF244321}">
-                <p14:modId xmlns:p14="http://schemas.microsoft.com/office/powerpoint/2010/main" val="67259051"/>
+                <p14:modId xmlns:p14="http://schemas.microsoft.com/office/powerpoint/2010/main" val="2196699509"/>
               </p:ext>
             </p:extLst>
           </p:nvPr>
@@ -13039,21 +13039,21 @@
                 <a:gridCol w="1905000">
                   <a:extLst>
                     <a:ext uri="{9D8B030D-6E8A-4147-A177-3AD203B41FA5}">
-                      <a16:colId xmlns:a16="http://schemas.microsoft.com/office/drawing/2014/main" val="1415162259"/>
+                      <a16:colId xmlns:a16="http://schemas.microsoft.com/office/drawing/2014/main" val="3658349358"/>
                     </a:ext>
                   </a:extLst>
                 </a:gridCol>
                 <a:gridCol w="2413000">
                   <a:extLst>
                     <a:ext uri="{9D8B030D-6E8A-4147-A177-3AD203B41FA5}">
-                      <a16:colId xmlns:a16="http://schemas.microsoft.com/office/drawing/2014/main" val="1375915125"/>
+                      <a16:colId xmlns:a16="http://schemas.microsoft.com/office/drawing/2014/main" val="4251038765"/>
                     </a:ext>
                   </a:extLst>
                 </a:gridCol>
                 <a:gridCol w="2032000">
                   <a:extLst>
                     <a:ext uri="{9D8B030D-6E8A-4147-A177-3AD203B41FA5}">
-                      <a16:colId xmlns:a16="http://schemas.microsoft.com/office/drawing/2014/main" val="4199924233"/>
+                      <a16:colId xmlns:a16="http://schemas.microsoft.com/office/drawing/2014/main" val="47794513"/>
                     </a:ext>
                   </a:extLst>
                 </a:gridCol>
@@ -13127,7 +13127,7 @@
                 </a:tc>
                 <a:extLst>
                   <a:ext uri="{0D108BD9-81ED-4DB2-BD59-A6C34878D82A}">
-                    <a16:rowId xmlns:a16="http://schemas.microsoft.com/office/drawing/2014/main" val="361054233"/>
+                    <a16:rowId xmlns:a16="http://schemas.microsoft.com/office/drawing/2014/main" val="1720233538"/>
                   </a:ext>
                 </a:extLst>
               </a:tr>
@@ -13212,7 +13212,7 @@
                 </a:tc>
                 <a:extLst>
                   <a:ext uri="{0D108BD9-81ED-4DB2-BD59-A6C34878D82A}">
-                    <a16:rowId xmlns:a16="http://schemas.microsoft.com/office/drawing/2014/main" val="2959678648"/>
+                    <a16:rowId xmlns:a16="http://schemas.microsoft.com/office/drawing/2014/main" val="2916994068"/>
                   </a:ext>
                 </a:extLst>
               </a:tr>
@@ -13291,7 +13291,7 @@
                 </a:tc>
                 <a:extLst>
                   <a:ext uri="{0D108BD9-81ED-4DB2-BD59-A6C34878D82A}">
-                    <a16:rowId xmlns:a16="http://schemas.microsoft.com/office/drawing/2014/main" val="568926261"/>
+                    <a16:rowId xmlns:a16="http://schemas.microsoft.com/office/drawing/2014/main" val="243371682"/>
                   </a:ext>
                 </a:extLst>
               </a:tr>
@@ -13370,7 +13370,7 @@
                 </a:tc>
                 <a:extLst>
                   <a:ext uri="{0D108BD9-81ED-4DB2-BD59-A6C34878D82A}">
-                    <a16:rowId xmlns:a16="http://schemas.microsoft.com/office/drawing/2014/main" val="2167205588"/>
+                    <a16:rowId xmlns:a16="http://schemas.microsoft.com/office/drawing/2014/main" val="2542116333"/>
                   </a:ext>
                 </a:extLst>
               </a:tr>
@@ -13383,7 +13383,7 @@
           <p:cNvPr id="11" name="Rectangle: Rounded Corners 10">
             <a:extLst>
               <a:ext uri="{FF2B5EF4-FFF2-40B4-BE49-F238E27FC236}">
-                <a16:creationId xmlns:a16="http://schemas.microsoft.com/office/drawing/2014/main" id="{FDD5AE3E-7485-7FE6-35CB-972C69FB3EBB}"/>
+                <a16:creationId xmlns:a16="http://schemas.microsoft.com/office/drawing/2014/main" id="{9DF73A8F-A722-B428-1626-7897A7143E5C}"/>
               </a:ext>
             </a:extLst>
           </p:cNvPr>
@@ -13453,7 +13453,7 @@
           <p:cNvPr id="12" name="TextBox 11">
             <a:extLst>
               <a:ext uri="{FF2B5EF4-FFF2-40B4-BE49-F238E27FC236}">
-                <a16:creationId xmlns:a16="http://schemas.microsoft.com/office/drawing/2014/main" id="{BC72DD2B-6904-FEC6-991A-D600661159FB}"/>
+                <a16:creationId xmlns:a16="http://schemas.microsoft.com/office/drawing/2014/main" id="{B2F449B4-A176-A39F-EC1B-222D5B36B922}"/>
               </a:ext>
             </a:extLst>
           </p:cNvPr>
@@ -13493,7 +13493,7 @@
           <p:cNvPr id="13" name="Oval 12">
             <a:extLst>
               <a:ext uri="{FF2B5EF4-FFF2-40B4-BE49-F238E27FC236}">
-                <a16:creationId xmlns:a16="http://schemas.microsoft.com/office/drawing/2014/main" id="{1C9E7BD2-7DAC-E8DA-303B-83B78E631E0F}"/>
+                <a16:creationId xmlns:a16="http://schemas.microsoft.com/office/drawing/2014/main" id="{BB5B4C39-6196-B129-B0FC-26CB43916FDA}"/>
               </a:ext>
             </a:extLst>
           </p:cNvPr>
@@ -13569,7 +13569,7 @@
           <p:cNvPr id="14" name="TextBox 13">
             <a:extLst>
               <a:ext uri="{FF2B5EF4-FFF2-40B4-BE49-F238E27FC236}">
-                <a16:creationId xmlns:a16="http://schemas.microsoft.com/office/drawing/2014/main" id="{5B379FDB-4825-4C63-15DB-DFFD6141B638}"/>
+                <a16:creationId xmlns:a16="http://schemas.microsoft.com/office/drawing/2014/main" id="{D4BF8A55-9700-F084-4461-6A641F1251A0}"/>
               </a:ext>
             </a:extLst>
           </p:cNvPr>
@@ -13609,7 +13609,7 @@
           <p:cNvPr id="15" name="TextBox 14">
             <a:extLst>
               <a:ext uri="{FF2B5EF4-FFF2-40B4-BE49-F238E27FC236}">
-                <a16:creationId xmlns:a16="http://schemas.microsoft.com/office/drawing/2014/main" id="{3D8B4E7E-0C81-4C8E-905F-0B0B1F180CCC}"/>
+                <a16:creationId xmlns:a16="http://schemas.microsoft.com/office/drawing/2014/main" id="{5E2407B6-3AA6-C663-B8B3-D257B9D984E5}"/>
               </a:ext>
             </a:extLst>
           </p:cNvPr>
@@ -13655,7 +13655,7 @@
           <p:cNvPr id="16" name="Oval 15">
             <a:extLst>
               <a:ext uri="{FF2B5EF4-FFF2-40B4-BE49-F238E27FC236}">
-                <a16:creationId xmlns:a16="http://schemas.microsoft.com/office/drawing/2014/main" id="{E3E4FE72-245A-7029-1621-C3FC2A00496F}"/>
+                <a16:creationId xmlns:a16="http://schemas.microsoft.com/office/drawing/2014/main" id="{0C218562-18BB-6D16-863D-A37A60D606A7}"/>
               </a:ext>
             </a:extLst>
           </p:cNvPr>
@@ -13731,7 +13731,7 @@
           <p:cNvPr id="17" name="TextBox 16">
             <a:extLst>
               <a:ext uri="{FF2B5EF4-FFF2-40B4-BE49-F238E27FC236}">
-                <a16:creationId xmlns:a16="http://schemas.microsoft.com/office/drawing/2014/main" id="{9B39274F-859B-89CA-E981-525B0B112806}"/>
+                <a16:creationId xmlns:a16="http://schemas.microsoft.com/office/drawing/2014/main" id="{15C94259-E94D-8555-0302-366255953C1E}"/>
               </a:ext>
             </a:extLst>
           </p:cNvPr>
@@ -13777,7 +13777,7 @@
           <p:cNvPr id="18" name="TextBox 17">
             <a:extLst>
               <a:ext uri="{FF2B5EF4-FFF2-40B4-BE49-F238E27FC236}">
-                <a16:creationId xmlns:a16="http://schemas.microsoft.com/office/drawing/2014/main" id="{05EF6F5D-2A52-6EEF-87BB-C89164CAB1B1}"/>
+                <a16:creationId xmlns:a16="http://schemas.microsoft.com/office/drawing/2014/main" id="{6933C7A9-FAF3-F70D-9DDF-0691BEC1EBA8}"/>
               </a:ext>
             </a:extLst>
           </p:cNvPr>
@@ -13823,7 +13823,7 @@
           <p:cNvPr id="19" name="Oval 18">
             <a:extLst>
               <a:ext uri="{FF2B5EF4-FFF2-40B4-BE49-F238E27FC236}">
-                <a16:creationId xmlns:a16="http://schemas.microsoft.com/office/drawing/2014/main" id="{0C4AB10C-676E-8543-00AF-F111C5D7EF3F}"/>
+                <a16:creationId xmlns:a16="http://schemas.microsoft.com/office/drawing/2014/main" id="{C3625124-EC6F-B9A1-B721-54072AA95D7E}"/>
               </a:ext>
             </a:extLst>
           </p:cNvPr>
@@ -13899,7 +13899,7 @@
           <p:cNvPr id="20" name="TextBox 19">
             <a:extLst>
               <a:ext uri="{FF2B5EF4-FFF2-40B4-BE49-F238E27FC236}">
-                <a16:creationId xmlns:a16="http://schemas.microsoft.com/office/drawing/2014/main" id="{47A67589-3FF5-5FB0-B389-E299FDCB5DFA}"/>
+                <a16:creationId xmlns:a16="http://schemas.microsoft.com/office/drawing/2014/main" id="{D616624C-6774-9DA4-2B3B-C784D54D4BF6}"/>
               </a:ext>
             </a:extLst>
           </p:cNvPr>
@@ -13939,7 +13939,7 @@
           <p:cNvPr id="21" name="TextBox 20">
             <a:extLst>
               <a:ext uri="{FF2B5EF4-FFF2-40B4-BE49-F238E27FC236}">
-                <a16:creationId xmlns:a16="http://schemas.microsoft.com/office/drawing/2014/main" id="{645290EE-B362-CD2F-794A-5C18E1D36B6E}"/>
+                <a16:creationId xmlns:a16="http://schemas.microsoft.com/office/drawing/2014/main" id="{660225A4-4AC8-804E-2E50-D613C8875197}"/>
               </a:ext>
             </a:extLst>
           </p:cNvPr>
@@ -13985,7 +13985,7 @@
           <p:cNvPr id="22" name="TextBox 21">
             <a:extLst>
               <a:ext uri="{FF2B5EF4-FFF2-40B4-BE49-F238E27FC236}">
-                <a16:creationId xmlns:a16="http://schemas.microsoft.com/office/drawing/2014/main" id="{119025DA-FC0B-AAF1-B955-7410E0AB95DA}"/>
+                <a16:creationId xmlns:a16="http://schemas.microsoft.com/office/drawing/2014/main" id="{BB5FF9C2-86BC-7F90-426E-A727C2F9986D}"/>
               </a:ext>
             </a:extLst>
           </p:cNvPr>
@@ -14031,7 +14031,7 @@
           <p:cNvPr id="23" name="TextBox 22">
             <a:extLst>
               <a:ext uri="{FF2B5EF4-FFF2-40B4-BE49-F238E27FC236}">
-                <a16:creationId xmlns:a16="http://schemas.microsoft.com/office/drawing/2014/main" id="{EA1E6289-F853-5D8B-0D3D-56F270878E4A}"/>
+                <a16:creationId xmlns:a16="http://schemas.microsoft.com/office/drawing/2014/main" id="{5158F63E-F2CE-B4FB-FAE4-2BAE9CA5E699}"/>
               </a:ext>
             </a:extLst>
           </p:cNvPr>
@@ -14070,7 +14070,7 @@
     </p:spTree>
     <p:extLst>
       <p:ext uri="{BB962C8B-B14F-4D97-AF65-F5344CB8AC3E}">
-        <p14:creationId xmlns:p14="http://schemas.microsoft.com/office/powerpoint/2010/main" val="1732380028"/>
+        <p14:creationId xmlns:p14="http://schemas.microsoft.com/office/powerpoint/2010/main" val="2823521045"/>
       </p:ext>
     </p:extLst>
   </p:cSld>

--- a/docs/Sentinel-final-pitch.pptx
+++ b/docs/Sentinel-final-pitch.pptx
@@ -199,7 +199,7 @@
             </a:lvl1pPr>
           </a:lstStyle>
           <a:p>
-            <a:fld id="{734D8549-8394-42AB-A89D-F465DECBB770}" type="datetimeFigureOut">
+            <a:fld id="{7A3AFFA2-E435-4AD9-99F3-1D4A5A1A1329}" type="datetimeFigureOut">
               <a:rPr lang="en-MY" smtClean="0"/>
               <a:t>25/9/2026</a:t>
             </a:fld>
@@ -358,7 +358,7 @@
             </a:lvl1pPr>
           </a:lstStyle>
           <a:p>
-            <a:fld id="{B95B9F5B-E5E1-48FB-8CE6-B8A2B0315A7C}" type="slidenum">
+            <a:fld id="{C0DB382D-0409-4C30-A2D8-5001506190DC}" type="slidenum">
               <a:rPr lang="en-MY" smtClean="0"/>
               <a:t>‹#›</a:t>
             </a:fld>
@@ -369,7 +369,7 @@
     </p:spTree>
     <p:extLst>
       <p:ext uri="{BB962C8B-B14F-4D97-AF65-F5344CB8AC3E}">
-        <p14:creationId xmlns:p14="http://schemas.microsoft.com/office/powerpoint/2010/main" val="2388409806"/>
+        <p14:creationId xmlns:p14="http://schemas.microsoft.com/office/powerpoint/2010/main" val="4138849633"/>
       </p:ext>
     </p:extLst>
   </p:cSld>
@@ -536,7 +536,7 @@
           <a:bodyPr/>
           <a:lstStyle/>
           <a:p>
-            <a:fld id="{B95B9F5B-E5E1-48FB-8CE6-B8A2B0315A7C}" type="slidenum">
+            <a:fld id="{C0DB382D-0409-4C30-A2D8-5001506190DC}" type="slidenum">
               <a:rPr lang="en-MY" smtClean="0"/>
               <a:t>1</a:t>
             </a:fld>
@@ -547,7 +547,7 @@
     </p:spTree>
     <p:extLst>
       <p:ext uri="{BB962C8B-B14F-4D97-AF65-F5344CB8AC3E}">
-        <p14:creationId xmlns:p14="http://schemas.microsoft.com/office/powerpoint/2010/main" val="636755235"/>
+        <p14:creationId xmlns:p14="http://schemas.microsoft.com/office/powerpoint/2010/main" val="1320488330"/>
       </p:ext>
     </p:extLst>
   </p:cSld>
@@ -624,7 +624,7 @@
           <a:bodyPr/>
           <a:lstStyle/>
           <a:p>
-            <a:fld id="{B95B9F5B-E5E1-48FB-8CE6-B8A2B0315A7C}" type="slidenum">
+            <a:fld id="{C0DB382D-0409-4C30-A2D8-5001506190DC}" type="slidenum">
               <a:rPr lang="en-MY" smtClean="0"/>
               <a:t>10</a:t>
             </a:fld>
@@ -635,7 +635,7 @@
     </p:spTree>
     <p:extLst>
       <p:ext uri="{BB962C8B-B14F-4D97-AF65-F5344CB8AC3E}">
-        <p14:creationId xmlns:p14="http://schemas.microsoft.com/office/powerpoint/2010/main" val="3581105151"/>
+        <p14:creationId xmlns:p14="http://schemas.microsoft.com/office/powerpoint/2010/main" val="3550211120"/>
       </p:ext>
     </p:extLst>
   </p:cSld>
@@ -712,7 +712,7 @@
           <a:bodyPr/>
           <a:lstStyle/>
           <a:p>
-            <a:fld id="{B95B9F5B-E5E1-48FB-8CE6-B8A2B0315A7C}" type="slidenum">
+            <a:fld id="{C0DB382D-0409-4C30-A2D8-5001506190DC}" type="slidenum">
               <a:rPr lang="en-MY" smtClean="0"/>
               <a:t>2</a:t>
             </a:fld>
@@ -723,7 +723,7 @@
     </p:spTree>
     <p:extLst>
       <p:ext uri="{BB962C8B-B14F-4D97-AF65-F5344CB8AC3E}">
-        <p14:creationId xmlns:p14="http://schemas.microsoft.com/office/powerpoint/2010/main" val="793609732"/>
+        <p14:creationId xmlns:p14="http://schemas.microsoft.com/office/powerpoint/2010/main" val="2385192577"/>
       </p:ext>
     </p:extLst>
   </p:cSld>
@@ -800,7 +800,7 @@
           <a:bodyPr/>
           <a:lstStyle/>
           <a:p>
-            <a:fld id="{B95B9F5B-E5E1-48FB-8CE6-B8A2B0315A7C}" type="slidenum">
+            <a:fld id="{C0DB382D-0409-4C30-A2D8-5001506190DC}" type="slidenum">
               <a:rPr lang="en-MY" smtClean="0"/>
               <a:t>3</a:t>
             </a:fld>
@@ -811,7 +811,7 @@
     </p:spTree>
     <p:extLst>
       <p:ext uri="{BB962C8B-B14F-4D97-AF65-F5344CB8AC3E}">
-        <p14:creationId xmlns:p14="http://schemas.microsoft.com/office/powerpoint/2010/main" val="2791165733"/>
+        <p14:creationId xmlns:p14="http://schemas.microsoft.com/office/powerpoint/2010/main" val="82145886"/>
       </p:ext>
     </p:extLst>
   </p:cSld>
@@ -888,7 +888,7 @@
           <a:bodyPr/>
           <a:lstStyle/>
           <a:p>
-            <a:fld id="{B95B9F5B-E5E1-48FB-8CE6-B8A2B0315A7C}" type="slidenum">
+            <a:fld id="{C0DB382D-0409-4C30-A2D8-5001506190DC}" type="slidenum">
               <a:rPr lang="en-MY" smtClean="0"/>
               <a:t>4</a:t>
             </a:fld>
@@ -899,7 +899,7 @@
     </p:spTree>
     <p:extLst>
       <p:ext uri="{BB962C8B-B14F-4D97-AF65-F5344CB8AC3E}">
-        <p14:creationId xmlns:p14="http://schemas.microsoft.com/office/powerpoint/2010/main" val="2208249275"/>
+        <p14:creationId xmlns:p14="http://schemas.microsoft.com/office/powerpoint/2010/main" val="1651089882"/>
       </p:ext>
     </p:extLst>
   </p:cSld>
@@ -976,7 +976,7 @@
           <a:bodyPr/>
           <a:lstStyle/>
           <a:p>
-            <a:fld id="{B95B9F5B-E5E1-48FB-8CE6-B8A2B0315A7C}" type="slidenum">
+            <a:fld id="{C0DB382D-0409-4C30-A2D8-5001506190DC}" type="slidenum">
               <a:rPr lang="en-MY" smtClean="0"/>
               <a:t>5</a:t>
             </a:fld>
@@ -987,7 +987,7 @@
     </p:spTree>
     <p:extLst>
       <p:ext uri="{BB962C8B-B14F-4D97-AF65-F5344CB8AC3E}">
-        <p14:creationId xmlns:p14="http://schemas.microsoft.com/office/powerpoint/2010/main" val="754846995"/>
+        <p14:creationId xmlns:p14="http://schemas.microsoft.com/office/powerpoint/2010/main" val="2643842212"/>
       </p:ext>
     </p:extLst>
   </p:cSld>
@@ -1064,7 +1064,7 @@
           <a:bodyPr/>
           <a:lstStyle/>
           <a:p>
-            <a:fld id="{B95B9F5B-E5E1-48FB-8CE6-B8A2B0315A7C}" type="slidenum">
+            <a:fld id="{C0DB382D-0409-4C30-A2D8-5001506190DC}" type="slidenum">
               <a:rPr lang="en-MY" smtClean="0"/>
               <a:t>6</a:t>
             </a:fld>
@@ -1075,7 +1075,7 @@
     </p:spTree>
     <p:extLst>
       <p:ext uri="{BB962C8B-B14F-4D97-AF65-F5344CB8AC3E}">
-        <p14:creationId xmlns:p14="http://schemas.microsoft.com/office/powerpoint/2010/main" val="2321102843"/>
+        <p14:creationId xmlns:p14="http://schemas.microsoft.com/office/powerpoint/2010/main" val="2681469404"/>
       </p:ext>
     </p:extLst>
   </p:cSld>
@@ -1152,7 +1152,7 @@
           <a:bodyPr/>
           <a:lstStyle/>
           <a:p>
-            <a:fld id="{B95B9F5B-E5E1-48FB-8CE6-B8A2B0315A7C}" type="slidenum">
+            <a:fld id="{C0DB382D-0409-4C30-A2D8-5001506190DC}" type="slidenum">
               <a:rPr lang="en-MY" smtClean="0"/>
               <a:t>7</a:t>
             </a:fld>
@@ -1163,7 +1163,7 @@
     </p:spTree>
     <p:extLst>
       <p:ext uri="{BB962C8B-B14F-4D97-AF65-F5344CB8AC3E}">
-        <p14:creationId xmlns:p14="http://schemas.microsoft.com/office/powerpoint/2010/main" val="1587718098"/>
+        <p14:creationId xmlns:p14="http://schemas.microsoft.com/office/powerpoint/2010/main" val="1156988256"/>
       </p:ext>
     </p:extLst>
   </p:cSld>
@@ -1240,7 +1240,7 @@
           <a:bodyPr/>
           <a:lstStyle/>
           <a:p>
-            <a:fld id="{B95B9F5B-E5E1-48FB-8CE6-B8A2B0315A7C}" type="slidenum">
+            <a:fld id="{C0DB382D-0409-4C30-A2D8-5001506190DC}" type="slidenum">
               <a:rPr lang="en-MY" smtClean="0"/>
               <a:t>8</a:t>
             </a:fld>
@@ -1251,7 +1251,7 @@
     </p:spTree>
     <p:extLst>
       <p:ext uri="{BB962C8B-B14F-4D97-AF65-F5344CB8AC3E}">
-        <p14:creationId xmlns:p14="http://schemas.microsoft.com/office/powerpoint/2010/main" val="1292063478"/>
+        <p14:creationId xmlns:p14="http://schemas.microsoft.com/office/powerpoint/2010/main" val="608895604"/>
       </p:ext>
     </p:extLst>
   </p:cSld>
@@ -1328,7 +1328,7 @@
           <a:bodyPr/>
           <a:lstStyle/>
           <a:p>
-            <a:fld id="{B95B9F5B-E5E1-48FB-8CE6-B8A2B0315A7C}" type="slidenum">
+            <a:fld id="{C0DB382D-0409-4C30-A2D8-5001506190DC}" type="slidenum">
               <a:rPr lang="en-MY" smtClean="0"/>
               <a:t>9</a:t>
             </a:fld>
@@ -1339,7 +1339,7 @@
     </p:spTree>
     <p:extLst>
       <p:ext uri="{BB962C8B-B14F-4D97-AF65-F5344CB8AC3E}">
-        <p14:creationId xmlns:p14="http://schemas.microsoft.com/office/powerpoint/2010/main" val="2818551018"/>
+        <p14:creationId xmlns:p14="http://schemas.microsoft.com/office/powerpoint/2010/main" val="1129157277"/>
       </p:ext>
     </p:extLst>
   </p:cSld>
@@ -1371,7 +1371,7 @@
           <p:cNvPr id="2" name="Title 1">
             <a:extLst>
               <a:ext uri="{FF2B5EF4-FFF2-40B4-BE49-F238E27FC236}">
-                <a16:creationId xmlns:a16="http://schemas.microsoft.com/office/drawing/2014/main" id="{6A4E7282-D2FB-3B0D-A1BC-6A8FF147027F}"/>
+                <a16:creationId xmlns:a16="http://schemas.microsoft.com/office/drawing/2014/main" id="{5A262D2E-E4B9-DA74-A213-6ED557FD5A44}"/>
               </a:ext>
             </a:extLst>
           </p:cNvPr>
@@ -1409,7 +1409,7 @@
           <p:cNvPr id="3" name="Subtitle 2">
             <a:extLst>
               <a:ext uri="{FF2B5EF4-FFF2-40B4-BE49-F238E27FC236}">
-                <a16:creationId xmlns:a16="http://schemas.microsoft.com/office/drawing/2014/main" id="{BFDC593A-9920-D997-C457-BE47CEEBD94F}"/>
+                <a16:creationId xmlns:a16="http://schemas.microsoft.com/office/drawing/2014/main" id="{4FF78BE4-0765-D35A-8C11-DBB3292019FE}"/>
               </a:ext>
             </a:extLst>
           </p:cNvPr>
@@ -1480,7 +1480,7 @@
           <p:cNvPr id="4" name="Date Placeholder 3">
             <a:extLst>
               <a:ext uri="{FF2B5EF4-FFF2-40B4-BE49-F238E27FC236}">
-                <a16:creationId xmlns:a16="http://schemas.microsoft.com/office/drawing/2014/main" id="{583A636F-24FF-45D5-79E0-B202F1DFCD7E}"/>
+                <a16:creationId xmlns:a16="http://schemas.microsoft.com/office/drawing/2014/main" id="{4C9D2BF3-A504-098C-33ED-EE03AD4472C8}"/>
               </a:ext>
             </a:extLst>
           </p:cNvPr>
@@ -1496,7 +1496,7 @@
           <a:bodyPr/>
           <a:lstStyle/>
           <a:p>
-            <a:fld id="{E4941AF4-5442-4D03-AE97-29E177614EA2}" type="datetimeFigureOut">
+            <a:fld id="{95C66E42-B421-4974-83E4-933E8FDDFAD5}" type="datetimeFigureOut">
               <a:rPr lang="en-MY" smtClean="0"/>
               <a:t>25/9/2026</a:t>
             </a:fld>
@@ -1509,7 +1509,7 @@
           <p:cNvPr id="5" name="Footer Placeholder 4">
             <a:extLst>
               <a:ext uri="{FF2B5EF4-FFF2-40B4-BE49-F238E27FC236}">
-                <a16:creationId xmlns:a16="http://schemas.microsoft.com/office/drawing/2014/main" id="{00C94228-3FEC-297A-3FAA-DCC965BCEBE4}"/>
+                <a16:creationId xmlns:a16="http://schemas.microsoft.com/office/drawing/2014/main" id="{1939BF93-4A39-65A3-00E0-A258EFA8F45D}"/>
               </a:ext>
             </a:extLst>
           </p:cNvPr>
@@ -1534,7 +1534,7 @@
           <p:cNvPr id="6" name="Slide Number Placeholder 5">
             <a:extLst>
               <a:ext uri="{FF2B5EF4-FFF2-40B4-BE49-F238E27FC236}">
-                <a16:creationId xmlns:a16="http://schemas.microsoft.com/office/drawing/2014/main" id="{62C35CB0-588E-34A5-CBAA-E0FA25D7BDB5}"/>
+                <a16:creationId xmlns:a16="http://schemas.microsoft.com/office/drawing/2014/main" id="{48BB89C9-8025-17EA-54B0-22B815E9F162}"/>
               </a:ext>
             </a:extLst>
           </p:cNvPr>
@@ -1550,7 +1550,7 @@
           <a:bodyPr/>
           <a:lstStyle/>
           <a:p>
-            <a:fld id="{E5463BAE-86B9-468E-AC3E-B0BE159C6AFF}" type="slidenum">
+            <a:fld id="{E797DD9F-5283-436C-9EA7-CCF99750284B}" type="slidenum">
               <a:rPr lang="en-MY" smtClean="0"/>
               <a:t>‹#›</a:t>
             </a:fld>
@@ -1561,7 +1561,7 @@
     </p:spTree>
     <p:extLst>
       <p:ext uri="{BB962C8B-B14F-4D97-AF65-F5344CB8AC3E}">
-        <p14:creationId xmlns:p14="http://schemas.microsoft.com/office/powerpoint/2010/main" val="313962822"/>
+        <p14:creationId xmlns:p14="http://schemas.microsoft.com/office/powerpoint/2010/main" val="1271146481"/>
       </p:ext>
     </p:extLst>
   </p:cSld>
@@ -1593,7 +1593,7 @@
           <p:cNvPr id="2" name="Title 1">
             <a:extLst>
               <a:ext uri="{FF2B5EF4-FFF2-40B4-BE49-F238E27FC236}">
-                <a16:creationId xmlns:a16="http://schemas.microsoft.com/office/drawing/2014/main" id="{7F5266B8-C5AD-57F2-906A-5D99445097C2}"/>
+                <a16:creationId xmlns:a16="http://schemas.microsoft.com/office/drawing/2014/main" id="{3DE02C71-2180-70F7-9A53-3690574601A9}"/>
               </a:ext>
             </a:extLst>
           </p:cNvPr>
@@ -1622,7 +1622,7 @@
           <p:cNvPr id="3" name="Vertical Text Placeholder 2">
             <a:extLst>
               <a:ext uri="{FF2B5EF4-FFF2-40B4-BE49-F238E27FC236}">
-                <a16:creationId xmlns:a16="http://schemas.microsoft.com/office/drawing/2014/main" id="{DCACBD7C-B551-2577-CFA8-9FF011CDA537}"/>
+                <a16:creationId xmlns:a16="http://schemas.microsoft.com/office/drawing/2014/main" id="{24E08154-B803-D08D-4241-17110E77CB70}"/>
               </a:ext>
             </a:extLst>
           </p:cNvPr>
@@ -1680,7 +1680,7 @@
           <p:cNvPr id="4" name="Date Placeholder 3">
             <a:extLst>
               <a:ext uri="{FF2B5EF4-FFF2-40B4-BE49-F238E27FC236}">
-                <a16:creationId xmlns:a16="http://schemas.microsoft.com/office/drawing/2014/main" id="{F7CF1EEA-E574-6F35-7DFD-34A022D07D30}"/>
+                <a16:creationId xmlns:a16="http://schemas.microsoft.com/office/drawing/2014/main" id="{4ED1FD63-338D-5C97-EA63-334AD83901D1}"/>
               </a:ext>
             </a:extLst>
           </p:cNvPr>
@@ -1696,7 +1696,7 @@
           <a:bodyPr/>
           <a:lstStyle/>
           <a:p>
-            <a:fld id="{E4941AF4-5442-4D03-AE97-29E177614EA2}" type="datetimeFigureOut">
+            <a:fld id="{95C66E42-B421-4974-83E4-933E8FDDFAD5}" type="datetimeFigureOut">
               <a:rPr lang="en-MY" smtClean="0"/>
               <a:t>25/9/2026</a:t>
             </a:fld>
@@ -1709,7 +1709,7 @@
           <p:cNvPr id="5" name="Footer Placeholder 4">
             <a:extLst>
               <a:ext uri="{FF2B5EF4-FFF2-40B4-BE49-F238E27FC236}">
-                <a16:creationId xmlns:a16="http://schemas.microsoft.com/office/drawing/2014/main" id="{95FE1BC2-019C-FFF7-A1E6-8B89ACAE377A}"/>
+                <a16:creationId xmlns:a16="http://schemas.microsoft.com/office/drawing/2014/main" id="{4456C75B-13C9-A3A5-0040-1A5D7D342D97}"/>
               </a:ext>
             </a:extLst>
           </p:cNvPr>
@@ -1734,7 +1734,7 @@
           <p:cNvPr id="6" name="Slide Number Placeholder 5">
             <a:extLst>
               <a:ext uri="{FF2B5EF4-FFF2-40B4-BE49-F238E27FC236}">
-                <a16:creationId xmlns:a16="http://schemas.microsoft.com/office/drawing/2014/main" id="{FCF387B3-8024-B4C5-CA20-D96D4CFAE9B8}"/>
+                <a16:creationId xmlns:a16="http://schemas.microsoft.com/office/drawing/2014/main" id="{5815C409-37B2-6C4D-FCA5-57899EDCBAAA}"/>
               </a:ext>
             </a:extLst>
           </p:cNvPr>
@@ -1750,7 +1750,7 @@
           <a:bodyPr/>
           <a:lstStyle/>
           <a:p>
-            <a:fld id="{E5463BAE-86B9-468E-AC3E-B0BE159C6AFF}" type="slidenum">
+            <a:fld id="{E797DD9F-5283-436C-9EA7-CCF99750284B}" type="slidenum">
               <a:rPr lang="en-MY" smtClean="0"/>
               <a:t>‹#›</a:t>
             </a:fld>
@@ -1761,7 +1761,7 @@
     </p:spTree>
     <p:extLst>
       <p:ext uri="{BB962C8B-B14F-4D97-AF65-F5344CB8AC3E}">
-        <p14:creationId xmlns:p14="http://schemas.microsoft.com/office/powerpoint/2010/main" val="3592890229"/>
+        <p14:creationId xmlns:p14="http://schemas.microsoft.com/office/powerpoint/2010/main" val="3132865851"/>
       </p:ext>
     </p:extLst>
   </p:cSld>
@@ -1793,7 +1793,7 @@
           <p:cNvPr id="2" name="Vertical Title 1">
             <a:extLst>
               <a:ext uri="{FF2B5EF4-FFF2-40B4-BE49-F238E27FC236}">
-                <a16:creationId xmlns:a16="http://schemas.microsoft.com/office/drawing/2014/main" id="{3283596F-3294-0A93-7508-E2AF9FFED254}"/>
+                <a16:creationId xmlns:a16="http://schemas.microsoft.com/office/drawing/2014/main" id="{DE203804-A345-B6E4-3CF3-75878E892103}"/>
               </a:ext>
             </a:extLst>
           </p:cNvPr>
@@ -1827,7 +1827,7 @@
           <p:cNvPr id="3" name="Vertical Text Placeholder 2">
             <a:extLst>
               <a:ext uri="{FF2B5EF4-FFF2-40B4-BE49-F238E27FC236}">
-                <a16:creationId xmlns:a16="http://schemas.microsoft.com/office/drawing/2014/main" id="{CA030B86-E0AA-6068-EB4F-78D0603D8267}"/>
+                <a16:creationId xmlns:a16="http://schemas.microsoft.com/office/drawing/2014/main" id="{0A2E4362-940A-6608-D59E-61425F466034}"/>
               </a:ext>
             </a:extLst>
           </p:cNvPr>
@@ -1890,7 +1890,7 @@
           <p:cNvPr id="4" name="Date Placeholder 3">
             <a:extLst>
               <a:ext uri="{FF2B5EF4-FFF2-40B4-BE49-F238E27FC236}">
-                <a16:creationId xmlns:a16="http://schemas.microsoft.com/office/drawing/2014/main" id="{1C6CF91A-F088-43C1-BCE9-E74599EBCE4D}"/>
+                <a16:creationId xmlns:a16="http://schemas.microsoft.com/office/drawing/2014/main" id="{CFD1577C-BBBC-40BD-A925-C8256E81223B}"/>
               </a:ext>
             </a:extLst>
           </p:cNvPr>
@@ -1906,7 +1906,7 @@
           <a:bodyPr/>
           <a:lstStyle/>
           <a:p>
-            <a:fld id="{E4941AF4-5442-4D03-AE97-29E177614EA2}" type="datetimeFigureOut">
+            <a:fld id="{95C66E42-B421-4974-83E4-933E8FDDFAD5}" type="datetimeFigureOut">
               <a:rPr lang="en-MY" smtClean="0"/>
               <a:t>25/9/2026</a:t>
             </a:fld>
@@ -1919,7 +1919,7 @@
           <p:cNvPr id="5" name="Footer Placeholder 4">
             <a:extLst>
               <a:ext uri="{FF2B5EF4-FFF2-40B4-BE49-F238E27FC236}">
-                <a16:creationId xmlns:a16="http://schemas.microsoft.com/office/drawing/2014/main" id="{A925FE95-4B8A-B94C-7DF7-CAEE6412CE60}"/>
+                <a16:creationId xmlns:a16="http://schemas.microsoft.com/office/drawing/2014/main" id="{EBCD4A7F-BC44-1D32-816E-1B951ED9C9E2}"/>
               </a:ext>
             </a:extLst>
           </p:cNvPr>
@@ -1944,7 +1944,7 @@
           <p:cNvPr id="6" name="Slide Number Placeholder 5">
             <a:extLst>
               <a:ext uri="{FF2B5EF4-FFF2-40B4-BE49-F238E27FC236}">
-                <a16:creationId xmlns:a16="http://schemas.microsoft.com/office/drawing/2014/main" id="{29F0F0CD-1A01-4B29-03F0-5B955B225093}"/>
+                <a16:creationId xmlns:a16="http://schemas.microsoft.com/office/drawing/2014/main" id="{BCAA5C8F-8FD2-C5A7-FDA9-18B2AB417C76}"/>
               </a:ext>
             </a:extLst>
           </p:cNvPr>
@@ -1960,7 +1960,7 @@
           <a:bodyPr/>
           <a:lstStyle/>
           <a:p>
-            <a:fld id="{E5463BAE-86B9-468E-AC3E-B0BE159C6AFF}" type="slidenum">
+            <a:fld id="{E797DD9F-5283-436C-9EA7-CCF99750284B}" type="slidenum">
               <a:rPr lang="en-MY" smtClean="0"/>
               <a:t>‹#›</a:t>
             </a:fld>
@@ -1971,7 +1971,7 @@
     </p:spTree>
     <p:extLst>
       <p:ext uri="{BB962C8B-B14F-4D97-AF65-F5344CB8AC3E}">
-        <p14:creationId xmlns:p14="http://schemas.microsoft.com/office/powerpoint/2010/main" val="828818179"/>
+        <p14:creationId xmlns:p14="http://schemas.microsoft.com/office/powerpoint/2010/main" val="746927021"/>
       </p:ext>
     </p:extLst>
   </p:cSld>
@@ -2003,7 +2003,7 @@
           <p:cNvPr id="2" name="Title 1">
             <a:extLst>
               <a:ext uri="{FF2B5EF4-FFF2-40B4-BE49-F238E27FC236}">
-                <a16:creationId xmlns:a16="http://schemas.microsoft.com/office/drawing/2014/main" id="{6A97794D-5730-D964-D677-DC84ABB80C96}"/>
+                <a16:creationId xmlns:a16="http://schemas.microsoft.com/office/drawing/2014/main" id="{3ED66233-0B98-9409-02A5-6D9088763349}"/>
               </a:ext>
             </a:extLst>
           </p:cNvPr>
@@ -2032,7 +2032,7 @@
           <p:cNvPr id="3" name="Content Placeholder 2">
             <a:extLst>
               <a:ext uri="{FF2B5EF4-FFF2-40B4-BE49-F238E27FC236}">
-                <a16:creationId xmlns:a16="http://schemas.microsoft.com/office/drawing/2014/main" id="{A7D0D82A-FCDD-8D1F-5003-081CD4515719}"/>
+                <a16:creationId xmlns:a16="http://schemas.microsoft.com/office/drawing/2014/main" id="{656424FB-7342-0ACB-92E2-779851109378}"/>
               </a:ext>
             </a:extLst>
           </p:cNvPr>
@@ -2090,7 +2090,7 @@
           <p:cNvPr id="4" name="Date Placeholder 3">
             <a:extLst>
               <a:ext uri="{FF2B5EF4-FFF2-40B4-BE49-F238E27FC236}">
-                <a16:creationId xmlns:a16="http://schemas.microsoft.com/office/drawing/2014/main" id="{033CEA52-CDEC-AE61-0E3B-58AFC377AC94}"/>
+                <a16:creationId xmlns:a16="http://schemas.microsoft.com/office/drawing/2014/main" id="{5056C507-0906-BBF2-79A9-1245A00C460A}"/>
               </a:ext>
             </a:extLst>
           </p:cNvPr>
@@ -2106,7 +2106,7 @@
           <a:bodyPr/>
           <a:lstStyle/>
           <a:p>
-            <a:fld id="{E4941AF4-5442-4D03-AE97-29E177614EA2}" type="datetimeFigureOut">
+            <a:fld id="{95C66E42-B421-4974-83E4-933E8FDDFAD5}" type="datetimeFigureOut">
               <a:rPr lang="en-MY" smtClean="0"/>
               <a:t>25/9/2026</a:t>
             </a:fld>
@@ -2119,7 +2119,7 @@
           <p:cNvPr id="5" name="Footer Placeholder 4">
             <a:extLst>
               <a:ext uri="{FF2B5EF4-FFF2-40B4-BE49-F238E27FC236}">
-                <a16:creationId xmlns:a16="http://schemas.microsoft.com/office/drawing/2014/main" id="{E0F8D648-6842-FC96-E952-50A74627F8D1}"/>
+                <a16:creationId xmlns:a16="http://schemas.microsoft.com/office/drawing/2014/main" id="{CCE3305B-9611-4285-3547-0926D36802D1}"/>
               </a:ext>
             </a:extLst>
           </p:cNvPr>
@@ -2144,7 +2144,7 @@
           <p:cNvPr id="6" name="Slide Number Placeholder 5">
             <a:extLst>
               <a:ext uri="{FF2B5EF4-FFF2-40B4-BE49-F238E27FC236}">
-                <a16:creationId xmlns:a16="http://schemas.microsoft.com/office/drawing/2014/main" id="{AE104D53-F4E7-AAB6-7157-1068BD0F8DDD}"/>
+                <a16:creationId xmlns:a16="http://schemas.microsoft.com/office/drawing/2014/main" id="{E222FD82-F49D-E013-EB33-FCF62982C0C0}"/>
               </a:ext>
             </a:extLst>
           </p:cNvPr>
@@ -2160,7 +2160,7 @@
           <a:bodyPr/>
           <a:lstStyle/>
           <a:p>
-            <a:fld id="{E5463BAE-86B9-468E-AC3E-B0BE159C6AFF}" type="slidenum">
+            <a:fld id="{E797DD9F-5283-436C-9EA7-CCF99750284B}" type="slidenum">
               <a:rPr lang="en-MY" smtClean="0"/>
               <a:t>‹#›</a:t>
             </a:fld>
@@ -2171,7 +2171,7 @@
     </p:spTree>
     <p:extLst>
       <p:ext uri="{BB962C8B-B14F-4D97-AF65-F5344CB8AC3E}">
-        <p14:creationId xmlns:p14="http://schemas.microsoft.com/office/powerpoint/2010/main" val="3297628362"/>
+        <p14:creationId xmlns:p14="http://schemas.microsoft.com/office/powerpoint/2010/main" val="361445704"/>
       </p:ext>
     </p:extLst>
   </p:cSld>
@@ -2203,7 +2203,7 @@
           <p:cNvPr id="2" name="Title 1">
             <a:extLst>
               <a:ext uri="{FF2B5EF4-FFF2-40B4-BE49-F238E27FC236}">
-                <a16:creationId xmlns:a16="http://schemas.microsoft.com/office/drawing/2014/main" id="{36EC0539-DDD0-5FD8-7099-8BB6F6310AB1}"/>
+                <a16:creationId xmlns:a16="http://schemas.microsoft.com/office/drawing/2014/main" id="{2682179E-C646-4A0B-E3EC-200B60C617B5}"/>
               </a:ext>
             </a:extLst>
           </p:cNvPr>
@@ -2241,7 +2241,7 @@
           <p:cNvPr id="3" name="Text Placeholder 2">
             <a:extLst>
               <a:ext uri="{FF2B5EF4-FFF2-40B4-BE49-F238E27FC236}">
-                <a16:creationId xmlns:a16="http://schemas.microsoft.com/office/drawing/2014/main" id="{D1C20192-FFED-FCB0-7C34-747370291DC3}"/>
+                <a16:creationId xmlns:a16="http://schemas.microsoft.com/office/drawing/2014/main" id="{C220042D-56DE-BFC4-3A9E-1B20A90E9989}"/>
               </a:ext>
             </a:extLst>
           </p:cNvPr>
@@ -2366,7 +2366,7 @@
           <p:cNvPr id="4" name="Date Placeholder 3">
             <a:extLst>
               <a:ext uri="{FF2B5EF4-FFF2-40B4-BE49-F238E27FC236}">
-                <a16:creationId xmlns:a16="http://schemas.microsoft.com/office/drawing/2014/main" id="{F1E90086-01C4-3950-46B6-724267B57B97}"/>
+                <a16:creationId xmlns:a16="http://schemas.microsoft.com/office/drawing/2014/main" id="{2B5F0160-1E90-7CEF-26A1-96FCA46A2A13}"/>
               </a:ext>
             </a:extLst>
           </p:cNvPr>
@@ -2382,7 +2382,7 @@
           <a:bodyPr/>
           <a:lstStyle/>
           <a:p>
-            <a:fld id="{E4941AF4-5442-4D03-AE97-29E177614EA2}" type="datetimeFigureOut">
+            <a:fld id="{95C66E42-B421-4974-83E4-933E8FDDFAD5}" type="datetimeFigureOut">
               <a:rPr lang="en-MY" smtClean="0"/>
               <a:t>25/9/2026</a:t>
             </a:fld>
@@ -2395,7 +2395,7 @@
           <p:cNvPr id="5" name="Footer Placeholder 4">
             <a:extLst>
               <a:ext uri="{FF2B5EF4-FFF2-40B4-BE49-F238E27FC236}">
-                <a16:creationId xmlns:a16="http://schemas.microsoft.com/office/drawing/2014/main" id="{C64F8520-6309-E2CE-0BB0-251D3D4274A0}"/>
+                <a16:creationId xmlns:a16="http://schemas.microsoft.com/office/drawing/2014/main" id="{C9C27881-6B7E-12CD-DEBB-1B06605E5E83}"/>
               </a:ext>
             </a:extLst>
           </p:cNvPr>
@@ -2420,7 +2420,7 @@
           <p:cNvPr id="6" name="Slide Number Placeholder 5">
             <a:extLst>
               <a:ext uri="{FF2B5EF4-FFF2-40B4-BE49-F238E27FC236}">
-                <a16:creationId xmlns:a16="http://schemas.microsoft.com/office/drawing/2014/main" id="{9378AA76-E266-436F-797D-7C4431E6E35E}"/>
+                <a16:creationId xmlns:a16="http://schemas.microsoft.com/office/drawing/2014/main" id="{C43EF96A-597E-94F8-FD9C-CF40781D2F2D}"/>
               </a:ext>
             </a:extLst>
           </p:cNvPr>
@@ -2436,7 +2436,7 @@
           <a:bodyPr/>
           <a:lstStyle/>
           <a:p>
-            <a:fld id="{E5463BAE-86B9-468E-AC3E-B0BE159C6AFF}" type="slidenum">
+            <a:fld id="{E797DD9F-5283-436C-9EA7-CCF99750284B}" type="slidenum">
               <a:rPr lang="en-MY" smtClean="0"/>
               <a:t>‹#›</a:t>
             </a:fld>
@@ -2447,7 +2447,7 @@
     </p:spTree>
     <p:extLst>
       <p:ext uri="{BB962C8B-B14F-4D97-AF65-F5344CB8AC3E}">
-        <p14:creationId xmlns:p14="http://schemas.microsoft.com/office/powerpoint/2010/main" val="2014534003"/>
+        <p14:creationId xmlns:p14="http://schemas.microsoft.com/office/powerpoint/2010/main" val="2476404145"/>
       </p:ext>
     </p:extLst>
   </p:cSld>
@@ -2479,7 +2479,7 @@
           <p:cNvPr id="2" name="Title 1">
             <a:extLst>
               <a:ext uri="{FF2B5EF4-FFF2-40B4-BE49-F238E27FC236}">
-                <a16:creationId xmlns:a16="http://schemas.microsoft.com/office/drawing/2014/main" id="{2574F510-72C8-8E01-DCA1-A53165D07990}"/>
+                <a16:creationId xmlns:a16="http://schemas.microsoft.com/office/drawing/2014/main" id="{439AC515-7FC2-23DB-E219-BD80E23317EB}"/>
               </a:ext>
             </a:extLst>
           </p:cNvPr>
@@ -2508,7 +2508,7 @@
           <p:cNvPr id="3" name="Content Placeholder 2">
             <a:extLst>
               <a:ext uri="{FF2B5EF4-FFF2-40B4-BE49-F238E27FC236}">
-                <a16:creationId xmlns:a16="http://schemas.microsoft.com/office/drawing/2014/main" id="{5F5351F8-8421-247C-6328-44E9831FB4A8}"/>
+                <a16:creationId xmlns:a16="http://schemas.microsoft.com/office/drawing/2014/main" id="{2C8BE66B-6020-6602-BFB5-08144E702533}"/>
               </a:ext>
             </a:extLst>
           </p:cNvPr>
@@ -2571,7 +2571,7 @@
           <p:cNvPr id="4" name="Content Placeholder 3">
             <a:extLst>
               <a:ext uri="{FF2B5EF4-FFF2-40B4-BE49-F238E27FC236}">
-                <a16:creationId xmlns:a16="http://schemas.microsoft.com/office/drawing/2014/main" id="{8876E537-A668-EE20-4141-6E229271ED53}"/>
+                <a16:creationId xmlns:a16="http://schemas.microsoft.com/office/drawing/2014/main" id="{52650114-534A-6C72-C2E9-06B8AAC0CE35}"/>
               </a:ext>
             </a:extLst>
           </p:cNvPr>
@@ -2634,7 +2634,7 @@
           <p:cNvPr id="5" name="Date Placeholder 4">
             <a:extLst>
               <a:ext uri="{FF2B5EF4-FFF2-40B4-BE49-F238E27FC236}">
-                <a16:creationId xmlns:a16="http://schemas.microsoft.com/office/drawing/2014/main" id="{7623B40E-1185-4942-34D3-2991188CEEB8}"/>
+                <a16:creationId xmlns:a16="http://schemas.microsoft.com/office/drawing/2014/main" id="{43CC94B4-9182-286B-1E3D-377DFAB27A10}"/>
               </a:ext>
             </a:extLst>
           </p:cNvPr>
@@ -2650,7 +2650,7 @@
           <a:bodyPr/>
           <a:lstStyle/>
           <a:p>
-            <a:fld id="{E4941AF4-5442-4D03-AE97-29E177614EA2}" type="datetimeFigureOut">
+            <a:fld id="{95C66E42-B421-4974-83E4-933E8FDDFAD5}" type="datetimeFigureOut">
               <a:rPr lang="en-MY" smtClean="0"/>
               <a:t>25/9/2026</a:t>
             </a:fld>
@@ -2663,7 +2663,7 @@
           <p:cNvPr id="6" name="Footer Placeholder 5">
             <a:extLst>
               <a:ext uri="{FF2B5EF4-FFF2-40B4-BE49-F238E27FC236}">
-                <a16:creationId xmlns:a16="http://schemas.microsoft.com/office/drawing/2014/main" id="{AFF5BCE9-9624-D314-58C1-B7B85F15CAC5}"/>
+                <a16:creationId xmlns:a16="http://schemas.microsoft.com/office/drawing/2014/main" id="{CE75CD75-E797-1648-0D81-4C788DCCD79E}"/>
               </a:ext>
             </a:extLst>
           </p:cNvPr>
@@ -2688,7 +2688,7 @@
           <p:cNvPr id="7" name="Slide Number Placeholder 6">
             <a:extLst>
               <a:ext uri="{FF2B5EF4-FFF2-40B4-BE49-F238E27FC236}">
-                <a16:creationId xmlns:a16="http://schemas.microsoft.com/office/drawing/2014/main" id="{C17B72F4-73B0-5572-EFDE-C7DE63153D42}"/>
+                <a16:creationId xmlns:a16="http://schemas.microsoft.com/office/drawing/2014/main" id="{BD52CD82-875C-6CCF-92B5-C2112A9A88D8}"/>
               </a:ext>
             </a:extLst>
           </p:cNvPr>
@@ -2704,7 +2704,7 @@
           <a:bodyPr/>
           <a:lstStyle/>
           <a:p>
-            <a:fld id="{E5463BAE-86B9-468E-AC3E-B0BE159C6AFF}" type="slidenum">
+            <a:fld id="{E797DD9F-5283-436C-9EA7-CCF99750284B}" type="slidenum">
               <a:rPr lang="en-MY" smtClean="0"/>
               <a:t>‹#›</a:t>
             </a:fld>
@@ -2715,7 +2715,7 @@
     </p:spTree>
     <p:extLst>
       <p:ext uri="{BB962C8B-B14F-4D97-AF65-F5344CB8AC3E}">
-        <p14:creationId xmlns:p14="http://schemas.microsoft.com/office/powerpoint/2010/main" val="4107502110"/>
+        <p14:creationId xmlns:p14="http://schemas.microsoft.com/office/powerpoint/2010/main" val="1359007219"/>
       </p:ext>
     </p:extLst>
   </p:cSld>
@@ -2747,7 +2747,7 @@
           <p:cNvPr id="2" name="Title 1">
             <a:extLst>
               <a:ext uri="{FF2B5EF4-FFF2-40B4-BE49-F238E27FC236}">
-                <a16:creationId xmlns:a16="http://schemas.microsoft.com/office/drawing/2014/main" id="{0BBC0DFE-FFBE-0398-55C5-26E933A3D262}"/>
+                <a16:creationId xmlns:a16="http://schemas.microsoft.com/office/drawing/2014/main" id="{600F9D51-126A-0287-9E4E-E0D98D450CCC}"/>
               </a:ext>
             </a:extLst>
           </p:cNvPr>
@@ -2781,7 +2781,7 @@
           <p:cNvPr id="3" name="Text Placeholder 2">
             <a:extLst>
               <a:ext uri="{FF2B5EF4-FFF2-40B4-BE49-F238E27FC236}">
-                <a16:creationId xmlns:a16="http://schemas.microsoft.com/office/drawing/2014/main" id="{6E48933F-640E-A2D4-02E6-E0098CD40836}"/>
+                <a16:creationId xmlns:a16="http://schemas.microsoft.com/office/drawing/2014/main" id="{D98BDCDB-82EA-7C04-B5CF-EA7D2D4770B8}"/>
               </a:ext>
             </a:extLst>
           </p:cNvPr>
@@ -2852,7 +2852,7 @@
           <p:cNvPr id="4" name="Content Placeholder 3">
             <a:extLst>
               <a:ext uri="{FF2B5EF4-FFF2-40B4-BE49-F238E27FC236}">
-                <a16:creationId xmlns:a16="http://schemas.microsoft.com/office/drawing/2014/main" id="{70E0DAAE-9000-59E7-CDD3-406FE3AC570C}"/>
+                <a16:creationId xmlns:a16="http://schemas.microsoft.com/office/drawing/2014/main" id="{60C5844A-F8D0-5DA7-57ED-B2122626A025}"/>
               </a:ext>
             </a:extLst>
           </p:cNvPr>
@@ -2915,7 +2915,7 @@
           <p:cNvPr id="5" name="Text Placeholder 4">
             <a:extLst>
               <a:ext uri="{FF2B5EF4-FFF2-40B4-BE49-F238E27FC236}">
-                <a16:creationId xmlns:a16="http://schemas.microsoft.com/office/drawing/2014/main" id="{7440B7CA-7619-16F9-5E8F-D9836685B62D}"/>
+                <a16:creationId xmlns:a16="http://schemas.microsoft.com/office/drawing/2014/main" id="{7A077B5A-8A80-63AE-A60B-6F8902AAD3BE}"/>
               </a:ext>
             </a:extLst>
           </p:cNvPr>
@@ -2986,7 +2986,7 @@
           <p:cNvPr id="6" name="Content Placeholder 5">
             <a:extLst>
               <a:ext uri="{FF2B5EF4-FFF2-40B4-BE49-F238E27FC236}">
-                <a16:creationId xmlns:a16="http://schemas.microsoft.com/office/drawing/2014/main" id="{33FF5739-63EF-E1A9-E35F-FDFD56086F80}"/>
+                <a16:creationId xmlns:a16="http://schemas.microsoft.com/office/drawing/2014/main" id="{7205EF30-3AE2-3845-967D-0A043D5792C2}"/>
               </a:ext>
             </a:extLst>
           </p:cNvPr>
@@ -3049,7 +3049,7 @@
           <p:cNvPr id="7" name="Date Placeholder 6">
             <a:extLst>
               <a:ext uri="{FF2B5EF4-FFF2-40B4-BE49-F238E27FC236}">
-                <a16:creationId xmlns:a16="http://schemas.microsoft.com/office/drawing/2014/main" id="{A173ADF6-867D-837A-9FBD-FF1592BD2A41}"/>
+                <a16:creationId xmlns:a16="http://schemas.microsoft.com/office/drawing/2014/main" id="{03E3E671-69D9-C503-809B-22934A59ADB7}"/>
               </a:ext>
             </a:extLst>
           </p:cNvPr>
@@ -3065,7 +3065,7 @@
           <a:bodyPr/>
           <a:lstStyle/>
           <a:p>
-            <a:fld id="{E4941AF4-5442-4D03-AE97-29E177614EA2}" type="datetimeFigureOut">
+            <a:fld id="{95C66E42-B421-4974-83E4-933E8FDDFAD5}" type="datetimeFigureOut">
               <a:rPr lang="en-MY" smtClean="0"/>
               <a:t>25/9/2026</a:t>
             </a:fld>
@@ -3078,7 +3078,7 @@
           <p:cNvPr id="8" name="Footer Placeholder 7">
             <a:extLst>
               <a:ext uri="{FF2B5EF4-FFF2-40B4-BE49-F238E27FC236}">
-                <a16:creationId xmlns:a16="http://schemas.microsoft.com/office/drawing/2014/main" id="{5FCA379C-BB59-7D2A-4C5A-3D8399DBC771}"/>
+                <a16:creationId xmlns:a16="http://schemas.microsoft.com/office/drawing/2014/main" id="{DA0EE992-C305-B49A-C0DE-5BD08E7C3E20}"/>
               </a:ext>
             </a:extLst>
           </p:cNvPr>
@@ -3103,7 +3103,7 @@
           <p:cNvPr id="9" name="Slide Number Placeholder 8">
             <a:extLst>
               <a:ext uri="{FF2B5EF4-FFF2-40B4-BE49-F238E27FC236}">
-                <a16:creationId xmlns:a16="http://schemas.microsoft.com/office/drawing/2014/main" id="{5724A010-99F9-3D57-5175-00A34DB4C4DA}"/>
+                <a16:creationId xmlns:a16="http://schemas.microsoft.com/office/drawing/2014/main" id="{4BCCB15D-95E1-048B-4A35-D4F706E86CC4}"/>
               </a:ext>
             </a:extLst>
           </p:cNvPr>
@@ -3119,7 +3119,7 @@
           <a:bodyPr/>
           <a:lstStyle/>
           <a:p>
-            <a:fld id="{E5463BAE-86B9-468E-AC3E-B0BE159C6AFF}" type="slidenum">
+            <a:fld id="{E797DD9F-5283-436C-9EA7-CCF99750284B}" type="slidenum">
               <a:rPr lang="en-MY" smtClean="0"/>
               <a:t>‹#›</a:t>
             </a:fld>
@@ -3130,7 +3130,7 @@
     </p:spTree>
     <p:extLst>
       <p:ext uri="{BB962C8B-B14F-4D97-AF65-F5344CB8AC3E}">
-        <p14:creationId xmlns:p14="http://schemas.microsoft.com/office/powerpoint/2010/main" val="2090480298"/>
+        <p14:creationId xmlns:p14="http://schemas.microsoft.com/office/powerpoint/2010/main" val="3989520625"/>
       </p:ext>
     </p:extLst>
   </p:cSld>
@@ -3162,7 +3162,7 @@
           <p:cNvPr id="2" name="Title 1">
             <a:extLst>
               <a:ext uri="{FF2B5EF4-FFF2-40B4-BE49-F238E27FC236}">
-                <a16:creationId xmlns:a16="http://schemas.microsoft.com/office/drawing/2014/main" id="{9C1323CB-55E8-5DE6-FF21-8F3193EEAFD3}"/>
+                <a16:creationId xmlns:a16="http://schemas.microsoft.com/office/drawing/2014/main" id="{0484A913-4851-AA23-2FB8-89C9ECAA201F}"/>
               </a:ext>
             </a:extLst>
           </p:cNvPr>
@@ -3191,7 +3191,7 @@
           <p:cNvPr id="3" name="Date Placeholder 2">
             <a:extLst>
               <a:ext uri="{FF2B5EF4-FFF2-40B4-BE49-F238E27FC236}">
-                <a16:creationId xmlns:a16="http://schemas.microsoft.com/office/drawing/2014/main" id="{8B848D56-85C8-4DA6-7E3B-08330AB463DC}"/>
+                <a16:creationId xmlns:a16="http://schemas.microsoft.com/office/drawing/2014/main" id="{5298D409-30EA-CB9E-1B70-0E6291E37F32}"/>
               </a:ext>
             </a:extLst>
           </p:cNvPr>
@@ -3207,7 +3207,7 @@
           <a:bodyPr/>
           <a:lstStyle/>
           <a:p>
-            <a:fld id="{E4941AF4-5442-4D03-AE97-29E177614EA2}" type="datetimeFigureOut">
+            <a:fld id="{95C66E42-B421-4974-83E4-933E8FDDFAD5}" type="datetimeFigureOut">
               <a:rPr lang="en-MY" smtClean="0"/>
               <a:t>25/9/2026</a:t>
             </a:fld>
@@ -3220,7 +3220,7 @@
           <p:cNvPr id="4" name="Footer Placeholder 3">
             <a:extLst>
               <a:ext uri="{FF2B5EF4-FFF2-40B4-BE49-F238E27FC236}">
-                <a16:creationId xmlns:a16="http://schemas.microsoft.com/office/drawing/2014/main" id="{38BCC73E-B92D-3B3A-0D70-471E0799C9F5}"/>
+                <a16:creationId xmlns:a16="http://schemas.microsoft.com/office/drawing/2014/main" id="{2A501929-C22D-F7B6-BB6D-D1956B2736A4}"/>
               </a:ext>
             </a:extLst>
           </p:cNvPr>
@@ -3245,7 +3245,7 @@
           <p:cNvPr id="5" name="Slide Number Placeholder 4">
             <a:extLst>
               <a:ext uri="{FF2B5EF4-FFF2-40B4-BE49-F238E27FC236}">
-                <a16:creationId xmlns:a16="http://schemas.microsoft.com/office/drawing/2014/main" id="{A8FE65ED-72B3-98D7-6265-A9293C8E572E}"/>
+                <a16:creationId xmlns:a16="http://schemas.microsoft.com/office/drawing/2014/main" id="{634C04C5-1C10-7224-12FC-DF3B906DF3D1}"/>
               </a:ext>
             </a:extLst>
           </p:cNvPr>
@@ -3261,7 +3261,7 @@
           <a:bodyPr/>
           <a:lstStyle/>
           <a:p>
-            <a:fld id="{E5463BAE-86B9-468E-AC3E-B0BE159C6AFF}" type="slidenum">
+            <a:fld id="{E797DD9F-5283-436C-9EA7-CCF99750284B}" type="slidenum">
               <a:rPr lang="en-MY" smtClean="0"/>
               <a:t>‹#›</a:t>
             </a:fld>
@@ -3272,7 +3272,7 @@
     </p:spTree>
     <p:extLst>
       <p:ext uri="{BB962C8B-B14F-4D97-AF65-F5344CB8AC3E}">
-        <p14:creationId xmlns:p14="http://schemas.microsoft.com/office/powerpoint/2010/main" val="3740302906"/>
+        <p14:creationId xmlns:p14="http://schemas.microsoft.com/office/powerpoint/2010/main" val="2311490217"/>
       </p:ext>
     </p:extLst>
   </p:cSld>
@@ -3304,7 +3304,7 @@
           <p:cNvPr id="2" name="Date Placeholder 1">
             <a:extLst>
               <a:ext uri="{FF2B5EF4-FFF2-40B4-BE49-F238E27FC236}">
-                <a16:creationId xmlns:a16="http://schemas.microsoft.com/office/drawing/2014/main" id="{86A3F19A-563B-04AC-072D-20898DE8804C}"/>
+                <a16:creationId xmlns:a16="http://schemas.microsoft.com/office/drawing/2014/main" id="{C5AAA5C4-FC1B-5A51-8BB4-BC5C53ECAB29}"/>
               </a:ext>
             </a:extLst>
           </p:cNvPr>
@@ -3320,7 +3320,7 @@
           <a:bodyPr/>
           <a:lstStyle/>
           <a:p>
-            <a:fld id="{E4941AF4-5442-4D03-AE97-29E177614EA2}" type="datetimeFigureOut">
+            <a:fld id="{95C66E42-B421-4974-83E4-933E8FDDFAD5}" type="datetimeFigureOut">
               <a:rPr lang="en-MY" smtClean="0"/>
               <a:t>25/9/2026</a:t>
             </a:fld>
@@ -3333,7 +3333,7 @@
           <p:cNvPr id="3" name="Footer Placeholder 2">
             <a:extLst>
               <a:ext uri="{FF2B5EF4-FFF2-40B4-BE49-F238E27FC236}">
-                <a16:creationId xmlns:a16="http://schemas.microsoft.com/office/drawing/2014/main" id="{B8266712-94A2-4688-83BC-2C5ADDA57D94}"/>
+                <a16:creationId xmlns:a16="http://schemas.microsoft.com/office/drawing/2014/main" id="{9384D01D-BF3B-AD31-475E-E47F5AAF548B}"/>
               </a:ext>
             </a:extLst>
           </p:cNvPr>
@@ -3358,7 +3358,7 @@
           <p:cNvPr id="4" name="Slide Number Placeholder 3">
             <a:extLst>
               <a:ext uri="{FF2B5EF4-FFF2-40B4-BE49-F238E27FC236}">
-                <a16:creationId xmlns:a16="http://schemas.microsoft.com/office/drawing/2014/main" id="{13CAD264-E5D6-FD2D-0034-906FCC666A57}"/>
+                <a16:creationId xmlns:a16="http://schemas.microsoft.com/office/drawing/2014/main" id="{C43043CE-F463-2AE5-734C-6F34992E8294}"/>
               </a:ext>
             </a:extLst>
           </p:cNvPr>
@@ -3374,7 +3374,7 @@
           <a:bodyPr/>
           <a:lstStyle/>
           <a:p>
-            <a:fld id="{E5463BAE-86B9-468E-AC3E-B0BE159C6AFF}" type="slidenum">
+            <a:fld id="{E797DD9F-5283-436C-9EA7-CCF99750284B}" type="slidenum">
               <a:rPr lang="en-MY" smtClean="0"/>
               <a:t>‹#›</a:t>
             </a:fld>
@@ -3385,7 +3385,7 @@
     </p:spTree>
     <p:extLst>
       <p:ext uri="{BB962C8B-B14F-4D97-AF65-F5344CB8AC3E}">
-        <p14:creationId xmlns:p14="http://schemas.microsoft.com/office/powerpoint/2010/main" val="3482101267"/>
+        <p14:creationId xmlns:p14="http://schemas.microsoft.com/office/powerpoint/2010/main" val="1767179505"/>
       </p:ext>
     </p:extLst>
   </p:cSld>
@@ -3417,7 +3417,7 @@
           <p:cNvPr id="2" name="Title 1">
             <a:extLst>
               <a:ext uri="{FF2B5EF4-FFF2-40B4-BE49-F238E27FC236}">
-                <a16:creationId xmlns:a16="http://schemas.microsoft.com/office/drawing/2014/main" id="{6C69B3E2-F69E-2F8B-1B8A-87DE1F86A2CD}"/>
+                <a16:creationId xmlns:a16="http://schemas.microsoft.com/office/drawing/2014/main" id="{08B37EC9-7A4A-0603-B6BB-EF9152A1BB0E}"/>
               </a:ext>
             </a:extLst>
           </p:cNvPr>
@@ -3455,7 +3455,7 @@
           <p:cNvPr id="3" name="Content Placeholder 2">
             <a:extLst>
               <a:ext uri="{FF2B5EF4-FFF2-40B4-BE49-F238E27FC236}">
-                <a16:creationId xmlns:a16="http://schemas.microsoft.com/office/drawing/2014/main" id="{D36C3337-1E2E-191C-E251-F6EEBE1A8D7A}"/>
+                <a16:creationId xmlns:a16="http://schemas.microsoft.com/office/drawing/2014/main" id="{F20AA3FC-BAD0-98B5-6DD0-9A2138A09A24}"/>
               </a:ext>
             </a:extLst>
           </p:cNvPr>
@@ -3546,7 +3546,7 @@
           <p:cNvPr id="4" name="Text Placeholder 3">
             <a:extLst>
               <a:ext uri="{FF2B5EF4-FFF2-40B4-BE49-F238E27FC236}">
-                <a16:creationId xmlns:a16="http://schemas.microsoft.com/office/drawing/2014/main" id="{14E9D84B-4C4B-0E10-CE46-455CDC766E3C}"/>
+                <a16:creationId xmlns:a16="http://schemas.microsoft.com/office/drawing/2014/main" id="{B109324A-2BD9-185B-F507-9076C353A6F5}"/>
               </a:ext>
             </a:extLst>
           </p:cNvPr>
@@ -3617,7 +3617,7 @@
           <p:cNvPr id="5" name="Date Placeholder 4">
             <a:extLst>
               <a:ext uri="{FF2B5EF4-FFF2-40B4-BE49-F238E27FC236}">
-                <a16:creationId xmlns:a16="http://schemas.microsoft.com/office/drawing/2014/main" id="{3328421D-D0FA-D7D7-5C51-D05587FFA4F7}"/>
+                <a16:creationId xmlns:a16="http://schemas.microsoft.com/office/drawing/2014/main" id="{CCB58C45-BE6B-2480-7960-F33783592561}"/>
               </a:ext>
             </a:extLst>
           </p:cNvPr>
@@ -3633,7 +3633,7 @@
           <a:bodyPr/>
           <a:lstStyle/>
           <a:p>
-            <a:fld id="{E4941AF4-5442-4D03-AE97-29E177614EA2}" type="datetimeFigureOut">
+            <a:fld id="{95C66E42-B421-4974-83E4-933E8FDDFAD5}" type="datetimeFigureOut">
               <a:rPr lang="en-MY" smtClean="0"/>
               <a:t>25/9/2026</a:t>
             </a:fld>
@@ -3646,7 +3646,7 @@
           <p:cNvPr id="6" name="Footer Placeholder 5">
             <a:extLst>
               <a:ext uri="{FF2B5EF4-FFF2-40B4-BE49-F238E27FC236}">
-                <a16:creationId xmlns:a16="http://schemas.microsoft.com/office/drawing/2014/main" id="{6927F074-BD67-9F32-31B6-7D78799C5954}"/>
+                <a16:creationId xmlns:a16="http://schemas.microsoft.com/office/drawing/2014/main" id="{C6E9075F-B662-A20B-8B86-D091CC927E2E}"/>
               </a:ext>
             </a:extLst>
           </p:cNvPr>
@@ -3671,7 +3671,7 @@
           <p:cNvPr id="7" name="Slide Number Placeholder 6">
             <a:extLst>
               <a:ext uri="{FF2B5EF4-FFF2-40B4-BE49-F238E27FC236}">
-                <a16:creationId xmlns:a16="http://schemas.microsoft.com/office/drawing/2014/main" id="{2C601E92-ADF8-0021-94F4-6A4B3135312A}"/>
+                <a16:creationId xmlns:a16="http://schemas.microsoft.com/office/drawing/2014/main" id="{5074621E-ECCD-4D4E-25C7-0C94E5919141}"/>
               </a:ext>
             </a:extLst>
           </p:cNvPr>
@@ -3687,7 +3687,7 @@
           <a:bodyPr/>
           <a:lstStyle/>
           <a:p>
-            <a:fld id="{E5463BAE-86B9-468E-AC3E-B0BE159C6AFF}" type="slidenum">
+            <a:fld id="{E797DD9F-5283-436C-9EA7-CCF99750284B}" type="slidenum">
               <a:rPr lang="en-MY" smtClean="0"/>
               <a:t>‹#›</a:t>
             </a:fld>
@@ -3698,7 +3698,7 @@
     </p:spTree>
     <p:extLst>
       <p:ext uri="{BB962C8B-B14F-4D97-AF65-F5344CB8AC3E}">
-        <p14:creationId xmlns:p14="http://schemas.microsoft.com/office/powerpoint/2010/main" val="3170056941"/>
+        <p14:creationId xmlns:p14="http://schemas.microsoft.com/office/powerpoint/2010/main" val="4111296632"/>
       </p:ext>
     </p:extLst>
   </p:cSld>
@@ -3730,7 +3730,7 @@
           <p:cNvPr id="2" name="Title 1">
             <a:extLst>
               <a:ext uri="{FF2B5EF4-FFF2-40B4-BE49-F238E27FC236}">
-                <a16:creationId xmlns:a16="http://schemas.microsoft.com/office/drawing/2014/main" id="{E878AA2E-80B2-6454-C0EB-9E4658126ED1}"/>
+                <a16:creationId xmlns:a16="http://schemas.microsoft.com/office/drawing/2014/main" id="{6F8E12B8-7117-A573-EE8A-CC40CAD64AF2}"/>
               </a:ext>
             </a:extLst>
           </p:cNvPr>
@@ -3768,7 +3768,7 @@
           <p:cNvPr id="3" name="Picture Placeholder 2">
             <a:extLst>
               <a:ext uri="{FF2B5EF4-FFF2-40B4-BE49-F238E27FC236}">
-                <a16:creationId xmlns:a16="http://schemas.microsoft.com/office/drawing/2014/main" id="{3BB50979-7C26-DB2F-34B1-F09C3744CF8A}"/>
+                <a16:creationId xmlns:a16="http://schemas.microsoft.com/office/drawing/2014/main" id="{8E2E3DBE-B6D2-2557-84BE-952A7B809D5C}"/>
               </a:ext>
             </a:extLst>
           </p:cNvPr>
@@ -3835,7 +3835,7 @@
           <p:cNvPr id="4" name="Text Placeholder 3">
             <a:extLst>
               <a:ext uri="{FF2B5EF4-FFF2-40B4-BE49-F238E27FC236}">
-                <a16:creationId xmlns:a16="http://schemas.microsoft.com/office/drawing/2014/main" id="{75DFA394-11D8-91AC-EFDE-7ABEE5DF418D}"/>
+                <a16:creationId xmlns:a16="http://schemas.microsoft.com/office/drawing/2014/main" id="{B62E4A2C-FFAB-FC33-0E18-C1D869B6916F}"/>
               </a:ext>
             </a:extLst>
           </p:cNvPr>
@@ -3906,7 +3906,7 @@
           <p:cNvPr id="5" name="Date Placeholder 4">
             <a:extLst>
               <a:ext uri="{FF2B5EF4-FFF2-40B4-BE49-F238E27FC236}">
-                <a16:creationId xmlns:a16="http://schemas.microsoft.com/office/drawing/2014/main" id="{6C5A2CA6-43DA-D6A9-F174-AA90CB1E1485}"/>
+                <a16:creationId xmlns:a16="http://schemas.microsoft.com/office/drawing/2014/main" id="{91C8FBB3-F8E9-45BE-B2A5-4870BC638BB8}"/>
               </a:ext>
             </a:extLst>
           </p:cNvPr>
@@ -3922,7 +3922,7 @@
           <a:bodyPr/>
           <a:lstStyle/>
           <a:p>
-            <a:fld id="{E4941AF4-5442-4D03-AE97-29E177614EA2}" type="datetimeFigureOut">
+            <a:fld id="{95C66E42-B421-4974-83E4-933E8FDDFAD5}" type="datetimeFigureOut">
               <a:rPr lang="en-MY" smtClean="0"/>
               <a:t>25/9/2026</a:t>
             </a:fld>
@@ -3935,7 +3935,7 @@
           <p:cNvPr id="6" name="Footer Placeholder 5">
             <a:extLst>
               <a:ext uri="{FF2B5EF4-FFF2-40B4-BE49-F238E27FC236}">
-                <a16:creationId xmlns:a16="http://schemas.microsoft.com/office/drawing/2014/main" id="{4277A66A-FAB5-8B57-B5BF-A4E699563350}"/>
+                <a16:creationId xmlns:a16="http://schemas.microsoft.com/office/drawing/2014/main" id="{96A56768-19A5-F3BC-2454-407818ECC7FD}"/>
               </a:ext>
             </a:extLst>
           </p:cNvPr>
@@ -3960,7 +3960,7 @@
           <p:cNvPr id="7" name="Slide Number Placeholder 6">
             <a:extLst>
               <a:ext uri="{FF2B5EF4-FFF2-40B4-BE49-F238E27FC236}">
-                <a16:creationId xmlns:a16="http://schemas.microsoft.com/office/drawing/2014/main" id="{08C91D51-DDC9-75D4-40F7-C7B80AFB802B}"/>
+                <a16:creationId xmlns:a16="http://schemas.microsoft.com/office/drawing/2014/main" id="{13AAFCBA-9D24-1C02-253F-1E5A75007774}"/>
               </a:ext>
             </a:extLst>
           </p:cNvPr>
@@ -3976,7 +3976,7 @@
           <a:bodyPr/>
           <a:lstStyle/>
           <a:p>
-            <a:fld id="{E5463BAE-86B9-468E-AC3E-B0BE159C6AFF}" type="slidenum">
+            <a:fld id="{E797DD9F-5283-436C-9EA7-CCF99750284B}" type="slidenum">
               <a:rPr lang="en-MY" smtClean="0"/>
               <a:t>‹#›</a:t>
             </a:fld>
@@ -3987,7 +3987,7 @@
     </p:spTree>
     <p:extLst>
       <p:ext uri="{BB962C8B-B14F-4D97-AF65-F5344CB8AC3E}">
-        <p14:creationId xmlns:p14="http://schemas.microsoft.com/office/powerpoint/2010/main" val="2209069986"/>
+        <p14:creationId xmlns:p14="http://schemas.microsoft.com/office/powerpoint/2010/main" val="1968565202"/>
       </p:ext>
     </p:extLst>
   </p:cSld>
@@ -4024,7 +4024,7 @@
           <p:cNvPr id="2" name="Title Placeholder 1">
             <a:extLst>
               <a:ext uri="{FF2B5EF4-FFF2-40B4-BE49-F238E27FC236}">
-                <a16:creationId xmlns:a16="http://schemas.microsoft.com/office/drawing/2014/main" id="{204288E1-8D5A-D795-EABB-81DE9E7889A7}"/>
+                <a16:creationId xmlns:a16="http://schemas.microsoft.com/office/drawing/2014/main" id="{F6A7BEB0-991F-C3FD-DEF8-FF81C8FCAF39}"/>
               </a:ext>
             </a:extLst>
           </p:cNvPr>
@@ -4063,7 +4063,7 @@
           <p:cNvPr id="3" name="Text Placeholder 2">
             <a:extLst>
               <a:ext uri="{FF2B5EF4-FFF2-40B4-BE49-F238E27FC236}">
-                <a16:creationId xmlns:a16="http://schemas.microsoft.com/office/drawing/2014/main" id="{B6C6DEEA-0632-B08F-963E-AB3360A962AE}"/>
+                <a16:creationId xmlns:a16="http://schemas.microsoft.com/office/drawing/2014/main" id="{AFC18650-B36E-6450-9B88-0FC27D190D13}"/>
               </a:ext>
             </a:extLst>
           </p:cNvPr>
@@ -4131,7 +4131,7 @@
           <p:cNvPr id="4" name="Date Placeholder 3">
             <a:extLst>
               <a:ext uri="{FF2B5EF4-FFF2-40B4-BE49-F238E27FC236}">
-                <a16:creationId xmlns:a16="http://schemas.microsoft.com/office/drawing/2014/main" id="{8CA7BAA1-DC56-4DC0-446E-52FD0388EB75}"/>
+                <a16:creationId xmlns:a16="http://schemas.microsoft.com/office/drawing/2014/main" id="{378FAAD9-DD0A-7AF5-BEC1-8656F84E3E55}"/>
               </a:ext>
             </a:extLst>
           </p:cNvPr>
@@ -4165,7 +4165,7 @@
             </a:lvl1pPr>
           </a:lstStyle>
           <a:p>
-            <a:fld id="{E4941AF4-5442-4D03-AE97-29E177614EA2}" type="datetimeFigureOut">
+            <a:fld id="{95C66E42-B421-4974-83E4-933E8FDDFAD5}" type="datetimeFigureOut">
               <a:rPr lang="en-MY" smtClean="0"/>
               <a:t>25/9/2026</a:t>
             </a:fld>
@@ -4178,7 +4178,7 @@
           <p:cNvPr id="5" name="Footer Placeholder 4">
             <a:extLst>
               <a:ext uri="{FF2B5EF4-FFF2-40B4-BE49-F238E27FC236}">
-                <a16:creationId xmlns:a16="http://schemas.microsoft.com/office/drawing/2014/main" id="{79662F95-7CC6-7D75-638D-E628265DB7D3}"/>
+                <a16:creationId xmlns:a16="http://schemas.microsoft.com/office/drawing/2014/main" id="{17A27783-301E-5223-2974-E375A7FB791D}"/>
               </a:ext>
             </a:extLst>
           </p:cNvPr>
@@ -4221,7 +4221,7 @@
           <p:cNvPr id="6" name="Slide Number Placeholder 5">
             <a:extLst>
               <a:ext uri="{FF2B5EF4-FFF2-40B4-BE49-F238E27FC236}">
-                <a16:creationId xmlns:a16="http://schemas.microsoft.com/office/drawing/2014/main" id="{68D07B27-B9BD-77A8-18D2-DAC7B4783DFE}"/>
+                <a16:creationId xmlns:a16="http://schemas.microsoft.com/office/drawing/2014/main" id="{E3E9F045-2AF9-F054-972A-9C0067A264CD}"/>
               </a:ext>
             </a:extLst>
           </p:cNvPr>
@@ -4255,7 +4255,7 @@
             </a:lvl1pPr>
           </a:lstStyle>
           <a:p>
-            <a:fld id="{E5463BAE-86B9-468E-AC3E-B0BE159C6AFF}" type="slidenum">
+            <a:fld id="{E797DD9F-5283-436C-9EA7-CCF99750284B}" type="slidenum">
               <a:rPr lang="en-MY" smtClean="0"/>
               <a:t>‹#›</a:t>
             </a:fld>
@@ -4266,7 +4266,7 @@
     </p:spTree>
     <p:extLst>
       <p:ext uri="{BB962C8B-B14F-4D97-AF65-F5344CB8AC3E}">
-        <p14:creationId xmlns:p14="http://schemas.microsoft.com/office/powerpoint/2010/main" val="3986665009"/>
+        <p14:creationId xmlns:p14="http://schemas.microsoft.com/office/powerpoint/2010/main" val="359960287"/>
       </p:ext>
     </p:extLst>
   </p:cSld>
@@ -4597,7 +4597,7 @@
           <p:cNvPr id="2" name="TextBox 1">
             <a:extLst>
               <a:ext uri="{FF2B5EF4-FFF2-40B4-BE49-F238E27FC236}">
-                <a16:creationId xmlns:a16="http://schemas.microsoft.com/office/drawing/2014/main" id="{8785191C-6688-8DFC-D1FA-8D286D28698A}"/>
+                <a16:creationId xmlns:a16="http://schemas.microsoft.com/office/drawing/2014/main" id="{C693BF5B-3C63-37DF-91B5-A78C1D38EF2D}"/>
               </a:ext>
             </a:extLst>
           </p:cNvPr>
@@ -4637,7 +4637,7 @@
           <p:cNvPr id="3" name="TextBox 2">
             <a:extLst>
               <a:ext uri="{FF2B5EF4-FFF2-40B4-BE49-F238E27FC236}">
-                <a16:creationId xmlns:a16="http://schemas.microsoft.com/office/drawing/2014/main" id="{0FF25AFB-E033-97E5-F0C1-7478860BDFFF}"/>
+                <a16:creationId xmlns:a16="http://schemas.microsoft.com/office/drawing/2014/main" id="{07504D00-A1A7-4EB7-2836-7B3DD216E204}"/>
               </a:ext>
             </a:extLst>
           </p:cNvPr>
@@ -4683,7 +4683,7 @@
           <p:cNvPr id="4" name="TextBox 3">
             <a:extLst>
               <a:ext uri="{FF2B5EF4-FFF2-40B4-BE49-F238E27FC236}">
-                <a16:creationId xmlns:a16="http://schemas.microsoft.com/office/drawing/2014/main" id="{BA5741E1-3826-D296-770E-098362343DA6}"/>
+                <a16:creationId xmlns:a16="http://schemas.microsoft.com/office/drawing/2014/main" id="{A5C7EA26-F7CA-21D0-0C81-AC07EED46436}"/>
               </a:ext>
             </a:extLst>
           </p:cNvPr>
@@ -4729,7 +4729,7 @@
           <p:cNvPr id="5" name="TextBox 4">
             <a:extLst>
               <a:ext uri="{FF2B5EF4-FFF2-40B4-BE49-F238E27FC236}">
-                <a16:creationId xmlns:a16="http://schemas.microsoft.com/office/drawing/2014/main" id="{47E290C2-9A0C-41B8-DDDE-AD1604AE4D5C}"/>
+                <a16:creationId xmlns:a16="http://schemas.microsoft.com/office/drawing/2014/main" id="{93B78FDC-DB29-25BD-753B-ADD4A04B08F8}"/>
               </a:ext>
             </a:extLst>
           </p:cNvPr>
@@ -4775,7 +4775,7 @@
           <p:cNvPr id="6" name="TextBox 5">
             <a:extLst>
               <a:ext uri="{FF2B5EF4-FFF2-40B4-BE49-F238E27FC236}">
-                <a16:creationId xmlns:a16="http://schemas.microsoft.com/office/drawing/2014/main" id="{A9A1E830-D3BA-29D7-1A50-A2609714434B}"/>
+                <a16:creationId xmlns:a16="http://schemas.microsoft.com/office/drawing/2014/main" id="{0107CDB6-9D0D-4093-31D5-CD14C0527591}"/>
               </a:ext>
             </a:extLst>
           </p:cNvPr>
@@ -4815,7 +4815,7 @@
           <p:cNvPr id="7" name="TextBox 6">
             <a:extLst>
               <a:ext uri="{FF2B5EF4-FFF2-40B4-BE49-F238E27FC236}">
-                <a16:creationId xmlns:a16="http://schemas.microsoft.com/office/drawing/2014/main" id="{911BA140-16FC-C09B-718D-E049E8946DAF}"/>
+                <a16:creationId xmlns:a16="http://schemas.microsoft.com/office/drawing/2014/main" id="{67BF62E4-DC0D-C90D-C14D-0CDB915951CF}"/>
               </a:ext>
             </a:extLst>
           </p:cNvPr>
@@ -4860,7 +4860,7 @@
     </p:spTree>
     <p:extLst>
       <p:ext uri="{BB962C8B-B14F-4D97-AF65-F5344CB8AC3E}">
-        <p14:creationId xmlns:p14="http://schemas.microsoft.com/office/powerpoint/2010/main" val="2137337157"/>
+        <p14:creationId xmlns:p14="http://schemas.microsoft.com/office/powerpoint/2010/main" val="2806751265"/>
       </p:ext>
     </p:extLst>
   </p:cSld>
@@ -4900,7 +4900,7 @@
           <p:cNvPr id="2" name="TextBox 1">
             <a:extLst>
               <a:ext uri="{FF2B5EF4-FFF2-40B4-BE49-F238E27FC236}">
-                <a16:creationId xmlns:a16="http://schemas.microsoft.com/office/drawing/2014/main" id="{12DBE891-33C8-14B6-9DCC-3C78B7558731}"/>
+                <a16:creationId xmlns:a16="http://schemas.microsoft.com/office/drawing/2014/main" id="{A27136A7-1914-0A91-81BA-5F2DBE74AAE6}"/>
               </a:ext>
             </a:extLst>
           </p:cNvPr>
@@ -4947,7 +4947,7 @@
           <p:cNvPr id="3" name="TextBox 2">
             <a:extLst>
               <a:ext uri="{FF2B5EF4-FFF2-40B4-BE49-F238E27FC236}">
-                <a16:creationId xmlns:a16="http://schemas.microsoft.com/office/drawing/2014/main" id="{F96EF1B1-A76F-9C01-367B-9514E868AAAA}"/>
+                <a16:creationId xmlns:a16="http://schemas.microsoft.com/office/drawing/2014/main" id="{E0228F3D-5F17-C995-0E4C-3F9F9D156FCB}"/>
               </a:ext>
             </a:extLst>
           </p:cNvPr>
@@ -4988,7 +4988,7 @@
           <p:cNvPr id="4" name="TextBox 3">
             <a:extLst>
               <a:ext uri="{FF2B5EF4-FFF2-40B4-BE49-F238E27FC236}">
-                <a16:creationId xmlns:a16="http://schemas.microsoft.com/office/drawing/2014/main" id="{D7C8CA08-00DD-4C64-EE6E-F184FAF4340D}"/>
+                <a16:creationId xmlns:a16="http://schemas.microsoft.com/office/drawing/2014/main" id="{BFFE56A0-6630-2EEE-F1AD-7E8FC4958737}"/>
               </a:ext>
             </a:extLst>
           </p:cNvPr>
@@ -5027,7 +5027,7 @@
     </p:spTree>
     <p:extLst>
       <p:ext uri="{BB962C8B-B14F-4D97-AF65-F5344CB8AC3E}">
-        <p14:creationId xmlns:p14="http://schemas.microsoft.com/office/powerpoint/2010/main" val="2887355868"/>
+        <p14:creationId xmlns:p14="http://schemas.microsoft.com/office/powerpoint/2010/main" val="3107122534"/>
       </p:ext>
     </p:extLst>
   </p:cSld>
@@ -5067,7 +5067,7 @@
           <p:cNvPr id="2" name="TextBox 1">
             <a:extLst>
               <a:ext uri="{FF2B5EF4-FFF2-40B4-BE49-F238E27FC236}">
-                <a16:creationId xmlns:a16="http://schemas.microsoft.com/office/drawing/2014/main" id="{2DE669F4-543D-B71E-F174-7B5380457D94}"/>
+                <a16:creationId xmlns:a16="http://schemas.microsoft.com/office/drawing/2014/main" id="{EF85FFBB-AFE3-6E2C-FBA2-73E0AA66A73C}"/>
               </a:ext>
             </a:extLst>
           </p:cNvPr>
@@ -5113,7 +5113,7 @@
           <p:cNvPr id="3" name="Rectangle: Rounded Corners 2">
             <a:extLst>
               <a:ext uri="{FF2B5EF4-FFF2-40B4-BE49-F238E27FC236}">
-                <a16:creationId xmlns:a16="http://schemas.microsoft.com/office/drawing/2014/main" id="{9B358C52-D7B2-0F99-B4B2-D201BC36E4F5}"/>
+                <a16:creationId xmlns:a16="http://schemas.microsoft.com/office/drawing/2014/main" id="{DD1FA005-F798-B4DF-49D0-DFEECF337662}"/>
               </a:ext>
             </a:extLst>
           </p:cNvPr>
@@ -5183,7 +5183,7 @@
           <p:cNvPr id="4" name="Oval 3">
             <a:extLst>
               <a:ext uri="{FF2B5EF4-FFF2-40B4-BE49-F238E27FC236}">
-                <a16:creationId xmlns:a16="http://schemas.microsoft.com/office/drawing/2014/main" id="{D239A098-685D-A512-B0F6-F7AEA88C6841}"/>
+                <a16:creationId xmlns:a16="http://schemas.microsoft.com/office/drawing/2014/main" id="{3DC20EF8-9F70-3C0A-A2F7-AF803AE8DDAE}"/>
               </a:ext>
             </a:extLst>
           </p:cNvPr>
@@ -5259,7 +5259,7 @@
           <p:cNvPr id="5" name="TextBox 4">
             <a:extLst>
               <a:ext uri="{FF2B5EF4-FFF2-40B4-BE49-F238E27FC236}">
-                <a16:creationId xmlns:a16="http://schemas.microsoft.com/office/drawing/2014/main" id="{B4507CC1-5EDD-0251-EA69-AC471B298272}"/>
+                <a16:creationId xmlns:a16="http://schemas.microsoft.com/office/drawing/2014/main" id="{6FC584B5-3B82-1151-D673-97D4FB7E3556}"/>
               </a:ext>
             </a:extLst>
           </p:cNvPr>
@@ -5299,7 +5299,7 @@
           <p:cNvPr id="6" name="TextBox 5">
             <a:extLst>
               <a:ext uri="{FF2B5EF4-FFF2-40B4-BE49-F238E27FC236}">
-                <a16:creationId xmlns:a16="http://schemas.microsoft.com/office/drawing/2014/main" id="{605DE39E-24E8-64E3-DC4D-81588972CA73}"/>
+                <a16:creationId xmlns:a16="http://schemas.microsoft.com/office/drawing/2014/main" id="{CE2A53D1-D260-A80F-BEBC-25CF0DF67025}"/>
               </a:ext>
             </a:extLst>
           </p:cNvPr>
@@ -5339,7 +5339,7 @@
           <p:cNvPr id="7" name="Rectangle: Rounded Corners 6">
             <a:extLst>
               <a:ext uri="{FF2B5EF4-FFF2-40B4-BE49-F238E27FC236}">
-                <a16:creationId xmlns:a16="http://schemas.microsoft.com/office/drawing/2014/main" id="{86E4394B-8FED-CA7D-2D65-8346832DEA67}"/>
+                <a16:creationId xmlns:a16="http://schemas.microsoft.com/office/drawing/2014/main" id="{DE80634D-803D-F0E7-A06A-60E105686D10}"/>
               </a:ext>
             </a:extLst>
           </p:cNvPr>
@@ -5409,7 +5409,7 @@
           <p:cNvPr id="8" name="Oval 7">
             <a:extLst>
               <a:ext uri="{FF2B5EF4-FFF2-40B4-BE49-F238E27FC236}">
-                <a16:creationId xmlns:a16="http://schemas.microsoft.com/office/drawing/2014/main" id="{D6D3E87E-4601-D431-769A-EC520C59C68B}"/>
+                <a16:creationId xmlns:a16="http://schemas.microsoft.com/office/drawing/2014/main" id="{27F2954B-2F89-5F9F-DF35-EDD9BEF9346B}"/>
               </a:ext>
             </a:extLst>
           </p:cNvPr>
@@ -5485,7 +5485,7 @@
           <p:cNvPr id="9" name="TextBox 8">
             <a:extLst>
               <a:ext uri="{FF2B5EF4-FFF2-40B4-BE49-F238E27FC236}">
-                <a16:creationId xmlns:a16="http://schemas.microsoft.com/office/drawing/2014/main" id="{79E037F3-4E3C-E36F-817A-961AB5C2C2A6}"/>
+                <a16:creationId xmlns:a16="http://schemas.microsoft.com/office/drawing/2014/main" id="{2B49A366-0E81-BF48-4225-0F559BFA14ED}"/>
               </a:ext>
             </a:extLst>
           </p:cNvPr>
@@ -5525,7 +5525,7 @@
           <p:cNvPr id="10" name="TextBox 9">
             <a:extLst>
               <a:ext uri="{FF2B5EF4-FFF2-40B4-BE49-F238E27FC236}">
-                <a16:creationId xmlns:a16="http://schemas.microsoft.com/office/drawing/2014/main" id="{B6B8813E-225D-F5A7-121B-FAB692F4DAAF}"/>
+                <a16:creationId xmlns:a16="http://schemas.microsoft.com/office/drawing/2014/main" id="{B23536E6-4A0B-AF83-451A-4355A5BE6BE9}"/>
               </a:ext>
             </a:extLst>
           </p:cNvPr>
@@ -5571,7 +5571,7 @@
           <p:cNvPr id="11" name="Rectangle: Rounded Corners 10">
             <a:extLst>
               <a:ext uri="{FF2B5EF4-FFF2-40B4-BE49-F238E27FC236}">
-                <a16:creationId xmlns:a16="http://schemas.microsoft.com/office/drawing/2014/main" id="{015882F5-F3CD-C3C7-1B55-A8D149D0D983}"/>
+                <a16:creationId xmlns:a16="http://schemas.microsoft.com/office/drawing/2014/main" id="{663C0DB5-CC33-A43D-7DCA-3CD5A9220B14}"/>
               </a:ext>
             </a:extLst>
           </p:cNvPr>
@@ -5641,7 +5641,7 @@
           <p:cNvPr id="12" name="Oval 11">
             <a:extLst>
               <a:ext uri="{FF2B5EF4-FFF2-40B4-BE49-F238E27FC236}">
-                <a16:creationId xmlns:a16="http://schemas.microsoft.com/office/drawing/2014/main" id="{3DB146B1-EB34-FE84-1A3C-C5BE2DA84ED1}"/>
+                <a16:creationId xmlns:a16="http://schemas.microsoft.com/office/drawing/2014/main" id="{7E1BFA53-4B29-4F83-84CB-4E40803EF955}"/>
               </a:ext>
             </a:extLst>
           </p:cNvPr>
@@ -5717,7 +5717,7 @@
           <p:cNvPr id="13" name="TextBox 12">
             <a:extLst>
               <a:ext uri="{FF2B5EF4-FFF2-40B4-BE49-F238E27FC236}">
-                <a16:creationId xmlns:a16="http://schemas.microsoft.com/office/drawing/2014/main" id="{2880D386-EA7F-2529-7542-DA75A8C371A5}"/>
+                <a16:creationId xmlns:a16="http://schemas.microsoft.com/office/drawing/2014/main" id="{F3C69B6E-DB94-904E-8E3F-FE5E747F334E}"/>
               </a:ext>
             </a:extLst>
           </p:cNvPr>
@@ -5757,7 +5757,7 @@
           <p:cNvPr id="14" name="TextBox 13">
             <a:extLst>
               <a:ext uri="{FF2B5EF4-FFF2-40B4-BE49-F238E27FC236}">
-                <a16:creationId xmlns:a16="http://schemas.microsoft.com/office/drawing/2014/main" id="{2D69997D-651A-ED44-27FC-4B949F614896}"/>
+                <a16:creationId xmlns:a16="http://schemas.microsoft.com/office/drawing/2014/main" id="{875C9476-8F6C-71B4-9FEA-A06F6DB0FF34}"/>
               </a:ext>
             </a:extLst>
           </p:cNvPr>
@@ -5803,7 +5803,7 @@
           <p:cNvPr id="15" name="Rectangle: Rounded Corners 14">
             <a:extLst>
               <a:ext uri="{FF2B5EF4-FFF2-40B4-BE49-F238E27FC236}">
-                <a16:creationId xmlns:a16="http://schemas.microsoft.com/office/drawing/2014/main" id="{FAD622E9-8F76-750F-779A-1629AF0D2090}"/>
+                <a16:creationId xmlns:a16="http://schemas.microsoft.com/office/drawing/2014/main" id="{C1BA83B7-2868-2FD1-F00A-A1E31E447C18}"/>
               </a:ext>
             </a:extLst>
           </p:cNvPr>
@@ -5873,7 +5873,7 @@
           <p:cNvPr id="16" name="Oval 15">
             <a:extLst>
               <a:ext uri="{FF2B5EF4-FFF2-40B4-BE49-F238E27FC236}">
-                <a16:creationId xmlns:a16="http://schemas.microsoft.com/office/drawing/2014/main" id="{8C1E059E-DC70-6666-E4F4-CE82FBB61D62}"/>
+                <a16:creationId xmlns:a16="http://schemas.microsoft.com/office/drawing/2014/main" id="{C583BF07-88F3-CE5C-C19F-5A94F6D63953}"/>
               </a:ext>
             </a:extLst>
           </p:cNvPr>
@@ -5949,7 +5949,7 @@
           <p:cNvPr id="17" name="TextBox 16">
             <a:extLst>
               <a:ext uri="{FF2B5EF4-FFF2-40B4-BE49-F238E27FC236}">
-                <a16:creationId xmlns:a16="http://schemas.microsoft.com/office/drawing/2014/main" id="{E0363E58-60A9-2701-D34D-94FAB4EC5506}"/>
+                <a16:creationId xmlns:a16="http://schemas.microsoft.com/office/drawing/2014/main" id="{D108E14E-3BFA-C5BE-B661-0924EE7E1FB3}"/>
               </a:ext>
             </a:extLst>
           </p:cNvPr>
@@ -5989,7 +5989,7 @@
           <p:cNvPr id="18" name="TextBox 17">
             <a:extLst>
               <a:ext uri="{FF2B5EF4-FFF2-40B4-BE49-F238E27FC236}">
-                <a16:creationId xmlns:a16="http://schemas.microsoft.com/office/drawing/2014/main" id="{457EE8E6-3D3A-5662-31C7-56D5A4B619F7}"/>
+                <a16:creationId xmlns:a16="http://schemas.microsoft.com/office/drawing/2014/main" id="{25A6DEB6-DBED-3E51-FC35-3196824FEE9D}"/>
               </a:ext>
             </a:extLst>
           </p:cNvPr>
@@ -6035,7 +6035,7 @@
           <p:cNvPr id="19" name="TextBox 18">
             <a:extLst>
               <a:ext uri="{FF2B5EF4-FFF2-40B4-BE49-F238E27FC236}">
-                <a16:creationId xmlns:a16="http://schemas.microsoft.com/office/drawing/2014/main" id="{95EF684C-6030-6610-B789-CB689757F398}"/>
+                <a16:creationId xmlns:a16="http://schemas.microsoft.com/office/drawing/2014/main" id="{B2CA3C26-9836-4598-7866-7A9BA6DE4A68}"/>
               </a:ext>
             </a:extLst>
           </p:cNvPr>
@@ -6081,7 +6081,7 @@
           <p:cNvPr id="20" name="TextBox 19">
             <a:extLst>
               <a:ext uri="{FF2B5EF4-FFF2-40B4-BE49-F238E27FC236}">
-                <a16:creationId xmlns:a16="http://schemas.microsoft.com/office/drawing/2014/main" id="{6199CA07-5599-A36F-70D0-B49F3DCCA14A}"/>
+                <a16:creationId xmlns:a16="http://schemas.microsoft.com/office/drawing/2014/main" id="{3FD0B2B1-9C07-1D6D-5224-142A28F3E510}"/>
               </a:ext>
             </a:extLst>
           </p:cNvPr>
@@ -6127,7 +6127,7 @@
           <p:cNvPr id="21" name="TextBox 20">
             <a:extLst>
               <a:ext uri="{FF2B5EF4-FFF2-40B4-BE49-F238E27FC236}">
-                <a16:creationId xmlns:a16="http://schemas.microsoft.com/office/drawing/2014/main" id="{BA982D58-A554-AF7C-63BC-82A0976B0AD7}"/>
+                <a16:creationId xmlns:a16="http://schemas.microsoft.com/office/drawing/2014/main" id="{894F70D8-5C54-9ECD-93D7-63CCB3F54F36}"/>
               </a:ext>
             </a:extLst>
           </p:cNvPr>
@@ -6173,7 +6173,7 @@
           <p:cNvPr id="22" name="TextBox 21">
             <a:extLst>
               <a:ext uri="{FF2B5EF4-FFF2-40B4-BE49-F238E27FC236}">
-                <a16:creationId xmlns:a16="http://schemas.microsoft.com/office/drawing/2014/main" id="{37E0B0EC-75E0-5DFA-A497-0D7B26522447}"/>
+                <a16:creationId xmlns:a16="http://schemas.microsoft.com/office/drawing/2014/main" id="{70BB0E40-013F-F570-4585-13B9FCE53105}"/>
               </a:ext>
             </a:extLst>
           </p:cNvPr>
@@ -6219,7 +6219,7 @@
           <p:cNvPr id="23" name="TextBox 22">
             <a:extLst>
               <a:ext uri="{FF2B5EF4-FFF2-40B4-BE49-F238E27FC236}">
-                <a16:creationId xmlns:a16="http://schemas.microsoft.com/office/drawing/2014/main" id="{BDE52960-CBAC-1028-A83A-5D3871A00197}"/>
+                <a16:creationId xmlns:a16="http://schemas.microsoft.com/office/drawing/2014/main" id="{07E4CF4E-4757-7064-4A88-E83C872154A6}"/>
               </a:ext>
             </a:extLst>
           </p:cNvPr>
@@ -6265,7 +6265,7 @@
           <p:cNvPr id="24" name="TextBox 23">
             <a:extLst>
               <a:ext uri="{FF2B5EF4-FFF2-40B4-BE49-F238E27FC236}">
-                <a16:creationId xmlns:a16="http://schemas.microsoft.com/office/drawing/2014/main" id="{6F413867-66CF-A82D-4432-B15D38A6156C}"/>
+                <a16:creationId xmlns:a16="http://schemas.microsoft.com/office/drawing/2014/main" id="{DF53D096-5A89-15A8-D6C2-E59E6938B0DE}"/>
               </a:ext>
             </a:extLst>
           </p:cNvPr>
@@ -6311,7 +6311,7 @@
           <p:cNvPr id="25" name="TextBox 24">
             <a:extLst>
               <a:ext uri="{FF2B5EF4-FFF2-40B4-BE49-F238E27FC236}">
-                <a16:creationId xmlns:a16="http://schemas.microsoft.com/office/drawing/2014/main" id="{BDFB3255-9B4F-0303-DAAE-14256C7F1CFE}"/>
+                <a16:creationId xmlns:a16="http://schemas.microsoft.com/office/drawing/2014/main" id="{33923954-8CCC-E404-17D3-D94AE384589B}"/>
               </a:ext>
             </a:extLst>
           </p:cNvPr>
@@ -6357,7 +6357,7 @@
           <p:cNvPr id="26" name="Rectangle: Rounded Corners 25">
             <a:extLst>
               <a:ext uri="{FF2B5EF4-FFF2-40B4-BE49-F238E27FC236}">
-                <a16:creationId xmlns:a16="http://schemas.microsoft.com/office/drawing/2014/main" id="{B649B0CD-E6FC-7455-40ED-C9DD4130D698}"/>
+                <a16:creationId xmlns:a16="http://schemas.microsoft.com/office/drawing/2014/main" id="{9990D4CB-C4E8-8C9C-EF42-9E8620D57706}"/>
               </a:ext>
             </a:extLst>
           </p:cNvPr>
@@ -6427,7 +6427,7 @@
           <p:cNvPr id="27" name="TextBox 26">
             <a:extLst>
               <a:ext uri="{FF2B5EF4-FFF2-40B4-BE49-F238E27FC236}">
-                <a16:creationId xmlns:a16="http://schemas.microsoft.com/office/drawing/2014/main" id="{29F7909C-59E7-0771-6D7E-69A6DC63B046}"/>
+                <a16:creationId xmlns:a16="http://schemas.microsoft.com/office/drawing/2014/main" id="{F38EF219-F29D-AB87-E452-072039CBAEA1}"/>
               </a:ext>
             </a:extLst>
           </p:cNvPr>
@@ -6473,7 +6473,7 @@
           <p:cNvPr id="28" name="TextBox 27">
             <a:extLst>
               <a:ext uri="{FF2B5EF4-FFF2-40B4-BE49-F238E27FC236}">
-                <a16:creationId xmlns:a16="http://schemas.microsoft.com/office/drawing/2014/main" id="{3BABA6C2-B735-8D89-FAEA-2801D95DF349}"/>
+                <a16:creationId xmlns:a16="http://schemas.microsoft.com/office/drawing/2014/main" id="{30D47859-76DA-8849-F004-0425349588CE}"/>
               </a:ext>
             </a:extLst>
           </p:cNvPr>
@@ -6518,7 +6518,7 @@
     </p:spTree>
     <p:extLst>
       <p:ext uri="{BB962C8B-B14F-4D97-AF65-F5344CB8AC3E}">
-        <p14:creationId xmlns:p14="http://schemas.microsoft.com/office/powerpoint/2010/main" val="2285044674"/>
+        <p14:creationId xmlns:p14="http://schemas.microsoft.com/office/powerpoint/2010/main" val="4223462970"/>
       </p:ext>
     </p:extLst>
   </p:cSld>
@@ -6558,7 +6558,7 @@
           <p:cNvPr id="2" name="TextBox 1">
             <a:extLst>
               <a:ext uri="{FF2B5EF4-FFF2-40B4-BE49-F238E27FC236}">
-                <a16:creationId xmlns:a16="http://schemas.microsoft.com/office/drawing/2014/main" id="{1FFEAAE9-46D3-DA2E-AF59-35BA31720354}"/>
+                <a16:creationId xmlns:a16="http://schemas.microsoft.com/office/drawing/2014/main" id="{96F93134-21DB-777A-1F2E-8641C6526B43}"/>
               </a:ext>
             </a:extLst>
           </p:cNvPr>
@@ -6604,7 +6604,7 @@
           <p:cNvPr id="4" name="Picture 3">
             <a:extLst>
               <a:ext uri="{FF2B5EF4-FFF2-40B4-BE49-F238E27FC236}">
-                <a16:creationId xmlns:a16="http://schemas.microsoft.com/office/drawing/2014/main" id="{78BBB824-1435-3374-1E0C-74DBECF488F5}"/>
+                <a16:creationId xmlns:a16="http://schemas.microsoft.com/office/drawing/2014/main" id="{B5A666E2-0989-3138-3D5A-C6C5CC14FE94}"/>
               </a:ext>
             </a:extLst>
           </p:cNvPr>
@@ -6645,7 +6645,7 @@
           <p:cNvPr id="5" name="TextBox 4">
             <a:extLst>
               <a:ext uri="{FF2B5EF4-FFF2-40B4-BE49-F238E27FC236}">
-                <a16:creationId xmlns:a16="http://schemas.microsoft.com/office/drawing/2014/main" id="{52FAAEA1-CB63-FD7A-BCDB-92ACD6AFE27D}"/>
+                <a16:creationId xmlns:a16="http://schemas.microsoft.com/office/drawing/2014/main" id="{F104B869-5D8D-696B-7091-D891A71EE504}"/>
               </a:ext>
             </a:extLst>
           </p:cNvPr>
@@ -6685,7 +6685,7 @@
           <p:cNvPr id="6" name="TextBox 5">
             <a:extLst>
               <a:ext uri="{FF2B5EF4-FFF2-40B4-BE49-F238E27FC236}">
-                <a16:creationId xmlns:a16="http://schemas.microsoft.com/office/drawing/2014/main" id="{6AF4B3D9-C1E0-1469-5EE5-0463B38EC845}"/>
+                <a16:creationId xmlns:a16="http://schemas.microsoft.com/office/drawing/2014/main" id="{8A5D0598-3D0E-E647-1163-A8A3BD4F9690}"/>
               </a:ext>
             </a:extLst>
           </p:cNvPr>
@@ -6725,7 +6725,7 @@
           <p:cNvPr id="7" name="TextBox 6">
             <a:extLst>
               <a:ext uri="{FF2B5EF4-FFF2-40B4-BE49-F238E27FC236}">
-                <a16:creationId xmlns:a16="http://schemas.microsoft.com/office/drawing/2014/main" id="{E7098235-0243-29D8-421B-19CDEECD1B92}"/>
+                <a16:creationId xmlns:a16="http://schemas.microsoft.com/office/drawing/2014/main" id="{6CF33E62-F5BF-2A83-4A50-7357118C0FA7}"/>
               </a:ext>
             </a:extLst>
           </p:cNvPr>
@@ -6765,7 +6765,7 @@
           <p:cNvPr id="8" name="TextBox 7">
             <a:extLst>
               <a:ext uri="{FF2B5EF4-FFF2-40B4-BE49-F238E27FC236}">
-                <a16:creationId xmlns:a16="http://schemas.microsoft.com/office/drawing/2014/main" id="{47C3193B-CF42-6ED8-A429-7E94C1C54AC6}"/>
+                <a16:creationId xmlns:a16="http://schemas.microsoft.com/office/drawing/2014/main" id="{F514B4F6-9704-79DC-FF61-CE0C4FD61FDE}"/>
               </a:ext>
             </a:extLst>
           </p:cNvPr>
@@ -6811,7 +6811,7 @@
           <p:cNvPr id="9" name="TextBox 8">
             <a:extLst>
               <a:ext uri="{FF2B5EF4-FFF2-40B4-BE49-F238E27FC236}">
-                <a16:creationId xmlns:a16="http://schemas.microsoft.com/office/drawing/2014/main" id="{F5985990-53F8-BF78-20C9-1761BD09A06C}"/>
+                <a16:creationId xmlns:a16="http://schemas.microsoft.com/office/drawing/2014/main" id="{27E3C40F-F423-9984-62B6-4F27998B45BD}"/>
               </a:ext>
             </a:extLst>
           </p:cNvPr>
@@ -6851,7 +6851,7 @@
           <p:cNvPr id="10" name="TextBox 9">
             <a:extLst>
               <a:ext uri="{FF2B5EF4-FFF2-40B4-BE49-F238E27FC236}">
-                <a16:creationId xmlns:a16="http://schemas.microsoft.com/office/drawing/2014/main" id="{70BF376C-6CD7-7F19-208F-BDD55A084FA6}"/>
+                <a16:creationId xmlns:a16="http://schemas.microsoft.com/office/drawing/2014/main" id="{1922A7D3-D999-BBE0-5657-BB50E15EAD2F}"/>
               </a:ext>
             </a:extLst>
           </p:cNvPr>
@@ -6897,7 +6897,7 @@
           <p:cNvPr id="11" name="TextBox 10">
             <a:extLst>
               <a:ext uri="{FF2B5EF4-FFF2-40B4-BE49-F238E27FC236}">
-                <a16:creationId xmlns:a16="http://schemas.microsoft.com/office/drawing/2014/main" id="{39A36C2C-8032-20AB-D5AB-8F2CB2B9A60B}"/>
+                <a16:creationId xmlns:a16="http://schemas.microsoft.com/office/drawing/2014/main" id="{09E1368A-AEE6-D8D6-EF7B-2778974D01DA}"/>
               </a:ext>
             </a:extLst>
           </p:cNvPr>
@@ -6937,7 +6937,7 @@
           <p:cNvPr id="12" name="TextBox 11">
             <a:extLst>
               <a:ext uri="{FF2B5EF4-FFF2-40B4-BE49-F238E27FC236}">
-                <a16:creationId xmlns:a16="http://schemas.microsoft.com/office/drawing/2014/main" id="{4488DC44-04AE-84CD-C47F-BB9FB44B7004}"/>
+                <a16:creationId xmlns:a16="http://schemas.microsoft.com/office/drawing/2014/main" id="{B832FD4D-3452-0E20-B1C9-3A3F46BC1875}"/>
               </a:ext>
             </a:extLst>
           </p:cNvPr>
@@ -6983,7 +6983,7 @@
           <p:cNvPr id="13" name="TextBox 12">
             <a:extLst>
               <a:ext uri="{FF2B5EF4-FFF2-40B4-BE49-F238E27FC236}">
-                <a16:creationId xmlns:a16="http://schemas.microsoft.com/office/drawing/2014/main" id="{7624EA51-D80E-DEBE-FE79-BD214B9AAF3F}"/>
+                <a16:creationId xmlns:a16="http://schemas.microsoft.com/office/drawing/2014/main" id="{F3B46764-C075-2F24-0A3A-D15B589FFB61}"/>
               </a:ext>
             </a:extLst>
           </p:cNvPr>
@@ -7013,7 +7013,7 @@
                 </a:solidFill>
                 <a:latin typeface="Calibri" panose="020F0502020204030204" pitchFamily="34" charset="0"/>
               </a:rPr>
-              <a:t>How a desk uses it:   1  Run the inbox   ·   2  Open a flagged case   ·   3  Confirm it, correct a single field, or re-upload the corrected document   ·   4  Send the drafted reply</a:t>
+              <a:t>How a desk uses it:   1  Run the inbox   ·   2  Open a flagged case   ·   3  Agree with it, correct a single field, or re-upload the corrected document   ·   4  Send the drafted reply</a:t>
             </a:r>
             <a:endParaRPr lang="en-MY" sz="1150">
               <a:solidFill>
@@ -7029,7 +7029,7 @@
           <p:cNvPr id="14" name="TextBox 13">
             <a:extLst>
               <a:ext uri="{FF2B5EF4-FFF2-40B4-BE49-F238E27FC236}">
-                <a16:creationId xmlns:a16="http://schemas.microsoft.com/office/drawing/2014/main" id="{1ED9756A-62A5-2E47-4543-C5A672780409}"/>
+                <a16:creationId xmlns:a16="http://schemas.microsoft.com/office/drawing/2014/main" id="{74FB8AC1-C1C5-64A4-BDE4-E8D45A3A75CF}"/>
               </a:ext>
             </a:extLst>
           </p:cNvPr>
@@ -7068,7 +7068,7 @@
     </p:spTree>
     <p:extLst>
       <p:ext uri="{BB962C8B-B14F-4D97-AF65-F5344CB8AC3E}">
-        <p14:creationId xmlns:p14="http://schemas.microsoft.com/office/powerpoint/2010/main" val="4280549854"/>
+        <p14:creationId xmlns:p14="http://schemas.microsoft.com/office/powerpoint/2010/main" val="3359025787"/>
       </p:ext>
     </p:extLst>
   </p:cSld>
@@ -7108,7 +7108,7 @@
           <p:cNvPr id="2" name="TextBox 1">
             <a:extLst>
               <a:ext uri="{FF2B5EF4-FFF2-40B4-BE49-F238E27FC236}">
-                <a16:creationId xmlns:a16="http://schemas.microsoft.com/office/drawing/2014/main" id="{F9F39D99-1B17-3154-8EBC-8EBB572E3782}"/>
+                <a16:creationId xmlns:a16="http://schemas.microsoft.com/office/drawing/2014/main" id="{4606D766-E760-0C7E-5FB9-C22CAD47372B}"/>
               </a:ext>
             </a:extLst>
           </p:cNvPr>
@@ -7148,7 +7148,7 @@
           <p:cNvPr id="3" name="Rectangle: Rounded Corners 2">
             <a:extLst>
               <a:ext uri="{FF2B5EF4-FFF2-40B4-BE49-F238E27FC236}">
-                <a16:creationId xmlns:a16="http://schemas.microsoft.com/office/drawing/2014/main" id="{D220D891-A38E-BEA9-5689-CEBB4DD9636E}"/>
+                <a16:creationId xmlns:a16="http://schemas.microsoft.com/office/drawing/2014/main" id="{D4F05510-4091-CF8A-0EA9-D15D4A1A8F3F}"/>
               </a:ext>
             </a:extLst>
           </p:cNvPr>
@@ -7226,7 +7226,7 @@
           <p:cNvPr id="4" name="Straight Connector 3">
             <a:extLst>
               <a:ext uri="{FF2B5EF4-FFF2-40B4-BE49-F238E27FC236}">
-                <a16:creationId xmlns:a16="http://schemas.microsoft.com/office/drawing/2014/main" id="{3B804AF0-87BC-5ED9-7F51-AABC950FAF58}"/>
+                <a16:creationId xmlns:a16="http://schemas.microsoft.com/office/drawing/2014/main" id="{B90C35E7-3F5C-DF7D-B8D5-93883B13BBCC}"/>
               </a:ext>
             </a:extLst>
           </p:cNvPr>
@@ -7268,7 +7268,7 @@
           <p:cNvPr id="5" name="Rectangle: Rounded Corners 4">
             <a:extLst>
               <a:ext uri="{FF2B5EF4-FFF2-40B4-BE49-F238E27FC236}">
-                <a16:creationId xmlns:a16="http://schemas.microsoft.com/office/drawing/2014/main" id="{F0BA783F-5BD5-EEE6-7AEC-522ED053639C}"/>
+                <a16:creationId xmlns:a16="http://schemas.microsoft.com/office/drawing/2014/main" id="{D2F8419E-DDA0-B662-D9A7-71A8A69E741A}"/>
               </a:ext>
             </a:extLst>
           </p:cNvPr>
@@ -7346,7 +7346,7 @@
           <p:cNvPr id="6" name="Straight Connector 5">
             <a:extLst>
               <a:ext uri="{FF2B5EF4-FFF2-40B4-BE49-F238E27FC236}">
-                <a16:creationId xmlns:a16="http://schemas.microsoft.com/office/drawing/2014/main" id="{A7A47D71-3265-CDBF-C25D-0D896CCB6632}"/>
+                <a16:creationId xmlns:a16="http://schemas.microsoft.com/office/drawing/2014/main" id="{45DC79FF-1D7F-CF69-7146-C2E39214A0A2}"/>
               </a:ext>
             </a:extLst>
           </p:cNvPr>
@@ -7388,7 +7388,7 @@
           <p:cNvPr id="7" name="Rectangle: Rounded Corners 6">
             <a:extLst>
               <a:ext uri="{FF2B5EF4-FFF2-40B4-BE49-F238E27FC236}">
-                <a16:creationId xmlns:a16="http://schemas.microsoft.com/office/drawing/2014/main" id="{3E1C55BD-B017-9843-DBEE-CF079F9EFD02}"/>
+                <a16:creationId xmlns:a16="http://schemas.microsoft.com/office/drawing/2014/main" id="{C22BBD1F-4BF8-A776-9076-54E2DCE34BD2}"/>
               </a:ext>
             </a:extLst>
           </p:cNvPr>
@@ -7466,7 +7466,7 @@
           <p:cNvPr id="8" name="Straight Connector 7">
             <a:extLst>
               <a:ext uri="{FF2B5EF4-FFF2-40B4-BE49-F238E27FC236}">
-                <a16:creationId xmlns:a16="http://schemas.microsoft.com/office/drawing/2014/main" id="{EA295C82-AFD5-94E4-0523-6DF26AB7CEA0}"/>
+                <a16:creationId xmlns:a16="http://schemas.microsoft.com/office/drawing/2014/main" id="{70296EEC-93F6-D011-C946-7E6B2EC548ED}"/>
               </a:ext>
             </a:extLst>
           </p:cNvPr>
@@ -7508,7 +7508,7 @@
           <p:cNvPr id="9" name="Rectangle: Rounded Corners 8">
             <a:extLst>
               <a:ext uri="{FF2B5EF4-FFF2-40B4-BE49-F238E27FC236}">
-                <a16:creationId xmlns:a16="http://schemas.microsoft.com/office/drawing/2014/main" id="{F5F46E69-0805-3F29-2337-27C8C7A5084C}"/>
+                <a16:creationId xmlns:a16="http://schemas.microsoft.com/office/drawing/2014/main" id="{230944FC-3E45-12D7-1268-E287FC5A3668}"/>
               </a:ext>
             </a:extLst>
           </p:cNvPr>
@@ -7586,7 +7586,7 @@
           <p:cNvPr id="10" name="Straight Connector 9">
             <a:extLst>
               <a:ext uri="{FF2B5EF4-FFF2-40B4-BE49-F238E27FC236}">
-                <a16:creationId xmlns:a16="http://schemas.microsoft.com/office/drawing/2014/main" id="{96AD9156-4811-6455-48EF-B8E54BEE6B82}"/>
+                <a16:creationId xmlns:a16="http://schemas.microsoft.com/office/drawing/2014/main" id="{F0555F1B-7DAA-E73C-3099-9DE674DB5819}"/>
               </a:ext>
             </a:extLst>
           </p:cNvPr>
@@ -7628,7 +7628,7 @@
           <p:cNvPr id="11" name="Rectangle: Rounded Corners 10">
             <a:extLst>
               <a:ext uri="{FF2B5EF4-FFF2-40B4-BE49-F238E27FC236}">
-                <a16:creationId xmlns:a16="http://schemas.microsoft.com/office/drawing/2014/main" id="{3927445F-F72C-C910-D7FC-C603C87532BF}"/>
+                <a16:creationId xmlns:a16="http://schemas.microsoft.com/office/drawing/2014/main" id="{2DDB04F5-6D40-A2C4-CC08-11FD08E51D6B}"/>
               </a:ext>
             </a:extLst>
           </p:cNvPr>
@@ -7706,7 +7706,7 @@
           <p:cNvPr id="12" name="Straight Connector 11">
             <a:extLst>
               <a:ext uri="{FF2B5EF4-FFF2-40B4-BE49-F238E27FC236}">
-                <a16:creationId xmlns:a16="http://schemas.microsoft.com/office/drawing/2014/main" id="{0BA070FF-9800-27D7-B3B5-07A1BBB04BC8}"/>
+                <a16:creationId xmlns:a16="http://schemas.microsoft.com/office/drawing/2014/main" id="{34A2A81C-37AA-5052-A682-FF0E4142B148}"/>
               </a:ext>
             </a:extLst>
           </p:cNvPr>
@@ -7748,7 +7748,7 @@
           <p:cNvPr id="13" name="Rectangle: Rounded Corners 12">
             <a:extLst>
               <a:ext uri="{FF2B5EF4-FFF2-40B4-BE49-F238E27FC236}">
-                <a16:creationId xmlns:a16="http://schemas.microsoft.com/office/drawing/2014/main" id="{7751E68B-51E7-1973-9F7E-CE9B1B064D79}"/>
+                <a16:creationId xmlns:a16="http://schemas.microsoft.com/office/drawing/2014/main" id="{AEAB31DC-0D48-21A9-B1E2-0A2F04D809A8}"/>
               </a:ext>
             </a:extLst>
           </p:cNvPr>
@@ -7826,7 +7826,7 @@
           <p:cNvPr id="14" name="Straight Connector 13">
             <a:extLst>
               <a:ext uri="{FF2B5EF4-FFF2-40B4-BE49-F238E27FC236}">
-                <a16:creationId xmlns:a16="http://schemas.microsoft.com/office/drawing/2014/main" id="{7353B007-F8BC-65CB-A30F-F55362AAEC1F}"/>
+                <a16:creationId xmlns:a16="http://schemas.microsoft.com/office/drawing/2014/main" id="{9620E004-2B50-0BD3-34EA-34F8538D6AB5}"/>
               </a:ext>
             </a:extLst>
           </p:cNvPr>
@@ -7869,7 +7869,7 @@
           <p:cNvPr id="15" name="TextBox 14">
             <a:extLst>
               <a:ext uri="{FF2B5EF4-FFF2-40B4-BE49-F238E27FC236}">
-                <a16:creationId xmlns:a16="http://schemas.microsoft.com/office/drawing/2014/main" id="{330C7FA6-0C27-9993-A1B8-7B389327701B}"/>
+                <a16:creationId xmlns:a16="http://schemas.microsoft.com/office/drawing/2014/main" id="{3A5A2929-9965-CC37-F6DC-0C2A7937AC37}"/>
               </a:ext>
             </a:extLst>
           </p:cNvPr>
@@ -7910,7 +7910,7 @@
           <p:cNvPr id="16" name="TextBox 15">
             <a:extLst>
               <a:ext uri="{FF2B5EF4-FFF2-40B4-BE49-F238E27FC236}">
-                <a16:creationId xmlns:a16="http://schemas.microsoft.com/office/drawing/2014/main" id="{54370B16-520C-E6B1-D000-441FBCB1BC13}"/>
+                <a16:creationId xmlns:a16="http://schemas.microsoft.com/office/drawing/2014/main" id="{CD858350-AF51-EB08-B6C8-3645B9CC5654}"/>
               </a:ext>
             </a:extLst>
           </p:cNvPr>
@@ -7956,7 +7956,7 @@
           <p:cNvPr id="17" name="Rectangle: Rounded Corners 16">
             <a:extLst>
               <a:ext uri="{FF2B5EF4-FFF2-40B4-BE49-F238E27FC236}">
-                <a16:creationId xmlns:a16="http://schemas.microsoft.com/office/drawing/2014/main" id="{9B392C7D-395A-90DB-B201-478C91F5200A}"/>
+                <a16:creationId xmlns:a16="http://schemas.microsoft.com/office/drawing/2014/main" id="{FCE5CBDB-AA6C-27D6-9B2D-EA228CBA72D9}"/>
               </a:ext>
             </a:extLst>
           </p:cNvPr>
@@ -8026,7 +8026,7 @@
           <p:cNvPr id="18" name="TextBox 17">
             <a:extLst>
               <a:ext uri="{FF2B5EF4-FFF2-40B4-BE49-F238E27FC236}">
-                <a16:creationId xmlns:a16="http://schemas.microsoft.com/office/drawing/2014/main" id="{B0A27C3F-EA82-3A69-DF76-28C14BBDB80A}"/>
+                <a16:creationId xmlns:a16="http://schemas.microsoft.com/office/drawing/2014/main" id="{BC435BEB-2C40-7BBC-5451-868470DBF57E}"/>
               </a:ext>
             </a:extLst>
           </p:cNvPr>
@@ -8072,7 +8072,7 @@
           <p:cNvPr id="19" name="TextBox 18">
             <a:extLst>
               <a:ext uri="{FF2B5EF4-FFF2-40B4-BE49-F238E27FC236}">
-                <a16:creationId xmlns:a16="http://schemas.microsoft.com/office/drawing/2014/main" id="{7EC9BB6C-894F-CCDD-C893-FA998DDAF0F3}"/>
+                <a16:creationId xmlns:a16="http://schemas.microsoft.com/office/drawing/2014/main" id="{87CA60C8-9CF5-09DF-0C91-26C168F7D8BF}"/>
               </a:ext>
             </a:extLst>
           </p:cNvPr>
@@ -8118,7 +8118,7 @@
           <p:cNvPr id="20" name="Rectangle: Rounded Corners 19">
             <a:extLst>
               <a:ext uri="{FF2B5EF4-FFF2-40B4-BE49-F238E27FC236}">
-                <a16:creationId xmlns:a16="http://schemas.microsoft.com/office/drawing/2014/main" id="{FF1EA6DD-66B9-6080-EC8D-7EDEF0875511}"/>
+                <a16:creationId xmlns:a16="http://schemas.microsoft.com/office/drawing/2014/main" id="{A5386D45-46D5-3E7A-16E4-2306165D7CD3}"/>
               </a:ext>
             </a:extLst>
           </p:cNvPr>
@@ -8188,7 +8188,7 @@
           <p:cNvPr id="21" name="TextBox 20">
             <a:extLst>
               <a:ext uri="{FF2B5EF4-FFF2-40B4-BE49-F238E27FC236}">
-                <a16:creationId xmlns:a16="http://schemas.microsoft.com/office/drawing/2014/main" id="{BF63CCC2-B199-8CA1-DE1F-FA421524CAC5}"/>
+                <a16:creationId xmlns:a16="http://schemas.microsoft.com/office/drawing/2014/main" id="{FB937382-2E25-DADE-D308-867F4E526774}"/>
               </a:ext>
             </a:extLst>
           </p:cNvPr>
@@ -8228,7 +8228,7 @@
           <p:cNvPr id="22" name="TextBox 21">
             <a:extLst>
               <a:ext uri="{FF2B5EF4-FFF2-40B4-BE49-F238E27FC236}">
-                <a16:creationId xmlns:a16="http://schemas.microsoft.com/office/drawing/2014/main" id="{2D56224A-57A3-7FC8-9EEC-EC32F1563B70}"/>
+                <a16:creationId xmlns:a16="http://schemas.microsoft.com/office/drawing/2014/main" id="{E088853E-BB66-4216-EF5E-4E5DC37B85E9}"/>
               </a:ext>
             </a:extLst>
           </p:cNvPr>
@@ -8274,7 +8274,7 @@
           <p:cNvPr id="23" name="Rectangle: Rounded Corners 22">
             <a:extLst>
               <a:ext uri="{FF2B5EF4-FFF2-40B4-BE49-F238E27FC236}">
-                <a16:creationId xmlns:a16="http://schemas.microsoft.com/office/drawing/2014/main" id="{61C01C86-1E28-A1A1-4B04-40FE25DCA897}"/>
+                <a16:creationId xmlns:a16="http://schemas.microsoft.com/office/drawing/2014/main" id="{54241BA4-E473-11F7-1675-4F944DD0EF1A}"/>
               </a:ext>
             </a:extLst>
           </p:cNvPr>
@@ -8344,7 +8344,7 @@
           <p:cNvPr id="24" name="TextBox 23">
             <a:extLst>
               <a:ext uri="{FF2B5EF4-FFF2-40B4-BE49-F238E27FC236}">
-                <a16:creationId xmlns:a16="http://schemas.microsoft.com/office/drawing/2014/main" id="{CCF7CB3D-379E-FFA2-1EEF-8BF162961961}"/>
+                <a16:creationId xmlns:a16="http://schemas.microsoft.com/office/drawing/2014/main" id="{85A1679E-CBA2-2A32-8126-205544B694F9}"/>
               </a:ext>
             </a:extLst>
           </p:cNvPr>
@@ -8384,7 +8384,7 @@
           <p:cNvPr id="25" name="TextBox 24">
             <a:extLst>
               <a:ext uri="{FF2B5EF4-FFF2-40B4-BE49-F238E27FC236}">
-                <a16:creationId xmlns:a16="http://schemas.microsoft.com/office/drawing/2014/main" id="{E2394A53-C9A5-C3E7-272A-495B443DE78F}"/>
+                <a16:creationId xmlns:a16="http://schemas.microsoft.com/office/drawing/2014/main" id="{7FC23588-26DA-328A-47EC-EAF791DBA89A}"/>
               </a:ext>
             </a:extLst>
           </p:cNvPr>
@@ -8430,7 +8430,7 @@
           <p:cNvPr id="26" name="TextBox 25">
             <a:extLst>
               <a:ext uri="{FF2B5EF4-FFF2-40B4-BE49-F238E27FC236}">
-                <a16:creationId xmlns:a16="http://schemas.microsoft.com/office/drawing/2014/main" id="{620D409B-7A1C-A60A-293B-F7D201B82F24}"/>
+                <a16:creationId xmlns:a16="http://schemas.microsoft.com/office/drawing/2014/main" id="{26D37308-C402-EC7F-A6EA-3FB01CF20BE6}"/>
               </a:ext>
             </a:extLst>
           </p:cNvPr>
@@ -8476,7 +8476,7 @@
           <p:cNvPr id="27" name="TextBox 26">
             <a:extLst>
               <a:ext uri="{FF2B5EF4-FFF2-40B4-BE49-F238E27FC236}">
-                <a16:creationId xmlns:a16="http://schemas.microsoft.com/office/drawing/2014/main" id="{F47CB072-6D00-C573-7CB9-09C4427F09BF}"/>
+                <a16:creationId xmlns:a16="http://schemas.microsoft.com/office/drawing/2014/main" id="{1897D384-D13C-8231-3F1B-8291B71DA40D}"/>
               </a:ext>
             </a:extLst>
           </p:cNvPr>
@@ -8515,7 +8515,7 @@
     </p:spTree>
     <p:extLst>
       <p:ext uri="{BB962C8B-B14F-4D97-AF65-F5344CB8AC3E}">
-        <p14:creationId xmlns:p14="http://schemas.microsoft.com/office/powerpoint/2010/main" val="1644792450"/>
+        <p14:creationId xmlns:p14="http://schemas.microsoft.com/office/powerpoint/2010/main" val="2246029635"/>
       </p:ext>
     </p:extLst>
   </p:cSld>
@@ -8555,7 +8555,7 @@
           <p:cNvPr id="2" name="TextBox 1">
             <a:extLst>
               <a:ext uri="{FF2B5EF4-FFF2-40B4-BE49-F238E27FC236}">
-                <a16:creationId xmlns:a16="http://schemas.microsoft.com/office/drawing/2014/main" id="{A1753EEB-2CBC-5F56-D37E-1B355316448C}"/>
+                <a16:creationId xmlns:a16="http://schemas.microsoft.com/office/drawing/2014/main" id="{74559F79-4CBD-3780-0ED3-9DFCBFFFFF07}"/>
               </a:ext>
             </a:extLst>
           </p:cNvPr>
@@ -8601,7 +8601,7 @@
           <p:cNvPr id="3" name="Oval 2">
             <a:extLst>
               <a:ext uri="{FF2B5EF4-FFF2-40B4-BE49-F238E27FC236}">
-                <a16:creationId xmlns:a16="http://schemas.microsoft.com/office/drawing/2014/main" id="{6BAC2BEC-E8E2-7CD9-D897-5D9DE4DAD176}"/>
+                <a16:creationId xmlns:a16="http://schemas.microsoft.com/office/drawing/2014/main" id="{525CB769-3433-4597-8DDB-36286925B2B4}"/>
               </a:ext>
             </a:extLst>
           </p:cNvPr>
@@ -8677,7 +8677,7 @@
           <p:cNvPr id="4" name="TextBox 3">
             <a:extLst>
               <a:ext uri="{FF2B5EF4-FFF2-40B4-BE49-F238E27FC236}">
-                <a16:creationId xmlns:a16="http://schemas.microsoft.com/office/drawing/2014/main" id="{B103037F-C0D6-AB96-55A2-92EAE11AF14C}"/>
+                <a16:creationId xmlns:a16="http://schemas.microsoft.com/office/drawing/2014/main" id="{2DFAF726-77C0-A4E2-EFA7-AACC1A9EBF83}"/>
               </a:ext>
             </a:extLst>
           </p:cNvPr>
@@ -8723,7 +8723,7 @@
           <p:cNvPr id="5" name="TextBox 4">
             <a:extLst>
               <a:ext uri="{FF2B5EF4-FFF2-40B4-BE49-F238E27FC236}">
-                <a16:creationId xmlns:a16="http://schemas.microsoft.com/office/drawing/2014/main" id="{EA09771B-E6A1-08D6-75EF-BA3D02E5B9B8}"/>
+                <a16:creationId xmlns:a16="http://schemas.microsoft.com/office/drawing/2014/main" id="{0A983FE5-6D82-63D8-2BE4-C63979924879}"/>
               </a:ext>
             </a:extLst>
           </p:cNvPr>
@@ -8769,7 +8769,7 @@
           <p:cNvPr id="6" name="Oval 5">
             <a:extLst>
               <a:ext uri="{FF2B5EF4-FFF2-40B4-BE49-F238E27FC236}">
-                <a16:creationId xmlns:a16="http://schemas.microsoft.com/office/drawing/2014/main" id="{84A43B13-8FA8-B965-9CF6-F3014DA25DF8}"/>
+                <a16:creationId xmlns:a16="http://schemas.microsoft.com/office/drawing/2014/main" id="{922B1162-CC34-24D7-56CC-1D6C08091460}"/>
               </a:ext>
             </a:extLst>
           </p:cNvPr>
@@ -8845,7 +8845,7 @@
           <p:cNvPr id="7" name="TextBox 6">
             <a:extLst>
               <a:ext uri="{FF2B5EF4-FFF2-40B4-BE49-F238E27FC236}">
-                <a16:creationId xmlns:a16="http://schemas.microsoft.com/office/drawing/2014/main" id="{1C30A747-C7B3-88D7-CF38-EC480CDAACE4}"/>
+                <a16:creationId xmlns:a16="http://schemas.microsoft.com/office/drawing/2014/main" id="{81ADCCAD-926C-BF6B-A49C-E4BE74E43DC4}"/>
               </a:ext>
             </a:extLst>
           </p:cNvPr>
@@ -8891,7 +8891,7 @@
           <p:cNvPr id="8" name="TextBox 7">
             <a:extLst>
               <a:ext uri="{FF2B5EF4-FFF2-40B4-BE49-F238E27FC236}">
-                <a16:creationId xmlns:a16="http://schemas.microsoft.com/office/drawing/2014/main" id="{32F0FBED-1A5A-28E3-7D2E-0AA8CCC52A33}"/>
+                <a16:creationId xmlns:a16="http://schemas.microsoft.com/office/drawing/2014/main" id="{BE116490-314B-611F-3CFE-8C444E830C54}"/>
               </a:ext>
             </a:extLst>
           </p:cNvPr>
@@ -8937,7 +8937,7 @@
           <p:cNvPr id="9" name="Oval 8">
             <a:extLst>
               <a:ext uri="{FF2B5EF4-FFF2-40B4-BE49-F238E27FC236}">
-                <a16:creationId xmlns:a16="http://schemas.microsoft.com/office/drawing/2014/main" id="{9D1E6A2A-7F88-CBB4-3334-983324F4C48F}"/>
+                <a16:creationId xmlns:a16="http://schemas.microsoft.com/office/drawing/2014/main" id="{5EDAFB2F-4C50-F5A6-BE30-717C2D105C2B}"/>
               </a:ext>
             </a:extLst>
           </p:cNvPr>
@@ -9013,7 +9013,7 @@
           <p:cNvPr id="10" name="TextBox 9">
             <a:extLst>
               <a:ext uri="{FF2B5EF4-FFF2-40B4-BE49-F238E27FC236}">
-                <a16:creationId xmlns:a16="http://schemas.microsoft.com/office/drawing/2014/main" id="{BEA3C63F-52BD-A74B-D4A7-908E68098EE3}"/>
+                <a16:creationId xmlns:a16="http://schemas.microsoft.com/office/drawing/2014/main" id="{D30E8E03-5DDA-577D-DC19-56DCC4DE6DD8}"/>
               </a:ext>
             </a:extLst>
           </p:cNvPr>
@@ -9059,7 +9059,7 @@
           <p:cNvPr id="11" name="TextBox 10">
             <a:extLst>
               <a:ext uri="{FF2B5EF4-FFF2-40B4-BE49-F238E27FC236}">
-                <a16:creationId xmlns:a16="http://schemas.microsoft.com/office/drawing/2014/main" id="{0819C56E-1BD6-C621-33B6-2C9D2A5243C8}"/>
+                <a16:creationId xmlns:a16="http://schemas.microsoft.com/office/drawing/2014/main" id="{635AE798-D84C-243F-30C6-C55D1740A5A2}"/>
               </a:ext>
             </a:extLst>
           </p:cNvPr>
@@ -9105,7 +9105,7 @@
           <p:cNvPr id="12" name="TextBox 11">
             <a:extLst>
               <a:ext uri="{FF2B5EF4-FFF2-40B4-BE49-F238E27FC236}">
-                <a16:creationId xmlns:a16="http://schemas.microsoft.com/office/drawing/2014/main" id="{4B9E8B79-D8D4-05AC-7F16-BCE0897CA3A9}"/>
+                <a16:creationId xmlns:a16="http://schemas.microsoft.com/office/drawing/2014/main" id="{6FC0B2A3-D871-3D7A-6084-7257AB778DB9}"/>
               </a:ext>
             </a:extLst>
           </p:cNvPr>
@@ -9151,7 +9151,7 @@
           <p:cNvPr id="13" name="Rectangle: Rounded Corners 12">
             <a:extLst>
               <a:ext uri="{FF2B5EF4-FFF2-40B4-BE49-F238E27FC236}">
-                <a16:creationId xmlns:a16="http://schemas.microsoft.com/office/drawing/2014/main" id="{F7D99F6F-88FB-627F-4289-205A5F5D1A3F}"/>
+                <a16:creationId xmlns:a16="http://schemas.microsoft.com/office/drawing/2014/main" id="{3D7F48C0-E702-8891-75BA-07BD86BE27B8}"/>
               </a:ext>
             </a:extLst>
           </p:cNvPr>
@@ -9221,7 +9221,7 @@
           <p:cNvPr id="14" name="TextBox 13">
             <a:extLst>
               <a:ext uri="{FF2B5EF4-FFF2-40B4-BE49-F238E27FC236}">
-                <a16:creationId xmlns:a16="http://schemas.microsoft.com/office/drawing/2014/main" id="{EE286D0E-3A6C-58AD-B4F4-794F671F3A92}"/>
+                <a16:creationId xmlns:a16="http://schemas.microsoft.com/office/drawing/2014/main" id="{721BDAEC-B582-9510-E2D3-B21877FC2FCF}"/>
               </a:ext>
             </a:extLst>
           </p:cNvPr>
@@ -9262,7 +9262,7 @@
           <p:cNvPr id="15" name="TextBox 14">
             <a:extLst>
               <a:ext uri="{FF2B5EF4-FFF2-40B4-BE49-F238E27FC236}">
-                <a16:creationId xmlns:a16="http://schemas.microsoft.com/office/drawing/2014/main" id="{1C0806C0-D2AE-AAE5-70EC-E1DC5FC9F012}"/>
+                <a16:creationId xmlns:a16="http://schemas.microsoft.com/office/drawing/2014/main" id="{A907E464-0D08-BB6F-0C8F-07A2282160B5}"/>
               </a:ext>
             </a:extLst>
           </p:cNvPr>
@@ -9303,7 +9303,7 @@
           <p:cNvPr id="16" name="TextBox 15">
             <a:extLst>
               <a:ext uri="{FF2B5EF4-FFF2-40B4-BE49-F238E27FC236}">
-                <a16:creationId xmlns:a16="http://schemas.microsoft.com/office/drawing/2014/main" id="{2B9A364A-BC11-DA5D-D0A2-01CEC6CF4150}"/>
+                <a16:creationId xmlns:a16="http://schemas.microsoft.com/office/drawing/2014/main" id="{84D1A06D-A98E-CD84-8EBF-DB41157825DB}"/>
               </a:ext>
             </a:extLst>
           </p:cNvPr>
@@ -9343,7 +9343,7 @@
           <p:cNvPr id="17" name="TextBox 16">
             <a:extLst>
               <a:ext uri="{FF2B5EF4-FFF2-40B4-BE49-F238E27FC236}">
-                <a16:creationId xmlns:a16="http://schemas.microsoft.com/office/drawing/2014/main" id="{EBED3E12-48D8-7CBD-AE2C-0A1FF42CC720}"/>
+                <a16:creationId xmlns:a16="http://schemas.microsoft.com/office/drawing/2014/main" id="{B2DABDF1-3423-BADB-4DE9-3AFF9B35255C}"/>
               </a:ext>
             </a:extLst>
           </p:cNvPr>
@@ -9389,7 +9389,7 @@
           <p:cNvPr id="18" name="TextBox 17">
             <a:extLst>
               <a:ext uri="{FF2B5EF4-FFF2-40B4-BE49-F238E27FC236}">
-                <a16:creationId xmlns:a16="http://schemas.microsoft.com/office/drawing/2014/main" id="{C9B62282-2C36-9016-3D84-A2C612AA7A72}"/>
+                <a16:creationId xmlns:a16="http://schemas.microsoft.com/office/drawing/2014/main" id="{DC5A83C4-E281-67B9-6A76-2EB28AE03CC4}"/>
               </a:ext>
             </a:extLst>
           </p:cNvPr>
@@ -9435,7 +9435,7 @@
           <p:cNvPr id="19" name="Rectangle: Rounded Corners 18">
             <a:extLst>
               <a:ext uri="{FF2B5EF4-FFF2-40B4-BE49-F238E27FC236}">
-                <a16:creationId xmlns:a16="http://schemas.microsoft.com/office/drawing/2014/main" id="{7836F7BC-DC1E-BCAA-E83D-4A007A880FB0}"/>
+                <a16:creationId xmlns:a16="http://schemas.microsoft.com/office/drawing/2014/main" id="{D34F5C87-FBD9-F3D6-0922-3D96E946E9C3}"/>
               </a:ext>
             </a:extLst>
           </p:cNvPr>
@@ -9505,7 +9505,7 @@
           <p:cNvPr id="20" name="TextBox 19">
             <a:extLst>
               <a:ext uri="{FF2B5EF4-FFF2-40B4-BE49-F238E27FC236}">
-                <a16:creationId xmlns:a16="http://schemas.microsoft.com/office/drawing/2014/main" id="{E9C394C3-EBCD-BC82-58B9-26E5B8E03706}"/>
+                <a16:creationId xmlns:a16="http://schemas.microsoft.com/office/drawing/2014/main" id="{239F734F-FEBB-BEB6-BFAA-49AD7CEF51F3}"/>
               </a:ext>
             </a:extLst>
           </p:cNvPr>
@@ -9551,7 +9551,7 @@
           <p:cNvPr id="21" name="TextBox 20">
             <a:extLst>
               <a:ext uri="{FF2B5EF4-FFF2-40B4-BE49-F238E27FC236}">
-                <a16:creationId xmlns:a16="http://schemas.microsoft.com/office/drawing/2014/main" id="{A0083046-5418-5D55-A9D5-FA026E3D7245}"/>
+                <a16:creationId xmlns:a16="http://schemas.microsoft.com/office/drawing/2014/main" id="{EFFF3ED4-F147-14CC-FD95-11E2CABBA6FC}"/>
               </a:ext>
             </a:extLst>
           </p:cNvPr>
@@ -9590,7 +9590,7 @@
     </p:spTree>
     <p:extLst>
       <p:ext uri="{BB962C8B-B14F-4D97-AF65-F5344CB8AC3E}">
-        <p14:creationId xmlns:p14="http://schemas.microsoft.com/office/powerpoint/2010/main" val="1829790995"/>
+        <p14:creationId xmlns:p14="http://schemas.microsoft.com/office/powerpoint/2010/main" val="3516188875"/>
       </p:ext>
     </p:extLst>
   </p:cSld>
@@ -9630,7 +9630,7 @@
           <p:cNvPr id="2" name="TextBox 1">
             <a:extLst>
               <a:ext uri="{FF2B5EF4-FFF2-40B4-BE49-F238E27FC236}">
-                <a16:creationId xmlns:a16="http://schemas.microsoft.com/office/drawing/2014/main" id="{8879BB96-1113-B65B-5671-13EFDC73E48A}"/>
+                <a16:creationId xmlns:a16="http://schemas.microsoft.com/office/drawing/2014/main" id="{726C2082-71E3-7AE3-3CDB-F3F48037B850}"/>
               </a:ext>
             </a:extLst>
           </p:cNvPr>
@@ -9676,7 +9676,7 @@
           <p:cNvPr id="3" name="Rectangle: Rounded Corners 2">
             <a:extLst>
               <a:ext uri="{FF2B5EF4-FFF2-40B4-BE49-F238E27FC236}">
-                <a16:creationId xmlns:a16="http://schemas.microsoft.com/office/drawing/2014/main" id="{27512163-4E20-5AC5-80D2-4DBF0A6ED735}"/>
+                <a16:creationId xmlns:a16="http://schemas.microsoft.com/office/drawing/2014/main" id="{FBE24F4C-177C-FA2A-E64D-BC58A93EBBEE}"/>
               </a:ext>
             </a:extLst>
           </p:cNvPr>
@@ -9746,7 +9746,7 @@
           <p:cNvPr id="4" name="TextBox 3">
             <a:extLst>
               <a:ext uri="{FF2B5EF4-FFF2-40B4-BE49-F238E27FC236}">
-                <a16:creationId xmlns:a16="http://schemas.microsoft.com/office/drawing/2014/main" id="{7B53202C-FF91-ACDE-D683-3BC9D7911A59}"/>
+                <a16:creationId xmlns:a16="http://schemas.microsoft.com/office/drawing/2014/main" id="{51D7E309-0517-65C8-5859-848528FD489D}"/>
               </a:ext>
             </a:extLst>
           </p:cNvPr>
@@ -9786,7 +9786,7 @@
           <p:cNvPr id="5" name="TextBox 4">
             <a:extLst>
               <a:ext uri="{FF2B5EF4-FFF2-40B4-BE49-F238E27FC236}">
-                <a16:creationId xmlns:a16="http://schemas.microsoft.com/office/drawing/2014/main" id="{3DB3E209-E580-1A92-48AC-162238EE471D}"/>
+                <a16:creationId xmlns:a16="http://schemas.microsoft.com/office/drawing/2014/main" id="{A16A2C7D-E935-12C5-1A08-7A157349B667}"/>
               </a:ext>
             </a:extLst>
           </p:cNvPr>
@@ -9832,7 +9832,7 @@
           <p:cNvPr id="6" name="Rectangle: Rounded Corners 5">
             <a:extLst>
               <a:ext uri="{FF2B5EF4-FFF2-40B4-BE49-F238E27FC236}">
-                <a16:creationId xmlns:a16="http://schemas.microsoft.com/office/drawing/2014/main" id="{A1891BD8-EB14-528B-B778-881ECA6385D9}"/>
+                <a16:creationId xmlns:a16="http://schemas.microsoft.com/office/drawing/2014/main" id="{D1831598-96B0-9A72-68E4-E746C1A4CB8F}"/>
               </a:ext>
             </a:extLst>
           </p:cNvPr>
@@ -9902,7 +9902,7 @@
           <p:cNvPr id="7" name="TextBox 6">
             <a:extLst>
               <a:ext uri="{FF2B5EF4-FFF2-40B4-BE49-F238E27FC236}">
-                <a16:creationId xmlns:a16="http://schemas.microsoft.com/office/drawing/2014/main" id="{F3E725F3-B243-8B1B-7860-6B1656B86378}"/>
+                <a16:creationId xmlns:a16="http://schemas.microsoft.com/office/drawing/2014/main" id="{359E8E75-3786-CDD6-147D-EE28F8F662CE}"/>
               </a:ext>
             </a:extLst>
           </p:cNvPr>
@@ -9942,7 +9942,7 @@
           <p:cNvPr id="8" name="TextBox 7">
             <a:extLst>
               <a:ext uri="{FF2B5EF4-FFF2-40B4-BE49-F238E27FC236}">
-                <a16:creationId xmlns:a16="http://schemas.microsoft.com/office/drawing/2014/main" id="{4945FB10-2BB3-3C54-F0DC-67629500F135}"/>
+                <a16:creationId xmlns:a16="http://schemas.microsoft.com/office/drawing/2014/main" id="{34963BF6-F608-9A7F-F84E-A3C2E12D832B}"/>
               </a:ext>
             </a:extLst>
           </p:cNvPr>
@@ -9988,7 +9988,7 @@
           <p:cNvPr id="9" name="Rectangle: Rounded Corners 8">
             <a:extLst>
               <a:ext uri="{FF2B5EF4-FFF2-40B4-BE49-F238E27FC236}">
-                <a16:creationId xmlns:a16="http://schemas.microsoft.com/office/drawing/2014/main" id="{0BFEFB48-2D59-324A-A32C-ADFA9EBCB0BB}"/>
+                <a16:creationId xmlns:a16="http://schemas.microsoft.com/office/drawing/2014/main" id="{193FCBAF-231B-231E-EBEE-23E9C75BE2B4}"/>
               </a:ext>
             </a:extLst>
           </p:cNvPr>
@@ -10058,7 +10058,7 @@
           <p:cNvPr id="10" name="TextBox 9">
             <a:extLst>
               <a:ext uri="{FF2B5EF4-FFF2-40B4-BE49-F238E27FC236}">
-                <a16:creationId xmlns:a16="http://schemas.microsoft.com/office/drawing/2014/main" id="{BE1574EE-B74E-3B50-3426-F0D2033C4A12}"/>
+                <a16:creationId xmlns:a16="http://schemas.microsoft.com/office/drawing/2014/main" id="{9C079935-9998-EDC4-7507-438729F178A1}"/>
               </a:ext>
             </a:extLst>
           </p:cNvPr>
@@ -10098,7 +10098,7 @@
           <p:cNvPr id="11" name="TextBox 10">
             <a:extLst>
               <a:ext uri="{FF2B5EF4-FFF2-40B4-BE49-F238E27FC236}">
-                <a16:creationId xmlns:a16="http://schemas.microsoft.com/office/drawing/2014/main" id="{4145C729-FCF1-0AFF-8C16-82749F030B5C}"/>
+                <a16:creationId xmlns:a16="http://schemas.microsoft.com/office/drawing/2014/main" id="{B7001757-3654-D77C-B163-CA0C1927A673}"/>
               </a:ext>
             </a:extLst>
           </p:cNvPr>
@@ -10144,7 +10144,7 @@
           <p:cNvPr id="12" name="Rectangle: Rounded Corners 11">
             <a:extLst>
               <a:ext uri="{FF2B5EF4-FFF2-40B4-BE49-F238E27FC236}">
-                <a16:creationId xmlns:a16="http://schemas.microsoft.com/office/drawing/2014/main" id="{E431FFD7-7DBF-C85B-80D4-0DD488F5153D}"/>
+                <a16:creationId xmlns:a16="http://schemas.microsoft.com/office/drawing/2014/main" id="{812770F9-F2AE-B11D-ACC4-15735C4EA8FE}"/>
               </a:ext>
             </a:extLst>
           </p:cNvPr>
@@ -10214,7 +10214,7 @@
           <p:cNvPr id="13" name="TextBox 12">
             <a:extLst>
               <a:ext uri="{FF2B5EF4-FFF2-40B4-BE49-F238E27FC236}">
-                <a16:creationId xmlns:a16="http://schemas.microsoft.com/office/drawing/2014/main" id="{BC2E71CF-8A27-2982-5E65-BF3CA25DD9C8}"/>
+                <a16:creationId xmlns:a16="http://schemas.microsoft.com/office/drawing/2014/main" id="{C5263DB3-2EDE-CC8F-4B70-06CD38755D11}"/>
               </a:ext>
             </a:extLst>
           </p:cNvPr>
@@ -10254,7 +10254,7 @@
           <p:cNvPr id="14" name="TextBox 13">
             <a:extLst>
               <a:ext uri="{FF2B5EF4-FFF2-40B4-BE49-F238E27FC236}">
-                <a16:creationId xmlns:a16="http://schemas.microsoft.com/office/drawing/2014/main" id="{EDCE0E85-5768-D29F-9DA9-7B5234C4EE2F}"/>
+                <a16:creationId xmlns:a16="http://schemas.microsoft.com/office/drawing/2014/main" id="{2D42B3CE-A4C9-C8C5-1698-DF7347CA450F}"/>
               </a:ext>
             </a:extLst>
           </p:cNvPr>
@@ -10300,7 +10300,7 @@
           <p:cNvPr id="15" name="Rectangle: Rounded Corners 14">
             <a:extLst>
               <a:ext uri="{FF2B5EF4-FFF2-40B4-BE49-F238E27FC236}">
-                <a16:creationId xmlns:a16="http://schemas.microsoft.com/office/drawing/2014/main" id="{4937A56C-4543-CD11-8305-2BE03E73BC84}"/>
+                <a16:creationId xmlns:a16="http://schemas.microsoft.com/office/drawing/2014/main" id="{B90598C5-2F25-6A5F-A54A-A5F521641721}"/>
               </a:ext>
             </a:extLst>
           </p:cNvPr>
@@ -10370,7 +10370,7 @@
           <p:cNvPr id="16" name="TextBox 15">
             <a:extLst>
               <a:ext uri="{FF2B5EF4-FFF2-40B4-BE49-F238E27FC236}">
-                <a16:creationId xmlns:a16="http://schemas.microsoft.com/office/drawing/2014/main" id="{720F3CA0-BA94-6FA2-E212-68BC494238B6}"/>
+                <a16:creationId xmlns:a16="http://schemas.microsoft.com/office/drawing/2014/main" id="{6CCF106B-A400-E56C-8441-8A175795899E}"/>
               </a:ext>
             </a:extLst>
           </p:cNvPr>
@@ -10410,7 +10410,7 @@
           <p:cNvPr id="17" name="TextBox 16">
             <a:extLst>
               <a:ext uri="{FF2B5EF4-FFF2-40B4-BE49-F238E27FC236}">
-                <a16:creationId xmlns:a16="http://schemas.microsoft.com/office/drawing/2014/main" id="{DDC65624-AC06-2A6E-1EAB-F2FCA1D9DC1B}"/>
+                <a16:creationId xmlns:a16="http://schemas.microsoft.com/office/drawing/2014/main" id="{3E539BF2-F6FB-4622-FCAD-2F9EFD73893A}"/>
               </a:ext>
             </a:extLst>
           </p:cNvPr>
@@ -10475,7 +10475,7 @@
           <p:cNvPr id="18" name="TextBox 17">
             <a:extLst>
               <a:ext uri="{FF2B5EF4-FFF2-40B4-BE49-F238E27FC236}">
-                <a16:creationId xmlns:a16="http://schemas.microsoft.com/office/drawing/2014/main" id="{352E08FF-877C-9273-2651-EC9C5A5E6578}"/>
+                <a16:creationId xmlns:a16="http://schemas.microsoft.com/office/drawing/2014/main" id="{BA858605-9874-4244-BD8B-9F12858D572B}"/>
               </a:ext>
             </a:extLst>
           </p:cNvPr>
@@ -10521,7 +10521,7 @@
           <p:cNvPr id="19" name="TextBox 18">
             <a:extLst>
               <a:ext uri="{FF2B5EF4-FFF2-40B4-BE49-F238E27FC236}">
-                <a16:creationId xmlns:a16="http://schemas.microsoft.com/office/drawing/2014/main" id="{2D2F0002-CD71-B7CB-E9B9-6D81E091D339}"/>
+                <a16:creationId xmlns:a16="http://schemas.microsoft.com/office/drawing/2014/main" id="{0105A8FF-F4B4-BA1E-022C-3775241FC77D}"/>
               </a:ext>
             </a:extLst>
           </p:cNvPr>
@@ -10567,7 +10567,7 @@
           <p:cNvPr id="20" name="TextBox 19">
             <a:extLst>
               <a:ext uri="{FF2B5EF4-FFF2-40B4-BE49-F238E27FC236}">
-                <a16:creationId xmlns:a16="http://schemas.microsoft.com/office/drawing/2014/main" id="{25FF79D9-8459-7835-769D-9D49CCB40C29}"/>
+                <a16:creationId xmlns:a16="http://schemas.microsoft.com/office/drawing/2014/main" id="{75F453B1-8E48-F702-D59C-FABF9EC29745}"/>
               </a:ext>
             </a:extLst>
           </p:cNvPr>
@@ -10612,7 +10612,7 @@
     </p:spTree>
     <p:extLst>
       <p:ext uri="{BB962C8B-B14F-4D97-AF65-F5344CB8AC3E}">
-        <p14:creationId xmlns:p14="http://schemas.microsoft.com/office/powerpoint/2010/main" val="3662742027"/>
+        <p14:creationId xmlns:p14="http://schemas.microsoft.com/office/powerpoint/2010/main" val="3147690441"/>
       </p:ext>
     </p:extLst>
   </p:cSld>
@@ -10652,7 +10652,7 @@
           <p:cNvPr id="2" name="TextBox 1">
             <a:extLst>
               <a:ext uri="{FF2B5EF4-FFF2-40B4-BE49-F238E27FC236}">
-                <a16:creationId xmlns:a16="http://schemas.microsoft.com/office/drawing/2014/main" id="{476A6F61-E40E-07B9-4D85-3B3E00CFEC3A}"/>
+                <a16:creationId xmlns:a16="http://schemas.microsoft.com/office/drawing/2014/main" id="{10422736-ADD1-3069-9A8C-8AD773DC081B}"/>
               </a:ext>
             </a:extLst>
           </p:cNvPr>
@@ -10692,7 +10692,7 @@
           <p:cNvPr id="3" name="TextBox 2">
             <a:extLst>
               <a:ext uri="{FF2B5EF4-FFF2-40B4-BE49-F238E27FC236}">
-                <a16:creationId xmlns:a16="http://schemas.microsoft.com/office/drawing/2014/main" id="{AC0B1FCD-E503-555D-9E1D-1C10C57CAFA7}"/>
+                <a16:creationId xmlns:a16="http://schemas.microsoft.com/office/drawing/2014/main" id="{9EF31152-D109-8308-185B-F66C1325B7D0}"/>
               </a:ext>
             </a:extLst>
           </p:cNvPr>
@@ -10738,7 +10738,7 @@
           <p:cNvPr id="4" name="Oval 3">
             <a:extLst>
               <a:ext uri="{FF2B5EF4-FFF2-40B4-BE49-F238E27FC236}">
-                <a16:creationId xmlns:a16="http://schemas.microsoft.com/office/drawing/2014/main" id="{452FA882-9ABD-A70D-BB39-9A9DF7973B19}"/>
+                <a16:creationId xmlns:a16="http://schemas.microsoft.com/office/drawing/2014/main" id="{571DB914-7619-488D-E356-115EBE66547F}"/>
               </a:ext>
             </a:extLst>
           </p:cNvPr>
@@ -10814,7 +10814,7 @@
           <p:cNvPr id="5" name="TextBox 4">
             <a:extLst>
               <a:ext uri="{FF2B5EF4-FFF2-40B4-BE49-F238E27FC236}">
-                <a16:creationId xmlns:a16="http://schemas.microsoft.com/office/drawing/2014/main" id="{A5B3FC3E-547E-F5CC-AABB-005C55852C99}"/>
+                <a16:creationId xmlns:a16="http://schemas.microsoft.com/office/drawing/2014/main" id="{0D9D4037-A0E6-ED49-B96F-B01D46AB1F47}"/>
               </a:ext>
             </a:extLst>
           </p:cNvPr>
@@ -10860,7 +10860,7 @@
           <p:cNvPr id="6" name="Oval 5">
             <a:extLst>
               <a:ext uri="{FF2B5EF4-FFF2-40B4-BE49-F238E27FC236}">
-                <a16:creationId xmlns:a16="http://schemas.microsoft.com/office/drawing/2014/main" id="{FEEC8BAB-F4E8-9B2E-C249-D9422EBE7E44}"/>
+                <a16:creationId xmlns:a16="http://schemas.microsoft.com/office/drawing/2014/main" id="{D2F4AFF0-B536-54C9-2432-C6DA5622AAAD}"/>
               </a:ext>
             </a:extLst>
           </p:cNvPr>
@@ -10936,7 +10936,7 @@
           <p:cNvPr id="7" name="TextBox 6">
             <a:extLst>
               <a:ext uri="{FF2B5EF4-FFF2-40B4-BE49-F238E27FC236}">
-                <a16:creationId xmlns:a16="http://schemas.microsoft.com/office/drawing/2014/main" id="{E1CEE09D-4CC4-7C9F-C8A6-D48DFC4FC99E}"/>
+                <a16:creationId xmlns:a16="http://schemas.microsoft.com/office/drawing/2014/main" id="{B8AC0C31-3096-202E-EEAD-678C0B3D13A0}"/>
               </a:ext>
             </a:extLst>
           </p:cNvPr>
@@ -10982,7 +10982,7 @@
           <p:cNvPr id="8" name="Oval 7">
             <a:extLst>
               <a:ext uri="{FF2B5EF4-FFF2-40B4-BE49-F238E27FC236}">
-                <a16:creationId xmlns:a16="http://schemas.microsoft.com/office/drawing/2014/main" id="{BDE44036-BF7D-5EFA-051A-4564DC687377}"/>
+                <a16:creationId xmlns:a16="http://schemas.microsoft.com/office/drawing/2014/main" id="{34C56009-99FC-7B12-8BF4-68115EED0448}"/>
               </a:ext>
             </a:extLst>
           </p:cNvPr>
@@ -11058,7 +11058,7 @@
           <p:cNvPr id="9" name="TextBox 8">
             <a:extLst>
               <a:ext uri="{FF2B5EF4-FFF2-40B4-BE49-F238E27FC236}">
-                <a16:creationId xmlns:a16="http://schemas.microsoft.com/office/drawing/2014/main" id="{4DF36692-71F3-EFA5-40C6-021214D53B7C}"/>
+                <a16:creationId xmlns:a16="http://schemas.microsoft.com/office/drawing/2014/main" id="{5B8CE681-EC23-BCBB-8827-87955C478135}"/>
               </a:ext>
             </a:extLst>
           </p:cNvPr>
@@ -11104,7 +11104,7 @@
           <p:cNvPr id="10" name="Oval 9">
             <a:extLst>
               <a:ext uri="{FF2B5EF4-FFF2-40B4-BE49-F238E27FC236}">
-                <a16:creationId xmlns:a16="http://schemas.microsoft.com/office/drawing/2014/main" id="{13E8FC87-CAA4-C01B-76BE-A4CDF8C2BC99}"/>
+                <a16:creationId xmlns:a16="http://schemas.microsoft.com/office/drawing/2014/main" id="{8A80F1A8-8C5B-964F-F623-785115B2733B}"/>
               </a:ext>
             </a:extLst>
           </p:cNvPr>
@@ -11180,7 +11180,7 @@
           <p:cNvPr id="11" name="TextBox 10">
             <a:extLst>
               <a:ext uri="{FF2B5EF4-FFF2-40B4-BE49-F238E27FC236}">
-                <a16:creationId xmlns:a16="http://schemas.microsoft.com/office/drawing/2014/main" id="{62D762AD-3EEA-EB62-418D-D24316711AD8}"/>
+                <a16:creationId xmlns:a16="http://schemas.microsoft.com/office/drawing/2014/main" id="{6E220B3F-8290-15C1-F109-524C49BE6472}"/>
               </a:ext>
             </a:extLst>
           </p:cNvPr>
@@ -11226,7 +11226,7 @@
           <p:cNvPr id="12" name="Oval 11">
             <a:extLst>
               <a:ext uri="{FF2B5EF4-FFF2-40B4-BE49-F238E27FC236}">
-                <a16:creationId xmlns:a16="http://schemas.microsoft.com/office/drawing/2014/main" id="{1C6F7939-9743-BA39-D5B1-8B684F5F97C3}"/>
+                <a16:creationId xmlns:a16="http://schemas.microsoft.com/office/drawing/2014/main" id="{A1105E35-F898-67A8-5B5A-0656D16B86C2}"/>
               </a:ext>
             </a:extLst>
           </p:cNvPr>
@@ -11302,7 +11302,7 @@
           <p:cNvPr id="13" name="TextBox 12">
             <a:extLst>
               <a:ext uri="{FF2B5EF4-FFF2-40B4-BE49-F238E27FC236}">
-                <a16:creationId xmlns:a16="http://schemas.microsoft.com/office/drawing/2014/main" id="{A047216F-B3D4-A345-4AD5-7DD47B79BE9C}"/>
+                <a16:creationId xmlns:a16="http://schemas.microsoft.com/office/drawing/2014/main" id="{8D87EFAD-A7DB-5D4F-5EF5-2AC8D2AFBA0B}"/>
               </a:ext>
             </a:extLst>
           </p:cNvPr>
@@ -11348,7 +11348,7 @@
           <p:cNvPr id="15" name="Picture 14">
             <a:extLst>
               <a:ext uri="{FF2B5EF4-FFF2-40B4-BE49-F238E27FC236}">
-                <a16:creationId xmlns:a16="http://schemas.microsoft.com/office/drawing/2014/main" id="{0072A0E5-F59C-03A7-FDB0-408847BE2FC1}"/>
+                <a16:creationId xmlns:a16="http://schemas.microsoft.com/office/drawing/2014/main" id="{A499BCBD-671A-B9BC-5942-5D1DB1ADFC96}"/>
               </a:ext>
             </a:extLst>
           </p:cNvPr>
@@ -11389,7 +11389,7 @@
           <p:cNvPr id="16" name="TextBox 15">
             <a:extLst>
               <a:ext uri="{FF2B5EF4-FFF2-40B4-BE49-F238E27FC236}">
-                <a16:creationId xmlns:a16="http://schemas.microsoft.com/office/drawing/2014/main" id="{F2D317D5-F91F-92D2-0BF2-AC25FEF7D95F}"/>
+                <a16:creationId xmlns:a16="http://schemas.microsoft.com/office/drawing/2014/main" id="{E26BE7B6-729A-3789-A370-69EF6D1AA6AD}"/>
               </a:ext>
             </a:extLst>
           </p:cNvPr>
@@ -11433,7 +11433,7 @@
     </p:spTree>
     <p:extLst>
       <p:ext uri="{BB962C8B-B14F-4D97-AF65-F5344CB8AC3E}">
-        <p14:creationId xmlns:p14="http://schemas.microsoft.com/office/powerpoint/2010/main" val="402477911"/>
+        <p14:creationId xmlns:p14="http://schemas.microsoft.com/office/powerpoint/2010/main" val="578057218"/>
       </p:ext>
     </p:extLst>
   </p:cSld>
@@ -11473,7 +11473,7 @@
           <p:cNvPr id="2" name="TextBox 1">
             <a:extLst>
               <a:ext uri="{FF2B5EF4-FFF2-40B4-BE49-F238E27FC236}">
-                <a16:creationId xmlns:a16="http://schemas.microsoft.com/office/drawing/2014/main" id="{E48E4342-41D5-B719-7423-C96FB9A659B4}"/>
+                <a16:creationId xmlns:a16="http://schemas.microsoft.com/office/drawing/2014/main" id="{F2B226EF-0D52-A780-25CC-6724EE37D4F5}"/>
               </a:ext>
             </a:extLst>
           </p:cNvPr>
@@ -11513,7 +11513,7 @@
           <p:cNvPr id="3" name="Oval 2">
             <a:extLst>
               <a:ext uri="{FF2B5EF4-FFF2-40B4-BE49-F238E27FC236}">
-                <a16:creationId xmlns:a16="http://schemas.microsoft.com/office/drawing/2014/main" id="{0F31DAB6-F81F-F29E-76A2-6F4900334926}"/>
+                <a16:creationId xmlns:a16="http://schemas.microsoft.com/office/drawing/2014/main" id="{CD0F3C9E-F54A-201B-4CA7-26456E870BE4}"/>
               </a:ext>
             </a:extLst>
           </p:cNvPr>
@@ -11589,7 +11589,7 @@
           <p:cNvPr id="4" name="TextBox 3">
             <a:extLst>
               <a:ext uri="{FF2B5EF4-FFF2-40B4-BE49-F238E27FC236}">
-                <a16:creationId xmlns:a16="http://schemas.microsoft.com/office/drawing/2014/main" id="{866945F2-4249-0421-2A99-2BF54A1DAF04}"/>
+                <a16:creationId xmlns:a16="http://schemas.microsoft.com/office/drawing/2014/main" id="{7F7D8A7D-2384-8B10-5FA2-EC461D3807C5}"/>
               </a:ext>
             </a:extLst>
           </p:cNvPr>
@@ -11629,7 +11629,7 @@
           <p:cNvPr id="5" name="TextBox 4">
             <a:extLst>
               <a:ext uri="{FF2B5EF4-FFF2-40B4-BE49-F238E27FC236}">
-                <a16:creationId xmlns:a16="http://schemas.microsoft.com/office/drawing/2014/main" id="{B4892874-C8A0-B3EA-3066-2424D1428C24}"/>
+                <a16:creationId xmlns:a16="http://schemas.microsoft.com/office/drawing/2014/main" id="{B88CCD63-1C36-35D2-30F4-4DDEEF33BA17}"/>
               </a:ext>
             </a:extLst>
           </p:cNvPr>
@@ -11675,7 +11675,7 @@
           <p:cNvPr id="6" name="Oval 5">
             <a:extLst>
               <a:ext uri="{FF2B5EF4-FFF2-40B4-BE49-F238E27FC236}">
-                <a16:creationId xmlns:a16="http://schemas.microsoft.com/office/drawing/2014/main" id="{9CE09E0C-8EFB-982A-5373-B429F348BC79}"/>
+                <a16:creationId xmlns:a16="http://schemas.microsoft.com/office/drawing/2014/main" id="{4A7C0D50-B11F-EAC4-4FA1-58C5D7D55CC5}"/>
               </a:ext>
             </a:extLst>
           </p:cNvPr>
@@ -11751,7 +11751,7 @@
           <p:cNvPr id="7" name="TextBox 6">
             <a:extLst>
               <a:ext uri="{FF2B5EF4-FFF2-40B4-BE49-F238E27FC236}">
-                <a16:creationId xmlns:a16="http://schemas.microsoft.com/office/drawing/2014/main" id="{AC6D23DB-EB6D-0D12-07C6-14BCC6340C57}"/>
+                <a16:creationId xmlns:a16="http://schemas.microsoft.com/office/drawing/2014/main" id="{0ADBCE15-4DD3-64CC-1A50-96BB2B55C01F}"/>
               </a:ext>
             </a:extLst>
           </p:cNvPr>
@@ -11797,7 +11797,7 @@
           <p:cNvPr id="8" name="TextBox 7">
             <a:extLst>
               <a:ext uri="{FF2B5EF4-FFF2-40B4-BE49-F238E27FC236}">
-                <a16:creationId xmlns:a16="http://schemas.microsoft.com/office/drawing/2014/main" id="{1B41E62E-B5BB-A7A9-A362-0F6968971400}"/>
+                <a16:creationId xmlns:a16="http://schemas.microsoft.com/office/drawing/2014/main" id="{4D312FF9-91C4-0BAE-9B7E-3E3716660608}"/>
               </a:ext>
             </a:extLst>
           </p:cNvPr>
@@ -11843,7 +11843,7 @@
           <p:cNvPr id="9" name="Oval 8">
             <a:extLst>
               <a:ext uri="{FF2B5EF4-FFF2-40B4-BE49-F238E27FC236}">
-                <a16:creationId xmlns:a16="http://schemas.microsoft.com/office/drawing/2014/main" id="{E20290D2-B4A0-923C-8C4F-4CF65CAB853F}"/>
+                <a16:creationId xmlns:a16="http://schemas.microsoft.com/office/drawing/2014/main" id="{80FCBAB0-B4A6-E27E-5FF5-0D367AD7DF43}"/>
               </a:ext>
             </a:extLst>
           </p:cNvPr>
@@ -11919,7 +11919,7 @@
           <p:cNvPr id="10" name="TextBox 9">
             <a:extLst>
               <a:ext uri="{FF2B5EF4-FFF2-40B4-BE49-F238E27FC236}">
-                <a16:creationId xmlns:a16="http://schemas.microsoft.com/office/drawing/2014/main" id="{A6FDE649-C50C-08F8-CC96-167475832043}"/>
+                <a16:creationId xmlns:a16="http://schemas.microsoft.com/office/drawing/2014/main" id="{40696C41-F440-141A-BEAF-604D00F10693}"/>
               </a:ext>
             </a:extLst>
           </p:cNvPr>
@@ -11965,7 +11965,7 @@
           <p:cNvPr id="11" name="TextBox 10">
             <a:extLst>
               <a:ext uri="{FF2B5EF4-FFF2-40B4-BE49-F238E27FC236}">
-                <a16:creationId xmlns:a16="http://schemas.microsoft.com/office/drawing/2014/main" id="{FA9CC7D4-643A-3B06-6FA8-2C7801041AE5}"/>
+                <a16:creationId xmlns:a16="http://schemas.microsoft.com/office/drawing/2014/main" id="{9725245F-CFBA-0D74-A707-65B1DAFD6993}"/>
               </a:ext>
             </a:extLst>
           </p:cNvPr>
@@ -12011,7 +12011,7 @@
           <p:cNvPr id="12" name="Oval 11">
             <a:extLst>
               <a:ext uri="{FF2B5EF4-FFF2-40B4-BE49-F238E27FC236}">
-                <a16:creationId xmlns:a16="http://schemas.microsoft.com/office/drawing/2014/main" id="{062B6B8A-F6CC-92E6-4DCB-8F038CBFEEF9}"/>
+                <a16:creationId xmlns:a16="http://schemas.microsoft.com/office/drawing/2014/main" id="{5BE4ABD5-BE69-E8A4-34B2-28AF8A45C81C}"/>
               </a:ext>
             </a:extLst>
           </p:cNvPr>
@@ -12087,7 +12087,7 @@
           <p:cNvPr id="13" name="TextBox 12">
             <a:extLst>
               <a:ext uri="{FF2B5EF4-FFF2-40B4-BE49-F238E27FC236}">
-                <a16:creationId xmlns:a16="http://schemas.microsoft.com/office/drawing/2014/main" id="{E86D94FD-1649-E9E7-4476-D9995D3B6D0C}"/>
+                <a16:creationId xmlns:a16="http://schemas.microsoft.com/office/drawing/2014/main" id="{2E1F2116-EA6B-181C-E242-9693259B8BAA}"/>
               </a:ext>
             </a:extLst>
           </p:cNvPr>
@@ -12133,7 +12133,7 @@
           <p:cNvPr id="14" name="TextBox 13">
             <a:extLst>
               <a:ext uri="{FF2B5EF4-FFF2-40B4-BE49-F238E27FC236}">
-                <a16:creationId xmlns:a16="http://schemas.microsoft.com/office/drawing/2014/main" id="{14569D33-3218-144F-A60A-D2432F9F2D34}"/>
+                <a16:creationId xmlns:a16="http://schemas.microsoft.com/office/drawing/2014/main" id="{CD74CFBE-77F9-A3A3-CF1A-9F0F6DF151D5}"/>
               </a:ext>
             </a:extLst>
           </p:cNvPr>
@@ -12179,7 +12179,7 @@
           <p:cNvPr id="15" name="Oval 14">
             <a:extLst>
               <a:ext uri="{FF2B5EF4-FFF2-40B4-BE49-F238E27FC236}">
-                <a16:creationId xmlns:a16="http://schemas.microsoft.com/office/drawing/2014/main" id="{B4D2C36F-F856-6642-5223-335D32F6252B}"/>
+                <a16:creationId xmlns:a16="http://schemas.microsoft.com/office/drawing/2014/main" id="{785F5D45-CF2D-03D6-1522-56A0CA07B9BF}"/>
               </a:ext>
             </a:extLst>
           </p:cNvPr>
@@ -12255,7 +12255,7 @@
           <p:cNvPr id="16" name="TextBox 15">
             <a:extLst>
               <a:ext uri="{FF2B5EF4-FFF2-40B4-BE49-F238E27FC236}">
-                <a16:creationId xmlns:a16="http://schemas.microsoft.com/office/drawing/2014/main" id="{43C9A37E-E217-B1C5-F250-7E90902E8D4E}"/>
+                <a16:creationId xmlns:a16="http://schemas.microsoft.com/office/drawing/2014/main" id="{61ACE7AF-9A05-415A-520A-CB6B19B28976}"/>
               </a:ext>
             </a:extLst>
           </p:cNvPr>
@@ -12301,7 +12301,7 @@
           <p:cNvPr id="17" name="TextBox 16">
             <a:extLst>
               <a:ext uri="{FF2B5EF4-FFF2-40B4-BE49-F238E27FC236}">
-                <a16:creationId xmlns:a16="http://schemas.microsoft.com/office/drawing/2014/main" id="{0ADF0491-FDD2-192C-AC3B-22218B2632A6}"/>
+                <a16:creationId xmlns:a16="http://schemas.microsoft.com/office/drawing/2014/main" id="{E087076F-2DBE-2705-C439-4D70F5F637DC}"/>
               </a:ext>
             </a:extLst>
           </p:cNvPr>
@@ -12347,7 +12347,7 @@
           <p:cNvPr id="19" name="Picture 18">
             <a:extLst>
               <a:ext uri="{FF2B5EF4-FFF2-40B4-BE49-F238E27FC236}">
-                <a16:creationId xmlns:a16="http://schemas.microsoft.com/office/drawing/2014/main" id="{D91F0FB7-E37C-8A17-48C9-632AD7A009B1}"/>
+                <a16:creationId xmlns:a16="http://schemas.microsoft.com/office/drawing/2014/main" id="{9AA3970D-8B48-3429-AC86-40288A36D349}"/>
               </a:ext>
             </a:extLst>
           </p:cNvPr>
@@ -12388,7 +12388,7 @@
           <p:cNvPr id="20" name="TextBox 19">
             <a:extLst>
               <a:ext uri="{FF2B5EF4-FFF2-40B4-BE49-F238E27FC236}">
-                <a16:creationId xmlns:a16="http://schemas.microsoft.com/office/drawing/2014/main" id="{C2B192A7-5A83-E3D3-BF11-BEE744420AC3}"/>
+                <a16:creationId xmlns:a16="http://schemas.microsoft.com/office/drawing/2014/main" id="{3050638C-68CE-7C3C-A54B-5EFAC6D2C031}"/>
               </a:ext>
             </a:extLst>
           </p:cNvPr>
@@ -12434,7 +12434,7 @@
           <p:cNvPr id="21" name="Rectangle: Rounded Corners 20">
             <a:extLst>
               <a:ext uri="{FF2B5EF4-FFF2-40B4-BE49-F238E27FC236}">
-                <a16:creationId xmlns:a16="http://schemas.microsoft.com/office/drawing/2014/main" id="{00C618EF-135F-804D-9B8E-01F16F4A2C39}"/>
+                <a16:creationId xmlns:a16="http://schemas.microsoft.com/office/drawing/2014/main" id="{B8A51110-8DA2-40FF-D973-9D2392F9FAE5}"/>
               </a:ext>
             </a:extLst>
           </p:cNvPr>
@@ -12504,7 +12504,7 @@
           <p:cNvPr id="22" name="TextBox 21">
             <a:extLst>
               <a:ext uri="{FF2B5EF4-FFF2-40B4-BE49-F238E27FC236}">
-                <a16:creationId xmlns:a16="http://schemas.microsoft.com/office/drawing/2014/main" id="{BF9C21B3-5CEF-F924-9B53-13D30DD2DA5F}"/>
+                <a16:creationId xmlns:a16="http://schemas.microsoft.com/office/drawing/2014/main" id="{BF9F8695-E0E4-641B-2742-5D905102728D}"/>
               </a:ext>
             </a:extLst>
           </p:cNvPr>
@@ -12550,7 +12550,7 @@
           <p:cNvPr id="23" name="TextBox 22">
             <a:extLst>
               <a:ext uri="{FF2B5EF4-FFF2-40B4-BE49-F238E27FC236}">
-                <a16:creationId xmlns:a16="http://schemas.microsoft.com/office/drawing/2014/main" id="{0F7281D4-923C-CABB-F468-E9A88F0D4C0E}"/>
+                <a16:creationId xmlns:a16="http://schemas.microsoft.com/office/drawing/2014/main" id="{7EFA4CB8-D0DE-0755-A62C-A28A2945CBB3}"/>
               </a:ext>
             </a:extLst>
           </p:cNvPr>
@@ -12595,7 +12595,7 @@
     </p:spTree>
     <p:extLst>
       <p:ext uri="{BB962C8B-B14F-4D97-AF65-F5344CB8AC3E}">
-        <p14:creationId xmlns:p14="http://schemas.microsoft.com/office/powerpoint/2010/main" val="2037090616"/>
+        <p14:creationId xmlns:p14="http://schemas.microsoft.com/office/powerpoint/2010/main" val="43997081"/>
       </p:ext>
     </p:extLst>
   </p:cSld>
@@ -12635,7 +12635,7 @@
           <p:cNvPr id="2" name="TextBox 1">
             <a:extLst>
               <a:ext uri="{FF2B5EF4-FFF2-40B4-BE49-F238E27FC236}">
-                <a16:creationId xmlns:a16="http://schemas.microsoft.com/office/drawing/2014/main" id="{F094D306-934C-9066-5B64-A0CC0369E2A8}"/>
+                <a16:creationId xmlns:a16="http://schemas.microsoft.com/office/drawing/2014/main" id="{89BE3C37-640B-EE9F-A6D5-B0D02C956547}"/>
               </a:ext>
             </a:extLst>
           </p:cNvPr>
@@ -12681,7 +12681,7 @@
           <p:cNvPr id="3" name="Rectangle: Rounded Corners 2">
             <a:extLst>
               <a:ext uri="{FF2B5EF4-FFF2-40B4-BE49-F238E27FC236}">
-                <a16:creationId xmlns:a16="http://schemas.microsoft.com/office/drawing/2014/main" id="{C0992697-7A00-70F4-5801-8F0562D44711}"/>
+                <a16:creationId xmlns:a16="http://schemas.microsoft.com/office/drawing/2014/main" id="{323AF4DE-F773-C741-58DA-FA7F6C53D58A}"/>
               </a:ext>
             </a:extLst>
           </p:cNvPr>
@@ -12751,7 +12751,7 @@
           <p:cNvPr id="4" name="TextBox 3">
             <a:extLst>
               <a:ext uri="{FF2B5EF4-FFF2-40B4-BE49-F238E27FC236}">
-                <a16:creationId xmlns:a16="http://schemas.microsoft.com/office/drawing/2014/main" id="{8DE38B6D-4AB1-68F3-A881-456E79CDEA42}"/>
+                <a16:creationId xmlns:a16="http://schemas.microsoft.com/office/drawing/2014/main" id="{745E6EC3-FFAE-63BB-F089-98370D08D6D6}"/>
               </a:ext>
             </a:extLst>
           </p:cNvPr>
@@ -12791,7 +12791,7 @@
           <p:cNvPr id="5" name="TextBox 4">
             <a:extLst>
               <a:ext uri="{FF2B5EF4-FFF2-40B4-BE49-F238E27FC236}">
-                <a16:creationId xmlns:a16="http://schemas.microsoft.com/office/drawing/2014/main" id="{8AEEFFBC-9E50-2F16-CFFC-39061171250D}"/>
+                <a16:creationId xmlns:a16="http://schemas.microsoft.com/office/drawing/2014/main" id="{665FDE65-5D73-5269-93E0-3FF4AEACC29C}"/>
               </a:ext>
             </a:extLst>
           </p:cNvPr>
@@ -12832,7 +12832,7 @@
           <p:cNvPr id="6" name="TextBox 5">
             <a:extLst>
               <a:ext uri="{FF2B5EF4-FFF2-40B4-BE49-F238E27FC236}">
-                <a16:creationId xmlns:a16="http://schemas.microsoft.com/office/drawing/2014/main" id="{C54B6F17-A36B-E458-4034-1521EC4B4A6A}"/>
+                <a16:creationId xmlns:a16="http://schemas.microsoft.com/office/drawing/2014/main" id="{9EA4836D-89AD-19E3-ACC7-8C7E52BDDCF7}"/>
               </a:ext>
             </a:extLst>
           </p:cNvPr>
@@ -12872,7 +12872,7 @@
           <p:cNvPr id="7" name="TextBox 6">
             <a:extLst>
               <a:ext uri="{FF2B5EF4-FFF2-40B4-BE49-F238E27FC236}">
-                <a16:creationId xmlns:a16="http://schemas.microsoft.com/office/drawing/2014/main" id="{4A7C6FD2-CC52-4024-7FD7-0A1359747660}"/>
+                <a16:creationId xmlns:a16="http://schemas.microsoft.com/office/drawing/2014/main" id="{E14AC80A-DFCC-995F-3528-864C00AB9667}"/>
               </a:ext>
             </a:extLst>
           </p:cNvPr>
@@ -12918,7 +12918,7 @@
           <p:cNvPr id="8" name="TextBox 7">
             <a:extLst>
               <a:ext uri="{FF2B5EF4-FFF2-40B4-BE49-F238E27FC236}">
-                <a16:creationId xmlns:a16="http://schemas.microsoft.com/office/drawing/2014/main" id="{C523DFEF-AAE0-77A4-BE8D-AF606842E122}"/>
+                <a16:creationId xmlns:a16="http://schemas.microsoft.com/office/drawing/2014/main" id="{46B49DE1-AE78-7D0C-B4AE-1BEE13257CEE}"/>
               </a:ext>
             </a:extLst>
           </p:cNvPr>
@@ -12964,7 +12964,7 @@
           <p:cNvPr id="9" name="TextBox 8">
             <a:extLst>
               <a:ext uri="{FF2B5EF4-FFF2-40B4-BE49-F238E27FC236}">
-                <a16:creationId xmlns:a16="http://schemas.microsoft.com/office/drawing/2014/main" id="{C270E7D4-BBE7-CC39-2442-05A043C1220E}"/>
+                <a16:creationId xmlns:a16="http://schemas.microsoft.com/office/drawing/2014/main" id="{DB7AAFA3-99E5-B18E-EC13-4D159B81DA11}"/>
               </a:ext>
             </a:extLst>
           </p:cNvPr>
@@ -13010,7 +13010,7 @@
           <p:cNvPr id="10" name="Table 9">
             <a:extLst>
               <a:ext uri="{FF2B5EF4-FFF2-40B4-BE49-F238E27FC236}">
-                <a16:creationId xmlns:a16="http://schemas.microsoft.com/office/drawing/2014/main" id="{74557C14-057C-0B6E-811A-41451B6A8815}"/>
+                <a16:creationId xmlns:a16="http://schemas.microsoft.com/office/drawing/2014/main" id="{58790C1D-9D10-D7A1-4C91-8E486438287E}"/>
               </a:ext>
             </a:extLst>
           </p:cNvPr>
@@ -13020,7 +13020,7 @@
           <p:nvPr>
             <p:extLst>
               <p:ext uri="{D42A27DB-BD31-4B8C-83A1-F6EECF244321}">
-                <p14:modId xmlns:p14="http://schemas.microsoft.com/office/powerpoint/2010/main" val="564037451"/>
+                <p14:modId xmlns:p14="http://schemas.microsoft.com/office/powerpoint/2010/main" val="912614286"/>
               </p:ext>
             </p:extLst>
           </p:nvPr>
@@ -13039,21 +13039,21 @@
                 <a:gridCol w="1905000">
                   <a:extLst>
                     <a:ext uri="{9D8B030D-6E8A-4147-A177-3AD203B41FA5}">
-                      <a16:colId xmlns:a16="http://schemas.microsoft.com/office/drawing/2014/main" val="3064171227"/>
+                      <a16:colId xmlns:a16="http://schemas.microsoft.com/office/drawing/2014/main" val="3170279188"/>
                     </a:ext>
                   </a:extLst>
                 </a:gridCol>
                 <a:gridCol w="2413000">
                   <a:extLst>
                     <a:ext uri="{9D8B030D-6E8A-4147-A177-3AD203B41FA5}">
-                      <a16:colId xmlns:a16="http://schemas.microsoft.com/office/drawing/2014/main" val="1490332071"/>
+                      <a16:colId xmlns:a16="http://schemas.microsoft.com/office/drawing/2014/main" val="1441699180"/>
                     </a:ext>
                   </a:extLst>
                 </a:gridCol>
                 <a:gridCol w="2032000">
                   <a:extLst>
                     <a:ext uri="{9D8B030D-6E8A-4147-A177-3AD203B41FA5}">
-                      <a16:colId xmlns:a16="http://schemas.microsoft.com/office/drawing/2014/main" val="2887361152"/>
+                      <a16:colId xmlns:a16="http://schemas.microsoft.com/office/drawing/2014/main" val="737495182"/>
                     </a:ext>
                   </a:extLst>
                 </a:gridCol>
@@ -13127,7 +13127,7 @@
                 </a:tc>
                 <a:extLst>
                   <a:ext uri="{0D108BD9-81ED-4DB2-BD59-A6C34878D82A}">
-                    <a16:rowId xmlns:a16="http://schemas.microsoft.com/office/drawing/2014/main" val="3924674709"/>
+                    <a16:rowId xmlns:a16="http://schemas.microsoft.com/office/drawing/2014/main" val="2512073966"/>
                   </a:ext>
                 </a:extLst>
               </a:tr>
@@ -13212,7 +13212,7 @@
                 </a:tc>
                 <a:extLst>
                   <a:ext uri="{0D108BD9-81ED-4DB2-BD59-A6C34878D82A}">
-                    <a16:rowId xmlns:a16="http://schemas.microsoft.com/office/drawing/2014/main" val="1470866340"/>
+                    <a16:rowId xmlns:a16="http://schemas.microsoft.com/office/drawing/2014/main" val="3438988974"/>
                   </a:ext>
                 </a:extLst>
               </a:tr>
@@ -13291,7 +13291,7 @@
                 </a:tc>
                 <a:extLst>
                   <a:ext uri="{0D108BD9-81ED-4DB2-BD59-A6C34878D82A}">
-                    <a16:rowId xmlns:a16="http://schemas.microsoft.com/office/drawing/2014/main" val="3065476541"/>
+                    <a16:rowId xmlns:a16="http://schemas.microsoft.com/office/drawing/2014/main" val="311000397"/>
                   </a:ext>
                 </a:extLst>
               </a:tr>
@@ -13370,7 +13370,7 @@
                 </a:tc>
                 <a:extLst>
                   <a:ext uri="{0D108BD9-81ED-4DB2-BD59-A6C34878D82A}">
-                    <a16:rowId xmlns:a16="http://schemas.microsoft.com/office/drawing/2014/main" val="2177336652"/>
+                    <a16:rowId xmlns:a16="http://schemas.microsoft.com/office/drawing/2014/main" val="1321495374"/>
                   </a:ext>
                 </a:extLst>
               </a:tr>
@@ -13383,7 +13383,7 @@
           <p:cNvPr id="11" name="Rectangle: Rounded Corners 10">
             <a:extLst>
               <a:ext uri="{FF2B5EF4-FFF2-40B4-BE49-F238E27FC236}">
-                <a16:creationId xmlns:a16="http://schemas.microsoft.com/office/drawing/2014/main" id="{301D4DF2-E68B-7880-1510-7B7355BADA44}"/>
+                <a16:creationId xmlns:a16="http://schemas.microsoft.com/office/drawing/2014/main" id="{141E21E9-379E-248E-312F-B0BDB9C40C35}"/>
               </a:ext>
             </a:extLst>
           </p:cNvPr>
@@ -13453,7 +13453,7 @@
           <p:cNvPr id="12" name="TextBox 11">
             <a:extLst>
               <a:ext uri="{FF2B5EF4-FFF2-40B4-BE49-F238E27FC236}">
-                <a16:creationId xmlns:a16="http://schemas.microsoft.com/office/drawing/2014/main" id="{B5849C0F-E266-53D4-C3F3-61D8436F18EB}"/>
+                <a16:creationId xmlns:a16="http://schemas.microsoft.com/office/drawing/2014/main" id="{1BEDF5AE-BEDB-DCD6-E29E-FA66FC03B961}"/>
               </a:ext>
             </a:extLst>
           </p:cNvPr>
@@ -13493,7 +13493,7 @@
           <p:cNvPr id="13" name="Oval 12">
             <a:extLst>
               <a:ext uri="{FF2B5EF4-FFF2-40B4-BE49-F238E27FC236}">
-                <a16:creationId xmlns:a16="http://schemas.microsoft.com/office/drawing/2014/main" id="{153984DB-82BA-2538-E39B-A6722719841C}"/>
+                <a16:creationId xmlns:a16="http://schemas.microsoft.com/office/drawing/2014/main" id="{E6F60D24-86DF-897D-13D8-26D895B82F9F}"/>
               </a:ext>
             </a:extLst>
           </p:cNvPr>
@@ -13569,7 +13569,7 @@
           <p:cNvPr id="14" name="TextBox 13">
             <a:extLst>
               <a:ext uri="{FF2B5EF4-FFF2-40B4-BE49-F238E27FC236}">
-                <a16:creationId xmlns:a16="http://schemas.microsoft.com/office/drawing/2014/main" id="{99F20179-E3BC-9749-EC5E-2CAD9BB271FB}"/>
+                <a16:creationId xmlns:a16="http://schemas.microsoft.com/office/drawing/2014/main" id="{07734D5B-F588-B166-1D54-C6B96FF9500C}"/>
               </a:ext>
             </a:extLst>
           </p:cNvPr>
@@ -13609,7 +13609,7 @@
           <p:cNvPr id="15" name="TextBox 14">
             <a:extLst>
               <a:ext uri="{FF2B5EF4-FFF2-40B4-BE49-F238E27FC236}">
-                <a16:creationId xmlns:a16="http://schemas.microsoft.com/office/drawing/2014/main" id="{EC41F76B-766D-E212-4093-903C8AE2BA53}"/>
+                <a16:creationId xmlns:a16="http://schemas.microsoft.com/office/drawing/2014/main" id="{3B97D113-309C-E8AC-138F-78EC78BA2D68}"/>
               </a:ext>
             </a:extLst>
           </p:cNvPr>
@@ -13655,7 +13655,7 @@
           <p:cNvPr id="16" name="Oval 15">
             <a:extLst>
               <a:ext uri="{FF2B5EF4-FFF2-40B4-BE49-F238E27FC236}">
-                <a16:creationId xmlns:a16="http://schemas.microsoft.com/office/drawing/2014/main" id="{A4CEF450-1BAC-E5B8-B9B8-3FFDDA8B3635}"/>
+                <a16:creationId xmlns:a16="http://schemas.microsoft.com/office/drawing/2014/main" id="{C783E5E6-613C-C7F3-014A-A65B7CDEC201}"/>
               </a:ext>
             </a:extLst>
           </p:cNvPr>
@@ -13731,7 +13731,7 @@
           <p:cNvPr id="17" name="TextBox 16">
             <a:extLst>
               <a:ext uri="{FF2B5EF4-FFF2-40B4-BE49-F238E27FC236}">
-                <a16:creationId xmlns:a16="http://schemas.microsoft.com/office/drawing/2014/main" id="{B5D1793C-0898-A544-5B06-D6D16F7B74B3}"/>
+                <a16:creationId xmlns:a16="http://schemas.microsoft.com/office/drawing/2014/main" id="{1564DE47-A291-9DD3-484F-3DD60FC54AAD}"/>
               </a:ext>
             </a:extLst>
           </p:cNvPr>
@@ -13777,7 +13777,7 @@
           <p:cNvPr id="18" name="TextBox 17">
             <a:extLst>
               <a:ext uri="{FF2B5EF4-FFF2-40B4-BE49-F238E27FC236}">
-                <a16:creationId xmlns:a16="http://schemas.microsoft.com/office/drawing/2014/main" id="{74BCBFD7-8FD7-0E2D-9D35-EE8E6E2B2063}"/>
+                <a16:creationId xmlns:a16="http://schemas.microsoft.com/office/drawing/2014/main" id="{7012BD79-7062-A31F-71F6-C8BC8A7B5747}"/>
               </a:ext>
             </a:extLst>
           </p:cNvPr>
@@ -13823,7 +13823,7 @@
           <p:cNvPr id="19" name="Oval 18">
             <a:extLst>
               <a:ext uri="{FF2B5EF4-FFF2-40B4-BE49-F238E27FC236}">
-                <a16:creationId xmlns:a16="http://schemas.microsoft.com/office/drawing/2014/main" id="{CF653DFD-B565-2A60-DA82-50822773B3E7}"/>
+                <a16:creationId xmlns:a16="http://schemas.microsoft.com/office/drawing/2014/main" id="{FFBBFB3D-18A0-DBA1-7F1A-CE3D04151002}"/>
               </a:ext>
             </a:extLst>
           </p:cNvPr>
@@ -13899,7 +13899,7 @@
           <p:cNvPr id="20" name="TextBox 19">
             <a:extLst>
               <a:ext uri="{FF2B5EF4-FFF2-40B4-BE49-F238E27FC236}">
-                <a16:creationId xmlns:a16="http://schemas.microsoft.com/office/drawing/2014/main" id="{FF8BA38F-70F4-FCF1-0587-55E79381D5CD}"/>
+                <a16:creationId xmlns:a16="http://schemas.microsoft.com/office/drawing/2014/main" id="{93828EBC-3810-33B6-F8C5-9405B1174F4C}"/>
               </a:ext>
             </a:extLst>
           </p:cNvPr>
@@ -13939,7 +13939,7 @@
           <p:cNvPr id="21" name="TextBox 20">
             <a:extLst>
               <a:ext uri="{FF2B5EF4-FFF2-40B4-BE49-F238E27FC236}">
-                <a16:creationId xmlns:a16="http://schemas.microsoft.com/office/drawing/2014/main" id="{7940174E-E2A4-CA87-D3FD-C8096E645686}"/>
+                <a16:creationId xmlns:a16="http://schemas.microsoft.com/office/drawing/2014/main" id="{8F281528-CB2B-9F47-F448-3C51403FC23A}"/>
               </a:ext>
             </a:extLst>
           </p:cNvPr>
@@ -13985,7 +13985,7 @@
           <p:cNvPr id="22" name="TextBox 21">
             <a:extLst>
               <a:ext uri="{FF2B5EF4-FFF2-40B4-BE49-F238E27FC236}">
-                <a16:creationId xmlns:a16="http://schemas.microsoft.com/office/drawing/2014/main" id="{484758A9-4BC7-EBDC-2451-95600F3AC73B}"/>
+                <a16:creationId xmlns:a16="http://schemas.microsoft.com/office/drawing/2014/main" id="{69E06163-CE95-0AF4-CC99-78D4AD96947C}"/>
               </a:ext>
             </a:extLst>
           </p:cNvPr>
@@ -14031,7 +14031,7 @@
           <p:cNvPr id="23" name="TextBox 22">
             <a:extLst>
               <a:ext uri="{FF2B5EF4-FFF2-40B4-BE49-F238E27FC236}">
-                <a16:creationId xmlns:a16="http://schemas.microsoft.com/office/drawing/2014/main" id="{E2D31276-4ED1-4729-EAB6-4E8033417BD4}"/>
+                <a16:creationId xmlns:a16="http://schemas.microsoft.com/office/drawing/2014/main" id="{799428E1-411D-A7E5-65A3-29F6B7066437}"/>
               </a:ext>
             </a:extLst>
           </p:cNvPr>
@@ -14070,7 +14070,7 @@
     </p:spTree>
     <p:extLst>
       <p:ext uri="{BB962C8B-B14F-4D97-AF65-F5344CB8AC3E}">
-        <p14:creationId xmlns:p14="http://schemas.microsoft.com/office/powerpoint/2010/main" val="3097504105"/>
+        <p14:creationId xmlns:p14="http://schemas.microsoft.com/office/powerpoint/2010/main" val="1480438600"/>
       </p:ext>
     </p:extLst>
   </p:cSld>

--- a/docs/Sentinel-final-pitch.pptx
+++ b/docs/Sentinel-final-pitch.pptx
@@ -199,7 +199,7 @@
             </a:lvl1pPr>
           </a:lstStyle>
           <a:p>
-            <a:fld id="{7A3AFFA2-E435-4AD9-99F3-1D4A5A1A1329}" type="datetimeFigureOut">
+            <a:fld id="{4F1D260F-070B-4D4C-8B83-51D258150D47}" type="datetimeFigureOut">
               <a:rPr lang="en-MY" smtClean="0"/>
               <a:t>25/9/2026</a:t>
             </a:fld>
@@ -358,7 +358,7 @@
             </a:lvl1pPr>
           </a:lstStyle>
           <a:p>
-            <a:fld id="{C0DB382D-0409-4C30-A2D8-5001506190DC}" type="slidenum">
+            <a:fld id="{2CF0A9E5-EE01-40A0-AA40-690BCA224619}" type="slidenum">
               <a:rPr lang="en-MY" smtClean="0"/>
               <a:t>‹#›</a:t>
             </a:fld>
@@ -369,7 +369,7 @@
     </p:spTree>
     <p:extLst>
       <p:ext uri="{BB962C8B-B14F-4D97-AF65-F5344CB8AC3E}">
-        <p14:creationId xmlns:p14="http://schemas.microsoft.com/office/powerpoint/2010/main" val="4138849633"/>
+        <p14:creationId xmlns:p14="http://schemas.microsoft.com/office/powerpoint/2010/main" val="265458595"/>
       </p:ext>
     </p:extLst>
   </p:cSld>
@@ -536,7 +536,7 @@
           <a:bodyPr/>
           <a:lstStyle/>
           <a:p>
-            <a:fld id="{C0DB382D-0409-4C30-A2D8-5001506190DC}" type="slidenum">
+            <a:fld id="{2CF0A9E5-EE01-40A0-AA40-690BCA224619}" type="slidenum">
               <a:rPr lang="en-MY" smtClean="0"/>
               <a:t>1</a:t>
             </a:fld>
@@ -547,7 +547,7 @@
     </p:spTree>
     <p:extLst>
       <p:ext uri="{BB962C8B-B14F-4D97-AF65-F5344CB8AC3E}">
-        <p14:creationId xmlns:p14="http://schemas.microsoft.com/office/powerpoint/2010/main" val="1320488330"/>
+        <p14:creationId xmlns:p14="http://schemas.microsoft.com/office/powerpoint/2010/main" val="4066782065"/>
       </p:ext>
     </p:extLst>
   </p:cSld>
@@ -624,7 +624,7 @@
           <a:bodyPr/>
           <a:lstStyle/>
           <a:p>
-            <a:fld id="{C0DB382D-0409-4C30-A2D8-5001506190DC}" type="slidenum">
+            <a:fld id="{2CF0A9E5-EE01-40A0-AA40-690BCA224619}" type="slidenum">
               <a:rPr lang="en-MY" smtClean="0"/>
               <a:t>10</a:t>
             </a:fld>
@@ -635,7 +635,7 @@
     </p:spTree>
     <p:extLst>
       <p:ext uri="{BB962C8B-B14F-4D97-AF65-F5344CB8AC3E}">
-        <p14:creationId xmlns:p14="http://schemas.microsoft.com/office/powerpoint/2010/main" val="3550211120"/>
+        <p14:creationId xmlns:p14="http://schemas.microsoft.com/office/powerpoint/2010/main" val="3052070964"/>
       </p:ext>
     </p:extLst>
   </p:cSld>
@@ -712,7 +712,7 @@
           <a:bodyPr/>
           <a:lstStyle/>
           <a:p>
-            <a:fld id="{C0DB382D-0409-4C30-A2D8-5001506190DC}" type="slidenum">
+            <a:fld id="{2CF0A9E5-EE01-40A0-AA40-690BCA224619}" type="slidenum">
               <a:rPr lang="en-MY" smtClean="0"/>
               <a:t>2</a:t>
             </a:fld>
@@ -723,7 +723,7 @@
     </p:spTree>
     <p:extLst>
       <p:ext uri="{BB962C8B-B14F-4D97-AF65-F5344CB8AC3E}">
-        <p14:creationId xmlns:p14="http://schemas.microsoft.com/office/powerpoint/2010/main" val="2385192577"/>
+        <p14:creationId xmlns:p14="http://schemas.microsoft.com/office/powerpoint/2010/main" val="882069478"/>
       </p:ext>
     </p:extLst>
   </p:cSld>
@@ -800,7 +800,7 @@
           <a:bodyPr/>
           <a:lstStyle/>
           <a:p>
-            <a:fld id="{C0DB382D-0409-4C30-A2D8-5001506190DC}" type="slidenum">
+            <a:fld id="{2CF0A9E5-EE01-40A0-AA40-690BCA224619}" type="slidenum">
               <a:rPr lang="en-MY" smtClean="0"/>
               <a:t>3</a:t>
             </a:fld>
@@ -811,7 +811,7 @@
     </p:spTree>
     <p:extLst>
       <p:ext uri="{BB962C8B-B14F-4D97-AF65-F5344CB8AC3E}">
-        <p14:creationId xmlns:p14="http://schemas.microsoft.com/office/powerpoint/2010/main" val="82145886"/>
+        <p14:creationId xmlns:p14="http://schemas.microsoft.com/office/powerpoint/2010/main" val="1412058313"/>
       </p:ext>
     </p:extLst>
   </p:cSld>
@@ -888,7 +888,7 @@
           <a:bodyPr/>
           <a:lstStyle/>
           <a:p>
-            <a:fld id="{C0DB382D-0409-4C30-A2D8-5001506190DC}" type="slidenum">
+            <a:fld id="{2CF0A9E5-EE01-40A0-AA40-690BCA224619}" type="slidenum">
               <a:rPr lang="en-MY" smtClean="0"/>
               <a:t>4</a:t>
             </a:fld>
@@ -899,7 +899,7 @@
     </p:spTree>
     <p:extLst>
       <p:ext uri="{BB962C8B-B14F-4D97-AF65-F5344CB8AC3E}">
-        <p14:creationId xmlns:p14="http://schemas.microsoft.com/office/powerpoint/2010/main" val="1651089882"/>
+        <p14:creationId xmlns:p14="http://schemas.microsoft.com/office/powerpoint/2010/main" val="2516953318"/>
       </p:ext>
     </p:extLst>
   </p:cSld>
@@ -976,7 +976,7 @@
           <a:bodyPr/>
           <a:lstStyle/>
           <a:p>
-            <a:fld id="{C0DB382D-0409-4C30-A2D8-5001506190DC}" type="slidenum">
+            <a:fld id="{2CF0A9E5-EE01-40A0-AA40-690BCA224619}" type="slidenum">
               <a:rPr lang="en-MY" smtClean="0"/>
               <a:t>5</a:t>
             </a:fld>
@@ -987,7 +987,7 @@
     </p:spTree>
     <p:extLst>
       <p:ext uri="{BB962C8B-B14F-4D97-AF65-F5344CB8AC3E}">
-        <p14:creationId xmlns:p14="http://schemas.microsoft.com/office/powerpoint/2010/main" val="2643842212"/>
+        <p14:creationId xmlns:p14="http://schemas.microsoft.com/office/powerpoint/2010/main" val="1508784413"/>
       </p:ext>
     </p:extLst>
   </p:cSld>
@@ -1064,7 +1064,7 @@
           <a:bodyPr/>
           <a:lstStyle/>
           <a:p>
-            <a:fld id="{C0DB382D-0409-4C30-A2D8-5001506190DC}" type="slidenum">
+            <a:fld id="{2CF0A9E5-EE01-40A0-AA40-690BCA224619}" type="slidenum">
               <a:rPr lang="en-MY" smtClean="0"/>
               <a:t>6</a:t>
             </a:fld>
@@ -1075,7 +1075,7 @@
     </p:spTree>
     <p:extLst>
       <p:ext uri="{BB962C8B-B14F-4D97-AF65-F5344CB8AC3E}">
-        <p14:creationId xmlns:p14="http://schemas.microsoft.com/office/powerpoint/2010/main" val="2681469404"/>
+        <p14:creationId xmlns:p14="http://schemas.microsoft.com/office/powerpoint/2010/main" val="201700084"/>
       </p:ext>
     </p:extLst>
   </p:cSld>
@@ -1152,7 +1152,7 @@
           <a:bodyPr/>
           <a:lstStyle/>
           <a:p>
-            <a:fld id="{C0DB382D-0409-4C30-A2D8-5001506190DC}" type="slidenum">
+            <a:fld id="{2CF0A9E5-EE01-40A0-AA40-690BCA224619}" type="slidenum">
               <a:rPr lang="en-MY" smtClean="0"/>
               <a:t>7</a:t>
             </a:fld>
@@ -1163,7 +1163,7 @@
     </p:spTree>
     <p:extLst>
       <p:ext uri="{BB962C8B-B14F-4D97-AF65-F5344CB8AC3E}">
-        <p14:creationId xmlns:p14="http://schemas.microsoft.com/office/powerpoint/2010/main" val="1156988256"/>
+        <p14:creationId xmlns:p14="http://schemas.microsoft.com/office/powerpoint/2010/main" val="1836439775"/>
       </p:ext>
     </p:extLst>
   </p:cSld>
@@ -1240,7 +1240,7 @@
           <a:bodyPr/>
           <a:lstStyle/>
           <a:p>
-            <a:fld id="{C0DB382D-0409-4C30-A2D8-5001506190DC}" type="slidenum">
+            <a:fld id="{2CF0A9E5-EE01-40A0-AA40-690BCA224619}" type="slidenum">
               <a:rPr lang="en-MY" smtClean="0"/>
               <a:t>8</a:t>
             </a:fld>
@@ -1251,7 +1251,7 @@
     </p:spTree>
     <p:extLst>
       <p:ext uri="{BB962C8B-B14F-4D97-AF65-F5344CB8AC3E}">
-        <p14:creationId xmlns:p14="http://schemas.microsoft.com/office/powerpoint/2010/main" val="608895604"/>
+        <p14:creationId xmlns:p14="http://schemas.microsoft.com/office/powerpoint/2010/main" val="3951563729"/>
       </p:ext>
     </p:extLst>
   </p:cSld>
@@ -1328,7 +1328,7 @@
           <a:bodyPr/>
           <a:lstStyle/>
           <a:p>
-            <a:fld id="{C0DB382D-0409-4C30-A2D8-5001506190DC}" type="slidenum">
+            <a:fld id="{2CF0A9E5-EE01-40A0-AA40-690BCA224619}" type="slidenum">
               <a:rPr lang="en-MY" smtClean="0"/>
               <a:t>9</a:t>
             </a:fld>
@@ -1339,7 +1339,7 @@
     </p:spTree>
     <p:extLst>
       <p:ext uri="{BB962C8B-B14F-4D97-AF65-F5344CB8AC3E}">
-        <p14:creationId xmlns:p14="http://schemas.microsoft.com/office/powerpoint/2010/main" val="1129157277"/>
+        <p14:creationId xmlns:p14="http://schemas.microsoft.com/office/powerpoint/2010/main" val="2259569739"/>
       </p:ext>
     </p:extLst>
   </p:cSld>
@@ -1371,7 +1371,7 @@
           <p:cNvPr id="2" name="Title 1">
             <a:extLst>
               <a:ext uri="{FF2B5EF4-FFF2-40B4-BE49-F238E27FC236}">
-                <a16:creationId xmlns:a16="http://schemas.microsoft.com/office/drawing/2014/main" id="{5A262D2E-E4B9-DA74-A213-6ED557FD5A44}"/>
+                <a16:creationId xmlns:a16="http://schemas.microsoft.com/office/drawing/2014/main" id="{5F9C2023-0625-E5D0-AC5A-B6068DC2B7CE}"/>
               </a:ext>
             </a:extLst>
           </p:cNvPr>
@@ -1409,7 +1409,7 @@
           <p:cNvPr id="3" name="Subtitle 2">
             <a:extLst>
               <a:ext uri="{FF2B5EF4-FFF2-40B4-BE49-F238E27FC236}">
-                <a16:creationId xmlns:a16="http://schemas.microsoft.com/office/drawing/2014/main" id="{4FF78BE4-0765-D35A-8C11-DBB3292019FE}"/>
+                <a16:creationId xmlns:a16="http://schemas.microsoft.com/office/drawing/2014/main" id="{9BD8F635-1902-DDCD-BD5B-7D40C116B1EF}"/>
               </a:ext>
             </a:extLst>
           </p:cNvPr>
@@ -1480,7 +1480,7 @@
           <p:cNvPr id="4" name="Date Placeholder 3">
             <a:extLst>
               <a:ext uri="{FF2B5EF4-FFF2-40B4-BE49-F238E27FC236}">
-                <a16:creationId xmlns:a16="http://schemas.microsoft.com/office/drawing/2014/main" id="{4C9D2BF3-A504-098C-33ED-EE03AD4472C8}"/>
+                <a16:creationId xmlns:a16="http://schemas.microsoft.com/office/drawing/2014/main" id="{D77CB93C-0E84-4C18-03B1-5076A2D5AF2B}"/>
               </a:ext>
             </a:extLst>
           </p:cNvPr>
@@ -1496,7 +1496,7 @@
           <a:bodyPr/>
           <a:lstStyle/>
           <a:p>
-            <a:fld id="{95C66E42-B421-4974-83E4-933E8FDDFAD5}" type="datetimeFigureOut">
+            <a:fld id="{1629C079-760B-492B-AA39-F868F36703E0}" type="datetimeFigureOut">
               <a:rPr lang="en-MY" smtClean="0"/>
               <a:t>25/9/2026</a:t>
             </a:fld>
@@ -1509,7 +1509,7 @@
           <p:cNvPr id="5" name="Footer Placeholder 4">
             <a:extLst>
               <a:ext uri="{FF2B5EF4-FFF2-40B4-BE49-F238E27FC236}">
-                <a16:creationId xmlns:a16="http://schemas.microsoft.com/office/drawing/2014/main" id="{1939BF93-4A39-65A3-00E0-A258EFA8F45D}"/>
+                <a16:creationId xmlns:a16="http://schemas.microsoft.com/office/drawing/2014/main" id="{0E8FA6B9-E0D7-1735-6F7B-B4FFB6AD7834}"/>
               </a:ext>
             </a:extLst>
           </p:cNvPr>
@@ -1534,7 +1534,7 @@
           <p:cNvPr id="6" name="Slide Number Placeholder 5">
             <a:extLst>
               <a:ext uri="{FF2B5EF4-FFF2-40B4-BE49-F238E27FC236}">
-                <a16:creationId xmlns:a16="http://schemas.microsoft.com/office/drawing/2014/main" id="{48BB89C9-8025-17EA-54B0-22B815E9F162}"/>
+                <a16:creationId xmlns:a16="http://schemas.microsoft.com/office/drawing/2014/main" id="{3CE40818-8EF4-996D-78D8-356E9756B7AF}"/>
               </a:ext>
             </a:extLst>
           </p:cNvPr>
@@ -1550,7 +1550,7 @@
           <a:bodyPr/>
           <a:lstStyle/>
           <a:p>
-            <a:fld id="{E797DD9F-5283-436C-9EA7-CCF99750284B}" type="slidenum">
+            <a:fld id="{401225AD-5018-4FF2-BEE1-3A2F5ADC240E}" type="slidenum">
               <a:rPr lang="en-MY" smtClean="0"/>
               <a:t>‹#›</a:t>
             </a:fld>
@@ -1561,7 +1561,7 @@
     </p:spTree>
     <p:extLst>
       <p:ext uri="{BB962C8B-B14F-4D97-AF65-F5344CB8AC3E}">
-        <p14:creationId xmlns:p14="http://schemas.microsoft.com/office/powerpoint/2010/main" val="1271146481"/>
+        <p14:creationId xmlns:p14="http://schemas.microsoft.com/office/powerpoint/2010/main" val="659460419"/>
       </p:ext>
     </p:extLst>
   </p:cSld>
@@ -1593,7 +1593,7 @@
           <p:cNvPr id="2" name="Title 1">
             <a:extLst>
               <a:ext uri="{FF2B5EF4-FFF2-40B4-BE49-F238E27FC236}">
-                <a16:creationId xmlns:a16="http://schemas.microsoft.com/office/drawing/2014/main" id="{3DE02C71-2180-70F7-9A53-3690574601A9}"/>
+                <a16:creationId xmlns:a16="http://schemas.microsoft.com/office/drawing/2014/main" id="{6604D249-9CF6-56C8-DB16-2FC282DDE9E7}"/>
               </a:ext>
             </a:extLst>
           </p:cNvPr>
@@ -1622,7 +1622,7 @@
           <p:cNvPr id="3" name="Vertical Text Placeholder 2">
             <a:extLst>
               <a:ext uri="{FF2B5EF4-FFF2-40B4-BE49-F238E27FC236}">
-                <a16:creationId xmlns:a16="http://schemas.microsoft.com/office/drawing/2014/main" id="{24E08154-B803-D08D-4241-17110E77CB70}"/>
+                <a16:creationId xmlns:a16="http://schemas.microsoft.com/office/drawing/2014/main" id="{A17EDE2D-8103-7C71-831E-9C858613CE6B}"/>
               </a:ext>
             </a:extLst>
           </p:cNvPr>
@@ -1680,7 +1680,7 @@
           <p:cNvPr id="4" name="Date Placeholder 3">
             <a:extLst>
               <a:ext uri="{FF2B5EF4-FFF2-40B4-BE49-F238E27FC236}">
-                <a16:creationId xmlns:a16="http://schemas.microsoft.com/office/drawing/2014/main" id="{4ED1FD63-338D-5C97-EA63-334AD83901D1}"/>
+                <a16:creationId xmlns:a16="http://schemas.microsoft.com/office/drawing/2014/main" id="{68490EED-6ABF-7E82-84AE-2D03380DE684}"/>
               </a:ext>
             </a:extLst>
           </p:cNvPr>
@@ -1696,7 +1696,7 @@
           <a:bodyPr/>
           <a:lstStyle/>
           <a:p>
-            <a:fld id="{95C66E42-B421-4974-83E4-933E8FDDFAD5}" type="datetimeFigureOut">
+            <a:fld id="{1629C079-760B-492B-AA39-F868F36703E0}" type="datetimeFigureOut">
               <a:rPr lang="en-MY" smtClean="0"/>
               <a:t>25/9/2026</a:t>
             </a:fld>
@@ -1709,7 +1709,7 @@
           <p:cNvPr id="5" name="Footer Placeholder 4">
             <a:extLst>
               <a:ext uri="{FF2B5EF4-FFF2-40B4-BE49-F238E27FC236}">
-                <a16:creationId xmlns:a16="http://schemas.microsoft.com/office/drawing/2014/main" id="{4456C75B-13C9-A3A5-0040-1A5D7D342D97}"/>
+                <a16:creationId xmlns:a16="http://schemas.microsoft.com/office/drawing/2014/main" id="{8BE51E03-80EC-F97B-BCCC-3A13EACC6FD2}"/>
               </a:ext>
             </a:extLst>
           </p:cNvPr>
@@ -1734,7 +1734,7 @@
           <p:cNvPr id="6" name="Slide Number Placeholder 5">
             <a:extLst>
               <a:ext uri="{FF2B5EF4-FFF2-40B4-BE49-F238E27FC236}">
-                <a16:creationId xmlns:a16="http://schemas.microsoft.com/office/drawing/2014/main" id="{5815C409-37B2-6C4D-FCA5-57899EDCBAAA}"/>
+                <a16:creationId xmlns:a16="http://schemas.microsoft.com/office/drawing/2014/main" id="{6E8E2A10-97B0-2770-1FFB-DD6246112BE0}"/>
               </a:ext>
             </a:extLst>
           </p:cNvPr>
@@ -1750,7 +1750,7 @@
           <a:bodyPr/>
           <a:lstStyle/>
           <a:p>
-            <a:fld id="{E797DD9F-5283-436C-9EA7-CCF99750284B}" type="slidenum">
+            <a:fld id="{401225AD-5018-4FF2-BEE1-3A2F5ADC240E}" type="slidenum">
               <a:rPr lang="en-MY" smtClean="0"/>
               <a:t>‹#›</a:t>
             </a:fld>
@@ -1761,7 +1761,7 @@
     </p:spTree>
     <p:extLst>
       <p:ext uri="{BB962C8B-B14F-4D97-AF65-F5344CB8AC3E}">
-        <p14:creationId xmlns:p14="http://schemas.microsoft.com/office/powerpoint/2010/main" val="3132865851"/>
+        <p14:creationId xmlns:p14="http://schemas.microsoft.com/office/powerpoint/2010/main" val="952941451"/>
       </p:ext>
     </p:extLst>
   </p:cSld>
@@ -1793,7 +1793,7 @@
           <p:cNvPr id="2" name="Vertical Title 1">
             <a:extLst>
               <a:ext uri="{FF2B5EF4-FFF2-40B4-BE49-F238E27FC236}">
-                <a16:creationId xmlns:a16="http://schemas.microsoft.com/office/drawing/2014/main" id="{DE203804-A345-B6E4-3CF3-75878E892103}"/>
+                <a16:creationId xmlns:a16="http://schemas.microsoft.com/office/drawing/2014/main" id="{07A98886-131F-41C6-EF3D-9949A3BCB1CB}"/>
               </a:ext>
             </a:extLst>
           </p:cNvPr>
@@ -1827,7 +1827,7 @@
           <p:cNvPr id="3" name="Vertical Text Placeholder 2">
             <a:extLst>
               <a:ext uri="{FF2B5EF4-FFF2-40B4-BE49-F238E27FC236}">
-                <a16:creationId xmlns:a16="http://schemas.microsoft.com/office/drawing/2014/main" id="{0A2E4362-940A-6608-D59E-61425F466034}"/>
+                <a16:creationId xmlns:a16="http://schemas.microsoft.com/office/drawing/2014/main" id="{6EACE62B-082E-67A5-5980-68422ECE6124}"/>
               </a:ext>
             </a:extLst>
           </p:cNvPr>
@@ -1890,7 +1890,7 @@
           <p:cNvPr id="4" name="Date Placeholder 3">
             <a:extLst>
               <a:ext uri="{FF2B5EF4-FFF2-40B4-BE49-F238E27FC236}">
-                <a16:creationId xmlns:a16="http://schemas.microsoft.com/office/drawing/2014/main" id="{CFD1577C-BBBC-40BD-A925-C8256E81223B}"/>
+                <a16:creationId xmlns:a16="http://schemas.microsoft.com/office/drawing/2014/main" id="{23706679-3C03-0546-C1CC-DEF11A52A837}"/>
               </a:ext>
             </a:extLst>
           </p:cNvPr>
@@ -1906,7 +1906,7 @@
           <a:bodyPr/>
           <a:lstStyle/>
           <a:p>
-            <a:fld id="{95C66E42-B421-4974-83E4-933E8FDDFAD5}" type="datetimeFigureOut">
+            <a:fld id="{1629C079-760B-492B-AA39-F868F36703E0}" type="datetimeFigureOut">
               <a:rPr lang="en-MY" smtClean="0"/>
               <a:t>25/9/2026</a:t>
             </a:fld>
@@ -1919,7 +1919,7 @@
           <p:cNvPr id="5" name="Footer Placeholder 4">
             <a:extLst>
               <a:ext uri="{FF2B5EF4-FFF2-40B4-BE49-F238E27FC236}">
-                <a16:creationId xmlns:a16="http://schemas.microsoft.com/office/drawing/2014/main" id="{EBCD4A7F-BC44-1D32-816E-1B951ED9C9E2}"/>
+                <a16:creationId xmlns:a16="http://schemas.microsoft.com/office/drawing/2014/main" id="{143D5AF3-B966-25EE-F7C3-FE029841950D}"/>
               </a:ext>
             </a:extLst>
           </p:cNvPr>
@@ -1944,7 +1944,7 @@
           <p:cNvPr id="6" name="Slide Number Placeholder 5">
             <a:extLst>
               <a:ext uri="{FF2B5EF4-FFF2-40B4-BE49-F238E27FC236}">
-                <a16:creationId xmlns:a16="http://schemas.microsoft.com/office/drawing/2014/main" id="{BCAA5C8F-8FD2-C5A7-FDA9-18B2AB417C76}"/>
+                <a16:creationId xmlns:a16="http://schemas.microsoft.com/office/drawing/2014/main" id="{8FD5DFCD-1221-BCA7-A2AE-E8D1CCC656EB}"/>
               </a:ext>
             </a:extLst>
           </p:cNvPr>
@@ -1960,7 +1960,7 @@
           <a:bodyPr/>
           <a:lstStyle/>
           <a:p>
-            <a:fld id="{E797DD9F-5283-436C-9EA7-CCF99750284B}" type="slidenum">
+            <a:fld id="{401225AD-5018-4FF2-BEE1-3A2F5ADC240E}" type="slidenum">
               <a:rPr lang="en-MY" smtClean="0"/>
               <a:t>‹#›</a:t>
             </a:fld>
@@ -1971,7 +1971,7 @@
     </p:spTree>
     <p:extLst>
       <p:ext uri="{BB962C8B-B14F-4D97-AF65-F5344CB8AC3E}">
-        <p14:creationId xmlns:p14="http://schemas.microsoft.com/office/powerpoint/2010/main" val="746927021"/>
+        <p14:creationId xmlns:p14="http://schemas.microsoft.com/office/powerpoint/2010/main" val="3595980230"/>
       </p:ext>
     </p:extLst>
   </p:cSld>
@@ -2003,7 +2003,7 @@
           <p:cNvPr id="2" name="Title 1">
             <a:extLst>
               <a:ext uri="{FF2B5EF4-FFF2-40B4-BE49-F238E27FC236}">
-                <a16:creationId xmlns:a16="http://schemas.microsoft.com/office/drawing/2014/main" id="{3ED66233-0B98-9409-02A5-6D9088763349}"/>
+                <a16:creationId xmlns:a16="http://schemas.microsoft.com/office/drawing/2014/main" id="{8CEDF188-6687-F3CA-D945-542B3998B1E0}"/>
               </a:ext>
             </a:extLst>
           </p:cNvPr>
@@ -2032,7 +2032,7 @@
           <p:cNvPr id="3" name="Content Placeholder 2">
             <a:extLst>
               <a:ext uri="{FF2B5EF4-FFF2-40B4-BE49-F238E27FC236}">
-                <a16:creationId xmlns:a16="http://schemas.microsoft.com/office/drawing/2014/main" id="{656424FB-7342-0ACB-92E2-779851109378}"/>
+                <a16:creationId xmlns:a16="http://schemas.microsoft.com/office/drawing/2014/main" id="{8CBC212B-E8F7-F239-BA1F-92C86B044482}"/>
               </a:ext>
             </a:extLst>
           </p:cNvPr>
@@ -2090,7 +2090,7 @@
           <p:cNvPr id="4" name="Date Placeholder 3">
             <a:extLst>
               <a:ext uri="{FF2B5EF4-FFF2-40B4-BE49-F238E27FC236}">
-                <a16:creationId xmlns:a16="http://schemas.microsoft.com/office/drawing/2014/main" id="{5056C507-0906-BBF2-79A9-1245A00C460A}"/>
+                <a16:creationId xmlns:a16="http://schemas.microsoft.com/office/drawing/2014/main" id="{3885A17E-EA99-45EF-3D8F-686477B80933}"/>
               </a:ext>
             </a:extLst>
           </p:cNvPr>
@@ -2106,7 +2106,7 @@
           <a:bodyPr/>
           <a:lstStyle/>
           <a:p>
-            <a:fld id="{95C66E42-B421-4974-83E4-933E8FDDFAD5}" type="datetimeFigureOut">
+            <a:fld id="{1629C079-760B-492B-AA39-F868F36703E0}" type="datetimeFigureOut">
               <a:rPr lang="en-MY" smtClean="0"/>
               <a:t>25/9/2026</a:t>
             </a:fld>
@@ -2119,7 +2119,7 @@
           <p:cNvPr id="5" name="Footer Placeholder 4">
             <a:extLst>
               <a:ext uri="{FF2B5EF4-FFF2-40B4-BE49-F238E27FC236}">
-                <a16:creationId xmlns:a16="http://schemas.microsoft.com/office/drawing/2014/main" id="{CCE3305B-9611-4285-3547-0926D36802D1}"/>
+                <a16:creationId xmlns:a16="http://schemas.microsoft.com/office/drawing/2014/main" id="{0B931EB1-FE4E-AAC0-3E55-EE35473C5804}"/>
               </a:ext>
             </a:extLst>
           </p:cNvPr>
@@ -2144,7 +2144,7 @@
           <p:cNvPr id="6" name="Slide Number Placeholder 5">
             <a:extLst>
               <a:ext uri="{FF2B5EF4-FFF2-40B4-BE49-F238E27FC236}">
-                <a16:creationId xmlns:a16="http://schemas.microsoft.com/office/drawing/2014/main" id="{E222FD82-F49D-E013-EB33-FCF62982C0C0}"/>
+                <a16:creationId xmlns:a16="http://schemas.microsoft.com/office/drawing/2014/main" id="{12B2AC72-D483-0200-236D-99BAEB68167D}"/>
               </a:ext>
             </a:extLst>
           </p:cNvPr>
@@ -2160,7 +2160,7 @@
           <a:bodyPr/>
           <a:lstStyle/>
           <a:p>
-            <a:fld id="{E797DD9F-5283-436C-9EA7-CCF99750284B}" type="slidenum">
+            <a:fld id="{401225AD-5018-4FF2-BEE1-3A2F5ADC240E}" type="slidenum">
               <a:rPr lang="en-MY" smtClean="0"/>
               <a:t>‹#›</a:t>
             </a:fld>
@@ -2171,7 +2171,7 @@
     </p:spTree>
     <p:extLst>
       <p:ext uri="{BB962C8B-B14F-4D97-AF65-F5344CB8AC3E}">
-        <p14:creationId xmlns:p14="http://schemas.microsoft.com/office/powerpoint/2010/main" val="361445704"/>
+        <p14:creationId xmlns:p14="http://schemas.microsoft.com/office/powerpoint/2010/main" val="1606810707"/>
       </p:ext>
     </p:extLst>
   </p:cSld>
@@ -2203,7 +2203,7 @@
           <p:cNvPr id="2" name="Title 1">
             <a:extLst>
               <a:ext uri="{FF2B5EF4-FFF2-40B4-BE49-F238E27FC236}">
-                <a16:creationId xmlns:a16="http://schemas.microsoft.com/office/drawing/2014/main" id="{2682179E-C646-4A0B-E3EC-200B60C617B5}"/>
+                <a16:creationId xmlns:a16="http://schemas.microsoft.com/office/drawing/2014/main" id="{600BC8CA-6C18-FFD8-CB7F-8FA5CCAAC1F8}"/>
               </a:ext>
             </a:extLst>
           </p:cNvPr>
@@ -2241,7 +2241,7 @@
           <p:cNvPr id="3" name="Text Placeholder 2">
             <a:extLst>
               <a:ext uri="{FF2B5EF4-FFF2-40B4-BE49-F238E27FC236}">
-                <a16:creationId xmlns:a16="http://schemas.microsoft.com/office/drawing/2014/main" id="{C220042D-56DE-BFC4-3A9E-1B20A90E9989}"/>
+                <a16:creationId xmlns:a16="http://schemas.microsoft.com/office/drawing/2014/main" id="{FB5134B3-8338-1F0F-1439-9729FCBF1028}"/>
               </a:ext>
             </a:extLst>
           </p:cNvPr>
@@ -2366,7 +2366,7 @@
           <p:cNvPr id="4" name="Date Placeholder 3">
             <a:extLst>
               <a:ext uri="{FF2B5EF4-FFF2-40B4-BE49-F238E27FC236}">
-                <a16:creationId xmlns:a16="http://schemas.microsoft.com/office/drawing/2014/main" id="{2B5F0160-1E90-7CEF-26A1-96FCA46A2A13}"/>
+                <a16:creationId xmlns:a16="http://schemas.microsoft.com/office/drawing/2014/main" id="{5E4ABB9F-C079-B813-1741-478EF1E433A6}"/>
               </a:ext>
             </a:extLst>
           </p:cNvPr>
@@ -2382,7 +2382,7 @@
           <a:bodyPr/>
           <a:lstStyle/>
           <a:p>
-            <a:fld id="{95C66E42-B421-4974-83E4-933E8FDDFAD5}" type="datetimeFigureOut">
+            <a:fld id="{1629C079-760B-492B-AA39-F868F36703E0}" type="datetimeFigureOut">
               <a:rPr lang="en-MY" smtClean="0"/>
               <a:t>25/9/2026</a:t>
             </a:fld>
@@ -2395,7 +2395,7 @@
           <p:cNvPr id="5" name="Footer Placeholder 4">
             <a:extLst>
               <a:ext uri="{FF2B5EF4-FFF2-40B4-BE49-F238E27FC236}">
-                <a16:creationId xmlns:a16="http://schemas.microsoft.com/office/drawing/2014/main" id="{C9C27881-6B7E-12CD-DEBB-1B06605E5E83}"/>
+                <a16:creationId xmlns:a16="http://schemas.microsoft.com/office/drawing/2014/main" id="{7011AD07-01FD-E336-9B17-C4A5CBD3D958}"/>
               </a:ext>
             </a:extLst>
           </p:cNvPr>
@@ -2420,7 +2420,7 @@
           <p:cNvPr id="6" name="Slide Number Placeholder 5">
             <a:extLst>
               <a:ext uri="{FF2B5EF4-FFF2-40B4-BE49-F238E27FC236}">
-                <a16:creationId xmlns:a16="http://schemas.microsoft.com/office/drawing/2014/main" id="{C43EF96A-597E-94F8-FD9C-CF40781D2F2D}"/>
+                <a16:creationId xmlns:a16="http://schemas.microsoft.com/office/drawing/2014/main" id="{BDBBBD3F-7B72-8FB9-F6F2-BF9C0F7A7D7D}"/>
               </a:ext>
             </a:extLst>
           </p:cNvPr>
@@ -2436,7 +2436,7 @@
           <a:bodyPr/>
           <a:lstStyle/>
           <a:p>
-            <a:fld id="{E797DD9F-5283-436C-9EA7-CCF99750284B}" type="slidenum">
+            <a:fld id="{401225AD-5018-4FF2-BEE1-3A2F5ADC240E}" type="slidenum">
               <a:rPr lang="en-MY" smtClean="0"/>
               <a:t>‹#›</a:t>
             </a:fld>
@@ -2447,7 +2447,7 @@
     </p:spTree>
     <p:extLst>
       <p:ext uri="{BB962C8B-B14F-4D97-AF65-F5344CB8AC3E}">
-        <p14:creationId xmlns:p14="http://schemas.microsoft.com/office/powerpoint/2010/main" val="2476404145"/>
+        <p14:creationId xmlns:p14="http://schemas.microsoft.com/office/powerpoint/2010/main" val="2598749790"/>
       </p:ext>
     </p:extLst>
   </p:cSld>
@@ -2479,7 +2479,7 @@
           <p:cNvPr id="2" name="Title 1">
             <a:extLst>
               <a:ext uri="{FF2B5EF4-FFF2-40B4-BE49-F238E27FC236}">
-                <a16:creationId xmlns:a16="http://schemas.microsoft.com/office/drawing/2014/main" id="{439AC515-7FC2-23DB-E219-BD80E23317EB}"/>
+                <a16:creationId xmlns:a16="http://schemas.microsoft.com/office/drawing/2014/main" id="{1E5518B5-8476-6D19-AD7E-3CF364EDF735}"/>
               </a:ext>
             </a:extLst>
           </p:cNvPr>
@@ -2508,7 +2508,7 @@
           <p:cNvPr id="3" name="Content Placeholder 2">
             <a:extLst>
               <a:ext uri="{FF2B5EF4-FFF2-40B4-BE49-F238E27FC236}">
-                <a16:creationId xmlns:a16="http://schemas.microsoft.com/office/drawing/2014/main" id="{2C8BE66B-6020-6602-BFB5-08144E702533}"/>
+                <a16:creationId xmlns:a16="http://schemas.microsoft.com/office/drawing/2014/main" id="{FE109F32-0752-F7F3-E8E3-AE6EF2BB534F}"/>
               </a:ext>
             </a:extLst>
           </p:cNvPr>
@@ -2571,7 +2571,7 @@
           <p:cNvPr id="4" name="Content Placeholder 3">
             <a:extLst>
               <a:ext uri="{FF2B5EF4-FFF2-40B4-BE49-F238E27FC236}">
-                <a16:creationId xmlns:a16="http://schemas.microsoft.com/office/drawing/2014/main" id="{52650114-534A-6C72-C2E9-06B8AAC0CE35}"/>
+                <a16:creationId xmlns:a16="http://schemas.microsoft.com/office/drawing/2014/main" id="{9978995B-6EEB-0F58-177D-07FB291E4E2E}"/>
               </a:ext>
             </a:extLst>
           </p:cNvPr>
@@ -2634,7 +2634,7 @@
           <p:cNvPr id="5" name="Date Placeholder 4">
             <a:extLst>
               <a:ext uri="{FF2B5EF4-FFF2-40B4-BE49-F238E27FC236}">
-                <a16:creationId xmlns:a16="http://schemas.microsoft.com/office/drawing/2014/main" id="{43CC94B4-9182-286B-1E3D-377DFAB27A10}"/>
+                <a16:creationId xmlns:a16="http://schemas.microsoft.com/office/drawing/2014/main" id="{710443D9-03D1-4CDD-9035-A2AF2455CFA0}"/>
               </a:ext>
             </a:extLst>
           </p:cNvPr>
@@ -2650,7 +2650,7 @@
           <a:bodyPr/>
           <a:lstStyle/>
           <a:p>
-            <a:fld id="{95C66E42-B421-4974-83E4-933E8FDDFAD5}" type="datetimeFigureOut">
+            <a:fld id="{1629C079-760B-492B-AA39-F868F36703E0}" type="datetimeFigureOut">
               <a:rPr lang="en-MY" smtClean="0"/>
               <a:t>25/9/2026</a:t>
             </a:fld>
@@ -2663,7 +2663,7 @@
           <p:cNvPr id="6" name="Footer Placeholder 5">
             <a:extLst>
               <a:ext uri="{FF2B5EF4-FFF2-40B4-BE49-F238E27FC236}">
-                <a16:creationId xmlns:a16="http://schemas.microsoft.com/office/drawing/2014/main" id="{CE75CD75-E797-1648-0D81-4C788DCCD79E}"/>
+                <a16:creationId xmlns:a16="http://schemas.microsoft.com/office/drawing/2014/main" id="{D2BA1962-F30F-C7B7-1937-12CAD98C6C0C}"/>
               </a:ext>
             </a:extLst>
           </p:cNvPr>
@@ -2688,7 +2688,7 @@
           <p:cNvPr id="7" name="Slide Number Placeholder 6">
             <a:extLst>
               <a:ext uri="{FF2B5EF4-FFF2-40B4-BE49-F238E27FC236}">
-                <a16:creationId xmlns:a16="http://schemas.microsoft.com/office/drawing/2014/main" id="{BD52CD82-875C-6CCF-92B5-C2112A9A88D8}"/>
+                <a16:creationId xmlns:a16="http://schemas.microsoft.com/office/drawing/2014/main" id="{F83C8CD4-B46C-6080-656F-E4D022044C30}"/>
               </a:ext>
             </a:extLst>
           </p:cNvPr>
@@ -2704,7 +2704,7 @@
           <a:bodyPr/>
           <a:lstStyle/>
           <a:p>
-            <a:fld id="{E797DD9F-5283-436C-9EA7-CCF99750284B}" type="slidenum">
+            <a:fld id="{401225AD-5018-4FF2-BEE1-3A2F5ADC240E}" type="slidenum">
               <a:rPr lang="en-MY" smtClean="0"/>
               <a:t>‹#›</a:t>
             </a:fld>
@@ -2715,7 +2715,7 @@
     </p:spTree>
     <p:extLst>
       <p:ext uri="{BB962C8B-B14F-4D97-AF65-F5344CB8AC3E}">
-        <p14:creationId xmlns:p14="http://schemas.microsoft.com/office/powerpoint/2010/main" val="1359007219"/>
+        <p14:creationId xmlns:p14="http://schemas.microsoft.com/office/powerpoint/2010/main" val="1019621516"/>
       </p:ext>
     </p:extLst>
   </p:cSld>
@@ -2747,7 +2747,7 @@
           <p:cNvPr id="2" name="Title 1">
             <a:extLst>
               <a:ext uri="{FF2B5EF4-FFF2-40B4-BE49-F238E27FC236}">
-                <a16:creationId xmlns:a16="http://schemas.microsoft.com/office/drawing/2014/main" id="{600F9D51-126A-0287-9E4E-E0D98D450CCC}"/>
+                <a16:creationId xmlns:a16="http://schemas.microsoft.com/office/drawing/2014/main" id="{1DAAF164-F351-2250-F103-F39CAD6EE4D4}"/>
               </a:ext>
             </a:extLst>
           </p:cNvPr>
@@ -2781,7 +2781,7 @@
           <p:cNvPr id="3" name="Text Placeholder 2">
             <a:extLst>
               <a:ext uri="{FF2B5EF4-FFF2-40B4-BE49-F238E27FC236}">
-                <a16:creationId xmlns:a16="http://schemas.microsoft.com/office/drawing/2014/main" id="{D98BDCDB-82EA-7C04-B5CF-EA7D2D4770B8}"/>
+                <a16:creationId xmlns:a16="http://schemas.microsoft.com/office/drawing/2014/main" id="{92AFDAC9-A187-254D-83AF-245FBCCDD02F}"/>
               </a:ext>
             </a:extLst>
           </p:cNvPr>
@@ -2852,7 +2852,7 @@
           <p:cNvPr id="4" name="Content Placeholder 3">
             <a:extLst>
               <a:ext uri="{FF2B5EF4-FFF2-40B4-BE49-F238E27FC236}">
-                <a16:creationId xmlns:a16="http://schemas.microsoft.com/office/drawing/2014/main" id="{60C5844A-F8D0-5DA7-57ED-B2122626A025}"/>
+                <a16:creationId xmlns:a16="http://schemas.microsoft.com/office/drawing/2014/main" id="{23784856-B424-B41D-DFD0-665E7C28590F}"/>
               </a:ext>
             </a:extLst>
           </p:cNvPr>
@@ -2915,7 +2915,7 @@
           <p:cNvPr id="5" name="Text Placeholder 4">
             <a:extLst>
               <a:ext uri="{FF2B5EF4-FFF2-40B4-BE49-F238E27FC236}">
-                <a16:creationId xmlns:a16="http://schemas.microsoft.com/office/drawing/2014/main" id="{7A077B5A-8A80-63AE-A60B-6F8902AAD3BE}"/>
+                <a16:creationId xmlns:a16="http://schemas.microsoft.com/office/drawing/2014/main" id="{6731574F-37CD-A1D1-2FBC-695F8706F313}"/>
               </a:ext>
             </a:extLst>
           </p:cNvPr>
@@ -2986,7 +2986,7 @@
           <p:cNvPr id="6" name="Content Placeholder 5">
             <a:extLst>
               <a:ext uri="{FF2B5EF4-FFF2-40B4-BE49-F238E27FC236}">
-                <a16:creationId xmlns:a16="http://schemas.microsoft.com/office/drawing/2014/main" id="{7205EF30-3AE2-3845-967D-0A043D5792C2}"/>
+                <a16:creationId xmlns:a16="http://schemas.microsoft.com/office/drawing/2014/main" id="{DC5BCE46-DB77-6CEB-4D64-A4DB6CA53A31}"/>
               </a:ext>
             </a:extLst>
           </p:cNvPr>
@@ -3049,7 +3049,7 @@
           <p:cNvPr id="7" name="Date Placeholder 6">
             <a:extLst>
               <a:ext uri="{FF2B5EF4-FFF2-40B4-BE49-F238E27FC236}">
-                <a16:creationId xmlns:a16="http://schemas.microsoft.com/office/drawing/2014/main" id="{03E3E671-69D9-C503-809B-22934A59ADB7}"/>
+                <a16:creationId xmlns:a16="http://schemas.microsoft.com/office/drawing/2014/main" id="{502D5D97-AB58-05A0-F0CE-33C2DA4F6B6E}"/>
               </a:ext>
             </a:extLst>
           </p:cNvPr>
@@ -3065,7 +3065,7 @@
           <a:bodyPr/>
           <a:lstStyle/>
           <a:p>
-            <a:fld id="{95C66E42-B421-4974-83E4-933E8FDDFAD5}" type="datetimeFigureOut">
+            <a:fld id="{1629C079-760B-492B-AA39-F868F36703E0}" type="datetimeFigureOut">
               <a:rPr lang="en-MY" smtClean="0"/>
               <a:t>25/9/2026</a:t>
             </a:fld>
@@ -3078,7 +3078,7 @@
           <p:cNvPr id="8" name="Footer Placeholder 7">
             <a:extLst>
               <a:ext uri="{FF2B5EF4-FFF2-40B4-BE49-F238E27FC236}">
-                <a16:creationId xmlns:a16="http://schemas.microsoft.com/office/drawing/2014/main" id="{DA0EE992-C305-B49A-C0DE-5BD08E7C3E20}"/>
+                <a16:creationId xmlns:a16="http://schemas.microsoft.com/office/drawing/2014/main" id="{2DE46222-4205-78B7-E1C0-80E36408ECB5}"/>
               </a:ext>
             </a:extLst>
           </p:cNvPr>
@@ -3103,7 +3103,7 @@
           <p:cNvPr id="9" name="Slide Number Placeholder 8">
             <a:extLst>
               <a:ext uri="{FF2B5EF4-FFF2-40B4-BE49-F238E27FC236}">
-                <a16:creationId xmlns:a16="http://schemas.microsoft.com/office/drawing/2014/main" id="{4BCCB15D-95E1-048B-4A35-D4F706E86CC4}"/>
+                <a16:creationId xmlns:a16="http://schemas.microsoft.com/office/drawing/2014/main" id="{FA90E0D9-695C-F89A-5345-CEC5019C34FD}"/>
               </a:ext>
             </a:extLst>
           </p:cNvPr>
@@ -3119,7 +3119,7 @@
           <a:bodyPr/>
           <a:lstStyle/>
           <a:p>
-            <a:fld id="{E797DD9F-5283-436C-9EA7-CCF99750284B}" type="slidenum">
+            <a:fld id="{401225AD-5018-4FF2-BEE1-3A2F5ADC240E}" type="slidenum">
               <a:rPr lang="en-MY" smtClean="0"/>
               <a:t>‹#›</a:t>
             </a:fld>
@@ -3130,7 +3130,7 @@
     </p:spTree>
     <p:extLst>
       <p:ext uri="{BB962C8B-B14F-4D97-AF65-F5344CB8AC3E}">
-        <p14:creationId xmlns:p14="http://schemas.microsoft.com/office/powerpoint/2010/main" val="3989520625"/>
+        <p14:creationId xmlns:p14="http://schemas.microsoft.com/office/powerpoint/2010/main" val="2517363448"/>
       </p:ext>
     </p:extLst>
   </p:cSld>
@@ -3162,7 +3162,7 @@
           <p:cNvPr id="2" name="Title 1">
             <a:extLst>
               <a:ext uri="{FF2B5EF4-FFF2-40B4-BE49-F238E27FC236}">
-                <a16:creationId xmlns:a16="http://schemas.microsoft.com/office/drawing/2014/main" id="{0484A913-4851-AA23-2FB8-89C9ECAA201F}"/>
+                <a16:creationId xmlns:a16="http://schemas.microsoft.com/office/drawing/2014/main" id="{7757E19D-1E84-172E-479B-1A1C86CC08B6}"/>
               </a:ext>
             </a:extLst>
           </p:cNvPr>
@@ -3191,7 +3191,7 @@
           <p:cNvPr id="3" name="Date Placeholder 2">
             <a:extLst>
               <a:ext uri="{FF2B5EF4-FFF2-40B4-BE49-F238E27FC236}">
-                <a16:creationId xmlns:a16="http://schemas.microsoft.com/office/drawing/2014/main" id="{5298D409-30EA-CB9E-1B70-0E6291E37F32}"/>
+                <a16:creationId xmlns:a16="http://schemas.microsoft.com/office/drawing/2014/main" id="{1893BC2A-E774-F1F4-1E32-431BEA632133}"/>
               </a:ext>
             </a:extLst>
           </p:cNvPr>
@@ -3207,7 +3207,7 @@
           <a:bodyPr/>
           <a:lstStyle/>
           <a:p>
-            <a:fld id="{95C66E42-B421-4974-83E4-933E8FDDFAD5}" type="datetimeFigureOut">
+            <a:fld id="{1629C079-760B-492B-AA39-F868F36703E0}" type="datetimeFigureOut">
               <a:rPr lang="en-MY" smtClean="0"/>
               <a:t>25/9/2026</a:t>
             </a:fld>
@@ -3220,7 +3220,7 @@
           <p:cNvPr id="4" name="Footer Placeholder 3">
             <a:extLst>
               <a:ext uri="{FF2B5EF4-FFF2-40B4-BE49-F238E27FC236}">
-                <a16:creationId xmlns:a16="http://schemas.microsoft.com/office/drawing/2014/main" id="{2A501929-C22D-F7B6-BB6D-D1956B2736A4}"/>
+                <a16:creationId xmlns:a16="http://schemas.microsoft.com/office/drawing/2014/main" id="{FF7C8122-5063-3D78-8F71-8FC0C6D83380}"/>
               </a:ext>
             </a:extLst>
           </p:cNvPr>
@@ -3245,7 +3245,7 @@
           <p:cNvPr id="5" name="Slide Number Placeholder 4">
             <a:extLst>
               <a:ext uri="{FF2B5EF4-FFF2-40B4-BE49-F238E27FC236}">
-                <a16:creationId xmlns:a16="http://schemas.microsoft.com/office/drawing/2014/main" id="{634C04C5-1C10-7224-12FC-DF3B906DF3D1}"/>
+                <a16:creationId xmlns:a16="http://schemas.microsoft.com/office/drawing/2014/main" id="{103F3FC3-5418-04AF-EAB2-13C42C7E15CA}"/>
               </a:ext>
             </a:extLst>
           </p:cNvPr>
@@ -3261,7 +3261,7 @@
           <a:bodyPr/>
           <a:lstStyle/>
           <a:p>
-            <a:fld id="{E797DD9F-5283-436C-9EA7-CCF99750284B}" type="slidenum">
+            <a:fld id="{401225AD-5018-4FF2-BEE1-3A2F5ADC240E}" type="slidenum">
               <a:rPr lang="en-MY" smtClean="0"/>
               <a:t>‹#›</a:t>
             </a:fld>
@@ -3272,7 +3272,7 @@
     </p:spTree>
     <p:extLst>
       <p:ext uri="{BB962C8B-B14F-4D97-AF65-F5344CB8AC3E}">
-        <p14:creationId xmlns:p14="http://schemas.microsoft.com/office/powerpoint/2010/main" val="2311490217"/>
+        <p14:creationId xmlns:p14="http://schemas.microsoft.com/office/powerpoint/2010/main" val="3769239692"/>
       </p:ext>
     </p:extLst>
   </p:cSld>
@@ -3304,7 +3304,7 @@
           <p:cNvPr id="2" name="Date Placeholder 1">
             <a:extLst>
               <a:ext uri="{FF2B5EF4-FFF2-40B4-BE49-F238E27FC236}">
-                <a16:creationId xmlns:a16="http://schemas.microsoft.com/office/drawing/2014/main" id="{C5AAA5C4-FC1B-5A51-8BB4-BC5C53ECAB29}"/>
+                <a16:creationId xmlns:a16="http://schemas.microsoft.com/office/drawing/2014/main" id="{B9BC1DBA-602E-A6C3-0057-963AB824D8B0}"/>
               </a:ext>
             </a:extLst>
           </p:cNvPr>
@@ -3320,7 +3320,7 @@
           <a:bodyPr/>
           <a:lstStyle/>
           <a:p>
-            <a:fld id="{95C66E42-B421-4974-83E4-933E8FDDFAD5}" type="datetimeFigureOut">
+            <a:fld id="{1629C079-760B-492B-AA39-F868F36703E0}" type="datetimeFigureOut">
               <a:rPr lang="en-MY" smtClean="0"/>
               <a:t>25/9/2026</a:t>
             </a:fld>
@@ -3333,7 +3333,7 @@
           <p:cNvPr id="3" name="Footer Placeholder 2">
             <a:extLst>
               <a:ext uri="{FF2B5EF4-FFF2-40B4-BE49-F238E27FC236}">
-                <a16:creationId xmlns:a16="http://schemas.microsoft.com/office/drawing/2014/main" id="{9384D01D-BF3B-AD31-475E-E47F5AAF548B}"/>
+                <a16:creationId xmlns:a16="http://schemas.microsoft.com/office/drawing/2014/main" id="{AA22D0B2-FA83-F321-2886-7DA4AEF574DC}"/>
               </a:ext>
             </a:extLst>
           </p:cNvPr>
@@ -3358,7 +3358,7 @@
           <p:cNvPr id="4" name="Slide Number Placeholder 3">
             <a:extLst>
               <a:ext uri="{FF2B5EF4-FFF2-40B4-BE49-F238E27FC236}">
-                <a16:creationId xmlns:a16="http://schemas.microsoft.com/office/drawing/2014/main" id="{C43043CE-F463-2AE5-734C-6F34992E8294}"/>
+                <a16:creationId xmlns:a16="http://schemas.microsoft.com/office/drawing/2014/main" id="{56AB3C49-6822-6D07-A32C-B4473E475295}"/>
               </a:ext>
             </a:extLst>
           </p:cNvPr>
@@ -3374,7 +3374,7 @@
           <a:bodyPr/>
           <a:lstStyle/>
           <a:p>
-            <a:fld id="{E797DD9F-5283-436C-9EA7-CCF99750284B}" type="slidenum">
+            <a:fld id="{401225AD-5018-4FF2-BEE1-3A2F5ADC240E}" type="slidenum">
               <a:rPr lang="en-MY" smtClean="0"/>
               <a:t>‹#›</a:t>
             </a:fld>
@@ -3385,7 +3385,7 @@
     </p:spTree>
     <p:extLst>
       <p:ext uri="{BB962C8B-B14F-4D97-AF65-F5344CB8AC3E}">
-        <p14:creationId xmlns:p14="http://schemas.microsoft.com/office/powerpoint/2010/main" val="1767179505"/>
+        <p14:creationId xmlns:p14="http://schemas.microsoft.com/office/powerpoint/2010/main" val="185389392"/>
       </p:ext>
     </p:extLst>
   </p:cSld>
@@ -3417,7 +3417,7 @@
           <p:cNvPr id="2" name="Title 1">
             <a:extLst>
               <a:ext uri="{FF2B5EF4-FFF2-40B4-BE49-F238E27FC236}">
-                <a16:creationId xmlns:a16="http://schemas.microsoft.com/office/drawing/2014/main" id="{08B37EC9-7A4A-0603-B6BB-EF9152A1BB0E}"/>
+                <a16:creationId xmlns:a16="http://schemas.microsoft.com/office/drawing/2014/main" id="{072167A8-EA05-95F3-F7F7-65732355A416}"/>
               </a:ext>
             </a:extLst>
           </p:cNvPr>
@@ -3455,7 +3455,7 @@
           <p:cNvPr id="3" name="Content Placeholder 2">
             <a:extLst>
               <a:ext uri="{FF2B5EF4-FFF2-40B4-BE49-F238E27FC236}">
-                <a16:creationId xmlns:a16="http://schemas.microsoft.com/office/drawing/2014/main" id="{F20AA3FC-BAD0-98B5-6DD0-9A2138A09A24}"/>
+                <a16:creationId xmlns:a16="http://schemas.microsoft.com/office/drawing/2014/main" id="{0DF951C7-A8F8-E8D4-13C9-6805CCE27263}"/>
               </a:ext>
             </a:extLst>
           </p:cNvPr>
@@ -3546,7 +3546,7 @@
           <p:cNvPr id="4" name="Text Placeholder 3">
             <a:extLst>
               <a:ext uri="{FF2B5EF4-FFF2-40B4-BE49-F238E27FC236}">
-                <a16:creationId xmlns:a16="http://schemas.microsoft.com/office/drawing/2014/main" id="{B109324A-2BD9-185B-F507-9076C353A6F5}"/>
+                <a16:creationId xmlns:a16="http://schemas.microsoft.com/office/drawing/2014/main" id="{77B228F6-8F6E-0832-49B4-049A1213DF54}"/>
               </a:ext>
             </a:extLst>
           </p:cNvPr>
@@ -3617,7 +3617,7 @@
           <p:cNvPr id="5" name="Date Placeholder 4">
             <a:extLst>
               <a:ext uri="{FF2B5EF4-FFF2-40B4-BE49-F238E27FC236}">
-                <a16:creationId xmlns:a16="http://schemas.microsoft.com/office/drawing/2014/main" id="{CCB58C45-BE6B-2480-7960-F33783592561}"/>
+                <a16:creationId xmlns:a16="http://schemas.microsoft.com/office/drawing/2014/main" id="{135023E6-D1AE-0F63-6427-F81926281369}"/>
               </a:ext>
             </a:extLst>
           </p:cNvPr>
@@ -3633,7 +3633,7 @@
           <a:bodyPr/>
           <a:lstStyle/>
           <a:p>
-            <a:fld id="{95C66E42-B421-4974-83E4-933E8FDDFAD5}" type="datetimeFigureOut">
+            <a:fld id="{1629C079-760B-492B-AA39-F868F36703E0}" type="datetimeFigureOut">
               <a:rPr lang="en-MY" smtClean="0"/>
               <a:t>25/9/2026</a:t>
             </a:fld>
@@ -3646,7 +3646,7 @@
           <p:cNvPr id="6" name="Footer Placeholder 5">
             <a:extLst>
               <a:ext uri="{FF2B5EF4-FFF2-40B4-BE49-F238E27FC236}">
-                <a16:creationId xmlns:a16="http://schemas.microsoft.com/office/drawing/2014/main" id="{C6E9075F-B662-A20B-8B86-D091CC927E2E}"/>
+                <a16:creationId xmlns:a16="http://schemas.microsoft.com/office/drawing/2014/main" id="{0822F016-17F5-99D4-9547-54900833406F}"/>
               </a:ext>
             </a:extLst>
           </p:cNvPr>
@@ -3671,7 +3671,7 @@
           <p:cNvPr id="7" name="Slide Number Placeholder 6">
             <a:extLst>
               <a:ext uri="{FF2B5EF4-FFF2-40B4-BE49-F238E27FC236}">
-                <a16:creationId xmlns:a16="http://schemas.microsoft.com/office/drawing/2014/main" id="{5074621E-ECCD-4D4E-25C7-0C94E5919141}"/>
+                <a16:creationId xmlns:a16="http://schemas.microsoft.com/office/drawing/2014/main" id="{BFB795A3-311E-E173-18D3-46AFBCA72150}"/>
               </a:ext>
             </a:extLst>
           </p:cNvPr>
@@ -3687,7 +3687,7 @@
           <a:bodyPr/>
           <a:lstStyle/>
           <a:p>
-            <a:fld id="{E797DD9F-5283-436C-9EA7-CCF99750284B}" type="slidenum">
+            <a:fld id="{401225AD-5018-4FF2-BEE1-3A2F5ADC240E}" type="slidenum">
               <a:rPr lang="en-MY" smtClean="0"/>
               <a:t>‹#›</a:t>
             </a:fld>
@@ -3698,7 +3698,7 @@
     </p:spTree>
     <p:extLst>
       <p:ext uri="{BB962C8B-B14F-4D97-AF65-F5344CB8AC3E}">
-        <p14:creationId xmlns:p14="http://schemas.microsoft.com/office/powerpoint/2010/main" val="4111296632"/>
+        <p14:creationId xmlns:p14="http://schemas.microsoft.com/office/powerpoint/2010/main" val="3207665779"/>
       </p:ext>
     </p:extLst>
   </p:cSld>
@@ -3730,7 +3730,7 @@
           <p:cNvPr id="2" name="Title 1">
             <a:extLst>
               <a:ext uri="{FF2B5EF4-FFF2-40B4-BE49-F238E27FC236}">
-                <a16:creationId xmlns:a16="http://schemas.microsoft.com/office/drawing/2014/main" id="{6F8E12B8-7117-A573-EE8A-CC40CAD64AF2}"/>
+                <a16:creationId xmlns:a16="http://schemas.microsoft.com/office/drawing/2014/main" id="{CFC3465B-D82A-8CC8-9640-B0EFC80AAB95}"/>
               </a:ext>
             </a:extLst>
           </p:cNvPr>
@@ -3768,7 +3768,7 @@
           <p:cNvPr id="3" name="Picture Placeholder 2">
             <a:extLst>
               <a:ext uri="{FF2B5EF4-FFF2-40B4-BE49-F238E27FC236}">
-                <a16:creationId xmlns:a16="http://schemas.microsoft.com/office/drawing/2014/main" id="{8E2E3DBE-B6D2-2557-84BE-952A7B809D5C}"/>
+                <a16:creationId xmlns:a16="http://schemas.microsoft.com/office/drawing/2014/main" id="{2A6A33FC-EA31-53B4-ECCD-C6860D041BC7}"/>
               </a:ext>
             </a:extLst>
           </p:cNvPr>
@@ -3835,7 +3835,7 @@
           <p:cNvPr id="4" name="Text Placeholder 3">
             <a:extLst>
               <a:ext uri="{FF2B5EF4-FFF2-40B4-BE49-F238E27FC236}">
-                <a16:creationId xmlns:a16="http://schemas.microsoft.com/office/drawing/2014/main" id="{B62E4A2C-FFAB-FC33-0E18-C1D869B6916F}"/>
+                <a16:creationId xmlns:a16="http://schemas.microsoft.com/office/drawing/2014/main" id="{12BFFA22-40FB-B628-7787-F386060717EE}"/>
               </a:ext>
             </a:extLst>
           </p:cNvPr>
@@ -3906,7 +3906,7 @@
           <p:cNvPr id="5" name="Date Placeholder 4">
             <a:extLst>
               <a:ext uri="{FF2B5EF4-FFF2-40B4-BE49-F238E27FC236}">
-                <a16:creationId xmlns:a16="http://schemas.microsoft.com/office/drawing/2014/main" id="{91C8FBB3-F8E9-45BE-B2A5-4870BC638BB8}"/>
+                <a16:creationId xmlns:a16="http://schemas.microsoft.com/office/drawing/2014/main" id="{F9A8B39B-E356-FFEF-3DE4-4E40862FAC9B}"/>
               </a:ext>
             </a:extLst>
           </p:cNvPr>
@@ -3922,7 +3922,7 @@
           <a:bodyPr/>
           <a:lstStyle/>
           <a:p>
-            <a:fld id="{95C66E42-B421-4974-83E4-933E8FDDFAD5}" type="datetimeFigureOut">
+            <a:fld id="{1629C079-760B-492B-AA39-F868F36703E0}" type="datetimeFigureOut">
               <a:rPr lang="en-MY" smtClean="0"/>
               <a:t>25/9/2026</a:t>
             </a:fld>
@@ -3935,7 +3935,7 @@
           <p:cNvPr id="6" name="Footer Placeholder 5">
             <a:extLst>
               <a:ext uri="{FF2B5EF4-FFF2-40B4-BE49-F238E27FC236}">
-                <a16:creationId xmlns:a16="http://schemas.microsoft.com/office/drawing/2014/main" id="{96A56768-19A5-F3BC-2454-407818ECC7FD}"/>
+                <a16:creationId xmlns:a16="http://schemas.microsoft.com/office/drawing/2014/main" id="{CDA1833F-5E4C-7C7C-B69C-60729E884930}"/>
               </a:ext>
             </a:extLst>
           </p:cNvPr>
@@ -3960,7 +3960,7 @@
           <p:cNvPr id="7" name="Slide Number Placeholder 6">
             <a:extLst>
               <a:ext uri="{FF2B5EF4-FFF2-40B4-BE49-F238E27FC236}">
-                <a16:creationId xmlns:a16="http://schemas.microsoft.com/office/drawing/2014/main" id="{13AAFCBA-9D24-1C02-253F-1E5A75007774}"/>
+                <a16:creationId xmlns:a16="http://schemas.microsoft.com/office/drawing/2014/main" id="{9E5A3F58-66F4-99CC-D268-7AF2A3B68033}"/>
               </a:ext>
             </a:extLst>
           </p:cNvPr>
@@ -3976,7 +3976,7 @@
           <a:bodyPr/>
           <a:lstStyle/>
           <a:p>
-            <a:fld id="{E797DD9F-5283-436C-9EA7-CCF99750284B}" type="slidenum">
+            <a:fld id="{401225AD-5018-4FF2-BEE1-3A2F5ADC240E}" type="slidenum">
               <a:rPr lang="en-MY" smtClean="0"/>
               <a:t>‹#›</a:t>
             </a:fld>
@@ -3987,7 +3987,7 @@
     </p:spTree>
     <p:extLst>
       <p:ext uri="{BB962C8B-B14F-4D97-AF65-F5344CB8AC3E}">
-        <p14:creationId xmlns:p14="http://schemas.microsoft.com/office/powerpoint/2010/main" val="1968565202"/>
+        <p14:creationId xmlns:p14="http://schemas.microsoft.com/office/powerpoint/2010/main" val="3078450830"/>
       </p:ext>
     </p:extLst>
   </p:cSld>
@@ -4024,7 +4024,7 @@
           <p:cNvPr id="2" name="Title Placeholder 1">
             <a:extLst>
               <a:ext uri="{FF2B5EF4-FFF2-40B4-BE49-F238E27FC236}">
-                <a16:creationId xmlns:a16="http://schemas.microsoft.com/office/drawing/2014/main" id="{F6A7BEB0-991F-C3FD-DEF8-FF81C8FCAF39}"/>
+                <a16:creationId xmlns:a16="http://schemas.microsoft.com/office/drawing/2014/main" id="{E7AC380E-F3C5-2764-3F70-2B48005ABCE6}"/>
               </a:ext>
             </a:extLst>
           </p:cNvPr>
@@ -4063,7 +4063,7 @@
           <p:cNvPr id="3" name="Text Placeholder 2">
             <a:extLst>
               <a:ext uri="{FF2B5EF4-FFF2-40B4-BE49-F238E27FC236}">
-                <a16:creationId xmlns:a16="http://schemas.microsoft.com/office/drawing/2014/main" id="{AFC18650-B36E-6450-9B88-0FC27D190D13}"/>
+                <a16:creationId xmlns:a16="http://schemas.microsoft.com/office/drawing/2014/main" id="{34D2BB84-ABDA-3DF6-AEB8-0CF1D2F2776D}"/>
               </a:ext>
             </a:extLst>
           </p:cNvPr>
@@ -4131,7 +4131,7 @@
           <p:cNvPr id="4" name="Date Placeholder 3">
             <a:extLst>
               <a:ext uri="{FF2B5EF4-FFF2-40B4-BE49-F238E27FC236}">
-                <a16:creationId xmlns:a16="http://schemas.microsoft.com/office/drawing/2014/main" id="{378FAAD9-DD0A-7AF5-BEC1-8656F84E3E55}"/>
+                <a16:creationId xmlns:a16="http://schemas.microsoft.com/office/drawing/2014/main" id="{BC506EE7-65CD-2BF5-6DED-2285C48E1F7E}"/>
               </a:ext>
             </a:extLst>
           </p:cNvPr>
@@ -4165,7 +4165,7 @@
             </a:lvl1pPr>
           </a:lstStyle>
           <a:p>
-            <a:fld id="{95C66E42-B421-4974-83E4-933E8FDDFAD5}" type="datetimeFigureOut">
+            <a:fld id="{1629C079-760B-492B-AA39-F868F36703E0}" type="datetimeFigureOut">
               <a:rPr lang="en-MY" smtClean="0"/>
               <a:t>25/9/2026</a:t>
             </a:fld>
@@ -4178,7 +4178,7 @@
           <p:cNvPr id="5" name="Footer Placeholder 4">
             <a:extLst>
               <a:ext uri="{FF2B5EF4-FFF2-40B4-BE49-F238E27FC236}">
-                <a16:creationId xmlns:a16="http://schemas.microsoft.com/office/drawing/2014/main" id="{17A27783-301E-5223-2974-E375A7FB791D}"/>
+                <a16:creationId xmlns:a16="http://schemas.microsoft.com/office/drawing/2014/main" id="{9DDEE5FA-28E2-3478-EE0E-6E30450A83B6}"/>
               </a:ext>
             </a:extLst>
           </p:cNvPr>
@@ -4221,7 +4221,7 @@
           <p:cNvPr id="6" name="Slide Number Placeholder 5">
             <a:extLst>
               <a:ext uri="{FF2B5EF4-FFF2-40B4-BE49-F238E27FC236}">
-                <a16:creationId xmlns:a16="http://schemas.microsoft.com/office/drawing/2014/main" id="{E3E9F045-2AF9-F054-972A-9C0067A264CD}"/>
+                <a16:creationId xmlns:a16="http://schemas.microsoft.com/office/drawing/2014/main" id="{FC8DF13F-E8C8-3EA2-047F-D15C4ACD98F6}"/>
               </a:ext>
             </a:extLst>
           </p:cNvPr>
@@ -4255,7 +4255,7 @@
             </a:lvl1pPr>
           </a:lstStyle>
           <a:p>
-            <a:fld id="{E797DD9F-5283-436C-9EA7-CCF99750284B}" type="slidenum">
+            <a:fld id="{401225AD-5018-4FF2-BEE1-3A2F5ADC240E}" type="slidenum">
               <a:rPr lang="en-MY" smtClean="0"/>
               <a:t>‹#›</a:t>
             </a:fld>
@@ -4266,7 +4266,7 @@
     </p:spTree>
     <p:extLst>
       <p:ext uri="{BB962C8B-B14F-4D97-AF65-F5344CB8AC3E}">
-        <p14:creationId xmlns:p14="http://schemas.microsoft.com/office/powerpoint/2010/main" val="359960287"/>
+        <p14:creationId xmlns:p14="http://schemas.microsoft.com/office/powerpoint/2010/main" val="3555373295"/>
       </p:ext>
     </p:extLst>
   </p:cSld>
@@ -4597,7 +4597,7 @@
           <p:cNvPr id="2" name="TextBox 1">
             <a:extLst>
               <a:ext uri="{FF2B5EF4-FFF2-40B4-BE49-F238E27FC236}">
-                <a16:creationId xmlns:a16="http://schemas.microsoft.com/office/drawing/2014/main" id="{C693BF5B-3C63-37DF-91B5-A78C1D38EF2D}"/>
+                <a16:creationId xmlns:a16="http://schemas.microsoft.com/office/drawing/2014/main" id="{C0ABA713-0A1E-9FE4-2C90-A8CF686A79D2}"/>
               </a:ext>
             </a:extLst>
           </p:cNvPr>
@@ -4637,7 +4637,7 @@
           <p:cNvPr id="3" name="TextBox 2">
             <a:extLst>
               <a:ext uri="{FF2B5EF4-FFF2-40B4-BE49-F238E27FC236}">
-                <a16:creationId xmlns:a16="http://schemas.microsoft.com/office/drawing/2014/main" id="{07504D00-A1A7-4EB7-2836-7B3DD216E204}"/>
+                <a16:creationId xmlns:a16="http://schemas.microsoft.com/office/drawing/2014/main" id="{20B793B3-1F95-4511-E1FD-4A179E296ECF}"/>
               </a:ext>
             </a:extLst>
           </p:cNvPr>
@@ -4683,7 +4683,7 @@
           <p:cNvPr id="4" name="TextBox 3">
             <a:extLst>
               <a:ext uri="{FF2B5EF4-FFF2-40B4-BE49-F238E27FC236}">
-                <a16:creationId xmlns:a16="http://schemas.microsoft.com/office/drawing/2014/main" id="{A5C7EA26-F7CA-21D0-0C81-AC07EED46436}"/>
+                <a16:creationId xmlns:a16="http://schemas.microsoft.com/office/drawing/2014/main" id="{F94F2D66-6201-BD1B-C8B0-6202A2AE17F8}"/>
               </a:ext>
             </a:extLst>
           </p:cNvPr>
@@ -4729,7 +4729,7 @@
           <p:cNvPr id="5" name="TextBox 4">
             <a:extLst>
               <a:ext uri="{FF2B5EF4-FFF2-40B4-BE49-F238E27FC236}">
-                <a16:creationId xmlns:a16="http://schemas.microsoft.com/office/drawing/2014/main" id="{93B78FDC-DB29-25BD-753B-ADD4A04B08F8}"/>
+                <a16:creationId xmlns:a16="http://schemas.microsoft.com/office/drawing/2014/main" id="{FAFE683C-B631-DF10-6E98-C61447843D1C}"/>
               </a:ext>
             </a:extLst>
           </p:cNvPr>
@@ -4775,7 +4775,7 @@
           <p:cNvPr id="6" name="TextBox 5">
             <a:extLst>
               <a:ext uri="{FF2B5EF4-FFF2-40B4-BE49-F238E27FC236}">
-                <a16:creationId xmlns:a16="http://schemas.microsoft.com/office/drawing/2014/main" id="{0107CDB6-9D0D-4093-31D5-CD14C0527591}"/>
+                <a16:creationId xmlns:a16="http://schemas.microsoft.com/office/drawing/2014/main" id="{18F05362-02DB-D84C-1465-881C3AD3D53F}"/>
               </a:ext>
             </a:extLst>
           </p:cNvPr>
@@ -4815,7 +4815,7 @@
           <p:cNvPr id="7" name="TextBox 6">
             <a:extLst>
               <a:ext uri="{FF2B5EF4-FFF2-40B4-BE49-F238E27FC236}">
-                <a16:creationId xmlns:a16="http://schemas.microsoft.com/office/drawing/2014/main" id="{67BF62E4-DC0D-C90D-C14D-0CDB915951CF}"/>
+                <a16:creationId xmlns:a16="http://schemas.microsoft.com/office/drawing/2014/main" id="{7713EA1E-E223-9E9D-6ABA-DF82B2BC7EE1}"/>
               </a:ext>
             </a:extLst>
           </p:cNvPr>
@@ -4860,7 +4860,7 @@
     </p:spTree>
     <p:extLst>
       <p:ext uri="{BB962C8B-B14F-4D97-AF65-F5344CB8AC3E}">
-        <p14:creationId xmlns:p14="http://schemas.microsoft.com/office/powerpoint/2010/main" val="2806751265"/>
+        <p14:creationId xmlns:p14="http://schemas.microsoft.com/office/powerpoint/2010/main" val="308047331"/>
       </p:ext>
     </p:extLst>
   </p:cSld>
@@ -4900,7 +4900,7 @@
           <p:cNvPr id="2" name="TextBox 1">
             <a:extLst>
               <a:ext uri="{FF2B5EF4-FFF2-40B4-BE49-F238E27FC236}">
-                <a16:creationId xmlns:a16="http://schemas.microsoft.com/office/drawing/2014/main" id="{A27136A7-1914-0A91-81BA-5F2DBE74AAE6}"/>
+                <a16:creationId xmlns:a16="http://schemas.microsoft.com/office/drawing/2014/main" id="{A916DAAA-427D-0E89-0E1A-7758929C91BE}"/>
               </a:ext>
             </a:extLst>
           </p:cNvPr>
@@ -4947,7 +4947,7 @@
           <p:cNvPr id="3" name="TextBox 2">
             <a:extLst>
               <a:ext uri="{FF2B5EF4-FFF2-40B4-BE49-F238E27FC236}">
-                <a16:creationId xmlns:a16="http://schemas.microsoft.com/office/drawing/2014/main" id="{E0228F3D-5F17-C995-0E4C-3F9F9D156FCB}"/>
+                <a16:creationId xmlns:a16="http://schemas.microsoft.com/office/drawing/2014/main" id="{1196E1CD-ECE2-3172-0D6E-C2EA6832B337}"/>
               </a:ext>
             </a:extLst>
           </p:cNvPr>
@@ -4988,7 +4988,7 @@
           <p:cNvPr id="4" name="TextBox 3">
             <a:extLst>
               <a:ext uri="{FF2B5EF4-FFF2-40B4-BE49-F238E27FC236}">
-                <a16:creationId xmlns:a16="http://schemas.microsoft.com/office/drawing/2014/main" id="{BFFE56A0-6630-2EEE-F1AD-7E8FC4958737}"/>
+                <a16:creationId xmlns:a16="http://schemas.microsoft.com/office/drawing/2014/main" id="{1D8CE974-8E68-BCA5-7D1D-9AA6CBF97A13}"/>
               </a:ext>
             </a:extLst>
           </p:cNvPr>
@@ -5027,7 +5027,7 @@
     </p:spTree>
     <p:extLst>
       <p:ext uri="{BB962C8B-B14F-4D97-AF65-F5344CB8AC3E}">
-        <p14:creationId xmlns:p14="http://schemas.microsoft.com/office/powerpoint/2010/main" val="3107122534"/>
+        <p14:creationId xmlns:p14="http://schemas.microsoft.com/office/powerpoint/2010/main" val="167917818"/>
       </p:ext>
     </p:extLst>
   </p:cSld>
@@ -5067,7 +5067,7 @@
           <p:cNvPr id="2" name="TextBox 1">
             <a:extLst>
               <a:ext uri="{FF2B5EF4-FFF2-40B4-BE49-F238E27FC236}">
-                <a16:creationId xmlns:a16="http://schemas.microsoft.com/office/drawing/2014/main" id="{EF85FFBB-AFE3-6E2C-FBA2-73E0AA66A73C}"/>
+                <a16:creationId xmlns:a16="http://schemas.microsoft.com/office/drawing/2014/main" id="{4D22FE6F-5CD8-DA18-7326-E432B47717B0}"/>
               </a:ext>
             </a:extLst>
           </p:cNvPr>
@@ -5113,7 +5113,7 @@
           <p:cNvPr id="3" name="Rectangle: Rounded Corners 2">
             <a:extLst>
               <a:ext uri="{FF2B5EF4-FFF2-40B4-BE49-F238E27FC236}">
-                <a16:creationId xmlns:a16="http://schemas.microsoft.com/office/drawing/2014/main" id="{DD1FA005-F798-B4DF-49D0-DFEECF337662}"/>
+                <a16:creationId xmlns:a16="http://schemas.microsoft.com/office/drawing/2014/main" id="{38065C17-ECA9-708A-3E50-FC61B1A91AA9}"/>
               </a:ext>
             </a:extLst>
           </p:cNvPr>
@@ -5183,7 +5183,7 @@
           <p:cNvPr id="4" name="Oval 3">
             <a:extLst>
               <a:ext uri="{FF2B5EF4-FFF2-40B4-BE49-F238E27FC236}">
-                <a16:creationId xmlns:a16="http://schemas.microsoft.com/office/drawing/2014/main" id="{3DC20EF8-9F70-3C0A-A2F7-AF803AE8DDAE}"/>
+                <a16:creationId xmlns:a16="http://schemas.microsoft.com/office/drawing/2014/main" id="{5A9B49E2-D54A-4DB4-E4ED-6F5C85939E8A}"/>
               </a:ext>
             </a:extLst>
           </p:cNvPr>
@@ -5259,7 +5259,7 @@
           <p:cNvPr id="5" name="TextBox 4">
             <a:extLst>
               <a:ext uri="{FF2B5EF4-FFF2-40B4-BE49-F238E27FC236}">
-                <a16:creationId xmlns:a16="http://schemas.microsoft.com/office/drawing/2014/main" id="{6FC584B5-3B82-1151-D673-97D4FB7E3556}"/>
+                <a16:creationId xmlns:a16="http://schemas.microsoft.com/office/drawing/2014/main" id="{74728F7E-7CB1-B1E9-0A68-C42A3A24D2C2}"/>
               </a:ext>
             </a:extLst>
           </p:cNvPr>
@@ -5299,7 +5299,7 @@
           <p:cNvPr id="6" name="TextBox 5">
             <a:extLst>
               <a:ext uri="{FF2B5EF4-FFF2-40B4-BE49-F238E27FC236}">
-                <a16:creationId xmlns:a16="http://schemas.microsoft.com/office/drawing/2014/main" id="{CE2A53D1-D260-A80F-BEBC-25CF0DF67025}"/>
+                <a16:creationId xmlns:a16="http://schemas.microsoft.com/office/drawing/2014/main" id="{BF3E86CA-B53D-06AE-BF0E-02F03E4F0A54}"/>
               </a:ext>
             </a:extLst>
           </p:cNvPr>
@@ -5339,7 +5339,7 @@
           <p:cNvPr id="7" name="Rectangle: Rounded Corners 6">
             <a:extLst>
               <a:ext uri="{FF2B5EF4-FFF2-40B4-BE49-F238E27FC236}">
-                <a16:creationId xmlns:a16="http://schemas.microsoft.com/office/drawing/2014/main" id="{DE80634D-803D-F0E7-A06A-60E105686D10}"/>
+                <a16:creationId xmlns:a16="http://schemas.microsoft.com/office/drawing/2014/main" id="{75A39B7A-290C-1F8F-8BDC-65FD133638D6}"/>
               </a:ext>
             </a:extLst>
           </p:cNvPr>
@@ -5409,7 +5409,7 @@
           <p:cNvPr id="8" name="Oval 7">
             <a:extLst>
               <a:ext uri="{FF2B5EF4-FFF2-40B4-BE49-F238E27FC236}">
-                <a16:creationId xmlns:a16="http://schemas.microsoft.com/office/drawing/2014/main" id="{27F2954B-2F89-5F9F-DF35-EDD9BEF9346B}"/>
+                <a16:creationId xmlns:a16="http://schemas.microsoft.com/office/drawing/2014/main" id="{7F30117F-47D3-7912-6181-212410DAFDB0}"/>
               </a:ext>
             </a:extLst>
           </p:cNvPr>
@@ -5485,7 +5485,7 @@
           <p:cNvPr id="9" name="TextBox 8">
             <a:extLst>
               <a:ext uri="{FF2B5EF4-FFF2-40B4-BE49-F238E27FC236}">
-                <a16:creationId xmlns:a16="http://schemas.microsoft.com/office/drawing/2014/main" id="{2B49A366-0E81-BF48-4225-0F559BFA14ED}"/>
+                <a16:creationId xmlns:a16="http://schemas.microsoft.com/office/drawing/2014/main" id="{43EF2275-3D73-BABA-247C-8085FA730200}"/>
               </a:ext>
             </a:extLst>
           </p:cNvPr>
@@ -5525,7 +5525,7 @@
           <p:cNvPr id="10" name="TextBox 9">
             <a:extLst>
               <a:ext uri="{FF2B5EF4-FFF2-40B4-BE49-F238E27FC236}">
-                <a16:creationId xmlns:a16="http://schemas.microsoft.com/office/drawing/2014/main" id="{B23536E6-4A0B-AF83-451A-4355A5BE6BE9}"/>
+                <a16:creationId xmlns:a16="http://schemas.microsoft.com/office/drawing/2014/main" id="{A0FD02E2-F969-522F-C01D-37E07EB1FAAC}"/>
               </a:ext>
             </a:extLst>
           </p:cNvPr>
@@ -5571,7 +5571,7 @@
           <p:cNvPr id="11" name="Rectangle: Rounded Corners 10">
             <a:extLst>
               <a:ext uri="{FF2B5EF4-FFF2-40B4-BE49-F238E27FC236}">
-                <a16:creationId xmlns:a16="http://schemas.microsoft.com/office/drawing/2014/main" id="{663C0DB5-CC33-A43D-7DCA-3CD5A9220B14}"/>
+                <a16:creationId xmlns:a16="http://schemas.microsoft.com/office/drawing/2014/main" id="{0CD0EABA-19F1-FA5F-6193-200D9340F3C2}"/>
               </a:ext>
             </a:extLst>
           </p:cNvPr>
@@ -5641,7 +5641,7 @@
           <p:cNvPr id="12" name="Oval 11">
             <a:extLst>
               <a:ext uri="{FF2B5EF4-FFF2-40B4-BE49-F238E27FC236}">
-                <a16:creationId xmlns:a16="http://schemas.microsoft.com/office/drawing/2014/main" id="{7E1BFA53-4B29-4F83-84CB-4E40803EF955}"/>
+                <a16:creationId xmlns:a16="http://schemas.microsoft.com/office/drawing/2014/main" id="{92D0615F-0F26-C9DD-185A-EAC663EF1692}"/>
               </a:ext>
             </a:extLst>
           </p:cNvPr>
@@ -5717,7 +5717,7 @@
           <p:cNvPr id="13" name="TextBox 12">
             <a:extLst>
               <a:ext uri="{FF2B5EF4-FFF2-40B4-BE49-F238E27FC236}">
-                <a16:creationId xmlns:a16="http://schemas.microsoft.com/office/drawing/2014/main" id="{F3C69B6E-DB94-904E-8E3F-FE5E747F334E}"/>
+                <a16:creationId xmlns:a16="http://schemas.microsoft.com/office/drawing/2014/main" id="{F346EFD5-F92F-DD84-6762-42A14BD13715}"/>
               </a:ext>
             </a:extLst>
           </p:cNvPr>
@@ -5757,7 +5757,7 @@
           <p:cNvPr id="14" name="TextBox 13">
             <a:extLst>
               <a:ext uri="{FF2B5EF4-FFF2-40B4-BE49-F238E27FC236}">
-                <a16:creationId xmlns:a16="http://schemas.microsoft.com/office/drawing/2014/main" id="{875C9476-8F6C-71B4-9FEA-A06F6DB0FF34}"/>
+                <a16:creationId xmlns:a16="http://schemas.microsoft.com/office/drawing/2014/main" id="{AAA90219-649F-F25C-F04B-21D470B6E094}"/>
               </a:ext>
             </a:extLst>
           </p:cNvPr>
@@ -5803,7 +5803,7 @@
           <p:cNvPr id="15" name="Rectangle: Rounded Corners 14">
             <a:extLst>
               <a:ext uri="{FF2B5EF4-FFF2-40B4-BE49-F238E27FC236}">
-                <a16:creationId xmlns:a16="http://schemas.microsoft.com/office/drawing/2014/main" id="{C1BA83B7-2868-2FD1-F00A-A1E31E447C18}"/>
+                <a16:creationId xmlns:a16="http://schemas.microsoft.com/office/drawing/2014/main" id="{0318B4CA-20D0-5D09-F42E-A2F1FAE240B0}"/>
               </a:ext>
             </a:extLst>
           </p:cNvPr>
@@ -5873,7 +5873,7 @@
           <p:cNvPr id="16" name="Oval 15">
             <a:extLst>
               <a:ext uri="{FF2B5EF4-FFF2-40B4-BE49-F238E27FC236}">
-                <a16:creationId xmlns:a16="http://schemas.microsoft.com/office/drawing/2014/main" id="{C583BF07-88F3-CE5C-C19F-5A94F6D63953}"/>
+                <a16:creationId xmlns:a16="http://schemas.microsoft.com/office/drawing/2014/main" id="{367E418D-C19F-F964-EE5B-0C7ED4EE3720}"/>
               </a:ext>
             </a:extLst>
           </p:cNvPr>
@@ -5949,7 +5949,7 @@
           <p:cNvPr id="17" name="TextBox 16">
             <a:extLst>
               <a:ext uri="{FF2B5EF4-FFF2-40B4-BE49-F238E27FC236}">
-                <a16:creationId xmlns:a16="http://schemas.microsoft.com/office/drawing/2014/main" id="{D108E14E-3BFA-C5BE-B661-0924EE7E1FB3}"/>
+                <a16:creationId xmlns:a16="http://schemas.microsoft.com/office/drawing/2014/main" id="{16064A78-7F99-CDD7-94DA-D63873389D2A}"/>
               </a:ext>
             </a:extLst>
           </p:cNvPr>
@@ -5989,7 +5989,7 @@
           <p:cNvPr id="18" name="TextBox 17">
             <a:extLst>
               <a:ext uri="{FF2B5EF4-FFF2-40B4-BE49-F238E27FC236}">
-                <a16:creationId xmlns:a16="http://schemas.microsoft.com/office/drawing/2014/main" id="{25A6DEB6-DBED-3E51-FC35-3196824FEE9D}"/>
+                <a16:creationId xmlns:a16="http://schemas.microsoft.com/office/drawing/2014/main" id="{79E0525B-62E9-DDD4-BB64-004CB12C6EE0}"/>
               </a:ext>
             </a:extLst>
           </p:cNvPr>
@@ -6035,7 +6035,7 @@
           <p:cNvPr id="19" name="TextBox 18">
             <a:extLst>
               <a:ext uri="{FF2B5EF4-FFF2-40B4-BE49-F238E27FC236}">
-                <a16:creationId xmlns:a16="http://schemas.microsoft.com/office/drawing/2014/main" id="{B2CA3C26-9836-4598-7866-7A9BA6DE4A68}"/>
+                <a16:creationId xmlns:a16="http://schemas.microsoft.com/office/drawing/2014/main" id="{9240D235-D8B2-8139-4735-C8218430E9A6}"/>
               </a:ext>
             </a:extLst>
           </p:cNvPr>
@@ -6081,7 +6081,7 @@
           <p:cNvPr id="20" name="TextBox 19">
             <a:extLst>
               <a:ext uri="{FF2B5EF4-FFF2-40B4-BE49-F238E27FC236}">
-                <a16:creationId xmlns:a16="http://schemas.microsoft.com/office/drawing/2014/main" id="{3FD0B2B1-9C07-1D6D-5224-142A28F3E510}"/>
+                <a16:creationId xmlns:a16="http://schemas.microsoft.com/office/drawing/2014/main" id="{99DCBB9F-F5B9-2A65-A11A-2E011A5379CF}"/>
               </a:ext>
             </a:extLst>
           </p:cNvPr>
@@ -6127,7 +6127,7 @@
           <p:cNvPr id="21" name="TextBox 20">
             <a:extLst>
               <a:ext uri="{FF2B5EF4-FFF2-40B4-BE49-F238E27FC236}">
-                <a16:creationId xmlns:a16="http://schemas.microsoft.com/office/drawing/2014/main" id="{894F70D8-5C54-9ECD-93D7-63CCB3F54F36}"/>
+                <a16:creationId xmlns:a16="http://schemas.microsoft.com/office/drawing/2014/main" id="{F244DF95-57EE-6BA1-1651-38B21161718D}"/>
               </a:ext>
             </a:extLst>
           </p:cNvPr>
@@ -6173,7 +6173,7 @@
           <p:cNvPr id="22" name="TextBox 21">
             <a:extLst>
               <a:ext uri="{FF2B5EF4-FFF2-40B4-BE49-F238E27FC236}">
-                <a16:creationId xmlns:a16="http://schemas.microsoft.com/office/drawing/2014/main" id="{70BB0E40-013F-F570-4585-13B9FCE53105}"/>
+                <a16:creationId xmlns:a16="http://schemas.microsoft.com/office/drawing/2014/main" id="{7BF69691-6BF8-B282-1C9A-F698B7213FF3}"/>
               </a:ext>
             </a:extLst>
           </p:cNvPr>
@@ -6219,7 +6219,7 @@
           <p:cNvPr id="23" name="TextBox 22">
             <a:extLst>
               <a:ext uri="{FF2B5EF4-FFF2-40B4-BE49-F238E27FC236}">
-                <a16:creationId xmlns:a16="http://schemas.microsoft.com/office/drawing/2014/main" id="{07E4CF4E-4757-7064-4A88-E83C872154A6}"/>
+                <a16:creationId xmlns:a16="http://schemas.microsoft.com/office/drawing/2014/main" id="{673F780B-C50F-D3F2-24A0-84017B55CA60}"/>
               </a:ext>
             </a:extLst>
           </p:cNvPr>
@@ -6265,7 +6265,7 @@
           <p:cNvPr id="24" name="TextBox 23">
             <a:extLst>
               <a:ext uri="{FF2B5EF4-FFF2-40B4-BE49-F238E27FC236}">
-                <a16:creationId xmlns:a16="http://schemas.microsoft.com/office/drawing/2014/main" id="{DF53D096-5A89-15A8-D6C2-E59E6938B0DE}"/>
+                <a16:creationId xmlns:a16="http://schemas.microsoft.com/office/drawing/2014/main" id="{2FD5EA9F-2433-8AB0-9E25-E9323DE2D4F6}"/>
               </a:ext>
             </a:extLst>
           </p:cNvPr>
@@ -6311,7 +6311,7 @@
           <p:cNvPr id="25" name="TextBox 24">
             <a:extLst>
               <a:ext uri="{FF2B5EF4-FFF2-40B4-BE49-F238E27FC236}">
-                <a16:creationId xmlns:a16="http://schemas.microsoft.com/office/drawing/2014/main" id="{33923954-8CCC-E404-17D3-D94AE384589B}"/>
+                <a16:creationId xmlns:a16="http://schemas.microsoft.com/office/drawing/2014/main" id="{80A25E00-021C-F5A9-6545-2BF1B8D5648D}"/>
               </a:ext>
             </a:extLst>
           </p:cNvPr>
@@ -6357,7 +6357,7 @@
           <p:cNvPr id="26" name="Rectangle: Rounded Corners 25">
             <a:extLst>
               <a:ext uri="{FF2B5EF4-FFF2-40B4-BE49-F238E27FC236}">
-                <a16:creationId xmlns:a16="http://schemas.microsoft.com/office/drawing/2014/main" id="{9990D4CB-C4E8-8C9C-EF42-9E8620D57706}"/>
+                <a16:creationId xmlns:a16="http://schemas.microsoft.com/office/drawing/2014/main" id="{D7307203-2C44-64D2-F6FD-58D0E95FAB1F}"/>
               </a:ext>
             </a:extLst>
           </p:cNvPr>
@@ -6427,7 +6427,7 @@
           <p:cNvPr id="27" name="TextBox 26">
             <a:extLst>
               <a:ext uri="{FF2B5EF4-FFF2-40B4-BE49-F238E27FC236}">
-                <a16:creationId xmlns:a16="http://schemas.microsoft.com/office/drawing/2014/main" id="{F38EF219-F29D-AB87-E452-072039CBAEA1}"/>
+                <a16:creationId xmlns:a16="http://schemas.microsoft.com/office/drawing/2014/main" id="{C8C2C0A8-1CA0-EC4D-5CC4-74181091DDE7}"/>
               </a:ext>
             </a:extLst>
           </p:cNvPr>
@@ -6473,7 +6473,7 @@
           <p:cNvPr id="28" name="TextBox 27">
             <a:extLst>
               <a:ext uri="{FF2B5EF4-FFF2-40B4-BE49-F238E27FC236}">
-                <a16:creationId xmlns:a16="http://schemas.microsoft.com/office/drawing/2014/main" id="{30D47859-76DA-8849-F004-0425349588CE}"/>
+                <a16:creationId xmlns:a16="http://schemas.microsoft.com/office/drawing/2014/main" id="{F8B6AFBB-774E-2D1F-0C22-73CF72FFB55C}"/>
               </a:ext>
             </a:extLst>
           </p:cNvPr>
@@ -6518,7 +6518,7 @@
     </p:spTree>
     <p:extLst>
       <p:ext uri="{BB962C8B-B14F-4D97-AF65-F5344CB8AC3E}">
-        <p14:creationId xmlns:p14="http://schemas.microsoft.com/office/powerpoint/2010/main" val="4223462970"/>
+        <p14:creationId xmlns:p14="http://schemas.microsoft.com/office/powerpoint/2010/main" val="2098697271"/>
       </p:ext>
     </p:extLst>
   </p:cSld>
@@ -6558,7 +6558,7 @@
           <p:cNvPr id="2" name="TextBox 1">
             <a:extLst>
               <a:ext uri="{FF2B5EF4-FFF2-40B4-BE49-F238E27FC236}">
-                <a16:creationId xmlns:a16="http://schemas.microsoft.com/office/drawing/2014/main" id="{96F93134-21DB-777A-1F2E-8641C6526B43}"/>
+                <a16:creationId xmlns:a16="http://schemas.microsoft.com/office/drawing/2014/main" id="{368D0179-A9FC-20C9-692E-AB1EB874DE83}"/>
               </a:ext>
             </a:extLst>
           </p:cNvPr>
@@ -6604,7 +6604,7 @@
           <p:cNvPr id="4" name="Picture 3">
             <a:extLst>
               <a:ext uri="{FF2B5EF4-FFF2-40B4-BE49-F238E27FC236}">
-                <a16:creationId xmlns:a16="http://schemas.microsoft.com/office/drawing/2014/main" id="{B5A666E2-0989-3138-3D5A-C6C5CC14FE94}"/>
+                <a16:creationId xmlns:a16="http://schemas.microsoft.com/office/drawing/2014/main" id="{A5F567B0-2B51-26D0-D577-14CCA2D22C24}"/>
               </a:ext>
             </a:extLst>
           </p:cNvPr>
@@ -6645,7 +6645,7 @@
           <p:cNvPr id="5" name="TextBox 4">
             <a:extLst>
               <a:ext uri="{FF2B5EF4-FFF2-40B4-BE49-F238E27FC236}">
-                <a16:creationId xmlns:a16="http://schemas.microsoft.com/office/drawing/2014/main" id="{F104B869-5D8D-696B-7091-D891A71EE504}"/>
+                <a16:creationId xmlns:a16="http://schemas.microsoft.com/office/drawing/2014/main" id="{E8475B74-EF10-BAB7-003B-6D7BFEC8CA3C}"/>
               </a:ext>
             </a:extLst>
           </p:cNvPr>
@@ -6685,7 +6685,7 @@
           <p:cNvPr id="6" name="TextBox 5">
             <a:extLst>
               <a:ext uri="{FF2B5EF4-FFF2-40B4-BE49-F238E27FC236}">
-                <a16:creationId xmlns:a16="http://schemas.microsoft.com/office/drawing/2014/main" id="{8A5D0598-3D0E-E647-1163-A8A3BD4F9690}"/>
+                <a16:creationId xmlns:a16="http://schemas.microsoft.com/office/drawing/2014/main" id="{65E91FDD-CB1D-A0DD-C41D-9C39A329F30E}"/>
               </a:ext>
             </a:extLst>
           </p:cNvPr>
@@ -6725,7 +6725,7 @@
           <p:cNvPr id="7" name="TextBox 6">
             <a:extLst>
               <a:ext uri="{FF2B5EF4-FFF2-40B4-BE49-F238E27FC236}">
-                <a16:creationId xmlns:a16="http://schemas.microsoft.com/office/drawing/2014/main" id="{6CF33E62-F5BF-2A83-4A50-7357118C0FA7}"/>
+                <a16:creationId xmlns:a16="http://schemas.microsoft.com/office/drawing/2014/main" id="{84F5E635-587C-E255-9D01-C510FD853C96}"/>
               </a:ext>
             </a:extLst>
           </p:cNvPr>
@@ -6765,7 +6765,7 @@
           <p:cNvPr id="8" name="TextBox 7">
             <a:extLst>
               <a:ext uri="{FF2B5EF4-FFF2-40B4-BE49-F238E27FC236}">
-                <a16:creationId xmlns:a16="http://schemas.microsoft.com/office/drawing/2014/main" id="{F514B4F6-9704-79DC-FF61-CE0C4FD61FDE}"/>
+                <a16:creationId xmlns:a16="http://schemas.microsoft.com/office/drawing/2014/main" id="{66511685-71DF-6A27-2607-5FA2832803EA}"/>
               </a:ext>
             </a:extLst>
           </p:cNvPr>
@@ -6811,7 +6811,7 @@
           <p:cNvPr id="9" name="TextBox 8">
             <a:extLst>
               <a:ext uri="{FF2B5EF4-FFF2-40B4-BE49-F238E27FC236}">
-                <a16:creationId xmlns:a16="http://schemas.microsoft.com/office/drawing/2014/main" id="{27E3C40F-F423-9984-62B6-4F27998B45BD}"/>
+                <a16:creationId xmlns:a16="http://schemas.microsoft.com/office/drawing/2014/main" id="{76866037-7064-CB82-B557-7692622AC0B2}"/>
               </a:ext>
             </a:extLst>
           </p:cNvPr>
@@ -6851,7 +6851,7 @@
           <p:cNvPr id="10" name="TextBox 9">
             <a:extLst>
               <a:ext uri="{FF2B5EF4-FFF2-40B4-BE49-F238E27FC236}">
-                <a16:creationId xmlns:a16="http://schemas.microsoft.com/office/drawing/2014/main" id="{1922A7D3-D999-BBE0-5657-BB50E15EAD2F}"/>
+                <a16:creationId xmlns:a16="http://schemas.microsoft.com/office/drawing/2014/main" id="{FD3D1597-6F17-D24D-3C2E-0A8E7F05DFE4}"/>
               </a:ext>
             </a:extLst>
           </p:cNvPr>
@@ -6897,7 +6897,7 @@
           <p:cNvPr id="11" name="TextBox 10">
             <a:extLst>
               <a:ext uri="{FF2B5EF4-FFF2-40B4-BE49-F238E27FC236}">
-                <a16:creationId xmlns:a16="http://schemas.microsoft.com/office/drawing/2014/main" id="{09E1368A-AEE6-D8D6-EF7B-2778974D01DA}"/>
+                <a16:creationId xmlns:a16="http://schemas.microsoft.com/office/drawing/2014/main" id="{A99056F1-7179-EF72-6FE9-7BAB093256BE}"/>
               </a:ext>
             </a:extLst>
           </p:cNvPr>
@@ -6937,7 +6937,7 @@
           <p:cNvPr id="12" name="TextBox 11">
             <a:extLst>
               <a:ext uri="{FF2B5EF4-FFF2-40B4-BE49-F238E27FC236}">
-                <a16:creationId xmlns:a16="http://schemas.microsoft.com/office/drawing/2014/main" id="{B832FD4D-3452-0E20-B1C9-3A3F46BC1875}"/>
+                <a16:creationId xmlns:a16="http://schemas.microsoft.com/office/drawing/2014/main" id="{756D89E1-DEEB-FF4E-D921-438A39C0A782}"/>
               </a:ext>
             </a:extLst>
           </p:cNvPr>
@@ -6983,7 +6983,7 @@
           <p:cNvPr id="13" name="TextBox 12">
             <a:extLst>
               <a:ext uri="{FF2B5EF4-FFF2-40B4-BE49-F238E27FC236}">
-                <a16:creationId xmlns:a16="http://schemas.microsoft.com/office/drawing/2014/main" id="{F3B46764-C075-2F24-0A3A-D15B589FFB61}"/>
+                <a16:creationId xmlns:a16="http://schemas.microsoft.com/office/drawing/2014/main" id="{03A9E515-FE5E-BF77-C57D-A47C2B683D9D}"/>
               </a:ext>
             </a:extLst>
           </p:cNvPr>
@@ -7029,7 +7029,7 @@
           <p:cNvPr id="14" name="TextBox 13">
             <a:extLst>
               <a:ext uri="{FF2B5EF4-FFF2-40B4-BE49-F238E27FC236}">
-                <a16:creationId xmlns:a16="http://schemas.microsoft.com/office/drawing/2014/main" id="{74FB8AC1-C1C5-64A4-BDE4-E8D45A3A75CF}"/>
+                <a16:creationId xmlns:a16="http://schemas.microsoft.com/office/drawing/2014/main" id="{97F3490D-A13D-E47E-3996-CF06048215B2}"/>
               </a:ext>
             </a:extLst>
           </p:cNvPr>
@@ -7068,7 +7068,7 @@
     </p:spTree>
     <p:extLst>
       <p:ext uri="{BB962C8B-B14F-4D97-AF65-F5344CB8AC3E}">
-        <p14:creationId xmlns:p14="http://schemas.microsoft.com/office/powerpoint/2010/main" val="3359025787"/>
+        <p14:creationId xmlns:p14="http://schemas.microsoft.com/office/powerpoint/2010/main" val="1086562218"/>
       </p:ext>
     </p:extLst>
   </p:cSld>
@@ -7108,7 +7108,7 @@
           <p:cNvPr id="2" name="TextBox 1">
             <a:extLst>
               <a:ext uri="{FF2B5EF4-FFF2-40B4-BE49-F238E27FC236}">
-                <a16:creationId xmlns:a16="http://schemas.microsoft.com/office/drawing/2014/main" id="{4606D766-E760-0C7E-5FB9-C22CAD47372B}"/>
+                <a16:creationId xmlns:a16="http://schemas.microsoft.com/office/drawing/2014/main" id="{C982C654-74D1-0378-1D6C-018E6846B9A5}"/>
               </a:ext>
             </a:extLst>
           </p:cNvPr>
@@ -7148,7 +7148,7 @@
           <p:cNvPr id="3" name="Rectangle: Rounded Corners 2">
             <a:extLst>
               <a:ext uri="{FF2B5EF4-FFF2-40B4-BE49-F238E27FC236}">
-                <a16:creationId xmlns:a16="http://schemas.microsoft.com/office/drawing/2014/main" id="{D4F05510-4091-CF8A-0EA9-D15D4A1A8F3F}"/>
+                <a16:creationId xmlns:a16="http://schemas.microsoft.com/office/drawing/2014/main" id="{9328BD84-E943-A693-AB2B-3F9569855E62}"/>
               </a:ext>
             </a:extLst>
           </p:cNvPr>
@@ -7226,7 +7226,7 @@
           <p:cNvPr id="4" name="Straight Connector 3">
             <a:extLst>
               <a:ext uri="{FF2B5EF4-FFF2-40B4-BE49-F238E27FC236}">
-                <a16:creationId xmlns:a16="http://schemas.microsoft.com/office/drawing/2014/main" id="{B90C35E7-3F5C-DF7D-B8D5-93883B13BBCC}"/>
+                <a16:creationId xmlns:a16="http://schemas.microsoft.com/office/drawing/2014/main" id="{BE1DEBA0-193E-19DC-8E65-A716D46A4C35}"/>
               </a:ext>
             </a:extLst>
           </p:cNvPr>
@@ -7268,7 +7268,7 @@
           <p:cNvPr id="5" name="Rectangle: Rounded Corners 4">
             <a:extLst>
               <a:ext uri="{FF2B5EF4-FFF2-40B4-BE49-F238E27FC236}">
-                <a16:creationId xmlns:a16="http://schemas.microsoft.com/office/drawing/2014/main" id="{D2F8419E-DDA0-B662-D9A7-71A8A69E741A}"/>
+                <a16:creationId xmlns:a16="http://schemas.microsoft.com/office/drawing/2014/main" id="{6C6162B4-2CA5-6797-F21D-3FF78A330B4F}"/>
               </a:ext>
             </a:extLst>
           </p:cNvPr>
@@ -7346,7 +7346,7 @@
           <p:cNvPr id="6" name="Straight Connector 5">
             <a:extLst>
               <a:ext uri="{FF2B5EF4-FFF2-40B4-BE49-F238E27FC236}">
-                <a16:creationId xmlns:a16="http://schemas.microsoft.com/office/drawing/2014/main" id="{45DC79FF-1D7F-CF69-7146-C2E39214A0A2}"/>
+                <a16:creationId xmlns:a16="http://schemas.microsoft.com/office/drawing/2014/main" id="{DE6677A4-6231-8174-BF15-D63D51A03F16}"/>
               </a:ext>
             </a:extLst>
           </p:cNvPr>
@@ -7388,7 +7388,7 @@
           <p:cNvPr id="7" name="Rectangle: Rounded Corners 6">
             <a:extLst>
               <a:ext uri="{FF2B5EF4-FFF2-40B4-BE49-F238E27FC236}">
-                <a16:creationId xmlns:a16="http://schemas.microsoft.com/office/drawing/2014/main" id="{C22BBD1F-4BF8-A776-9076-54E2DCE34BD2}"/>
+                <a16:creationId xmlns:a16="http://schemas.microsoft.com/office/drawing/2014/main" id="{113552A0-E774-5A4B-73A2-5608FBA12C0E}"/>
               </a:ext>
             </a:extLst>
           </p:cNvPr>
@@ -7466,7 +7466,7 @@
           <p:cNvPr id="8" name="Straight Connector 7">
             <a:extLst>
               <a:ext uri="{FF2B5EF4-FFF2-40B4-BE49-F238E27FC236}">
-                <a16:creationId xmlns:a16="http://schemas.microsoft.com/office/drawing/2014/main" id="{70296EEC-93F6-D011-C946-7E6B2EC548ED}"/>
+                <a16:creationId xmlns:a16="http://schemas.microsoft.com/office/drawing/2014/main" id="{335B75CB-B770-9781-B08F-8DC514B2240A}"/>
               </a:ext>
             </a:extLst>
           </p:cNvPr>
@@ -7508,7 +7508,7 @@
           <p:cNvPr id="9" name="Rectangle: Rounded Corners 8">
             <a:extLst>
               <a:ext uri="{FF2B5EF4-FFF2-40B4-BE49-F238E27FC236}">
-                <a16:creationId xmlns:a16="http://schemas.microsoft.com/office/drawing/2014/main" id="{230944FC-3E45-12D7-1268-E287FC5A3668}"/>
+                <a16:creationId xmlns:a16="http://schemas.microsoft.com/office/drawing/2014/main" id="{6F1E7055-7673-B4FB-975A-B5E3F8D65BE2}"/>
               </a:ext>
             </a:extLst>
           </p:cNvPr>
@@ -7586,7 +7586,7 @@
           <p:cNvPr id="10" name="Straight Connector 9">
             <a:extLst>
               <a:ext uri="{FF2B5EF4-FFF2-40B4-BE49-F238E27FC236}">
-                <a16:creationId xmlns:a16="http://schemas.microsoft.com/office/drawing/2014/main" id="{F0555F1B-7DAA-E73C-3099-9DE674DB5819}"/>
+                <a16:creationId xmlns:a16="http://schemas.microsoft.com/office/drawing/2014/main" id="{596192EB-5156-30B0-04EE-BC7F0A555890}"/>
               </a:ext>
             </a:extLst>
           </p:cNvPr>
@@ -7628,7 +7628,7 @@
           <p:cNvPr id="11" name="Rectangle: Rounded Corners 10">
             <a:extLst>
               <a:ext uri="{FF2B5EF4-FFF2-40B4-BE49-F238E27FC236}">
-                <a16:creationId xmlns:a16="http://schemas.microsoft.com/office/drawing/2014/main" id="{2DDB04F5-6D40-A2C4-CC08-11FD08E51D6B}"/>
+                <a16:creationId xmlns:a16="http://schemas.microsoft.com/office/drawing/2014/main" id="{5ABF4BEC-7DAA-3701-75F4-B962748A3847}"/>
               </a:ext>
             </a:extLst>
           </p:cNvPr>
@@ -7706,7 +7706,7 @@
           <p:cNvPr id="12" name="Straight Connector 11">
             <a:extLst>
               <a:ext uri="{FF2B5EF4-FFF2-40B4-BE49-F238E27FC236}">
-                <a16:creationId xmlns:a16="http://schemas.microsoft.com/office/drawing/2014/main" id="{34A2A81C-37AA-5052-A682-FF0E4142B148}"/>
+                <a16:creationId xmlns:a16="http://schemas.microsoft.com/office/drawing/2014/main" id="{64E45E4C-7478-1FD1-D5D3-C07864510FC5}"/>
               </a:ext>
             </a:extLst>
           </p:cNvPr>
@@ -7748,7 +7748,7 @@
           <p:cNvPr id="13" name="Rectangle: Rounded Corners 12">
             <a:extLst>
               <a:ext uri="{FF2B5EF4-FFF2-40B4-BE49-F238E27FC236}">
-                <a16:creationId xmlns:a16="http://schemas.microsoft.com/office/drawing/2014/main" id="{AEAB31DC-0D48-21A9-B1E2-0A2F04D809A8}"/>
+                <a16:creationId xmlns:a16="http://schemas.microsoft.com/office/drawing/2014/main" id="{45188F70-7F52-A74B-4970-D2917AAE2977}"/>
               </a:ext>
             </a:extLst>
           </p:cNvPr>
@@ -7826,7 +7826,7 @@
           <p:cNvPr id="14" name="Straight Connector 13">
             <a:extLst>
               <a:ext uri="{FF2B5EF4-FFF2-40B4-BE49-F238E27FC236}">
-                <a16:creationId xmlns:a16="http://schemas.microsoft.com/office/drawing/2014/main" id="{9620E004-2B50-0BD3-34EA-34F8538D6AB5}"/>
+                <a16:creationId xmlns:a16="http://schemas.microsoft.com/office/drawing/2014/main" id="{BAD027FF-7657-AAD5-CD83-B84DC055B4EE}"/>
               </a:ext>
             </a:extLst>
           </p:cNvPr>
@@ -7869,7 +7869,7 @@
           <p:cNvPr id="15" name="TextBox 14">
             <a:extLst>
               <a:ext uri="{FF2B5EF4-FFF2-40B4-BE49-F238E27FC236}">
-                <a16:creationId xmlns:a16="http://schemas.microsoft.com/office/drawing/2014/main" id="{3A5A2929-9965-CC37-F6DC-0C2A7937AC37}"/>
+                <a16:creationId xmlns:a16="http://schemas.microsoft.com/office/drawing/2014/main" id="{D130B619-CC9C-4D35-B463-1C35B54CD623}"/>
               </a:ext>
             </a:extLst>
           </p:cNvPr>
@@ -7910,7 +7910,7 @@
           <p:cNvPr id="16" name="TextBox 15">
             <a:extLst>
               <a:ext uri="{FF2B5EF4-FFF2-40B4-BE49-F238E27FC236}">
-                <a16:creationId xmlns:a16="http://schemas.microsoft.com/office/drawing/2014/main" id="{CD858350-AF51-EB08-B6C8-3645B9CC5654}"/>
+                <a16:creationId xmlns:a16="http://schemas.microsoft.com/office/drawing/2014/main" id="{04CC9E4A-B769-19C3-38DA-58EB5811DFF6}"/>
               </a:ext>
             </a:extLst>
           </p:cNvPr>
@@ -7956,7 +7956,7 @@
           <p:cNvPr id="17" name="Rectangle: Rounded Corners 16">
             <a:extLst>
               <a:ext uri="{FF2B5EF4-FFF2-40B4-BE49-F238E27FC236}">
-                <a16:creationId xmlns:a16="http://schemas.microsoft.com/office/drawing/2014/main" id="{FCE5CBDB-AA6C-27D6-9B2D-EA228CBA72D9}"/>
+                <a16:creationId xmlns:a16="http://schemas.microsoft.com/office/drawing/2014/main" id="{03863648-4B2B-379B-31B9-5B55051E2A19}"/>
               </a:ext>
             </a:extLst>
           </p:cNvPr>
@@ -8026,7 +8026,7 @@
           <p:cNvPr id="18" name="TextBox 17">
             <a:extLst>
               <a:ext uri="{FF2B5EF4-FFF2-40B4-BE49-F238E27FC236}">
-                <a16:creationId xmlns:a16="http://schemas.microsoft.com/office/drawing/2014/main" id="{BC435BEB-2C40-7BBC-5451-868470DBF57E}"/>
+                <a16:creationId xmlns:a16="http://schemas.microsoft.com/office/drawing/2014/main" id="{17371995-4599-C8A5-F631-D6732CC9D0A8}"/>
               </a:ext>
             </a:extLst>
           </p:cNvPr>
@@ -8072,7 +8072,7 @@
           <p:cNvPr id="19" name="TextBox 18">
             <a:extLst>
               <a:ext uri="{FF2B5EF4-FFF2-40B4-BE49-F238E27FC236}">
-                <a16:creationId xmlns:a16="http://schemas.microsoft.com/office/drawing/2014/main" id="{87CA60C8-9CF5-09DF-0C91-26C168F7D8BF}"/>
+                <a16:creationId xmlns:a16="http://schemas.microsoft.com/office/drawing/2014/main" id="{7330333B-F5E1-E7D8-6979-4C4584C2E741}"/>
               </a:ext>
             </a:extLst>
           </p:cNvPr>
@@ -8118,7 +8118,7 @@
           <p:cNvPr id="20" name="Rectangle: Rounded Corners 19">
             <a:extLst>
               <a:ext uri="{FF2B5EF4-FFF2-40B4-BE49-F238E27FC236}">
-                <a16:creationId xmlns:a16="http://schemas.microsoft.com/office/drawing/2014/main" id="{A5386D45-46D5-3E7A-16E4-2306165D7CD3}"/>
+                <a16:creationId xmlns:a16="http://schemas.microsoft.com/office/drawing/2014/main" id="{9BEC1D41-03A6-7CD1-E81D-989E5D7C5F86}"/>
               </a:ext>
             </a:extLst>
           </p:cNvPr>
@@ -8188,7 +8188,7 @@
           <p:cNvPr id="21" name="TextBox 20">
             <a:extLst>
               <a:ext uri="{FF2B5EF4-FFF2-40B4-BE49-F238E27FC236}">
-                <a16:creationId xmlns:a16="http://schemas.microsoft.com/office/drawing/2014/main" id="{FB937382-2E25-DADE-D308-867F4E526774}"/>
+                <a16:creationId xmlns:a16="http://schemas.microsoft.com/office/drawing/2014/main" id="{C4FBD76D-10CA-1BED-6B9A-35C751B160DB}"/>
               </a:ext>
             </a:extLst>
           </p:cNvPr>
@@ -8228,7 +8228,7 @@
           <p:cNvPr id="22" name="TextBox 21">
             <a:extLst>
               <a:ext uri="{FF2B5EF4-FFF2-40B4-BE49-F238E27FC236}">
-                <a16:creationId xmlns:a16="http://schemas.microsoft.com/office/drawing/2014/main" id="{E088853E-BB66-4216-EF5E-4E5DC37B85E9}"/>
+                <a16:creationId xmlns:a16="http://schemas.microsoft.com/office/drawing/2014/main" id="{5EA49A57-ED5B-9136-D51E-B5D0970EF38F}"/>
               </a:ext>
             </a:extLst>
           </p:cNvPr>
@@ -8274,7 +8274,7 @@
           <p:cNvPr id="23" name="Rectangle: Rounded Corners 22">
             <a:extLst>
               <a:ext uri="{FF2B5EF4-FFF2-40B4-BE49-F238E27FC236}">
-                <a16:creationId xmlns:a16="http://schemas.microsoft.com/office/drawing/2014/main" id="{54241BA4-E473-11F7-1675-4F944DD0EF1A}"/>
+                <a16:creationId xmlns:a16="http://schemas.microsoft.com/office/drawing/2014/main" id="{CE739AC5-D590-D5DA-E73C-F83B4C1F543D}"/>
               </a:ext>
             </a:extLst>
           </p:cNvPr>
@@ -8344,7 +8344,7 @@
           <p:cNvPr id="24" name="TextBox 23">
             <a:extLst>
               <a:ext uri="{FF2B5EF4-FFF2-40B4-BE49-F238E27FC236}">
-                <a16:creationId xmlns:a16="http://schemas.microsoft.com/office/drawing/2014/main" id="{85A1679E-CBA2-2A32-8126-205544B694F9}"/>
+                <a16:creationId xmlns:a16="http://schemas.microsoft.com/office/drawing/2014/main" id="{66AA7092-A2ED-FEF7-E1C0-C75363DF5DCA}"/>
               </a:ext>
             </a:extLst>
           </p:cNvPr>
@@ -8384,7 +8384,7 @@
           <p:cNvPr id="25" name="TextBox 24">
             <a:extLst>
               <a:ext uri="{FF2B5EF4-FFF2-40B4-BE49-F238E27FC236}">
-                <a16:creationId xmlns:a16="http://schemas.microsoft.com/office/drawing/2014/main" id="{7FC23588-26DA-328A-47EC-EAF791DBA89A}"/>
+                <a16:creationId xmlns:a16="http://schemas.microsoft.com/office/drawing/2014/main" id="{B367221C-8FF3-960E-2DB1-510C27C5283B}"/>
               </a:ext>
             </a:extLst>
           </p:cNvPr>
@@ -8430,7 +8430,7 @@
           <p:cNvPr id="26" name="TextBox 25">
             <a:extLst>
               <a:ext uri="{FF2B5EF4-FFF2-40B4-BE49-F238E27FC236}">
-                <a16:creationId xmlns:a16="http://schemas.microsoft.com/office/drawing/2014/main" id="{26D37308-C402-EC7F-A6EA-3FB01CF20BE6}"/>
+                <a16:creationId xmlns:a16="http://schemas.microsoft.com/office/drawing/2014/main" id="{4EFE0A68-BCB1-BA2D-F566-CD92C6BB14E9}"/>
               </a:ext>
             </a:extLst>
           </p:cNvPr>
@@ -8476,7 +8476,7 @@
           <p:cNvPr id="27" name="TextBox 26">
             <a:extLst>
               <a:ext uri="{FF2B5EF4-FFF2-40B4-BE49-F238E27FC236}">
-                <a16:creationId xmlns:a16="http://schemas.microsoft.com/office/drawing/2014/main" id="{1897D384-D13C-8231-3F1B-8291B71DA40D}"/>
+                <a16:creationId xmlns:a16="http://schemas.microsoft.com/office/drawing/2014/main" id="{875174BE-0280-4038-FAE9-5EA89095A948}"/>
               </a:ext>
             </a:extLst>
           </p:cNvPr>
@@ -8515,7 +8515,7 @@
     </p:spTree>
     <p:extLst>
       <p:ext uri="{BB962C8B-B14F-4D97-AF65-F5344CB8AC3E}">
-        <p14:creationId xmlns:p14="http://schemas.microsoft.com/office/powerpoint/2010/main" val="2246029635"/>
+        <p14:creationId xmlns:p14="http://schemas.microsoft.com/office/powerpoint/2010/main" val="3974668001"/>
       </p:ext>
     </p:extLst>
   </p:cSld>
@@ -8555,7 +8555,7 @@
           <p:cNvPr id="2" name="TextBox 1">
             <a:extLst>
               <a:ext uri="{FF2B5EF4-FFF2-40B4-BE49-F238E27FC236}">
-                <a16:creationId xmlns:a16="http://schemas.microsoft.com/office/drawing/2014/main" id="{74559F79-4CBD-3780-0ED3-9DFCBFFFFF07}"/>
+                <a16:creationId xmlns:a16="http://schemas.microsoft.com/office/drawing/2014/main" id="{777CBD1E-43D0-DD93-92A0-80A753F3CEAA}"/>
               </a:ext>
             </a:extLst>
           </p:cNvPr>
@@ -8601,7 +8601,7 @@
           <p:cNvPr id="3" name="Oval 2">
             <a:extLst>
               <a:ext uri="{FF2B5EF4-FFF2-40B4-BE49-F238E27FC236}">
-                <a16:creationId xmlns:a16="http://schemas.microsoft.com/office/drawing/2014/main" id="{525CB769-3433-4597-8DDB-36286925B2B4}"/>
+                <a16:creationId xmlns:a16="http://schemas.microsoft.com/office/drawing/2014/main" id="{23B7BA6A-F156-3443-DF4D-A88FCA6B3999}"/>
               </a:ext>
             </a:extLst>
           </p:cNvPr>
@@ -8677,7 +8677,7 @@
           <p:cNvPr id="4" name="TextBox 3">
             <a:extLst>
               <a:ext uri="{FF2B5EF4-FFF2-40B4-BE49-F238E27FC236}">
-                <a16:creationId xmlns:a16="http://schemas.microsoft.com/office/drawing/2014/main" id="{2DFAF726-77C0-A4E2-EFA7-AACC1A9EBF83}"/>
+                <a16:creationId xmlns:a16="http://schemas.microsoft.com/office/drawing/2014/main" id="{B93AFB1E-C19C-6380-18B8-CC8BB5622A52}"/>
               </a:ext>
             </a:extLst>
           </p:cNvPr>
@@ -8723,7 +8723,7 @@
           <p:cNvPr id="5" name="TextBox 4">
             <a:extLst>
               <a:ext uri="{FF2B5EF4-FFF2-40B4-BE49-F238E27FC236}">
-                <a16:creationId xmlns:a16="http://schemas.microsoft.com/office/drawing/2014/main" id="{0A983FE5-6D82-63D8-2BE4-C63979924879}"/>
+                <a16:creationId xmlns:a16="http://schemas.microsoft.com/office/drawing/2014/main" id="{D78E1384-91CA-A845-6D36-6969E9DAC8BC}"/>
               </a:ext>
             </a:extLst>
           </p:cNvPr>
@@ -8769,7 +8769,7 @@
           <p:cNvPr id="6" name="Oval 5">
             <a:extLst>
               <a:ext uri="{FF2B5EF4-FFF2-40B4-BE49-F238E27FC236}">
-                <a16:creationId xmlns:a16="http://schemas.microsoft.com/office/drawing/2014/main" id="{922B1162-CC34-24D7-56CC-1D6C08091460}"/>
+                <a16:creationId xmlns:a16="http://schemas.microsoft.com/office/drawing/2014/main" id="{6FE36DF6-5155-276B-E7F3-2151DADFF98A}"/>
               </a:ext>
             </a:extLst>
           </p:cNvPr>
@@ -8845,7 +8845,7 @@
           <p:cNvPr id="7" name="TextBox 6">
             <a:extLst>
               <a:ext uri="{FF2B5EF4-FFF2-40B4-BE49-F238E27FC236}">
-                <a16:creationId xmlns:a16="http://schemas.microsoft.com/office/drawing/2014/main" id="{81ADCCAD-926C-BF6B-A49C-E4BE74E43DC4}"/>
+                <a16:creationId xmlns:a16="http://schemas.microsoft.com/office/drawing/2014/main" id="{8520BDF8-2947-AB92-EAF3-968ABA183C63}"/>
               </a:ext>
             </a:extLst>
           </p:cNvPr>
@@ -8891,7 +8891,7 @@
           <p:cNvPr id="8" name="TextBox 7">
             <a:extLst>
               <a:ext uri="{FF2B5EF4-FFF2-40B4-BE49-F238E27FC236}">
-                <a16:creationId xmlns:a16="http://schemas.microsoft.com/office/drawing/2014/main" id="{BE116490-314B-611F-3CFE-8C444E830C54}"/>
+                <a16:creationId xmlns:a16="http://schemas.microsoft.com/office/drawing/2014/main" id="{AF810C1A-4C86-B408-EA42-1FA0D66E74CF}"/>
               </a:ext>
             </a:extLst>
           </p:cNvPr>
@@ -8937,7 +8937,7 @@
           <p:cNvPr id="9" name="Oval 8">
             <a:extLst>
               <a:ext uri="{FF2B5EF4-FFF2-40B4-BE49-F238E27FC236}">
-                <a16:creationId xmlns:a16="http://schemas.microsoft.com/office/drawing/2014/main" id="{5EDAFB2F-4C50-F5A6-BE30-717C2D105C2B}"/>
+                <a16:creationId xmlns:a16="http://schemas.microsoft.com/office/drawing/2014/main" id="{89D0B333-6A83-8B8D-46C4-420DE3BD37F4}"/>
               </a:ext>
             </a:extLst>
           </p:cNvPr>
@@ -9013,7 +9013,7 @@
           <p:cNvPr id="10" name="TextBox 9">
             <a:extLst>
               <a:ext uri="{FF2B5EF4-FFF2-40B4-BE49-F238E27FC236}">
-                <a16:creationId xmlns:a16="http://schemas.microsoft.com/office/drawing/2014/main" id="{D30E8E03-5DDA-577D-DC19-56DCC4DE6DD8}"/>
+                <a16:creationId xmlns:a16="http://schemas.microsoft.com/office/drawing/2014/main" id="{3235A21B-2681-440E-CCC5-434639655B87}"/>
               </a:ext>
             </a:extLst>
           </p:cNvPr>
@@ -9059,7 +9059,7 @@
           <p:cNvPr id="11" name="TextBox 10">
             <a:extLst>
               <a:ext uri="{FF2B5EF4-FFF2-40B4-BE49-F238E27FC236}">
-                <a16:creationId xmlns:a16="http://schemas.microsoft.com/office/drawing/2014/main" id="{635AE798-D84C-243F-30C6-C55D1740A5A2}"/>
+                <a16:creationId xmlns:a16="http://schemas.microsoft.com/office/drawing/2014/main" id="{0F427CD5-CBF2-5998-6D0D-637D2B16DF3C}"/>
               </a:ext>
             </a:extLst>
           </p:cNvPr>
@@ -9105,7 +9105,7 @@
           <p:cNvPr id="12" name="TextBox 11">
             <a:extLst>
               <a:ext uri="{FF2B5EF4-FFF2-40B4-BE49-F238E27FC236}">
-                <a16:creationId xmlns:a16="http://schemas.microsoft.com/office/drawing/2014/main" id="{6FC0B2A3-D871-3D7A-6084-7257AB778DB9}"/>
+                <a16:creationId xmlns:a16="http://schemas.microsoft.com/office/drawing/2014/main" id="{56DC64D6-3DB2-EFE3-1E60-DCACD61F9C65}"/>
               </a:ext>
             </a:extLst>
           </p:cNvPr>
@@ -9151,7 +9151,7 @@
           <p:cNvPr id="13" name="Rectangle: Rounded Corners 12">
             <a:extLst>
               <a:ext uri="{FF2B5EF4-FFF2-40B4-BE49-F238E27FC236}">
-                <a16:creationId xmlns:a16="http://schemas.microsoft.com/office/drawing/2014/main" id="{3D7F48C0-E702-8891-75BA-07BD86BE27B8}"/>
+                <a16:creationId xmlns:a16="http://schemas.microsoft.com/office/drawing/2014/main" id="{EF490CDC-05A2-7315-2B04-F013AE8FB6B0}"/>
               </a:ext>
             </a:extLst>
           </p:cNvPr>
@@ -9221,7 +9221,7 @@
           <p:cNvPr id="14" name="TextBox 13">
             <a:extLst>
               <a:ext uri="{FF2B5EF4-FFF2-40B4-BE49-F238E27FC236}">
-                <a16:creationId xmlns:a16="http://schemas.microsoft.com/office/drawing/2014/main" id="{721BDAEC-B582-9510-E2D3-B21877FC2FCF}"/>
+                <a16:creationId xmlns:a16="http://schemas.microsoft.com/office/drawing/2014/main" id="{491D9378-CFC9-8C89-D11D-D8FD29F66361}"/>
               </a:ext>
             </a:extLst>
           </p:cNvPr>
@@ -9262,7 +9262,7 @@
           <p:cNvPr id="15" name="TextBox 14">
             <a:extLst>
               <a:ext uri="{FF2B5EF4-FFF2-40B4-BE49-F238E27FC236}">
-                <a16:creationId xmlns:a16="http://schemas.microsoft.com/office/drawing/2014/main" id="{A907E464-0D08-BB6F-0C8F-07A2282160B5}"/>
+                <a16:creationId xmlns:a16="http://schemas.microsoft.com/office/drawing/2014/main" id="{C61FF341-E911-B990-719C-F06179BE87F4}"/>
               </a:ext>
             </a:extLst>
           </p:cNvPr>
@@ -9303,7 +9303,7 @@
           <p:cNvPr id="16" name="TextBox 15">
             <a:extLst>
               <a:ext uri="{FF2B5EF4-FFF2-40B4-BE49-F238E27FC236}">
-                <a16:creationId xmlns:a16="http://schemas.microsoft.com/office/drawing/2014/main" id="{84D1A06D-A98E-CD84-8EBF-DB41157825DB}"/>
+                <a16:creationId xmlns:a16="http://schemas.microsoft.com/office/drawing/2014/main" id="{727AD4C4-AF08-96E6-3841-F7EBB79EA86E}"/>
               </a:ext>
             </a:extLst>
           </p:cNvPr>
@@ -9343,7 +9343,7 @@
           <p:cNvPr id="17" name="TextBox 16">
             <a:extLst>
               <a:ext uri="{FF2B5EF4-FFF2-40B4-BE49-F238E27FC236}">
-                <a16:creationId xmlns:a16="http://schemas.microsoft.com/office/drawing/2014/main" id="{B2DABDF1-3423-BADB-4DE9-3AFF9B35255C}"/>
+                <a16:creationId xmlns:a16="http://schemas.microsoft.com/office/drawing/2014/main" id="{E9617E9C-8848-FE65-EB54-6C5B4CF22811}"/>
               </a:ext>
             </a:extLst>
           </p:cNvPr>
@@ -9389,7 +9389,7 @@
           <p:cNvPr id="18" name="TextBox 17">
             <a:extLst>
               <a:ext uri="{FF2B5EF4-FFF2-40B4-BE49-F238E27FC236}">
-                <a16:creationId xmlns:a16="http://schemas.microsoft.com/office/drawing/2014/main" id="{DC5A83C4-E281-67B9-6A76-2EB28AE03CC4}"/>
+                <a16:creationId xmlns:a16="http://schemas.microsoft.com/office/drawing/2014/main" id="{7F3B392F-4E43-8839-C094-6964DF5F1742}"/>
               </a:ext>
             </a:extLst>
           </p:cNvPr>
@@ -9435,7 +9435,7 @@
           <p:cNvPr id="19" name="Rectangle: Rounded Corners 18">
             <a:extLst>
               <a:ext uri="{FF2B5EF4-FFF2-40B4-BE49-F238E27FC236}">
-                <a16:creationId xmlns:a16="http://schemas.microsoft.com/office/drawing/2014/main" id="{D34F5C87-FBD9-F3D6-0922-3D96E946E9C3}"/>
+                <a16:creationId xmlns:a16="http://schemas.microsoft.com/office/drawing/2014/main" id="{467F202E-53FF-FA77-E8D1-7B5C82CBF79F}"/>
               </a:ext>
             </a:extLst>
           </p:cNvPr>
@@ -9505,7 +9505,7 @@
           <p:cNvPr id="20" name="TextBox 19">
             <a:extLst>
               <a:ext uri="{FF2B5EF4-FFF2-40B4-BE49-F238E27FC236}">
-                <a16:creationId xmlns:a16="http://schemas.microsoft.com/office/drawing/2014/main" id="{239F734F-FEBB-BEB6-BFAA-49AD7CEF51F3}"/>
+                <a16:creationId xmlns:a16="http://schemas.microsoft.com/office/drawing/2014/main" id="{C2BDE10E-BDCD-8B90-01B1-5C61B7BF68C1}"/>
               </a:ext>
             </a:extLst>
           </p:cNvPr>
@@ -9551,7 +9551,7 @@
           <p:cNvPr id="21" name="TextBox 20">
             <a:extLst>
               <a:ext uri="{FF2B5EF4-FFF2-40B4-BE49-F238E27FC236}">
-                <a16:creationId xmlns:a16="http://schemas.microsoft.com/office/drawing/2014/main" id="{EFFF3ED4-F147-14CC-FD95-11E2CABBA6FC}"/>
+                <a16:creationId xmlns:a16="http://schemas.microsoft.com/office/drawing/2014/main" id="{71789DDD-B34E-B39E-41C3-4CCBF1D6B00C}"/>
               </a:ext>
             </a:extLst>
           </p:cNvPr>
@@ -9590,7 +9590,7 @@
     </p:spTree>
     <p:extLst>
       <p:ext uri="{BB962C8B-B14F-4D97-AF65-F5344CB8AC3E}">
-        <p14:creationId xmlns:p14="http://schemas.microsoft.com/office/powerpoint/2010/main" val="3516188875"/>
+        <p14:creationId xmlns:p14="http://schemas.microsoft.com/office/powerpoint/2010/main" val="3290971634"/>
       </p:ext>
     </p:extLst>
   </p:cSld>
@@ -9630,7 +9630,7 @@
           <p:cNvPr id="2" name="TextBox 1">
             <a:extLst>
               <a:ext uri="{FF2B5EF4-FFF2-40B4-BE49-F238E27FC236}">
-                <a16:creationId xmlns:a16="http://schemas.microsoft.com/office/drawing/2014/main" id="{726C2082-71E3-7AE3-3CDB-F3F48037B850}"/>
+                <a16:creationId xmlns:a16="http://schemas.microsoft.com/office/drawing/2014/main" id="{AD37AFA0-5292-942E-25D2-BB6DC02019D7}"/>
               </a:ext>
             </a:extLst>
           </p:cNvPr>
@@ -9676,7 +9676,7 @@
           <p:cNvPr id="3" name="Rectangle: Rounded Corners 2">
             <a:extLst>
               <a:ext uri="{FF2B5EF4-FFF2-40B4-BE49-F238E27FC236}">
-                <a16:creationId xmlns:a16="http://schemas.microsoft.com/office/drawing/2014/main" id="{FBE24F4C-177C-FA2A-E64D-BC58A93EBBEE}"/>
+                <a16:creationId xmlns:a16="http://schemas.microsoft.com/office/drawing/2014/main" id="{2F43D3B3-F3F8-317F-F715-E755D22D8833}"/>
               </a:ext>
             </a:extLst>
           </p:cNvPr>
@@ -9746,7 +9746,7 @@
           <p:cNvPr id="4" name="TextBox 3">
             <a:extLst>
               <a:ext uri="{FF2B5EF4-FFF2-40B4-BE49-F238E27FC236}">
-                <a16:creationId xmlns:a16="http://schemas.microsoft.com/office/drawing/2014/main" id="{51D7E309-0517-65C8-5859-848528FD489D}"/>
+                <a16:creationId xmlns:a16="http://schemas.microsoft.com/office/drawing/2014/main" id="{98627FE3-B38F-A83B-01E6-D0F1BCFBA8CA}"/>
               </a:ext>
             </a:extLst>
           </p:cNvPr>
@@ -9786,7 +9786,7 @@
           <p:cNvPr id="5" name="TextBox 4">
             <a:extLst>
               <a:ext uri="{FF2B5EF4-FFF2-40B4-BE49-F238E27FC236}">
-                <a16:creationId xmlns:a16="http://schemas.microsoft.com/office/drawing/2014/main" id="{A16A2C7D-E935-12C5-1A08-7A157349B667}"/>
+                <a16:creationId xmlns:a16="http://schemas.microsoft.com/office/drawing/2014/main" id="{FEF88303-149C-C9EA-A965-B882985AEC78}"/>
               </a:ext>
             </a:extLst>
           </p:cNvPr>
@@ -9832,7 +9832,7 @@
           <p:cNvPr id="6" name="Rectangle: Rounded Corners 5">
             <a:extLst>
               <a:ext uri="{FF2B5EF4-FFF2-40B4-BE49-F238E27FC236}">
-                <a16:creationId xmlns:a16="http://schemas.microsoft.com/office/drawing/2014/main" id="{D1831598-96B0-9A72-68E4-E746C1A4CB8F}"/>
+                <a16:creationId xmlns:a16="http://schemas.microsoft.com/office/drawing/2014/main" id="{6458E3EF-776B-C16A-CFA9-5D9CF5297689}"/>
               </a:ext>
             </a:extLst>
           </p:cNvPr>
@@ -9902,7 +9902,7 @@
           <p:cNvPr id="7" name="TextBox 6">
             <a:extLst>
               <a:ext uri="{FF2B5EF4-FFF2-40B4-BE49-F238E27FC236}">
-                <a16:creationId xmlns:a16="http://schemas.microsoft.com/office/drawing/2014/main" id="{359E8E75-3786-CDD6-147D-EE28F8F662CE}"/>
+                <a16:creationId xmlns:a16="http://schemas.microsoft.com/office/drawing/2014/main" id="{0FC37FA5-F970-B76A-2F68-75F439E924B3}"/>
               </a:ext>
             </a:extLst>
           </p:cNvPr>
@@ -9942,7 +9942,7 @@
           <p:cNvPr id="8" name="TextBox 7">
             <a:extLst>
               <a:ext uri="{FF2B5EF4-FFF2-40B4-BE49-F238E27FC236}">
-                <a16:creationId xmlns:a16="http://schemas.microsoft.com/office/drawing/2014/main" id="{34963BF6-F608-9A7F-F84E-A3C2E12D832B}"/>
+                <a16:creationId xmlns:a16="http://schemas.microsoft.com/office/drawing/2014/main" id="{7CC48E50-9D87-5FCD-3953-B4CBD4F406F5}"/>
               </a:ext>
             </a:extLst>
           </p:cNvPr>
@@ -9988,7 +9988,7 @@
           <p:cNvPr id="9" name="Rectangle: Rounded Corners 8">
             <a:extLst>
               <a:ext uri="{FF2B5EF4-FFF2-40B4-BE49-F238E27FC236}">
-                <a16:creationId xmlns:a16="http://schemas.microsoft.com/office/drawing/2014/main" id="{193FCBAF-231B-231E-EBEE-23E9C75BE2B4}"/>
+                <a16:creationId xmlns:a16="http://schemas.microsoft.com/office/drawing/2014/main" id="{13AD4B16-A231-1AC1-4820-3C8320763317}"/>
               </a:ext>
             </a:extLst>
           </p:cNvPr>
@@ -10058,7 +10058,7 @@
           <p:cNvPr id="10" name="TextBox 9">
             <a:extLst>
               <a:ext uri="{FF2B5EF4-FFF2-40B4-BE49-F238E27FC236}">
-                <a16:creationId xmlns:a16="http://schemas.microsoft.com/office/drawing/2014/main" id="{9C079935-9998-EDC4-7507-438729F178A1}"/>
+                <a16:creationId xmlns:a16="http://schemas.microsoft.com/office/drawing/2014/main" id="{A73721B4-51B9-9698-35C4-ACD96BF91376}"/>
               </a:ext>
             </a:extLst>
           </p:cNvPr>
@@ -10098,7 +10098,7 @@
           <p:cNvPr id="11" name="TextBox 10">
             <a:extLst>
               <a:ext uri="{FF2B5EF4-FFF2-40B4-BE49-F238E27FC236}">
-                <a16:creationId xmlns:a16="http://schemas.microsoft.com/office/drawing/2014/main" id="{B7001757-3654-D77C-B163-CA0C1927A673}"/>
+                <a16:creationId xmlns:a16="http://schemas.microsoft.com/office/drawing/2014/main" id="{7966FE76-6BCD-6F99-69FD-1FC2244D34FC}"/>
               </a:ext>
             </a:extLst>
           </p:cNvPr>
@@ -10144,7 +10144,7 @@
           <p:cNvPr id="12" name="Rectangle: Rounded Corners 11">
             <a:extLst>
               <a:ext uri="{FF2B5EF4-FFF2-40B4-BE49-F238E27FC236}">
-                <a16:creationId xmlns:a16="http://schemas.microsoft.com/office/drawing/2014/main" id="{812770F9-F2AE-B11D-ACC4-15735C4EA8FE}"/>
+                <a16:creationId xmlns:a16="http://schemas.microsoft.com/office/drawing/2014/main" id="{8902BF1D-7A52-F545-5650-2052CFE9BFFF}"/>
               </a:ext>
             </a:extLst>
           </p:cNvPr>
@@ -10214,7 +10214,7 @@
           <p:cNvPr id="13" name="TextBox 12">
             <a:extLst>
               <a:ext uri="{FF2B5EF4-FFF2-40B4-BE49-F238E27FC236}">
-                <a16:creationId xmlns:a16="http://schemas.microsoft.com/office/drawing/2014/main" id="{C5263DB3-2EDE-CC8F-4B70-06CD38755D11}"/>
+                <a16:creationId xmlns:a16="http://schemas.microsoft.com/office/drawing/2014/main" id="{DD3B6174-A506-30E4-BC7A-A57406B57523}"/>
               </a:ext>
             </a:extLst>
           </p:cNvPr>
@@ -10254,7 +10254,7 @@
           <p:cNvPr id="14" name="TextBox 13">
             <a:extLst>
               <a:ext uri="{FF2B5EF4-FFF2-40B4-BE49-F238E27FC236}">
-                <a16:creationId xmlns:a16="http://schemas.microsoft.com/office/drawing/2014/main" id="{2D42B3CE-A4C9-C8C5-1698-DF7347CA450F}"/>
+                <a16:creationId xmlns:a16="http://schemas.microsoft.com/office/drawing/2014/main" id="{35E9B54F-1426-B68C-66B2-BF548977D83A}"/>
               </a:ext>
             </a:extLst>
           </p:cNvPr>
@@ -10300,7 +10300,7 @@
           <p:cNvPr id="15" name="Rectangle: Rounded Corners 14">
             <a:extLst>
               <a:ext uri="{FF2B5EF4-FFF2-40B4-BE49-F238E27FC236}">
-                <a16:creationId xmlns:a16="http://schemas.microsoft.com/office/drawing/2014/main" id="{B90598C5-2F25-6A5F-A54A-A5F521641721}"/>
+                <a16:creationId xmlns:a16="http://schemas.microsoft.com/office/drawing/2014/main" id="{9C61AE3F-210A-92DB-3765-CB3204CEC9D3}"/>
               </a:ext>
             </a:extLst>
           </p:cNvPr>
@@ -10370,7 +10370,7 @@
           <p:cNvPr id="16" name="TextBox 15">
             <a:extLst>
               <a:ext uri="{FF2B5EF4-FFF2-40B4-BE49-F238E27FC236}">
-                <a16:creationId xmlns:a16="http://schemas.microsoft.com/office/drawing/2014/main" id="{6CCF106B-A400-E56C-8441-8A175795899E}"/>
+                <a16:creationId xmlns:a16="http://schemas.microsoft.com/office/drawing/2014/main" id="{8DDB26D8-86D7-D4F5-4A5F-E0C76F656ED7}"/>
               </a:ext>
             </a:extLst>
           </p:cNvPr>
@@ -10410,7 +10410,7 @@
           <p:cNvPr id="17" name="TextBox 16">
             <a:extLst>
               <a:ext uri="{FF2B5EF4-FFF2-40B4-BE49-F238E27FC236}">
-                <a16:creationId xmlns:a16="http://schemas.microsoft.com/office/drawing/2014/main" id="{3E539BF2-F6FB-4622-FCAD-2F9EFD73893A}"/>
+                <a16:creationId xmlns:a16="http://schemas.microsoft.com/office/drawing/2014/main" id="{901E217B-9453-EAE3-6825-1DEED416DD7C}"/>
               </a:ext>
             </a:extLst>
           </p:cNvPr>
@@ -10475,7 +10475,7 @@
           <p:cNvPr id="18" name="TextBox 17">
             <a:extLst>
               <a:ext uri="{FF2B5EF4-FFF2-40B4-BE49-F238E27FC236}">
-                <a16:creationId xmlns:a16="http://schemas.microsoft.com/office/drawing/2014/main" id="{BA858605-9874-4244-BD8B-9F12858D572B}"/>
+                <a16:creationId xmlns:a16="http://schemas.microsoft.com/office/drawing/2014/main" id="{66E4E231-D3CA-7EC6-C00C-CA36E2E87FE4}"/>
               </a:ext>
             </a:extLst>
           </p:cNvPr>
@@ -10521,7 +10521,7 @@
           <p:cNvPr id="19" name="TextBox 18">
             <a:extLst>
               <a:ext uri="{FF2B5EF4-FFF2-40B4-BE49-F238E27FC236}">
-                <a16:creationId xmlns:a16="http://schemas.microsoft.com/office/drawing/2014/main" id="{0105A8FF-F4B4-BA1E-022C-3775241FC77D}"/>
+                <a16:creationId xmlns:a16="http://schemas.microsoft.com/office/drawing/2014/main" id="{B8118796-4E44-7E78-F7DD-527CF2503B68}"/>
               </a:ext>
             </a:extLst>
           </p:cNvPr>
@@ -10567,7 +10567,7 @@
           <p:cNvPr id="20" name="TextBox 19">
             <a:extLst>
               <a:ext uri="{FF2B5EF4-FFF2-40B4-BE49-F238E27FC236}">
-                <a16:creationId xmlns:a16="http://schemas.microsoft.com/office/drawing/2014/main" id="{75F453B1-8E48-F702-D59C-FABF9EC29745}"/>
+                <a16:creationId xmlns:a16="http://schemas.microsoft.com/office/drawing/2014/main" id="{011FA469-4ABE-D430-F5FC-DCE47BC69524}"/>
               </a:ext>
             </a:extLst>
           </p:cNvPr>
@@ -10612,7 +10612,7 @@
     </p:spTree>
     <p:extLst>
       <p:ext uri="{BB962C8B-B14F-4D97-AF65-F5344CB8AC3E}">
-        <p14:creationId xmlns:p14="http://schemas.microsoft.com/office/powerpoint/2010/main" val="3147690441"/>
+        <p14:creationId xmlns:p14="http://schemas.microsoft.com/office/powerpoint/2010/main" val="840067973"/>
       </p:ext>
     </p:extLst>
   </p:cSld>
@@ -10652,7 +10652,7 @@
           <p:cNvPr id="2" name="TextBox 1">
             <a:extLst>
               <a:ext uri="{FF2B5EF4-FFF2-40B4-BE49-F238E27FC236}">
-                <a16:creationId xmlns:a16="http://schemas.microsoft.com/office/drawing/2014/main" id="{10422736-ADD1-3069-9A8C-8AD773DC081B}"/>
+                <a16:creationId xmlns:a16="http://schemas.microsoft.com/office/drawing/2014/main" id="{D65B67E1-69DF-4BD9-6895-163D4F5C5938}"/>
               </a:ext>
             </a:extLst>
           </p:cNvPr>
@@ -10692,7 +10692,7 @@
           <p:cNvPr id="3" name="TextBox 2">
             <a:extLst>
               <a:ext uri="{FF2B5EF4-FFF2-40B4-BE49-F238E27FC236}">
-                <a16:creationId xmlns:a16="http://schemas.microsoft.com/office/drawing/2014/main" id="{9EF31152-D109-8308-185B-F66C1325B7D0}"/>
+                <a16:creationId xmlns:a16="http://schemas.microsoft.com/office/drawing/2014/main" id="{4E313901-54B6-072C-3A4A-11F1D55FF5BC}"/>
               </a:ext>
             </a:extLst>
           </p:cNvPr>
@@ -10738,7 +10738,7 @@
           <p:cNvPr id="4" name="Oval 3">
             <a:extLst>
               <a:ext uri="{FF2B5EF4-FFF2-40B4-BE49-F238E27FC236}">
-                <a16:creationId xmlns:a16="http://schemas.microsoft.com/office/drawing/2014/main" id="{571DB914-7619-488D-E356-115EBE66547F}"/>
+                <a16:creationId xmlns:a16="http://schemas.microsoft.com/office/drawing/2014/main" id="{1D5DAF36-04AF-0B45-9906-6E90143D8B54}"/>
               </a:ext>
             </a:extLst>
           </p:cNvPr>
@@ -10814,7 +10814,7 @@
           <p:cNvPr id="5" name="TextBox 4">
             <a:extLst>
               <a:ext uri="{FF2B5EF4-FFF2-40B4-BE49-F238E27FC236}">
-                <a16:creationId xmlns:a16="http://schemas.microsoft.com/office/drawing/2014/main" id="{0D9D4037-A0E6-ED49-B96F-B01D46AB1F47}"/>
+                <a16:creationId xmlns:a16="http://schemas.microsoft.com/office/drawing/2014/main" id="{479A3C13-340A-8018-F354-67C420CD8E09}"/>
               </a:ext>
             </a:extLst>
           </p:cNvPr>
@@ -10860,7 +10860,7 @@
           <p:cNvPr id="6" name="Oval 5">
             <a:extLst>
               <a:ext uri="{FF2B5EF4-FFF2-40B4-BE49-F238E27FC236}">
-                <a16:creationId xmlns:a16="http://schemas.microsoft.com/office/drawing/2014/main" id="{D2F4AFF0-B536-54C9-2432-C6DA5622AAAD}"/>
+                <a16:creationId xmlns:a16="http://schemas.microsoft.com/office/drawing/2014/main" id="{12767919-60E4-3A97-550F-9BE49904BD36}"/>
               </a:ext>
             </a:extLst>
           </p:cNvPr>
@@ -10936,7 +10936,7 @@
           <p:cNvPr id="7" name="TextBox 6">
             <a:extLst>
               <a:ext uri="{FF2B5EF4-FFF2-40B4-BE49-F238E27FC236}">
-                <a16:creationId xmlns:a16="http://schemas.microsoft.com/office/drawing/2014/main" id="{B8AC0C31-3096-202E-EEAD-678C0B3D13A0}"/>
+                <a16:creationId xmlns:a16="http://schemas.microsoft.com/office/drawing/2014/main" id="{11B2B829-DBEB-F97D-5564-0ED04EBF24C7}"/>
               </a:ext>
             </a:extLst>
           </p:cNvPr>
@@ -10982,7 +10982,7 @@
           <p:cNvPr id="8" name="Oval 7">
             <a:extLst>
               <a:ext uri="{FF2B5EF4-FFF2-40B4-BE49-F238E27FC236}">
-                <a16:creationId xmlns:a16="http://schemas.microsoft.com/office/drawing/2014/main" id="{34C56009-99FC-7B12-8BF4-68115EED0448}"/>
+                <a16:creationId xmlns:a16="http://schemas.microsoft.com/office/drawing/2014/main" id="{EC89F363-1504-6CF5-69C2-E8661ED280D1}"/>
               </a:ext>
             </a:extLst>
           </p:cNvPr>
@@ -11058,7 +11058,7 @@
           <p:cNvPr id="9" name="TextBox 8">
             <a:extLst>
               <a:ext uri="{FF2B5EF4-FFF2-40B4-BE49-F238E27FC236}">
-                <a16:creationId xmlns:a16="http://schemas.microsoft.com/office/drawing/2014/main" id="{5B8CE681-EC23-BCBB-8827-87955C478135}"/>
+                <a16:creationId xmlns:a16="http://schemas.microsoft.com/office/drawing/2014/main" id="{EFD9BA74-9C66-3ED6-742A-D3FD6D6E275F}"/>
               </a:ext>
             </a:extLst>
           </p:cNvPr>
@@ -11104,7 +11104,7 @@
           <p:cNvPr id="10" name="Oval 9">
             <a:extLst>
               <a:ext uri="{FF2B5EF4-FFF2-40B4-BE49-F238E27FC236}">
-                <a16:creationId xmlns:a16="http://schemas.microsoft.com/office/drawing/2014/main" id="{8A80F1A8-8C5B-964F-F623-785115B2733B}"/>
+                <a16:creationId xmlns:a16="http://schemas.microsoft.com/office/drawing/2014/main" id="{3615DEAA-C68C-C0C1-1D66-3C035E95E120}"/>
               </a:ext>
             </a:extLst>
           </p:cNvPr>
@@ -11180,7 +11180,7 @@
           <p:cNvPr id="11" name="TextBox 10">
             <a:extLst>
               <a:ext uri="{FF2B5EF4-FFF2-40B4-BE49-F238E27FC236}">
-                <a16:creationId xmlns:a16="http://schemas.microsoft.com/office/drawing/2014/main" id="{6E220B3F-8290-15C1-F109-524C49BE6472}"/>
+                <a16:creationId xmlns:a16="http://schemas.microsoft.com/office/drawing/2014/main" id="{EA516F87-D063-C0EB-ECF5-8856D68B5795}"/>
               </a:ext>
             </a:extLst>
           </p:cNvPr>
@@ -11226,7 +11226,7 @@
           <p:cNvPr id="12" name="Oval 11">
             <a:extLst>
               <a:ext uri="{FF2B5EF4-FFF2-40B4-BE49-F238E27FC236}">
-                <a16:creationId xmlns:a16="http://schemas.microsoft.com/office/drawing/2014/main" id="{A1105E35-F898-67A8-5B5A-0656D16B86C2}"/>
+                <a16:creationId xmlns:a16="http://schemas.microsoft.com/office/drawing/2014/main" id="{69434E7B-0F46-1A72-4A0A-A48C05D0EBE8}"/>
               </a:ext>
             </a:extLst>
           </p:cNvPr>
@@ -11302,7 +11302,7 @@
           <p:cNvPr id="13" name="TextBox 12">
             <a:extLst>
               <a:ext uri="{FF2B5EF4-FFF2-40B4-BE49-F238E27FC236}">
-                <a16:creationId xmlns:a16="http://schemas.microsoft.com/office/drawing/2014/main" id="{8D87EFAD-A7DB-5D4F-5EF5-2AC8D2AFBA0B}"/>
+                <a16:creationId xmlns:a16="http://schemas.microsoft.com/office/drawing/2014/main" id="{F8F2AC27-53E9-90F5-718B-55C4031E97F0}"/>
               </a:ext>
             </a:extLst>
           </p:cNvPr>
@@ -11348,7 +11348,7 @@
           <p:cNvPr id="15" name="Picture 14">
             <a:extLst>
               <a:ext uri="{FF2B5EF4-FFF2-40B4-BE49-F238E27FC236}">
-                <a16:creationId xmlns:a16="http://schemas.microsoft.com/office/drawing/2014/main" id="{A499BCBD-671A-B9BC-5942-5D1DB1ADFC96}"/>
+                <a16:creationId xmlns:a16="http://schemas.microsoft.com/office/drawing/2014/main" id="{B9E2654C-EF34-8A3B-A6A4-739BA8292474}"/>
               </a:ext>
             </a:extLst>
           </p:cNvPr>
@@ -11389,7 +11389,7 @@
           <p:cNvPr id="16" name="TextBox 15">
             <a:extLst>
               <a:ext uri="{FF2B5EF4-FFF2-40B4-BE49-F238E27FC236}">
-                <a16:creationId xmlns:a16="http://schemas.microsoft.com/office/drawing/2014/main" id="{E26BE7B6-729A-3789-A370-69EF6D1AA6AD}"/>
+                <a16:creationId xmlns:a16="http://schemas.microsoft.com/office/drawing/2014/main" id="{41F2A443-6B0C-1D1D-FA5A-C829B55C3921}"/>
               </a:ext>
             </a:extLst>
           </p:cNvPr>
@@ -11433,7 +11433,7 @@
     </p:spTree>
     <p:extLst>
       <p:ext uri="{BB962C8B-B14F-4D97-AF65-F5344CB8AC3E}">
-        <p14:creationId xmlns:p14="http://schemas.microsoft.com/office/powerpoint/2010/main" val="578057218"/>
+        <p14:creationId xmlns:p14="http://schemas.microsoft.com/office/powerpoint/2010/main" val="2502883447"/>
       </p:ext>
     </p:extLst>
   </p:cSld>
@@ -11473,7 +11473,7 @@
           <p:cNvPr id="2" name="TextBox 1">
             <a:extLst>
               <a:ext uri="{FF2B5EF4-FFF2-40B4-BE49-F238E27FC236}">
-                <a16:creationId xmlns:a16="http://schemas.microsoft.com/office/drawing/2014/main" id="{F2B226EF-0D52-A780-25CC-6724EE37D4F5}"/>
+                <a16:creationId xmlns:a16="http://schemas.microsoft.com/office/drawing/2014/main" id="{2BCBD143-92CA-ED1F-6A07-4080EC683AB2}"/>
               </a:ext>
             </a:extLst>
           </p:cNvPr>
@@ -11513,7 +11513,7 @@
           <p:cNvPr id="3" name="Oval 2">
             <a:extLst>
               <a:ext uri="{FF2B5EF4-FFF2-40B4-BE49-F238E27FC236}">
-                <a16:creationId xmlns:a16="http://schemas.microsoft.com/office/drawing/2014/main" id="{CD0F3C9E-F54A-201B-4CA7-26456E870BE4}"/>
+                <a16:creationId xmlns:a16="http://schemas.microsoft.com/office/drawing/2014/main" id="{B77215FA-1815-946D-9E2E-DCF3C75B4126}"/>
               </a:ext>
             </a:extLst>
           </p:cNvPr>
@@ -11589,7 +11589,7 @@
           <p:cNvPr id="4" name="TextBox 3">
             <a:extLst>
               <a:ext uri="{FF2B5EF4-FFF2-40B4-BE49-F238E27FC236}">
-                <a16:creationId xmlns:a16="http://schemas.microsoft.com/office/drawing/2014/main" id="{7F7D8A7D-2384-8B10-5FA2-EC461D3807C5}"/>
+                <a16:creationId xmlns:a16="http://schemas.microsoft.com/office/drawing/2014/main" id="{0B9CCBA9-653B-6438-2DED-C8F472026777}"/>
               </a:ext>
             </a:extLst>
           </p:cNvPr>
@@ -11629,7 +11629,7 @@
           <p:cNvPr id="5" name="TextBox 4">
             <a:extLst>
               <a:ext uri="{FF2B5EF4-FFF2-40B4-BE49-F238E27FC236}">
-                <a16:creationId xmlns:a16="http://schemas.microsoft.com/office/drawing/2014/main" id="{B88CCD63-1C36-35D2-30F4-4DDEEF33BA17}"/>
+                <a16:creationId xmlns:a16="http://schemas.microsoft.com/office/drawing/2014/main" id="{CDFC061C-ED0C-629E-90D6-0FF38FF6DD92}"/>
               </a:ext>
             </a:extLst>
           </p:cNvPr>
@@ -11675,7 +11675,7 @@
           <p:cNvPr id="6" name="Oval 5">
             <a:extLst>
               <a:ext uri="{FF2B5EF4-FFF2-40B4-BE49-F238E27FC236}">
-                <a16:creationId xmlns:a16="http://schemas.microsoft.com/office/drawing/2014/main" id="{4A7C0D50-B11F-EAC4-4FA1-58C5D7D55CC5}"/>
+                <a16:creationId xmlns:a16="http://schemas.microsoft.com/office/drawing/2014/main" id="{16806C24-BD74-395C-76E4-39ECE149A46A}"/>
               </a:ext>
             </a:extLst>
           </p:cNvPr>
@@ -11751,7 +11751,7 @@
           <p:cNvPr id="7" name="TextBox 6">
             <a:extLst>
               <a:ext uri="{FF2B5EF4-FFF2-40B4-BE49-F238E27FC236}">
-                <a16:creationId xmlns:a16="http://schemas.microsoft.com/office/drawing/2014/main" id="{0ADBCE15-4DD3-64CC-1A50-96BB2B55C01F}"/>
+                <a16:creationId xmlns:a16="http://schemas.microsoft.com/office/drawing/2014/main" id="{B956E3F4-2F05-AA94-8A05-5B2C7A636250}"/>
               </a:ext>
             </a:extLst>
           </p:cNvPr>
@@ -11797,7 +11797,7 @@
           <p:cNvPr id="8" name="TextBox 7">
             <a:extLst>
               <a:ext uri="{FF2B5EF4-FFF2-40B4-BE49-F238E27FC236}">
-                <a16:creationId xmlns:a16="http://schemas.microsoft.com/office/drawing/2014/main" id="{4D312FF9-91C4-0BAE-9B7E-3E3716660608}"/>
+                <a16:creationId xmlns:a16="http://schemas.microsoft.com/office/drawing/2014/main" id="{AFBDAEC8-4928-2979-5DA4-E3214C4B4300}"/>
               </a:ext>
             </a:extLst>
           </p:cNvPr>
@@ -11843,7 +11843,7 @@
           <p:cNvPr id="9" name="Oval 8">
             <a:extLst>
               <a:ext uri="{FF2B5EF4-FFF2-40B4-BE49-F238E27FC236}">
-                <a16:creationId xmlns:a16="http://schemas.microsoft.com/office/drawing/2014/main" id="{80FCBAB0-B4A6-E27E-5FF5-0D367AD7DF43}"/>
+                <a16:creationId xmlns:a16="http://schemas.microsoft.com/office/drawing/2014/main" id="{A23CACF0-234A-4D2E-1C23-E5B6D8D46F50}"/>
               </a:ext>
             </a:extLst>
           </p:cNvPr>
@@ -11919,7 +11919,7 @@
           <p:cNvPr id="10" name="TextBox 9">
             <a:extLst>
               <a:ext uri="{FF2B5EF4-FFF2-40B4-BE49-F238E27FC236}">
-                <a16:creationId xmlns:a16="http://schemas.microsoft.com/office/drawing/2014/main" id="{40696C41-F440-141A-BEAF-604D00F10693}"/>
+                <a16:creationId xmlns:a16="http://schemas.microsoft.com/office/drawing/2014/main" id="{09328F0B-B570-2B1A-425C-E3339819374E}"/>
               </a:ext>
             </a:extLst>
           </p:cNvPr>
@@ -11965,7 +11965,7 @@
           <p:cNvPr id="11" name="TextBox 10">
             <a:extLst>
               <a:ext uri="{FF2B5EF4-FFF2-40B4-BE49-F238E27FC236}">
-                <a16:creationId xmlns:a16="http://schemas.microsoft.com/office/drawing/2014/main" id="{9725245F-CFBA-0D74-A707-65B1DAFD6993}"/>
+                <a16:creationId xmlns:a16="http://schemas.microsoft.com/office/drawing/2014/main" id="{CB5E8D73-65B8-ED36-7944-2D87CE1BBDE6}"/>
               </a:ext>
             </a:extLst>
           </p:cNvPr>
@@ -12011,7 +12011,7 @@
           <p:cNvPr id="12" name="Oval 11">
             <a:extLst>
               <a:ext uri="{FF2B5EF4-FFF2-40B4-BE49-F238E27FC236}">
-                <a16:creationId xmlns:a16="http://schemas.microsoft.com/office/drawing/2014/main" id="{5BE4ABD5-BE69-E8A4-34B2-28AF8A45C81C}"/>
+                <a16:creationId xmlns:a16="http://schemas.microsoft.com/office/drawing/2014/main" id="{82BDC42B-C06F-EBCA-9034-DD45363EE389}"/>
               </a:ext>
             </a:extLst>
           </p:cNvPr>
@@ -12087,7 +12087,7 @@
           <p:cNvPr id="13" name="TextBox 12">
             <a:extLst>
               <a:ext uri="{FF2B5EF4-FFF2-40B4-BE49-F238E27FC236}">
-                <a16:creationId xmlns:a16="http://schemas.microsoft.com/office/drawing/2014/main" id="{2E1F2116-EA6B-181C-E242-9693259B8BAA}"/>
+                <a16:creationId xmlns:a16="http://schemas.microsoft.com/office/drawing/2014/main" id="{9D4BDF99-555A-CD39-2E81-6E6260D42098}"/>
               </a:ext>
             </a:extLst>
           </p:cNvPr>
@@ -12133,7 +12133,7 @@
           <p:cNvPr id="14" name="TextBox 13">
             <a:extLst>
               <a:ext uri="{FF2B5EF4-FFF2-40B4-BE49-F238E27FC236}">
-                <a16:creationId xmlns:a16="http://schemas.microsoft.com/office/drawing/2014/main" id="{CD74CFBE-77F9-A3A3-CF1A-9F0F6DF151D5}"/>
+                <a16:creationId xmlns:a16="http://schemas.microsoft.com/office/drawing/2014/main" id="{D9DF8FFB-6197-F09B-722C-EA2B624A149B}"/>
               </a:ext>
             </a:extLst>
           </p:cNvPr>
@@ -12179,7 +12179,7 @@
           <p:cNvPr id="15" name="Oval 14">
             <a:extLst>
               <a:ext uri="{FF2B5EF4-FFF2-40B4-BE49-F238E27FC236}">
-                <a16:creationId xmlns:a16="http://schemas.microsoft.com/office/drawing/2014/main" id="{785F5D45-CF2D-03D6-1522-56A0CA07B9BF}"/>
+                <a16:creationId xmlns:a16="http://schemas.microsoft.com/office/drawing/2014/main" id="{6B8011B5-6845-A985-BAA8-AF3F3A5E7B18}"/>
               </a:ext>
             </a:extLst>
           </p:cNvPr>
@@ -12255,7 +12255,7 @@
           <p:cNvPr id="16" name="TextBox 15">
             <a:extLst>
               <a:ext uri="{FF2B5EF4-FFF2-40B4-BE49-F238E27FC236}">
-                <a16:creationId xmlns:a16="http://schemas.microsoft.com/office/drawing/2014/main" id="{61ACE7AF-9A05-415A-520A-CB6B19B28976}"/>
+                <a16:creationId xmlns:a16="http://schemas.microsoft.com/office/drawing/2014/main" id="{5C7E7195-4CA5-7F6F-B42B-1EA4FA3DD821}"/>
               </a:ext>
             </a:extLst>
           </p:cNvPr>
@@ -12301,7 +12301,7 @@
           <p:cNvPr id="17" name="TextBox 16">
             <a:extLst>
               <a:ext uri="{FF2B5EF4-FFF2-40B4-BE49-F238E27FC236}">
-                <a16:creationId xmlns:a16="http://schemas.microsoft.com/office/drawing/2014/main" id="{E087076F-2DBE-2705-C439-4D70F5F637DC}"/>
+                <a16:creationId xmlns:a16="http://schemas.microsoft.com/office/drawing/2014/main" id="{85571932-1C1D-3434-1DF3-4508E28808A9}"/>
               </a:ext>
             </a:extLst>
           </p:cNvPr>
@@ -12347,7 +12347,7 @@
           <p:cNvPr id="19" name="Picture 18">
             <a:extLst>
               <a:ext uri="{FF2B5EF4-FFF2-40B4-BE49-F238E27FC236}">
-                <a16:creationId xmlns:a16="http://schemas.microsoft.com/office/drawing/2014/main" id="{9AA3970D-8B48-3429-AC86-40288A36D349}"/>
+                <a16:creationId xmlns:a16="http://schemas.microsoft.com/office/drawing/2014/main" id="{1ABA6A61-DF6E-7543-0130-86A791F0C7C8}"/>
               </a:ext>
             </a:extLst>
           </p:cNvPr>
@@ -12388,7 +12388,7 @@
           <p:cNvPr id="20" name="TextBox 19">
             <a:extLst>
               <a:ext uri="{FF2B5EF4-FFF2-40B4-BE49-F238E27FC236}">
-                <a16:creationId xmlns:a16="http://schemas.microsoft.com/office/drawing/2014/main" id="{3050638C-68CE-7C3C-A54B-5EFAC6D2C031}"/>
+                <a16:creationId xmlns:a16="http://schemas.microsoft.com/office/drawing/2014/main" id="{F3A116ED-3D57-0663-8791-BCAB566DC0FC}"/>
               </a:ext>
             </a:extLst>
           </p:cNvPr>
@@ -12434,7 +12434,7 @@
           <p:cNvPr id="21" name="Rectangle: Rounded Corners 20">
             <a:extLst>
               <a:ext uri="{FF2B5EF4-FFF2-40B4-BE49-F238E27FC236}">
-                <a16:creationId xmlns:a16="http://schemas.microsoft.com/office/drawing/2014/main" id="{B8A51110-8DA2-40FF-D973-9D2392F9FAE5}"/>
+                <a16:creationId xmlns:a16="http://schemas.microsoft.com/office/drawing/2014/main" id="{EC47C2EF-2483-0FC5-C71C-8D7C651487AD}"/>
               </a:ext>
             </a:extLst>
           </p:cNvPr>
@@ -12504,7 +12504,7 @@
           <p:cNvPr id="22" name="TextBox 21">
             <a:extLst>
               <a:ext uri="{FF2B5EF4-FFF2-40B4-BE49-F238E27FC236}">
-                <a16:creationId xmlns:a16="http://schemas.microsoft.com/office/drawing/2014/main" id="{BF9F8695-E0E4-641B-2742-5D905102728D}"/>
+                <a16:creationId xmlns:a16="http://schemas.microsoft.com/office/drawing/2014/main" id="{F9CCEA8D-2F4A-3D58-48A2-1D50BBCD3092}"/>
               </a:ext>
             </a:extLst>
           </p:cNvPr>
@@ -12550,7 +12550,7 @@
           <p:cNvPr id="23" name="TextBox 22">
             <a:extLst>
               <a:ext uri="{FF2B5EF4-FFF2-40B4-BE49-F238E27FC236}">
-                <a16:creationId xmlns:a16="http://schemas.microsoft.com/office/drawing/2014/main" id="{7EFA4CB8-D0DE-0755-A62C-A28A2945CBB3}"/>
+                <a16:creationId xmlns:a16="http://schemas.microsoft.com/office/drawing/2014/main" id="{BC5ED68C-88FD-3CD8-D57B-E5396FFA9574}"/>
               </a:ext>
             </a:extLst>
           </p:cNvPr>
@@ -12595,7 +12595,7 @@
     </p:spTree>
     <p:extLst>
       <p:ext uri="{BB962C8B-B14F-4D97-AF65-F5344CB8AC3E}">
-        <p14:creationId xmlns:p14="http://schemas.microsoft.com/office/powerpoint/2010/main" val="43997081"/>
+        <p14:creationId xmlns:p14="http://schemas.microsoft.com/office/powerpoint/2010/main" val="2016868221"/>
       </p:ext>
     </p:extLst>
   </p:cSld>
@@ -12635,7 +12635,7 @@
           <p:cNvPr id="2" name="TextBox 1">
             <a:extLst>
               <a:ext uri="{FF2B5EF4-FFF2-40B4-BE49-F238E27FC236}">
-                <a16:creationId xmlns:a16="http://schemas.microsoft.com/office/drawing/2014/main" id="{89BE3C37-640B-EE9F-A6D5-B0D02C956547}"/>
+                <a16:creationId xmlns:a16="http://schemas.microsoft.com/office/drawing/2014/main" id="{7768FF72-F555-D38B-CE48-F1C6B7E81B8B}"/>
               </a:ext>
             </a:extLst>
           </p:cNvPr>
@@ -12681,7 +12681,7 @@
           <p:cNvPr id="3" name="Rectangle: Rounded Corners 2">
             <a:extLst>
               <a:ext uri="{FF2B5EF4-FFF2-40B4-BE49-F238E27FC236}">
-                <a16:creationId xmlns:a16="http://schemas.microsoft.com/office/drawing/2014/main" id="{323AF4DE-F773-C741-58DA-FA7F6C53D58A}"/>
+                <a16:creationId xmlns:a16="http://schemas.microsoft.com/office/drawing/2014/main" id="{2EFA95AA-456E-E31E-13CD-D22A3C0410F0}"/>
               </a:ext>
             </a:extLst>
           </p:cNvPr>
@@ -12751,7 +12751,7 @@
           <p:cNvPr id="4" name="TextBox 3">
             <a:extLst>
               <a:ext uri="{FF2B5EF4-FFF2-40B4-BE49-F238E27FC236}">
-                <a16:creationId xmlns:a16="http://schemas.microsoft.com/office/drawing/2014/main" id="{745E6EC3-FFAE-63BB-F089-98370D08D6D6}"/>
+                <a16:creationId xmlns:a16="http://schemas.microsoft.com/office/drawing/2014/main" id="{386F4988-ECAF-512C-0E75-518244548E0E}"/>
               </a:ext>
             </a:extLst>
           </p:cNvPr>
@@ -12791,7 +12791,7 @@
           <p:cNvPr id="5" name="TextBox 4">
             <a:extLst>
               <a:ext uri="{FF2B5EF4-FFF2-40B4-BE49-F238E27FC236}">
-                <a16:creationId xmlns:a16="http://schemas.microsoft.com/office/drawing/2014/main" id="{665FDE65-5D73-5269-93E0-3FF4AEACC29C}"/>
+                <a16:creationId xmlns:a16="http://schemas.microsoft.com/office/drawing/2014/main" id="{49D34EBB-9B5D-BC05-0EDB-DC7C738F343C}"/>
               </a:ext>
             </a:extLst>
           </p:cNvPr>
@@ -12832,7 +12832,7 @@
           <p:cNvPr id="6" name="TextBox 5">
             <a:extLst>
               <a:ext uri="{FF2B5EF4-FFF2-40B4-BE49-F238E27FC236}">
-                <a16:creationId xmlns:a16="http://schemas.microsoft.com/office/drawing/2014/main" id="{9EA4836D-89AD-19E3-ACC7-8C7E52BDDCF7}"/>
+                <a16:creationId xmlns:a16="http://schemas.microsoft.com/office/drawing/2014/main" id="{F08C85B7-A61D-B48B-3580-D59975CBC7B8}"/>
               </a:ext>
             </a:extLst>
           </p:cNvPr>
@@ -12872,7 +12872,7 @@
           <p:cNvPr id="7" name="TextBox 6">
             <a:extLst>
               <a:ext uri="{FF2B5EF4-FFF2-40B4-BE49-F238E27FC236}">
-                <a16:creationId xmlns:a16="http://schemas.microsoft.com/office/drawing/2014/main" id="{E14AC80A-DFCC-995F-3528-864C00AB9667}"/>
+                <a16:creationId xmlns:a16="http://schemas.microsoft.com/office/drawing/2014/main" id="{DF945A09-FB40-D78B-A402-9D34E53FB97A}"/>
               </a:ext>
             </a:extLst>
           </p:cNvPr>
@@ -12918,7 +12918,7 @@
           <p:cNvPr id="8" name="TextBox 7">
             <a:extLst>
               <a:ext uri="{FF2B5EF4-FFF2-40B4-BE49-F238E27FC236}">
-                <a16:creationId xmlns:a16="http://schemas.microsoft.com/office/drawing/2014/main" id="{46B49DE1-AE78-7D0C-B4AE-1BEE13257CEE}"/>
+                <a16:creationId xmlns:a16="http://schemas.microsoft.com/office/drawing/2014/main" id="{D2CC8564-C428-2AFE-B20F-BC583FD65CF8}"/>
               </a:ext>
             </a:extLst>
           </p:cNvPr>
@@ -12964,7 +12964,7 @@
           <p:cNvPr id="9" name="TextBox 8">
             <a:extLst>
               <a:ext uri="{FF2B5EF4-FFF2-40B4-BE49-F238E27FC236}">
-                <a16:creationId xmlns:a16="http://schemas.microsoft.com/office/drawing/2014/main" id="{DB7AAFA3-99E5-B18E-EC13-4D159B81DA11}"/>
+                <a16:creationId xmlns:a16="http://schemas.microsoft.com/office/drawing/2014/main" id="{C4DE0A9B-7B5E-473E-96EC-9007E66D646C}"/>
               </a:ext>
             </a:extLst>
           </p:cNvPr>
@@ -13010,7 +13010,7 @@
           <p:cNvPr id="10" name="Table 9">
             <a:extLst>
               <a:ext uri="{FF2B5EF4-FFF2-40B4-BE49-F238E27FC236}">
-                <a16:creationId xmlns:a16="http://schemas.microsoft.com/office/drawing/2014/main" id="{58790C1D-9D10-D7A1-4C91-8E486438287E}"/>
+                <a16:creationId xmlns:a16="http://schemas.microsoft.com/office/drawing/2014/main" id="{A0D13DA6-A89A-A541-1127-61EAA818C0BF}"/>
               </a:ext>
             </a:extLst>
           </p:cNvPr>
@@ -13020,7 +13020,7 @@
           <p:nvPr>
             <p:extLst>
               <p:ext uri="{D42A27DB-BD31-4B8C-83A1-F6EECF244321}">
-                <p14:modId xmlns:p14="http://schemas.microsoft.com/office/powerpoint/2010/main" val="912614286"/>
+                <p14:modId xmlns:p14="http://schemas.microsoft.com/office/powerpoint/2010/main" val="2527530362"/>
               </p:ext>
             </p:extLst>
           </p:nvPr>
@@ -13039,21 +13039,21 @@
                 <a:gridCol w="1905000">
                   <a:extLst>
                     <a:ext uri="{9D8B030D-6E8A-4147-A177-3AD203B41FA5}">
-                      <a16:colId xmlns:a16="http://schemas.microsoft.com/office/drawing/2014/main" val="3170279188"/>
+                      <a16:colId xmlns:a16="http://schemas.microsoft.com/office/drawing/2014/main" val="3343986346"/>
                     </a:ext>
                   </a:extLst>
                 </a:gridCol>
                 <a:gridCol w="2413000">
                   <a:extLst>
                     <a:ext uri="{9D8B030D-6E8A-4147-A177-3AD203B41FA5}">
-                      <a16:colId xmlns:a16="http://schemas.microsoft.com/office/drawing/2014/main" val="1441699180"/>
+                      <a16:colId xmlns:a16="http://schemas.microsoft.com/office/drawing/2014/main" val="2023551692"/>
                     </a:ext>
                   </a:extLst>
                 </a:gridCol>
                 <a:gridCol w="2032000">
                   <a:extLst>
                     <a:ext uri="{9D8B030D-6E8A-4147-A177-3AD203B41FA5}">
-                      <a16:colId xmlns:a16="http://schemas.microsoft.com/office/drawing/2014/main" val="737495182"/>
+                      <a16:colId xmlns:a16="http://schemas.microsoft.com/office/drawing/2014/main" val="735085174"/>
                     </a:ext>
                   </a:extLst>
                 </a:gridCol>
@@ -13127,7 +13127,7 @@
                 </a:tc>
                 <a:extLst>
                   <a:ext uri="{0D108BD9-81ED-4DB2-BD59-A6C34878D82A}">
-                    <a16:rowId xmlns:a16="http://schemas.microsoft.com/office/drawing/2014/main" val="2512073966"/>
+                    <a16:rowId xmlns:a16="http://schemas.microsoft.com/office/drawing/2014/main" val="3553963012"/>
                   </a:ext>
                 </a:extLst>
               </a:tr>
@@ -13212,7 +13212,7 @@
                 </a:tc>
                 <a:extLst>
                   <a:ext uri="{0D108BD9-81ED-4DB2-BD59-A6C34878D82A}">
-                    <a16:rowId xmlns:a16="http://schemas.microsoft.com/office/drawing/2014/main" val="3438988974"/>
+                    <a16:rowId xmlns:a16="http://schemas.microsoft.com/office/drawing/2014/main" val="371457210"/>
                   </a:ext>
                 </a:extLst>
               </a:tr>
@@ -13291,7 +13291,7 @@
                 </a:tc>
                 <a:extLst>
                   <a:ext uri="{0D108BD9-81ED-4DB2-BD59-A6C34878D82A}">
-                    <a16:rowId xmlns:a16="http://schemas.microsoft.com/office/drawing/2014/main" val="311000397"/>
+                    <a16:rowId xmlns:a16="http://schemas.microsoft.com/office/drawing/2014/main" val="367128025"/>
                   </a:ext>
                 </a:extLst>
               </a:tr>
@@ -13370,7 +13370,7 @@
                 </a:tc>
                 <a:extLst>
                   <a:ext uri="{0D108BD9-81ED-4DB2-BD59-A6C34878D82A}">
-                    <a16:rowId xmlns:a16="http://schemas.microsoft.com/office/drawing/2014/main" val="1321495374"/>
+                    <a16:rowId xmlns:a16="http://schemas.microsoft.com/office/drawing/2014/main" val="165586755"/>
                   </a:ext>
                 </a:extLst>
               </a:tr>
@@ -13383,7 +13383,7 @@
           <p:cNvPr id="11" name="Rectangle: Rounded Corners 10">
             <a:extLst>
               <a:ext uri="{FF2B5EF4-FFF2-40B4-BE49-F238E27FC236}">
-                <a16:creationId xmlns:a16="http://schemas.microsoft.com/office/drawing/2014/main" id="{141E21E9-379E-248E-312F-B0BDB9C40C35}"/>
+                <a16:creationId xmlns:a16="http://schemas.microsoft.com/office/drawing/2014/main" id="{40C5B6C1-634B-6D2D-463E-C62C7465FFAB}"/>
               </a:ext>
             </a:extLst>
           </p:cNvPr>
@@ -13453,7 +13453,7 @@
           <p:cNvPr id="12" name="TextBox 11">
             <a:extLst>
               <a:ext uri="{FF2B5EF4-FFF2-40B4-BE49-F238E27FC236}">
-                <a16:creationId xmlns:a16="http://schemas.microsoft.com/office/drawing/2014/main" id="{1BEDF5AE-BEDB-DCD6-E29E-FA66FC03B961}"/>
+                <a16:creationId xmlns:a16="http://schemas.microsoft.com/office/drawing/2014/main" id="{2B2FD53F-42C4-7FFA-BB6F-A4D92E9F97F7}"/>
               </a:ext>
             </a:extLst>
           </p:cNvPr>
@@ -13493,7 +13493,7 @@
           <p:cNvPr id="13" name="Oval 12">
             <a:extLst>
               <a:ext uri="{FF2B5EF4-FFF2-40B4-BE49-F238E27FC236}">
-                <a16:creationId xmlns:a16="http://schemas.microsoft.com/office/drawing/2014/main" id="{E6F60D24-86DF-897D-13D8-26D895B82F9F}"/>
+                <a16:creationId xmlns:a16="http://schemas.microsoft.com/office/drawing/2014/main" id="{A70ACB19-933E-0D2E-C404-5AA165357E41}"/>
               </a:ext>
             </a:extLst>
           </p:cNvPr>
@@ -13569,7 +13569,7 @@
           <p:cNvPr id="14" name="TextBox 13">
             <a:extLst>
               <a:ext uri="{FF2B5EF4-FFF2-40B4-BE49-F238E27FC236}">
-                <a16:creationId xmlns:a16="http://schemas.microsoft.com/office/drawing/2014/main" id="{07734D5B-F588-B166-1D54-C6B96FF9500C}"/>
+                <a16:creationId xmlns:a16="http://schemas.microsoft.com/office/drawing/2014/main" id="{247E4116-17C4-46F3-82A8-2E80C26D436F}"/>
               </a:ext>
             </a:extLst>
           </p:cNvPr>
@@ -13609,7 +13609,7 @@
           <p:cNvPr id="15" name="TextBox 14">
             <a:extLst>
               <a:ext uri="{FF2B5EF4-FFF2-40B4-BE49-F238E27FC236}">
-                <a16:creationId xmlns:a16="http://schemas.microsoft.com/office/drawing/2014/main" id="{3B97D113-309C-E8AC-138F-78EC78BA2D68}"/>
+                <a16:creationId xmlns:a16="http://schemas.microsoft.com/office/drawing/2014/main" id="{19476F54-B086-B5A4-21D1-00E185EB27C4}"/>
               </a:ext>
             </a:extLst>
           </p:cNvPr>
@@ -13655,7 +13655,7 @@
           <p:cNvPr id="16" name="Oval 15">
             <a:extLst>
               <a:ext uri="{FF2B5EF4-FFF2-40B4-BE49-F238E27FC236}">
-                <a16:creationId xmlns:a16="http://schemas.microsoft.com/office/drawing/2014/main" id="{C783E5E6-613C-C7F3-014A-A65B7CDEC201}"/>
+                <a16:creationId xmlns:a16="http://schemas.microsoft.com/office/drawing/2014/main" id="{F4DE42C6-2433-F9D0-BDF0-3082F1529AFE}"/>
               </a:ext>
             </a:extLst>
           </p:cNvPr>
@@ -13731,7 +13731,7 @@
           <p:cNvPr id="17" name="TextBox 16">
             <a:extLst>
               <a:ext uri="{FF2B5EF4-FFF2-40B4-BE49-F238E27FC236}">
-                <a16:creationId xmlns:a16="http://schemas.microsoft.com/office/drawing/2014/main" id="{1564DE47-A291-9DD3-484F-3DD60FC54AAD}"/>
+                <a16:creationId xmlns:a16="http://schemas.microsoft.com/office/drawing/2014/main" id="{2E91F175-857B-C246-BCF6-E83255B218D9}"/>
               </a:ext>
             </a:extLst>
           </p:cNvPr>
@@ -13777,7 +13777,7 @@
           <p:cNvPr id="18" name="TextBox 17">
             <a:extLst>
               <a:ext uri="{FF2B5EF4-FFF2-40B4-BE49-F238E27FC236}">
-                <a16:creationId xmlns:a16="http://schemas.microsoft.com/office/drawing/2014/main" id="{7012BD79-7062-A31F-71F6-C8BC8A7B5747}"/>
+                <a16:creationId xmlns:a16="http://schemas.microsoft.com/office/drawing/2014/main" id="{7198EB29-F928-DBB7-0448-18CE7380A901}"/>
               </a:ext>
             </a:extLst>
           </p:cNvPr>
@@ -13823,7 +13823,7 @@
           <p:cNvPr id="19" name="Oval 18">
             <a:extLst>
               <a:ext uri="{FF2B5EF4-FFF2-40B4-BE49-F238E27FC236}">
-                <a16:creationId xmlns:a16="http://schemas.microsoft.com/office/drawing/2014/main" id="{FFBBFB3D-18A0-DBA1-7F1A-CE3D04151002}"/>
+                <a16:creationId xmlns:a16="http://schemas.microsoft.com/office/drawing/2014/main" id="{E5F55A10-55B7-8735-F919-43426B6AF219}"/>
               </a:ext>
             </a:extLst>
           </p:cNvPr>
@@ -13899,7 +13899,7 @@
           <p:cNvPr id="20" name="TextBox 19">
             <a:extLst>
               <a:ext uri="{FF2B5EF4-FFF2-40B4-BE49-F238E27FC236}">
-                <a16:creationId xmlns:a16="http://schemas.microsoft.com/office/drawing/2014/main" id="{93828EBC-3810-33B6-F8C5-9405B1174F4C}"/>
+                <a16:creationId xmlns:a16="http://schemas.microsoft.com/office/drawing/2014/main" id="{86201F4F-4ADF-746A-24E7-F24D5F2B29F3}"/>
               </a:ext>
             </a:extLst>
           </p:cNvPr>
@@ -13939,7 +13939,7 @@
           <p:cNvPr id="21" name="TextBox 20">
             <a:extLst>
               <a:ext uri="{FF2B5EF4-FFF2-40B4-BE49-F238E27FC236}">
-                <a16:creationId xmlns:a16="http://schemas.microsoft.com/office/drawing/2014/main" id="{8F281528-CB2B-9F47-F448-3C51403FC23A}"/>
+                <a16:creationId xmlns:a16="http://schemas.microsoft.com/office/drawing/2014/main" id="{A4D82526-38AB-64C7-0939-21612383689A}"/>
               </a:ext>
             </a:extLst>
           </p:cNvPr>
@@ -13985,7 +13985,7 @@
           <p:cNvPr id="22" name="TextBox 21">
             <a:extLst>
               <a:ext uri="{FF2B5EF4-FFF2-40B4-BE49-F238E27FC236}">
-                <a16:creationId xmlns:a16="http://schemas.microsoft.com/office/drawing/2014/main" id="{69E06163-CE95-0AF4-CC99-78D4AD96947C}"/>
+                <a16:creationId xmlns:a16="http://schemas.microsoft.com/office/drawing/2014/main" id="{8C5E3A47-049C-1560-3221-4053BE818BE9}"/>
               </a:ext>
             </a:extLst>
           </p:cNvPr>
@@ -14031,7 +14031,7 @@
           <p:cNvPr id="23" name="TextBox 22">
             <a:extLst>
               <a:ext uri="{FF2B5EF4-FFF2-40B4-BE49-F238E27FC236}">
-                <a16:creationId xmlns:a16="http://schemas.microsoft.com/office/drawing/2014/main" id="{799428E1-411D-A7E5-65A3-29F6B7066437}"/>
+                <a16:creationId xmlns:a16="http://schemas.microsoft.com/office/drawing/2014/main" id="{BF8FFEE7-5CE8-0A05-F699-5E110EBC39C0}"/>
               </a:ext>
             </a:extLst>
           </p:cNvPr>
@@ -14070,7 +14070,7 @@
     </p:spTree>
     <p:extLst>
       <p:ext uri="{BB962C8B-B14F-4D97-AF65-F5344CB8AC3E}">
-        <p14:creationId xmlns:p14="http://schemas.microsoft.com/office/powerpoint/2010/main" val="1480438600"/>
+        <p14:creationId xmlns:p14="http://schemas.microsoft.com/office/powerpoint/2010/main" val="2581334097"/>
       </p:ext>
     </p:extLst>
   </p:cSld>

--- a/docs/Sentinel-final-pitch.pptx
+++ b/docs/Sentinel-final-pitch.pptx
@@ -199,7 +199,7 @@
             </a:lvl1pPr>
           </a:lstStyle>
           <a:p>
-            <a:fld id="{4F1D260F-070B-4D4C-8B83-51D258150D47}" type="datetimeFigureOut">
+            <a:fld id="{602EEB48-D76A-4F0B-A911-28B67C8066E0}" type="datetimeFigureOut">
               <a:rPr lang="en-MY" smtClean="0"/>
               <a:t>25/9/2026</a:t>
             </a:fld>
@@ -358,7 +358,7 @@
             </a:lvl1pPr>
           </a:lstStyle>
           <a:p>
-            <a:fld id="{2CF0A9E5-EE01-40A0-AA40-690BCA224619}" type="slidenum">
+            <a:fld id="{67F9A505-9FD4-4536-B0A5-E8F96FD98A8B}" type="slidenum">
               <a:rPr lang="en-MY" smtClean="0"/>
               <a:t>‹#›</a:t>
             </a:fld>
@@ -369,7 +369,7 @@
     </p:spTree>
     <p:extLst>
       <p:ext uri="{BB962C8B-B14F-4D97-AF65-F5344CB8AC3E}">
-        <p14:creationId xmlns:p14="http://schemas.microsoft.com/office/powerpoint/2010/main" val="265458595"/>
+        <p14:creationId xmlns:p14="http://schemas.microsoft.com/office/powerpoint/2010/main" val="2198754436"/>
       </p:ext>
     </p:extLst>
   </p:cSld>
@@ -536,7 +536,7 @@
           <a:bodyPr/>
           <a:lstStyle/>
           <a:p>
-            <a:fld id="{2CF0A9E5-EE01-40A0-AA40-690BCA224619}" type="slidenum">
+            <a:fld id="{67F9A505-9FD4-4536-B0A5-E8F96FD98A8B}" type="slidenum">
               <a:rPr lang="en-MY" smtClean="0"/>
               <a:t>1</a:t>
             </a:fld>
@@ -547,7 +547,7 @@
     </p:spTree>
     <p:extLst>
       <p:ext uri="{BB962C8B-B14F-4D97-AF65-F5344CB8AC3E}">
-        <p14:creationId xmlns:p14="http://schemas.microsoft.com/office/powerpoint/2010/main" val="4066782065"/>
+        <p14:creationId xmlns:p14="http://schemas.microsoft.com/office/powerpoint/2010/main" val="3505620229"/>
       </p:ext>
     </p:extLst>
   </p:cSld>
@@ -624,7 +624,7 @@
           <a:bodyPr/>
           <a:lstStyle/>
           <a:p>
-            <a:fld id="{2CF0A9E5-EE01-40A0-AA40-690BCA224619}" type="slidenum">
+            <a:fld id="{67F9A505-9FD4-4536-B0A5-E8F96FD98A8B}" type="slidenum">
               <a:rPr lang="en-MY" smtClean="0"/>
               <a:t>10</a:t>
             </a:fld>
@@ -635,7 +635,7 @@
     </p:spTree>
     <p:extLst>
       <p:ext uri="{BB962C8B-B14F-4D97-AF65-F5344CB8AC3E}">
-        <p14:creationId xmlns:p14="http://schemas.microsoft.com/office/powerpoint/2010/main" val="3052070964"/>
+        <p14:creationId xmlns:p14="http://schemas.microsoft.com/office/powerpoint/2010/main" val="4199060362"/>
       </p:ext>
     </p:extLst>
   </p:cSld>
@@ -712,7 +712,7 @@
           <a:bodyPr/>
           <a:lstStyle/>
           <a:p>
-            <a:fld id="{2CF0A9E5-EE01-40A0-AA40-690BCA224619}" type="slidenum">
+            <a:fld id="{67F9A505-9FD4-4536-B0A5-E8F96FD98A8B}" type="slidenum">
               <a:rPr lang="en-MY" smtClean="0"/>
               <a:t>2</a:t>
             </a:fld>
@@ -723,7 +723,7 @@
     </p:spTree>
     <p:extLst>
       <p:ext uri="{BB962C8B-B14F-4D97-AF65-F5344CB8AC3E}">
-        <p14:creationId xmlns:p14="http://schemas.microsoft.com/office/powerpoint/2010/main" val="882069478"/>
+        <p14:creationId xmlns:p14="http://schemas.microsoft.com/office/powerpoint/2010/main" val="4172555758"/>
       </p:ext>
     </p:extLst>
   </p:cSld>
@@ -800,7 +800,7 @@
           <a:bodyPr/>
           <a:lstStyle/>
           <a:p>
-            <a:fld id="{2CF0A9E5-EE01-40A0-AA40-690BCA224619}" type="slidenum">
+            <a:fld id="{67F9A505-9FD4-4536-B0A5-E8F96FD98A8B}" type="slidenum">
               <a:rPr lang="en-MY" smtClean="0"/>
               <a:t>3</a:t>
             </a:fld>
@@ -811,7 +811,7 @@
     </p:spTree>
     <p:extLst>
       <p:ext uri="{BB962C8B-B14F-4D97-AF65-F5344CB8AC3E}">
-        <p14:creationId xmlns:p14="http://schemas.microsoft.com/office/powerpoint/2010/main" val="1412058313"/>
+        <p14:creationId xmlns:p14="http://schemas.microsoft.com/office/powerpoint/2010/main" val="582362551"/>
       </p:ext>
     </p:extLst>
   </p:cSld>
@@ -888,7 +888,7 @@
           <a:bodyPr/>
           <a:lstStyle/>
           <a:p>
-            <a:fld id="{2CF0A9E5-EE01-40A0-AA40-690BCA224619}" type="slidenum">
+            <a:fld id="{67F9A505-9FD4-4536-B0A5-E8F96FD98A8B}" type="slidenum">
               <a:rPr lang="en-MY" smtClean="0"/>
               <a:t>4</a:t>
             </a:fld>
@@ -899,7 +899,7 @@
     </p:spTree>
     <p:extLst>
       <p:ext uri="{BB962C8B-B14F-4D97-AF65-F5344CB8AC3E}">
-        <p14:creationId xmlns:p14="http://schemas.microsoft.com/office/powerpoint/2010/main" val="2516953318"/>
+        <p14:creationId xmlns:p14="http://schemas.microsoft.com/office/powerpoint/2010/main" val="3429578367"/>
       </p:ext>
     </p:extLst>
   </p:cSld>
@@ -976,7 +976,7 @@
           <a:bodyPr/>
           <a:lstStyle/>
           <a:p>
-            <a:fld id="{2CF0A9E5-EE01-40A0-AA40-690BCA224619}" type="slidenum">
+            <a:fld id="{67F9A505-9FD4-4536-B0A5-E8F96FD98A8B}" type="slidenum">
               <a:rPr lang="en-MY" smtClean="0"/>
               <a:t>5</a:t>
             </a:fld>
@@ -987,7 +987,7 @@
     </p:spTree>
     <p:extLst>
       <p:ext uri="{BB962C8B-B14F-4D97-AF65-F5344CB8AC3E}">
-        <p14:creationId xmlns:p14="http://schemas.microsoft.com/office/powerpoint/2010/main" val="1508784413"/>
+        <p14:creationId xmlns:p14="http://schemas.microsoft.com/office/powerpoint/2010/main" val="945995184"/>
       </p:ext>
     </p:extLst>
   </p:cSld>
@@ -1064,7 +1064,7 @@
           <a:bodyPr/>
           <a:lstStyle/>
           <a:p>
-            <a:fld id="{2CF0A9E5-EE01-40A0-AA40-690BCA224619}" type="slidenum">
+            <a:fld id="{67F9A505-9FD4-4536-B0A5-E8F96FD98A8B}" type="slidenum">
               <a:rPr lang="en-MY" smtClean="0"/>
               <a:t>6</a:t>
             </a:fld>
@@ -1075,7 +1075,7 @@
     </p:spTree>
     <p:extLst>
       <p:ext uri="{BB962C8B-B14F-4D97-AF65-F5344CB8AC3E}">
-        <p14:creationId xmlns:p14="http://schemas.microsoft.com/office/powerpoint/2010/main" val="201700084"/>
+        <p14:creationId xmlns:p14="http://schemas.microsoft.com/office/powerpoint/2010/main" val="1396632715"/>
       </p:ext>
     </p:extLst>
   </p:cSld>
@@ -1152,7 +1152,7 @@
           <a:bodyPr/>
           <a:lstStyle/>
           <a:p>
-            <a:fld id="{2CF0A9E5-EE01-40A0-AA40-690BCA224619}" type="slidenum">
+            <a:fld id="{67F9A505-9FD4-4536-B0A5-E8F96FD98A8B}" type="slidenum">
               <a:rPr lang="en-MY" smtClean="0"/>
               <a:t>7</a:t>
             </a:fld>
@@ -1163,7 +1163,7 @@
     </p:spTree>
     <p:extLst>
       <p:ext uri="{BB962C8B-B14F-4D97-AF65-F5344CB8AC3E}">
-        <p14:creationId xmlns:p14="http://schemas.microsoft.com/office/powerpoint/2010/main" val="1836439775"/>
+        <p14:creationId xmlns:p14="http://schemas.microsoft.com/office/powerpoint/2010/main" val="3815837626"/>
       </p:ext>
     </p:extLst>
   </p:cSld>
@@ -1240,7 +1240,7 @@
           <a:bodyPr/>
           <a:lstStyle/>
           <a:p>
-            <a:fld id="{2CF0A9E5-EE01-40A0-AA40-690BCA224619}" type="slidenum">
+            <a:fld id="{67F9A505-9FD4-4536-B0A5-E8F96FD98A8B}" type="slidenum">
               <a:rPr lang="en-MY" smtClean="0"/>
               <a:t>8</a:t>
             </a:fld>
@@ -1251,7 +1251,7 @@
     </p:spTree>
     <p:extLst>
       <p:ext uri="{BB962C8B-B14F-4D97-AF65-F5344CB8AC3E}">
-        <p14:creationId xmlns:p14="http://schemas.microsoft.com/office/powerpoint/2010/main" val="3951563729"/>
+        <p14:creationId xmlns:p14="http://schemas.microsoft.com/office/powerpoint/2010/main" val="2552237799"/>
       </p:ext>
     </p:extLst>
   </p:cSld>
@@ -1328,7 +1328,7 @@
           <a:bodyPr/>
           <a:lstStyle/>
           <a:p>
-            <a:fld id="{2CF0A9E5-EE01-40A0-AA40-690BCA224619}" type="slidenum">
+            <a:fld id="{67F9A505-9FD4-4536-B0A5-E8F96FD98A8B}" type="slidenum">
               <a:rPr lang="en-MY" smtClean="0"/>
               <a:t>9</a:t>
             </a:fld>
@@ -1339,7 +1339,7 @@
     </p:spTree>
     <p:extLst>
       <p:ext uri="{BB962C8B-B14F-4D97-AF65-F5344CB8AC3E}">
-        <p14:creationId xmlns:p14="http://schemas.microsoft.com/office/powerpoint/2010/main" val="2259569739"/>
+        <p14:creationId xmlns:p14="http://schemas.microsoft.com/office/powerpoint/2010/main" val="3413419410"/>
       </p:ext>
     </p:extLst>
   </p:cSld>
@@ -1371,7 +1371,7 @@
           <p:cNvPr id="2" name="Title 1">
             <a:extLst>
               <a:ext uri="{FF2B5EF4-FFF2-40B4-BE49-F238E27FC236}">
-                <a16:creationId xmlns:a16="http://schemas.microsoft.com/office/drawing/2014/main" id="{5F9C2023-0625-E5D0-AC5A-B6068DC2B7CE}"/>
+                <a16:creationId xmlns:a16="http://schemas.microsoft.com/office/drawing/2014/main" id="{F7A7D5D7-2E62-0B2E-042B-9DE1DB28E6B1}"/>
               </a:ext>
             </a:extLst>
           </p:cNvPr>
@@ -1409,7 +1409,7 @@
           <p:cNvPr id="3" name="Subtitle 2">
             <a:extLst>
               <a:ext uri="{FF2B5EF4-FFF2-40B4-BE49-F238E27FC236}">
-                <a16:creationId xmlns:a16="http://schemas.microsoft.com/office/drawing/2014/main" id="{9BD8F635-1902-DDCD-BD5B-7D40C116B1EF}"/>
+                <a16:creationId xmlns:a16="http://schemas.microsoft.com/office/drawing/2014/main" id="{4BAA784F-6487-6A71-9BFF-4393FB20E0E3}"/>
               </a:ext>
             </a:extLst>
           </p:cNvPr>
@@ -1480,7 +1480,7 @@
           <p:cNvPr id="4" name="Date Placeholder 3">
             <a:extLst>
               <a:ext uri="{FF2B5EF4-FFF2-40B4-BE49-F238E27FC236}">
-                <a16:creationId xmlns:a16="http://schemas.microsoft.com/office/drawing/2014/main" id="{D77CB93C-0E84-4C18-03B1-5076A2D5AF2B}"/>
+                <a16:creationId xmlns:a16="http://schemas.microsoft.com/office/drawing/2014/main" id="{95958B7F-9A58-69C4-0E82-CC879897E8FE}"/>
               </a:ext>
             </a:extLst>
           </p:cNvPr>
@@ -1496,7 +1496,7 @@
           <a:bodyPr/>
           <a:lstStyle/>
           <a:p>
-            <a:fld id="{1629C079-760B-492B-AA39-F868F36703E0}" type="datetimeFigureOut">
+            <a:fld id="{0B728AF7-151B-41DA-8187-545C3068964B}" type="datetimeFigureOut">
               <a:rPr lang="en-MY" smtClean="0"/>
               <a:t>25/9/2026</a:t>
             </a:fld>
@@ -1509,7 +1509,7 @@
           <p:cNvPr id="5" name="Footer Placeholder 4">
             <a:extLst>
               <a:ext uri="{FF2B5EF4-FFF2-40B4-BE49-F238E27FC236}">
-                <a16:creationId xmlns:a16="http://schemas.microsoft.com/office/drawing/2014/main" id="{0E8FA6B9-E0D7-1735-6F7B-B4FFB6AD7834}"/>
+                <a16:creationId xmlns:a16="http://schemas.microsoft.com/office/drawing/2014/main" id="{7D72ED1C-3E39-5280-E2C7-56ECD7B5683F}"/>
               </a:ext>
             </a:extLst>
           </p:cNvPr>
@@ -1534,7 +1534,7 @@
           <p:cNvPr id="6" name="Slide Number Placeholder 5">
             <a:extLst>
               <a:ext uri="{FF2B5EF4-FFF2-40B4-BE49-F238E27FC236}">
-                <a16:creationId xmlns:a16="http://schemas.microsoft.com/office/drawing/2014/main" id="{3CE40818-8EF4-996D-78D8-356E9756B7AF}"/>
+                <a16:creationId xmlns:a16="http://schemas.microsoft.com/office/drawing/2014/main" id="{96EFF88A-3B27-BBAC-2A3E-63138C911323}"/>
               </a:ext>
             </a:extLst>
           </p:cNvPr>
@@ -1550,7 +1550,7 @@
           <a:bodyPr/>
           <a:lstStyle/>
           <a:p>
-            <a:fld id="{401225AD-5018-4FF2-BEE1-3A2F5ADC240E}" type="slidenum">
+            <a:fld id="{1FCA58A0-11E7-4277-A1A1-0F6207FCBDA4}" type="slidenum">
               <a:rPr lang="en-MY" smtClean="0"/>
               <a:t>‹#›</a:t>
             </a:fld>
@@ -1561,7 +1561,7 @@
     </p:spTree>
     <p:extLst>
       <p:ext uri="{BB962C8B-B14F-4D97-AF65-F5344CB8AC3E}">
-        <p14:creationId xmlns:p14="http://schemas.microsoft.com/office/powerpoint/2010/main" val="659460419"/>
+        <p14:creationId xmlns:p14="http://schemas.microsoft.com/office/powerpoint/2010/main" val="4140653957"/>
       </p:ext>
     </p:extLst>
   </p:cSld>
@@ -1593,7 +1593,7 @@
           <p:cNvPr id="2" name="Title 1">
             <a:extLst>
               <a:ext uri="{FF2B5EF4-FFF2-40B4-BE49-F238E27FC236}">
-                <a16:creationId xmlns:a16="http://schemas.microsoft.com/office/drawing/2014/main" id="{6604D249-9CF6-56C8-DB16-2FC282DDE9E7}"/>
+                <a16:creationId xmlns:a16="http://schemas.microsoft.com/office/drawing/2014/main" id="{443D5711-E889-CAED-1A32-E19154AD0D20}"/>
               </a:ext>
             </a:extLst>
           </p:cNvPr>
@@ -1622,7 +1622,7 @@
           <p:cNvPr id="3" name="Vertical Text Placeholder 2">
             <a:extLst>
               <a:ext uri="{FF2B5EF4-FFF2-40B4-BE49-F238E27FC236}">
-                <a16:creationId xmlns:a16="http://schemas.microsoft.com/office/drawing/2014/main" id="{A17EDE2D-8103-7C71-831E-9C858613CE6B}"/>
+                <a16:creationId xmlns:a16="http://schemas.microsoft.com/office/drawing/2014/main" id="{A71DE4F0-BCF9-F277-889D-AF1852367156}"/>
               </a:ext>
             </a:extLst>
           </p:cNvPr>
@@ -1680,7 +1680,7 @@
           <p:cNvPr id="4" name="Date Placeholder 3">
             <a:extLst>
               <a:ext uri="{FF2B5EF4-FFF2-40B4-BE49-F238E27FC236}">
-                <a16:creationId xmlns:a16="http://schemas.microsoft.com/office/drawing/2014/main" id="{68490EED-6ABF-7E82-84AE-2D03380DE684}"/>
+                <a16:creationId xmlns:a16="http://schemas.microsoft.com/office/drawing/2014/main" id="{1C23D029-6AFD-8164-9777-678516B27C97}"/>
               </a:ext>
             </a:extLst>
           </p:cNvPr>
@@ -1696,7 +1696,7 @@
           <a:bodyPr/>
           <a:lstStyle/>
           <a:p>
-            <a:fld id="{1629C079-760B-492B-AA39-F868F36703E0}" type="datetimeFigureOut">
+            <a:fld id="{0B728AF7-151B-41DA-8187-545C3068964B}" type="datetimeFigureOut">
               <a:rPr lang="en-MY" smtClean="0"/>
               <a:t>25/9/2026</a:t>
             </a:fld>
@@ -1709,7 +1709,7 @@
           <p:cNvPr id="5" name="Footer Placeholder 4">
             <a:extLst>
               <a:ext uri="{FF2B5EF4-FFF2-40B4-BE49-F238E27FC236}">
-                <a16:creationId xmlns:a16="http://schemas.microsoft.com/office/drawing/2014/main" id="{8BE51E03-80EC-F97B-BCCC-3A13EACC6FD2}"/>
+                <a16:creationId xmlns:a16="http://schemas.microsoft.com/office/drawing/2014/main" id="{12549B82-5E74-4E0F-66CD-98242DF438D2}"/>
               </a:ext>
             </a:extLst>
           </p:cNvPr>
@@ -1734,7 +1734,7 @@
           <p:cNvPr id="6" name="Slide Number Placeholder 5">
             <a:extLst>
               <a:ext uri="{FF2B5EF4-FFF2-40B4-BE49-F238E27FC236}">
-                <a16:creationId xmlns:a16="http://schemas.microsoft.com/office/drawing/2014/main" id="{6E8E2A10-97B0-2770-1FFB-DD6246112BE0}"/>
+                <a16:creationId xmlns:a16="http://schemas.microsoft.com/office/drawing/2014/main" id="{B6F7CF31-712B-6A01-66E3-1308EE5D14EE}"/>
               </a:ext>
             </a:extLst>
           </p:cNvPr>
@@ -1750,7 +1750,7 @@
           <a:bodyPr/>
           <a:lstStyle/>
           <a:p>
-            <a:fld id="{401225AD-5018-4FF2-BEE1-3A2F5ADC240E}" type="slidenum">
+            <a:fld id="{1FCA58A0-11E7-4277-A1A1-0F6207FCBDA4}" type="slidenum">
               <a:rPr lang="en-MY" smtClean="0"/>
               <a:t>‹#›</a:t>
             </a:fld>
@@ -1761,7 +1761,7 @@
     </p:spTree>
     <p:extLst>
       <p:ext uri="{BB962C8B-B14F-4D97-AF65-F5344CB8AC3E}">
-        <p14:creationId xmlns:p14="http://schemas.microsoft.com/office/powerpoint/2010/main" val="952941451"/>
+        <p14:creationId xmlns:p14="http://schemas.microsoft.com/office/powerpoint/2010/main" val="2009397376"/>
       </p:ext>
     </p:extLst>
   </p:cSld>
@@ -1793,7 +1793,7 @@
           <p:cNvPr id="2" name="Vertical Title 1">
             <a:extLst>
               <a:ext uri="{FF2B5EF4-FFF2-40B4-BE49-F238E27FC236}">
-                <a16:creationId xmlns:a16="http://schemas.microsoft.com/office/drawing/2014/main" id="{07A98886-131F-41C6-EF3D-9949A3BCB1CB}"/>
+                <a16:creationId xmlns:a16="http://schemas.microsoft.com/office/drawing/2014/main" id="{2754BE30-AF0D-3C4A-EE9F-686EEBDD0B36}"/>
               </a:ext>
             </a:extLst>
           </p:cNvPr>
@@ -1827,7 +1827,7 @@
           <p:cNvPr id="3" name="Vertical Text Placeholder 2">
             <a:extLst>
               <a:ext uri="{FF2B5EF4-FFF2-40B4-BE49-F238E27FC236}">
-                <a16:creationId xmlns:a16="http://schemas.microsoft.com/office/drawing/2014/main" id="{6EACE62B-082E-67A5-5980-68422ECE6124}"/>
+                <a16:creationId xmlns:a16="http://schemas.microsoft.com/office/drawing/2014/main" id="{ABCDAF64-F0A3-EEAB-715C-9E8EC6600233}"/>
               </a:ext>
             </a:extLst>
           </p:cNvPr>
@@ -1890,7 +1890,7 @@
           <p:cNvPr id="4" name="Date Placeholder 3">
             <a:extLst>
               <a:ext uri="{FF2B5EF4-FFF2-40B4-BE49-F238E27FC236}">
-                <a16:creationId xmlns:a16="http://schemas.microsoft.com/office/drawing/2014/main" id="{23706679-3C03-0546-C1CC-DEF11A52A837}"/>
+                <a16:creationId xmlns:a16="http://schemas.microsoft.com/office/drawing/2014/main" id="{1E46317D-1622-E153-7929-6B7B02F47074}"/>
               </a:ext>
             </a:extLst>
           </p:cNvPr>
@@ -1906,7 +1906,7 @@
           <a:bodyPr/>
           <a:lstStyle/>
           <a:p>
-            <a:fld id="{1629C079-760B-492B-AA39-F868F36703E0}" type="datetimeFigureOut">
+            <a:fld id="{0B728AF7-151B-41DA-8187-545C3068964B}" type="datetimeFigureOut">
               <a:rPr lang="en-MY" smtClean="0"/>
               <a:t>25/9/2026</a:t>
             </a:fld>
@@ -1919,7 +1919,7 @@
           <p:cNvPr id="5" name="Footer Placeholder 4">
             <a:extLst>
               <a:ext uri="{FF2B5EF4-FFF2-40B4-BE49-F238E27FC236}">
-                <a16:creationId xmlns:a16="http://schemas.microsoft.com/office/drawing/2014/main" id="{143D5AF3-B966-25EE-F7C3-FE029841950D}"/>
+                <a16:creationId xmlns:a16="http://schemas.microsoft.com/office/drawing/2014/main" id="{ED5C305F-18FE-62F5-E5D7-6FF00D2B67FC}"/>
               </a:ext>
             </a:extLst>
           </p:cNvPr>
@@ -1944,7 +1944,7 @@
           <p:cNvPr id="6" name="Slide Number Placeholder 5">
             <a:extLst>
               <a:ext uri="{FF2B5EF4-FFF2-40B4-BE49-F238E27FC236}">
-                <a16:creationId xmlns:a16="http://schemas.microsoft.com/office/drawing/2014/main" id="{8FD5DFCD-1221-BCA7-A2AE-E8D1CCC656EB}"/>
+                <a16:creationId xmlns:a16="http://schemas.microsoft.com/office/drawing/2014/main" id="{153FD7ED-17D8-3110-6641-8F03AC8B8BFE}"/>
               </a:ext>
             </a:extLst>
           </p:cNvPr>
@@ -1960,7 +1960,7 @@
           <a:bodyPr/>
           <a:lstStyle/>
           <a:p>
-            <a:fld id="{401225AD-5018-4FF2-BEE1-3A2F5ADC240E}" type="slidenum">
+            <a:fld id="{1FCA58A0-11E7-4277-A1A1-0F6207FCBDA4}" type="slidenum">
               <a:rPr lang="en-MY" smtClean="0"/>
               <a:t>‹#›</a:t>
             </a:fld>
@@ -1971,7 +1971,7 @@
     </p:spTree>
     <p:extLst>
       <p:ext uri="{BB962C8B-B14F-4D97-AF65-F5344CB8AC3E}">
-        <p14:creationId xmlns:p14="http://schemas.microsoft.com/office/powerpoint/2010/main" val="3595980230"/>
+        <p14:creationId xmlns:p14="http://schemas.microsoft.com/office/powerpoint/2010/main" val="987735349"/>
       </p:ext>
     </p:extLst>
   </p:cSld>
@@ -2003,7 +2003,7 @@
           <p:cNvPr id="2" name="Title 1">
             <a:extLst>
               <a:ext uri="{FF2B5EF4-FFF2-40B4-BE49-F238E27FC236}">
-                <a16:creationId xmlns:a16="http://schemas.microsoft.com/office/drawing/2014/main" id="{8CEDF188-6687-F3CA-D945-542B3998B1E0}"/>
+                <a16:creationId xmlns:a16="http://schemas.microsoft.com/office/drawing/2014/main" id="{07FB89A9-403D-1A84-8FA8-9EF69BA5541F}"/>
               </a:ext>
             </a:extLst>
           </p:cNvPr>
@@ -2032,7 +2032,7 @@
           <p:cNvPr id="3" name="Content Placeholder 2">
             <a:extLst>
               <a:ext uri="{FF2B5EF4-FFF2-40B4-BE49-F238E27FC236}">
-                <a16:creationId xmlns:a16="http://schemas.microsoft.com/office/drawing/2014/main" id="{8CBC212B-E8F7-F239-BA1F-92C86B044482}"/>
+                <a16:creationId xmlns:a16="http://schemas.microsoft.com/office/drawing/2014/main" id="{F2AEB6B2-6572-84E2-220D-8A61275D0A5C}"/>
               </a:ext>
             </a:extLst>
           </p:cNvPr>
@@ -2090,7 +2090,7 @@
           <p:cNvPr id="4" name="Date Placeholder 3">
             <a:extLst>
               <a:ext uri="{FF2B5EF4-FFF2-40B4-BE49-F238E27FC236}">
-                <a16:creationId xmlns:a16="http://schemas.microsoft.com/office/drawing/2014/main" id="{3885A17E-EA99-45EF-3D8F-686477B80933}"/>
+                <a16:creationId xmlns:a16="http://schemas.microsoft.com/office/drawing/2014/main" id="{23E66C4D-4EE1-3E2A-3DA3-A8477A2431C0}"/>
               </a:ext>
             </a:extLst>
           </p:cNvPr>
@@ -2106,7 +2106,7 @@
           <a:bodyPr/>
           <a:lstStyle/>
           <a:p>
-            <a:fld id="{1629C079-760B-492B-AA39-F868F36703E0}" type="datetimeFigureOut">
+            <a:fld id="{0B728AF7-151B-41DA-8187-545C3068964B}" type="datetimeFigureOut">
               <a:rPr lang="en-MY" smtClean="0"/>
               <a:t>25/9/2026</a:t>
             </a:fld>
@@ -2119,7 +2119,7 @@
           <p:cNvPr id="5" name="Footer Placeholder 4">
             <a:extLst>
               <a:ext uri="{FF2B5EF4-FFF2-40B4-BE49-F238E27FC236}">
-                <a16:creationId xmlns:a16="http://schemas.microsoft.com/office/drawing/2014/main" id="{0B931EB1-FE4E-AAC0-3E55-EE35473C5804}"/>
+                <a16:creationId xmlns:a16="http://schemas.microsoft.com/office/drawing/2014/main" id="{6C1363DD-FF5E-72A5-86C3-EE1000D24314}"/>
               </a:ext>
             </a:extLst>
           </p:cNvPr>
@@ -2144,7 +2144,7 @@
           <p:cNvPr id="6" name="Slide Number Placeholder 5">
             <a:extLst>
               <a:ext uri="{FF2B5EF4-FFF2-40B4-BE49-F238E27FC236}">
-                <a16:creationId xmlns:a16="http://schemas.microsoft.com/office/drawing/2014/main" id="{12B2AC72-D483-0200-236D-99BAEB68167D}"/>
+                <a16:creationId xmlns:a16="http://schemas.microsoft.com/office/drawing/2014/main" id="{0E4DA0B7-680B-6CE2-1DF3-1DC9AC796E4F}"/>
               </a:ext>
             </a:extLst>
           </p:cNvPr>
@@ -2160,7 +2160,7 @@
           <a:bodyPr/>
           <a:lstStyle/>
           <a:p>
-            <a:fld id="{401225AD-5018-4FF2-BEE1-3A2F5ADC240E}" type="slidenum">
+            <a:fld id="{1FCA58A0-11E7-4277-A1A1-0F6207FCBDA4}" type="slidenum">
               <a:rPr lang="en-MY" smtClean="0"/>
               <a:t>‹#›</a:t>
             </a:fld>
@@ -2171,7 +2171,7 @@
     </p:spTree>
     <p:extLst>
       <p:ext uri="{BB962C8B-B14F-4D97-AF65-F5344CB8AC3E}">
-        <p14:creationId xmlns:p14="http://schemas.microsoft.com/office/powerpoint/2010/main" val="1606810707"/>
+        <p14:creationId xmlns:p14="http://schemas.microsoft.com/office/powerpoint/2010/main" val="1229776902"/>
       </p:ext>
     </p:extLst>
   </p:cSld>
@@ -2203,7 +2203,7 @@
           <p:cNvPr id="2" name="Title 1">
             <a:extLst>
               <a:ext uri="{FF2B5EF4-FFF2-40B4-BE49-F238E27FC236}">
-                <a16:creationId xmlns:a16="http://schemas.microsoft.com/office/drawing/2014/main" id="{600BC8CA-6C18-FFD8-CB7F-8FA5CCAAC1F8}"/>
+                <a16:creationId xmlns:a16="http://schemas.microsoft.com/office/drawing/2014/main" id="{0E330508-E82E-9084-39AC-8759F3EF5174}"/>
               </a:ext>
             </a:extLst>
           </p:cNvPr>
@@ -2241,7 +2241,7 @@
           <p:cNvPr id="3" name="Text Placeholder 2">
             <a:extLst>
               <a:ext uri="{FF2B5EF4-FFF2-40B4-BE49-F238E27FC236}">
-                <a16:creationId xmlns:a16="http://schemas.microsoft.com/office/drawing/2014/main" id="{FB5134B3-8338-1F0F-1439-9729FCBF1028}"/>
+                <a16:creationId xmlns:a16="http://schemas.microsoft.com/office/drawing/2014/main" id="{F31CB667-1674-0F09-0534-92C008A15925}"/>
               </a:ext>
             </a:extLst>
           </p:cNvPr>
@@ -2366,7 +2366,7 @@
           <p:cNvPr id="4" name="Date Placeholder 3">
             <a:extLst>
               <a:ext uri="{FF2B5EF4-FFF2-40B4-BE49-F238E27FC236}">
-                <a16:creationId xmlns:a16="http://schemas.microsoft.com/office/drawing/2014/main" id="{5E4ABB9F-C079-B813-1741-478EF1E433A6}"/>
+                <a16:creationId xmlns:a16="http://schemas.microsoft.com/office/drawing/2014/main" id="{33C6E793-8BE1-FFF1-F13D-ED3E382E599E}"/>
               </a:ext>
             </a:extLst>
           </p:cNvPr>
@@ -2382,7 +2382,7 @@
           <a:bodyPr/>
           <a:lstStyle/>
           <a:p>
-            <a:fld id="{1629C079-760B-492B-AA39-F868F36703E0}" type="datetimeFigureOut">
+            <a:fld id="{0B728AF7-151B-41DA-8187-545C3068964B}" type="datetimeFigureOut">
               <a:rPr lang="en-MY" smtClean="0"/>
               <a:t>25/9/2026</a:t>
             </a:fld>
@@ -2395,7 +2395,7 @@
           <p:cNvPr id="5" name="Footer Placeholder 4">
             <a:extLst>
               <a:ext uri="{FF2B5EF4-FFF2-40B4-BE49-F238E27FC236}">
-                <a16:creationId xmlns:a16="http://schemas.microsoft.com/office/drawing/2014/main" id="{7011AD07-01FD-E336-9B17-C4A5CBD3D958}"/>
+                <a16:creationId xmlns:a16="http://schemas.microsoft.com/office/drawing/2014/main" id="{5074D396-E554-AA1F-ED80-F798F442E5F6}"/>
               </a:ext>
             </a:extLst>
           </p:cNvPr>
@@ -2420,7 +2420,7 @@
           <p:cNvPr id="6" name="Slide Number Placeholder 5">
             <a:extLst>
               <a:ext uri="{FF2B5EF4-FFF2-40B4-BE49-F238E27FC236}">
-                <a16:creationId xmlns:a16="http://schemas.microsoft.com/office/drawing/2014/main" id="{BDBBBD3F-7B72-8FB9-F6F2-BF9C0F7A7D7D}"/>
+                <a16:creationId xmlns:a16="http://schemas.microsoft.com/office/drawing/2014/main" id="{F65C7AF9-02DD-BF72-C4A4-4B17BAB49E9F}"/>
               </a:ext>
             </a:extLst>
           </p:cNvPr>
@@ -2436,7 +2436,7 @@
           <a:bodyPr/>
           <a:lstStyle/>
           <a:p>
-            <a:fld id="{401225AD-5018-4FF2-BEE1-3A2F5ADC240E}" type="slidenum">
+            <a:fld id="{1FCA58A0-11E7-4277-A1A1-0F6207FCBDA4}" type="slidenum">
               <a:rPr lang="en-MY" smtClean="0"/>
               <a:t>‹#›</a:t>
             </a:fld>
@@ -2447,7 +2447,7 @@
     </p:spTree>
     <p:extLst>
       <p:ext uri="{BB962C8B-B14F-4D97-AF65-F5344CB8AC3E}">
-        <p14:creationId xmlns:p14="http://schemas.microsoft.com/office/powerpoint/2010/main" val="2598749790"/>
+        <p14:creationId xmlns:p14="http://schemas.microsoft.com/office/powerpoint/2010/main" val="740715857"/>
       </p:ext>
     </p:extLst>
   </p:cSld>
@@ -2479,7 +2479,7 @@
           <p:cNvPr id="2" name="Title 1">
             <a:extLst>
               <a:ext uri="{FF2B5EF4-FFF2-40B4-BE49-F238E27FC236}">
-                <a16:creationId xmlns:a16="http://schemas.microsoft.com/office/drawing/2014/main" id="{1E5518B5-8476-6D19-AD7E-3CF364EDF735}"/>
+                <a16:creationId xmlns:a16="http://schemas.microsoft.com/office/drawing/2014/main" id="{844B751A-6343-D60C-34C9-EE1BC02A59C0}"/>
               </a:ext>
             </a:extLst>
           </p:cNvPr>
@@ -2508,7 +2508,7 @@
           <p:cNvPr id="3" name="Content Placeholder 2">
             <a:extLst>
               <a:ext uri="{FF2B5EF4-FFF2-40B4-BE49-F238E27FC236}">
-                <a16:creationId xmlns:a16="http://schemas.microsoft.com/office/drawing/2014/main" id="{FE109F32-0752-F7F3-E8E3-AE6EF2BB534F}"/>
+                <a16:creationId xmlns:a16="http://schemas.microsoft.com/office/drawing/2014/main" id="{A6D77CDB-BCEF-D672-634E-AD323BB7BD14}"/>
               </a:ext>
             </a:extLst>
           </p:cNvPr>
@@ -2571,7 +2571,7 @@
           <p:cNvPr id="4" name="Content Placeholder 3">
             <a:extLst>
               <a:ext uri="{FF2B5EF4-FFF2-40B4-BE49-F238E27FC236}">
-                <a16:creationId xmlns:a16="http://schemas.microsoft.com/office/drawing/2014/main" id="{9978995B-6EEB-0F58-177D-07FB291E4E2E}"/>
+                <a16:creationId xmlns:a16="http://schemas.microsoft.com/office/drawing/2014/main" id="{79D465EA-5623-ED21-3B7C-69FF84B79126}"/>
               </a:ext>
             </a:extLst>
           </p:cNvPr>
@@ -2634,7 +2634,7 @@
           <p:cNvPr id="5" name="Date Placeholder 4">
             <a:extLst>
               <a:ext uri="{FF2B5EF4-FFF2-40B4-BE49-F238E27FC236}">
-                <a16:creationId xmlns:a16="http://schemas.microsoft.com/office/drawing/2014/main" id="{710443D9-03D1-4CDD-9035-A2AF2455CFA0}"/>
+                <a16:creationId xmlns:a16="http://schemas.microsoft.com/office/drawing/2014/main" id="{6F727508-9EB9-C7FB-ABA6-C5E44CCEFC7E}"/>
               </a:ext>
             </a:extLst>
           </p:cNvPr>
@@ -2650,7 +2650,7 @@
           <a:bodyPr/>
           <a:lstStyle/>
           <a:p>
-            <a:fld id="{1629C079-760B-492B-AA39-F868F36703E0}" type="datetimeFigureOut">
+            <a:fld id="{0B728AF7-151B-41DA-8187-545C3068964B}" type="datetimeFigureOut">
               <a:rPr lang="en-MY" smtClean="0"/>
               <a:t>25/9/2026</a:t>
             </a:fld>
@@ -2663,7 +2663,7 @@
           <p:cNvPr id="6" name="Footer Placeholder 5">
             <a:extLst>
               <a:ext uri="{FF2B5EF4-FFF2-40B4-BE49-F238E27FC236}">
-                <a16:creationId xmlns:a16="http://schemas.microsoft.com/office/drawing/2014/main" id="{D2BA1962-F30F-C7B7-1937-12CAD98C6C0C}"/>
+                <a16:creationId xmlns:a16="http://schemas.microsoft.com/office/drawing/2014/main" id="{E3C1D64D-9261-1CF9-C200-BA94C39358EF}"/>
               </a:ext>
             </a:extLst>
           </p:cNvPr>
@@ -2688,7 +2688,7 @@
           <p:cNvPr id="7" name="Slide Number Placeholder 6">
             <a:extLst>
               <a:ext uri="{FF2B5EF4-FFF2-40B4-BE49-F238E27FC236}">
-                <a16:creationId xmlns:a16="http://schemas.microsoft.com/office/drawing/2014/main" id="{F83C8CD4-B46C-6080-656F-E4D022044C30}"/>
+                <a16:creationId xmlns:a16="http://schemas.microsoft.com/office/drawing/2014/main" id="{6184FFF8-F8D0-01DA-9279-AC77D6587498}"/>
               </a:ext>
             </a:extLst>
           </p:cNvPr>
@@ -2704,7 +2704,7 @@
           <a:bodyPr/>
           <a:lstStyle/>
           <a:p>
-            <a:fld id="{401225AD-5018-4FF2-BEE1-3A2F5ADC240E}" type="slidenum">
+            <a:fld id="{1FCA58A0-11E7-4277-A1A1-0F6207FCBDA4}" type="slidenum">
               <a:rPr lang="en-MY" smtClean="0"/>
               <a:t>‹#›</a:t>
             </a:fld>
@@ -2715,7 +2715,7 @@
     </p:spTree>
     <p:extLst>
       <p:ext uri="{BB962C8B-B14F-4D97-AF65-F5344CB8AC3E}">
-        <p14:creationId xmlns:p14="http://schemas.microsoft.com/office/powerpoint/2010/main" val="1019621516"/>
+        <p14:creationId xmlns:p14="http://schemas.microsoft.com/office/powerpoint/2010/main" val="2989627836"/>
       </p:ext>
     </p:extLst>
   </p:cSld>
@@ -2747,7 +2747,7 @@
           <p:cNvPr id="2" name="Title 1">
             <a:extLst>
               <a:ext uri="{FF2B5EF4-FFF2-40B4-BE49-F238E27FC236}">
-                <a16:creationId xmlns:a16="http://schemas.microsoft.com/office/drawing/2014/main" id="{1DAAF164-F351-2250-F103-F39CAD6EE4D4}"/>
+                <a16:creationId xmlns:a16="http://schemas.microsoft.com/office/drawing/2014/main" id="{FE623CD1-FAA5-D6FB-26CB-66532367EA68}"/>
               </a:ext>
             </a:extLst>
           </p:cNvPr>
@@ -2781,7 +2781,7 @@
           <p:cNvPr id="3" name="Text Placeholder 2">
             <a:extLst>
               <a:ext uri="{FF2B5EF4-FFF2-40B4-BE49-F238E27FC236}">
-                <a16:creationId xmlns:a16="http://schemas.microsoft.com/office/drawing/2014/main" id="{92AFDAC9-A187-254D-83AF-245FBCCDD02F}"/>
+                <a16:creationId xmlns:a16="http://schemas.microsoft.com/office/drawing/2014/main" id="{476CF641-0728-00E8-0D0B-6DBA5B110BBA}"/>
               </a:ext>
             </a:extLst>
           </p:cNvPr>
@@ -2852,7 +2852,7 @@
           <p:cNvPr id="4" name="Content Placeholder 3">
             <a:extLst>
               <a:ext uri="{FF2B5EF4-FFF2-40B4-BE49-F238E27FC236}">
-                <a16:creationId xmlns:a16="http://schemas.microsoft.com/office/drawing/2014/main" id="{23784856-B424-B41D-DFD0-665E7C28590F}"/>
+                <a16:creationId xmlns:a16="http://schemas.microsoft.com/office/drawing/2014/main" id="{4A4F0887-8673-60CF-C243-3440B35C9083}"/>
               </a:ext>
             </a:extLst>
           </p:cNvPr>
@@ -2915,7 +2915,7 @@
           <p:cNvPr id="5" name="Text Placeholder 4">
             <a:extLst>
               <a:ext uri="{FF2B5EF4-FFF2-40B4-BE49-F238E27FC236}">
-                <a16:creationId xmlns:a16="http://schemas.microsoft.com/office/drawing/2014/main" id="{6731574F-37CD-A1D1-2FBC-695F8706F313}"/>
+                <a16:creationId xmlns:a16="http://schemas.microsoft.com/office/drawing/2014/main" id="{87E5BA1F-03B0-7924-6112-CB16CDCA5E8E}"/>
               </a:ext>
             </a:extLst>
           </p:cNvPr>
@@ -2986,7 +2986,7 @@
           <p:cNvPr id="6" name="Content Placeholder 5">
             <a:extLst>
               <a:ext uri="{FF2B5EF4-FFF2-40B4-BE49-F238E27FC236}">
-                <a16:creationId xmlns:a16="http://schemas.microsoft.com/office/drawing/2014/main" id="{DC5BCE46-DB77-6CEB-4D64-A4DB6CA53A31}"/>
+                <a16:creationId xmlns:a16="http://schemas.microsoft.com/office/drawing/2014/main" id="{7EE5288D-FC66-0104-A8FD-4A533BDEA2E6}"/>
               </a:ext>
             </a:extLst>
           </p:cNvPr>
@@ -3049,7 +3049,7 @@
           <p:cNvPr id="7" name="Date Placeholder 6">
             <a:extLst>
               <a:ext uri="{FF2B5EF4-FFF2-40B4-BE49-F238E27FC236}">
-                <a16:creationId xmlns:a16="http://schemas.microsoft.com/office/drawing/2014/main" id="{502D5D97-AB58-05A0-F0CE-33C2DA4F6B6E}"/>
+                <a16:creationId xmlns:a16="http://schemas.microsoft.com/office/drawing/2014/main" id="{1AD50269-9C0B-D678-D136-2F82A8FE3E6F}"/>
               </a:ext>
             </a:extLst>
           </p:cNvPr>
@@ -3065,7 +3065,7 @@
           <a:bodyPr/>
           <a:lstStyle/>
           <a:p>
-            <a:fld id="{1629C079-760B-492B-AA39-F868F36703E0}" type="datetimeFigureOut">
+            <a:fld id="{0B728AF7-151B-41DA-8187-545C3068964B}" type="datetimeFigureOut">
               <a:rPr lang="en-MY" smtClean="0"/>
               <a:t>25/9/2026</a:t>
             </a:fld>
@@ -3078,7 +3078,7 @@
           <p:cNvPr id="8" name="Footer Placeholder 7">
             <a:extLst>
               <a:ext uri="{FF2B5EF4-FFF2-40B4-BE49-F238E27FC236}">
-                <a16:creationId xmlns:a16="http://schemas.microsoft.com/office/drawing/2014/main" id="{2DE46222-4205-78B7-E1C0-80E36408ECB5}"/>
+                <a16:creationId xmlns:a16="http://schemas.microsoft.com/office/drawing/2014/main" id="{959FCC72-DD8F-F2EE-70D7-0E3A8DB30BE8}"/>
               </a:ext>
             </a:extLst>
           </p:cNvPr>
@@ -3103,7 +3103,7 @@
           <p:cNvPr id="9" name="Slide Number Placeholder 8">
             <a:extLst>
               <a:ext uri="{FF2B5EF4-FFF2-40B4-BE49-F238E27FC236}">
-                <a16:creationId xmlns:a16="http://schemas.microsoft.com/office/drawing/2014/main" id="{FA90E0D9-695C-F89A-5345-CEC5019C34FD}"/>
+                <a16:creationId xmlns:a16="http://schemas.microsoft.com/office/drawing/2014/main" id="{463904BF-0A78-33B4-B49C-21D4348549D0}"/>
               </a:ext>
             </a:extLst>
           </p:cNvPr>
@@ -3119,7 +3119,7 @@
           <a:bodyPr/>
           <a:lstStyle/>
           <a:p>
-            <a:fld id="{401225AD-5018-4FF2-BEE1-3A2F5ADC240E}" type="slidenum">
+            <a:fld id="{1FCA58A0-11E7-4277-A1A1-0F6207FCBDA4}" type="slidenum">
               <a:rPr lang="en-MY" smtClean="0"/>
               <a:t>‹#›</a:t>
             </a:fld>
@@ -3130,7 +3130,7 @@
     </p:spTree>
     <p:extLst>
       <p:ext uri="{BB962C8B-B14F-4D97-AF65-F5344CB8AC3E}">
-        <p14:creationId xmlns:p14="http://schemas.microsoft.com/office/powerpoint/2010/main" val="2517363448"/>
+        <p14:creationId xmlns:p14="http://schemas.microsoft.com/office/powerpoint/2010/main" val="3202504159"/>
       </p:ext>
     </p:extLst>
   </p:cSld>
@@ -3162,7 +3162,7 @@
           <p:cNvPr id="2" name="Title 1">
             <a:extLst>
               <a:ext uri="{FF2B5EF4-FFF2-40B4-BE49-F238E27FC236}">
-                <a16:creationId xmlns:a16="http://schemas.microsoft.com/office/drawing/2014/main" id="{7757E19D-1E84-172E-479B-1A1C86CC08B6}"/>
+                <a16:creationId xmlns:a16="http://schemas.microsoft.com/office/drawing/2014/main" id="{7A01D2EA-438A-93F9-2D91-95641AAA2025}"/>
               </a:ext>
             </a:extLst>
           </p:cNvPr>
@@ -3191,7 +3191,7 @@
           <p:cNvPr id="3" name="Date Placeholder 2">
             <a:extLst>
               <a:ext uri="{FF2B5EF4-FFF2-40B4-BE49-F238E27FC236}">
-                <a16:creationId xmlns:a16="http://schemas.microsoft.com/office/drawing/2014/main" id="{1893BC2A-E774-F1F4-1E32-431BEA632133}"/>
+                <a16:creationId xmlns:a16="http://schemas.microsoft.com/office/drawing/2014/main" id="{42B09537-3DF7-7B86-9A5E-7063DDC0F664}"/>
               </a:ext>
             </a:extLst>
           </p:cNvPr>
@@ -3207,7 +3207,7 @@
           <a:bodyPr/>
           <a:lstStyle/>
           <a:p>
-            <a:fld id="{1629C079-760B-492B-AA39-F868F36703E0}" type="datetimeFigureOut">
+            <a:fld id="{0B728AF7-151B-41DA-8187-545C3068964B}" type="datetimeFigureOut">
               <a:rPr lang="en-MY" smtClean="0"/>
               <a:t>25/9/2026</a:t>
             </a:fld>
@@ -3220,7 +3220,7 @@
           <p:cNvPr id="4" name="Footer Placeholder 3">
             <a:extLst>
               <a:ext uri="{FF2B5EF4-FFF2-40B4-BE49-F238E27FC236}">
-                <a16:creationId xmlns:a16="http://schemas.microsoft.com/office/drawing/2014/main" id="{FF7C8122-5063-3D78-8F71-8FC0C6D83380}"/>
+                <a16:creationId xmlns:a16="http://schemas.microsoft.com/office/drawing/2014/main" id="{9D31D48E-6C60-6C9C-4299-0AC453A9646E}"/>
               </a:ext>
             </a:extLst>
           </p:cNvPr>
@@ -3245,7 +3245,7 @@
           <p:cNvPr id="5" name="Slide Number Placeholder 4">
             <a:extLst>
               <a:ext uri="{FF2B5EF4-FFF2-40B4-BE49-F238E27FC236}">
-                <a16:creationId xmlns:a16="http://schemas.microsoft.com/office/drawing/2014/main" id="{103F3FC3-5418-04AF-EAB2-13C42C7E15CA}"/>
+                <a16:creationId xmlns:a16="http://schemas.microsoft.com/office/drawing/2014/main" id="{AAF692E5-ACAC-0013-6B85-7F4D17F7C47E}"/>
               </a:ext>
             </a:extLst>
           </p:cNvPr>
@@ -3261,7 +3261,7 @@
           <a:bodyPr/>
           <a:lstStyle/>
           <a:p>
-            <a:fld id="{401225AD-5018-4FF2-BEE1-3A2F5ADC240E}" type="slidenum">
+            <a:fld id="{1FCA58A0-11E7-4277-A1A1-0F6207FCBDA4}" type="slidenum">
               <a:rPr lang="en-MY" smtClean="0"/>
               <a:t>‹#›</a:t>
             </a:fld>
@@ -3272,7 +3272,7 @@
     </p:spTree>
     <p:extLst>
       <p:ext uri="{BB962C8B-B14F-4D97-AF65-F5344CB8AC3E}">
-        <p14:creationId xmlns:p14="http://schemas.microsoft.com/office/powerpoint/2010/main" val="3769239692"/>
+        <p14:creationId xmlns:p14="http://schemas.microsoft.com/office/powerpoint/2010/main" val="712375712"/>
       </p:ext>
     </p:extLst>
   </p:cSld>
@@ -3304,7 +3304,7 @@
           <p:cNvPr id="2" name="Date Placeholder 1">
             <a:extLst>
               <a:ext uri="{FF2B5EF4-FFF2-40B4-BE49-F238E27FC236}">
-                <a16:creationId xmlns:a16="http://schemas.microsoft.com/office/drawing/2014/main" id="{B9BC1DBA-602E-A6C3-0057-963AB824D8B0}"/>
+                <a16:creationId xmlns:a16="http://schemas.microsoft.com/office/drawing/2014/main" id="{8DDF73BE-18A8-041F-344D-32D3C69261F7}"/>
               </a:ext>
             </a:extLst>
           </p:cNvPr>
@@ -3320,7 +3320,7 @@
           <a:bodyPr/>
           <a:lstStyle/>
           <a:p>
-            <a:fld id="{1629C079-760B-492B-AA39-F868F36703E0}" type="datetimeFigureOut">
+            <a:fld id="{0B728AF7-151B-41DA-8187-545C3068964B}" type="datetimeFigureOut">
               <a:rPr lang="en-MY" smtClean="0"/>
               <a:t>25/9/2026</a:t>
             </a:fld>
@@ -3333,7 +3333,7 @@
           <p:cNvPr id="3" name="Footer Placeholder 2">
             <a:extLst>
               <a:ext uri="{FF2B5EF4-FFF2-40B4-BE49-F238E27FC236}">
-                <a16:creationId xmlns:a16="http://schemas.microsoft.com/office/drawing/2014/main" id="{AA22D0B2-FA83-F321-2886-7DA4AEF574DC}"/>
+                <a16:creationId xmlns:a16="http://schemas.microsoft.com/office/drawing/2014/main" id="{F13B6468-8FD7-C087-480A-B9C6E43C0139}"/>
               </a:ext>
             </a:extLst>
           </p:cNvPr>
@@ -3358,7 +3358,7 @@
           <p:cNvPr id="4" name="Slide Number Placeholder 3">
             <a:extLst>
               <a:ext uri="{FF2B5EF4-FFF2-40B4-BE49-F238E27FC236}">
-                <a16:creationId xmlns:a16="http://schemas.microsoft.com/office/drawing/2014/main" id="{56AB3C49-6822-6D07-A32C-B4473E475295}"/>
+                <a16:creationId xmlns:a16="http://schemas.microsoft.com/office/drawing/2014/main" id="{FBC35A87-960A-330E-2FF8-A12EB4E67087}"/>
               </a:ext>
             </a:extLst>
           </p:cNvPr>
@@ -3374,7 +3374,7 @@
           <a:bodyPr/>
           <a:lstStyle/>
           <a:p>
-            <a:fld id="{401225AD-5018-4FF2-BEE1-3A2F5ADC240E}" type="slidenum">
+            <a:fld id="{1FCA58A0-11E7-4277-A1A1-0F6207FCBDA4}" type="slidenum">
               <a:rPr lang="en-MY" smtClean="0"/>
               <a:t>‹#›</a:t>
             </a:fld>
@@ -3385,7 +3385,7 @@
     </p:spTree>
     <p:extLst>
       <p:ext uri="{BB962C8B-B14F-4D97-AF65-F5344CB8AC3E}">
-        <p14:creationId xmlns:p14="http://schemas.microsoft.com/office/powerpoint/2010/main" val="185389392"/>
+        <p14:creationId xmlns:p14="http://schemas.microsoft.com/office/powerpoint/2010/main" val="2226848961"/>
       </p:ext>
     </p:extLst>
   </p:cSld>
@@ -3417,7 +3417,7 @@
           <p:cNvPr id="2" name="Title 1">
             <a:extLst>
               <a:ext uri="{FF2B5EF4-FFF2-40B4-BE49-F238E27FC236}">
-                <a16:creationId xmlns:a16="http://schemas.microsoft.com/office/drawing/2014/main" id="{072167A8-EA05-95F3-F7F7-65732355A416}"/>
+                <a16:creationId xmlns:a16="http://schemas.microsoft.com/office/drawing/2014/main" id="{E735D647-DEB4-0C91-252E-487373853801}"/>
               </a:ext>
             </a:extLst>
           </p:cNvPr>
@@ -3455,7 +3455,7 @@
           <p:cNvPr id="3" name="Content Placeholder 2">
             <a:extLst>
               <a:ext uri="{FF2B5EF4-FFF2-40B4-BE49-F238E27FC236}">
-                <a16:creationId xmlns:a16="http://schemas.microsoft.com/office/drawing/2014/main" id="{0DF951C7-A8F8-E8D4-13C9-6805CCE27263}"/>
+                <a16:creationId xmlns:a16="http://schemas.microsoft.com/office/drawing/2014/main" id="{94F574DF-9B65-D023-DC35-914DD4E4942C}"/>
               </a:ext>
             </a:extLst>
           </p:cNvPr>
@@ -3546,7 +3546,7 @@
           <p:cNvPr id="4" name="Text Placeholder 3">
             <a:extLst>
               <a:ext uri="{FF2B5EF4-FFF2-40B4-BE49-F238E27FC236}">
-                <a16:creationId xmlns:a16="http://schemas.microsoft.com/office/drawing/2014/main" id="{77B228F6-8F6E-0832-49B4-049A1213DF54}"/>
+                <a16:creationId xmlns:a16="http://schemas.microsoft.com/office/drawing/2014/main" id="{05A21A5F-8683-C984-AE45-A94CD2442862}"/>
               </a:ext>
             </a:extLst>
           </p:cNvPr>
@@ -3617,7 +3617,7 @@
           <p:cNvPr id="5" name="Date Placeholder 4">
             <a:extLst>
               <a:ext uri="{FF2B5EF4-FFF2-40B4-BE49-F238E27FC236}">
-                <a16:creationId xmlns:a16="http://schemas.microsoft.com/office/drawing/2014/main" id="{135023E6-D1AE-0F63-6427-F81926281369}"/>
+                <a16:creationId xmlns:a16="http://schemas.microsoft.com/office/drawing/2014/main" id="{834345B0-0489-8D8F-52F9-1C90F5CD94D0}"/>
               </a:ext>
             </a:extLst>
           </p:cNvPr>
@@ -3633,7 +3633,7 @@
           <a:bodyPr/>
           <a:lstStyle/>
           <a:p>
-            <a:fld id="{1629C079-760B-492B-AA39-F868F36703E0}" type="datetimeFigureOut">
+            <a:fld id="{0B728AF7-151B-41DA-8187-545C3068964B}" type="datetimeFigureOut">
               <a:rPr lang="en-MY" smtClean="0"/>
               <a:t>25/9/2026</a:t>
             </a:fld>
@@ -3646,7 +3646,7 @@
           <p:cNvPr id="6" name="Footer Placeholder 5">
             <a:extLst>
               <a:ext uri="{FF2B5EF4-FFF2-40B4-BE49-F238E27FC236}">
-                <a16:creationId xmlns:a16="http://schemas.microsoft.com/office/drawing/2014/main" id="{0822F016-17F5-99D4-9547-54900833406F}"/>
+                <a16:creationId xmlns:a16="http://schemas.microsoft.com/office/drawing/2014/main" id="{A59D7F4C-FFBE-7324-AE82-41EF1B16CA8F}"/>
               </a:ext>
             </a:extLst>
           </p:cNvPr>
@@ -3671,7 +3671,7 @@
           <p:cNvPr id="7" name="Slide Number Placeholder 6">
             <a:extLst>
               <a:ext uri="{FF2B5EF4-FFF2-40B4-BE49-F238E27FC236}">
-                <a16:creationId xmlns:a16="http://schemas.microsoft.com/office/drawing/2014/main" id="{BFB795A3-311E-E173-18D3-46AFBCA72150}"/>
+                <a16:creationId xmlns:a16="http://schemas.microsoft.com/office/drawing/2014/main" id="{26F77ABD-52E9-BEDA-40B4-0DCC04EC4FB3}"/>
               </a:ext>
             </a:extLst>
           </p:cNvPr>
@@ -3687,7 +3687,7 @@
           <a:bodyPr/>
           <a:lstStyle/>
           <a:p>
-            <a:fld id="{401225AD-5018-4FF2-BEE1-3A2F5ADC240E}" type="slidenum">
+            <a:fld id="{1FCA58A0-11E7-4277-A1A1-0F6207FCBDA4}" type="slidenum">
               <a:rPr lang="en-MY" smtClean="0"/>
               <a:t>‹#›</a:t>
             </a:fld>
@@ -3698,7 +3698,7 @@
     </p:spTree>
     <p:extLst>
       <p:ext uri="{BB962C8B-B14F-4D97-AF65-F5344CB8AC3E}">
-        <p14:creationId xmlns:p14="http://schemas.microsoft.com/office/powerpoint/2010/main" val="3207665779"/>
+        <p14:creationId xmlns:p14="http://schemas.microsoft.com/office/powerpoint/2010/main" val="2437381007"/>
       </p:ext>
     </p:extLst>
   </p:cSld>
@@ -3730,7 +3730,7 @@
           <p:cNvPr id="2" name="Title 1">
             <a:extLst>
               <a:ext uri="{FF2B5EF4-FFF2-40B4-BE49-F238E27FC236}">
-                <a16:creationId xmlns:a16="http://schemas.microsoft.com/office/drawing/2014/main" id="{CFC3465B-D82A-8CC8-9640-B0EFC80AAB95}"/>
+                <a16:creationId xmlns:a16="http://schemas.microsoft.com/office/drawing/2014/main" id="{B5A4E82F-4245-0C46-3F1B-BE58113F5799}"/>
               </a:ext>
             </a:extLst>
           </p:cNvPr>
@@ -3768,7 +3768,7 @@
           <p:cNvPr id="3" name="Picture Placeholder 2">
             <a:extLst>
               <a:ext uri="{FF2B5EF4-FFF2-40B4-BE49-F238E27FC236}">
-                <a16:creationId xmlns:a16="http://schemas.microsoft.com/office/drawing/2014/main" id="{2A6A33FC-EA31-53B4-ECCD-C6860D041BC7}"/>
+                <a16:creationId xmlns:a16="http://schemas.microsoft.com/office/drawing/2014/main" id="{3E7EFC82-8034-2584-01E1-6726F8B1E921}"/>
               </a:ext>
             </a:extLst>
           </p:cNvPr>
@@ -3835,7 +3835,7 @@
           <p:cNvPr id="4" name="Text Placeholder 3">
             <a:extLst>
               <a:ext uri="{FF2B5EF4-FFF2-40B4-BE49-F238E27FC236}">
-                <a16:creationId xmlns:a16="http://schemas.microsoft.com/office/drawing/2014/main" id="{12BFFA22-40FB-B628-7787-F386060717EE}"/>
+                <a16:creationId xmlns:a16="http://schemas.microsoft.com/office/drawing/2014/main" id="{3EA401B4-16AC-98DD-9789-DBD3920FC865}"/>
               </a:ext>
             </a:extLst>
           </p:cNvPr>
@@ -3906,7 +3906,7 @@
           <p:cNvPr id="5" name="Date Placeholder 4">
             <a:extLst>
               <a:ext uri="{FF2B5EF4-FFF2-40B4-BE49-F238E27FC236}">
-                <a16:creationId xmlns:a16="http://schemas.microsoft.com/office/drawing/2014/main" id="{F9A8B39B-E356-FFEF-3DE4-4E40862FAC9B}"/>
+                <a16:creationId xmlns:a16="http://schemas.microsoft.com/office/drawing/2014/main" id="{0DBA10CB-8164-C7EB-4DA7-EF7FC262AA1A}"/>
               </a:ext>
             </a:extLst>
           </p:cNvPr>
@@ -3922,7 +3922,7 @@
           <a:bodyPr/>
           <a:lstStyle/>
           <a:p>
-            <a:fld id="{1629C079-760B-492B-AA39-F868F36703E0}" type="datetimeFigureOut">
+            <a:fld id="{0B728AF7-151B-41DA-8187-545C3068964B}" type="datetimeFigureOut">
               <a:rPr lang="en-MY" smtClean="0"/>
               <a:t>25/9/2026</a:t>
             </a:fld>
@@ -3935,7 +3935,7 @@
           <p:cNvPr id="6" name="Footer Placeholder 5">
             <a:extLst>
               <a:ext uri="{FF2B5EF4-FFF2-40B4-BE49-F238E27FC236}">
-                <a16:creationId xmlns:a16="http://schemas.microsoft.com/office/drawing/2014/main" id="{CDA1833F-5E4C-7C7C-B69C-60729E884930}"/>
+                <a16:creationId xmlns:a16="http://schemas.microsoft.com/office/drawing/2014/main" id="{DAEB6BD9-4E31-F73D-2FA8-7211A394D6FC}"/>
               </a:ext>
             </a:extLst>
           </p:cNvPr>
@@ -3960,7 +3960,7 @@
           <p:cNvPr id="7" name="Slide Number Placeholder 6">
             <a:extLst>
               <a:ext uri="{FF2B5EF4-FFF2-40B4-BE49-F238E27FC236}">
-                <a16:creationId xmlns:a16="http://schemas.microsoft.com/office/drawing/2014/main" id="{9E5A3F58-66F4-99CC-D268-7AF2A3B68033}"/>
+                <a16:creationId xmlns:a16="http://schemas.microsoft.com/office/drawing/2014/main" id="{C21E74BF-77A0-0972-CCFC-00E7FA6968DF}"/>
               </a:ext>
             </a:extLst>
           </p:cNvPr>
@@ -3976,7 +3976,7 @@
           <a:bodyPr/>
           <a:lstStyle/>
           <a:p>
-            <a:fld id="{401225AD-5018-4FF2-BEE1-3A2F5ADC240E}" type="slidenum">
+            <a:fld id="{1FCA58A0-11E7-4277-A1A1-0F6207FCBDA4}" type="slidenum">
               <a:rPr lang="en-MY" smtClean="0"/>
               <a:t>‹#›</a:t>
             </a:fld>
@@ -3987,7 +3987,7 @@
     </p:spTree>
     <p:extLst>
       <p:ext uri="{BB962C8B-B14F-4D97-AF65-F5344CB8AC3E}">
-        <p14:creationId xmlns:p14="http://schemas.microsoft.com/office/powerpoint/2010/main" val="3078450830"/>
+        <p14:creationId xmlns:p14="http://schemas.microsoft.com/office/powerpoint/2010/main" val="3954144496"/>
       </p:ext>
     </p:extLst>
   </p:cSld>
@@ -4024,7 +4024,7 @@
           <p:cNvPr id="2" name="Title Placeholder 1">
             <a:extLst>
               <a:ext uri="{FF2B5EF4-FFF2-40B4-BE49-F238E27FC236}">
-                <a16:creationId xmlns:a16="http://schemas.microsoft.com/office/drawing/2014/main" id="{E7AC380E-F3C5-2764-3F70-2B48005ABCE6}"/>
+                <a16:creationId xmlns:a16="http://schemas.microsoft.com/office/drawing/2014/main" id="{0027F31C-07EE-7F85-9907-974AB939F7EC}"/>
               </a:ext>
             </a:extLst>
           </p:cNvPr>
@@ -4063,7 +4063,7 @@
           <p:cNvPr id="3" name="Text Placeholder 2">
             <a:extLst>
               <a:ext uri="{FF2B5EF4-FFF2-40B4-BE49-F238E27FC236}">
-                <a16:creationId xmlns:a16="http://schemas.microsoft.com/office/drawing/2014/main" id="{34D2BB84-ABDA-3DF6-AEB8-0CF1D2F2776D}"/>
+                <a16:creationId xmlns:a16="http://schemas.microsoft.com/office/drawing/2014/main" id="{B0F30AAC-7A60-3B63-2F8A-12C3E8C5E65E}"/>
               </a:ext>
             </a:extLst>
           </p:cNvPr>
@@ -4131,7 +4131,7 @@
           <p:cNvPr id="4" name="Date Placeholder 3">
             <a:extLst>
               <a:ext uri="{FF2B5EF4-FFF2-40B4-BE49-F238E27FC236}">
-                <a16:creationId xmlns:a16="http://schemas.microsoft.com/office/drawing/2014/main" id="{BC506EE7-65CD-2BF5-6DED-2285C48E1F7E}"/>
+                <a16:creationId xmlns:a16="http://schemas.microsoft.com/office/drawing/2014/main" id="{E532356B-A5D5-99CA-B909-9859D5311845}"/>
               </a:ext>
             </a:extLst>
           </p:cNvPr>
@@ -4165,7 +4165,7 @@
             </a:lvl1pPr>
           </a:lstStyle>
           <a:p>
-            <a:fld id="{1629C079-760B-492B-AA39-F868F36703E0}" type="datetimeFigureOut">
+            <a:fld id="{0B728AF7-151B-41DA-8187-545C3068964B}" type="datetimeFigureOut">
               <a:rPr lang="en-MY" smtClean="0"/>
               <a:t>25/9/2026</a:t>
             </a:fld>
@@ -4178,7 +4178,7 @@
           <p:cNvPr id="5" name="Footer Placeholder 4">
             <a:extLst>
               <a:ext uri="{FF2B5EF4-FFF2-40B4-BE49-F238E27FC236}">
-                <a16:creationId xmlns:a16="http://schemas.microsoft.com/office/drawing/2014/main" id="{9DDEE5FA-28E2-3478-EE0E-6E30450A83B6}"/>
+                <a16:creationId xmlns:a16="http://schemas.microsoft.com/office/drawing/2014/main" id="{62FA543B-2B55-E124-EDC2-E779F73605FD}"/>
               </a:ext>
             </a:extLst>
           </p:cNvPr>
@@ -4221,7 +4221,7 @@
           <p:cNvPr id="6" name="Slide Number Placeholder 5">
             <a:extLst>
               <a:ext uri="{FF2B5EF4-FFF2-40B4-BE49-F238E27FC236}">
-                <a16:creationId xmlns:a16="http://schemas.microsoft.com/office/drawing/2014/main" id="{FC8DF13F-E8C8-3EA2-047F-D15C4ACD98F6}"/>
+                <a16:creationId xmlns:a16="http://schemas.microsoft.com/office/drawing/2014/main" id="{4776DCCA-E041-72E4-D339-A039E356B1D3}"/>
               </a:ext>
             </a:extLst>
           </p:cNvPr>
@@ -4255,7 +4255,7 @@
             </a:lvl1pPr>
           </a:lstStyle>
           <a:p>
-            <a:fld id="{401225AD-5018-4FF2-BEE1-3A2F5ADC240E}" type="slidenum">
+            <a:fld id="{1FCA58A0-11E7-4277-A1A1-0F6207FCBDA4}" type="slidenum">
               <a:rPr lang="en-MY" smtClean="0"/>
               <a:t>‹#›</a:t>
             </a:fld>
@@ -4266,7 +4266,7 @@
     </p:spTree>
     <p:extLst>
       <p:ext uri="{BB962C8B-B14F-4D97-AF65-F5344CB8AC3E}">
-        <p14:creationId xmlns:p14="http://schemas.microsoft.com/office/powerpoint/2010/main" val="3555373295"/>
+        <p14:creationId xmlns:p14="http://schemas.microsoft.com/office/powerpoint/2010/main" val="4007215372"/>
       </p:ext>
     </p:extLst>
   </p:cSld>
@@ -4597,7 +4597,7 @@
           <p:cNvPr id="2" name="TextBox 1">
             <a:extLst>
               <a:ext uri="{FF2B5EF4-FFF2-40B4-BE49-F238E27FC236}">
-                <a16:creationId xmlns:a16="http://schemas.microsoft.com/office/drawing/2014/main" id="{C0ABA713-0A1E-9FE4-2C90-A8CF686A79D2}"/>
+                <a16:creationId xmlns:a16="http://schemas.microsoft.com/office/drawing/2014/main" id="{EB12030B-DEF6-B366-D679-99E47DE6051B}"/>
               </a:ext>
             </a:extLst>
           </p:cNvPr>
@@ -4637,7 +4637,7 @@
           <p:cNvPr id="3" name="TextBox 2">
             <a:extLst>
               <a:ext uri="{FF2B5EF4-FFF2-40B4-BE49-F238E27FC236}">
-                <a16:creationId xmlns:a16="http://schemas.microsoft.com/office/drawing/2014/main" id="{20B793B3-1F95-4511-E1FD-4A179E296ECF}"/>
+                <a16:creationId xmlns:a16="http://schemas.microsoft.com/office/drawing/2014/main" id="{E90C1EDB-B7FF-0413-8D9F-C16C942FC594}"/>
               </a:ext>
             </a:extLst>
           </p:cNvPr>
@@ -4683,7 +4683,7 @@
           <p:cNvPr id="4" name="TextBox 3">
             <a:extLst>
               <a:ext uri="{FF2B5EF4-FFF2-40B4-BE49-F238E27FC236}">
-                <a16:creationId xmlns:a16="http://schemas.microsoft.com/office/drawing/2014/main" id="{F94F2D66-6201-BD1B-C8B0-6202A2AE17F8}"/>
+                <a16:creationId xmlns:a16="http://schemas.microsoft.com/office/drawing/2014/main" id="{0BBFF565-FB81-0364-7635-87E4452EE2A6}"/>
               </a:ext>
             </a:extLst>
           </p:cNvPr>
@@ -4729,7 +4729,7 @@
           <p:cNvPr id="5" name="TextBox 4">
             <a:extLst>
               <a:ext uri="{FF2B5EF4-FFF2-40B4-BE49-F238E27FC236}">
-                <a16:creationId xmlns:a16="http://schemas.microsoft.com/office/drawing/2014/main" id="{FAFE683C-B631-DF10-6E98-C61447843D1C}"/>
+                <a16:creationId xmlns:a16="http://schemas.microsoft.com/office/drawing/2014/main" id="{927FC9AB-507C-95BB-EEFF-2A832BED6250}"/>
               </a:ext>
             </a:extLst>
           </p:cNvPr>
@@ -4775,7 +4775,7 @@
           <p:cNvPr id="6" name="TextBox 5">
             <a:extLst>
               <a:ext uri="{FF2B5EF4-FFF2-40B4-BE49-F238E27FC236}">
-                <a16:creationId xmlns:a16="http://schemas.microsoft.com/office/drawing/2014/main" id="{18F05362-02DB-D84C-1465-881C3AD3D53F}"/>
+                <a16:creationId xmlns:a16="http://schemas.microsoft.com/office/drawing/2014/main" id="{13FA56DB-1A8C-93FC-9316-F883291A5E5A}"/>
               </a:ext>
             </a:extLst>
           </p:cNvPr>
@@ -4815,7 +4815,7 @@
           <p:cNvPr id="7" name="TextBox 6">
             <a:extLst>
               <a:ext uri="{FF2B5EF4-FFF2-40B4-BE49-F238E27FC236}">
-                <a16:creationId xmlns:a16="http://schemas.microsoft.com/office/drawing/2014/main" id="{7713EA1E-E223-9E9D-6ABA-DF82B2BC7EE1}"/>
+                <a16:creationId xmlns:a16="http://schemas.microsoft.com/office/drawing/2014/main" id="{8CE0E2D9-7C24-D8F2-B0EF-E4D395F890C3}"/>
               </a:ext>
             </a:extLst>
           </p:cNvPr>
@@ -4860,7 +4860,7 @@
     </p:spTree>
     <p:extLst>
       <p:ext uri="{BB962C8B-B14F-4D97-AF65-F5344CB8AC3E}">
-        <p14:creationId xmlns:p14="http://schemas.microsoft.com/office/powerpoint/2010/main" val="308047331"/>
+        <p14:creationId xmlns:p14="http://schemas.microsoft.com/office/powerpoint/2010/main" val="1756442295"/>
       </p:ext>
     </p:extLst>
   </p:cSld>
@@ -4900,7 +4900,7 @@
           <p:cNvPr id="2" name="TextBox 1">
             <a:extLst>
               <a:ext uri="{FF2B5EF4-FFF2-40B4-BE49-F238E27FC236}">
-                <a16:creationId xmlns:a16="http://schemas.microsoft.com/office/drawing/2014/main" id="{A916DAAA-427D-0E89-0E1A-7758929C91BE}"/>
+                <a16:creationId xmlns:a16="http://schemas.microsoft.com/office/drawing/2014/main" id="{E856E8A7-D226-33B3-3E7A-938EF229D2E8}"/>
               </a:ext>
             </a:extLst>
           </p:cNvPr>
@@ -4947,7 +4947,7 @@
           <p:cNvPr id="3" name="TextBox 2">
             <a:extLst>
               <a:ext uri="{FF2B5EF4-FFF2-40B4-BE49-F238E27FC236}">
-                <a16:creationId xmlns:a16="http://schemas.microsoft.com/office/drawing/2014/main" id="{1196E1CD-ECE2-3172-0D6E-C2EA6832B337}"/>
+                <a16:creationId xmlns:a16="http://schemas.microsoft.com/office/drawing/2014/main" id="{FAEE067C-CB3F-1262-64A3-24511DD9B3A3}"/>
               </a:ext>
             </a:extLst>
           </p:cNvPr>
@@ -4988,7 +4988,7 @@
           <p:cNvPr id="4" name="TextBox 3">
             <a:extLst>
               <a:ext uri="{FF2B5EF4-FFF2-40B4-BE49-F238E27FC236}">
-                <a16:creationId xmlns:a16="http://schemas.microsoft.com/office/drawing/2014/main" id="{1D8CE974-8E68-BCA5-7D1D-9AA6CBF97A13}"/>
+                <a16:creationId xmlns:a16="http://schemas.microsoft.com/office/drawing/2014/main" id="{CFDF8A85-FF2E-A99C-CBAC-E163D16A75C8}"/>
               </a:ext>
             </a:extLst>
           </p:cNvPr>
@@ -5027,7 +5027,7 @@
     </p:spTree>
     <p:extLst>
       <p:ext uri="{BB962C8B-B14F-4D97-AF65-F5344CB8AC3E}">
-        <p14:creationId xmlns:p14="http://schemas.microsoft.com/office/powerpoint/2010/main" val="167917818"/>
+        <p14:creationId xmlns:p14="http://schemas.microsoft.com/office/powerpoint/2010/main" val="3182102028"/>
       </p:ext>
     </p:extLst>
   </p:cSld>
@@ -5067,7 +5067,7 @@
           <p:cNvPr id="2" name="TextBox 1">
             <a:extLst>
               <a:ext uri="{FF2B5EF4-FFF2-40B4-BE49-F238E27FC236}">
-                <a16:creationId xmlns:a16="http://schemas.microsoft.com/office/drawing/2014/main" id="{4D22FE6F-5CD8-DA18-7326-E432B47717B0}"/>
+                <a16:creationId xmlns:a16="http://schemas.microsoft.com/office/drawing/2014/main" id="{AF7D65C0-698E-92CA-052B-9518BDABB3C8}"/>
               </a:ext>
             </a:extLst>
           </p:cNvPr>
@@ -5113,7 +5113,7 @@
           <p:cNvPr id="3" name="Rectangle: Rounded Corners 2">
             <a:extLst>
               <a:ext uri="{FF2B5EF4-FFF2-40B4-BE49-F238E27FC236}">
-                <a16:creationId xmlns:a16="http://schemas.microsoft.com/office/drawing/2014/main" id="{38065C17-ECA9-708A-3E50-FC61B1A91AA9}"/>
+                <a16:creationId xmlns:a16="http://schemas.microsoft.com/office/drawing/2014/main" id="{93C9C682-1327-76E8-4AAB-D6608E32BAAD}"/>
               </a:ext>
             </a:extLst>
           </p:cNvPr>
@@ -5183,7 +5183,7 @@
           <p:cNvPr id="4" name="Oval 3">
             <a:extLst>
               <a:ext uri="{FF2B5EF4-FFF2-40B4-BE49-F238E27FC236}">
-                <a16:creationId xmlns:a16="http://schemas.microsoft.com/office/drawing/2014/main" id="{5A9B49E2-D54A-4DB4-E4ED-6F5C85939E8A}"/>
+                <a16:creationId xmlns:a16="http://schemas.microsoft.com/office/drawing/2014/main" id="{BDDFC3E4-4ABD-8B61-E575-CA0CCFC25B17}"/>
               </a:ext>
             </a:extLst>
           </p:cNvPr>
@@ -5259,7 +5259,7 @@
           <p:cNvPr id="5" name="TextBox 4">
             <a:extLst>
               <a:ext uri="{FF2B5EF4-FFF2-40B4-BE49-F238E27FC236}">
-                <a16:creationId xmlns:a16="http://schemas.microsoft.com/office/drawing/2014/main" id="{74728F7E-7CB1-B1E9-0A68-C42A3A24D2C2}"/>
+                <a16:creationId xmlns:a16="http://schemas.microsoft.com/office/drawing/2014/main" id="{2A6E10EA-5843-35AB-A529-3BF5492439CB}"/>
               </a:ext>
             </a:extLst>
           </p:cNvPr>
@@ -5299,7 +5299,7 @@
           <p:cNvPr id="6" name="TextBox 5">
             <a:extLst>
               <a:ext uri="{FF2B5EF4-FFF2-40B4-BE49-F238E27FC236}">
-                <a16:creationId xmlns:a16="http://schemas.microsoft.com/office/drawing/2014/main" id="{BF3E86CA-B53D-06AE-BF0E-02F03E4F0A54}"/>
+                <a16:creationId xmlns:a16="http://schemas.microsoft.com/office/drawing/2014/main" id="{9E3C2AEA-59C0-3A91-B89F-F35EBF182E14}"/>
               </a:ext>
             </a:extLst>
           </p:cNvPr>
@@ -5339,7 +5339,7 @@
           <p:cNvPr id="7" name="Rectangle: Rounded Corners 6">
             <a:extLst>
               <a:ext uri="{FF2B5EF4-FFF2-40B4-BE49-F238E27FC236}">
-                <a16:creationId xmlns:a16="http://schemas.microsoft.com/office/drawing/2014/main" id="{75A39B7A-290C-1F8F-8BDC-65FD133638D6}"/>
+                <a16:creationId xmlns:a16="http://schemas.microsoft.com/office/drawing/2014/main" id="{9B3167F5-45BC-C832-371F-CEEE87AA64F0}"/>
               </a:ext>
             </a:extLst>
           </p:cNvPr>
@@ -5409,7 +5409,7 @@
           <p:cNvPr id="8" name="Oval 7">
             <a:extLst>
               <a:ext uri="{FF2B5EF4-FFF2-40B4-BE49-F238E27FC236}">
-                <a16:creationId xmlns:a16="http://schemas.microsoft.com/office/drawing/2014/main" id="{7F30117F-47D3-7912-6181-212410DAFDB0}"/>
+                <a16:creationId xmlns:a16="http://schemas.microsoft.com/office/drawing/2014/main" id="{6189B305-5032-4679-363C-59FD368A56FB}"/>
               </a:ext>
             </a:extLst>
           </p:cNvPr>
@@ -5485,7 +5485,7 @@
           <p:cNvPr id="9" name="TextBox 8">
             <a:extLst>
               <a:ext uri="{FF2B5EF4-FFF2-40B4-BE49-F238E27FC236}">
-                <a16:creationId xmlns:a16="http://schemas.microsoft.com/office/drawing/2014/main" id="{43EF2275-3D73-BABA-247C-8085FA730200}"/>
+                <a16:creationId xmlns:a16="http://schemas.microsoft.com/office/drawing/2014/main" id="{A9AB0024-9038-FBB4-90FF-29DB3D8AD400}"/>
               </a:ext>
             </a:extLst>
           </p:cNvPr>
@@ -5525,7 +5525,7 @@
           <p:cNvPr id="10" name="TextBox 9">
             <a:extLst>
               <a:ext uri="{FF2B5EF4-FFF2-40B4-BE49-F238E27FC236}">
-                <a16:creationId xmlns:a16="http://schemas.microsoft.com/office/drawing/2014/main" id="{A0FD02E2-F969-522F-C01D-37E07EB1FAAC}"/>
+                <a16:creationId xmlns:a16="http://schemas.microsoft.com/office/drawing/2014/main" id="{C31AFCBF-9B7F-1F5D-3342-CE6A9ED382EB}"/>
               </a:ext>
             </a:extLst>
           </p:cNvPr>
@@ -5571,7 +5571,7 @@
           <p:cNvPr id="11" name="Rectangle: Rounded Corners 10">
             <a:extLst>
               <a:ext uri="{FF2B5EF4-FFF2-40B4-BE49-F238E27FC236}">
-                <a16:creationId xmlns:a16="http://schemas.microsoft.com/office/drawing/2014/main" id="{0CD0EABA-19F1-FA5F-6193-200D9340F3C2}"/>
+                <a16:creationId xmlns:a16="http://schemas.microsoft.com/office/drawing/2014/main" id="{09A2B72A-4E8C-30E8-73A9-08EA4CE730A8}"/>
               </a:ext>
             </a:extLst>
           </p:cNvPr>
@@ -5641,7 +5641,7 @@
           <p:cNvPr id="12" name="Oval 11">
             <a:extLst>
               <a:ext uri="{FF2B5EF4-FFF2-40B4-BE49-F238E27FC236}">
-                <a16:creationId xmlns:a16="http://schemas.microsoft.com/office/drawing/2014/main" id="{92D0615F-0F26-C9DD-185A-EAC663EF1692}"/>
+                <a16:creationId xmlns:a16="http://schemas.microsoft.com/office/drawing/2014/main" id="{C5A03BD7-CB24-6C2C-0B71-7F42985EB686}"/>
               </a:ext>
             </a:extLst>
           </p:cNvPr>
@@ -5717,7 +5717,7 @@
           <p:cNvPr id="13" name="TextBox 12">
             <a:extLst>
               <a:ext uri="{FF2B5EF4-FFF2-40B4-BE49-F238E27FC236}">
-                <a16:creationId xmlns:a16="http://schemas.microsoft.com/office/drawing/2014/main" id="{F346EFD5-F92F-DD84-6762-42A14BD13715}"/>
+                <a16:creationId xmlns:a16="http://schemas.microsoft.com/office/drawing/2014/main" id="{F92F89F5-3A58-AB56-D14E-D9603B3ED5D8}"/>
               </a:ext>
             </a:extLst>
           </p:cNvPr>
@@ -5757,7 +5757,7 @@
           <p:cNvPr id="14" name="TextBox 13">
             <a:extLst>
               <a:ext uri="{FF2B5EF4-FFF2-40B4-BE49-F238E27FC236}">
-                <a16:creationId xmlns:a16="http://schemas.microsoft.com/office/drawing/2014/main" id="{AAA90219-649F-F25C-F04B-21D470B6E094}"/>
+                <a16:creationId xmlns:a16="http://schemas.microsoft.com/office/drawing/2014/main" id="{33581A7C-7686-E00B-3B72-2DD64DDAC20D}"/>
               </a:ext>
             </a:extLst>
           </p:cNvPr>
@@ -5803,7 +5803,7 @@
           <p:cNvPr id="15" name="Rectangle: Rounded Corners 14">
             <a:extLst>
               <a:ext uri="{FF2B5EF4-FFF2-40B4-BE49-F238E27FC236}">
-                <a16:creationId xmlns:a16="http://schemas.microsoft.com/office/drawing/2014/main" id="{0318B4CA-20D0-5D09-F42E-A2F1FAE240B0}"/>
+                <a16:creationId xmlns:a16="http://schemas.microsoft.com/office/drawing/2014/main" id="{31B0776E-2313-0A39-F15F-EA93D85F7740}"/>
               </a:ext>
             </a:extLst>
           </p:cNvPr>
@@ -5873,7 +5873,7 @@
           <p:cNvPr id="16" name="Oval 15">
             <a:extLst>
               <a:ext uri="{FF2B5EF4-FFF2-40B4-BE49-F238E27FC236}">
-                <a16:creationId xmlns:a16="http://schemas.microsoft.com/office/drawing/2014/main" id="{367E418D-C19F-F964-EE5B-0C7ED4EE3720}"/>
+                <a16:creationId xmlns:a16="http://schemas.microsoft.com/office/drawing/2014/main" id="{49FBD91A-3059-CC9A-9B97-F7EAFF60B97D}"/>
               </a:ext>
             </a:extLst>
           </p:cNvPr>
@@ -5949,7 +5949,7 @@
           <p:cNvPr id="17" name="TextBox 16">
             <a:extLst>
               <a:ext uri="{FF2B5EF4-FFF2-40B4-BE49-F238E27FC236}">
-                <a16:creationId xmlns:a16="http://schemas.microsoft.com/office/drawing/2014/main" id="{16064A78-7F99-CDD7-94DA-D63873389D2A}"/>
+                <a16:creationId xmlns:a16="http://schemas.microsoft.com/office/drawing/2014/main" id="{40C2087B-47FE-C68C-BFAB-BBD5B070B01D}"/>
               </a:ext>
             </a:extLst>
           </p:cNvPr>
@@ -5989,7 +5989,7 @@
           <p:cNvPr id="18" name="TextBox 17">
             <a:extLst>
               <a:ext uri="{FF2B5EF4-FFF2-40B4-BE49-F238E27FC236}">
-                <a16:creationId xmlns:a16="http://schemas.microsoft.com/office/drawing/2014/main" id="{79E0525B-62E9-DDD4-BB64-004CB12C6EE0}"/>
+                <a16:creationId xmlns:a16="http://schemas.microsoft.com/office/drawing/2014/main" id="{5F602246-6061-FBB4-35D7-977701709FBF}"/>
               </a:ext>
             </a:extLst>
           </p:cNvPr>
@@ -6035,7 +6035,7 @@
           <p:cNvPr id="19" name="TextBox 18">
             <a:extLst>
               <a:ext uri="{FF2B5EF4-FFF2-40B4-BE49-F238E27FC236}">
-                <a16:creationId xmlns:a16="http://schemas.microsoft.com/office/drawing/2014/main" id="{9240D235-D8B2-8139-4735-C8218430E9A6}"/>
+                <a16:creationId xmlns:a16="http://schemas.microsoft.com/office/drawing/2014/main" id="{C3077379-4A82-A2D1-A5F7-212426B663F5}"/>
               </a:ext>
             </a:extLst>
           </p:cNvPr>
@@ -6081,7 +6081,7 @@
           <p:cNvPr id="20" name="TextBox 19">
             <a:extLst>
               <a:ext uri="{FF2B5EF4-FFF2-40B4-BE49-F238E27FC236}">
-                <a16:creationId xmlns:a16="http://schemas.microsoft.com/office/drawing/2014/main" id="{99DCBB9F-F5B9-2A65-A11A-2E011A5379CF}"/>
+                <a16:creationId xmlns:a16="http://schemas.microsoft.com/office/drawing/2014/main" id="{A89D0BC0-252B-2E22-6CF5-9908FC34E0AE}"/>
               </a:ext>
             </a:extLst>
           </p:cNvPr>
@@ -6127,7 +6127,7 @@
           <p:cNvPr id="21" name="TextBox 20">
             <a:extLst>
               <a:ext uri="{FF2B5EF4-FFF2-40B4-BE49-F238E27FC236}">
-                <a16:creationId xmlns:a16="http://schemas.microsoft.com/office/drawing/2014/main" id="{F244DF95-57EE-6BA1-1651-38B21161718D}"/>
+                <a16:creationId xmlns:a16="http://schemas.microsoft.com/office/drawing/2014/main" id="{285E7FDD-7963-4185-0467-CC004DD1742A}"/>
               </a:ext>
             </a:extLst>
           </p:cNvPr>
@@ -6173,7 +6173,7 @@
           <p:cNvPr id="22" name="TextBox 21">
             <a:extLst>
               <a:ext uri="{FF2B5EF4-FFF2-40B4-BE49-F238E27FC236}">
-                <a16:creationId xmlns:a16="http://schemas.microsoft.com/office/drawing/2014/main" id="{7BF69691-6BF8-B282-1C9A-F698B7213FF3}"/>
+                <a16:creationId xmlns:a16="http://schemas.microsoft.com/office/drawing/2014/main" id="{86655DF2-A9B6-17E0-A41F-2C9F1D13FD38}"/>
               </a:ext>
             </a:extLst>
           </p:cNvPr>
@@ -6219,7 +6219,7 @@
           <p:cNvPr id="23" name="TextBox 22">
             <a:extLst>
               <a:ext uri="{FF2B5EF4-FFF2-40B4-BE49-F238E27FC236}">
-                <a16:creationId xmlns:a16="http://schemas.microsoft.com/office/drawing/2014/main" id="{673F780B-C50F-D3F2-24A0-84017B55CA60}"/>
+                <a16:creationId xmlns:a16="http://schemas.microsoft.com/office/drawing/2014/main" id="{ECD2F1BA-12CD-F949-B848-47ACE4C3E04B}"/>
               </a:ext>
             </a:extLst>
           </p:cNvPr>
@@ -6265,7 +6265,7 @@
           <p:cNvPr id="24" name="TextBox 23">
             <a:extLst>
               <a:ext uri="{FF2B5EF4-FFF2-40B4-BE49-F238E27FC236}">
-                <a16:creationId xmlns:a16="http://schemas.microsoft.com/office/drawing/2014/main" id="{2FD5EA9F-2433-8AB0-9E25-E9323DE2D4F6}"/>
+                <a16:creationId xmlns:a16="http://schemas.microsoft.com/office/drawing/2014/main" id="{EAF54401-7154-727D-AC9C-D5DED18E94C3}"/>
               </a:ext>
             </a:extLst>
           </p:cNvPr>
@@ -6311,7 +6311,7 @@
           <p:cNvPr id="25" name="TextBox 24">
             <a:extLst>
               <a:ext uri="{FF2B5EF4-FFF2-40B4-BE49-F238E27FC236}">
-                <a16:creationId xmlns:a16="http://schemas.microsoft.com/office/drawing/2014/main" id="{80A25E00-021C-F5A9-6545-2BF1B8D5648D}"/>
+                <a16:creationId xmlns:a16="http://schemas.microsoft.com/office/drawing/2014/main" id="{51B389D8-E086-5500-E44E-6C3CDC428E7E}"/>
               </a:ext>
             </a:extLst>
           </p:cNvPr>
@@ -6357,7 +6357,7 @@
           <p:cNvPr id="26" name="Rectangle: Rounded Corners 25">
             <a:extLst>
               <a:ext uri="{FF2B5EF4-FFF2-40B4-BE49-F238E27FC236}">
-                <a16:creationId xmlns:a16="http://schemas.microsoft.com/office/drawing/2014/main" id="{D7307203-2C44-64D2-F6FD-58D0E95FAB1F}"/>
+                <a16:creationId xmlns:a16="http://schemas.microsoft.com/office/drawing/2014/main" id="{98EDABD5-9D2D-CE2C-B367-E8D9D01A4D22}"/>
               </a:ext>
             </a:extLst>
           </p:cNvPr>
@@ -6427,7 +6427,7 @@
           <p:cNvPr id="27" name="TextBox 26">
             <a:extLst>
               <a:ext uri="{FF2B5EF4-FFF2-40B4-BE49-F238E27FC236}">
-                <a16:creationId xmlns:a16="http://schemas.microsoft.com/office/drawing/2014/main" id="{C8C2C0A8-1CA0-EC4D-5CC4-74181091DDE7}"/>
+                <a16:creationId xmlns:a16="http://schemas.microsoft.com/office/drawing/2014/main" id="{4F553718-392D-A359-ACEF-A3F95B7EECFD}"/>
               </a:ext>
             </a:extLst>
           </p:cNvPr>
@@ -6473,7 +6473,7 @@
           <p:cNvPr id="28" name="TextBox 27">
             <a:extLst>
               <a:ext uri="{FF2B5EF4-FFF2-40B4-BE49-F238E27FC236}">
-                <a16:creationId xmlns:a16="http://schemas.microsoft.com/office/drawing/2014/main" id="{F8B6AFBB-774E-2D1F-0C22-73CF72FFB55C}"/>
+                <a16:creationId xmlns:a16="http://schemas.microsoft.com/office/drawing/2014/main" id="{BF62E463-30E3-7617-59B8-EFFA671470DA}"/>
               </a:ext>
             </a:extLst>
           </p:cNvPr>
@@ -6518,7 +6518,7 @@
     </p:spTree>
     <p:extLst>
       <p:ext uri="{BB962C8B-B14F-4D97-AF65-F5344CB8AC3E}">
-        <p14:creationId xmlns:p14="http://schemas.microsoft.com/office/powerpoint/2010/main" val="2098697271"/>
+        <p14:creationId xmlns:p14="http://schemas.microsoft.com/office/powerpoint/2010/main" val="1475465828"/>
       </p:ext>
     </p:extLst>
   </p:cSld>
@@ -6558,7 +6558,7 @@
           <p:cNvPr id="2" name="TextBox 1">
             <a:extLst>
               <a:ext uri="{FF2B5EF4-FFF2-40B4-BE49-F238E27FC236}">
-                <a16:creationId xmlns:a16="http://schemas.microsoft.com/office/drawing/2014/main" id="{368D0179-A9FC-20C9-692E-AB1EB874DE83}"/>
+                <a16:creationId xmlns:a16="http://schemas.microsoft.com/office/drawing/2014/main" id="{17C20A8E-3934-5ED5-AACF-D80379EC6078}"/>
               </a:ext>
             </a:extLst>
           </p:cNvPr>
@@ -6604,7 +6604,7 @@
           <p:cNvPr id="4" name="Picture 3">
             <a:extLst>
               <a:ext uri="{FF2B5EF4-FFF2-40B4-BE49-F238E27FC236}">
-                <a16:creationId xmlns:a16="http://schemas.microsoft.com/office/drawing/2014/main" id="{A5F567B0-2B51-26D0-D577-14CCA2D22C24}"/>
+                <a16:creationId xmlns:a16="http://schemas.microsoft.com/office/drawing/2014/main" id="{CD4275F3-E2D6-15A0-C521-45E9FDC2E6D4}"/>
               </a:ext>
             </a:extLst>
           </p:cNvPr>
@@ -6645,7 +6645,7 @@
           <p:cNvPr id="5" name="TextBox 4">
             <a:extLst>
               <a:ext uri="{FF2B5EF4-FFF2-40B4-BE49-F238E27FC236}">
-                <a16:creationId xmlns:a16="http://schemas.microsoft.com/office/drawing/2014/main" id="{E8475B74-EF10-BAB7-003B-6D7BFEC8CA3C}"/>
+                <a16:creationId xmlns:a16="http://schemas.microsoft.com/office/drawing/2014/main" id="{64ABE30E-1992-4163-B9DC-D555B1D55D31}"/>
               </a:ext>
             </a:extLst>
           </p:cNvPr>
@@ -6685,7 +6685,7 @@
           <p:cNvPr id="6" name="TextBox 5">
             <a:extLst>
               <a:ext uri="{FF2B5EF4-FFF2-40B4-BE49-F238E27FC236}">
-                <a16:creationId xmlns:a16="http://schemas.microsoft.com/office/drawing/2014/main" id="{65E91FDD-CB1D-A0DD-C41D-9C39A329F30E}"/>
+                <a16:creationId xmlns:a16="http://schemas.microsoft.com/office/drawing/2014/main" id="{4C0D1569-4E4B-9EBE-D28E-33D991285844}"/>
               </a:ext>
             </a:extLst>
           </p:cNvPr>
@@ -6725,7 +6725,7 @@
           <p:cNvPr id="7" name="TextBox 6">
             <a:extLst>
               <a:ext uri="{FF2B5EF4-FFF2-40B4-BE49-F238E27FC236}">
-                <a16:creationId xmlns:a16="http://schemas.microsoft.com/office/drawing/2014/main" id="{84F5E635-587C-E255-9D01-C510FD853C96}"/>
+                <a16:creationId xmlns:a16="http://schemas.microsoft.com/office/drawing/2014/main" id="{5E2EF1B9-77D2-C6BD-DCE0-995ABEBECF0A}"/>
               </a:ext>
             </a:extLst>
           </p:cNvPr>
@@ -6765,7 +6765,7 @@
           <p:cNvPr id="8" name="TextBox 7">
             <a:extLst>
               <a:ext uri="{FF2B5EF4-FFF2-40B4-BE49-F238E27FC236}">
-                <a16:creationId xmlns:a16="http://schemas.microsoft.com/office/drawing/2014/main" id="{66511685-71DF-6A27-2607-5FA2832803EA}"/>
+                <a16:creationId xmlns:a16="http://schemas.microsoft.com/office/drawing/2014/main" id="{EBF4F280-1728-955B-C346-EED9CAFEA778}"/>
               </a:ext>
             </a:extLst>
           </p:cNvPr>
@@ -6811,7 +6811,7 @@
           <p:cNvPr id="9" name="TextBox 8">
             <a:extLst>
               <a:ext uri="{FF2B5EF4-FFF2-40B4-BE49-F238E27FC236}">
-                <a16:creationId xmlns:a16="http://schemas.microsoft.com/office/drawing/2014/main" id="{76866037-7064-CB82-B557-7692622AC0B2}"/>
+                <a16:creationId xmlns:a16="http://schemas.microsoft.com/office/drawing/2014/main" id="{8DC51512-300F-8410-C273-84E452CC5814}"/>
               </a:ext>
             </a:extLst>
           </p:cNvPr>
@@ -6851,7 +6851,7 @@
           <p:cNvPr id="10" name="TextBox 9">
             <a:extLst>
               <a:ext uri="{FF2B5EF4-FFF2-40B4-BE49-F238E27FC236}">
-                <a16:creationId xmlns:a16="http://schemas.microsoft.com/office/drawing/2014/main" id="{FD3D1597-6F17-D24D-3C2E-0A8E7F05DFE4}"/>
+                <a16:creationId xmlns:a16="http://schemas.microsoft.com/office/drawing/2014/main" id="{4C8CD486-5060-0882-92C6-67DE6878BA45}"/>
               </a:ext>
             </a:extLst>
           </p:cNvPr>
@@ -6897,7 +6897,7 @@
           <p:cNvPr id="11" name="TextBox 10">
             <a:extLst>
               <a:ext uri="{FF2B5EF4-FFF2-40B4-BE49-F238E27FC236}">
-                <a16:creationId xmlns:a16="http://schemas.microsoft.com/office/drawing/2014/main" id="{A99056F1-7179-EF72-6FE9-7BAB093256BE}"/>
+                <a16:creationId xmlns:a16="http://schemas.microsoft.com/office/drawing/2014/main" id="{C4D05F32-095F-9B50-2F69-D39B61B81206}"/>
               </a:ext>
             </a:extLst>
           </p:cNvPr>
@@ -6937,7 +6937,7 @@
           <p:cNvPr id="12" name="TextBox 11">
             <a:extLst>
               <a:ext uri="{FF2B5EF4-FFF2-40B4-BE49-F238E27FC236}">
-                <a16:creationId xmlns:a16="http://schemas.microsoft.com/office/drawing/2014/main" id="{756D89E1-DEEB-FF4E-D921-438A39C0A782}"/>
+                <a16:creationId xmlns:a16="http://schemas.microsoft.com/office/drawing/2014/main" id="{F0218D8C-8799-DE95-7590-ACFA0A493E99}"/>
               </a:ext>
             </a:extLst>
           </p:cNvPr>
@@ -6983,7 +6983,7 @@
           <p:cNvPr id="13" name="TextBox 12">
             <a:extLst>
               <a:ext uri="{FF2B5EF4-FFF2-40B4-BE49-F238E27FC236}">
-                <a16:creationId xmlns:a16="http://schemas.microsoft.com/office/drawing/2014/main" id="{03A9E515-FE5E-BF77-C57D-A47C2B683D9D}"/>
+                <a16:creationId xmlns:a16="http://schemas.microsoft.com/office/drawing/2014/main" id="{087D4974-F4CD-BC77-9F98-9CFC285C0D28}"/>
               </a:ext>
             </a:extLst>
           </p:cNvPr>
@@ -7029,7 +7029,7 @@
           <p:cNvPr id="14" name="TextBox 13">
             <a:extLst>
               <a:ext uri="{FF2B5EF4-FFF2-40B4-BE49-F238E27FC236}">
-                <a16:creationId xmlns:a16="http://schemas.microsoft.com/office/drawing/2014/main" id="{97F3490D-A13D-E47E-3996-CF06048215B2}"/>
+                <a16:creationId xmlns:a16="http://schemas.microsoft.com/office/drawing/2014/main" id="{2215D491-89FF-5A12-7013-8A7E69A4A545}"/>
               </a:ext>
             </a:extLst>
           </p:cNvPr>
@@ -7068,7 +7068,7 @@
     </p:spTree>
     <p:extLst>
       <p:ext uri="{BB962C8B-B14F-4D97-AF65-F5344CB8AC3E}">
-        <p14:creationId xmlns:p14="http://schemas.microsoft.com/office/powerpoint/2010/main" val="1086562218"/>
+        <p14:creationId xmlns:p14="http://schemas.microsoft.com/office/powerpoint/2010/main" val="5550087"/>
       </p:ext>
     </p:extLst>
   </p:cSld>
@@ -7108,7 +7108,7 @@
           <p:cNvPr id="2" name="TextBox 1">
             <a:extLst>
               <a:ext uri="{FF2B5EF4-FFF2-40B4-BE49-F238E27FC236}">
-                <a16:creationId xmlns:a16="http://schemas.microsoft.com/office/drawing/2014/main" id="{C982C654-74D1-0378-1D6C-018E6846B9A5}"/>
+                <a16:creationId xmlns:a16="http://schemas.microsoft.com/office/drawing/2014/main" id="{315E8092-E697-5349-D59A-172FE9B7F8FF}"/>
               </a:ext>
             </a:extLst>
           </p:cNvPr>
@@ -7148,7 +7148,7 @@
           <p:cNvPr id="3" name="Rectangle: Rounded Corners 2">
             <a:extLst>
               <a:ext uri="{FF2B5EF4-FFF2-40B4-BE49-F238E27FC236}">
-                <a16:creationId xmlns:a16="http://schemas.microsoft.com/office/drawing/2014/main" id="{9328BD84-E943-A693-AB2B-3F9569855E62}"/>
+                <a16:creationId xmlns:a16="http://schemas.microsoft.com/office/drawing/2014/main" id="{742ED012-5C6A-DB45-3E46-6E2F1F643E43}"/>
               </a:ext>
             </a:extLst>
           </p:cNvPr>
@@ -7226,7 +7226,7 @@
           <p:cNvPr id="4" name="Straight Connector 3">
             <a:extLst>
               <a:ext uri="{FF2B5EF4-FFF2-40B4-BE49-F238E27FC236}">
-                <a16:creationId xmlns:a16="http://schemas.microsoft.com/office/drawing/2014/main" id="{BE1DEBA0-193E-19DC-8E65-A716D46A4C35}"/>
+                <a16:creationId xmlns:a16="http://schemas.microsoft.com/office/drawing/2014/main" id="{2ED9E4E7-A829-2EDB-6D0C-85F6D7055899}"/>
               </a:ext>
             </a:extLst>
           </p:cNvPr>
@@ -7268,7 +7268,7 @@
           <p:cNvPr id="5" name="Rectangle: Rounded Corners 4">
             <a:extLst>
               <a:ext uri="{FF2B5EF4-FFF2-40B4-BE49-F238E27FC236}">
-                <a16:creationId xmlns:a16="http://schemas.microsoft.com/office/drawing/2014/main" id="{6C6162B4-2CA5-6797-F21D-3FF78A330B4F}"/>
+                <a16:creationId xmlns:a16="http://schemas.microsoft.com/office/drawing/2014/main" id="{A0B697F3-C97B-53F1-F667-F0882F2EB1D8}"/>
               </a:ext>
             </a:extLst>
           </p:cNvPr>
@@ -7346,7 +7346,7 @@
           <p:cNvPr id="6" name="Straight Connector 5">
             <a:extLst>
               <a:ext uri="{FF2B5EF4-FFF2-40B4-BE49-F238E27FC236}">
-                <a16:creationId xmlns:a16="http://schemas.microsoft.com/office/drawing/2014/main" id="{DE6677A4-6231-8174-BF15-D63D51A03F16}"/>
+                <a16:creationId xmlns:a16="http://schemas.microsoft.com/office/drawing/2014/main" id="{198A341D-B37E-DD23-0AE7-740E42127F7B}"/>
               </a:ext>
             </a:extLst>
           </p:cNvPr>
@@ -7388,7 +7388,7 @@
           <p:cNvPr id="7" name="Rectangle: Rounded Corners 6">
             <a:extLst>
               <a:ext uri="{FF2B5EF4-FFF2-40B4-BE49-F238E27FC236}">
-                <a16:creationId xmlns:a16="http://schemas.microsoft.com/office/drawing/2014/main" id="{113552A0-E774-5A4B-73A2-5608FBA12C0E}"/>
+                <a16:creationId xmlns:a16="http://schemas.microsoft.com/office/drawing/2014/main" id="{C31F1896-06BB-A751-CF03-96BF4B3878F9}"/>
               </a:ext>
             </a:extLst>
           </p:cNvPr>
@@ -7466,7 +7466,7 @@
           <p:cNvPr id="8" name="Straight Connector 7">
             <a:extLst>
               <a:ext uri="{FF2B5EF4-FFF2-40B4-BE49-F238E27FC236}">
-                <a16:creationId xmlns:a16="http://schemas.microsoft.com/office/drawing/2014/main" id="{335B75CB-B770-9781-B08F-8DC514B2240A}"/>
+                <a16:creationId xmlns:a16="http://schemas.microsoft.com/office/drawing/2014/main" id="{E6C811D4-374D-B459-C6E8-05C3C7C49DA7}"/>
               </a:ext>
             </a:extLst>
           </p:cNvPr>
@@ -7508,7 +7508,7 @@
           <p:cNvPr id="9" name="Rectangle: Rounded Corners 8">
             <a:extLst>
               <a:ext uri="{FF2B5EF4-FFF2-40B4-BE49-F238E27FC236}">
-                <a16:creationId xmlns:a16="http://schemas.microsoft.com/office/drawing/2014/main" id="{6F1E7055-7673-B4FB-975A-B5E3F8D65BE2}"/>
+                <a16:creationId xmlns:a16="http://schemas.microsoft.com/office/drawing/2014/main" id="{E3970952-1F57-FB62-14E0-01147885E29F}"/>
               </a:ext>
             </a:extLst>
           </p:cNvPr>
@@ -7586,7 +7586,7 @@
           <p:cNvPr id="10" name="Straight Connector 9">
             <a:extLst>
               <a:ext uri="{FF2B5EF4-FFF2-40B4-BE49-F238E27FC236}">
-                <a16:creationId xmlns:a16="http://schemas.microsoft.com/office/drawing/2014/main" id="{596192EB-5156-30B0-04EE-BC7F0A555890}"/>
+                <a16:creationId xmlns:a16="http://schemas.microsoft.com/office/drawing/2014/main" id="{3988CB5F-620B-A3E2-952F-20CED99C4E41}"/>
               </a:ext>
             </a:extLst>
           </p:cNvPr>
@@ -7628,7 +7628,7 @@
           <p:cNvPr id="11" name="Rectangle: Rounded Corners 10">
             <a:extLst>
               <a:ext uri="{FF2B5EF4-FFF2-40B4-BE49-F238E27FC236}">
-                <a16:creationId xmlns:a16="http://schemas.microsoft.com/office/drawing/2014/main" id="{5ABF4BEC-7DAA-3701-75F4-B962748A3847}"/>
+                <a16:creationId xmlns:a16="http://schemas.microsoft.com/office/drawing/2014/main" id="{16847E0B-2C08-B037-EE93-0BDC1829C66E}"/>
               </a:ext>
             </a:extLst>
           </p:cNvPr>
@@ -7706,7 +7706,7 @@
           <p:cNvPr id="12" name="Straight Connector 11">
             <a:extLst>
               <a:ext uri="{FF2B5EF4-FFF2-40B4-BE49-F238E27FC236}">
-                <a16:creationId xmlns:a16="http://schemas.microsoft.com/office/drawing/2014/main" id="{64E45E4C-7478-1FD1-D5D3-C07864510FC5}"/>
+                <a16:creationId xmlns:a16="http://schemas.microsoft.com/office/drawing/2014/main" id="{25C51136-06D0-E3EF-1262-E782D9A0AE8B}"/>
               </a:ext>
             </a:extLst>
           </p:cNvPr>
@@ -7748,7 +7748,7 @@
           <p:cNvPr id="13" name="Rectangle: Rounded Corners 12">
             <a:extLst>
               <a:ext uri="{FF2B5EF4-FFF2-40B4-BE49-F238E27FC236}">
-                <a16:creationId xmlns:a16="http://schemas.microsoft.com/office/drawing/2014/main" id="{45188F70-7F52-A74B-4970-D2917AAE2977}"/>
+                <a16:creationId xmlns:a16="http://schemas.microsoft.com/office/drawing/2014/main" id="{B919499C-9B5F-AB51-91BA-0F46D4922284}"/>
               </a:ext>
             </a:extLst>
           </p:cNvPr>
@@ -7826,7 +7826,7 @@
           <p:cNvPr id="14" name="Straight Connector 13">
             <a:extLst>
               <a:ext uri="{FF2B5EF4-FFF2-40B4-BE49-F238E27FC236}">
-                <a16:creationId xmlns:a16="http://schemas.microsoft.com/office/drawing/2014/main" id="{BAD027FF-7657-AAD5-CD83-B84DC055B4EE}"/>
+                <a16:creationId xmlns:a16="http://schemas.microsoft.com/office/drawing/2014/main" id="{950752F7-7DFF-74EB-625E-439CFE6DC98C}"/>
               </a:ext>
             </a:extLst>
           </p:cNvPr>
@@ -7869,7 +7869,7 @@
           <p:cNvPr id="15" name="TextBox 14">
             <a:extLst>
               <a:ext uri="{FF2B5EF4-FFF2-40B4-BE49-F238E27FC236}">
-                <a16:creationId xmlns:a16="http://schemas.microsoft.com/office/drawing/2014/main" id="{D130B619-CC9C-4D35-B463-1C35B54CD623}"/>
+                <a16:creationId xmlns:a16="http://schemas.microsoft.com/office/drawing/2014/main" id="{2E71104E-F024-6901-14DD-EE942B765AC2}"/>
               </a:ext>
             </a:extLst>
           </p:cNvPr>
@@ -7910,7 +7910,7 @@
           <p:cNvPr id="16" name="TextBox 15">
             <a:extLst>
               <a:ext uri="{FF2B5EF4-FFF2-40B4-BE49-F238E27FC236}">
-                <a16:creationId xmlns:a16="http://schemas.microsoft.com/office/drawing/2014/main" id="{04CC9E4A-B769-19C3-38DA-58EB5811DFF6}"/>
+                <a16:creationId xmlns:a16="http://schemas.microsoft.com/office/drawing/2014/main" id="{281ED6F0-EB88-0717-9008-CAF0052C4485}"/>
               </a:ext>
             </a:extLst>
           </p:cNvPr>
@@ -7956,7 +7956,7 @@
           <p:cNvPr id="17" name="Rectangle: Rounded Corners 16">
             <a:extLst>
               <a:ext uri="{FF2B5EF4-FFF2-40B4-BE49-F238E27FC236}">
-                <a16:creationId xmlns:a16="http://schemas.microsoft.com/office/drawing/2014/main" id="{03863648-4B2B-379B-31B9-5B55051E2A19}"/>
+                <a16:creationId xmlns:a16="http://schemas.microsoft.com/office/drawing/2014/main" id="{A681F1D9-91D3-774E-5D63-7135358D66AB}"/>
               </a:ext>
             </a:extLst>
           </p:cNvPr>
@@ -8026,7 +8026,7 @@
           <p:cNvPr id="18" name="TextBox 17">
             <a:extLst>
               <a:ext uri="{FF2B5EF4-FFF2-40B4-BE49-F238E27FC236}">
-                <a16:creationId xmlns:a16="http://schemas.microsoft.com/office/drawing/2014/main" id="{17371995-4599-C8A5-F631-D6732CC9D0A8}"/>
+                <a16:creationId xmlns:a16="http://schemas.microsoft.com/office/drawing/2014/main" id="{FD6F891A-8344-E549-A652-21E26A5A0F9B}"/>
               </a:ext>
             </a:extLst>
           </p:cNvPr>
@@ -8072,7 +8072,7 @@
           <p:cNvPr id="19" name="TextBox 18">
             <a:extLst>
               <a:ext uri="{FF2B5EF4-FFF2-40B4-BE49-F238E27FC236}">
-                <a16:creationId xmlns:a16="http://schemas.microsoft.com/office/drawing/2014/main" id="{7330333B-F5E1-E7D8-6979-4C4584C2E741}"/>
+                <a16:creationId xmlns:a16="http://schemas.microsoft.com/office/drawing/2014/main" id="{9CF1B7AC-DCF4-A659-AF21-06DF31403886}"/>
               </a:ext>
             </a:extLst>
           </p:cNvPr>
@@ -8118,7 +8118,7 @@
           <p:cNvPr id="20" name="Rectangle: Rounded Corners 19">
             <a:extLst>
               <a:ext uri="{FF2B5EF4-FFF2-40B4-BE49-F238E27FC236}">
-                <a16:creationId xmlns:a16="http://schemas.microsoft.com/office/drawing/2014/main" id="{9BEC1D41-03A6-7CD1-E81D-989E5D7C5F86}"/>
+                <a16:creationId xmlns:a16="http://schemas.microsoft.com/office/drawing/2014/main" id="{998B59F0-C3C3-117B-51F9-48D2CCC7B4AC}"/>
               </a:ext>
             </a:extLst>
           </p:cNvPr>
@@ -8188,7 +8188,7 @@
           <p:cNvPr id="21" name="TextBox 20">
             <a:extLst>
               <a:ext uri="{FF2B5EF4-FFF2-40B4-BE49-F238E27FC236}">
-                <a16:creationId xmlns:a16="http://schemas.microsoft.com/office/drawing/2014/main" id="{C4FBD76D-10CA-1BED-6B9A-35C751B160DB}"/>
+                <a16:creationId xmlns:a16="http://schemas.microsoft.com/office/drawing/2014/main" id="{4815FD23-9230-657F-0A86-38C75D5A9090}"/>
               </a:ext>
             </a:extLst>
           </p:cNvPr>
@@ -8228,7 +8228,7 @@
           <p:cNvPr id="22" name="TextBox 21">
             <a:extLst>
               <a:ext uri="{FF2B5EF4-FFF2-40B4-BE49-F238E27FC236}">
-                <a16:creationId xmlns:a16="http://schemas.microsoft.com/office/drawing/2014/main" id="{5EA49A57-ED5B-9136-D51E-B5D0970EF38F}"/>
+                <a16:creationId xmlns:a16="http://schemas.microsoft.com/office/drawing/2014/main" id="{B38F991F-A24C-B425-D2CC-FEA3256C4D67}"/>
               </a:ext>
             </a:extLst>
           </p:cNvPr>
@@ -8274,7 +8274,7 @@
           <p:cNvPr id="23" name="Rectangle: Rounded Corners 22">
             <a:extLst>
               <a:ext uri="{FF2B5EF4-FFF2-40B4-BE49-F238E27FC236}">
-                <a16:creationId xmlns:a16="http://schemas.microsoft.com/office/drawing/2014/main" id="{CE739AC5-D590-D5DA-E73C-F83B4C1F543D}"/>
+                <a16:creationId xmlns:a16="http://schemas.microsoft.com/office/drawing/2014/main" id="{96922C99-F992-C5A1-7FB0-7020D2AFFCEE}"/>
               </a:ext>
             </a:extLst>
           </p:cNvPr>
@@ -8344,7 +8344,7 @@
           <p:cNvPr id="24" name="TextBox 23">
             <a:extLst>
               <a:ext uri="{FF2B5EF4-FFF2-40B4-BE49-F238E27FC236}">
-                <a16:creationId xmlns:a16="http://schemas.microsoft.com/office/drawing/2014/main" id="{66AA7092-A2ED-FEF7-E1C0-C75363DF5DCA}"/>
+                <a16:creationId xmlns:a16="http://schemas.microsoft.com/office/drawing/2014/main" id="{20461BD7-FE9F-6A07-08DB-8F4755DB4979}"/>
               </a:ext>
             </a:extLst>
           </p:cNvPr>
@@ -8384,7 +8384,7 @@
           <p:cNvPr id="25" name="TextBox 24">
             <a:extLst>
               <a:ext uri="{FF2B5EF4-FFF2-40B4-BE49-F238E27FC236}">
-                <a16:creationId xmlns:a16="http://schemas.microsoft.com/office/drawing/2014/main" id="{B367221C-8FF3-960E-2DB1-510C27C5283B}"/>
+                <a16:creationId xmlns:a16="http://schemas.microsoft.com/office/drawing/2014/main" id="{DFE00E8B-D6CD-4817-29E0-A19040D85414}"/>
               </a:ext>
             </a:extLst>
           </p:cNvPr>
@@ -8430,7 +8430,7 @@
           <p:cNvPr id="26" name="TextBox 25">
             <a:extLst>
               <a:ext uri="{FF2B5EF4-FFF2-40B4-BE49-F238E27FC236}">
-                <a16:creationId xmlns:a16="http://schemas.microsoft.com/office/drawing/2014/main" id="{4EFE0A68-BCB1-BA2D-F566-CD92C6BB14E9}"/>
+                <a16:creationId xmlns:a16="http://schemas.microsoft.com/office/drawing/2014/main" id="{E3A91DA4-BC96-ED70-88F9-3C8CBB1B7B56}"/>
               </a:ext>
             </a:extLst>
           </p:cNvPr>
@@ -8476,7 +8476,7 @@
           <p:cNvPr id="27" name="TextBox 26">
             <a:extLst>
               <a:ext uri="{FF2B5EF4-FFF2-40B4-BE49-F238E27FC236}">
-                <a16:creationId xmlns:a16="http://schemas.microsoft.com/office/drawing/2014/main" id="{875174BE-0280-4038-FAE9-5EA89095A948}"/>
+                <a16:creationId xmlns:a16="http://schemas.microsoft.com/office/drawing/2014/main" id="{419D7999-B80D-EBF4-0B87-EF4FDF3DA82A}"/>
               </a:ext>
             </a:extLst>
           </p:cNvPr>
@@ -8515,7 +8515,7 @@
     </p:spTree>
     <p:extLst>
       <p:ext uri="{BB962C8B-B14F-4D97-AF65-F5344CB8AC3E}">
-        <p14:creationId xmlns:p14="http://schemas.microsoft.com/office/powerpoint/2010/main" val="3974668001"/>
+        <p14:creationId xmlns:p14="http://schemas.microsoft.com/office/powerpoint/2010/main" val="1219034810"/>
       </p:ext>
     </p:extLst>
   </p:cSld>
@@ -8555,7 +8555,7 @@
           <p:cNvPr id="2" name="TextBox 1">
             <a:extLst>
               <a:ext uri="{FF2B5EF4-FFF2-40B4-BE49-F238E27FC236}">
-                <a16:creationId xmlns:a16="http://schemas.microsoft.com/office/drawing/2014/main" id="{777CBD1E-43D0-DD93-92A0-80A753F3CEAA}"/>
+                <a16:creationId xmlns:a16="http://schemas.microsoft.com/office/drawing/2014/main" id="{329DB62E-E284-A27D-C43A-0FCD48E2BE39}"/>
               </a:ext>
             </a:extLst>
           </p:cNvPr>
@@ -8601,7 +8601,7 @@
           <p:cNvPr id="3" name="Oval 2">
             <a:extLst>
               <a:ext uri="{FF2B5EF4-FFF2-40B4-BE49-F238E27FC236}">
-                <a16:creationId xmlns:a16="http://schemas.microsoft.com/office/drawing/2014/main" id="{23B7BA6A-F156-3443-DF4D-A88FCA6B3999}"/>
+                <a16:creationId xmlns:a16="http://schemas.microsoft.com/office/drawing/2014/main" id="{A0432FB6-2F0B-6006-1E6F-5764835602F7}"/>
               </a:ext>
             </a:extLst>
           </p:cNvPr>
@@ -8677,7 +8677,7 @@
           <p:cNvPr id="4" name="TextBox 3">
             <a:extLst>
               <a:ext uri="{FF2B5EF4-FFF2-40B4-BE49-F238E27FC236}">
-                <a16:creationId xmlns:a16="http://schemas.microsoft.com/office/drawing/2014/main" id="{B93AFB1E-C19C-6380-18B8-CC8BB5622A52}"/>
+                <a16:creationId xmlns:a16="http://schemas.microsoft.com/office/drawing/2014/main" id="{03E886A9-6D30-2976-E5DD-A18F84DDC9AC}"/>
               </a:ext>
             </a:extLst>
           </p:cNvPr>
@@ -8723,7 +8723,7 @@
           <p:cNvPr id="5" name="TextBox 4">
             <a:extLst>
               <a:ext uri="{FF2B5EF4-FFF2-40B4-BE49-F238E27FC236}">
-                <a16:creationId xmlns:a16="http://schemas.microsoft.com/office/drawing/2014/main" id="{D78E1384-91CA-A845-6D36-6969E9DAC8BC}"/>
+                <a16:creationId xmlns:a16="http://schemas.microsoft.com/office/drawing/2014/main" id="{2CF98729-FBEB-2994-0453-B534295A0C86}"/>
               </a:ext>
             </a:extLst>
           </p:cNvPr>
@@ -8769,7 +8769,7 @@
           <p:cNvPr id="6" name="Oval 5">
             <a:extLst>
               <a:ext uri="{FF2B5EF4-FFF2-40B4-BE49-F238E27FC236}">
-                <a16:creationId xmlns:a16="http://schemas.microsoft.com/office/drawing/2014/main" id="{6FE36DF6-5155-276B-E7F3-2151DADFF98A}"/>
+                <a16:creationId xmlns:a16="http://schemas.microsoft.com/office/drawing/2014/main" id="{3234C03E-EA94-BCDE-45AA-2621B9ADD0F4}"/>
               </a:ext>
             </a:extLst>
           </p:cNvPr>
@@ -8845,7 +8845,7 @@
           <p:cNvPr id="7" name="TextBox 6">
             <a:extLst>
               <a:ext uri="{FF2B5EF4-FFF2-40B4-BE49-F238E27FC236}">
-                <a16:creationId xmlns:a16="http://schemas.microsoft.com/office/drawing/2014/main" id="{8520BDF8-2947-AB92-EAF3-968ABA183C63}"/>
+                <a16:creationId xmlns:a16="http://schemas.microsoft.com/office/drawing/2014/main" id="{73FB976F-F08C-5F34-6D3D-1A2B6284445E}"/>
               </a:ext>
             </a:extLst>
           </p:cNvPr>
@@ -8891,7 +8891,7 @@
           <p:cNvPr id="8" name="TextBox 7">
             <a:extLst>
               <a:ext uri="{FF2B5EF4-FFF2-40B4-BE49-F238E27FC236}">
-                <a16:creationId xmlns:a16="http://schemas.microsoft.com/office/drawing/2014/main" id="{AF810C1A-4C86-B408-EA42-1FA0D66E74CF}"/>
+                <a16:creationId xmlns:a16="http://schemas.microsoft.com/office/drawing/2014/main" id="{269EF5F7-AEDB-3687-E10A-FF287F8623A0}"/>
               </a:ext>
             </a:extLst>
           </p:cNvPr>
@@ -8937,7 +8937,7 @@
           <p:cNvPr id="9" name="Oval 8">
             <a:extLst>
               <a:ext uri="{FF2B5EF4-FFF2-40B4-BE49-F238E27FC236}">
-                <a16:creationId xmlns:a16="http://schemas.microsoft.com/office/drawing/2014/main" id="{89D0B333-6A83-8B8D-46C4-420DE3BD37F4}"/>
+                <a16:creationId xmlns:a16="http://schemas.microsoft.com/office/drawing/2014/main" id="{83F1D464-FCFA-F14D-C3B7-3DFB2A9997A4}"/>
               </a:ext>
             </a:extLst>
           </p:cNvPr>
@@ -9013,7 +9013,7 @@
           <p:cNvPr id="10" name="TextBox 9">
             <a:extLst>
               <a:ext uri="{FF2B5EF4-FFF2-40B4-BE49-F238E27FC236}">
-                <a16:creationId xmlns:a16="http://schemas.microsoft.com/office/drawing/2014/main" id="{3235A21B-2681-440E-CCC5-434639655B87}"/>
+                <a16:creationId xmlns:a16="http://schemas.microsoft.com/office/drawing/2014/main" id="{AA54BAEB-3B82-8C28-FAF9-0B2CC88A2493}"/>
               </a:ext>
             </a:extLst>
           </p:cNvPr>
@@ -9059,7 +9059,7 @@
           <p:cNvPr id="11" name="TextBox 10">
             <a:extLst>
               <a:ext uri="{FF2B5EF4-FFF2-40B4-BE49-F238E27FC236}">
-                <a16:creationId xmlns:a16="http://schemas.microsoft.com/office/drawing/2014/main" id="{0F427CD5-CBF2-5998-6D0D-637D2B16DF3C}"/>
+                <a16:creationId xmlns:a16="http://schemas.microsoft.com/office/drawing/2014/main" id="{3691DE38-FE70-0D6E-8F12-855743F45406}"/>
               </a:ext>
             </a:extLst>
           </p:cNvPr>
@@ -9105,7 +9105,7 @@
           <p:cNvPr id="12" name="TextBox 11">
             <a:extLst>
               <a:ext uri="{FF2B5EF4-FFF2-40B4-BE49-F238E27FC236}">
-                <a16:creationId xmlns:a16="http://schemas.microsoft.com/office/drawing/2014/main" id="{56DC64D6-3DB2-EFE3-1E60-DCACD61F9C65}"/>
+                <a16:creationId xmlns:a16="http://schemas.microsoft.com/office/drawing/2014/main" id="{322B2919-B87C-07F6-3F83-31648BF26BBA}"/>
               </a:ext>
             </a:extLst>
           </p:cNvPr>
@@ -9151,7 +9151,7 @@
           <p:cNvPr id="13" name="Rectangle: Rounded Corners 12">
             <a:extLst>
               <a:ext uri="{FF2B5EF4-FFF2-40B4-BE49-F238E27FC236}">
-                <a16:creationId xmlns:a16="http://schemas.microsoft.com/office/drawing/2014/main" id="{EF490CDC-05A2-7315-2B04-F013AE8FB6B0}"/>
+                <a16:creationId xmlns:a16="http://schemas.microsoft.com/office/drawing/2014/main" id="{3DFCBAC7-6A71-509F-1D1E-AC1C86FDF050}"/>
               </a:ext>
             </a:extLst>
           </p:cNvPr>
@@ -9221,7 +9221,7 @@
           <p:cNvPr id="14" name="TextBox 13">
             <a:extLst>
               <a:ext uri="{FF2B5EF4-FFF2-40B4-BE49-F238E27FC236}">
-                <a16:creationId xmlns:a16="http://schemas.microsoft.com/office/drawing/2014/main" id="{491D9378-CFC9-8C89-D11D-D8FD29F66361}"/>
+                <a16:creationId xmlns:a16="http://schemas.microsoft.com/office/drawing/2014/main" id="{1CDAF381-53C6-B9FC-54F3-847013757542}"/>
               </a:ext>
             </a:extLst>
           </p:cNvPr>
@@ -9262,7 +9262,7 @@
           <p:cNvPr id="15" name="TextBox 14">
             <a:extLst>
               <a:ext uri="{FF2B5EF4-FFF2-40B4-BE49-F238E27FC236}">
-                <a16:creationId xmlns:a16="http://schemas.microsoft.com/office/drawing/2014/main" id="{C61FF341-E911-B990-719C-F06179BE87F4}"/>
+                <a16:creationId xmlns:a16="http://schemas.microsoft.com/office/drawing/2014/main" id="{BF3A945C-C139-AE1B-5693-1AC75085693D}"/>
               </a:ext>
             </a:extLst>
           </p:cNvPr>
@@ -9303,7 +9303,7 @@
           <p:cNvPr id="16" name="TextBox 15">
             <a:extLst>
               <a:ext uri="{FF2B5EF4-FFF2-40B4-BE49-F238E27FC236}">
-                <a16:creationId xmlns:a16="http://schemas.microsoft.com/office/drawing/2014/main" id="{727AD4C4-AF08-96E6-3841-F7EBB79EA86E}"/>
+                <a16:creationId xmlns:a16="http://schemas.microsoft.com/office/drawing/2014/main" id="{1C5D051B-56BB-462B-7587-94C3B9916971}"/>
               </a:ext>
             </a:extLst>
           </p:cNvPr>
@@ -9343,7 +9343,7 @@
           <p:cNvPr id="17" name="TextBox 16">
             <a:extLst>
               <a:ext uri="{FF2B5EF4-FFF2-40B4-BE49-F238E27FC236}">
-                <a16:creationId xmlns:a16="http://schemas.microsoft.com/office/drawing/2014/main" id="{E9617E9C-8848-FE65-EB54-6C5B4CF22811}"/>
+                <a16:creationId xmlns:a16="http://schemas.microsoft.com/office/drawing/2014/main" id="{47711BE6-AA9D-F65F-CC7D-8552DCB31440}"/>
               </a:ext>
             </a:extLst>
           </p:cNvPr>
@@ -9389,7 +9389,7 @@
           <p:cNvPr id="18" name="TextBox 17">
             <a:extLst>
               <a:ext uri="{FF2B5EF4-FFF2-40B4-BE49-F238E27FC236}">
-                <a16:creationId xmlns:a16="http://schemas.microsoft.com/office/drawing/2014/main" id="{7F3B392F-4E43-8839-C094-6964DF5F1742}"/>
+                <a16:creationId xmlns:a16="http://schemas.microsoft.com/office/drawing/2014/main" id="{FF02EB3D-A2D5-FCC7-D339-30FCC1E91ABD}"/>
               </a:ext>
             </a:extLst>
           </p:cNvPr>
@@ -9435,7 +9435,7 @@
           <p:cNvPr id="19" name="Rectangle: Rounded Corners 18">
             <a:extLst>
               <a:ext uri="{FF2B5EF4-FFF2-40B4-BE49-F238E27FC236}">
-                <a16:creationId xmlns:a16="http://schemas.microsoft.com/office/drawing/2014/main" id="{467F202E-53FF-FA77-E8D1-7B5C82CBF79F}"/>
+                <a16:creationId xmlns:a16="http://schemas.microsoft.com/office/drawing/2014/main" id="{59702871-DE6E-519F-DAF9-131884616022}"/>
               </a:ext>
             </a:extLst>
           </p:cNvPr>
@@ -9505,7 +9505,7 @@
           <p:cNvPr id="20" name="TextBox 19">
             <a:extLst>
               <a:ext uri="{FF2B5EF4-FFF2-40B4-BE49-F238E27FC236}">
-                <a16:creationId xmlns:a16="http://schemas.microsoft.com/office/drawing/2014/main" id="{C2BDE10E-BDCD-8B90-01B1-5C61B7BF68C1}"/>
+                <a16:creationId xmlns:a16="http://schemas.microsoft.com/office/drawing/2014/main" id="{6EE4D715-D968-CA26-BB41-18276E681FB8}"/>
               </a:ext>
             </a:extLst>
           </p:cNvPr>
@@ -9551,7 +9551,7 @@
           <p:cNvPr id="21" name="TextBox 20">
             <a:extLst>
               <a:ext uri="{FF2B5EF4-FFF2-40B4-BE49-F238E27FC236}">
-                <a16:creationId xmlns:a16="http://schemas.microsoft.com/office/drawing/2014/main" id="{71789DDD-B34E-B39E-41C3-4CCBF1D6B00C}"/>
+                <a16:creationId xmlns:a16="http://schemas.microsoft.com/office/drawing/2014/main" id="{DBA03819-E4D4-E086-288F-3794A5ACFFB3}"/>
               </a:ext>
             </a:extLst>
           </p:cNvPr>
@@ -9590,7 +9590,7 @@
     </p:spTree>
     <p:extLst>
       <p:ext uri="{BB962C8B-B14F-4D97-AF65-F5344CB8AC3E}">
-        <p14:creationId xmlns:p14="http://schemas.microsoft.com/office/powerpoint/2010/main" val="3290971634"/>
+        <p14:creationId xmlns:p14="http://schemas.microsoft.com/office/powerpoint/2010/main" val="3079075160"/>
       </p:ext>
     </p:extLst>
   </p:cSld>
@@ -9630,7 +9630,7 @@
           <p:cNvPr id="2" name="TextBox 1">
             <a:extLst>
               <a:ext uri="{FF2B5EF4-FFF2-40B4-BE49-F238E27FC236}">
-                <a16:creationId xmlns:a16="http://schemas.microsoft.com/office/drawing/2014/main" id="{AD37AFA0-5292-942E-25D2-BB6DC02019D7}"/>
+                <a16:creationId xmlns:a16="http://schemas.microsoft.com/office/drawing/2014/main" id="{DEACD8D7-FA06-40E5-BD6C-255CAE8764BF}"/>
               </a:ext>
             </a:extLst>
           </p:cNvPr>
@@ -9676,7 +9676,7 @@
           <p:cNvPr id="3" name="Rectangle: Rounded Corners 2">
             <a:extLst>
               <a:ext uri="{FF2B5EF4-FFF2-40B4-BE49-F238E27FC236}">
-                <a16:creationId xmlns:a16="http://schemas.microsoft.com/office/drawing/2014/main" id="{2F43D3B3-F3F8-317F-F715-E755D22D8833}"/>
+                <a16:creationId xmlns:a16="http://schemas.microsoft.com/office/drawing/2014/main" id="{2AD6E720-CC4D-6322-E6BF-8AF96D1E0470}"/>
               </a:ext>
             </a:extLst>
           </p:cNvPr>
@@ -9746,7 +9746,7 @@
           <p:cNvPr id="4" name="TextBox 3">
             <a:extLst>
               <a:ext uri="{FF2B5EF4-FFF2-40B4-BE49-F238E27FC236}">
-                <a16:creationId xmlns:a16="http://schemas.microsoft.com/office/drawing/2014/main" id="{98627FE3-B38F-A83B-01E6-D0F1BCFBA8CA}"/>
+                <a16:creationId xmlns:a16="http://schemas.microsoft.com/office/drawing/2014/main" id="{6A6D4436-0F6C-8C0C-231D-A91D5B69263F}"/>
               </a:ext>
             </a:extLst>
           </p:cNvPr>
@@ -9786,7 +9786,7 @@
           <p:cNvPr id="5" name="TextBox 4">
             <a:extLst>
               <a:ext uri="{FF2B5EF4-FFF2-40B4-BE49-F238E27FC236}">
-                <a16:creationId xmlns:a16="http://schemas.microsoft.com/office/drawing/2014/main" id="{FEF88303-149C-C9EA-A965-B882985AEC78}"/>
+                <a16:creationId xmlns:a16="http://schemas.microsoft.com/office/drawing/2014/main" id="{12C20595-6D76-3690-EA3E-5C200B44689C}"/>
               </a:ext>
             </a:extLst>
           </p:cNvPr>
@@ -9832,7 +9832,7 @@
           <p:cNvPr id="6" name="Rectangle: Rounded Corners 5">
             <a:extLst>
               <a:ext uri="{FF2B5EF4-FFF2-40B4-BE49-F238E27FC236}">
-                <a16:creationId xmlns:a16="http://schemas.microsoft.com/office/drawing/2014/main" id="{6458E3EF-776B-C16A-CFA9-5D9CF5297689}"/>
+                <a16:creationId xmlns:a16="http://schemas.microsoft.com/office/drawing/2014/main" id="{4FAC2459-2512-24F7-1D05-391C86233EEA}"/>
               </a:ext>
             </a:extLst>
           </p:cNvPr>
@@ -9902,7 +9902,7 @@
           <p:cNvPr id="7" name="TextBox 6">
             <a:extLst>
               <a:ext uri="{FF2B5EF4-FFF2-40B4-BE49-F238E27FC236}">
-                <a16:creationId xmlns:a16="http://schemas.microsoft.com/office/drawing/2014/main" id="{0FC37FA5-F970-B76A-2F68-75F439E924B3}"/>
+                <a16:creationId xmlns:a16="http://schemas.microsoft.com/office/drawing/2014/main" id="{91006FF3-C84C-E428-E14C-083F02BF57AF}"/>
               </a:ext>
             </a:extLst>
           </p:cNvPr>
@@ -9942,7 +9942,7 @@
           <p:cNvPr id="8" name="TextBox 7">
             <a:extLst>
               <a:ext uri="{FF2B5EF4-FFF2-40B4-BE49-F238E27FC236}">
-                <a16:creationId xmlns:a16="http://schemas.microsoft.com/office/drawing/2014/main" id="{7CC48E50-9D87-5FCD-3953-B4CBD4F406F5}"/>
+                <a16:creationId xmlns:a16="http://schemas.microsoft.com/office/drawing/2014/main" id="{9761EB02-7148-00A3-EAE9-1763E2D98424}"/>
               </a:ext>
             </a:extLst>
           </p:cNvPr>
@@ -9988,7 +9988,7 @@
           <p:cNvPr id="9" name="Rectangle: Rounded Corners 8">
             <a:extLst>
               <a:ext uri="{FF2B5EF4-FFF2-40B4-BE49-F238E27FC236}">
-                <a16:creationId xmlns:a16="http://schemas.microsoft.com/office/drawing/2014/main" id="{13AD4B16-A231-1AC1-4820-3C8320763317}"/>
+                <a16:creationId xmlns:a16="http://schemas.microsoft.com/office/drawing/2014/main" id="{6F4BF82F-4592-2B47-55FD-EB58D1F6FDA2}"/>
               </a:ext>
             </a:extLst>
           </p:cNvPr>
@@ -10058,7 +10058,7 @@
           <p:cNvPr id="10" name="TextBox 9">
             <a:extLst>
               <a:ext uri="{FF2B5EF4-FFF2-40B4-BE49-F238E27FC236}">
-                <a16:creationId xmlns:a16="http://schemas.microsoft.com/office/drawing/2014/main" id="{A73721B4-51B9-9698-35C4-ACD96BF91376}"/>
+                <a16:creationId xmlns:a16="http://schemas.microsoft.com/office/drawing/2014/main" id="{0127D290-D0B4-1264-8976-895EB878FDB8}"/>
               </a:ext>
             </a:extLst>
           </p:cNvPr>
@@ -10098,7 +10098,7 @@
           <p:cNvPr id="11" name="TextBox 10">
             <a:extLst>
               <a:ext uri="{FF2B5EF4-FFF2-40B4-BE49-F238E27FC236}">
-                <a16:creationId xmlns:a16="http://schemas.microsoft.com/office/drawing/2014/main" id="{7966FE76-6BCD-6F99-69FD-1FC2244D34FC}"/>
+                <a16:creationId xmlns:a16="http://schemas.microsoft.com/office/drawing/2014/main" id="{8C6F8015-E9BC-B2FF-B684-B9DAE52DE4B1}"/>
               </a:ext>
             </a:extLst>
           </p:cNvPr>
@@ -10144,7 +10144,7 @@
           <p:cNvPr id="12" name="Rectangle: Rounded Corners 11">
             <a:extLst>
               <a:ext uri="{FF2B5EF4-FFF2-40B4-BE49-F238E27FC236}">
-                <a16:creationId xmlns:a16="http://schemas.microsoft.com/office/drawing/2014/main" id="{8902BF1D-7A52-F545-5650-2052CFE9BFFF}"/>
+                <a16:creationId xmlns:a16="http://schemas.microsoft.com/office/drawing/2014/main" id="{A193E133-86B8-1BFD-9830-BC120EE2DCE0}"/>
               </a:ext>
             </a:extLst>
           </p:cNvPr>
@@ -10214,7 +10214,7 @@
           <p:cNvPr id="13" name="TextBox 12">
             <a:extLst>
               <a:ext uri="{FF2B5EF4-FFF2-40B4-BE49-F238E27FC236}">
-                <a16:creationId xmlns:a16="http://schemas.microsoft.com/office/drawing/2014/main" id="{DD3B6174-A506-30E4-BC7A-A57406B57523}"/>
+                <a16:creationId xmlns:a16="http://schemas.microsoft.com/office/drawing/2014/main" id="{9C100D62-815A-B629-28E2-101D6F435C78}"/>
               </a:ext>
             </a:extLst>
           </p:cNvPr>
@@ -10254,7 +10254,7 @@
           <p:cNvPr id="14" name="TextBox 13">
             <a:extLst>
               <a:ext uri="{FF2B5EF4-FFF2-40B4-BE49-F238E27FC236}">
-                <a16:creationId xmlns:a16="http://schemas.microsoft.com/office/drawing/2014/main" id="{35E9B54F-1426-B68C-66B2-BF548977D83A}"/>
+                <a16:creationId xmlns:a16="http://schemas.microsoft.com/office/drawing/2014/main" id="{1C07239B-FD31-A8EE-C329-E1D42717F4DF}"/>
               </a:ext>
             </a:extLst>
           </p:cNvPr>
@@ -10300,7 +10300,7 @@
           <p:cNvPr id="15" name="Rectangle: Rounded Corners 14">
             <a:extLst>
               <a:ext uri="{FF2B5EF4-FFF2-40B4-BE49-F238E27FC236}">
-                <a16:creationId xmlns:a16="http://schemas.microsoft.com/office/drawing/2014/main" id="{9C61AE3F-210A-92DB-3765-CB3204CEC9D3}"/>
+                <a16:creationId xmlns:a16="http://schemas.microsoft.com/office/drawing/2014/main" id="{91669DBA-D338-56EB-D946-D2E64D21E11A}"/>
               </a:ext>
             </a:extLst>
           </p:cNvPr>
@@ -10370,7 +10370,7 @@
           <p:cNvPr id="16" name="TextBox 15">
             <a:extLst>
               <a:ext uri="{FF2B5EF4-FFF2-40B4-BE49-F238E27FC236}">
-                <a16:creationId xmlns:a16="http://schemas.microsoft.com/office/drawing/2014/main" id="{8DDB26D8-86D7-D4F5-4A5F-E0C76F656ED7}"/>
+                <a16:creationId xmlns:a16="http://schemas.microsoft.com/office/drawing/2014/main" id="{66DD73A0-8D1E-1EA1-F438-2E98812F3704}"/>
               </a:ext>
             </a:extLst>
           </p:cNvPr>
@@ -10410,7 +10410,7 @@
           <p:cNvPr id="17" name="TextBox 16">
             <a:extLst>
               <a:ext uri="{FF2B5EF4-FFF2-40B4-BE49-F238E27FC236}">
-                <a16:creationId xmlns:a16="http://schemas.microsoft.com/office/drawing/2014/main" id="{901E217B-9453-EAE3-6825-1DEED416DD7C}"/>
+                <a16:creationId xmlns:a16="http://schemas.microsoft.com/office/drawing/2014/main" id="{939705F4-446F-5BAA-5A8D-BEED25BC3EAF}"/>
               </a:ext>
             </a:extLst>
           </p:cNvPr>
@@ -10475,7 +10475,7 @@
           <p:cNvPr id="18" name="TextBox 17">
             <a:extLst>
               <a:ext uri="{FF2B5EF4-FFF2-40B4-BE49-F238E27FC236}">
-                <a16:creationId xmlns:a16="http://schemas.microsoft.com/office/drawing/2014/main" id="{66E4E231-D3CA-7EC6-C00C-CA36E2E87FE4}"/>
+                <a16:creationId xmlns:a16="http://schemas.microsoft.com/office/drawing/2014/main" id="{45A851D3-3175-D565-CC80-41D36463DB54}"/>
               </a:ext>
             </a:extLst>
           </p:cNvPr>
@@ -10521,7 +10521,7 @@
           <p:cNvPr id="19" name="TextBox 18">
             <a:extLst>
               <a:ext uri="{FF2B5EF4-FFF2-40B4-BE49-F238E27FC236}">
-                <a16:creationId xmlns:a16="http://schemas.microsoft.com/office/drawing/2014/main" id="{B8118796-4E44-7E78-F7DD-527CF2503B68}"/>
+                <a16:creationId xmlns:a16="http://schemas.microsoft.com/office/drawing/2014/main" id="{E50098F8-8A6B-B9F5-0612-FBCDC50C394E}"/>
               </a:ext>
             </a:extLst>
           </p:cNvPr>
@@ -10567,7 +10567,7 @@
           <p:cNvPr id="20" name="TextBox 19">
             <a:extLst>
               <a:ext uri="{FF2B5EF4-FFF2-40B4-BE49-F238E27FC236}">
-                <a16:creationId xmlns:a16="http://schemas.microsoft.com/office/drawing/2014/main" id="{011FA469-4ABE-D430-F5FC-DCE47BC69524}"/>
+                <a16:creationId xmlns:a16="http://schemas.microsoft.com/office/drawing/2014/main" id="{21A0E533-9C07-2767-6DBE-7F6B1CC5CF8F}"/>
               </a:ext>
             </a:extLst>
           </p:cNvPr>
@@ -10612,7 +10612,7 @@
     </p:spTree>
     <p:extLst>
       <p:ext uri="{BB962C8B-B14F-4D97-AF65-F5344CB8AC3E}">
-        <p14:creationId xmlns:p14="http://schemas.microsoft.com/office/powerpoint/2010/main" val="840067973"/>
+        <p14:creationId xmlns:p14="http://schemas.microsoft.com/office/powerpoint/2010/main" val="229944868"/>
       </p:ext>
     </p:extLst>
   </p:cSld>
@@ -10652,7 +10652,7 @@
           <p:cNvPr id="2" name="TextBox 1">
             <a:extLst>
               <a:ext uri="{FF2B5EF4-FFF2-40B4-BE49-F238E27FC236}">
-                <a16:creationId xmlns:a16="http://schemas.microsoft.com/office/drawing/2014/main" id="{D65B67E1-69DF-4BD9-6895-163D4F5C5938}"/>
+                <a16:creationId xmlns:a16="http://schemas.microsoft.com/office/drawing/2014/main" id="{A2EA7BB2-42CD-7906-1F4C-CED16579D43D}"/>
               </a:ext>
             </a:extLst>
           </p:cNvPr>
@@ -10692,7 +10692,7 @@
           <p:cNvPr id="3" name="TextBox 2">
             <a:extLst>
               <a:ext uri="{FF2B5EF4-FFF2-40B4-BE49-F238E27FC236}">
-                <a16:creationId xmlns:a16="http://schemas.microsoft.com/office/drawing/2014/main" id="{4E313901-54B6-072C-3A4A-11F1D55FF5BC}"/>
+                <a16:creationId xmlns:a16="http://schemas.microsoft.com/office/drawing/2014/main" id="{FA6323EA-AD4B-7643-D079-C515C71A3660}"/>
               </a:ext>
             </a:extLst>
           </p:cNvPr>
@@ -10738,7 +10738,7 @@
           <p:cNvPr id="4" name="Oval 3">
             <a:extLst>
               <a:ext uri="{FF2B5EF4-FFF2-40B4-BE49-F238E27FC236}">
-                <a16:creationId xmlns:a16="http://schemas.microsoft.com/office/drawing/2014/main" id="{1D5DAF36-04AF-0B45-9906-6E90143D8B54}"/>
+                <a16:creationId xmlns:a16="http://schemas.microsoft.com/office/drawing/2014/main" id="{2F08CB45-761A-0652-4D46-46A78B9D04DD}"/>
               </a:ext>
             </a:extLst>
           </p:cNvPr>
@@ -10814,7 +10814,7 @@
           <p:cNvPr id="5" name="TextBox 4">
             <a:extLst>
               <a:ext uri="{FF2B5EF4-FFF2-40B4-BE49-F238E27FC236}">
-                <a16:creationId xmlns:a16="http://schemas.microsoft.com/office/drawing/2014/main" id="{479A3C13-340A-8018-F354-67C420CD8E09}"/>
+                <a16:creationId xmlns:a16="http://schemas.microsoft.com/office/drawing/2014/main" id="{3AF61431-5D3F-7D15-7C17-F3B24A02CC8D}"/>
               </a:ext>
             </a:extLst>
           </p:cNvPr>
@@ -10860,7 +10860,7 @@
           <p:cNvPr id="6" name="Oval 5">
             <a:extLst>
               <a:ext uri="{FF2B5EF4-FFF2-40B4-BE49-F238E27FC236}">
-                <a16:creationId xmlns:a16="http://schemas.microsoft.com/office/drawing/2014/main" id="{12767919-60E4-3A97-550F-9BE49904BD36}"/>
+                <a16:creationId xmlns:a16="http://schemas.microsoft.com/office/drawing/2014/main" id="{83F5CA2F-3048-E6FC-3054-A1B9791E1128}"/>
               </a:ext>
             </a:extLst>
           </p:cNvPr>
@@ -10936,7 +10936,7 @@
           <p:cNvPr id="7" name="TextBox 6">
             <a:extLst>
               <a:ext uri="{FF2B5EF4-FFF2-40B4-BE49-F238E27FC236}">
-                <a16:creationId xmlns:a16="http://schemas.microsoft.com/office/drawing/2014/main" id="{11B2B829-DBEB-F97D-5564-0ED04EBF24C7}"/>
+                <a16:creationId xmlns:a16="http://schemas.microsoft.com/office/drawing/2014/main" id="{4BBD1D18-02B5-758A-EC94-AD3010490F3A}"/>
               </a:ext>
             </a:extLst>
           </p:cNvPr>
@@ -10982,7 +10982,7 @@
           <p:cNvPr id="8" name="Oval 7">
             <a:extLst>
               <a:ext uri="{FF2B5EF4-FFF2-40B4-BE49-F238E27FC236}">
-                <a16:creationId xmlns:a16="http://schemas.microsoft.com/office/drawing/2014/main" id="{EC89F363-1504-6CF5-69C2-E8661ED280D1}"/>
+                <a16:creationId xmlns:a16="http://schemas.microsoft.com/office/drawing/2014/main" id="{479CD5B6-2A00-9C96-60D5-1CC84AE8BF93}"/>
               </a:ext>
             </a:extLst>
           </p:cNvPr>
@@ -11058,7 +11058,7 @@
           <p:cNvPr id="9" name="TextBox 8">
             <a:extLst>
               <a:ext uri="{FF2B5EF4-FFF2-40B4-BE49-F238E27FC236}">
-                <a16:creationId xmlns:a16="http://schemas.microsoft.com/office/drawing/2014/main" id="{EFD9BA74-9C66-3ED6-742A-D3FD6D6E275F}"/>
+                <a16:creationId xmlns:a16="http://schemas.microsoft.com/office/drawing/2014/main" id="{8C49DD4C-1077-D193-9230-23D73D817FE2}"/>
               </a:ext>
             </a:extLst>
           </p:cNvPr>
@@ -11104,7 +11104,7 @@
           <p:cNvPr id="10" name="Oval 9">
             <a:extLst>
               <a:ext uri="{FF2B5EF4-FFF2-40B4-BE49-F238E27FC236}">
-                <a16:creationId xmlns:a16="http://schemas.microsoft.com/office/drawing/2014/main" id="{3615DEAA-C68C-C0C1-1D66-3C035E95E120}"/>
+                <a16:creationId xmlns:a16="http://schemas.microsoft.com/office/drawing/2014/main" id="{8342A0A1-8544-6C7B-87A1-B8C863AA7021}"/>
               </a:ext>
             </a:extLst>
           </p:cNvPr>
@@ -11180,7 +11180,7 @@
           <p:cNvPr id="11" name="TextBox 10">
             <a:extLst>
               <a:ext uri="{FF2B5EF4-FFF2-40B4-BE49-F238E27FC236}">
-                <a16:creationId xmlns:a16="http://schemas.microsoft.com/office/drawing/2014/main" id="{EA516F87-D063-C0EB-ECF5-8856D68B5795}"/>
+                <a16:creationId xmlns:a16="http://schemas.microsoft.com/office/drawing/2014/main" id="{4C467831-D72A-C329-8D14-144788CD3893}"/>
               </a:ext>
             </a:extLst>
           </p:cNvPr>
@@ -11226,7 +11226,7 @@
           <p:cNvPr id="12" name="Oval 11">
             <a:extLst>
               <a:ext uri="{FF2B5EF4-FFF2-40B4-BE49-F238E27FC236}">
-                <a16:creationId xmlns:a16="http://schemas.microsoft.com/office/drawing/2014/main" id="{69434E7B-0F46-1A72-4A0A-A48C05D0EBE8}"/>
+                <a16:creationId xmlns:a16="http://schemas.microsoft.com/office/drawing/2014/main" id="{EE9C3768-C85B-9AF8-5F52-01BAB1D171DD}"/>
               </a:ext>
             </a:extLst>
           </p:cNvPr>
@@ -11302,7 +11302,7 @@
           <p:cNvPr id="13" name="TextBox 12">
             <a:extLst>
               <a:ext uri="{FF2B5EF4-FFF2-40B4-BE49-F238E27FC236}">
-                <a16:creationId xmlns:a16="http://schemas.microsoft.com/office/drawing/2014/main" id="{F8F2AC27-53E9-90F5-718B-55C4031E97F0}"/>
+                <a16:creationId xmlns:a16="http://schemas.microsoft.com/office/drawing/2014/main" id="{CB493E13-FAE6-BB37-455F-A0E41A9286C4}"/>
               </a:ext>
             </a:extLst>
           </p:cNvPr>
@@ -11348,7 +11348,7 @@
           <p:cNvPr id="15" name="Picture 14">
             <a:extLst>
               <a:ext uri="{FF2B5EF4-FFF2-40B4-BE49-F238E27FC236}">
-                <a16:creationId xmlns:a16="http://schemas.microsoft.com/office/drawing/2014/main" id="{B9E2654C-EF34-8A3B-A6A4-739BA8292474}"/>
+                <a16:creationId xmlns:a16="http://schemas.microsoft.com/office/drawing/2014/main" id="{050F8924-5EE8-5604-798E-E13A0EA73F3F}"/>
               </a:ext>
             </a:extLst>
           </p:cNvPr>
@@ -11389,7 +11389,7 @@
           <p:cNvPr id="16" name="TextBox 15">
             <a:extLst>
               <a:ext uri="{FF2B5EF4-FFF2-40B4-BE49-F238E27FC236}">
-                <a16:creationId xmlns:a16="http://schemas.microsoft.com/office/drawing/2014/main" id="{41F2A443-6B0C-1D1D-FA5A-C829B55C3921}"/>
+                <a16:creationId xmlns:a16="http://schemas.microsoft.com/office/drawing/2014/main" id="{EC221306-A152-98F6-D9A7-A0ACF9B32B49}"/>
               </a:ext>
             </a:extLst>
           </p:cNvPr>
@@ -11433,7 +11433,7 @@
     </p:spTree>
     <p:extLst>
       <p:ext uri="{BB962C8B-B14F-4D97-AF65-F5344CB8AC3E}">
-        <p14:creationId xmlns:p14="http://schemas.microsoft.com/office/powerpoint/2010/main" val="2502883447"/>
+        <p14:creationId xmlns:p14="http://schemas.microsoft.com/office/powerpoint/2010/main" val="602383615"/>
       </p:ext>
     </p:extLst>
   </p:cSld>
@@ -11473,7 +11473,7 @@
           <p:cNvPr id="2" name="TextBox 1">
             <a:extLst>
               <a:ext uri="{FF2B5EF4-FFF2-40B4-BE49-F238E27FC236}">
-                <a16:creationId xmlns:a16="http://schemas.microsoft.com/office/drawing/2014/main" id="{2BCBD143-92CA-ED1F-6A07-4080EC683AB2}"/>
+                <a16:creationId xmlns:a16="http://schemas.microsoft.com/office/drawing/2014/main" id="{D473E559-3757-3261-FB24-65C3BDD5F871}"/>
               </a:ext>
             </a:extLst>
           </p:cNvPr>
@@ -11513,7 +11513,7 @@
           <p:cNvPr id="3" name="Oval 2">
             <a:extLst>
               <a:ext uri="{FF2B5EF4-FFF2-40B4-BE49-F238E27FC236}">
-                <a16:creationId xmlns:a16="http://schemas.microsoft.com/office/drawing/2014/main" id="{B77215FA-1815-946D-9E2E-DCF3C75B4126}"/>
+                <a16:creationId xmlns:a16="http://schemas.microsoft.com/office/drawing/2014/main" id="{B31CBEB9-3DAA-6A4B-0A4B-D96C1D83B48E}"/>
               </a:ext>
             </a:extLst>
           </p:cNvPr>
@@ -11589,7 +11589,7 @@
           <p:cNvPr id="4" name="TextBox 3">
             <a:extLst>
               <a:ext uri="{FF2B5EF4-FFF2-40B4-BE49-F238E27FC236}">
-                <a16:creationId xmlns:a16="http://schemas.microsoft.com/office/drawing/2014/main" id="{0B9CCBA9-653B-6438-2DED-C8F472026777}"/>
+                <a16:creationId xmlns:a16="http://schemas.microsoft.com/office/drawing/2014/main" id="{FF1D021A-250D-1D40-37C4-3CB05DD37FCD}"/>
               </a:ext>
             </a:extLst>
           </p:cNvPr>
@@ -11629,7 +11629,7 @@
           <p:cNvPr id="5" name="TextBox 4">
             <a:extLst>
               <a:ext uri="{FF2B5EF4-FFF2-40B4-BE49-F238E27FC236}">
-                <a16:creationId xmlns:a16="http://schemas.microsoft.com/office/drawing/2014/main" id="{CDFC061C-ED0C-629E-90D6-0FF38FF6DD92}"/>
+                <a16:creationId xmlns:a16="http://schemas.microsoft.com/office/drawing/2014/main" id="{D646406A-6148-EF7B-0FD7-6A8973FE9962}"/>
               </a:ext>
             </a:extLst>
           </p:cNvPr>
@@ -11675,7 +11675,7 @@
           <p:cNvPr id="6" name="Oval 5">
             <a:extLst>
               <a:ext uri="{FF2B5EF4-FFF2-40B4-BE49-F238E27FC236}">
-                <a16:creationId xmlns:a16="http://schemas.microsoft.com/office/drawing/2014/main" id="{16806C24-BD74-395C-76E4-39ECE149A46A}"/>
+                <a16:creationId xmlns:a16="http://schemas.microsoft.com/office/drawing/2014/main" id="{822E4A9F-E1D9-38D5-A0C3-A4E31DCBEC7C}"/>
               </a:ext>
             </a:extLst>
           </p:cNvPr>
@@ -11751,7 +11751,7 @@
           <p:cNvPr id="7" name="TextBox 6">
             <a:extLst>
               <a:ext uri="{FF2B5EF4-FFF2-40B4-BE49-F238E27FC236}">
-                <a16:creationId xmlns:a16="http://schemas.microsoft.com/office/drawing/2014/main" id="{B956E3F4-2F05-AA94-8A05-5B2C7A636250}"/>
+                <a16:creationId xmlns:a16="http://schemas.microsoft.com/office/drawing/2014/main" id="{5A6FC0F6-B898-8D58-2DE2-B113435FEB3A}"/>
               </a:ext>
             </a:extLst>
           </p:cNvPr>
@@ -11797,7 +11797,7 @@
           <p:cNvPr id="8" name="TextBox 7">
             <a:extLst>
               <a:ext uri="{FF2B5EF4-FFF2-40B4-BE49-F238E27FC236}">
-                <a16:creationId xmlns:a16="http://schemas.microsoft.com/office/drawing/2014/main" id="{AFBDAEC8-4928-2979-5DA4-E3214C4B4300}"/>
+                <a16:creationId xmlns:a16="http://schemas.microsoft.com/office/drawing/2014/main" id="{2CEBB80F-880C-3F30-D7A5-1CBBD66A58B3}"/>
               </a:ext>
             </a:extLst>
           </p:cNvPr>
@@ -11843,7 +11843,7 @@
           <p:cNvPr id="9" name="Oval 8">
             <a:extLst>
               <a:ext uri="{FF2B5EF4-FFF2-40B4-BE49-F238E27FC236}">
-                <a16:creationId xmlns:a16="http://schemas.microsoft.com/office/drawing/2014/main" id="{A23CACF0-234A-4D2E-1C23-E5B6D8D46F50}"/>
+                <a16:creationId xmlns:a16="http://schemas.microsoft.com/office/drawing/2014/main" id="{2BBD53B9-A1A4-7B47-35EC-B7A2768E73E7}"/>
               </a:ext>
             </a:extLst>
           </p:cNvPr>
@@ -11919,7 +11919,7 @@
           <p:cNvPr id="10" name="TextBox 9">
             <a:extLst>
               <a:ext uri="{FF2B5EF4-FFF2-40B4-BE49-F238E27FC236}">
-                <a16:creationId xmlns:a16="http://schemas.microsoft.com/office/drawing/2014/main" id="{09328F0B-B570-2B1A-425C-E3339819374E}"/>
+                <a16:creationId xmlns:a16="http://schemas.microsoft.com/office/drawing/2014/main" id="{46DDE1AE-0BA5-84BB-4B7B-B49F966804CD}"/>
               </a:ext>
             </a:extLst>
           </p:cNvPr>
@@ -11965,7 +11965,7 @@
           <p:cNvPr id="11" name="TextBox 10">
             <a:extLst>
               <a:ext uri="{FF2B5EF4-FFF2-40B4-BE49-F238E27FC236}">
-                <a16:creationId xmlns:a16="http://schemas.microsoft.com/office/drawing/2014/main" id="{CB5E8D73-65B8-ED36-7944-2D87CE1BBDE6}"/>
+                <a16:creationId xmlns:a16="http://schemas.microsoft.com/office/drawing/2014/main" id="{509AFFA9-9BE1-26FD-0A6A-3CB8CBC718F8}"/>
               </a:ext>
             </a:extLst>
           </p:cNvPr>
@@ -12011,7 +12011,7 @@
           <p:cNvPr id="12" name="Oval 11">
             <a:extLst>
               <a:ext uri="{FF2B5EF4-FFF2-40B4-BE49-F238E27FC236}">
-                <a16:creationId xmlns:a16="http://schemas.microsoft.com/office/drawing/2014/main" id="{82BDC42B-C06F-EBCA-9034-DD45363EE389}"/>
+                <a16:creationId xmlns:a16="http://schemas.microsoft.com/office/drawing/2014/main" id="{3FF7A821-2932-E8D1-F722-86C9502BE3C1}"/>
               </a:ext>
             </a:extLst>
           </p:cNvPr>
@@ -12087,7 +12087,7 @@
           <p:cNvPr id="13" name="TextBox 12">
             <a:extLst>
               <a:ext uri="{FF2B5EF4-FFF2-40B4-BE49-F238E27FC236}">
-                <a16:creationId xmlns:a16="http://schemas.microsoft.com/office/drawing/2014/main" id="{9D4BDF99-555A-CD39-2E81-6E6260D42098}"/>
+                <a16:creationId xmlns:a16="http://schemas.microsoft.com/office/drawing/2014/main" id="{D7EC38D5-CB04-87D8-DDBF-55D08E74CD72}"/>
               </a:ext>
             </a:extLst>
           </p:cNvPr>
@@ -12133,7 +12133,7 @@
           <p:cNvPr id="14" name="TextBox 13">
             <a:extLst>
               <a:ext uri="{FF2B5EF4-FFF2-40B4-BE49-F238E27FC236}">
-                <a16:creationId xmlns:a16="http://schemas.microsoft.com/office/drawing/2014/main" id="{D9DF8FFB-6197-F09B-722C-EA2B624A149B}"/>
+                <a16:creationId xmlns:a16="http://schemas.microsoft.com/office/drawing/2014/main" id="{BEDB3493-2084-DA51-893E-A1E3114B80CC}"/>
               </a:ext>
             </a:extLst>
           </p:cNvPr>
@@ -12179,7 +12179,7 @@
           <p:cNvPr id="15" name="Oval 14">
             <a:extLst>
               <a:ext uri="{FF2B5EF4-FFF2-40B4-BE49-F238E27FC236}">
-                <a16:creationId xmlns:a16="http://schemas.microsoft.com/office/drawing/2014/main" id="{6B8011B5-6845-A985-BAA8-AF3F3A5E7B18}"/>
+                <a16:creationId xmlns:a16="http://schemas.microsoft.com/office/drawing/2014/main" id="{C2E3B97C-10AD-D2F2-813F-55A9A7AF729C}"/>
               </a:ext>
             </a:extLst>
           </p:cNvPr>
@@ -12255,7 +12255,7 @@
           <p:cNvPr id="16" name="TextBox 15">
             <a:extLst>
               <a:ext uri="{FF2B5EF4-FFF2-40B4-BE49-F238E27FC236}">
-                <a16:creationId xmlns:a16="http://schemas.microsoft.com/office/drawing/2014/main" id="{5C7E7195-4CA5-7F6F-B42B-1EA4FA3DD821}"/>
+                <a16:creationId xmlns:a16="http://schemas.microsoft.com/office/drawing/2014/main" id="{009EC2A4-C12F-4210-0579-39EB8DF1E5F5}"/>
               </a:ext>
             </a:extLst>
           </p:cNvPr>
@@ -12301,7 +12301,7 @@
           <p:cNvPr id="17" name="TextBox 16">
             <a:extLst>
               <a:ext uri="{FF2B5EF4-FFF2-40B4-BE49-F238E27FC236}">
-                <a16:creationId xmlns:a16="http://schemas.microsoft.com/office/drawing/2014/main" id="{85571932-1C1D-3434-1DF3-4508E28808A9}"/>
+                <a16:creationId xmlns:a16="http://schemas.microsoft.com/office/drawing/2014/main" id="{EDF58230-731F-7DA6-3CD3-9B3E133D2E39}"/>
               </a:ext>
             </a:extLst>
           </p:cNvPr>
@@ -12347,7 +12347,7 @@
           <p:cNvPr id="19" name="Picture 18">
             <a:extLst>
               <a:ext uri="{FF2B5EF4-FFF2-40B4-BE49-F238E27FC236}">
-                <a16:creationId xmlns:a16="http://schemas.microsoft.com/office/drawing/2014/main" id="{1ABA6A61-DF6E-7543-0130-86A791F0C7C8}"/>
+                <a16:creationId xmlns:a16="http://schemas.microsoft.com/office/drawing/2014/main" id="{5BAC6AD2-B352-90E5-937F-D13BF1A2E5C3}"/>
               </a:ext>
             </a:extLst>
           </p:cNvPr>
@@ -12371,7 +12371,7 @@
         <p:spPr>
           <a:xfrm>
             <a:off x="6858000" y="1219200"/>
-            <a:ext cx="4724400" cy="1637479"/>
+            <a:ext cx="4724400" cy="1555358"/>
           </a:xfrm>
           <a:prstGeom prst="rect">
             <a:avLst/>
@@ -12388,7 +12388,7 @@
           <p:cNvPr id="20" name="TextBox 19">
             <a:extLst>
               <a:ext uri="{FF2B5EF4-FFF2-40B4-BE49-F238E27FC236}">
-                <a16:creationId xmlns:a16="http://schemas.microsoft.com/office/drawing/2014/main" id="{F3A116ED-3D57-0663-8791-BCAB566DC0FC}"/>
+                <a16:creationId xmlns:a16="http://schemas.microsoft.com/office/drawing/2014/main" id="{63D31B71-D6B7-D3FD-314E-20E6A5899BD5}"/>
               </a:ext>
             </a:extLst>
           </p:cNvPr>
@@ -12434,7 +12434,7 @@
           <p:cNvPr id="21" name="Rectangle: Rounded Corners 20">
             <a:extLst>
               <a:ext uri="{FF2B5EF4-FFF2-40B4-BE49-F238E27FC236}">
-                <a16:creationId xmlns:a16="http://schemas.microsoft.com/office/drawing/2014/main" id="{EC47C2EF-2483-0FC5-C71C-8D7C651487AD}"/>
+                <a16:creationId xmlns:a16="http://schemas.microsoft.com/office/drawing/2014/main" id="{41D7558D-B77C-E63A-4BF9-DC8A8F4E41B1}"/>
               </a:ext>
             </a:extLst>
           </p:cNvPr>
@@ -12504,7 +12504,7 @@
           <p:cNvPr id="22" name="TextBox 21">
             <a:extLst>
               <a:ext uri="{FF2B5EF4-FFF2-40B4-BE49-F238E27FC236}">
-                <a16:creationId xmlns:a16="http://schemas.microsoft.com/office/drawing/2014/main" id="{F9CCEA8D-2F4A-3D58-48A2-1D50BBCD3092}"/>
+                <a16:creationId xmlns:a16="http://schemas.microsoft.com/office/drawing/2014/main" id="{B8BBC3EF-B7D8-25F1-D3F0-7CCFA19E7BE7}"/>
               </a:ext>
             </a:extLst>
           </p:cNvPr>
@@ -12550,7 +12550,7 @@
           <p:cNvPr id="23" name="TextBox 22">
             <a:extLst>
               <a:ext uri="{FF2B5EF4-FFF2-40B4-BE49-F238E27FC236}">
-                <a16:creationId xmlns:a16="http://schemas.microsoft.com/office/drawing/2014/main" id="{BC5ED68C-88FD-3CD8-D57B-E5396FFA9574}"/>
+                <a16:creationId xmlns:a16="http://schemas.microsoft.com/office/drawing/2014/main" id="{953562D2-A7F7-F7BA-5359-7BE2671F278C}"/>
               </a:ext>
             </a:extLst>
           </p:cNvPr>
@@ -12595,7 +12595,7 @@
     </p:spTree>
     <p:extLst>
       <p:ext uri="{BB962C8B-B14F-4D97-AF65-F5344CB8AC3E}">
-        <p14:creationId xmlns:p14="http://schemas.microsoft.com/office/powerpoint/2010/main" val="2016868221"/>
+        <p14:creationId xmlns:p14="http://schemas.microsoft.com/office/powerpoint/2010/main" val="1924401444"/>
       </p:ext>
     </p:extLst>
   </p:cSld>
@@ -12635,7 +12635,7 @@
           <p:cNvPr id="2" name="TextBox 1">
             <a:extLst>
               <a:ext uri="{FF2B5EF4-FFF2-40B4-BE49-F238E27FC236}">
-                <a16:creationId xmlns:a16="http://schemas.microsoft.com/office/drawing/2014/main" id="{7768FF72-F555-D38B-CE48-F1C6B7E81B8B}"/>
+                <a16:creationId xmlns:a16="http://schemas.microsoft.com/office/drawing/2014/main" id="{7738CE7D-D954-18B1-BE36-DC05ED5A9120}"/>
               </a:ext>
             </a:extLst>
           </p:cNvPr>
@@ -12681,7 +12681,7 @@
           <p:cNvPr id="3" name="Rectangle: Rounded Corners 2">
             <a:extLst>
               <a:ext uri="{FF2B5EF4-FFF2-40B4-BE49-F238E27FC236}">
-                <a16:creationId xmlns:a16="http://schemas.microsoft.com/office/drawing/2014/main" id="{2EFA95AA-456E-E31E-13CD-D22A3C0410F0}"/>
+                <a16:creationId xmlns:a16="http://schemas.microsoft.com/office/drawing/2014/main" id="{D92970D0-0E5E-E861-22BC-B6966574B2A0}"/>
               </a:ext>
             </a:extLst>
           </p:cNvPr>
@@ -12751,7 +12751,7 @@
           <p:cNvPr id="4" name="TextBox 3">
             <a:extLst>
               <a:ext uri="{FF2B5EF4-FFF2-40B4-BE49-F238E27FC236}">
-                <a16:creationId xmlns:a16="http://schemas.microsoft.com/office/drawing/2014/main" id="{386F4988-ECAF-512C-0E75-518244548E0E}"/>
+                <a16:creationId xmlns:a16="http://schemas.microsoft.com/office/drawing/2014/main" id="{1CB4C106-5DDA-0E15-B5F8-120AB1A87987}"/>
               </a:ext>
             </a:extLst>
           </p:cNvPr>
@@ -12791,7 +12791,7 @@
           <p:cNvPr id="5" name="TextBox 4">
             <a:extLst>
               <a:ext uri="{FF2B5EF4-FFF2-40B4-BE49-F238E27FC236}">
-                <a16:creationId xmlns:a16="http://schemas.microsoft.com/office/drawing/2014/main" id="{49D34EBB-9B5D-BC05-0EDB-DC7C738F343C}"/>
+                <a16:creationId xmlns:a16="http://schemas.microsoft.com/office/drawing/2014/main" id="{FFD3A06B-6E2B-2445-E29E-E74B63D211FE}"/>
               </a:ext>
             </a:extLst>
           </p:cNvPr>
@@ -12832,7 +12832,7 @@
           <p:cNvPr id="6" name="TextBox 5">
             <a:extLst>
               <a:ext uri="{FF2B5EF4-FFF2-40B4-BE49-F238E27FC236}">
-                <a16:creationId xmlns:a16="http://schemas.microsoft.com/office/drawing/2014/main" id="{F08C85B7-A61D-B48B-3580-D59975CBC7B8}"/>
+                <a16:creationId xmlns:a16="http://schemas.microsoft.com/office/drawing/2014/main" id="{95BCAD2F-09DA-2C17-D4F1-E9A45E47484C}"/>
               </a:ext>
             </a:extLst>
           </p:cNvPr>
@@ -12872,7 +12872,7 @@
           <p:cNvPr id="7" name="TextBox 6">
             <a:extLst>
               <a:ext uri="{FF2B5EF4-FFF2-40B4-BE49-F238E27FC236}">
-                <a16:creationId xmlns:a16="http://schemas.microsoft.com/office/drawing/2014/main" id="{DF945A09-FB40-D78B-A402-9D34E53FB97A}"/>
+                <a16:creationId xmlns:a16="http://schemas.microsoft.com/office/drawing/2014/main" id="{C63DEA6E-418C-9C05-C142-05E066C9715C}"/>
               </a:ext>
             </a:extLst>
           </p:cNvPr>
@@ -12918,7 +12918,7 @@
           <p:cNvPr id="8" name="TextBox 7">
             <a:extLst>
               <a:ext uri="{FF2B5EF4-FFF2-40B4-BE49-F238E27FC236}">
-                <a16:creationId xmlns:a16="http://schemas.microsoft.com/office/drawing/2014/main" id="{D2CC8564-C428-2AFE-B20F-BC583FD65CF8}"/>
+                <a16:creationId xmlns:a16="http://schemas.microsoft.com/office/drawing/2014/main" id="{60C81569-1083-735E-0C50-39560C5241F3}"/>
               </a:ext>
             </a:extLst>
           </p:cNvPr>
@@ -12964,7 +12964,7 @@
           <p:cNvPr id="9" name="TextBox 8">
             <a:extLst>
               <a:ext uri="{FF2B5EF4-FFF2-40B4-BE49-F238E27FC236}">
-                <a16:creationId xmlns:a16="http://schemas.microsoft.com/office/drawing/2014/main" id="{C4DE0A9B-7B5E-473E-96EC-9007E66D646C}"/>
+                <a16:creationId xmlns:a16="http://schemas.microsoft.com/office/drawing/2014/main" id="{D20A4D39-5702-CAD5-C282-F368871EE367}"/>
               </a:ext>
             </a:extLst>
           </p:cNvPr>
@@ -13010,7 +13010,7 @@
           <p:cNvPr id="10" name="Table 9">
             <a:extLst>
               <a:ext uri="{FF2B5EF4-FFF2-40B4-BE49-F238E27FC236}">
-                <a16:creationId xmlns:a16="http://schemas.microsoft.com/office/drawing/2014/main" id="{A0D13DA6-A89A-A541-1127-61EAA818C0BF}"/>
+                <a16:creationId xmlns:a16="http://schemas.microsoft.com/office/drawing/2014/main" id="{30AA40DA-6981-7E4E-4BDF-93B61D8D92AB}"/>
               </a:ext>
             </a:extLst>
           </p:cNvPr>
@@ -13020,7 +13020,7 @@
           <p:nvPr>
             <p:extLst>
               <p:ext uri="{D42A27DB-BD31-4B8C-83A1-F6EECF244321}">
-                <p14:modId xmlns:p14="http://schemas.microsoft.com/office/powerpoint/2010/main" val="2527530362"/>
+                <p14:modId xmlns:p14="http://schemas.microsoft.com/office/powerpoint/2010/main" val="1719314457"/>
               </p:ext>
             </p:extLst>
           </p:nvPr>
@@ -13039,21 +13039,21 @@
                 <a:gridCol w="1905000">
                   <a:extLst>
                     <a:ext uri="{9D8B030D-6E8A-4147-A177-3AD203B41FA5}">
-                      <a16:colId xmlns:a16="http://schemas.microsoft.com/office/drawing/2014/main" val="3343986346"/>
+                      <a16:colId xmlns:a16="http://schemas.microsoft.com/office/drawing/2014/main" val="3740707985"/>
                     </a:ext>
                   </a:extLst>
                 </a:gridCol>
                 <a:gridCol w="2413000">
                   <a:extLst>
                     <a:ext uri="{9D8B030D-6E8A-4147-A177-3AD203B41FA5}">
-                      <a16:colId xmlns:a16="http://schemas.microsoft.com/office/drawing/2014/main" val="2023551692"/>
+                      <a16:colId xmlns:a16="http://schemas.microsoft.com/office/drawing/2014/main" val="1685868824"/>
                     </a:ext>
                   </a:extLst>
                 </a:gridCol>
                 <a:gridCol w="2032000">
                   <a:extLst>
                     <a:ext uri="{9D8B030D-6E8A-4147-A177-3AD203B41FA5}">
-                      <a16:colId xmlns:a16="http://schemas.microsoft.com/office/drawing/2014/main" val="735085174"/>
+                      <a16:colId xmlns:a16="http://schemas.microsoft.com/office/drawing/2014/main" val="466614331"/>
                     </a:ext>
                   </a:extLst>
                 </a:gridCol>
@@ -13127,7 +13127,7 @@
                 </a:tc>
                 <a:extLst>
                   <a:ext uri="{0D108BD9-81ED-4DB2-BD59-A6C34878D82A}">
-                    <a16:rowId xmlns:a16="http://schemas.microsoft.com/office/drawing/2014/main" val="3553963012"/>
+                    <a16:rowId xmlns:a16="http://schemas.microsoft.com/office/drawing/2014/main" val="4214236672"/>
                   </a:ext>
                 </a:extLst>
               </a:tr>
@@ -13212,7 +13212,7 @@
                 </a:tc>
                 <a:extLst>
                   <a:ext uri="{0D108BD9-81ED-4DB2-BD59-A6C34878D82A}">
-                    <a16:rowId xmlns:a16="http://schemas.microsoft.com/office/drawing/2014/main" val="371457210"/>
+                    <a16:rowId xmlns:a16="http://schemas.microsoft.com/office/drawing/2014/main" val="3875446484"/>
                   </a:ext>
                 </a:extLst>
               </a:tr>
@@ -13291,7 +13291,7 @@
                 </a:tc>
                 <a:extLst>
                   <a:ext uri="{0D108BD9-81ED-4DB2-BD59-A6C34878D82A}">
-                    <a16:rowId xmlns:a16="http://schemas.microsoft.com/office/drawing/2014/main" val="367128025"/>
+                    <a16:rowId xmlns:a16="http://schemas.microsoft.com/office/drawing/2014/main" val="3087260214"/>
                   </a:ext>
                 </a:extLst>
               </a:tr>
@@ -13370,7 +13370,7 @@
                 </a:tc>
                 <a:extLst>
                   <a:ext uri="{0D108BD9-81ED-4DB2-BD59-A6C34878D82A}">
-                    <a16:rowId xmlns:a16="http://schemas.microsoft.com/office/drawing/2014/main" val="165586755"/>
+                    <a16:rowId xmlns:a16="http://schemas.microsoft.com/office/drawing/2014/main" val="1379968979"/>
                   </a:ext>
                 </a:extLst>
               </a:tr>
@@ -13383,7 +13383,7 @@
           <p:cNvPr id="11" name="Rectangle: Rounded Corners 10">
             <a:extLst>
               <a:ext uri="{FF2B5EF4-FFF2-40B4-BE49-F238E27FC236}">
-                <a16:creationId xmlns:a16="http://schemas.microsoft.com/office/drawing/2014/main" id="{40C5B6C1-634B-6D2D-463E-C62C7465FFAB}"/>
+                <a16:creationId xmlns:a16="http://schemas.microsoft.com/office/drawing/2014/main" id="{A08336D7-FC38-AF0A-A521-AA40F1BD0A02}"/>
               </a:ext>
             </a:extLst>
           </p:cNvPr>
@@ -13453,7 +13453,7 @@
           <p:cNvPr id="12" name="TextBox 11">
             <a:extLst>
               <a:ext uri="{FF2B5EF4-FFF2-40B4-BE49-F238E27FC236}">
-                <a16:creationId xmlns:a16="http://schemas.microsoft.com/office/drawing/2014/main" id="{2B2FD53F-42C4-7FFA-BB6F-A4D92E9F97F7}"/>
+                <a16:creationId xmlns:a16="http://schemas.microsoft.com/office/drawing/2014/main" id="{7701BFF2-1998-8590-1F64-834E4688D65B}"/>
               </a:ext>
             </a:extLst>
           </p:cNvPr>
@@ -13493,7 +13493,7 @@
           <p:cNvPr id="13" name="Oval 12">
             <a:extLst>
               <a:ext uri="{FF2B5EF4-FFF2-40B4-BE49-F238E27FC236}">
-                <a16:creationId xmlns:a16="http://schemas.microsoft.com/office/drawing/2014/main" id="{A70ACB19-933E-0D2E-C404-5AA165357E41}"/>
+                <a16:creationId xmlns:a16="http://schemas.microsoft.com/office/drawing/2014/main" id="{7303B453-60DE-242E-2518-0A89230BA2A2}"/>
               </a:ext>
             </a:extLst>
           </p:cNvPr>
@@ -13569,7 +13569,7 @@
           <p:cNvPr id="14" name="TextBox 13">
             <a:extLst>
               <a:ext uri="{FF2B5EF4-FFF2-40B4-BE49-F238E27FC236}">
-                <a16:creationId xmlns:a16="http://schemas.microsoft.com/office/drawing/2014/main" id="{247E4116-17C4-46F3-82A8-2E80C26D436F}"/>
+                <a16:creationId xmlns:a16="http://schemas.microsoft.com/office/drawing/2014/main" id="{22661D1E-DC82-0EB4-5242-D84BA2379B05}"/>
               </a:ext>
             </a:extLst>
           </p:cNvPr>
@@ -13609,7 +13609,7 @@
           <p:cNvPr id="15" name="TextBox 14">
             <a:extLst>
               <a:ext uri="{FF2B5EF4-FFF2-40B4-BE49-F238E27FC236}">
-                <a16:creationId xmlns:a16="http://schemas.microsoft.com/office/drawing/2014/main" id="{19476F54-B086-B5A4-21D1-00E185EB27C4}"/>
+                <a16:creationId xmlns:a16="http://schemas.microsoft.com/office/drawing/2014/main" id="{0D06813F-0442-3771-C98C-3F88D77AEBC6}"/>
               </a:ext>
             </a:extLst>
           </p:cNvPr>
@@ -13655,7 +13655,7 @@
           <p:cNvPr id="16" name="Oval 15">
             <a:extLst>
               <a:ext uri="{FF2B5EF4-FFF2-40B4-BE49-F238E27FC236}">
-                <a16:creationId xmlns:a16="http://schemas.microsoft.com/office/drawing/2014/main" id="{F4DE42C6-2433-F9D0-BDF0-3082F1529AFE}"/>
+                <a16:creationId xmlns:a16="http://schemas.microsoft.com/office/drawing/2014/main" id="{3F26B9A4-DC1C-CC14-0244-1401CD0BDA80}"/>
               </a:ext>
             </a:extLst>
           </p:cNvPr>
@@ -13731,7 +13731,7 @@
           <p:cNvPr id="17" name="TextBox 16">
             <a:extLst>
               <a:ext uri="{FF2B5EF4-FFF2-40B4-BE49-F238E27FC236}">
-                <a16:creationId xmlns:a16="http://schemas.microsoft.com/office/drawing/2014/main" id="{2E91F175-857B-C246-BCF6-E83255B218D9}"/>
+                <a16:creationId xmlns:a16="http://schemas.microsoft.com/office/drawing/2014/main" id="{D11C9934-37E9-B1A3-1CB6-C53C65A47005}"/>
               </a:ext>
             </a:extLst>
           </p:cNvPr>
@@ -13777,7 +13777,7 @@
           <p:cNvPr id="18" name="TextBox 17">
             <a:extLst>
               <a:ext uri="{FF2B5EF4-FFF2-40B4-BE49-F238E27FC236}">
-                <a16:creationId xmlns:a16="http://schemas.microsoft.com/office/drawing/2014/main" id="{7198EB29-F928-DBB7-0448-18CE7380A901}"/>
+                <a16:creationId xmlns:a16="http://schemas.microsoft.com/office/drawing/2014/main" id="{D616EE68-E849-355A-40FF-7A2810E91781}"/>
               </a:ext>
             </a:extLst>
           </p:cNvPr>
@@ -13823,7 +13823,7 @@
           <p:cNvPr id="19" name="Oval 18">
             <a:extLst>
               <a:ext uri="{FF2B5EF4-FFF2-40B4-BE49-F238E27FC236}">
-                <a16:creationId xmlns:a16="http://schemas.microsoft.com/office/drawing/2014/main" id="{E5F55A10-55B7-8735-F919-43426B6AF219}"/>
+                <a16:creationId xmlns:a16="http://schemas.microsoft.com/office/drawing/2014/main" id="{D51C04D3-4E12-6C55-45B5-FFA2A50ABB5B}"/>
               </a:ext>
             </a:extLst>
           </p:cNvPr>
@@ -13899,7 +13899,7 @@
           <p:cNvPr id="20" name="TextBox 19">
             <a:extLst>
               <a:ext uri="{FF2B5EF4-FFF2-40B4-BE49-F238E27FC236}">
-                <a16:creationId xmlns:a16="http://schemas.microsoft.com/office/drawing/2014/main" id="{86201F4F-4ADF-746A-24E7-F24D5F2B29F3}"/>
+                <a16:creationId xmlns:a16="http://schemas.microsoft.com/office/drawing/2014/main" id="{A4A95E48-80A3-D72B-211D-C3C7E8A0842C}"/>
               </a:ext>
             </a:extLst>
           </p:cNvPr>
@@ -13939,7 +13939,7 @@
           <p:cNvPr id="21" name="TextBox 20">
             <a:extLst>
               <a:ext uri="{FF2B5EF4-FFF2-40B4-BE49-F238E27FC236}">
-                <a16:creationId xmlns:a16="http://schemas.microsoft.com/office/drawing/2014/main" id="{A4D82526-38AB-64C7-0939-21612383689A}"/>
+                <a16:creationId xmlns:a16="http://schemas.microsoft.com/office/drawing/2014/main" id="{AB7AD622-B911-0D98-B56B-6FC760EB1C45}"/>
               </a:ext>
             </a:extLst>
           </p:cNvPr>
@@ -13985,7 +13985,7 @@
           <p:cNvPr id="22" name="TextBox 21">
             <a:extLst>
               <a:ext uri="{FF2B5EF4-FFF2-40B4-BE49-F238E27FC236}">
-                <a16:creationId xmlns:a16="http://schemas.microsoft.com/office/drawing/2014/main" id="{8C5E3A47-049C-1560-3221-4053BE818BE9}"/>
+                <a16:creationId xmlns:a16="http://schemas.microsoft.com/office/drawing/2014/main" id="{E3DD8344-12B6-C71F-DE9E-C34378B3B79E}"/>
               </a:ext>
             </a:extLst>
           </p:cNvPr>
@@ -14031,7 +14031,7 @@
           <p:cNvPr id="23" name="TextBox 22">
             <a:extLst>
               <a:ext uri="{FF2B5EF4-FFF2-40B4-BE49-F238E27FC236}">
-                <a16:creationId xmlns:a16="http://schemas.microsoft.com/office/drawing/2014/main" id="{BF8FFEE7-5CE8-0A05-F699-5E110EBC39C0}"/>
+                <a16:creationId xmlns:a16="http://schemas.microsoft.com/office/drawing/2014/main" id="{042671B3-81A7-1313-980C-FF3C04A14877}"/>
               </a:ext>
             </a:extLst>
           </p:cNvPr>
@@ -14070,7 +14070,7 @@
     </p:spTree>
     <p:extLst>
       <p:ext uri="{BB962C8B-B14F-4D97-AF65-F5344CB8AC3E}">
-        <p14:creationId xmlns:p14="http://schemas.microsoft.com/office/powerpoint/2010/main" val="2581334097"/>
+        <p14:creationId xmlns:p14="http://schemas.microsoft.com/office/powerpoint/2010/main" val="1296645062"/>
       </p:ext>
     </p:extLst>
   </p:cSld>

--- a/docs/Sentinel-final-pitch.pptx
+++ b/docs/Sentinel-final-pitch.pptx
@@ -199,7 +199,7 @@
             </a:lvl1pPr>
           </a:lstStyle>
           <a:p>
-            <a:fld id="{602EEB48-D76A-4F0B-A911-28B67C8066E0}" type="datetimeFigureOut">
+            <a:fld id="{F1FC457D-3C95-45A3-85A8-DC23A40AC347}" type="datetimeFigureOut">
               <a:rPr lang="en-MY" smtClean="0"/>
               <a:t>25/9/2026</a:t>
             </a:fld>
@@ -358,7 +358,7 @@
             </a:lvl1pPr>
           </a:lstStyle>
           <a:p>
-            <a:fld id="{67F9A505-9FD4-4536-B0A5-E8F96FD98A8B}" type="slidenum">
+            <a:fld id="{C7A5CE51-0934-426A-8706-9F85B6A2C377}" type="slidenum">
               <a:rPr lang="en-MY" smtClean="0"/>
               <a:t>‹#›</a:t>
             </a:fld>
@@ -369,7 +369,7 @@
     </p:spTree>
     <p:extLst>
       <p:ext uri="{BB962C8B-B14F-4D97-AF65-F5344CB8AC3E}">
-        <p14:creationId xmlns:p14="http://schemas.microsoft.com/office/powerpoint/2010/main" val="2198754436"/>
+        <p14:creationId xmlns:p14="http://schemas.microsoft.com/office/powerpoint/2010/main" val="2379357973"/>
       </p:ext>
     </p:extLst>
   </p:cSld>
@@ -536,7 +536,7 @@
           <a:bodyPr/>
           <a:lstStyle/>
           <a:p>
-            <a:fld id="{67F9A505-9FD4-4536-B0A5-E8F96FD98A8B}" type="slidenum">
+            <a:fld id="{C7A5CE51-0934-426A-8706-9F85B6A2C377}" type="slidenum">
               <a:rPr lang="en-MY" smtClean="0"/>
               <a:t>1</a:t>
             </a:fld>
@@ -547,7 +547,7 @@
     </p:spTree>
     <p:extLst>
       <p:ext uri="{BB962C8B-B14F-4D97-AF65-F5344CB8AC3E}">
-        <p14:creationId xmlns:p14="http://schemas.microsoft.com/office/powerpoint/2010/main" val="3505620229"/>
+        <p14:creationId xmlns:p14="http://schemas.microsoft.com/office/powerpoint/2010/main" val="3516170576"/>
       </p:ext>
     </p:extLst>
   </p:cSld>
@@ -624,7 +624,7 @@
           <a:bodyPr/>
           <a:lstStyle/>
           <a:p>
-            <a:fld id="{67F9A505-9FD4-4536-B0A5-E8F96FD98A8B}" type="slidenum">
+            <a:fld id="{C7A5CE51-0934-426A-8706-9F85B6A2C377}" type="slidenum">
               <a:rPr lang="en-MY" smtClean="0"/>
               <a:t>10</a:t>
             </a:fld>
@@ -635,7 +635,7 @@
     </p:spTree>
     <p:extLst>
       <p:ext uri="{BB962C8B-B14F-4D97-AF65-F5344CB8AC3E}">
-        <p14:creationId xmlns:p14="http://schemas.microsoft.com/office/powerpoint/2010/main" val="4199060362"/>
+        <p14:creationId xmlns:p14="http://schemas.microsoft.com/office/powerpoint/2010/main" val="740507002"/>
       </p:ext>
     </p:extLst>
   </p:cSld>
@@ -691,7 +691,7 @@
           <a:p>
             <a:r>
               <a:rPr lang="en-US"/>
-              <a:t>Why we built it: a shipping desk gets five kinds of mail in one inbox, and for every document check a person compares the Shipping Instruction against the draft Bill of Lading - seven fields, by hand. At a conservative estimate that is about four minutes a pair and twenty seconds to triage each email; this inbox alone is a day and a half of desk work. Miss one field and it's a correction, a delay, rework. And there's a fourth case the statement names: sometimes the check can't be done - an unreadable scan, a blank field, the wrong document. That has to reach a person with the reason, not be guessed at. Sentinel does all four. (0:15-0:40)</a:t>
+              <a:t>Why we built it: a shipping desk gets five kinds of mail in one inbox, and for every document check a person compares the Shipping Instruction against the draft Bill of Lading - seven fields, manually. At a conservative estimate that is about four minutes a pair and twenty seconds to triage each email; this inbox alone is a day and a half of desk work. Miss one field and it's a correction, a delay, rework. And there's a fourth case the statement names: sometimes the check can't be done - an unreadable scan, a blank field, the wrong document. That has to be escalated to a reviewer with the reason, not guessed at. Sentinel does all four. (0:15-0:40)</a:t>
             </a:r>
             <a:endParaRPr lang="en-MY"/>
           </a:p>
@@ -712,7 +712,7 @@
           <a:bodyPr/>
           <a:lstStyle/>
           <a:p>
-            <a:fld id="{67F9A505-9FD4-4536-B0A5-E8F96FD98A8B}" type="slidenum">
+            <a:fld id="{C7A5CE51-0934-426A-8706-9F85B6A2C377}" type="slidenum">
               <a:rPr lang="en-MY" smtClean="0"/>
               <a:t>2</a:t>
             </a:fld>
@@ -723,7 +723,7 @@
     </p:spTree>
     <p:extLst>
       <p:ext uri="{BB962C8B-B14F-4D97-AF65-F5344CB8AC3E}">
-        <p14:creationId xmlns:p14="http://schemas.microsoft.com/office/powerpoint/2010/main" val="4172555758"/>
+        <p14:creationId xmlns:p14="http://schemas.microsoft.com/office/powerpoint/2010/main" val="2424027098"/>
       </p:ext>
     </p:extLst>
   </p:cSld>
@@ -779,7 +779,7 @@
           <a:p>
             <a:r>
               <a:rPr lang="en-US"/>
-              <a:t>This is the whole inbox, live on Render and Vercel - not a sample, the organisers' 520 emails. Every email classified, every document pair compared, every case Sentinel can't decide sent to a person with the reason attached. Thirteen seconds. And this is how a desk uses it, four steps: run the inbox, open a flagged case, confirm it or correct one field or re-upload the corrected document, send the drafted reply. Do not say the accuracy here - that is slide 6. (0:40-1:05)</a:t>
+              <a:t>This is the whole inbox, live on Render and Vercel - not a sample, the organisers' 520 emails. Every email classified, every document pair compared, every case Sentinel can't decide escalated with the reason attached. Thirteen seconds. And this is how a desk uses it, four steps: run the inbox, open a flagged case, confirm or override it - correct a single value or attach the amended SI/BL - then send the drafted reply. Do not say the accuracy here - that is slide 6. (0:40-1:05)</a:t>
             </a:r>
             <a:endParaRPr lang="en-MY"/>
           </a:p>
@@ -800,7 +800,7 @@
           <a:bodyPr/>
           <a:lstStyle/>
           <a:p>
-            <a:fld id="{67F9A505-9FD4-4536-B0A5-E8F96FD98A8B}" type="slidenum">
+            <a:fld id="{C7A5CE51-0934-426A-8706-9F85B6A2C377}" type="slidenum">
               <a:rPr lang="en-MY" smtClean="0"/>
               <a:t>3</a:t>
             </a:fld>
@@ -811,7 +811,7 @@
     </p:spTree>
     <p:extLst>
       <p:ext uri="{BB962C8B-B14F-4D97-AF65-F5344CB8AC3E}">
-        <p14:creationId xmlns:p14="http://schemas.microsoft.com/office/powerpoint/2010/main" val="582362551"/>
+        <p14:creationId xmlns:p14="http://schemas.microsoft.com/office/powerpoint/2010/main" val="4106283671"/>
       </p:ext>
     </p:extLst>
   </p:cSld>
@@ -867,7 +867,7 @@
           <a:p>
             <a:r>
               <a:rPr lang="en-US"/>
-              <a:t>Six stages, one direction. Two choices carry the design. Values are compared exactly after canonicalising, never by similarity - a threshold loose enough to forgive a scan artefact also merges two real companies, and the data has those. And the gate after the comparison can overrule it: a value we cannot find again in the document it was read from is never reported as a discrepancy - it becomes a question for a person. The pipeline is a stateless library with no web or database in it, which is also the scaling story: throughput is more copies of it; the state sits behind one class in one file. (1:05-1:40)</a:t>
+              <a:t>Six stages, one direction. Two choices carry the design. Values are compared exactly after canonicalising, never by similarity - a threshold loose enough to forgive a scan artefact also merges two real companies, and the data has those. And the gate after the comparison can overrule it: a value we cannot find again in the document it was read from is never reported as a discrepancy - it is escalated to a reviewer. The pipeline is a stateless library with no web or database in it, which is also the scaling story: throughput is more copies of it; the state sits behind one class in one file. (1:05-1:40)</a:t>
             </a:r>
             <a:endParaRPr lang="en-MY"/>
           </a:p>
@@ -888,7 +888,7 @@
           <a:bodyPr/>
           <a:lstStyle/>
           <a:p>
-            <a:fld id="{67F9A505-9FD4-4536-B0A5-E8F96FD98A8B}" type="slidenum">
+            <a:fld id="{C7A5CE51-0934-426A-8706-9F85B6A2C377}" type="slidenum">
               <a:rPr lang="en-MY" smtClean="0"/>
               <a:t>4</a:t>
             </a:fld>
@@ -899,7 +899,7 @@
     </p:spTree>
     <p:extLst>
       <p:ext uri="{BB962C8B-B14F-4D97-AF65-F5344CB8AC3E}">
-        <p14:creationId xmlns:p14="http://schemas.microsoft.com/office/powerpoint/2010/main" val="3429578367"/>
+        <p14:creationId xmlns:p14="http://schemas.microsoft.com/office/powerpoint/2010/main" val="2290058780"/>
       </p:ext>
     </p:extLst>
   </p:cSld>
@@ -955,7 +955,7 @@
           <a:p>
             <a:r>
               <a:rPr lang="en-US"/>
-              <a:t>Never say 'we use less AI'. Say: the AI is reserved for the cases the rules cannot handle - and the system performs just as well. A judge in the first round said we use AI less than most teams. True, and measured. On this inbox the rules answer all 520 and the scoring is all-or-nothing per email, so a model that is almost always right costs places. The model goes only where the rules admit they can't read: an ambiguous email, a label we've never seen, a scanned page. On documents with wording we invented, rules alone send 168 of 188 cases to a human; with the model, two - and false discrepancies stay at zero, because nothing the model says is adopted until we find it again in the source. You'll see both in the demo: a scan read out for the reviewer, and four unknown labels read on request. (1:40-2:20)</a:t>
+              <a:t>Never say 'we use less AI'. Say: the AI is reserved for the cases the rules cannot handle - and the system performs just as well. A judge in the first round said we use AI less than most teams. True, and measured. On this inbox the rules answer all 520 and the scoring is all-or-nothing per email, so a model that is almost always right costs places. The model goes only where the rules admit they can't read: an ambiguous email, a label we've never seen, a scanned page. On documents with wording we invented, rules alone escalate 168 of 188 cases; with the model, two - and false discrepancies stay at zero, because nothing the model says is accepted until we find it again in the source. You'll see both in the demo: a scan transcribed for the reviewer, and four unknown labels read on request. (1:40-2:20)</a:t>
             </a:r>
             <a:endParaRPr lang="en-MY"/>
           </a:p>
@@ -976,7 +976,7 @@
           <a:bodyPr/>
           <a:lstStyle/>
           <a:p>
-            <a:fld id="{67F9A505-9FD4-4536-B0A5-E8F96FD98A8B}" type="slidenum">
+            <a:fld id="{C7A5CE51-0934-426A-8706-9F85B6A2C377}" type="slidenum">
               <a:rPr lang="en-MY" smtClean="0"/>
               <a:t>5</a:t>
             </a:fld>
@@ -987,7 +987,7 @@
     </p:spTree>
     <p:extLst>
       <p:ext uri="{BB962C8B-B14F-4D97-AF65-F5344CB8AC3E}">
-        <p14:creationId xmlns:p14="http://schemas.microsoft.com/office/powerpoint/2010/main" val="945995184"/>
+        <p14:creationId xmlns:p14="http://schemas.microsoft.com/office/powerpoint/2010/main" val="3025107039"/>
       </p:ext>
     </p:extLst>
   </p:cSld>
@@ -1064,7 +1064,7 @@
           <a:bodyPr/>
           <a:lstStyle/>
           <a:p>
-            <a:fld id="{67F9A505-9FD4-4536-B0A5-E8F96FD98A8B}" type="slidenum">
+            <a:fld id="{C7A5CE51-0934-426A-8706-9F85B6A2C377}" type="slidenum">
               <a:rPr lang="en-MY" smtClean="0"/>
               <a:t>6</a:t>
             </a:fld>
@@ -1075,7 +1075,7 @@
     </p:spTree>
     <p:extLst>
       <p:ext uri="{BB962C8B-B14F-4D97-AF65-F5344CB8AC3E}">
-        <p14:creationId xmlns:p14="http://schemas.microsoft.com/office/powerpoint/2010/main" val="1396632715"/>
+        <p14:creationId xmlns:p14="http://schemas.microsoft.com/office/powerpoint/2010/main" val="4240170314"/>
       </p:ext>
     </p:extLst>
   </p:cSld>
@@ -1131,7 +1131,7 @@
           <a:p>
             <a:r>
               <a:rPr lang="en-US"/>
-              <a:t>At the mismatch case: 'Under every value - the line it was read from. A reviewer never has to open the source document to trust this.' At the scan: 'No text layer, so Sentinel did not decide. But the model read the page for the reviewer - seven fields, and it says which ones it couldn't read rather than guessing. The case stays in review; the person decides, per field.' At Compare, off: 'wording our table has never seen - the honest answer is can't read it, and it says which labels.' On: 'the model reads them, every value re-located in the document before it's adopted, and it surfaces the real discrepancy - badge says model answered.' (2:55-4:25)</a:t>
+              <a:t>At the discrepancy case: 'Under every value - the line it was read from. A reviewer never has to open the source document to trust this.' At the scan: 'No text layer, so Sentinel did not decide. But the model transcribed the page for the reviewer - seven fields, and it marks the illegible ones rather than guessing. The case stays escalated; the reviewer decides, per field.' At Compare, off: 'wording our table has never seen - the honest answer is that it cannot read them, so it is escalated, and it says which labels.' On: 'the model reads them, every value re-located in the document before it's accepted, and it surfaces the real discrepancy - badge says model answered.' (2:55-4:25)</a:t>
             </a:r>
             <a:endParaRPr lang="en-MY"/>
           </a:p>
@@ -1152,7 +1152,7 @@
           <a:bodyPr/>
           <a:lstStyle/>
           <a:p>
-            <a:fld id="{67F9A505-9FD4-4536-B0A5-E8F96FD98A8B}" type="slidenum">
+            <a:fld id="{C7A5CE51-0934-426A-8706-9F85B6A2C377}" type="slidenum">
               <a:rPr lang="en-MY" smtClean="0"/>
               <a:t>7</a:t>
             </a:fld>
@@ -1163,7 +1163,7 @@
     </p:spTree>
     <p:extLst>
       <p:ext uri="{BB962C8B-B14F-4D97-AF65-F5344CB8AC3E}">
-        <p14:creationId xmlns:p14="http://schemas.microsoft.com/office/powerpoint/2010/main" val="3815837626"/>
+        <p14:creationId xmlns:p14="http://schemas.microsoft.com/office/powerpoint/2010/main" val="1479242746"/>
       </p:ext>
     </p:extLst>
   </p:cSld>
@@ -1219,7 +1219,7 @@
           <a:p>
             <a:r>
               <a:rPr lang="en-US"/>
-              <a:t>At the top-ten stage everyone meets the brief, so this is the slide to slow down on - thirty seconds. Five things the others mostly don't have: the sender re-sends a fixed document and you re-upload it on the case, the check runs again and the old answer stays on record; a scan still goes to a person but already read out by the model; correcting a field shows this shipper's history on that field; the original document is one click away from every value; and the reply is drafted from what the reviewer decided, not the stale answer. (4:10-4:40)</a:t>
+              <a:t>At the top-ten stage everyone meets the brief, so this is the slide to slow down on - thirty seconds. Five things the others mostly don't have: the sender amends a document and you attach the amended one on the case, the check runs again and the previous result stays on record; a scan is still escalated but already transcribed by the model; correcting a field shows this shipper's history on that field; the original document is one click away from every value; and the reply is drafted from what the reviewer decided, not the stale answer. (4:10-4:40)</a:t>
             </a:r>
             <a:endParaRPr lang="en-MY"/>
           </a:p>
@@ -1240,7 +1240,7 @@
           <a:bodyPr/>
           <a:lstStyle/>
           <a:p>
-            <a:fld id="{67F9A505-9FD4-4536-B0A5-E8F96FD98A8B}" type="slidenum">
+            <a:fld id="{C7A5CE51-0934-426A-8706-9F85B6A2C377}" type="slidenum">
               <a:rPr lang="en-MY" smtClean="0"/>
               <a:t>8</a:t>
             </a:fld>
@@ -1251,7 +1251,7 @@
     </p:spTree>
     <p:extLst>
       <p:ext uri="{BB962C8B-B14F-4D97-AF65-F5344CB8AC3E}">
-        <p14:creationId xmlns:p14="http://schemas.microsoft.com/office/powerpoint/2010/main" val="2552237799"/>
+        <p14:creationId xmlns:p14="http://schemas.microsoft.com/office/powerpoint/2010/main" val="3787937917"/>
       </p:ext>
     </p:extLst>
   </p:cSld>
@@ -1328,7 +1328,7 @@
           <a:bodyPr/>
           <a:lstStyle/>
           <a:p>
-            <a:fld id="{67F9A505-9FD4-4536-B0A5-E8F96FD98A8B}" type="slidenum">
+            <a:fld id="{C7A5CE51-0934-426A-8706-9F85B6A2C377}" type="slidenum">
               <a:rPr lang="en-MY" smtClean="0"/>
               <a:t>9</a:t>
             </a:fld>
@@ -1339,7 +1339,7 @@
     </p:spTree>
     <p:extLst>
       <p:ext uri="{BB962C8B-B14F-4D97-AF65-F5344CB8AC3E}">
-        <p14:creationId xmlns:p14="http://schemas.microsoft.com/office/powerpoint/2010/main" val="3413419410"/>
+        <p14:creationId xmlns:p14="http://schemas.microsoft.com/office/powerpoint/2010/main" val="4235361434"/>
       </p:ext>
     </p:extLst>
   </p:cSld>
@@ -1371,7 +1371,7 @@
           <p:cNvPr id="2" name="Title 1">
             <a:extLst>
               <a:ext uri="{FF2B5EF4-FFF2-40B4-BE49-F238E27FC236}">
-                <a16:creationId xmlns:a16="http://schemas.microsoft.com/office/drawing/2014/main" id="{F7A7D5D7-2E62-0B2E-042B-9DE1DB28E6B1}"/>
+                <a16:creationId xmlns:a16="http://schemas.microsoft.com/office/drawing/2014/main" id="{B9B4EC93-6ACC-8BD3-78A3-8FD4F5945407}"/>
               </a:ext>
             </a:extLst>
           </p:cNvPr>
@@ -1409,7 +1409,7 @@
           <p:cNvPr id="3" name="Subtitle 2">
             <a:extLst>
               <a:ext uri="{FF2B5EF4-FFF2-40B4-BE49-F238E27FC236}">
-                <a16:creationId xmlns:a16="http://schemas.microsoft.com/office/drawing/2014/main" id="{4BAA784F-6487-6A71-9BFF-4393FB20E0E3}"/>
+                <a16:creationId xmlns:a16="http://schemas.microsoft.com/office/drawing/2014/main" id="{350131ED-0786-584C-A7BF-AB3252D14C2D}"/>
               </a:ext>
             </a:extLst>
           </p:cNvPr>
@@ -1480,7 +1480,7 @@
           <p:cNvPr id="4" name="Date Placeholder 3">
             <a:extLst>
               <a:ext uri="{FF2B5EF4-FFF2-40B4-BE49-F238E27FC236}">
-                <a16:creationId xmlns:a16="http://schemas.microsoft.com/office/drawing/2014/main" id="{95958B7F-9A58-69C4-0E82-CC879897E8FE}"/>
+                <a16:creationId xmlns:a16="http://schemas.microsoft.com/office/drawing/2014/main" id="{78EFD1AE-AC67-6EDD-833D-3F5EF9254C2A}"/>
               </a:ext>
             </a:extLst>
           </p:cNvPr>
@@ -1496,7 +1496,7 @@
           <a:bodyPr/>
           <a:lstStyle/>
           <a:p>
-            <a:fld id="{0B728AF7-151B-41DA-8187-545C3068964B}" type="datetimeFigureOut">
+            <a:fld id="{A6918204-41E8-40EE-B013-E681DE881932}" type="datetimeFigureOut">
               <a:rPr lang="en-MY" smtClean="0"/>
               <a:t>25/9/2026</a:t>
             </a:fld>
@@ -1509,7 +1509,7 @@
           <p:cNvPr id="5" name="Footer Placeholder 4">
             <a:extLst>
               <a:ext uri="{FF2B5EF4-FFF2-40B4-BE49-F238E27FC236}">
-                <a16:creationId xmlns:a16="http://schemas.microsoft.com/office/drawing/2014/main" id="{7D72ED1C-3E39-5280-E2C7-56ECD7B5683F}"/>
+                <a16:creationId xmlns:a16="http://schemas.microsoft.com/office/drawing/2014/main" id="{3CC55256-AA07-BECA-0D7E-8EA939913FDB}"/>
               </a:ext>
             </a:extLst>
           </p:cNvPr>
@@ -1534,7 +1534,7 @@
           <p:cNvPr id="6" name="Slide Number Placeholder 5">
             <a:extLst>
               <a:ext uri="{FF2B5EF4-FFF2-40B4-BE49-F238E27FC236}">
-                <a16:creationId xmlns:a16="http://schemas.microsoft.com/office/drawing/2014/main" id="{96EFF88A-3B27-BBAC-2A3E-63138C911323}"/>
+                <a16:creationId xmlns:a16="http://schemas.microsoft.com/office/drawing/2014/main" id="{8F9999A5-1D86-ACA7-393E-81316081CCE7}"/>
               </a:ext>
             </a:extLst>
           </p:cNvPr>
@@ -1550,7 +1550,7 @@
           <a:bodyPr/>
           <a:lstStyle/>
           <a:p>
-            <a:fld id="{1FCA58A0-11E7-4277-A1A1-0F6207FCBDA4}" type="slidenum">
+            <a:fld id="{BF8F21EB-8CE5-4FD5-B471-AC7A37C86CD3}" type="slidenum">
               <a:rPr lang="en-MY" smtClean="0"/>
               <a:t>‹#›</a:t>
             </a:fld>
@@ -1561,7 +1561,7 @@
     </p:spTree>
     <p:extLst>
       <p:ext uri="{BB962C8B-B14F-4D97-AF65-F5344CB8AC3E}">
-        <p14:creationId xmlns:p14="http://schemas.microsoft.com/office/powerpoint/2010/main" val="4140653957"/>
+        <p14:creationId xmlns:p14="http://schemas.microsoft.com/office/powerpoint/2010/main" val="3886807825"/>
       </p:ext>
     </p:extLst>
   </p:cSld>
@@ -1593,7 +1593,7 @@
           <p:cNvPr id="2" name="Title 1">
             <a:extLst>
               <a:ext uri="{FF2B5EF4-FFF2-40B4-BE49-F238E27FC236}">
-                <a16:creationId xmlns:a16="http://schemas.microsoft.com/office/drawing/2014/main" id="{443D5711-E889-CAED-1A32-E19154AD0D20}"/>
+                <a16:creationId xmlns:a16="http://schemas.microsoft.com/office/drawing/2014/main" id="{FCF6188E-5E1F-DB76-91B9-705F7D2F1DE3}"/>
               </a:ext>
             </a:extLst>
           </p:cNvPr>
@@ -1622,7 +1622,7 @@
           <p:cNvPr id="3" name="Vertical Text Placeholder 2">
             <a:extLst>
               <a:ext uri="{FF2B5EF4-FFF2-40B4-BE49-F238E27FC236}">
-                <a16:creationId xmlns:a16="http://schemas.microsoft.com/office/drawing/2014/main" id="{A71DE4F0-BCF9-F277-889D-AF1852367156}"/>
+                <a16:creationId xmlns:a16="http://schemas.microsoft.com/office/drawing/2014/main" id="{F95EF0A7-9EAD-7B9D-06FC-BE4CF1CAFBF6}"/>
               </a:ext>
             </a:extLst>
           </p:cNvPr>
@@ -1680,7 +1680,7 @@
           <p:cNvPr id="4" name="Date Placeholder 3">
             <a:extLst>
               <a:ext uri="{FF2B5EF4-FFF2-40B4-BE49-F238E27FC236}">
-                <a16:creationId xmlns:a16="http://schemas.microsoft.com/office/drawing/2014/main" id="{1C23D029-6AFD-8164-9777-678516B27C97}"/>
+                <a16:creationId xmlns:a16="http://schemas.microsoft.com/office/drawing/2014/main" id="{696D6D81-37B4-4D4B-8E49-5D969DAFA737}"/>
               </a:ext>
             </a:extLst>
           </p:cNvPr>
@@ -1696,7 +1696,7 @@
           <a:bodyPr/>
           <a:lstStyle/>
           <a:p>
-            <a:fld id="{0B728AF7-151B-41DA-8187-545C3068964B}" type="datetimeFigureOut">
+            <a:fld id="{A6918204-41E8-40EE-B013-E681DE881932}" type="datetimeFigureOut">
               <a:rPr lang="en-MY" smtClean="0"/>
               <a:t>25/9/2026</a:t>
             </a:fld>
@@ -1709,7 +1709,7 @@
           <p:cNvPr id="5" name="Footer Placeholder 4">
             <a:extLst>
               <a:ext uri="{FF2B5EF4-FFF2-40B4-BE49-F238E27FC236}">
-                <a16:creationId xmlns:a16="http://schemas.microsoft.com/office/drawing/2014/main" id="{12549B82-5E74-4E0F-66CD-98242DF438D2}"/>
+                <a16:creationId xmlns:a16="http://schemas.microsoft.com/office/drawing/2014/main" id="{F40EA607-1853-539C-4D8C-0D64BAD0D4E3}"/>
               </a:ext>
             </a:extLst>
           </p:cNvPr>
@@ -1734,7 +1734,7 @@
           <p:cNvPr id="6" name="Slide Number Placeholder 5">
             <a:extLst>
               <a:ext uri="{FF2B5EF4-FFF2-40B4-BE49-F238E27FC236}">
-                <a16:creationId xmlns:a16="http://schemas.microsoft.com/office/drawing/2014/main" id="{B6F7CF31-712B-6A01-66E3-1308EE5D14EE}"/>
+                <a16:creationId xmlns:a16="http://schemas.microsoft.com/office/drawing/2014/main" id="{5B2C2BFD-7918-8E7A-87C1-061F3CE8E20E}"/>
               </a:ext>
             </a:extLst>
           </p:cNvPr>
@@ -1750,7 +1750,7 @@
           <a:bodyPr/>
           <a:lstStyle/>
           <a:p>
-            <a:fld id="{1FCA58A0-11E7-4277-A1A1-0F6207FCBDA4}" type="slidenum">
+            <a:fld id="{BF8F21EB-8CE5-4FD5-B471-AC7A37C86CD3}" type="slidenum">
               <a:rPr lang="en-MY" smtClean="0"/>
               <a:t>‹#›</a:t>
             </a:fld>
@@ -1761,7 +1761,7 @@
     </p:spTree>
     <p:extLst>
       <p:ext uri="{BB962C8B-B14F-4D97-AF65-F5344CB8AC3E}">
-        <p14:creationId xmlns:p14="http://schemas.microsoft.com/office/powerpoint/2010/main" val="2009397376"/>
+        <p14:creationId xmlns:p14="http://schemas.microsoft.com/office/powerpoint/2010/main" val="4187269788"/>
       </p:ext>
     </p:extLst>
   </p:cSld>
@@ -1793,7 +1793,7 @@
           <p:cNvPr id="2" name="Vertical Title 1">
             <a:extLst>
               <a:ext uri="{FF2B5EF4-FFF2-40B4-BE49-F238E27FC236}">
-                <a16:creationId xmlns:a16="http://schemas.microsoft.com/office/drawing/2014/main" id="{2754BE30-AF0D-3C4A-EE9F-686EEBDD0B36}"/>
+                <a16:creationId xmlns:a16="http://schemas.microsoft.com/office/drawing/2014/main" id="{F5C29A4C-D524-097B-954D-77326CDD4D93}"/>
               </a:ext>
             </a:extLst>
           </p:cNvPr>
@@ -1827,7 +1827,7 @@
           <p:cNvPr id="3" name="Vertical Text Placeholder 2">
             <a:extLst>
               <a:ext uri="{FF2B5EF4-FFF2-40B4-BE49-F238E27FC236}">
-                <a16:creationId xmlns:a16="http://schemas.microsoft.com/office/drawing/2014/main" id="{ABCDAF64-F0A3-EEAB-715C-9E8EC6600233}"/>
+                <a16:creationId xmlns:a16="http://schemas.microsoft.com/office/drawing/2014/main" id="{4E568F4A-4994-4E92-4EBB-4301E586AC7D}"/>
               </a:ext>
             </a:extLst>
           </p:cNvPr>
@@ -1890,7 +1890,7 @@
           <p:cNvPr id="4" name="Date Placeholder 3">
             <a:extLst>
               <a:ext uri="{FF2B5EF4-FFF2-40B4-BE49-F238E27FC236}">
-                <a16:creationId xmlns:a16="http://schemas.microsoft.com/office/drawing/2014/main" id="{1E46317D-1622-E153-7929-6B7B02F47074}"/>
+                <a16:creationId xmlns:a16="http://schemas.microsoft.com/office/drawing/2014/main" id="{BFAF6494-8C42-891C-01A4-B89F12968177}"/>
               </a:ext>
             </a:extLst>
           </p:cNvPr>
@@ -1906,7 +1906,7 @@
           <a:bodyPr/>
           <a:lstStyle/>
           <a:p>
-            <a:fld id="{0B728AF7-151B-41DA-8187-545C3068964B}" type="datetimeFigureOut">
+            <a:fld id="{A6918204-41E8-40EE-B013-E681DE881932}" type="datetimeFigureOut">
               <a:rPr lang="en-MY" smtClean="0"/>
               <a:t>25/9/2026</a:t>
             </a:fld>
@@ -1919,7 +1919,7 @@
           <p:cNvPr id="5" name="Footer Placeholder 4">
             <a:extLst>
               <a:ext uri="{FF2B5EF4-FFF2-40B4-BE49-F238E27FC236}">
-                <a16:creationId xmlns:a16="http://schemas.microsoft.com/office/drawing/2014/main" id="{ED5C305F-18FE-62F5-E5D7-6FF00D2B67FC}"/>
+                <a16:creationId xmlns:a16="http://schemas.microsoft.com/office/drawing/2014/main" id="{ABAF4774-61CF-2CB5-7164-E4461BC5E472}"/>
               </a:ext>
             </a:extLst>
           </p:cNvPr>
@@ -1944,7 +1944,7 @@
           <p:cNvPr id="6" name="Slide Number Placeholder 5">
             <a:extLst>
               <a:ext uri="{FF2B5EF4-FFF2-40B4-BE49-F238E27FC236}">
-                <a16:creationId xmlns:a16="http://schemas.microsoft.com/office/drawing/2014/main" id="{153FD7ED-17D8-3110-6641-8F03AC8B8BFE}"/>
+                <a16:creationId xmlns:a16="http://schemas.microsoft.com/office/drawing/2014/main" id="{D0C3C1CE-621C-A1B8-5457-F0194324E4A3}"/>
               </a:ext>
             </a:extLst>
           </p:cNvPr>
@@ -1960,7 +1960,7 @@
           <a:bodyPr/>
           <a:lstStyle/>
           <a:p>
-            <a:fld id="{1FCA58A0-11E7-4277-A1A1-0F6207FCBDA4}" type="slidenum">
+            <a:fld id="{BF8F21EB-8CE5-4FD5-B471-AC7A37C86CD3}" type="slidenum">
               <a:rPr lang="en-MY" smtClean="0"/>
               <a:t>‹#›</a:t>
             </a:fld>
@@ -1971,7 +1971,7 @@
     </p:spTree>
     <p:extLst>
       <p:ext uri="{BB962C8B-B14F-4D97-AF65-F5344CB8AC3E}">
-        <p14:creationId xmlns:p14="http://schemas.microsoft.com/office/powerpoint/2010/main" val="987735349"/>
+        <p14:creationId xmlns:p14="http://schemas.microsoft.com/office/powerpoint/2010/main" val="1138928302"/>
       </p:ext>
     </p:extLst>
   </p:cSld>
@@ -2003,7 +2003,7 @@
           <p:cNvPr id="2" name="Title 1">
             <a:extLst>
               <a:ext uri="{FF2B5EF4-FFF2-40B4-BE49-F238E27FC236}">
-                <a16:creationId xmlns:a16="http://schemas.microsoft.com/office/drawing/2014/main" id="{07FB89A9-403D-1A84-8FA8-9EF69BA5541F}"/>
+                <a16:creationId xmlns:a16="http://schemas.microsoft.com/office/drawing/2014/main" id="{A9DB5FDA-861A-8CCA-DD16-1C03823BAA2D}"/>
               </a:ext>
             </a:extLst>
           </p:cNvPr>
@@ -2032,7 +2032,7 @@
           <p:cNvPr id="3" name="Content Placeholder 2">
             <a:extLst>
               <a:ext uri="{FF2B5EF4-FFF2-40B4-BE49-F238E27FC236}">
-                <a16:creationId xmlns:a16="http://schemas.microsoft.com/office/drawing/2014/main" id="{F2AEB6B2-6572-84E2-220D-8A61275D0A5C}"/>
+                <a16:creationId xmlns:a16="http://schemas.microsoft.com/office/drawing/2014/main" id="{873BBF5F-6EE7-6C35-2B7E-0B9158B74E14}"/>
               </a:ext>
             </a:extLst>
           </p:cNvPr>
@@ -2090,7 +2090,7 @@
           <p:cNvPr id="4" name="Date Placeholder 3">
             <a:extLst>
               <a:ext uri="{FF2B5EF4-FFF2-40B4-BE49-F238E27FC236}">
-                <a16:creationId xmlns:a16="http://schemas.microsoft.com/office/drawing/2014/main" id="{23E66C4D-4EE1-3E2A-3DA3-A8477A2431C0}"/>
+                <a16:creationId xmlns:a16="http://schemas.microsoft.com/office/drawing/2014/main" id="{4C608CB0-BF8F-556B-2478-C81C0A7292CE}"/>
               </a:ext>
             </a:extLst>
           </p:cNvPr>
@@ -2106,7 +2106,7 @@
           <a:bodyPr/>
           <a:lstStyle/>
           <a:p>
-            <a:fld id="{0B728AF7-151B-41DA-8187-545C3068964B}" type="datetimeFigureOut">
+            <a:fld id="{A6918204-41E8-40EE-B013-E681DE881932}" type="datetimeFigureOut">
               <a:rPr lang="en-MY" smtClean="0"/>
               <a:t>25/9/2026</a:t>
             </a:fld>
@@ -2119,7 +2119,7 @@
           <p:cNvPr id="5" name="Footer Placeholder 4">
             <a:extLst>
               <a:ext uri="{FF2B5EF4-FFF2-40B4-BE49-F238E27FC236}">
-                <a16:creationId xmlns:a16="http://schemas.microsoft.com/office/drawing/2014/main" id="{6C1363DD-FF5E-72A5-86C3-EE1000D24314}"/>
+                <a16:creationId xmlns:a16="http://schemas.microsoft.com/office/drawing/2014/main" id="{B25E5085-87A8-0869-FCDD-1F154095EFF9}"/>
               </a:ext>
             </a:extLst>
           </p:cNvPr>
@@ -2144,7 +2144,7 @@
           <p:cNvPr id="6" name="Slide Number Placeholder 5">
             <a:extLst>
               <a:ext uri="{FF2B5EF4-FFF2-40B4-BE49-F238E27FC236}">
-                <a16:creationId xmlns:a16="http://schemas.microsoft.com/office/drawing/2014/main" id="{0E4DA0B7-680B-6CE2-1DF3-1DC9AC796E4F}"/>
+                <a16:creationId xmlns:a16="http://schemas.microsoft.com/office/drawing/2014/main" id="{B8B58949-955A-18F6-8B20-00474FC48C2F}"/>
               </a:ext>
             </a:extLst>
           </p:cNvPr>
@@ -2160,7 +2160,7 @@
           <a:bodyPr/>
           <a:lstStyle/>
           <a:p>
-            <a:fld id="{1FCA58A0-11E7-4277-A1A1-0F6207FCBDA4}" type="slidenum">
+            <a:fld id="{BF8F21EB-8CE5-4FD5-B471-AC7A37C86CD3}" type="slidenum">
               <a:rPr lang="en-MY" smtClean="0"/>
               <a:t>‹#›</a:t>
             </a:fld>
@@ -2171,7 +2171,7 @@
     </p:spTree>
     <p:extLst>
       <p:ext uri="{BB962C8B-B14F-4D97-AF65-F5344CB8AC3E}">
-        <p14:creationId xmlns:p14="http://schemas.microsoft.com/office/powerpoint/2010/main" val="1229776902"/>
+        <p14:creationId xmlns:p14="http://schemas.microsoft.com/office/powerpoint/2010/main" val="4278289633"/>
       </p:ext>
     </p:extLst>
   </p:cSld>
@@ -2203,7 +2203,7 @@
           <p:cNvPr id="2" name="Title 1">
             <a:extLst>
               <a:ext uri="{FF2B5EF4-FFF2-40B4-BE49-F238E27FC236}">
-                <a16:creationId xmlns:a16="http://schemas.microsoft.com/office/drawing/2014/main" id="{0E330508-E82E-9084-39AC-8759F3EF5174}"/>
+                <a16:creationId xmlns:a16="http://schemas.microsoft.com/office/drawing/2014/main" id="{32607ED1-2516-9B4F-CE25-30C9B8C6C35D}"/>
               </a:ext>
             </a:extLst>
           </p:cNvPr>
@@ -2241,7 +2241,7 @@
           <p:cNvPr id="3" name="Text Placeholder 2">
             <a:extLst>
               <a:ext uri="{FF2B5EF4-FFF2-40B4-BE49-F238E27FC236}">
-                <a16:creationId xmlns:a16="http://schemas.microsoft.com/office/drawing/2014/main" id="{F31CB667-1674-0F09-0534-92C008A15925}"/>
+                <a16:creationId xmlns:a16="http://schemas.microsoft.com/office/drawing/2014/main" id="{40E90FA3-64F0-E6A1-90D1-C5A6DF87341A}"/>
               </a:ext>
             </a:extLst>
           </p:cNvPr>
@@ -2366,7 +2366,7 @@
           <p:cNvPr id="4" name="Date Placeholder 3">
             <a:extLst>
               <a:ext uri="{FF2B5EF4-FFF2-40B4-BE49-F238E27FC236}">
-                <a16:creationId xmlns:a16="http://schemas.microsoft.com/office/drawing/2014/main" id="{33C6E793-8BE1-FFF1-F13D-ED3E382E599E}"/>
+                <a16:creationId xmlns:a16="http://schemas.microsoft.com/office/drawing/2014/main" id="{C5E05E12-4B26-51E8-6065-C3E00ACB0D98}"/>
               </a:ext>
             </a:extLst>
           </p:cNvPr>
@@ -2382,7 +2382,7 @@
           <a:bodyPr/>
           <a:lstStyle/>
           <a:p>
-            <a:fld id="{0B728AF7-151B-41DA-8187-545C3068964B}" type="datetimeFigureOut">
+            <a:fld id="{A6918204-41E8-40EE-B013-E681DE881932}" type="datetimeFigureOut">
               <a:rPr lang="en-MY" smtClean="0"/>
               <a:t>25/9/2026</a:t>
             </a:fld>
@@ -2395,7 +2395,7 @@
           <p:cNvPr id="5" name="Footer Placeholder 4">
             <a:extLst>
               <a:ext uri="{FF2B5EF4-FFF2-40B4-BE49-F238E27FC236}">
-                <a16:creationId xmlns:a16="http://schemas.microsoft.com/office/drawing/2014/main" id="{5074D396-E554-AA1F-ED80-F798F442E5F6}"/>
+                <a16:creationId xmlns:a16="http://schemas.microsoft.com/office/drawing/2014/main" id="{546105AD-7185-5A96-634C-72ACC1B2AA13}"/>
               </a:ext>
             </a:extLst>
           </p:cNvPr>
@@ -2420,7 +2420,7 @@
           <p:cNvPr id="6" name="Slide Number Placeholder 5">
             <a:extLst>
               <a:ext uri="{FF2B5EF4-FFF2-40B4-BE49-F238E27FC236}">
-                <a16:creationId xmlns:a16="http://schemas.microsoft.com/office/drawing/2014/main" id="{F65C7AF9-02DD-BF72-C4A4-4B17BAB49E9F}"/>
+                <a16:creationId xmlns:a16="http://schemas.microsoft.com/office/drawing/2014/main" id="{7B28B91B-1847-A3DC-FC51-2ECA2386D828}"/>
               </a:ext>
             </a:extLst>
           </p:cNvPr>
@@ -2436,7 +2436,7 @@
           <a:bodyPr/>
           <a:lstStyle/>
           <a:p>
-            <a:fld id="{1FCA58A0-11E7-4277-A1A1-0F6207FCBDA4}" type="slidenum">
+            <a:fld id="{BF8F21EB-8CE5-4FD5-B471-AC7A37C86CD3}" type="slidenum">
               <a:rPr lang="en-MY" smtClean="0"/>
               <a:t>‹#›</a:t>
             </a:fld>
@@ -2447,7 +2447,7 @@
     </p:spTree>
     <p:extLst>
       <p:ext uri="{BB962C8B-B14F-4D97-AF65-F5344CB8AC3E}">
-        <p14:creationId xmlns:p14="http://schemas.microsoft.com/office/powerpoint/2010/main" val="740715857"/>
+        <p14:creationId xmlns:p14="http://schemas.microsoft.com/office/powerpoint/2010/main" val="846011722"/>
       </p:ext>
     </p:extLst>
   </p:cSld>
@@ -2479,7 +2479,7 @@
           <p:cNvPr id="2" name="Title 1">
             <a:extLst>
               <a:ext uri="{FF2B5EF4-FFF2-40B4-BE49-F238E27FC236}">
-                <a16:creationId xmlns:a16="http://schemas.microsoft.com/office/drawing/2014/main" id="{844B751A-6343-D60C-34C9-EE1BC02A59C0}"/>
+                <a16:creationId xmlns:a16="http://schemas.microsoft.com/office/drawing/2014/main" id="{5143F926-FF89-6339-FA14-3A9FFEDF05FE}"/>
               </a:ext>
             </a:extLst>
           </p:cNvPr>
@@ -2508,7 +2508,7 @@
           <p:cNvPr id="3" name="Content Placeholder 2">
             <a:extLst>
               <a:ext uri="{FF2B5EF4-FFF2-40B4-BE49-F238E27FC236}">
-                <a16:creationId xmlns:a16="http://schemas.microsoft.com/office/drawing/2014/main" id="{A6D77CDB-BCEF-D672-634E-AD323BB7BD14}"/>
+                <a16:creationId xmlns:a16="http://schemas.microsoft.com/office/drawing/2014/main" id="{81AAEC98-5FF0-BEA9-DCC3-96EC0C6A7222}"/>
               </a:ext>
             </a:extLst>
           </p:cNvPr>
@@ -2571,7 +2571,7 @@
           <p:cNvPr id="4" name="Content Placeholder 3">
             <a:extLst>
               <a:ext uri="{FF2B5EF4-FFF2-40B4-BE49-F238E27FC236}">
-                <a16:creationId xmlns:a16="http://schemas.microsoft.com/office/drawing/2014/main" id="{79D465EA-5623-ED21-3B7C-69FF84B79126}"/>
+                <a16:creationId xmlns:a16="http://schemas.microsoft.com/office/drawing/2014/main" id="{06D42F93-B6E5-ED68-ED67-A36B856851C0}"/>
               </a:ext>
             </a:extLst>
           </p:cNvPr>
@@ -2634,7 +2634,7 @@
           <p:cNvPr id="5" name="Date Placeholder 4">
             <a:extLst>
               <a:ext uri="{FF2B5EF4-FFF2-40B4-BE49-F238E27FC236}">
-                <a16:creationId xmlns:a16="http://schemas.microsoft.com/office/drawing/2014/main" id="{6F727508-9EB9-C7FB-ABA6-C5E44CCEFC7E}"/>
+                <a16:creationId xmlns:a16="http://schemas.microsoft.com/office/drawing/2014/main" id="{6BD927C3-AD53-53EE-90F4-063A64B40F30}"/>
               </a:ext>
             </a:extLst>
           </p:cNvPr>
@@ -2650,7 +2650,7 @@
           <a:bodyPr/>
           <a:lstStyle/>
           <a:p>
-            <a:fld id="{0B728AF7-151B-41DA-8187-545C3068964B}" type="datetimeFigureOut">
+            <a:fld id="{A6918204-41E8-40EE-B013-E681DE881932}" type="datetimeFigureOut">
               <a:rPr lang="en-MY" smtClean="0"/>
               <a:t>25/9/2026</a:t>
             </a:fld>
@@ -2663,7 +2663,7 @@
           <p:cNvPr id="6" name="Footer Placeholder 5">
             <a:extLst>
               <a:ext uri="{FF2B5EF4-FFF2-40B4-BE49-F238E27FC236}">
-                <a16:creationId xmlns:a16="http://schemas.microsoft.com/office/drawing/2014/main" id="{E3C1D64D-9261-1CF9-C200-BA94C39358EF}"/>
+                <a16:creationId xmlns:a16="http://schemas.microsoft.com/office/drawing/2014/main" id="{8F696152-3557-C791-A7C5-40E4EE3F9215}"/>
               </a:ext>
             </a:extLst>
           </p:cNvPr>
@@ -2688,7 +2688,7 @@
           <p:cNvPr id="7" name="Slide Number Placeholder 6">
             <a:extLst>
               <a:ext uri="{FF2B5EF4-FFF2-40B4-BE49-F238E27FC236}">
-                <a16:creationId xmlns:a16="http://schemas.microsoft.com/office/drawing/2014/main" id="{6184FFF8-F8D0-01DA-9279-AC77D6587498}"/>
+                <a16:creationId xmlns:a16="http://schemas.microsoft.com/office/drawing/2014/main" id="{4C1B825C-DF52-6D6E-E10A-793352D0F536}"/>
               </a:ext>
             </a:extLst>
           </p:cNvPr>
@@ -2704,7 +2704,7 @@
           <a:bodyPr/>
           <a:lstStyle/>
           <a:p>
-            <a:fld id="{1FCA58A0-11E7-4277-A1A1-0F6207FCBDA4}" type="slidenum">
+            <a:fld id="{BF8F21EB-8CE5-4FD5-B471-AC7A37C86CD3}" type="slidenum">
               <a:rPr lang="en-MY" smtClean="0"/>
               <a:t>‹#›</a:t>
             </a:fld>
@@ -2715,7 +2715,7 @@
     </p:spTree>
     <p:extLst>
       <p:ext uri="{BB962C8B-B14F-4D97-AF65-F5344CB8AC3E}">
-        <p14:creationId xmlns:p14="http://schemas.microsoft.com/office/powerpoint/2010/main" val="2989627836"/>
+        <p14:creationId xmlns:p14="http://schemas.microsoft.com/office/powerpoint/2010/main" val="2223295574"/>
       </p:ext>
     </p:extLst>
   </p:cSld>
@@ -2747,7 +2747,7 @@
           <p:cNvPr id="2" name="Title 1">
             <a:extLst>
               <a:ext uri="{FF2B5EF4-FFF2-40B4-BE49-F238E27FC236}">
-                <a16:creationId xmlns:a16="http://schemas.microsoft.com/office/drawing/2014/main" id="{FE623CD1-FAA5-D6FB-26CB-66532367EA68}"/>
+                <a16:creationId xmlns:a16="http://schemas.microsoft.com/office/drawing/2014/main" id="{B9A518F0-7D9F-3115-781F-ECE9B1D3250F}"/>
               </a:ext>
             </a:extLst>
           </p:cNvPr>
@@ -2781,7 +2781,7 @@
           <p:cNvPr id="3" name="Text Placeholder 2">
             <a:extLst>
               <a:ext uri="{FF2B5EF4-FFF2-40B4-BE49-F238E27FC236}">
-                <a16:creationId xmlns:a16="http://schemas.microsoft.com/office/drawing/2014/main" id="{476CF641-0728-00E8-0D0B-6DBA5B110BBA}"/>
+                <a16:creationId xmlns:a16="http://schemas.microsoft.com/office/drawing/2014/main" id="{02F19835-C043-38BD-359F-A0E516C11055}"/>
               </a:ext>
             </a:extLst>
           </p:cNvPr>
@@ -2852,7 +2852,7 @@
           <p:cNvPr id="4" name="Content Placeholder 3">
             <a:extLst>
               <a:ext uri="{FF2B5EF4-FFF2-40B4-BE49-F238E27FC236}">
-                <a16:creationId xmlns:a16="http://schemas.microsoft.com/office/drawing/2014/main" id="{4A4F0887-8673-60CF-C243-3440B35C9083}"/>
+                <a16:creationId xmlns:a16="http://schemas.microsoft.com/office/drawing/2014/main" id="{0F04479E-8BB8-DFF7-4337-8C2E12A193C6}"/>
               </a:ext>
             </a:extLst>
           </p:cNvPr>
@@ -2915,7 +2915,7 @@
           <p:cNvPr id="5" name="Text Placeholder 4">
             <a:extLst>
               <a:ext uri="{FF2B5EF4-FFF2-40B4-BE49-F238E27FC236}">
-                <a16:creationId xmlns:a16="http://schemas.microsoft.com/office/drawing/2014/main" id="{87E5BA1F-03B0-7924-6112-CB16CDCA5E8E}"/>
+                <a16:creationId xmlns:a16="http://schemas.microsoft.com/office/drawing/2014/main" id="{9B27981F-A1C7-1756-DDE4-0B7BFE025ACF}"/>
               </a:ext>
             </a:extLst>
           </p:cNvPr>
@@ -2986,7 +2986,7 @@
           <p:cNvPr id="6" name="Content Placeholder 5">
             <a:extLst>
               <a:ext uri="{FF2B5EF4-FFF2-40B4-BE49-F238E27FC236}">
-                <a16:creationId xmlns:a16="http://schemas.microsoft.com/office/drawing/2014/main" id="{7EE5288D-FC66-0104-A8FD-4A533BDEA2E6}"/>
+                <a16:creationId xmlns:a16="http://schemas.microsoft.com/office/drawing/2014/main" id="{253439C1-2488-FA94-D981-D8DC21F509F5}"/>
               </a:ext>
             </a:extLst>
           </p:cNvPr>
@@ -3049,7 +3049,7 @@
           <p:cNvPr id="7" name="Date Placeholder 6">
             <a:extLst>
               <a:ext uri="{FF2B5EF4-FFF2-40B4-BE49-F238E27FC236}">
-                <a16:creationId xmlns:a16="http://schemas.microsoft.com/office/drawing/2014/main" id="{1AD50269-9C0B-D678-D136-2F82A8FE3E6F}"/>
+                <a16:creationId xmlns:a16="http://schemas.microsoft.com/office/drawing/2014/main" id="{56F86E7F-0F1F-24B2-355D-5410F0CB9166}"/>
               </a:ext>
             </a:extLst>
           </p:cNvPr>
@@ -3065,7 +3065,7 @@
           <a:bodyPr/>
           <a:lstStyle/>
           <a:p>
-            <a:fld id="{0B728AF7-151B-41DA-8187-545C3068964B}" type="datetimeFigureOut">
+            <a:fld id="{A6918204-41E8-40EE-B013-E681DE881932}" type="datetimeFigureOut">
               <a:rPr lang="en-MY" smtClean="0"/>
               <a:t>25/9/2026</a:t>
             </a:fld>
@@ -3078,7 +3078,7 @@
           <p:cNvPr id="8" name="Footer Placeholder 7">
             <a:extLst>
               <a:ext uri="{FF2B5EF4-FFF2-40B4-BE49-F238E27FC236}">
-                <a16:creationId xmlns:a16="http://schemas.microsoft.com/office/drawing/2014/main" id="{959FCC72-DD8F-F2EE-70D7-0E3A8DB30BE8}"/>
+                <a16:creationId xmlns:a16="http://schemas.microsoft.com/office/drawing/2014/main" id="{C2BC0E21-09B6-5D7A-4EA2-7B9A5D5F9EC5}"/>
               </a:ext>
             </a:extLst>
           </p:cNvPr>
@@ -3103,7 +3103,7 @@
           <p:cNvPr id="9" name="Slide Number Placeholder 8">
             <a:extLst>
               <a:ext uri="{FF2B5EF4-FFF2-40B4-BE49-F238E27FC236}">
-                <a16:creationId xmlns:a16="http://schemas.microsoft.com/office/drawing/2014/main" id="{463904BF-0A78-33B4-B49C-21D4348549D0}"/>
+                <a16:creationId xmlns:a16="http://schemas.microsoft.com/office/drawing/2014/main" id="{3E48C6E7-A601-C81C-5924-853B319C9070}"/>
               </a:ext>
             </a:extLst>
           </p:cNvPr>
@@ -3119,7 +3119,7 @@
           <a:bodyPr/>
           <a:lstStyle/>
           <a:p>
-            <a:fld id="{1FCA58A0-11E7-4277-A1A1-0F6207FCBDA4}" type="slidenum">
+            <a:fld id="{BF8F21EB-8CE5-4FD5-B471-AC7A37C86CD3}" type="slidenum">
               <a:rPr lang="en-MY" smtClean="0"/>
               <a:t>‹#›</a:t>
             </a:fld>
@@ -3130,7 +3130,7 @@
     </p:spTree>
     <p:extLst>
       <p:ext uri="{BB962C8B-B14F-4D97-AF65-F5344CB8AC3E}">
-        <p14:creationId xmlns:p14="http://schemas.microsoft.com/office/powerpoint/2010/main" val="3202504159"/>
+        <p14:creationId xmlns:p14="http://schemas.microsoft.com/office/powerpoint/2010/main" val="2637868407"/>
       </p:ext>
     </p:extLst>
   </p:cSld>
@@ -3162,7 +3162,7 @@
           <p:cNvPr id="2" name="Title 1">
             <a:extLst>
               <a:ext uri="{FF2B5EF4-FFF2-40B4-BE49-F238E27FC236}">
-                <a16:creationId xmlns:a16="http://schemas.microsoft.com/office/drawing/2014/main" id="{7A01D2EA-438A-93F9-2D91-95641AAA2025}"/>
+                <a16:creationId xmlns:a16="http://schemas.microsoft.com/office/drawing/2014/main" id="{AA68BA9E-08BA-F016-ED7A-F2D1DBAB6C6A}"/>
               </a:ext>
             </a:extLst>
           </p:cNvPr>
@@ -3191,7 +3191,7 @@
           <p:cNvPr id="3" name="Date Placeholder 2">
             <a:extLst>
               <a:ext uri="{FF2B5EF4-FFF2-40B4-BE49-F238E27FC236}">
-                <a16:creationId xmlns:a16="http://schemas.microsoft.com/office/drawing/2014/main" id="{42B09537-3DF7-7B86-9A5E-7063DDC0F664}"/>
+                <a16:creationId xmlns:a16="http://schemas.microsoft.com/office/drawing/2014/main" id="{02C95252-9646-5C0A-DEC2-2CE38D8ECEA0}"/>
               </a:ext>
             </a:extLst>
           </p:cNvPr>
@@ -3207,7 +3207,7 @@
           <a:bodyPr/>
           <a:lstStyle/>
           <a:p>
-            <a:fld id="{0B728AF7-151B-41DA-8187-545C3068964B}" type="datetimeFigureOut">
+            <a:fld id="{A6918204-41E8-40EE-B013-E681DE881932}" type="datetimeFigureOut">
               <a:rPr lang="en-MY" smtClean="0"/>
               <a:t>25/9/2026</a:t>
             </a:fld>
@@ -3220,7 +3220,7 @@
           <p:cNvPr id="4" name="Footer Placeholder 3">
             <a:extLst>
               <a:ext uri="{FF2B5EF4-FFF2-40B4-BE49-F238E27FC236}">
-                <a16:creationId xmlns:a16="http://schemas.microsoft.com/office/drawing/2014/main" id="{9D31D48E-6C60-6C9C-4299-0AC453A9646E}"/>
+                <a16:creationId xmlns:a16="http://schemas.microsoft.com/office/drawing/2014/main" id="{A54288BD-1910-9026-B7F5-932F995D0D24}"/>
               </a:ext>
             </a:extLst>
           </p:cNvPr>
@@ -3245,7 +3245,7 @@
           <p:cNvPr id="5" name="Slide Number Placeholder 4">
             <a:extLst>
               <a:ext uri="{FF2B5EF4-FFF2-40B4-BE49-F238E27FC236}">
-                <a16:creationId xmlns:a16="http://schemas.microsoft.com/office/drawing/2014/main" id="{AAF692E5-ACAC-0013-6B85-7F4D17F7C47E}"/>
+                <a16:creationId xmlns:a16="http://schemas.microsoft.com/office/drawing/2014/main" id="{ABA00B70-EE30-9619-81D6-56727260CF31}"/>
               </a:ext>
             </a:extLst>
           </p:cNvPr>
@@ -3261,7 +3261,7 @@
           <a:bodyPr/>
           <a:lstStyle/>
           <a:p>
-            <a:fld id="{1FCA58A0-11E7-4277-A1A1-0F6207FCBDA4}" type="slidenum">
+            <a:fld id="{BF8F21EB-8CE5-4FD5-B471-AC7A37C86CD3}" type="slidenum">
               <a:rPr lang="en-MY" smtClean="0"/>
               <a:t>‹#›</a:t>
             </a:fld>
@@ -3272,7 +3272,7 @@
     </p:spTree>
     <p:extLst>
       <p:ext uri="{BB962C8B-B14F-4D97-AF65-F5344CB8AC3E}">
-        <p14:creationId xmlns:p14="http://schemas.microsoft.com/office/powerpoint/2010/main" val="712375712"/>
+        <p14:creationId xmlns:p14="http://schemas.microsoft.com/office/powerpoint/2010/main" val="261466521"/>
       </p:ext>
     </p:extLst>
   </p:cSld>
@@ -3304,7 +3304,7 @@
           <p:cNvPr id="2" name="Date Placeholder 1">
             <a:extLst>
               <a:ext uri="{FF2B5EF4-FFF2-40B4-BE49-F238E27FC236}">
-                <a16:creationId xmlns:a16="http://schemas.microsoft.com/office/drawing/2014/main" id="{8DDF73BE-18A8-041F-344D-32D3C69261F7}"/>
+                <a16:creationId xmlns:a16="http://schemas.microsoft.com/office/drawing/2014/main" id="{F996CA07-975C-FE66-163D-A6B6F3DA6FE4}"/>
               </a:ext>
             </a:extLst>
           </p:cNvPr>
@@ -3320,7 +3320,7 @@
           <a:bodyPr/>
           <a:lstStyle/>
           <a:p>
-            <a:fld id="{0B728AF7-151B-41DA-8187-545C3068964B}" type="datetimeFigureOut">
+            <a:fld id="{A6918204-41E8-40EE-B013-E681DE881932}" type="datetimeFigureOut">
               <a:rPr lang="en-MY" smtClean="0"/>
               <a:t>25/9/2026</a:t>
             </a:fld>
@@ -3333,7 +3333,7 @@
           <p:cNvPr id="3" name="Footer Placeholder 2">
             <a:extLst>
               <a:ext uri="{FF2B5EF4-FFF2-40B4-BE49-F238E27FC236}">
-                <a16:creationId xmlns:a16="http://schemas.microsoft.com/office/drawing/2014/main" id="{F13B6468-8FD7-C087-480A-B9C6E43C0139}"/>
+                <a16:creationId xmlns:a16="http://schemas.microsoft.com/office/drawing/2014/main" id="{A53A8518-0614-96A2-8CF5-C3E27B22A591}"/>
               </a:ext>
             </a:extLst>
           </p:cNvPr>
@@ -3358,7 +3358,7 @@
           <p:cNvPr id="4" name="Slide Number Placeholder 3">
             <a:extLst>
               <a:ext uri="{FF2B5EF4-FFF2-40B4-BE49-F238E27FC236}">
-                <a16:creationId xmlns:a16="http://schemas.microsoft.com/office/drawing/2014/main" id="{FBC35A87-960A-330E-2FF8-A12EB4E67087}"/>
+                <a16:creationId xmlns:a16="http://schemas.microsoft.com/office/drawing/2014/main" id="{460002E0-9D90-B72F-1BB1-1478D74E5390}"/>
               </a:ext>
             </a:extLst>
           </p:cNvPr>
@@ -3374,7 +3374,7 @@
           <a:bodyPr/>
           <a:lstStyle/>
           <a:p>
-            <a:fld id="{1FCA58A0-11E7-4277-A1A1-0F6207FCBDA4}" type="slidenum">
+            <a:fld id="{BF8F21EB-8CE5-4FD5-B471-AC7A37C86CD3}" type="slidenum">
               <a:rPr lang="en-MY" smtClean="0"/>
               <a:t>‹#›</a:t>
             </a:fld>
@@ -3385,7 +3385,7 @@
     </p:spTree>
     <p:extLst>
       <p:ext uri="{BB962C8B-B14F-4D97-AF65-F5344CB8AC3E}">
-        <p14:creationId xmlns:p14="http://schemas.microsoft.com/office/powerpoint/2010/main" val="2226848961"/>
+        <p14:creationId xmlns:p14="http://schemas.microsoft.com/office/powerpoint/2010/main" val="2834123786"/>
       </p:ext>
     </p:extLst>
   </p:cSld>
@@ -3417,7 +3417,7 @@
           <p:cNvPr id="2" name="Title 1">
             <a:extLst>
               <a:ext uri="{FF2B5EF4-FFF2-40B4-BE49-F238E27FC236}">
-                <a16:creationId xmlns:a16="http://schemas.microsoft.com/office/drawing/2014/main" id="{E735D647-DEB4-0C91-252E-487373853801}"/>
+                <a16:creationId xmlns:a16="http://schemas.microsoft.com/office/drawing/2014/main" id="{711AB501-939A-9657-1D7B-45AE5F3751CF}"/>
               </a:ext>
             </a:extLst>
           </p:cNvPr>
@@ -3455,7 +3455,7 @@
           <p:cNvPr id="3" name="Content Placeholder 2">
             <a:extLst>
               <a:ext uri="{FF2B5EF4-FFF2-40B4-BE49-F238E27FC236}">
-                <a16:creationId xmlns:a16="http://schemas.microsoft.com/office/drawing/2014/main" id="{94F574DF-9B65-D023-DC35-914DD4E4942C}"/>
+                <a16:creationId xmlns:a16="http://schemas.microsoft.com/office/drawing/2014/main" id="{12484D98-17B3-E5C1-8EF1-39EF0760C6BB}"/>
               </a:ext>
             </a:extLst>
           </p:cNvPr>
@@ -3546,7 +3546,7 @@
           <p:cNvPr id="4" name="Text Placeholder 3">
             <a:extLst>
               <a:ext uri="{FF2B5EF4-FFF2-40B4-BE49-F238E27FC236}">
-                <a16:creationId xmlns:a16="http://schemas.microsoft.com/office/drawing/2014/main" id="{05A21A5F-8683-C984-AE45-A94CD2442862}"/>
+                <a16:creationId xmlns:a16="http://schemas.microsoft.com/office/drawing/2014/main" id="{8550FBE1-1C18-DF01-3172-4C90CC93F319}"/>
               </a:ext>
             </a:extLst>
           </p:cNvPr>
@@ -3617,7 +3617,7 @@
           <p:cNvPr id="5" name="Date Placeholder 4">
             <a:extLst>
               <a:ext uri="{FF2B5EF4-FFF2-40B4-BE49-F238E27FC236}">
-                <a16:creationId xmlns:a16="http://schemas.microsoft.com/office/drawing/2014/main" id="{834345B0-0489-8D8F-52F9-1C90F5CD94D0}"/>
+                <a16:creationId xmlns:a16="http://schemas.microsoft.com/office/drawing/2014/main" id="{B7DCD7C3-27E3-2EC3-C4F2-CAF6BA419594}"/>
               </a:ext>
             </a:extLst>
           </p:cNvPr>
@@ -3633,7 +3633,7 @@
           <a:bodyPr/>
           <a:lstStyle/>
           <a:p>
-            <a:fld id="{0B728AF7-151B-41DA-8187-545C3068964B}" type="datetimeFigureOut">
+            <a:fld id="{A6918204-41E8-40EE-B013-E681DE881932}" type="datetimeFigureOut">
               <a:rPr lang="en-MY" smtClean="0"/>
               <a:t>25/9/2026</a:t>
             </a:fld>
@@ -3646,7 +3646,7 @@
           <p:cNvPr id="6" name="Footer Placeholder 5">
             <a:extLst>
               <a:ext uri="{FF2B5EF4-FFF2-40B4-BE49-F238E27FC236}">
-                <a16:creationId xmlns:a16="http://schemas.microsoft.com/office/drawing/2014/main" id="{A59D7F4C-FFBE-7324-AE82-41EF1B16CA8F}"/>
+                <a16:creationId xmlns:a16="http://schemas.microsoft.com/office/drawing/2014/main" id="{0D460765-DFB4-068E-DFB8-CD3FAF1A4BE2}"/>
               </a:ext>
             </a:extLst>
           </p:cNvPr>
@@ -3671,7 +3671,7 @@
           <p:cNvPr id="7" name="Slide Number Placeholder 6">
             <a:extLst>
               <a:ext uri="{FF2B5EF4-FFF2-40B4-BE49-F238E27FC236}">
-                <a16:creationId xmlns:a16="http://schemas.microsoft.com/office/drawing/2014/main" id="{26F77ABD-52E9-BEDA-40B4-0DCC04EC4FB3}"/>
+                <a16:creationId xmlns:a16="http://schemas.microsoft.com/office/drawing/2014/main" id="{11F8637B-FA2B-F86F-9524-DC65E4077DBF}"/>
               </a:ext>
             </a:extLst>
           </p:cNvPr>
@@ -3687,7 +3687,7 @@
           <a:bodyPr/>
           <a:lstStyle/>
           <a:p>
-            <a:fld id="{1FCA58A0-11E7-4277-A1A1-0F6207FCBDA4}" type="slidenum">
+            <a:fld id="{BF8F21EB-8CE5-4FD5-B471-AC7A37C86CD3}" type="slidenum">
               <a:rPr lang="en-MY" smtClean="0"/>
               <a:t>‹#›</a:t>
             </a:fld>
@@ -3698,7 +3698,7 @@
     </p:spTree>
     <p:extLst>
       <p:ext uri="{BB962C8B-B14F-4D97-AF65-F5344CB8AC3E}">
-        <p14:creationId xmlns:p14="http://schemas.microsoft.com/office/powerpoint/2010/main" val="2437381007"/>
+        <p14:creationId xmlns:p14="http://schemas.microsoft.com/office/powerpoint/2010/main" val="397233165"/>
       </p:ext>
     </p:extLst>
   </p:cSld>
@@ -3730,7 +3730,7 @@
           <p:cNvPr id="2" name="Title 1">
             <a:extLst>
               <a:ext uri="{FF2B5EF4-FFF2-40B4-BE49-F238E27FC236}">
-                <a16:creationId xmlns:a16="http://schemas.microsoft.com/office/drawing/2014/main" id="{B5A4E82F-4245-0C46-3F1B-BE58113F5799}"/>
+                <a16:creationId xmlns:a16="http://schemas.microsoft.com/office/drawing/2014/main" id="{FBD9645A-1754-11CE-3693-B80F93FB3AAD}"/>
               </a:ext>
             </a:extLst>
           </p:cNvPr>
@@ -3768,7 +3768,7 @@
           <p:cNvPr id="3" name="Picture Placeholder 2">
             <a:extLst>
               <a:ext uri="{FF2B5EF4-FFF2-40B4-BE49-F238E27FC236}">
-                <a16:creationId xmlns:a16="http://schemas.microsoft.com/office/drawing/2014/main" id="{3E7EFC82-8034-2584-01E1-6726F8B1E921}"/>
+                <a16:creationId xmlns:a16="http://schemas.microsoft.com/office/drawing/2014/main" id="{4EF8AE37-B8C0-DC57-358B-96CD021E06C7}"/>
               </a:ext>
             </a:extLst>
           </p:cNvPr>
@@ -3835,7 +3835,7 @@
           <p:cNvPr id="4" name="Text Placeholder 3">
             <a:extLst>
               <a:ext uri="{FF2B5EF4-FFF2-40B4-BE49-F238E27FC236}">
-                <a16:creationId xmlns:a16="http://schemas.microsoft.com/office/drawing/2014/main" id="{3EA401B4-16AC-98DD-9789-DBD3920FC865}"/>
+                <a16:creationId xmlns:a16="http://schemas.microsoft.com/office/drawing/2014/main" id="{9EE2589E-EE4C-44F9-1391-17E5BE87B355}"/>
               </a:ext>
             </a:extLst>
           </p:cNvPr>
@@ -3906,7 +3906,7 @@
           <p:cNvPr id="5" name="Date Placeholder 4">
             <a:extLst>
               <a:ext uri="{FF2B5EF4-FFF2-40B4-BE49-F238E27FC236}">
-                <a16:creationId xmlns:a16="http://schemas.microsoft.com/office/drawing/2014/main" id="{0DBA10CB-8164-C7EB-4DA7-EF7FC262AA1A}"/>
+                <a16:creationId xmlns:a16="http://schemas.microsoft.com/office/drawing/2014/main" id="{0272373A-9CC6-CC47-D1A6-D2B6CF3E282D}"/>
               </a:ext>
             </a:extLst>
           </p:cNvPr>
@@ -3922,7 +3922,7 @@
           <a:bodyPr/>
           <a:lstStyle/>
           <a:p>
-            <a:fld id="{0B728AF7-151B-41DA-8187-545C3068964B}" type="datetimeFigureOut">
+            <a:fld id="{A6918204-41E8-40EE-B013-E681DE881932}" type="datetimeFigureOut">
               <a:rPr lang="en-MY" smtClean="0"/>
               <a:t>25/9/2026</a:t>
             </a:fld>
@@ -3935,7 +3935,7 @@
           <p:cNvPr id="6" name="Footer Placeholder 5">
             <a:extLst>
               <a:ext uri="{FF2B5EF4-FFF2-40B4-BE49-F238E27FC236}">
-                <a16:creationId xmlns:a16="http://schemas.microsoft.com/office/drawing/2014/main" id="{DAEB6BD9-4E31-F73D-2FA8-7211A394D6FC}"/>
+                <a16:creationId xmlns:a16="http://schemas.microsoft.com/office/drawing/2014/main" id="{341EC12D-A768-C9AE-B430-45D60F33570E}"/>
               </a:ext>
             </a:extLst>
           </p:cNvPr>
@@ -3960,7 +3960,7 @@
           <p:cNvPr id="7" name="Slide Number Placeholder 6">
             <a:extLst>
               <a:ext uri="{FF2B5EF4-FFF2-40B4-BE49-F238E27FC236}">
-                <a16:creationId xmlns:a16="http://schemas.microsoft.com/office/drawing/2014/main" id="{C21E74BF-77A0-0972-CCFC-00E7FA6968DF}"/>
+                <a16:creationId xmlns:a16="http://schemas.microsoft.com/office/drawing/2014/main" id="{C108A67E-0CEC-412F-7F75-BCE96D0FAD80}"/>
               </a:ext>
             </a:extLst>
           </p:cNvPr>
@@ -3976,7 +3976,7 @@
           <a:bodyPr/>
           <a:lstStyle/>
           <a:p>
-            <a:fld id="{1FCA58A0-11E7-4277-A1A1-0F6207FCBDA4}" type="slidenum">
+            <a:fld id="{BF8F21EB-8CE5-4FD5-B471-AC7A37C86CD3}" type="slidenum">
               <a:rPr lang="en-MY" smtClean="0"/>
               <a:t>‹#›</a:t>
             </a:fld>
@@ -3987,7 +3987,7 @@
     </p:spTree>
     <p:extLst>
       <p:ext uri="{BB962C8B-B14F-4D97-AF65-F5344CB8AC3E}">
-        <p14:creationId xmlns:p14="http://schemas.microsoft.com/office/powerpoint/2010/main" val="3954144496"/>
+        <p14:creationId xmlns:p14="http://schemas.microsoft.com/office/powerpoint/2010/main" val="1109387178"/>
       </p:ext>
     </p:extLst>
   </p:cSld>
@@ -4024,7 +4024,7 @@
           <p:cNvPr id="2" name="Title Placeholder 1">
             <a:extLst>
               <a:ext uri="{FF2B5EF4-FFF2-40B4-BE49-F238E27FC236}">
-                <a16:creationId xmlns:a16="http://schemas.microsoft.com/office/drawing/2014/main" id="{0027F31C-07EE-7F85-9907-974AB939F7EC}"/>
+                <a16:creationId xmlns:a16="http://schemas.microsoft.com/office/drawing/2014/main" id="{C0F7790B-7479-AFA5-8A58-BAFC494728CC}"/>
               </a:ext>
             </a:extLst>
           </p:cNvPr>
@@ -4063,7 +4063,7 @@
           <p:cNvPr id="3" name="Text Placeholder 2">
             <a:extLst>
               <a:ext uri="{FF2B5EF4-FFF2-40B4-BE49-F238E27FC236}">
-                <a16:creationId xmlns:a16="http://schemas.microsoft.com/office/drawing/2014/main" id="{B0F30AAC-7A60-3B63-2F8A-12C3E8C5E65E}"/>
+                <a16:creationId xmlns:a16="http://schemas.microsoft.com/office/drawing/2014/main" id="{E7A8404C-DA11-DD72-5EED-1C17342E36F7}"/>
               </a:ext>
             </a:extLst>
           </p:cNvPr>
@@ -4131,7 +4131,7 @@
           <p:cNvPr id="4" name="Date Placeholder 3">
             <a:extLst>
               <a:ext uri="{FF2B5EF4-FFF2-40B4-BE49-F238E27FC236}">
-                <a16:creationId xmlns:a16="http://schemas.microsoft.com/office/drawing/2014/main" id="{E532356B-A5D5-99CA-B909-9859D5311845}"/>
+                <a16:creationId xmlns:a16="http://schemas.microsoft.com/office/drawing/2014/main" id="{052AA92D-5884-376A-4E05-D7A2056FCC6E}"/>
               </a:ext>
             </a:extLst>
           </p:cNvPr>
@@ -4165,7 +4165,7 @@
             </a:lvl1pPr>
           </a:lstStyle>
           <a:p>
-            <a:fld id="{0B728AF7-151B-41DA-8187-545C3068964B}" type="datetimeFigureOut">
+            <a:fld id="{A6918204-41E8-40EE-B013-E681DE881932}" type="datetimeFigureOut">
               <a:rPr lang="en-MY" smtClean="0"/>
               <a:t>25/9/2026</a:t>
             </a:fld>
@@ -4178,7 +4178,7 @@
           <p:cNvPr id="5" name="Footer Placeholder 4">
             <a:extLst>
               <a:ext uri="{FF2B5EF4-FFF2-40B4-BE49-F238E27FC236}">
-                <a16:creationId xmlns:a16="http://schemas.microsoft.com/office/drawing/2014/main" id="{62FA543B-2B55-E124-EDC2-E779F73605FD}"/>
+                <a16:creationId xmlns:a16="http://schemas.microsoft.com/office/drawing/2014/main" id="{53FEF497-1C86-5E0F-E63B-559C23257FE3}"/>
               </a:ext>
             </a:extLst>
           </p:cNvPr>
@@ -4221,7 +4221,7 @@
           <p:cNvPr id="6" name="Slide Number Placeholder 5">
             <a:extLst>
               <a:ext uri="{FF2B5EF4-FFF2-40B4-BE49-F238E27FC236}">
-                <a16:creationId xmlns:a16="http://schemas.microsoft.com/office/drawing/2014/main" id="{4776DCCA-E041-72E4-D339-A039E356B1D3}"/>
+                <a16:creationId xmlns:a16="http://schemas.microsoft.com/office/drawing/2014/main" id="{A8987F52-840A-ECC4-DC59-8D26DEBBCF6B}"/>
               </a:ext>
             </a:extLst>
           </p:cNvPr>
@@ -4255,7 +4255,7 @@
             </a:lvl1pPr>
           </a:lstStyle>
           <a:p>
-            <a:fld id="{1FCA58A0-11E7-4277-A1A1-0F6207FCBDA4}" type="slidenum">
+            <a:fld id="{BF8F21EB-8CE5-4FD5-B471-AC7A37C86CD3}" type="slidenum">
               <a:rPr lang="en-MY" smtClean="0"/>
               <a:t>‹#›</a:t>
             </a:fld>
@@ -4266,7 +4266,7 @@
     </p:spTree>
     <p:extLst>
       <p:ext uri="{BB962C8B-B14F-4D97-AF65-F5344CB8AC3E}">
-        <p14:creationId xmlns:p14="http://schemas.microsoft.com/office/powerpoint/2010/main" val="4007215372"/>
+        <p14:creationId xmlns:p14="http://schemas.microsoft.com/office/powerpoint/2010/main" val="1371948398"/>
       </p:ext>
     </p:extLst>
   </p:cSld>
@@ -4597,7 +4597,7 @@
           <p:cNvPr id="2" name="TextBox 1">
             <a:extLst>
               <a:ext uri="{FF2B5EF4-FFF2-40B4-BE49-F238E27FC236}">
-                <a16:creationId xmlns:a16="http://schemas.microsoft.com/office/drawing/2014/main" id="{EB12030B-DEF6-B366-D679-99E47DE6051B}"/>
+                <a16:creationId xmlns:a16="http://schemas.microsoft.com/office/drawing/2014/main" id="{5BA62390-9557-6D21-3426-97B458B5249C}"/>
               </a:ext>
             </a:extLst>
           </p:cNvPr>
@@ -4637,7 +4637,7 @@
           <p:cNvPr id="3" name="TextBox 2">
             <a:extLst>
               <a:ext uri="{FF2B5EF4-FFF2-40B4-BE49-F238E27FC236}">
-                <a16:creationId xmlns:a16="http://schemas.microsoft.com/office/drawing/2014/main" id="{E90C1EDB-B7FF-0413-8D9F-C16C942FC594}"/>
+                <a16:creationId xmlns:a16="http://schemas.microsoft.com/office/drawing/2014/main" id="{ED37A1FE-C2CE-26A9-6F42-E1B0E9D94EEE}"/>
               </a:ext>
             </a:extLst>
           </p:cNvPr>
@@ -4683,7 +4683,7 @@
           <p:cNvPr id="4" name="TextBox 3">
             <a:extLst>
               <a:ext uri="{FF2B5EF4-FFF2-40B4-BE49-F238E27FC236}">
-                <a16:creationId xmlns:a16="http://schemas.microsoft.com/office/drawing/2014/main" id="{0BBFF565-FB81-0364-7635-87E4452EE2A6}"/>
+                <a16:creationId xmlns:a16="http://schemas.microsoft.com/office/drawing/2014/main" id="{596B1057-4F62-CBF8-D190-25FBCA439D1B}"/>
               </a:ext>
             </a:extLst>
           </p:cNvPr>
@@ -4729,7 +4729,7 @@
           <p:cNvPr id="5" name="TextBox 4">
             <a:extLst>
               <a:ext uri="{FF2B5EF4-FFF2-40B4-BE49-F238E27FC236}">
-                <a16:creationId xmlns:a16="http://schemas.microsoft.com/office/drawing/2014/main" id="{927FC9AB-507C-95BB-EEFF-2A832BED6250}"/>
+                <a16:creationId xmlns:a16="http://schemas.microsoft.com/office/drawing/2014/main" id="{DDE76265-C6C6-AD3F-71A9-45FAB137E455}"/>
               </a:ext>
             </a:extLst>
           </p:cNvPr>
@@ -4775,7 +4775,7 @@
           <p:cNvPr id="6" name="TextBox 5">
             <a:extLst>
               <a:ext uri="{FF2B5EF4-FFF2-40B4-BE49-F238E27FC236}">
-                <a16:creationId xmlns:a16="http://schemas.microsoft.com/office/drawing/2014/main" id="{13FA56DB-1A8C-93FC-9316-F883291A5E5A}"/>
+                <a16:creationId xmlns:a16="http://schemas.microsoft.com/office/drawing/2014/main" id="{7D5023F8-E4A5-40DD-842D-9398FCC02767}"/>
               </a:ext>
             </a:extLst>
           </p:cNvPr>
@@ -4815,7 +4815,7 @@
           <p:cNvPr id="7" name="TextBox 6">
             <a:extLst>
               <a:ext uri="{FF2B5EF4-FFF2-40B4-BE49-F238E27FC236}">
-                <a16:creationId xmlns:a16="http://schemas.microsoft.com/office/drawing/2014/main" id="{8CE0E2D9-7C24-D8F2-B0EF-E4D395F890C3}"/>
+                <a16:creationId xmlns:a16="http://schemas.microsoft.com/office/drawing/2014/main" id="{5FCC55DC-1EB3-C70F-75FD-857855B38420}"/>
               </a:ext>
             </a:extLst>
           </p:cNvPr>
@@ -4860,7 +4860,7 @@
     </p:spTree>
     <p:extLst>
       <p:ext uri="{BB962C8B-B14F-4D97-AF65-F5344CB8AC3E}">
-        <p14:creationId xmlns:p14="http://schemas.microsoft.com/office/powerpoint/2010/main" val="1756442295"/>
+        <p14:creationId xmlns:p14="http://schemas.microsoft.com/office/powerpoint/2010/main" val="2997855044"/>
       </p:ext>
     </p:extLst>
   </p:cSld>
@@ -4900,7 +4900,7 @@
           <p:cNvPr id="2" name="TextBox 1">
             <a:extLst>
               <a:ext uri="{FF2B5EF4-FFF2-40B4-BE49-F238E27FC236}">
-                <a16:creationId xmlns:a16="http://schemas.microsoft.com/office/drawing/2014/main" id="{E856E8A7-D226-33B3-3E7A-938EF229D2E8}"/>
+                <a16:creationId xmlns:a16="http://schemas.microsoft.com/office/drawing/2014/main" id="{FDB33663-2B81-2594-5395-C5469EA5BC95}"/>
               </a:ext>
             </a:extLst>
           </p:cNvPr>
@@ -4947,7 +4947,7 @@
           <p:cNvPr id="3" name="TextBox 2">
             <a:extLst>
               <a:ext uri="{FF2B5EF4-FFF2-40B4-BE49-F238E27FC236}">
-                <a16:creationId xmlns:a16="http://schemas.microsoft.com/office/drawing/2014/main" id="{FAEE067C-CB3F-1262-64A3-24511DD9B3A3}"/>
+                <a16:creationId xmlns:a16="http://schemas.microsoft.com/office/drawing/2014/main" id="{ECDACC31-C435-5B29-DF6B-10A8E48C1269}"/>
               </a:ext>
             </a:extLst>
           </p:cNvPr>
@@ -4988,7 +4988,7 @@
           <p:cNvPr id="4" name="TextBox 3">
             <a:extLst>
               <a:ext uri="{FF2B5EF4-FFF2-40B4-BE49-F238E27FC236}">
-                <a16:creationId xmlns:a16="http://schemas.microsoft.com/office/drawing/2014/main" id="{CFDF8A85-FF2E-A99C-CBAC-E163D16A75C8}"/>
+                <a16:creationId xmlns:a16="http://schemas.microsoft.com/office/drawing/2014/main" id="{F3D35E40-2724-6B5A-28C0-9E0E8D6A6A34}"/>
               </a:ext>
             </a:extLst>
           </p:cNvPr>
@@ -5027,7 +5027,7 @@
     </p:spTree>
     <p:extLst>
       <p:ext uri="{BB962C8B-B14F-4D97-AF65-F5344CB8AC3E}">
-        <p14:creationId xmlns:p14="http://schemas.microsoft.com/office/powerpoint/2010/main" val="3182102028"/>
+        <p14:creationId xmlns:p14="http://schemas.microsoft.com/office/powerpoint/2010/main" val="3505509549"/>
       </p:ext>
     </p:extLst>
   </p:cSld>
@@ -5067,7 +5067,7 @@
           <p:cNvPr id="2" name="TextBox 1">
             <a:extLst>
               <a:ext uri="{FF2B5EF4-FFF2-40B4-BE49-F238E27FC236}">
-                <a16:creationId xmlns:a16="http://schemas.microsoft.com/office/drawing/2014/main" id="{AF7D65C0-698E-92CA-052B-9518BDABB3C8}"/>
+                <a16:creationId xmlns:a16="http://schemas.microsoft.com/office/drawing/2014/main" id="{268174FA-03A6-E29B-B1BA-0E3B468F7D22}"/>
               </a:ext>
             </a:extLst>
           </p:cNvPr>
@@ -5113,7 +5113,7 @@
           <p:cNvPr id="3" name="Rectangle: Rounded Corners 2">
             <a:extLst>
               <a:ext uri="{FF2B5EF4-FFF2-40B4-BE49-F238E27FC236}">
-                <a16:creationId xmlns:a16="http://schemas.microsoft.com/office/drawing/2014/main" id="{93C9C682-1327-76E8-4AAB-D6608E32BAAD}"/>
+                <a16:creationId xmlns:a16="http://schemas.microsoft.com/office/drawing/2014/main" id="{15D296A3-BE86-ADB8-94BE-0EB6AF4835AF}"/>
               </a:ext>
             </a:extLst>
           </p:cNvPr>
@@ -5183,7 +5183,7 @@
           <p:cNvPr id="4" name="Oval 3">
             <a:extLst>
               <a:ext uri="{FF2B5EF4-FFF2-40B4-BE49-F238E27FC236}">
-                <a16:creationId xmlns:a16="http://schemas.microsoft.com/office/drawing/2014/main" id="{BDDFC3E4-4ABD-8B61-E575-CA0CCFC25B17}"/>
+                <a16:creationId xmlns:a16="http://schemas.microsoft.com/office/drawing/2014/main" id="{5B83F402-CFA9-ED2A-2B59-94291D77F678}"/>
               </a:ext>
             </a:extLst>
           </p:cNvPr>
@@ -5259,7 +5259,7 @@
           <p:cNvPr id="5" name="TextBox 4">
             <a:extLst>
               <a:ext uri="{FF2B5EF4-FFF2-40B4-BE49-F238E27FC236}">
-                <a16:creationId xmlns:a16="http://schemas.microsoft.com/office/drawing/2014/main" id="{2A6E10EA-5843-35AB-A529-3BF5492439CB}"/>
+                <a16:creationId xmlns:a16="http://schemas.microsoft.com/office/drawing/2014/main" id="{F6312717-00CF-148F-FE2F-560CA665308C}"/>
               </a:ext>
             </a:extLst>
           </p:cNvPr>
@@ -5299,7 +5299,7 @@
           <p:cNvPr id="6" name="TextBox 5">
             <a:extLst>
               <a:ext uri="{FF2B5EF4-FFF2-40B4-BE49-F238E27FC236}">
-                <a16:creationId xmlns:a16="http://schemas.microsoft.com/office/drawing/2014/main" id="{9E3C2AEA-59C0-3A91-B89F-F35EBF182E14}"/>
+                <a16:creationId xmlns:a16="http://schemas.microsoft.com/office/drawing/2014/main" id="{35F8B41E-2EFA-8D93-D093-5D146E45BFC2}"/>
               </a:ext>
             </a:extLst>
           </p:cNvPr>
@@ -5339,7 +5339,7 @@
           <p:cNvPr id="7" name="Rectangle: Rounded Corners 6">
             <a:extLst>
               <a:ext uri="{FF2B5EF4-FFF2-40B4-BE49-F238E27FC236}">
-                <a16:creationId xmlns:a16="http://schemas.microsoft.com/office/drawing/2014/main" id="{9B3167F5-45BC-C832-371F-CEEE87AA64F0}"/>
+                <a16:creationId xmlns:a16="http://schemas.microsoft.com/office/drawing/2014/main" id="{61DD50AB-93DE-73AF-C816-A8EA54EB7A06}"/>
               </a:ext>
             </a:extLst>
           </p:cNvPr>
@@ -5409,7 +5409,7 @@
           <p:cNvPr id="8" name="Oval 7">
             <a:extLst>
               <a:ext uri="{FF2B5EF4-FFF2-40B4-BE49-F238E27FC236}">
-                <a16:creationId xmlns:a16="http://schemas.microsoft.com/office/drawing/2014/main" id="{6189B305-5032-4679-363C-59FD368A56FB}"/>
+                <a16:creationId xmlns:a16="http://schemas.microsoft.com/office/drawing/2014/main" id="{806FCF84-D99E-C63A-C5A7-ECDCD8AC70BF}"/>
               </a:ext>
             </a:extLst>
           </p:cNvPr>
@@ -5485,7 +5485,7 @@
           <p:cNvPr id="9" name="TextBox 8">
             <a:extLst>
               <a:ext uri="{FF2B5EF4-FFF2-40B4-BE49-F238E27FC236}">
-                <a16:creationId xmlns:a16="http://schemas.microsoft.com/office/drawing/2014/main" id="{A9AB0024-9038-FBB4-90FF-29DB3D8AD400}"/>
+                <a16:creationId xmlns:a16="http://schemas.microsoft.com/office/drawing/2014/main" id="{431F6A1C-7BE5-C0D0-ED59-2DA381B7F2D7}"/>
               </a:ext>
             </a:extLst>
           </p:cNvPr>
@@ -5525,7 +5525,7 @@
           <p:cNvPr id="10" name="TextBox 9">
             <a:extLst>
               <a:ext uri="{FF2B5EF4-FFF2-40B4-BE49-F238E27FC236}">
-                <a16:creationId xmlns:a16="http://schemas.microsoft.com/office/drawing/2014/main" id="{C31AFCBF-9B7F-1F5D-3342-CE6A9ED382EB}"/>
+                <a16:creationId xmlns:a16="http://schemas.microsoft.com/office/drawing/2014/main" id="{FB9A52A7-6BD3-75C2-6F55-8CA1C2C97335}"/>
               </a:ext>
             </a:extLst>
           </p:cNvPr>
@@ -5571,7 +5571,7 @@
           <p:cNvPr id="11" name="Rectangle: Rounded Corners 10">
             <a:extLst>
               <a:ext uri="{FF2B5EF4-FFF2-40B4-BE49-F238E27FC236}">
-                <a16:creationId xmlns:a16="http://schemas.microsoft.com/office/drawing/2014/main" id="{09A2B72A-4E8C-30E8-73A9-08EA4CE730A8}"/>
+                <a16:creationId xmlns:a16="http://schemas.microsoft.com/office/drawing/2014/main" id="{6AB5CF38-8A58-884C-2950-78A2DA63F75B}"/>
               </a:ext>
             </a:extLst>
           </p:cNvPr>
@@ -5641,7 +5641,7 @@
           <p:cNvPr id="12" name="Oval 11">
             <a:extLst>
               <a:ext uri="{FF2B5EF4-FFF2-40B4-BE49-F238E27FC236}">
-                <a16:creationId xmlns:a16="http://schemas.microsoft.com/office/drawing/2014/main" id="{C5A03BD7-CB24-6C2C-0B71-7F42985EB686}"/>
+                <a16:creationId xmlns:a16="http://schemas.microsoft.com/office/drawing/2014/main" id="{3B8AB977-1BF3-18B6-B5C3-659E9984E9CA}"/>
               </a:ext>
             </a:extLst>
           </p:cNvPr>
@@ -5717,7 +5717,7 @@
           <p:cNvPr id="13" name="TextBox 12">
             <a:extLst>
               <a:ext uri="{FF2B5EF4-FFF2-40B4-BE49-F238E27FC236}">
-                <a16:creationId xmlns:a16="http://schemas.microsoft.com/office/drawing/2014/main" id="{F92F89F5-3A58-AB56-D14E-D9603B3ED5D8}"/>
+                <a16:creationId xmlns:a16="http://schemas.microsoft.com/office/drawing/2014/main" id="{3B75DD3C-DF0C-8EA2-92A0-CC22CDB1F8F2}"/>
               </a:ext>
             </a:extLst>
           </p:cNvPr>
@@ -5757,7 +5757,7 @@
           <p:cNvPr id="14" name="TextBox 13">
             <a:extLst>
               <a:ext uri="{FF2B5EF4-FFF2-40B4-BE49-F238E27FC236}">
-                <a16:creationId xmlns:a16="http://schemas.microsoft.com/office/drawing/2014/main" id="{33581A7C-7686-E00B-3B72-2DD64DDAC20D}"/>
+                <a16:creationId xmlns:a16="http://schemas.microsoft.com/office/drawing/2014/main" id="{22BC8D74-8784-0E34-4D96-F68F2F0165B5}"/>
               </a:ext>
             </a:extLst>
           </p:cNvPr>
@@ -5803,7 +5803,7 @@
           <p:cNvPr id="15" name="Rectangle: Rounded Corners 14">
             <a:extLst>
               <a:ext uri="{FF2B5EF4-FFF2-40B4-BE49-F238E27FC236}">
-                <a16:creationId xmlns:a16="http://schemas.microsoft.com/office/drawing/2014/main" id="{31B0776E-2313-0A39-F15F-EA93D85F7740}"/>
+                <a16:creationId xmlns:a16="http://schemas.microsoft.com/office/drawing/2014/main" id="{0108269C-DE25-0B87-376A-E158B8B7EA12}"/>
               </a:ext>
             </a:extLst>
           </p:cNvPr>
@@ -5873,7 +5873,7 @@
           <p:cNvPr id="16" name="Oval 15">
             <a:extLst>
               <a:ext uri="{FF2B5EF4-FFF2-40B4-BE49-F238E27FC236}">
-                <a16:creationId xmlns:a16="http://schemas.microsoft.com/office/drawing/2014/main" id="{49FBD91A-3059-CC9A-9B97-F7EAFF60B97D}"/>
+                <a16:creationId xmlns:a16="http://schemas.microsoft.com/office/drawing/2014/main" id="{EC09E11F-1D4A-D10F-4D24-FB6C357189A4}"/>
               </a:ext>
             </a:extLst>
           </p:cNvPr>
@@ -5949,7 +5949,7 @@
           <p:cNvPr id="17" name="TextBox 16">
             <a:extLst>
               <a:ext uri="{FF2B5EF4-FFF2-40B4-BE49-F238E27FC236}">
-                <a16:creationId xmlns:a16="http://schemas.microsoft.com/office/drawing/2014/main" id="{40C2087B-47FE-C68C-BFAB-BBD5B070B01D}"/>
+                <a16:creationId xmlns:a16="http://schemas.microsoft.com/office/drawing/2014/main" id="{FCB4C8C2-6C28-6F08-DA6A-97F446D8A1BF}"/>
               </a:ext>
             </a:extLst>
           </p:cNvPr>
@@ -5989,7 +5989,7 @@
           <p:cNvPr id="18" name="TextBox 17">
             <a:extLst>
               <a:ext uri="{FF2B5EF4-FFF2-40B4-BE49-F238E27FC236}">
-                <a16:creationId xmlns:a16="http://schemas.microsoft.com/office/drawing/2014/main" id="{5F602246-6061-FBB4-35D7-977701709FBF}"/>
+                <a16:creationId xmlns:a16="http://schemas.microsoft.com/office/drawing/2014/main" id="{D53A72BB-20C7-2639-4275-7FDDBC45B326}"/>
               </a:ext>
             </a:extLst>
           </p:cNvPr>
@@ -6035,7 +6035,7 @@
           <p:cNvPr id="19" name="TextBox 18">
             <a:extLst>
               <a:ext uri="{FF2B5EF4-FFF2-40B4-BE49-F238E27FC236}">
-                <a16:creationId xmlns:a16="http://schemas.microsoft.com/office/drawing/2014/main" id="{C3077379-4A82-A2D1-A5F7-212426B663F5}"/>
+                <a16:creationId xmlns:a16="http://schemas.microsoft.com/office/drawing/2014/main" id="{D8EC9D23-693C-CB66-9CB4-07337E66C7AE}"/>
               </a:ext>
             </a:extLst>
           </p:cNvPr>
@@ -6065,7 +6065,7 @@
                 </a:solidFill>
                 <a:latin typeface="Calibri" panose="020F0502020204030204" pitchFamily="34" charset="0"/>
               </a:rPr>
-              <a:t>Why we built it: today a documentation clerk does this by hand - about 4 minutes per SI/BL pair and 20 seconds to triage each email (a conservative estimate, not a measurement) - and a missed field becomes a correction, a delay, rework.</a:t>
+              <a:t>Why we built it: today a documentation clerk does this manually - about 4 minutes per SI/BL pair and 20 seconds to triage each email (a conservative estimate, not a measurement) - and a missed field becomes a correction, a delay, rework.</a:t>
             </a:r>
             <a:endParaRPr lang="en-MY" sz="1150">
               <a:solidFill>
@@ -6081,7 +6081,7 @@
           <p:cNvPr id="20" name="TextBox 19">
             <a:extLst>
               <a:ext uri="{FF2B5EF4-FFF2-40B4-BE49-F238E27FC236}">
-                <a16:creationId xmlns:a16="http://schemas.microsoft.com/office/drawing/2014/main" id="{A89D0BC0-252B-2E22-6CF5-9908FC34E0AE}"/>
+                <a16:creationId xmlns:a16="http://schemas.microsoft.com/office/drawing/2014/main" id="{03D77F4D-3D3F-1CDC-C934-D7320535D4DD}"/>
               </a:ext>
             </a:extLst>
           </p:cNvPr>
@@ -6127,7 +6127,7 @@
           <p:cNvPr id="21" name="TextBox 20">
             <a:extLst>
               <a:ext uri="{FF2B5EF4-FFF2-40B4-BE49-F238E27FC236}">
-                <a16:creationId xmlns:a16="http://schemas.microsoft.com/office/drawing/2014/main" id="{285E7FDD-7963-4185-0467-CC004DD1742A}"/>
+                <a16:creationId xmlns:a16="http://schemas.microsoft.com/office/drawing/2014/main" id="{30735F28-4D57-2910-36B2-34733D14495D}"/>
               </a:ext>
             </a:extLst>
           </p:cNvPr>
@@ -6173,7 +6173,7 @@
           <p:cNvPr id="22" name="TextBox 21">
             <a:extLst>
               <a:ext uri="{FF2B5EF4-FFF2-40B4-BE49-F238E27FC236}">
-                <a16:creationId xmlns:a16="http://schemas.microsoft.com/office/drawing/2014/main" id="{86655DF2-A9B6-17E0-A41F-2C9F1D13FD38}"/>
+                <a16:creationId xmlns:a16="http://schemas.microsoft.com/office/drawing/2014/main" id="{74FC16DD-3EE9-2E00-51CC-A406BAD55E01}"/>
               </a:ext>
             </a:extLst>
           </p:cNvPr>
@@ -6219,7 +6219,7 @@
           <p:cNvPr id="23" name="TextBox 22">
             <a:extLst>
               <a:ext uri="{FF2B5EF4-FFF2-40B4-BE49-F238E27FC236}">
-                <a16:creationId xmlns:a16="http://schemas.microsoft.com/office/drawing/2014/main" id="{ECD2F1BA-12CD-F949-B848-47ACE4C3E04B}"/>
+                <a16:creationId xmlns:a16="http://schemas.microsoft.com/office/drawing/2014/main" id="{F0D25784-0A2B-F6D4-C5CB-D67E0FF2D392}"/>
               </a:ext>
             </a:extLst>
           </p:cNvPr>
@@ -6265,7 +6265,7 @@
           <p:cNvPr id="24" name="TextBox 23">
             <a:extLst>
               <a:ext uri="{FF2B5EF4-FFF2-40B4-BE49-F238E27FC236}">
-                <a16:creationId xmlns:a16="http://schemas.microsoft.com/office/drawing/2014/main" id="{EAF54401-7154-727D-AC9C-D5DED18E94C3}"/>
+                <a16:creationId xmlns:a16="http://schemas.microsoft.com/office/drawing/2014/main" id="{B8850AE6-245C-E36F-3A95-8A5C0B4E8580}"/>
               </a:ext>
             </a:extLst>
           </p:cNvPr>
@@ -6311,7 +6311,7 @@
           <p:cNvPr id="25" name="TextBox 24">
             <a:extLst>
               <a:ext uri="{FF2B5EF4-FFF2-40B4-BE49-F238E27FC236}">
-                <a16:creationId xmlns:a16="http://schemas.microsoft.com/office/drawing/2014/main" id="{51B389D8-E086-5500-E44E-6C3CDC428E7E}"/>
+                <a16:creationId xmlns:a16="http://schemas.microsoft.com/office/drawing/2014/main" id="{E135BB62-3810-47E3-57BD-3760D5B6F0F1}"/>
               </a:ext>
             </a:extLst>
           </p:cNvPr>
@@ -6357,7 +6357,7 @@
           <p:cNvPr id="26" name="Rectangle: Rounded Corners 25">
             <a:extLst>
               <a:ext uri="{FF2B5EF4-FFF2-40B4-BE49-F238E27FC236}">
-                <a16:creationId xmlns:a16="http://schemas.microsoft.com/office/drawing/2014/main" id="{98EDABD5-9D2D-CE2C-B367-E8D9D01A4D22}"/>
+                <a16:creationId xmlns:a16="http://schemas.microsoft.com/office/drawing/2014/main" id="{712AA1B8-5640-E67E-F5E2-6B792066F81C}"/>
               </a:ext>
             </a:extLst>
           </p:cNvPr>
@@ -6427,7 +6427,7 @@
           <p:cNvPr id="27" name="TextBox 26">
             <a:extLst>
               <a:ext uri="{FF2B5EF4-FFF2-40B4-BE49-F238E27FC236}">
-                <a16:creationId xmlns:a16="http://schemas.microsoft.com/office/drawing/2014/main" id="{4F553718-392D-A359-ACEF-A3F95B7EECFD}"/>
+                <a16:creationId xmlns:a16="http://schemas.microsoft.com/office/drawing/2014/main" id="{68883C5C-8F04-FB96-3DF7-3478B763337A}"/>
               </a:ext>
             </a:extLst>
           </p:cNvPr>
@@ -6457,7 +6457,7 @@
                 </a:solidFill>
                 <a:latin typeface="Calibri" panose="020F0502020204030204" pitchFamily="34" charset="0"/>
               </a:rPr>
-              <a:t>The fourth case: sometimes the check cannot be done at all - an unreadable scan, a blank field, the wrong document. That has to reach a person with the reason attached, not be guessed at. Sentinel does all four.</a:t>
+              <a:t>The fourth case: sometimes the check cannot be done at all - an unreadable scan, a blank field, the wrong document. That has to be escalated to a reviewer with the reason attached, not guessed at. Sentinel does all four.</a:t>
             </a:r>
             <a:endParaRPr lang="en-MY" sz="1200">
               <a:solidFill>
@@ -6473,7 +6473,7 @@
           <p:cNvPr id="28" name="TextBox 27">
             <a:extLst>
               <a:ext uri="{FF2B5EF4-FFF2-40B4-BE49-F238E27FC236}">
-                <a16:creationId xmlns:a16="http://schemas.microsoft.com/office/drawing/2014/main" id="{BF62E463-30E3-7617-59B8-EFFA671470DA}"/>
+                <a16:creationId xmlns:a16="http://schemas.microsoft.com/office/drawing/2014/main" id="{349795DA-1727-0D07-2686-BD938457335B}"/>
               </a:ext>
             </a:extLst>
           </p:cNvPr>
@@ -6518,7 +6518,7 @@
     </p:spTree>
     <p:extLst>
       <p:ext uri="{BB962C8B-B14F-4D97-AF65-F5344CB8AC3E}">
-        <p14:creationId xmlns:p14="http://schemas.microsoft.com/office/powerpoint/2010/main" val="1475465828"/>
+        <p14:creationId xmlns:p14="http://schemas.microsoft.com/office/powerpoint/2010/main" val="3848283627"/>
       </p:ext>
     </p:extLst>
   </p:cSld>
@@ -6558,7 +6558,7 @@
           <p:cNvPr id="2" name="TextBox 1">
             <a:extLst>
               <a:ext uri="{FF2B5EF4-FFF2-40B4-BE49-F238E27FC236}">
-                <a16:creationId xmlns:a16="http://schemas.microsoft.com/office/drawing/2014/main" id="{17C20A8E-3934-5ED5-AACF-D80379EC6078}"/>
+                <a16:creationId xmlns:a16="http://schemas.microsoft.com/office/drawing/2014/main" id="{CFA6F530-4C06-E182-7D8F-D4F74103C0B6}"/>
               </a:ext>
             </a:extLst>
           </p:cNvPr>
@@ -6604,7 +6604,7 @@
           <p:cNvPr id="4" name="Picture 3">
             <a:extLst>
               <a:ext uri="{FF2B5EF4-FFF2-40B4-BE49-F238E27FC236}">
-                <a16:creationId xmlns:a16="http://schemas.microsoft.com/office/drawing/2014/main" id="{CD4275F3-E2D6-15A0-C521-45E9FDC2E6D4}"/>
+                <a16:creationId xmlns:a16="http://schemas.microsoft.com/office/drawing/2014/main" id="{EAF2AA9B-5F30-1C22-5E33-D8840D639729}"/>
               </a:ext>
             </a:extLst>
           </p:cNvPr>
@@ -6645,7 +6645,7 @@
           <p:cNvPr id="5" name="TextBox 4">
             <a:extLst>
               <a:ext uri="{FF2B5EF4-FFF2-40B4-BE49-F238E27FC236}">
-                <a16:creationId xmlns:a16="http://schemas.microsoft.com/office/drawing/2014/main" id="{64ABE30E-1992-4163-B9DC-D555B1D55D31}"/>
+                <a16:creationId xmlns:a16="http://schemas.microsoft.com/office/drawing/2014/main" id="{D94E313C-7B80-25F7-61AA-D60951D4AED0}"/>
               </a:ext>
             </a:extLst>
           </p:cNvPr>
@@ -6685,7 +6685,7 @@
           <p:cNvPr id="6" name="TextBox 5">
             <a:extLst>
               <a:ext uri="{FF2B5EF4-FFF2-40B4-BE49-F238E27FC236}">
-                <a16:creationId xmlns:a16="http://schemas.microsoft.com/office/drawing/2014/main" id="{4C0D1569-4E4B-9EBE-D28E-33D991285844}"/>
+                <a16:creationId xmlns:a16="http://schemas.microsoft.com/office/drawing/2014/main" id="{E6C2D59E-EAF2-4319-4453-4154EB54E4CB}"/>
               </a:ext>
             </a:extLst>
           </p:cNvPr>
@@ -6725,7 +6725,7 @@
           <p:cNvPr id="7" name="TextBox 6">
             <a:extLst>
               <a:ext uri="{FF2B5EF4-FFF2-40B4-BE49-F238E27FC236}">
-                <a16:creationId xmlns:a16="http://schemas.microsoft.com/office/drawing/2014/main" id="{5E2EF1B9-77D2-C6BD-DCE0-995ABEBECF0A}"/>
+                <a16:creationId xmlns:a16="http://schemas.microsoft.com/office/drawing/2014/main" id="{5A67930B-FB4D-1D88-EA1F-AB91B6361BD3}"/>
               </a:ext>
             </a:extLst>
           </p:cNvPr>
@@ -6765,7 +6765,7 @@
           <p:cNvPr id="8" name="TextBox 7">
             <a:extLst>
               <a:ext uri="{FF2B5EF4-FFF2-40B4-BE49-F238E27FC236}">
-                <a16:creationId xmlns:a16="http://schemas.microsoft.com/office/drawing/2014/main" id="{EBF4F280-1728-955B-C346-EED9CAFEA778}"/>
+                <a16:creationId xmlns:a16="http://schemas.microsoft.com/office/drawing/2014/main" id="{22CD5CA7-3B5F-BAE0-7867-BA47EE9F0A78}"/>
               </a:ext>
             </a:extLst>
           </p:cNvPr>
@@ -6795,7 +6795,7 @@
                 </a:solidFill>
                 <a:latin typeface="Calibri" panose="020F0502020204030204" pitchFamily="34" charset="0"/>
               </a:rPr>
-              <a:t>mismatches, with the fields that differ</a:t>
+              <a:t>discrepancies, with the fields that differ</a:t>
             </a:r>
             <a:endParaRPr lang="en-MY" sz="1200">
               <a:solidFill>
@@ -6811,7 +6811,7 @@
           <p:cNvPr id="9" name="TextBox 8">
             <a:extLst>
               <a:ext uri="{FF2B5EF4-FFF2-40B4-BE49-F238E27FC236}">
-                <a16:creationId xmlns:a16="http://schemas.microsoft.com/office/drawing/2014/main" id="{8DC51512-300F-8410-C273-84E452CC5814}"/>
+                <a16:creationId xmlns:a16="http://schemas.microsoft.com/office/drawing/2014/main" id="{9FEBEA10-E845-FF51-4240-DA474DD20F82}"/>
               </a:ext>
             </a:extLst>
           </p:cNvPr>
@@ -6851,7 +6851,7 @@
           <p:cNvPr id="10" name="TextBox 9">
             <a:extLst>
               <a:ext uri="{FF2B5EF4-FFF2-40B4-BE49-F238E27FC236}">
-                <a16:creationId xmlns:a16="http://schemas.microsoft.com/office/drawing/2014/main" id="{4C8CD486-5060-0882-92C6-67DE6878BA45}"/>
+                <a16:creationId xmlns:a16="http://schemas.microsoft.com/office/drawing/2014/main" id="{E62BC8B7-A8EC-16BE-8E33-086B4C4157FB}"/>
               </a:ext>
             </a:extLst>
           </p:cNvPr>
@@ -6881,7 +6881,7 @@
                 </a:solidFill>
                 <a:latin typeface="Calibri" panose="020F0502020204030204" pitchFamily="34" charset="0"/>
               </a:rPr>
-              <a:t>sent to a person - with the reason and what to do</a:t>
+              <a:t>escalated - with the reason and what to do</a:t>
             </a:r>
             <a:endParaRPr lang="en-MY" sz="1200">
               <a:solidFill>
@@ -6897,7 +6897,7 @@
           <p:cNvPr id="11" name="TextBox 10">
             <a:extLst>
               <a:ext uri="{FF2B5EF4-FFF2-40B4-BE49-F238E27FC236}">
-                <a16:creationId xmlns:a16="http://schemas.microsoft.com/office/drawing/2014/main" id="{C4D05F32-095F-9B50-2F69-D39B61B81206}"/>
+                <a16:creationId xmlns:a16="http://schemas.microsoft.com/office/drawing/2014/main" id="{7C1C6271-D458-BD09-A7E5-573DAE5DDA44}"/>
               </a:ext>
             </a:extLst>
           </p:cNvPr>
@@ -6937,7 +6937,7 @@
           <p:cNvPr id="12" name="TextBox 11">
             <a:extLst>
               <a:ext uri="{FF2B5EF4-FFF2-40B4-BE49-F238E27FC236}">
-                <a16:creationId xmlns:a16="http://schemas.microsoft.com/office/drawing/2014/main" id="{F0218D8C-8799-DE95-7590-ACFA0A493E99}"/>
+                <a16:creationId xmlns:a16="http://schemas.microsoft.com/office/drawing/2014/main" id="{4CBEDB22-F8EF-BC18-3E7C-CDE7607D3F94}"/>
               </a:ext>
             </a:extLst>
           </p:cNvPr>
@@ -6983,7 +6983,7 @@
           <p:cNvPr id="13" name="TextBox 12">
             <a:extLst>
               <a:ext uri="{FF2B5EF4-FFF2-40B4-BE49-F238E27FC236}">
-                <a16:creationId xmlns:a16="http://schemas.microsoft.com/office/drawing/2014/main" id="{087D4974-F4CD-BC77-9F98-9CFC285C0D28}"/>
+                <a16:creationId xmlns:a16="http://schemas.microsoft.com/office/drawing/2014/main" id="{5A3718EE-4363-B681-AE4C-49CA98217EFC}"/>
               </a:ext>
             </a:extLst>
           </p:cNvPr>
@@ -7013,7 +7013,7 @@
                 </a:solidFill>
                 <a:latin typeface="Calibri" panose="020F0502020204030204" pitchFamily="34" charset="0"/>
               </a:rPr>
-              <a:t>How a desk uses it:   1  Run the inbox   ·   2  Open a flagged case   ·   3  Agree with it, correct a single field, or re-upload the corrected document   ·   4  Send the drafted reply</a:t>
+              <a:t>How a desk uses it:   1  Run the inbox   ·   2  Open a flagged case   ·   3  Confirm or override it - correct a single value or attach the amended SI/BL   ·   4  Send the drafted reply</a:t>
             </a:r>
             <a:endParaRPr lang="en-MY" sz="1150">
               <a:solidFill>
@@ -7029,7 +7029,7 @@
           <p:cNvPr id="14" name="TextBox 13">
             <a:extLst>
               <a:ext uri="{FF2B5EF4-FFF2-40B4-BE49-F238E27FC236}">
-                <a16:creationId xmlns:a16="http://schemas.microsoft.com/office/drawing/2014/main" id="{2215D491-89FF-5A12-7013-8A7E69A4A545}"/>
+                <a16:creationId xmlns:a16="http://schemas.microsoft.com/office/drawing/2014/main" id="{11F956C4-EFFB-74EE-A438-8D0F86E68CE2}"/>
               </a:ext>
             </a:extLst>
           </p:cNvPr>
@@ -7068,7 +7068,7 @@
     </p:spTree>
     <p:extLst>
       <p:ext uri="{BB962C8B-B14F-4D97-AF65-F5344CB8AC3E}">
-        <p14:creationId xmlns:p14="http://schemas.microsoft.com/office/powerpoint/2010/main" val="5550087"/>
+        <p14:creationId xmlns:p14="http://schemas.microsoft.com/office/powerpoint/2010/main" val="2505919131"/>
       </p:ext>
     </p:extLst>
   </p:cSld>
@@ -7108,7 +7108,7 @@
           <p:cNvPr id="2" name="TextBox 1">
             <a:extLst>
               <a:ext uri="{FF2B5EF4-FFF2-40B4-BE49-F238E27FC236}">
-                <a16:creationId xmlns:a16="http://schemas.microsoft.com/office/drawing/2014/main" id="{315E8092-E697-5349-D59A-172FE9B7F8FF}"/>
+                <a16:creationId xmlns:a16="http://schemas.microsoft.com/office/drawing/2014/main" id="{2A33DB03-ECA3-CA41-3B34-8364ABE36ECA}"/>
               </a:ext>
             </a:extLst>
           </p:cNvPr>
@@ -7148,7 +7148,7 @@
           <p:cNvPr id="3" name="Rectangle: Rounded Corners 2">
             <a:extLst>
               <a:ext uri="{FF2B5EF4-FFF2-40B4-BE49-F238E27FC236}">
-                <a16:creationId xmlns:a16="http://schemas.microsoft.com/office/drawing/2014/main" id="{742ED012-5C6A-DB45-3E46-6E2F1F643E43}"/>
+                <a16:creationId xmlns:a16="http://schemas.microsoft.com/office/drawing/2014/main" id="{656A912C-2EAA-0065-7D69-D10DB4D43413}"/>
               </a:ext>
             </a:extLst>
           </p:cNvPr>
@@ -7226,7 +7226,7 @@
           <p:cNvPr id="4" name="Straight Connector 3">
             <a:extLst>
               <a:ext uri="{FF2B5EF4-FFF2-40B4-BE49-F238E27FC236}">
-                <a16:creationId xmlns:a16="http://schemas.microsoft.com/office/drawing/2014/main" id="{2ED9E4E7-A829-2EDB-6D0C-85F6D7055899}"/>
+                <a16:creationId xmlns:a16="http://schemas.microsoft.com/office/drawing/2014/main" id="{99333E48-F9AD-D37E-A9E2-24A7C673348D}"/>
               </a:ext>
             </a:extLst>
           </p:cNvPr>
@@ -7268,7 +7268,7 @@
           <p:cNvPr id="5" name="Rectangle: Rounded Corners 4">
             <a:extLst>
               <a:ext uri="{FF2B5EF4-FFF2-40B4-BE49-F238E27FC236}">
-                <a16:creationId xmlns:a16="http://schemas.microsoft.com/office/drawing/2014/main" id="{A0B697F3-C97B-53F1-F667-F0882F2EB1D8}"/>
+                <a16:creationId xmlns:a16="http://schemas.microsoft.com/office/drawing/2014/main" id="{E73F0E79-ECB2-93F0-6400-79A4683907C6}"/>
               </a:ext>
             </a:extLst>
           </p:cNvPr>
@@ -7346,7 +7346,7 @@
           <p:cNvPr id="6" name="Straight Connector 5">
             <a:extLst>
               <a:ext uri="{FF2B5EF4-FFF2-40B4-BE49-F238E27FC236}">
-                <a16:creationId xmlns:a16="http://schemas.microsoft.com/office/drawing/2014/main" id="{198A341D-B37E-DD23-0AE7-740E42127F7B}"/>
+                <a16:creationId xmlns:a16="http://schemas.microsoft.com/office/drawing/2014/main" id="{81A03295-1C20-73A7-58C0-16B614EBB01A}"/>
               </a:ext>
             </a:extLst>
           </p:cNvPr>
@@ -7388,7 +7388,7 @@
           <p:cNvPr id="7" name="Rectangle: Rounded Corners 6">
             <a:extLst>
               <a:ext uri="{FF2B5EF4-FFF2-40B4-BE49-F238E27FC236}">
-                <a16:creationId xmlns:a16="http://schemas.microsoft.com/office/drawing/2014/main" id="{C31F1896-06BB-A751-CF03-96BF4B3878F9}"/>
+                <a16:creationId xmlns:a16="http://schemas.microsoft.com/office/drawing/2014/main" id="{B0A5D8C1-BD4A-9A62-1824-85A01863266A}"/>
               </a:ext>
             </a:extLst>
           </p:cNvPr>
@@ -7466,7 +7466,7 @@
           <p:cNvPr id="8" name="Straight Connector 7">
             <a:extLst>
               <a:ext uri="{FF2B5EF4-FFF2-40B4-BE49-F238E27FC236}">
-                <a16:creationId xmlns:a16="http://schemas.microsoft.com/office/drawing/2014/main" id="{E6C811D4-374D-B459-C6E8-05C3C7C49DA7}"/>
+                <a16:creationId xmlns:a16="http://schemas.microsoft.com/office/drawing/2014/main" id="{E8513FA3-F6A8-AB5B-73A0-DC8B177CD94D}"/>
               </a:ext>
             </a:extLst>
           </p:cNvPr>
@@ -7508,7 +7508,7 @@
           <p:cNvPr id="9" name="Rectangle: Rounded Corners 8">
             <a:extLst>
               <a:ext uri="{FF2B5EF4-FFF2-40B4-BE49-F238E27FC236}">
-                <a16:creationId xmlns:a16="http://schemas.microsoft.com/office/drawing/2014/main" id="{E3970952-1F57-FB62-14E0-01147885E29F}"/>
+                <a16:creationId xmlns:a16="http://schemas.microsoft.com/office/drawing/2014/main" id="{92B056F3-596D-4591-BF89-44793BC6AB33}"/>
               </a:ext>
             </a:extLst>
           </p:cNvPr>
@@ -7586,7 +7586,7 @@
           <p:cNvPr id="10" name="Straight Connector 9">
             <a:extLst>
               <a:ext uri="{FF2B5EF4-FFF2-40B4-BE49-F238E27FC236}">
-                <a16:creationId xmlns:a16="http://schemas.microsoft.com/office/drawing/2014/main" id="{3988CB5F-620B-A3E2-952F-20CED99C4E41}"/>
+                <a16:creationId xmlns:a16="http://schemas.microsoft.com/office/drawing/2014/main" id="{4A807D99-D73B-A17A-A206-56CFB979C271}"/>
               </a:ext>
             </a:extLst>
           </p:cNvPr>
@@ -7628,7 +7628,7 @@
           <p:cNvPr id="11" name="Rectangle: Rounded Corners 10">
             <a:extLst>
               <a:ext uri="{FF2B5EF4-FFF2-40B4-BE49-F238E27FC236}">
-                <a16:creationId xmlns:a16="http://schemas.microsoft.com/office/drawing/2014/main" id="{16847E0B-2C08-B037-EE93-0BDC1829C66E}"/>
+                <a16:creationId xmlns:a16="http://schemas.microsoft.com/office/drawing/2014/main" id="{69A42F05-5236-91E2-23C3-2276F6C5FAB0}"/>
               </a:ext>
             </a:extLst>
           </p:cNvPr>
@@ -7706,7 +7706,7 @@
           <p:cNvPr id="12" name="Straight Connector 11">
             <a:extLst>
               <a:ext uri="{FF2B5EF4-FFF2-40B4-BE49-F238E27FC236}">
-                <a16:creationId xmlns:a16="http://schemas.microsoft.com/office/drawing/2014/main" id="{25C51136-06D0-E3EF-1262-E782D9A0AE8B}"/>
+                <a16:creationId xmlns:a16="http://schemas.microsoft.com/office/drawing/2014/main" id="{9E5D3E63-D437-3F8E-C199-36E43AE34148}"/>
               </a:ext>
             </a:extLst>
           </p:cNvPr>
@@ -7748,7 +7748,7 @@
           <p:cNvPr id="13" name="Rectangle: Rounded Corners 12">
             <a:extLst>
               <a:ext uri="{FF2B5EF4-FFF2-40B4-BE49-F238E27FC236}">
-                <a16:creationId xmlns:a16="http://schemas.microsoft.com/office/drawing/2014/main" id="{B919499C-9B5F-AB51-91BA-0F46D4922284}"/>
+                <a16:creationId xmlns:a16="http://schemas.microsoft.com/office/drawing/2014/main" id="{AA68A1D5-DAA9-8BF7-3B8C-922799FE479C}"/>
               </a:ext>
             </a:extLst>
           </p:cNvPr>
@@ -7826,7 +7826,7 @@
           <p:cNvPr id="14" name="Straight Connector 13">
             <a:extLst>
               <a:ext uri="{FF2B5EF4-FFF2-40B4-BE49-F238E27FC236}">
-                <a16:creationId xmlns:a16="http://schemas.microsoft.com/office/drawing/2014/main" id="{950752F7-7DFF-74EB-625E-439CFE6DC98C}"/>
+                <a16:creationId xmlns:a16="http://schemas.microsoft.com/office/drawing/2014/main" id="{E0F9B7E1-3054-313D-96BF-87D51EAA8650}"/>
               </a:ext>
             </a:extLst>
           </p:cNvPr>
@@ -7869,7 +7869,7 @@
           <p:cNvPr id="15" name="TextBox 14">
             <a:extLst>
               <a:ext uri="{FF2B5EF4-FFF2-40B4-BE49-F238E27FC236}">
-                <a16:creationId xmlns:a16="http://schemas.microsoft.com/office/drawing/2014/main" id="{2E71104E-F024-6901-14DD-EE942B765AC2}"/>
+                <a16:creationId xmlns:a16="http://schemas.microsoft.com/office/drawing/2014/main" id="{F2D86D0D-DFE9-C2E6-A4F2-B2F6EF19277D}"/>
               </a:ext>
             </a:extLst>
           </p:cNvPr>
@@ -7910,7 +7910,7 @@
           <p:cNvPr id="16" name="TextBox 15">
             <a:extLst>
               <a:ext uri="{FF2B5EF4-FFF2-40B4-BE49-F238E27FC236}">
-                <a16:creationId xmlns:a16="http://schemas.microsoft.com/office/drawing/2014/main" id="{281ED6F0-EB88-0717-9008-CAF0052C4485}"/>
+                <a16:creationId xmlns:a16="http://schemas.microsoft.com/office/drawing/2014/main" id="{B4AD67C9-BBE7-4E2A-7CB7-3C8909AC15A3}"/>
               </a:ext>
             </a:extLst>
           </p:cNvPr>
@@ -7940,7 +7940,7 @@
                 </a:solidFill>
                 <a:latin typeface="Calibri" panose="020F0502020204030204" pitchFamily="34" charset="0"/>
               </a:rPr>
-              <a:t>Six stages, one direction. The gate runs after the comparison: a value we cannot find again in the document it was read from is never reported as a discrepancy - it becomes a question for a person, with both readings attached.</a:t>
+              <a:t>Six stages, one direction. The gate runs after the comparison: a value we cannot find again in the document it was read from is never reported as a discrepancy - it is escalated to a reviewer, with both readings attached.</a:t>
             </a:r>
             <a:endParaRPr lang="en-MY" sz="1200">
               <a:solidFill>
@@ -7956,7 +7956,7 @@
           <p:cNvPr id="17" name="Rectangle: Rounded Corners 16">
             <a:extLst>
               <a:ext uri="{FF2B5EF4-FFF2-40B4-BE49-F238E27FC236}">
-                <a16:creationId xmlns:a16="http://schemas.microsoft.com/office/drawing/2014/main" id="{A681F1D9-91D3-774E-5D63-7135358D66AB}"/>
+                <a16:creationId xmlns:a16="http://schemas.microsoft.com/office/drawing/2014/main" id="{CD7AD282-4B89-0CA0-41E0-41374D15378F}"/>
               </a:ext>
             </a:extLst>
           </p:cNvPr>
@@ -8026,7 +8026,7 @@
           <p:cNvPr id="18" name="TextBox 17">
             <a:extLst>
               <a:ext uri="{FF2B5EF4-FFF2-40B4-BE49-F238E27FC236}">
-                <a16:creationId xmlns:a16="http://schemas.microsoft.com/office/drawing/2014/main" id="{FD6F891A-8344-E549-A652-21E26A5A0F9B}"/>
+                <a16:creationId xmlns:a16="http://schemas.microsoft.com/office/drawing/2014/main" id="{CFE1F4B4-EFD8-E0EA-680E-6586ECEAE16D}"/>
               </a:ext>
             </a:extLst>
           </p:cNvPr>
@@ -8072,7 +8072,7 @@
           <p:cNvPr id="19" name="TextBox 18">
             <a:extLst>
               <a:ext uri="{FF2B5EF4-FFF2-40B4-BE49-F238E27FC236}">
-                <a16:creationId xmlns:a16="http://schemas.microsoft.com/office/drawing/2014/main" id="{9CF1B7AC-DCF4-A659-AF21-06DF31403886}"/>
+                <a16:creationId xmlns:a16="http://schemas.microsoft.com/office/drawing/2014/main" id="{C94B07CF-4461-ED9F-763D-0B151F39AC2A}"/>
               </a:ext>
             </a:extLst>
           </p:cNvPr>
@@ -8118,7 +8118,7 @@
           <p:cNvPr id="20" name="Rectangle: Rounded Corners 19">
             <a:extLst>
               <a:ext uri="{FF2B5EF4-FFF2-40B4-BE49-F238E27FC236}">
-                <a16:creationId xmlns:a16="http://schemas.microsoft.com/office/drawing/2014/main" id="{998B59F0-C3C3-117B-51F9-48D2CCC7B4AC}"/>
+                <a16:creationId xmlns:a16="http://schemas.microsoft.com/office/drawing/2014/main" id="{A97B0372-B726-C70A-4255-96CAF9177182}"/>
               </a:ext>
             </a:extLst>
           </p:cNvPr>
@@ -8188,7 +8188,7 @@
           <p:cNvPr id="21" name="TextBox 20">
             <a:extLst>
               <a:ext uri="{FF2B5EF4-FFF2-40B4-BE49-F238E27FC236}">
-                <a16:creationId xmlns:a16="http://schemas.microsoft.com/office/drawing/2014/main" id="{4815FD23-9230-657F-0A86-38C75D5A9090}"/>
+                <a16:creationId xmlns:a16="http://schemas.microsoft.com/office/drawing/2014/main" id="{1B6BACCC-36CC-1DD4-7BA9-395941558F03}"/>
               </a:ext>
             </a:extLst>
           </p:cNvPr>
@@ -8228,7 +8228,7 @@
           <p:cNvPr id="22" name="TextBox 21">
             <a:extLst>
               <a:ext uri="{FF2B5EF4-FFF2-40B4-BE49-F238E27FC236}">
-                <a16:creationId xmlns:a16="http://schemas.microsoft.com/office/drawing/2014/main" id="{B38F991F-A24C-B425-D2CC-FEA3256C4D67}"/>
+                <a16:creationId xmlns:a16="http://schemas.microsoft.com/office/drawing/2014/main" id="{A314217D-82D3-CF1D-3649-5B533101A8F2}"/>
               </a:ext>
             </a:extLst>
           </p:cNvPr>
@@ -8274,7 +8274,7 @@
           <p:cNvPr id="23" name="Rectangle: Rounded Corners 22">
             <a:extLst>
               <a:ext uri="{FF2B5EF4-FFF2-40B4-BE49-F238E27FC236}">
-                <a16:creationId xmlns:a16="http://schemas.microsoft.com/office/drawing/2014/main" id="{96922C99-F992-C5A1-7FB0-7020D2AFFCEE}"/>
+                <a16:creationId xmlns:a16="http://schemas.microsoft.com/office/drawing/2014/main" id="{234D5468-6532-5D15-DB7A-66F520480F47}"/>
               </a:ext>
             </a:extLst>
           </p:cNvPr>
@@ -8344,7 +8344,7 @@
           <p:cNvPr id="24" name="TextBox 23">
             <a:extLst>
               <a:ext uri="{FF2B5EF4-FFF2-40B4-BE49-F238E27FC236}">
-                <a16:creationId xmlns:a16="http://schemas.microsoft.com/office/drawing/2014/main" id="{20461BD7-FE9F-6A07-08DB-8F4755DB4979}"/>
+                <a16:creationId xmlns:a16="http://schemas.microsoft.com/office/drawing/2014/main" id="{2C20EF1D-758A-0831-EC8A-55D00AF79011}"/>
               </a:ext>
             </a:extLst>
           </p:cNvPr>
@@ -8384,7 +8384,7 @@
           <p:cNvPr id="25" name="TextBox 24">
             <a:extLst>
               <a:ext uri="{FF2B5EF4-FFF2-40B4-BE49-F238E27FC236}">
-                <a16:creationId xmlns:a16="http://schemas.microsoft.com/office/drawing/2014/main" id="{DFE00E8B-D6CD-4817-29E0-A19040D85414}"/>
+                <a16:creationId xmlns:a16="http://schemas.microsoft.com/office/drawing/2014/main" id="{5147CF8C-86EB-96DD-63E6-155EF017EE09}"/>
               </a:ext>
             </a:extLst>
           </p:cNvPr>
@@ -8430,7 +8430,7 @@
           <p:cNvPr id="26" name="TextBox 25">
             <a:extLst>
               <a:ext uri="{FF2B5EF4-FFF2-40B4-BE49-F238E27FC236}">
-                <a16:creationId xmlns:a16="http://schemas.microsoft.com/office/drawing/2014/main" id="{E3A91DA4-BC96-ED70-88F9-3C8CBB1B7B56}"/>
+                <a16:creationId xmlns:a16="http://schemas.microsoft.com/office/drawing/2014/main" id="{7B5EBA69-52EE-F8E8-F450-F75820649BD4}"/>
               </a:ext>
             </a:extLst>
           </p:cNvPr>
@@ -8476,7 +8476,7 @@
           <p:cNvPr id="27" name="TextBox 26">
             <a:extLst>
               <a:ext uri="{FF2B5EF4-FFF2-40B4-BE49-F238E27FC236}">
-                <a16:creationId xmlns:a16="http://schemas.microsoft.com/office/drawing/2014/main" id="{419D7999-B80D-EBF4-0B87-EF4FDF3DA82A}"/>
+                <a16:creationId xmlns:a16="http://schemas.microsoft.com/office/drawing/2014/main" id="{8DE01769-4C10-0B33-98F7-3284A782D301}"/>
               </a:ext>
             </a:extLst>
           </p:cNvPr>
@@ -8515,7 +8515,7 @@
     </p:spTree>
     <p:extLst>
       <p:ext uri="{BB962C8B-B14F-4D97-AF65-F5344CB8AC3E}">
-        <p14:creationId xmlns:p14="http://schemas.microsoft.com/office/powerpoint/2010/main" val="1219034810"/>
+        <p14:creationId xmlns:p14="http://schemas.microsoft.com/office/powerpoint/2010/main" val="3995626618"/>
       </p:ext>
     </p:extLst>
   </p:cSld>
@@ -8555,7 +8555,7 @@
           <p:cNvPr id="2" name="TextBox 1">
             <a:extLst>
               <a:ext uri="{FF2B5EF4-FFF2-40B4-BE49-F238E27FC236}">
-                <a16:creationId xmlns:a16="http://schemas.microsoft.com/office/drawing/2014/main" id="{329DB62E-E284-A27D-C43A-0FCD48E2BE39}"/>
+                <a16:creationId xmlns:a16="http://schemas.microsoft.com/office/drawing/2014/main" id="{50A0D9BC-1075-074B-76DD-9BE1E0576FBD}"/>
               </a:ext>
             </a:extLst>
           </p:cNvPr>
@@ -8601,7 +8601,7 @@
           <p:cNvPr id="3" name="Oval 2">
             <a:extLst>
               <a:ext uri="{FF2B5EF4-FFF2-40B4-BE49-F238E27FC236}">
-                <a16:creationId xmlns:a16="http://schemas.microsoft.com/office/drawing/2014/main" id="{A0432FB6-2F0B-6006-1E6F-5764835602F7}"/>
+                <a16:creationId xmlns:a16="http://schemas.microsoft.com/office/drawing/2014/main" id="{00631033-F179-EF80-BF1E-789686B294EF}"/>
               </a:ext>
             </a:extLst>
           </p:cNvPr>
@@ -8677,7 +8677,7 @@
           <p:cNvPr id="4" name="TextBox 3">
             <a:extLst>
               <a:ext uri="{FF2B5EF4-FFF2-40B4-BE49-F238E27FC236}">
-                <a16:creationId xmlns:a16="http://schemas.microsoft.com/office/drawing/2014/main" id="{03E886A9-6D30-2976-E5DD-A18F84DDC9AC}"/>
+                <a16:creationId xmlns:a16="http://schemas.microsoft.com/office/drawing/2014/main" id="{FCA6F1D6-6911-1FAA-A497-8A601CCAB755}"/>
               </a:ext>
             </a:extLst>
           </p:cNvPr>
@@ -8723,7 +8723,7 @@
           <p:cNvPr id="5" name="TextBox 4">
             <a:extLst>
               <a:ext uri="{FF2B5EF4-FFF2-40B4-BE49-F238E27FC236}">
-                <a16:creationId xmlns:a16="http://schemas.microsoft.com/office/drawing/2014/main" id="{2CF98729-FBEB-2994-0453-B534295A0C86}"/>
+                <a16:creationId xmlns:a16="http://schemas.microsoft.com/office/drawing/2014/main" id="{BD0D21F7-E29E-E92A-18DC-723FEBEFC44C}"/>
               </a:ext>
             </a:extLst>
           </p:cNvPr>
@@ -8769,7 +8769,7 @@
           <p:cNvPr id="6" name="Oval 5">
             <a:extLst>
               <a:ext uri="{FF2B5EF4-FFF2-40B4-BE49-F238E27FC236}">
-                <a16:creationId xmlns:a16="http://schemas.microsoft.com/office/drawing/2014/main" id="{3234C03E-EA94-BCDE-45AA-2621B9ADD0F4}"/>
+                <a16:creationId xmlns:a16="http://schemas.microsoft.com/office/drawing/2014/main" id="{0196F348-ABB4-421F-BDF1-17F5653DE23F}"/>
               </a:ext>
             </a:extLst>
           </p:cNvPr>
@@ -8845,7 +8845,7 @@
           <p:cNvPr id="7" name="TextBox 6">
             <a:extLst>
               <a:ext uri="{FF2B5EF4-FFF2-40B4-BE49-F238E27FC236}">
-                <a16:creationId xmlns:a16="http://schemas.microsoft.com/office/drawing/2014/main" id="{73FB976F-F08C-5F34-6D3D-1A2B6284445E}"/>
+                <a16:creationId xmlns:a16="http://schemas.microsoft.com/office/drawing/2014/main" id="{037FE3F6-2A2F-A500-D0B0-03E1CF712348}"/>
               </a:ext>
             </a:extLst>
           </p:cNvPr>
@@ -8891,7 +8891,7 @@
           <p:cNvPr id="8" name="TextBox 7">
             <a:extLst>
               <a:ext uri="{FF2B5EF4-FFF2-40B4-BE49-F238E27FC236}">
-                <a16:creationId xmlns:a16="http://schemas.microsoft.com/office/drawing/2014/main" id="{269EF5F7-AEDB-3687-E10A-FF287F8623A0}"/>
+                <a16:creationId xmlns:a16="http://schemas.microsoft.com/office/drawing/2014/main" id="{E1CDFFDC-33A9-11CA-DA03-BDD353372BE6}"/>
               </a:ext>
             </a:extLst>
           </p:cNvPr>
@@ -8921,7 +8921,7 @@
                 </a:solidFill>
                 <a:latin typeface="Calibri" panose="020F0502020204030204" pitchFamily="34" charset="0"/>
               </a:rPr>
-              <a:t>asked only about fields no rule resolved; every value must be found again in the document before it is adopted</a:t>
+              <a:t>asked only about fields no rule resolved; every value must be found again in the document before it is accepted</a:t>
             </a:r>
             <a:endParaRPr lang="en-MY" sz="1150">
               <a:solidFill>
@@ -8937,7 +8937,7 @@
           <p:cNvPr id="9" name="Oval 8">
             <a:extLst>
               <a:ext uri="{FF2B5EF4-FFF2-40B4-BE49-F238E27FC236}">
-                <a16:creationId xmlns:a16="http://schemas.microsoft.com/office/drawing/2014/main" id="{83F1D464-FCFA-F14D-C3B7-3DFB2A9997A4}"/>
+                <a16:creationId xmlns:a16="http://schemas.microsoft.com/office/drawing/2014/main" id="{4B720110-A7B3-C81E-3D83-E0D07F7AE88B}"/>
               </a:ext>
             </a:extLst>
           </p:cNvPr>
@@ -9013,7 +9013,7 @@
           <p:cNvPr id="10" name="TextBox 9">
             <a:extLst>
               <a:ext uri="{FF2B5EF4-FFF2-40B4-BE49-F238E27FC236}">
-                <a16:creationId xmlns:a16="http://schemas.microsoft.com/office/drawing/2014/main" id="{AA54BAEB-3B82-8C28-FAF9-0B2CC88A2493}"/>
+                <a16:creationId xmlns:a16="http://schemas.microsoft.com/office/drawing/2014/main" id="{6E8A7A4B-26C1-BF17-6E09-23002273D2EE}"/>
               </a:ext>
             </a:extLst>
           </p:cNvPr>
@@ -9059,7 +9059,7 @@
           <p:cNvPr id="11" name="TextBox 10">
             <a:extLst>
               <a:ext uri="{FF2B5EF4-FFF2-40B4-BE49-F238E27FC236}">
-                <a16:creationId xmlns:a16="http://schemas.microsoft.com/office/drawing/2014/main" id="{3691DE38-FE70-0D6E-8F12-855743F45406}"/>
+                <a16:creationId xmlns:a16="http://schemas.microsoft.com/office/drawing/2014/main" id="{CB681ACF-6FC8-6073-2D30-17CA821C4CD4}"/>
               </a:ext>
             </a:extLst>
           </p:cNvPr>
@@ -9089,7 +9089,7 @@
                 </a:solidFill>
                 <a:latin typeface="Calibri" panose="020F0502020204030204" pitchFamily="34" charset="0"/>
               </a:rPr>
-              <a:t>transcribed for the reviewer, never fed into a comparison - the case stays in review</a:t>
+              <a:t>transcribed for the reviewer, never fed into a comparison - the case stays escalated</a:t>
             </a:r>
             <a:endParaRPr lang="en-MY" sz="1150">
               <a:solidFill>
@@ -9105,7 +9105,7 @@
           <p:cNvPr id="12" name="TextBox 11">
             <a:extLst>
               <a:ext uri="{FF2B5EF4-FFF2-40B4-BE49-F238E27FC236}">
-                <a16:creationId xmlns:a16="http://schemas.microsoft.com/office/drawing/2014/main" id="{322B2919-B87C-07F6-3F83-31648BF26BBA}"/>
+                <a16:creationId xmlns:a16="http://schemas.microsoft.com/office/drawing/2014/main" id="{0E791E48-672C-40DA-098C-8B1A2AE09BD7}"/>
               </a:ext>
             </a:extLst>
           </p:cNvPr>
@@ -9135,7 +9135,7 @@
                 </a:solidFill>
                 <a:latin typeface="Calibri" panose="020F0502020204030204" pitchFamily="34" charset="0"/>
               </a:rPr>
-              <a:t>gpt-5-mini, structured output. One rule for all three: nothing the model returns is adopted until it is found again in the document.</a:t>
+              <a:t>gpt-5-mini, structured output. One rule for all three: nothing the model returns is accepted until it is found again in the document.</a:t>
             </a:r>
             <a:endParaRPr lang="en-MY" sz="1200">
               <a:solidFill>
@@ -9151,7 +9151,7 @@
           <p:cNvPr id="13" name="Rectangle: Rounded Corners 12">
             <a:extLst>
               <a:ext uri="{FF2B5EF4-FFF2-40B4-BE49-F238E27FC236}">
-                <a16:creationId xmlns:a16="http://schemas.microsoft.com/office/drawing/2014/main" id="{3DFCBAC7-6A71-509F-1D1E-AC1C86FDF050}"/>
+                <a16:creationId xmlns:a16="http://schemas.microsoft.com/office/drawing/2014/main" id="{1DE5D206-677E-784A-8DB3-91FF103086E5}"/>
               </a:ext>
             </a:extLst>
           </p:cNvPr>
@@ -9221,7 +9221,7 @@
           <p:cNvPr id="14" name="TextBox 13">
             <a:extLst>
               <a:ext uri="{FF2B5EF4-FFF2-40B4-BE49-F238E27FC236}">
-                <a16:creationId xmlns:a16="http://schemas.microsoft.com/office/drawing/2014/main" id="{1CDAF381-53C6-B9FC-54F3-847013757542}"/>
+                <a16:creationId xmlns:a16="http://schemas.microsoft.com/office/drawing/2014/main" id="{ABDC1288-FBF3-C8B7-65C7-89151C22227F}"/>
               </a:ext>
             </a:extLst>
           </p:cNvPr>
@@ -9262,7 +9262,7 @@
           <p:cNvPr id="15" name="TextBox 14">
             <a:extLst>
               <a:ext uri="{FF2B5EF4-FFF2-40B4-BE49-F238E27FC236}">
-                <a16:creationId xmlns:a16="http://schemas.microsoft.com/office/drawing/2014/main" id="{BF3A945C-C139-AE1B-5693-1AC75085693D}"/>
+                <a16:creationId xmlns:a16="http://schemas.microsoft.com/office/drawing/2014/main" id="{781C43B8-AE21-89F6-5963-C0F83E9AE649}"/>
               </a:ext>
             </a:extLst>
           </p:cNvPr>
@@ -9303,7 +9303,7 @@
           <p:cNvPr id="16" name="TextBox 15">
             <a:extLst>
               <a:ext uri="{FF2B5EF4-FFF2-40B4-BE49-F238E27FC236}">
-                <a16:creationId xmlns:a16="http://schemas.microsoft.com/office/drawing/2014/main" id="{1C5D051B-56BB-462B-7587-94C3B9916971}"/>
+                <a16:creationId xmlns:a16="http://schemas.microsoft.com/office/drawing/2014/main" id="{79E9D5DF-86D6-FEA0-2DF3-D28A5F88792C}"/>
               </a:ext>
             </a:extLst>
           </p:cNvPr>
@@ -9343,7 +9343,7 @@
           <p:cNvPr id="17" name="TextBox 16">
             <a:extLst>
               <a:ext uri="{FF2B5EF4-FFF2-40B4-BE49-F238E27FC236}">
-                <a16:creationId xmlns:a16="http://schemas.microsoft.com/office/drawing/2014/main" id="{47711BE6-AA9D-F65F-CC7D-8552DCB31440}"/>
+                <a16:creationId xmlns:a16="http://schemas.microsoft.com/office/drawing/2014/main" id="{9C2C41BE-CD35-CB6E-D60E-A52DABFCCD78}"/>
               </a:ext>
             </a:extLst>
           </p:cNvPr>
@@ -9373,7 +9373,7 @@
                 </a:solidFill>
                 <a:latin typeface="Calibri" panose="020F0502020204030204" pitchFamily="34" charset="0"/>
               </a:rPr>
-              <a:t>cases forced to a human on wording we invented - rules alone vs rules + model, 188 documents</a:t>
+              <a:t>cases escalated on wording we invented - rules alone vs rules + model, 188 documents</a:t>
             </a:r>
             <a:endParaRPr lang="en-MY" sz="1150">
               <a:solidFill>
@@ -9389,7 +9389,7 @@
           <p:cNvPr id="18" name="TextBox 17">
             <a:extLst>
               <a:ext uri="{FF2B5EF4-FFF2-40B4-BE49-F238E27FC236}">
-                <a16:creationId xmlns:a16="http://schemas.microsoft.com/office/drawing/2014/main" id="{FF02EB3D-A2D5-FCC7-D339-30FCC1E91ABD}"/>
+                <a16:creationId xmlns:a16="http://schemas.microsoft.com/office/drawing/2014/main" id="{2C27BAA7-CDFE-B8A6-1CF7-2C85D58B152F}"/>
               </a:ext>
             </a:extLst>
           </p:cNvPr>
@@ -9435,7 +9435,7 @@
           <p:cNvPr id="19" name="Rectangle: Rounded Corners 18">
             <a:extLst>
               <a:ext uri="{FF2B5EF4-FFF2-40B4-BE49-F238E27FC236}">
-                <a16:creationId xmlns:a16="http://schemas.microsoft.com/office/drawing/2014/main" id="{59702871-DE6E-519F-DAF9-131884616022}"/>
+                <a16:creationId xmlns:a16="http://schemas.microsoft.com/office/drawing/2014/main" id="{B2469D70-5EA2-2A2A-8FC7-96728F23E865}"/>
               </a:ext>
             </a:extLst>
           </p:cNvPr>
@@ -9505,7 +9505,7 @@
           <p:cNvPr id="20" name="TextBox 19">
             <a:extLst>
               <a:ext uri="{FF2B5EF4-FFF2-40B4-BE49-F238E27FC236}">
-                <a16:creationId xmlns:a16="http://schemas.microsoft.com/office/drawing/2014/main" id="{6EE4D715-D968-CA26-BB41-18276E681FB8}"/>
+                <a16:creationId xmlns:a16="http://schemas.microsoft.com/office/drawing/2014/main" id="{E58A6666-49EB-DAAE-6E71-A66716020707}"/>
               </a:ext>
             </a:extLst>
           </p:cNvPr>
@@ -9535,7 +9535,7 @@
                 </a:solidFill>
                 <a:latin typeface="Calibri" panose="020F0502020204030204" pitchFamily="34" charset="0"/>
               </a:rPr>
-              <a:t>$0.0013 per document at the published rates · cached · $2 ceiling per run.   On this inbox: 0 classifier calls, 0 extractor calls, 6 scans read out for the reviewer - every decision is a rule's, and that is measured, not assumed.</a:t>
+              <a:t>$0.0013 per document at the published rates · cached · $2 ceiling per run.   On this inbox: 0 classifier calls, 0 extractor calls, 6 scans transcribed for the reviewer - every decision is a rule's, and that is measured, not assumed.</a:t>
             </a:r>
             <a:endParaRPr lang="en-MY" sz="1150">
               <a:solidFill>
@@ -9551,7 +9551,7 @@
           <p:cNvPr id="21" name="TextBox 20">
             <a:extLst>
               <a:ext uri="{FF2B5EF4-FFF2-40B4-BE49-F238E27FC236}">
-                <a16:creationId xmlns:a16="http://schemas.microsoft.com/office/drawing/2014/main" id="{DBA03819-E4D4-E086-288F-3794A5ACFFB3}"/>
+                <a16:creationId xmlns:a16="http://schemas.microsoft.com/office/drawing/2014/main" id="{A49731EB-06E2-E7D6-60AD-60653B661E22}"/>
               </a:ext>
             </a:extLst>
           </p:cNvPr>
@@ -9590,7 +9590,7 @@
     </p:spTree>
     <p:extLst>
       <p:ext uri="{BB962C8B-B14F-4D97-AF65-F5344CB8AC3E}">
-        <p14:creationId xmlns:p14="http://schemas.microsoft.com/office/powerpoint/2010/main" val="3079075160"/>
+        <p14:creationId xmlns:p14="http://schemas.microsoft.com/office/powerpoint/2010/main" val="4066057406"/>
       </p:ext>
     </p:extLst>
   </p:cSld>
@@ -9630,7 +9630,7 @@
           <p:cNvPr id="2" name="TextBox 1">
             <a:extLst>
               <a:ext uri="{FF2B5EF4-FFF2-40B4-BE49-F238E27FC236}">
-                <a16:creationId xmlns:a16="http://schemas.microsoft.com/office/drawing/2014/main" id="{DEACD8D7-FA06-40E5-BD6C-255CAE8764BF}"/>
+                <a16:creationId xmlns:a16="http://schemas.microsoft.com/office/drawing/2014/main" id="{B1F5B9AC-DC89-9886-EE0E-CDB9E306FFF2}"/>
               </a:ext>
             </a:extLst>
           </p:cNvPr>
@@ -9676,7 +9676,7 @@
           <p:cNvPr id="3" name="Rectangle: Rounded Corners 2">
             <a:extLst>
               <a:ext uri="{FF2B5EF4-FFF2-40B4-BE49-F238E27FC236}">
-                <a16:creationId xmlns:a16="http://schemas.microsoft.com/office/drawing/2014/main" id="{2AD6E720-CC4D-6322-E6BF-8AF96D1E0470}"/>
+                <a16:creationId xmlns:a16="http://schemas.microsoft.com/office/drawing/2014/main" id="{1E18CBAA-381C-DB01-0633-07501E98D93C}"/>
               </a:ext>
             </a:extLst>
           </p:cNvPr>
@@ -9746,7 +9746,7 @@
           <p:cNvPr id="4" name="TextBox 3">
             <a:extLst>
               <a:ext uri="{FF2B5EF4-FFF2-40B4-BE49-F238E27FC236}">
-                <a16:creationId xmlns:a16="http://schemas.microsoft.com/office/drawing/2014/main" id="{6A6D4436-0F6C-8C0C-231D-A91D5B69263F}"/>
+                <a16:creationId xmlns:a16="http://schemas.microsoft.com/office/drawing/2014/main" id="{BA717235-9CF8-AE24-AFA4-DB0266428A57}"/>
               </a:ext>
             </a:extLst>
           </p:cNvPr>
@@ -9786,7 +9786,7 @@
           <p:cNvPr id="5" name="TextBox 4">
             <a:extLst>
               <a:ext uri="{FF2B5EF4-FFF2-40B4-BE49-F238E27FC236}">
-                <a16:creationId xmlns:a16="http://schemas.microsoft.com/office/drawing/2014/main" id="{12C20595-6D76-3690-EA3E-5C200B44689C}"/>
+                <a16:creationId xmlns:a16="http://schemas.microsoft.com/office/drawing/2014/main" id="{66D0294C-2C15-B0DC-CCF8-42242F452911}"/>
               </a:ext>
             </a:extLst>
           </p:cNvPr>
@@ -9816,7 +9816,7 @@
                 </a:solidFill>
                 <a:latin typeface="Calibri" panose="020F0502020204030204" pitchFamily="34" charset="0"/>
               </a:rPr>
-              <a:t>1.0000 on four datasets, three from seeds we never developed against - 225 planted defects caught with the exact field set, 80/80 escalations correct.</a:t>
+              <a:t>1.0000 on four datasets, three from seeds we never developed against - 225 planted discrepancies caught with the exact field set, 80/80 escalations correct.</a:t>
             </a:r>
             <a:endParaRPr lang="en-MY" sz="1150">
               <a:solidFill>
@@ -9832,7 +9832,7 @@
           <p:cNvPr id="6" name="Rectangle: Rounded Corners 5">
             <a:extLst>
               <a:ext uri="{FF2B5EF4-FFF2-40B4-BE49-F238E27FC236}">
-                <a16:creationId xmlns:a16="http://schemas.microsoft.com/office/drawing/2014/main" id="{4FAC2459-2512-24F7-1D05-391C86233EEA}"/>
+                <a16:creationId xmlns:a16="http://schemas.microsoft.com/office/drawing/2014/main" id="{0CDD15AC-C088-3C9B-3B50-127DCDDF1CFA}"/>
               </a:ext>
             </a:extLst>
           </p:cNvPr>
@@ -9902,7 +9902,7 @@
           <p:cNvPr id="7" name="TextBox 6">
             <a:extLst>
               <a:ext uri="{FF2B5EF4-FFF2-40B4-BE49-F238E27FC236}">
-                <a16:creationId xmlns:a16="http://schemas.microsoft.com/office/drawing/2014/main" id="{91006FF3-C84C-E428-E14C-083F02BF57AF}"/>
+                <a16:creationId xmlns:a16="http://schemas.microsoft.com/office/drawing/2014/main" id="{C5E66AA3-383F-0F65-578C-B30F3A3B8C9B}"/>
               </a:ext>
             </a:extLst>
           </p:cNvPr>
@@ -9942,7 +9942,7 @@
           <p:cNvPr id="8" name="TextBox 7">
             <a:extLst>
               <a:ext uri="{FF2B5EF4-FFF2-40B4-BE49-F238E27FC236}">
-                <a16:creationId xmlns:a16="http://schemas.microsoft.com/office/drawing/2014/main" id="{9761EB02-7148-00A3-EAE9-1763E2D98424}"/>
+                <a16:creationId xmlns:a16="http://schemas.microsoft.com/office/drawing/2014/main" id="{B6613C45-AADB-70B5-34CE-ED3DF3C0D928}"/>
               </a:ext>
             </a:extLst>
           </p:cNvPr>
@@ -9988,7 +9988,7 @@
           <p:cNvPr id="9" name="Rectangle: Rounded Corners 8">
             <a:extLst>
               <a:ext uri="{FF2B5EF4-FFF2-40B4-BE49-F238E27FC236}">
-                <a16:creationId xmlns:a16="http://schemas.microsoft.com/office/drawing/2014/main" id="{6F4BF82F-4592-2B47-55FD-EB58D1F6FDA2}"/>
+                <a16:creationId xmlns:a16="http://schemas.microsoft.com/office/drawing/2014/main" id="{42A2AC6E-E2C1-42F2-8C5F-CBDC9C10FE20}"/>
               </a:ext>
             </a:extLst>
           </p:cNvPr>
@@ -10058,7 +10058,7 @@
           <p:cNvPr id="10" name="TextBox 9">
             <a:extLst>
               <a:ext uri="{FF2B5EF4-FFF2-40B4-BE49-F238E27FC236}">
-                <a16:creationId xmlns:a16="http://schemas.microsoft.com/office/drawing/2014/main" id="{0127D290-D0B4-1264-8976-895EB878FDB8}"/>
+                <a16:creationId xmlns:a16="http://schemas.microsoft.com/office/drawing/2014/main" id="{69239E36-AC31-EEC5-5A98-F1947E4067A9}"/>
               </a:ext>
             </a:extLst>
           </p:cNvPr>
@@ -10098,7 +10098,7 @@
           <p:cNvPr id="11" name="TextBox 10">
             <a:extLst>
               <a:ext uri="{FF2B5EF4-FFF2-40B4-BE49-F238E27FC236}">
-                <a16:creationId xmlns:a16="http://schemas.microsoft.com/office/drawing/2014/main" id="{8C6F8015-E9BC-B2FF-B684-B9DAE52DE4B1}"/>
+                <a16:creationId xmlns:a16="http://schemas.microsoft.com/office/drawing/2014/main" id="{8D08D3D0-6BBA-1BF2-64D4-CE911FD1DCF7}"/>
               </a:ext>
             </a:extLst>
           </p:cNvPr>
@@ -10144,7 +10144,7 @@
           <p:cNvPr id="12" name="Rectangle: Rounded Corners 11">
             <a:extLst>
               <a:ext uri="{FF2B5EF4-FFF2-40B4-BE49-F238E27FC236}">
-                <a16:creationId xmlns:a16="http://schemas.microsoft.com/office/drawing/2014/main" id="{A193E133-86B8-1BFD-9830-BC120EE2DCE0}"/>
+                <a16:creationId xmlns:a16="http://schemas.microsoft.com/office/drawing/2014/main" id="{B1ECE6D7-BCBE-BD63-1B1E-504078470EEA}"/>
               </a:ext>
             </a:extLst>
           </p:cNvPr>
@@ -10214,7 +10214,7 @@
           <p:cNvPr id="13" name="TextBox 12">
             <a:extLst>
               <a:ext uri="{FF2B5EF4-FFF2-40B4-BE49-F238E27FC236}">
-                <a16:creationId xmlns:a16="http://schemas.microsoft.com/office/drawing/2014/main" id="{9C100D62-815A-B629-28E2-101D6F435C78}"/>
+                <a16:creationId xmlns:a16="http://schemas.microsoft.com/office/drawing/2014/main" id="{6ADB3145-C5FC-B1AC-ED60-FFFCC63520B5}"/>
               </a:ext>
             </a:extLst>
           </p:cNvPr>
@@ -10254,7 +10254,7 @@
           <p:cNvPr id="14" name="TextBox 13">
             <a:extLst>
               <a:ext uri="{FF2B5EF4-FFF2-40B4-BE49-F238E27FC236}">
-                <a16:creationId xmlns:a16="http://schemas.microsoft.com/office/drawing/2014/main" id="{1C07239B-FD31-A8EE-C329-E1D42717F4DF}"/>
+                <a16:creationId xmlns:a16="http://schemas.microsoft.com/office/drawing/2014/main" id="{996B1390-84DD-F7FD-78F6-9C25D33BA46E}"/>
               </a:ext>
             </a:extLst>
           </p:cNvPr>
@@ -10284,7 +10284,7 @@
                 </a:solidFill>
                 <a:latin typeface="Calibri" panose="020F0502020204030204" pitchFamily="34" charset="0"/>
               </a:rPr>
-              <a:t>732 tests, 0 failing; CI on every push; a container that runs as a non-root user with no secret baked in; every value carries its evidence.</a:t>
+              <a:t>733 tests, 0 failing; CI on every push; a container that runs as a non-root user with no secret baked in; every value carries its evidence.</a:t>
             </a:r>
             <a:endParaRPr lang="en-MY" sz="1150">
               <a:solidFill>
@@ -10300,7 +10300,7 @@
           <p:cNvPr id="15" name="Rectangle: Rounded Corners 14">
             <a:extLst>
               <a:ext uri="{FF2B5EF4-FFF2-40B4-BE49-F238E27FC236}">
-                <a16:creationId xmlns:a16="http://schemas.microsoft.com/office/drawing/2014/main" id="{91669DBA-D338-56EB-D946-D2E64D21E11A}"/>
+                <a16:creationId xmlns:a16="http://schemas.microsoft.com/office/drawing/2014/main" id="{11265596-2533-0BDC-E9B6-434BE7C7C86E}"/>
               </a:ext>
             </a:extLst>
           </p:cNvPr>
@@ -10370,7 +10370,7 @@
           <p:cNvPr id="16" name="TextBox 15">
             <a:extLst>
               <a:ext uri="{FF2B5EF4-FFF2-40B4-BE49-F238E27FC236}">
-                <a16:creationId xmlns:a16="http://schemas.microsoft.com/office/drawing/2014/main" id="{66DD73A0-8D1E-1EA1-F438-2E98812F3704}"/>
+                <a16:creationId xmlns:a16="http://schemas.microsoft.com/office/drawing/2014/main" id="{19A21AD8-4C26-1B0D-FAC9-838D6D29452A}"/>
               </a:ext>
             </a:extLst>
           </p:cNvPr>
@@ -10410,7 +10410,7 @@
           <p:cNvPr id="17" name="TextBox 16">
             <a:extLst>
               <a:ext uri="{FF2B5EF4-FFF2-40B4-BE49-F238E27FC236}">
-                <a16:creationId xmlns:a16="http://schemas.microsoft.com/office/drawing/2014/main" id="{939705F4-446F-5BAA-5A8D-BEED25BC3EAF}"/>
+                <a16:creationId xmlns:a16="http://schemas.microsoft.com/office/drawing/2014/main" id="{43D5C1D6-1CE7-A8DA-46EE-F0BD7AD11636}"/>
               </a:ext>
             </a:extLst>
           </p:cNvPr>
@@ -10440,7 +10440,7 @@
                 </a:solidFill>
                 <a:latin typeface="Calibri" panose="020F0502020204030204" pitchFamily="34" charset="0"/>
               </a:rPr>
-              <a:t>email_145: a wrapped party name cut short to exactly what the other document says leaves the repair nothing to repair, and one real mismatch in 3,008 perturbed documents is reported as a match.</a:t>
+              <a:t>email_145: a wrapped party name cut short to exactly what the other document says leaves the repair nothing to repair, and one real discrepancy in 3,008 perturbed documents is reported as consistent.</a:t>
             </a:r>
           </a:p>
           <a:p>
@@ -10475,7 +10475,7 @@
           <p:cNvPr id="18" name="TextBox 17">
             <a:extLst>
               <a:ext uri="{FF2B5EF4-FFF2-40B4-BE49-F238E27FC236}">
-                <a16:creationId xmlns:a16="http://schemas.microsoft.com/office/drawing/2014/main" id="{45A851D3-3175-D565-CC80-41D36463DB54}"/>
+                <a16:creationId xmlns:a16="http://schemas.microsoft.com/office/drawing/2014/main" id="{993BFA9A-B34F-8EE8-6DD4-F40698FB667B}"/>
               </a:ext>
             </a:extLst>
           </p:cNvPr>
@@ -10521,7 +10521,7 @@
           <p:cNvPr id="19" name="TextBox 18">
             <a:extLst>
               <a:ext uri="{FF2B5EF4-FFF2-40B4-BE49-F238E27FC236}">
-                <a16:creationId xmlns:a16="http://schemas.microsoft.com/office/drawing/2014/main" id="{E50098F8-8A6B-B9F5-0612-FBCDC50C394E}"/>
+                <a16:creationId xmlns:a16="http://schemas.microsoft.com/office/drawing/2014/main" id="{43125A3C-8D78-7EB8-B0BE-567AC37E769B}"/>
               </a:ext>
             </a:extLst>
           </p:cNvPr>
@@ -10567,7 +10567,7 @@
           <p:cNvPr id="20" name="TextBox 19">
             <a:extLst>
               <a:ext uri="{FF2B5EF4-FFF2-40B4-BE49-F238E27FC236}">
-                <a16:creationId xmlns:a16="http://schemas.microsoft.com/office/drawing/2014/main" id="{21A0E533-9C07-2767-6DBE-7F6B1CC5CF8F}"/>
+                <a16:creationId xmlns:a16="http://schemas.microsoft.com/office/drawing/2014/main" id="{B6CD9313-2CC5-E725-2114-90BC395DD157}"/>
               </a:ext>
             </a:extLst>
           </p:cNvPr>
@@ -10612,7 +10612,7 @@
     </p:spTree>
     <p:extLst>
       <p:ext uri="{BB962C8B-B14F-4D97-AF65-F5344CB8AC3E}">
-        <p14:creationId xmlns:p14="http://schemas.microsoft.com/office/powerpoint/2010/main" val="229944868"/>
+        <p14:creationId xmlns:p14="http://schemas.microsoft.com/office/powerpoint/2010/main" val="3124486004"/>
       </p:ext>
     </p:extLst>
   </p:cSld>
@@ -10652,7 +10652,7 @@
           <p:cNvPr id="2" name="TextBox 1">
             <a:extLst>
               <a:ext uri="{FF2B5EF4-FFF2-40B4-BE49-F238E27FC236}">
-                <a16:creationId xmlns:a16="http://schemas.microsoft.com/office/drawing/2014/main" id="{A2EA7BB2-42CD-7906-1F4C-CED16579D43D}"/>
+                <a16:creationId xmlns:a16="http://schemas.microsoft.com/office/drawing/2014/main" id="{6DC66AC4-900D-A2D7-19D6-1B2E8BA1FD44}"/>
               </a:ext>
             </a:extLst>
           </p:cNvPr>
@@ -10692,7 +10692,7 @@
           <p:cNvPr id="3" name="TextBox 2">
             <a:extLst>
               <a:ext uri="{FF2B5EF4-FFF2-40B4-BE49-F238E27FC236}">
-                <a16:creationId xmlns:a16="http://schemas.microsoft.com/office/drawing/2014/main" id="{FA6323EA-AD4B-7643-D079-C515C71A3660}"/>
+                <a16:creationId xmlns:a16="http://schemas.microsoft.com/office/drawing/2014/main" id="{6350A7A7-28FF-51A7-9FC7-D04EB31C4D91}"/>
               </a:ext>
             </a:extLst>
           </p:cNvPr>
@@ -10738,7 +10738,7 @@
           <p:cNvPr id="4" name="Oval 3">
             <a:extLst>
               <a:ext uri="{FF2B5EF4-FFF2-40B4-BE49-F238E27FC236}">
-                <a16:creationId xmlns:a16="http://schemas.microsoft.com/office/drawing/2014/main" id="{2F08CB45-761A-0652-4D46-46A78B9D04DD}"/>
+                <a16:creationId xmlns:a16="http://schemas.microsoft.com/office/drawing/2014/main" id="{D6C267BD-3679-8BE6-CF19-27BE4B84A2C0}"/>
               </a:ext>
             </a:extLst>
           </p:cNvPr>
@@ -10814,7 +10814,7 @@
           <p:cNvPr id="5" name="TextBox 4">
             <a:extLst>
               <a:ext uri="{FF2B5EF4-FFF2-40B4-BE49-F238E27FC236}">
-                <a16:creationId xmlns:a16="http://schemas.microsoft.com/office/drawing/2014/main" id="{3AF61431-5D3F-7D15-7C17-F3B24A02CC8D}"/>
+                <a16:creationId xmlns:a16="http://schemas.microsoft.com/office/drawing/2014/main" id="{DEAC5A3C-38D2-93FA-908D-D7BD27216938}"/>
               </a:ext>
             </a:extLst>
           </p:cNvPr>
@@ -10860,7 +10860,7 @@
           <p:cNvPr id="6" name="Oval 5">
             <a:extLst>
               <a:ext uri="{FF2B5EF4-FFF2-40B4-BE49-F238E27FC236}">
-                <a16:creationId xmlns:a16="http://schemas.microsoft.com/office/drawing/2014/main" id="{83F5CA2F-3048-E6FC-3054-A1B9791E1128}"/>
+                <a16:creationId xmlns:a16="http://schemas.microsoft.com/office/drawing/2014/main" id="{411B6E49-5EC4-BC9F-77E0-EB5F744589D5}"/>
               </a:ext>
             </a:extLst>
           </p:cNvPr>
@@ -10936,7 +10936,7 @@
           <p:cNvPr id="7" name="TextBox 6">
             <a:extLst>
               <a:ext uri="{FF2B5EF4-FFF2-40B4-BE49-F238E27FC236}">
-                <a16:creationId xmlns:a16="http://schemas.microsoft.com/office/drawing/2014/main" id="{4BBD1D18-02B5-758A-EC94-AD3010490F3A}"/>
+                <a16:creationId xmlns:a16="http://schemas.microsoft.com/office/drawing/2014/main" id="{C5560AA6-9C02-BFEC-9EB0-46A25235F6E3}"/>
               </a:ext>
             </a:extLst>
           </p:cNvPr>
@@ -10982,7 +10982,7 @@
           <p:cNvPr id="8" name="Oval 7">
             <a:extLst>
               <a:ext uri="{FF2B5EF4-FFF2-40B4-BE49-F238E27FC236}">
-                <a16:creationId xmlns:a16="http://schemas.microsoft.com/office/drawing/2014/main" id="{479CD5B6-2A00-9C96-60D5-1CC84AE8BF93}"/>
+                <a16:creationId xmlns:a16="http://schemas.microsoft.com/office/drawing/2014/main" id="{EBC81BC7-8C2B-1C2F-BEB4-04FDC4575E84}"/>
               </a:ext>
             </a:extLst>
           </p:cNvPr>
@@ -11058,7 +11058,7 @@
           <p:cNvPr id="9" name="TextBox 8">
             <a:extLst>
               <a:ext uri="{FF2B5EF4-FFF2-40B4-BE49-F238E27FC236}">
-                <a16:creationId xmlns:a16="http://schemas.microsoft.com/office/drawing/2014/main" id="{8C49DD4C-1077-D193-9230-23D73D817FE2}"/>
+                <a16:creationId xmlns:a16="http://schemas.microsoft.com/office/drawing/2014/main" id="{73F2F54D-FC47-000C-1699-DAED43EEE284}"/>
               </a:ext>
             </a:extLst>
           </p:cNvPr>
@@ -11088,7 +11088,7 @@
                 </a:solidFill>
                 <a:latin typeface="Calibri" panose="020F0502020204030204" pitchFamily="34" charset="0"/>
               </a:rPr>
-              <a:t>A mismatch case - under every value, the line it was read from</a:t>
+              <a:t>A discrepancy case - under every value, the line it was read from</a:t>
             </a:r>
             <a:endParaRPr lang="en-MY" sz="1300">
               <a:solidFill>
@@ -11104,7 +11104,7 @@
           <p:cNvPr id="10" name="Oval 9">
             <a:extLst>
               <a:ext uri="{FF2B5EF4-FFF2-40B4-BE49-F238E27FC236}">
-                <a16:creationId xmlns:a16="http://schemas.microsoft.com/office/drawing/2014/main" id="{8342A0A1-8544-6C7B-87A1-B8C863AA7021}"/>
+                <a16:creationId xmlns:a16="http://schemas.microsoft.com/office/drawing/2014/main" id="{B683720D-37A5-398B-B14F-88E714718607}"/>
               </a:ext>
             </a:extLst>
           </p:cNvPr>
@@ -11180,7 +11180,7 @@
           <p:cNvPr id="11" name="TextBox 10">
             <a:extLst>
               <a:ext uri="{FF2B5EF4-FFF2-40B4-BE49-F238E27FC236}">
-                <a16:creationId xmlns:a16="http://schemas.microsoft.com/office/drawing/2014/main" id="{4C467831-D72A-C329-8D14-144788CD3893}"/>
+                <a16:creationId xmlns:a16="http://schemas.microsoft.com/office/drawing/2014/main" id="{60E8A462-CB21-D512-4262-AE321B81EEE2}"/>
               </a:ext>
             </a:extLst>
           </p:cNvPr>
@@ -11210,7 +11210,7 @@
                 </a:solidFill>
                 <a:latin typeface="Calibri" panose="020F0502020204030204" pitchFamily="34" charset="0"/>
               </a:rPr>
-              <a:t>A scanned case - the page read out for the reviewer; the case still in review, decided per field</a:t>
+              <a:t>A scanned case - the page transcribed for the reviewer; the case still escalated, decided per field</a:t>
             </a:r>
             <a:endParaRPr lang="en-MY" sz="1300">
               <a:solidFill>
@@ -11226,7 +11226,7 @@
           <p:cNvPr id="12" name="Oval 11">
             <a:extLst>
               <a:ext uri="{FF2B5EF4-FFF2-40B4-BE49-F238E27FC236}">
-                <a16:creationId xmlns:a16="http://schemas.microsoft.com/office/drawing/2014/main" id="{EE9C3768-C85B-9AF8-5F52-01BAB1D171DD}"/>
+                <a16:creationId xmlns:a16="http://schemas.microsoft.com/office/drawing/2014/main" id="{E2EA1F9B-B6F8-478E-6BE8-BA7E083B885B}"/>
               </a:ext>
             </a:extLst>
           </p:cNvPr>
@@ -11302,7 +11302,7 @@
           <p:cNvPr id="13" name="TextBox 12">
             <a:extLst>
               <a:ext uri="{FF2B5EF4-FFF2-40B4-BE49-F238E27FC236}">
-                <a16:creationId xmlns:a16="http://schemas.microsoft.com/office/drawing/2014/main" id="{CB493E13-FAE6-BB37-455F-A0E41A9286C4}"/>
+                <a16:creationId xmlns:a16="http://schemas.microsoft.com/office/drawing/2014/main" id="{BE968366-AAD8-20D4-CAAD-E19FAF97BDF3}"/>
               </a:ext>
             </a:extLst>
           </p:cNvPr>
@@ -11348,7 +11348,7 @@
           <p:cNvPr id="15" name="Picture 14">
             <a:extLst>
               <a:ext uri="{FF2B5EF4-FFF2-40B4-BE49-F238E27FC236}">
-                <a16:creationId xmlns:a16="http://schemas.microsoft.com/office/drawing/2014/main" id="{050F8924-5EE8-5604-798E-E13A0EA73F3F}"/>
+                <a16:creationId xmlns:a16="http://schemas.microsoft.com/office/drawing/2014/main" id="{6D967C5B-92F9-C2E2-D88E-CBF329ACFE7D}"/>
               </a:ext>
             </a:extLst>
           </p:cNvPr>
@@ -11389,7 +11389,7 @@
           <p:cNvPr id="16" name="TextBox 15">
             <a:extLst>
               <a:ext uri="{FF2B5EF4-FFF2-40B4-BE49-F238E27FC236}">
-                <a16:creationId xmlns:a16="http://schemas.microsoft.com/office/drawing/2014/main" id="{EC221306-A152-98F6-D9A7-A0ACF9B32B49}"/>
+                <a16:creationId xmlns:a16="http://schemas.microsoft.com/office/drawing/2014/main" id="{63AF0AB4-6257-B9C9-5195-4172C996C699}"/>
               </a:ext>
             </a:extLst>
           </p:cNvPr>
@@ -11433,7 +11433,7 @@
     </p:spTree>
     <p:extLst>
       <p:ext uri="{BB962C8B-B14F-4D97-AF65-F5344CB8AC3E}">
-        <p14:creationId xmlns:p14="http://schemas.microsoft.com/office/powerpoint/2010/main" val="602383615"/>
+        <p14:creationId xmlns:p14="http://schemas.microsoft.com/office/powerpoint/2010/main" val="1637311278"/>
       </p:ext>
     </p:extLst>
   </p:cSld>
@@ -11473,7 +11473,7 @@
           <p:cNvPr id="2" name="TextBox 1">
             <a:extLst>
               <a:ext uri="{FF2B5EF4-FFF2-40B4-BE49-F238E27FC236}">
-                <a16:creationId xmlns:a16="http://schemas.microsoft.com/office/drawing/2014/main" id="{D473E559-3757-3261-FB24-65C3BDD5F871}"/>
+                <a16:creationId xmlns:a16="http://schemas.microsoft.com/office/drawing/2014/main" id="{E697AE29-B1B2-C7D9-90B8-691E42F039BA}"/>
               </a:ext>
             </a:extLst>
           </p:cNvPr>
@@ -11513,7 +11513,7 @@
           <p:cNvPr id="3" name="Oval 2">
             <a:extLst>
               <a:ext uri="{FF2B5EF4-FFF2-40B4-BE49-F238E27FC236}">
-                <a16:creationId xmlns:a16="http://schemas.microsoft.com/office/drawing/2014/main" id="{B31CBEB9-3DAA-6A4B-0A4B-D96C1D83B48E}"/>
+                <a16:creationId xmlns:a16="http://schemas.microsoft.com/office/drawing/2014/main" id="{FEF33439-7B39-2D95-5D04-CA9FB88A433E}"/>
               </a:ext>
             </a:extLst>
           </p:cNvPr>
@@ -11589,7 +11589,7 @@
           <p:cNvPr id="4" name="TextBox 3">
             <a:extLst>
               <a:ext uri="{FF2B5EF4-FFF2-40B4-BE49-F238E27FC236}">
-                <a16:creationId xmlns:a16="http://schemas.microsoft.com/office/drawing/2014/main" id="{FF1D021A-250D-1D40-37C4-3CB05DD37FCD}"/>
+                <a16:creationId xmlns:a16="http://schemas.microsoft.com/office/drawing/2014/main" id="{60A44F77-BCB6-6A28-7353-F86257180E90}"/>
               </a:ext>
             </a:extLst>
           </p:cNvPr>
@@ -11619,7 +11619,7 @@
                 </a:solidFill>
                 <a:latin typeface="Calibri" panose="020F0502020204030204" pitchFamily="34" charset="0"/>
               </a:rPr>
-              <a:t>Correct by re-upload</a:t>
+              <a:t>Re-check on amendment</a:t>
             </a:r>
           </a:p>
         </p:txBody>
@@ -11629,7 +11629,7 @@
           <p:cNvPr id="5" name="TextBox 4">
             <a:extLst>
               <a:ext uri="{FF2B5EF4-FFF2-40B4-BE49-F238E27FC236}">
-                <a16:creationId xmlns:a16="http://schemas.microsoft.com/office/drawing/2014/main" id="{D646406A-6148-EF7B-0FD7-6A8973FE9962}"/>
+                <a16:creationId xmlns:a16="http://schemas.microsoft.com/office/drawing/2014/main" id="{E61BAA2C-463D-8766-BE45-19CE7EEEEC7C}"/>
               </a:ext>
             </a:extLst>
           </p:cNvPr>
@@ -11659,7 +11659,7 @@
                 </a:solidFill>
                 <a:latin typeface="Calibri" panose="020F0502020204030204" pitchFamily="34" charset="0"/>
               </a:rPr>
-              <a:t>The sender re-sends a fixed SI or BL? Attach it on the case and the same check runs again. The old answer stays on record.</a:t>
+              <a:t>The sender amends the SI or BL? Attach the amended document on the case and the same check runs again. The previous result stays on record.</a:t>
             </a:r>
             <a:endParaRPr lang="en-MY" sz="1100">
               <a:solidFill>
@@ -11675,7 +11675,7 @@
           <p:cNvPr id="6" name="Oval 5">
             <a:extLst>
               <a:ext uri="{FF2B5EF4-FFF2-40B4-BE49-F238E27FC236}">
-                <a16:creationId xmlns:a16="http://schemas.microsoft.com/office/drawing/2014/main" id="{822E4A9F-E1D9-38D5-A0C3-A4E31DCBEC7C}"/>
+                <a16:creationId xmlns:a16="http://schemas.microsoft.com/office/drawing/2014/main" id="{53E24E32-9E06-37F8-29C2-CDC9773A6DCD}"/>
               </a:ext>
             </a:extLst>
           </p:cNvPr>
@@ -11751,7 +11751,7 @@
           <p:cNvPr id="7" name="TextBox 6">
             <a:extLst>
               <a:ext uri="{FF2B5EF4-FFF2-40B4-BE49-F238E27FC236}">
-                <a16:creationId xmlns:a16="http://schemas.microsoft.com/office/drawing/2014/main" id="{5A6FC0F6-B898-8D58-2DE2-B113435FEB3A}"/>
+                <a16:creationId xmlns:a16="http://schemas.microsoft.com/office/drawing/2014/main" id="{CA6E4D51-AE2D-6124-F158-264FBD64BFEB}"/>
               </a:ext>
             </a:extLst>
           </p:cNvPr>
@@ -11781,7 +11781,7 @@
                 </a:solidFill>
                 <a:latin typeface="Calibri" panose="020F0502020204030204" pitchFamily="34" charset="0"/>
               </a:rPr>
-              <a:t>Scans read out for the reviewer</a:t>
+              <a:t>Scans transcribed for the reviewer</a:t>
             </a:r>
             <a:endParaRPr lang="en-MY" b="1">
               <a:solidFill>
@@ -11797,7 +11797,7 @@
           <p:cNvPr id="8" name="TextBox 7">
             <a:extLst>
               <a:ext uri="{FF2B5EF4-FFF2-40B4-BE49-F238E27FC236}">
-                <a16:creationId xmlns:a16="http://schemas.microsoft.com/office/drawing/2014/main" id="{2CEBB80F-880C-3F30-D7A5-1CBBD66A58B3}"/>
+                <a16:creationId xmlns:a16="http://schemas.microsoft.com/office/drawing/2014/main" id="{69C1312D-F6AB-BC53-69B1-7EABF2C86AA8}"/>
               </a:ext>
             </a:extLst>
           </p:cNvPr>
@@ -11827,7 +11827,7 @@
                 </a:solidFill>
                 <a:latin typeface="Calibri" panose="020F0502020204030204" pitchFamily="34" charset="0"/>
               </a:rPr>
-              <a:t>An image-only PDF still goes to a person - but with the seven fields already read by the model, marked as evidence, not a verdict.</a:t>
+              <a:t>An image-only PDF is still escalated - but with the seven fields already transcribed by the model, marked as evidence, not a verdict.</a:t>
             </a:r>
             <a:endParaRPr lang="en-MY" sz="1100">
               <a:solidFill>
@@ -11843,7 +11843,7 @@
           <p:cNvPr id="9" name="Oval 8">
             <a:extLst>
               <a:ext uri="{FF2B5EF4-FFF2-40B4-BE49-F238E27FC236}">
-                <a16:creationId xmlns:a16="http://schemas.microsoft.com/office/drawing/2014/main" id="{2BBD53B9-A1A4-7B47-35EC-B7A2768E73E7}"/>
+                <a16:creationId xmlns:a16="http://schemas.microsoft.com/office/drawing/2014/main" id="{C0B8519A-6F8E-F0B0-50AD-C915792B25B2}"/>
               </a:ext>
             </a:extLst>
           </p:cNvPr>
@@ -11919,7 +11919,7 @@
           <p:cNvPr id="10" name="TextBox 9">
             <a:extLst>
               <a:ext uri="{FF2B5EF4-FFF2-40B4-BE49-F238E27FC236}">
-                <a16:creationId xmlns:a16="http://schemas.microsoft.com/office/drawing/2014/main" id="{46DDE1AE-0BA5-84BB-4B7B-B49F966804CD}"/>
+                <a16:creationId xmlns:a16="http://schemas.microsoft.com/office/drawing/2014/main" id="{B8717349-E4F3-18B8-5296-20B02DECEB7F}"/>
               </a:ext>
             </a:extLst>
           </p:cNvPr>
@@ -11965,7 +11965,7 @@
           <p:cNvPr id="11" name="TextBox 10">
             <a:extLst>
               <a:ext uri="{FF2B5EF4-FFF2-40B4-BE49-F238E27FC236}">
-                <a16:creationId xmlns:a16="http://schemas.microsoft.com/office/drawing/2014/main" id="{509AFFA9-9BE1-26FD-0A6A-3CB8CBC718F8}"/>
+                <a16:creationId xmlns:a16="http://schemas.microsoft.com/office/drawing/2014/main" id="{F29361A1-8DCC-61A6-F124-96BBDDC8D733}"/>
               </a:ext>
             </a:extLst>
           </p:cNvPr>
@@ -11995,7 +11995,7 @@
                 </a:solidFill>
                 <a:latin typeface="Calibri" panose="020F0502020204030204" pitchFamily="34" charset="0"/>
               </a:rPr>
-              <a:t>Correcting a field shows how often this shipper was wrong on that same field before. A count, not a guess.</a:t>
+              <a:t>Correcting a field shows how often this shipper had a discrepancy on that same field before. A count, not a guess.</a:t>
             </a:r>
             <a:endParaRPr lang="en-MY" sz="1100">
               <a:solidFill>
@@ -12011,7 +12011,7 @@
           <p:cNvPr id="12" name="Oval 11">
             <a:extLst>
               <a:ext uri="{FF2B5EF4-FFF2-40B4-BE49-F238E27FC236}">
-                <a16:creationId xmlns:a16="http://schemas.microsoft.com/office/drawing/2014/main" id="{3FF7A821-2932-E8D1-F722-86C9502BE3C1}"/>
+                <a16:creationId xmlns:a16="http://schemas.microsoft.com/office/drawing/2014/main" id="{512E4B4A-2178-0446-6034-4E82CF21D334}"/>
               </a:ext>
             </a:extLst>
           </p:cNvPr>
@@ -12087,7 +12087,7 @@
           <p:cNvPr id="13" name="TextBox 12">
             <a:extLst>
               <a:ext uri="{FF2B5EF4-FFF2-40B4-BE49-F238E27FC236}">
-                <a16:creationId xmlns:a16="http://schemas.microsoft.com/office/drawing/2014/main" id="{D7EC38D5-CB04-87D8-DDBF-55D08E74CD72}"/>
+                <a16:creationId xmlns:a16="http://schemas.microsoft.com/office/drawing/2014/main" id="{75F710EC-3932-C197-22D4-1E5C9579A247}"/>
               </a:ext>
             </a:extLst>
           </p:cNvPr>
@@ -12133,7 +12133,7 @@
           <p:cNvPr id="14" name="TextBox 13">
             <a:extLst>
               <a:ext uri="{FF2B5EF4-FFF2-40B4-BE49-F238E27FC236}">
-                <a16:creationId xmlns:a16="http://schemas.microsoft.com/office/drawing/2014/main" id="{BEDB3493-2084-DA51-893E-A1E3114B80CC}"/>
+                <a16:creationId xmlns:a16="http://schemas.microsoft.com/office/drawing/2014/main" id="{217E06DC-8E0E-A268-73F6-EE56082AE458}"/>
               </a:ext>
             </a:extLst>
           </p:cNvPr>
@@ -12179,7 +12179,7 @@
           <p:cNvPr id="15" name="Oval 14">
             <a:extLst>
               <a:ext uri="{FF2B5EF4-FFF2-40B4-BE49-F238E27FC236}">
-                <a16:creationId xmlns:a16="http://schemas.microsoft.com/office/drawing/2014/main" id="{C2E3B97C-10AD-D2F2-813F-55A9A7AF729C}"/>
+                <a16:creationId xmlns:a16="http://schemas.microsoft.com/office/drawing/2014/main" id="{C84289F1-8C3C-60C2-5481-479C32C6732D}"/>
               </a:ext>
             </a:extLst>
           </p:cNvPr>
@@ -12255,7 +12255,7 @@
           <p:cNvPr id="16" name="TextBox 15">
             <a:extLst>
               <a:ext uri="{FF2B5EF4-FFF2-40B4-BE49-F238E27FC236}">
-                <a16:creationId xmlns:a16="http://schemas.microsoft.com/office/drawing/2014/main" id="{009EC2A4-C12F-4210-0579-39EB8DF1E5F5}"/>
+                <a16:creationId xmlns:a16="http://schemas.microsoft.com/office/drawing/2014/main" id="{B5C383C6-B969-AF2F-AF7A-A3E29657F30E}"/>
               </a:ext>
             </a:extLst>
           </p:cNvPr>
@@ -12285,7 +12285,7 @@
                 </a:solidFill>
                 <a:latin typeface="Calibri" panose="020F0502020204030204" pitchFamily="34" charset="0"/>
               </a:rPr>
-              <a:t>A reply drafted from the corrected outcome</a:t>
+              <a:t>A reply drafted from the reviewer decision</a:t>
             </a:r>
             <a:endParaRPr lang="en-MY" b="1">
               <a:solidFill>
@@ -12301,7 +12301,7 @@
           <p:cNvPr id="17" name="TextBox 16">
             <a:extLst>
               <a:ext uri="{FF2B5EF4-FFF2-40B4-BE49-F238E27FC236}">
-                <a16:creationId xmlns:a16="http://schemas.microsoft.com/office/drawing/2014/main" id="{EDF58230-731F-7DA6-3CD3-9B3E133D2E39}"/>
+                <a16:creationId xmlns:a16="http://schemas.microsoft.com/office/drawing/2014/main" id="{2D643C80-DD6E-3BE1-E287-6B4733446546}"/>
               </a:ext>
             </a:extLst>
           </p:cNvPr>
@@ -12331,7 +12331,7 @@
                 </a:solidFill>
                 <a:latin typeface="Calibri" panose="020F0502020204030204" pitchFamily="34" charset="0"/>
               </a:rPr>
-              <a:t>Subject and body ready, built from what the reviewer decided - not the stale answer. A person still presses send.</a:t>
+              <a:t>Subject and body ready, built from what the reviewer decided - not the Sentinel result it overrode. A person still presses send.</a:t>
             </a:r>
             <a:endParaRPr lang="en-MY" sz="1100">
               <a:solidFill>
@@ -12347,7 +12347,7 @@
           <p:cNvPr id="19" name="Picture 18">
             <a:extLst>
               <a:ext uri="{FF2B5EF4-FFF2-40B4-BE49-F238E27FC236}">
-                <a16:creationId xmlns:a16="http://schemas.microsoft.com/office/drawing/2014/main" id="{5BAC6AD2-B352-90E5-937F-D13BF1A2E5C3}"/>
+                <a16:creationId xmlns:a16="http://schemas.microsoft.com/office/drawing/2014/main" id="{65902DC4-1FDF-E6E0-37FF-0DB7611F1F16}"/>
               </a:ext>
             </a:extLst>
           </p:cNvPr>
@@ -12371,7 +12371,7 @@
         <p:spPr>
           <a:xfrm>
             <a:off x="6858000" y="1219200"/>
-            <a:ext cx="4724400" cy="1555358"/>
+            <a:ext cx="4724400" cy="1625349"/>
           </a:xfrm>
           <a:prstGeom prst="rect">
             <a:avLst/>
@@ -12388,7 +12388,7 @@
           <p:cNvPr id="20" name="TextBox 19">
             <a:extLst>
               <a:ext uri="{FF2B5EF4-FFF2-40B4-BE49-F238E27FC236}">
-                <a16:creationId xmlns:a16="http://schemas.microsoft.com/office/drawing/2014/main" id="{63D31B71-D6B7-D3FD-314E-20E6A5899BD5}"/>
+                <a16:creationId xmlns:a16="http://schemas.microsoft.com/office/drawing/2014/main" id="{95483B46-4166-B82F-4D56-222296051A0A}"/>
               </a:ext>
             </a:extLst>
           </p:cNvPr>
@@ -12418,7 +12418,7 @@
                 </a:solidFill>
                 <a:latin typeface="Calibri" panose="020F0502020204030204" pitchFamily="34" charset="0"/>
               </a:rPr>
-              <a:t>The scan read-out, as the reviewer sees it: seven fields, the model's confidence, and the sentence that none of it entered the comparison.</a:t>
+              <a:t>The scan transcription, as the reviewer sees it: seven fields, the model's confidence, and the sentence that none of it entered the comparison.</a:t>
             </a:r>
             <a:endParaRPr lang="en-MY" sz="1050">
               <a:solidFill>
@@ -12434,7 +12434,7 @@
           <p:cNvPr id="21" name="Rectangle: Rounded Corners 20">
             <a:extLst>
               <a:ext uri="{FF2B5EF4-FFF2-40B4-BE49-F238E27FC236}">
-                <a16:creationId xmlns:a16="http://schemas.microsoft.com/office/drawing/2014/main" id="{41D7558D-B77C-E63A-4BF9-DC8A8F4E41B1}"/>
+                <a16:creationId xmlns:a16="http://schemas.microsoft.com/office/drawing/2014/main" id="{BC1752C3-D7AE-076A-473B-A3DF17A76CB9}"/>
               </a:ext>
             </a:extLst>
           </p:cNvPr>
@@ -12504,7 +12504,7 @@
           <p:cNvPr id="22" name="TextBox 21">
             <a:extLst>
               <a:ext uri="{FF2B5EF4-FFF2-40B4-BE49-F238E27FC236}">
-                <a16:creationId xmlns:a16="http://schemas.microsoft.com/office/drawing/2014/main" id="{B8BBC3EF-B7D8-25F1-D3F0-7CCFA19E7BE7}"/>
+                <a16:creationId xmlns:a16="http://schemas.microsoft.com/office/drawing/2014/main" id="{FFF5D2FB-303F-160B-0083-551198B6ABF9}"/>
               </a:ext>
             </a:extLst>
           </p:cNvPr>
@@ -12550,7 +12550,7 @@
           <p:cNvPr id="23" name="TextBox 22">
             <a:extLst>
               <a:ext uri="{FF2B5EF4-FFF2-40B4-BE49-F238E27FC236}">
-                <a16:creationId xmlns:a16="http://schemas.microsoft.com/office/drawing/2014/main" id="{953562D2-A7F7-F7BA-5359-7BE2671F278C}"/>
+                <a16:creationId xmlns:a16="http://schemas.microsoft.com/office/drawing/2014/main" id="{0C996FA2-DD41-3A19-90DB-17A54948ADE5}"/>
               </a:ext>
             </a:extLst>
           </p:cNvPr>
@@ -12595,7 +12595,7 @@
     </p:spTree>
     <p:extLst>
       <p:ext uri="{BB962C8B-B14F-4D97-AF65-F5344CB8AC3E}">
-        <p14:creationId xmlns:p14="http://schemas.microsoft.com/office/powerpoint/2010/main" val="1924401444"/>
+        <p14:creationId xmlns:p14="http://schemas.microsoft.com/office/powerpoint/2010/main" val="2278421221"/>
       </p:ext>
     </p:extLst>
   </p:cSld>
@@ -12635,7 +12635,7 @@
           <p:cNvPr id="2" name="TextBox 1">
             <a:extLst>
               <a:ext uri="{FF2B5EF4-FFF2-40B4-BE49-F238E27FC236}">
-                <a16:creationId xmlns:a16="http://schemas.microsoft.com/office/drawing/2014/main" id="{7738CE7D-D954-18B1-BE36-DC05ED5A9120}"/>
+                <a16:creationId xmlns:a16="http://schemas.microsoft.com/office/drawing/2014/main" id="{24ADD998-0910-4028-CBFE-B178135F6BE1}"/>
               </a:ext>
             </a:extLst>
           </p:cNvPr>
@@ -12681,7 +12681,7 @@
           <p:cNvPr id="3" name="Rectangle: Rounded Corners 2">
             <a:extLst>
               <a:ext uri="{FF2B5EF4-FFF2-40B4-BE49-F238E27FC236}">
-                <a16:creationId xmlns:a16="http://schemas.microsoft.com/office/drawing/2014/main" id="{D92970D0-0E5E-E861-22BC-B6966574B2A0}"/>
+                <a16:creationId xmlns:a16="http://schemas.microsoft.com/office/drawing/2014/main" id="{44502352-E92A-FFE4-5CC7-E85F71197ABE}"/>
               </a:ext>
             </a:extLst>
           </p:cNvPr>
@@ -12751,7 +12751,7 @@
           <p:cNvPr id="4" name="TextBox 3">
             <a:extLst>
               <a:ext uri="{FF2B5EF4-FFF2-40B4-BE49-F238E27FC236}">
-                <a16:creationId xmlns:a16="http://schemas.microsoft.com/office/drawing/2014/main" id="{1CB4C106-5DDA-0E15-B5F8-120AB1A87987}"/>
+                <a16:creationId xmlns:a16="http://schemas.microsoft.com/office/drawing/2014/main" id="{50B0419F-5A55-17F6-13CF-9D62C08D8E29}"/>
               </a:ext>
             </a:extLst>
           </p:cNvPr>
@@ -12791,7 +12791,7 @@
           <p:cNvPr id="5" name="TextBox 4">
             <a:extLst>
               <a:ext uri="{FF2B5EF4-FFF2-40B4-BE49-F238E27FC236}">
-                <a16:creationId xmlns:a16="http://schemas.microsoft.com/office/drawing/2014/main" id="{FFD3A06B-6E2B-2445-E29E-E74B63D211FE}"/>
+                <a16:creationId xmlns:a16="http://schemas.microsoft.com/office/drawing/2014/main" id="{A746D224-08A5-72DA-B86A-3582F571AD5E}"/>
               </a:ext>
             </a:extLst>
           </p:cNvPr>
@@ -12832,7 +12832,7 @@
           <p:cNvPr id="6" name="TextBox 5">
             <a:extLst>
               <a:ext uri="{FF2B5EF4-FFF2-40B4-BE49-F238E27FC236}">
-                <a16:creationId xmlns:a16="http://schemas.microsoft.com/office/drawing/2014/main" id="{95BCAD2F-09DA-2C17-D4F1-E9A45E47484C}"/>
+                <a16:creationId xmlns:a16="http://schemas.microsoft.com/office/drawing/2014/main" id="{F3ADDE6B-22FD-F53A-D1DE-06871302FABD}"/>
               </a:ext>
             </a:extLst>
           </p:cNvPr>
@@ -12872,7 +12872,7 @@
           <p:cNvPr id="7" name="TextBox 6">
             <a:extLst>
               <a:ext uri="{FF2B5EF4-FFF2-40B4-BE49-F238E27FC236}">
-                <a16:creationId xmlns:a16="http://schemas.microsoft.com/office/drawing/2014/main" id="{C63DEA6E-418C-9C05-C142-05E066C9715C}"/>
+                <a16:creationId xmlns:a16="http://schemas.microsoft.com/office/drawing/2014/main" id="{8FC37636-A2C3-AE84-1639-A27E34C30D3E}"/>
               </a:ext>
             </a:extLst>
           </p:cNvPr>
@@ -12918,7 +12918,7 @@
           <p:cNvPr id="8" name="TextBox 7">
             <a:extLst>
               <a:ext uri="{FF2B5EF4-FFF2-40B4-BE49-F238E27FC236}">
-                <a16:creationId xmlns:a16="http://schemas.microsoft.com/office/drawing/2014/main" id="{60C81569-1083-735E-0C50-39560C5241F3}"/>
+                <a16:creationId xmlns:a16="http://schemas.microsoft.com/office/drawing/2014/main" id="{4BB16940-6262-CBD0-1D8E-00E7EF32EF9A}"/>
               </a:ext>
             </a:extLst>
           </p:cNvPr>
@@ -12964,7 +12964,7 @@
           <p:cNvPr id="9" name="TextBox 8">
             <a:extLst>
               <a:ext uri="{FF2B5EF4-FFF2-40B4-BE49-F238E27FC236}">
-                <a16:creationId xmlns:a16="http://schemas.microsoft.com/office/drawing/2014/main" id="{D20A4D39-5702-CAD5-C282-F368871EE367}"/>
+                <a16:creationId xmlns:a16="http://schemas.microsoft.com/office/drawing/2014/main" id="{BB132F69-ADF8-BDD7-185D-9E35AA7BBC68}"/>
               </a:ext>
             </a:extLst>
           </p:cNvPr>
@@ -13010,7 +13010,7 @@
           <p:cNvPr id="10" name="Table 9">
             <a:extLst>
               <a:ext uri="{FF2B5EF4-FFF2-40B4-BE49-F238E27FC236}">
-                <a16:creationId xmlns:a16="http://schemas.microsoft.com/office/drawing/2014/main" id="{30AA40DA-6981-7E4E-4BDF-93B61D8D92AB}"/>
+                <a16:creationId xmlns:a16="http://schemas.microsoft.com/office/drawing/2014/main" id="{0D364D68-D06E-1E08-97EE-02D6FBB40E6D}"/>
               </a:ext>
             </a:extLst>
           </p:cNvPr>
@@ -13020,7 +13020,7 @@
           <p:nvPr>
             <p:extLst>
               <p:ext uri="{D42A27DB-BD31-4B8C-83A1-F6EECF244321}">
-                <p14:modId xmlns:p14="http://schemas.microsoft.com/office/powerpoint/2010/main" val="1719314457"/>
+                <p14:modId xmlns:p14="http://schemas.microsoft.com/office/powerpoint/2010/main" val="3645487374"/>
               </p:ext>
             </p:extLst>
           </p:nvPr>
@@ -13039,21 +13039,21 @@
                 <a:gridCol w="1905000">
                   <a:extLst>
                     <a:ext uri="{9D8B030D-6E8A-4147-A177-3AD203B41FA5}">
-                      <a16:colId xmlns:a16="http://schemas.microsoft.com/office/drawing/2014/main" val="3740707985"/>
+                      <a16:colId xmlns:a16="http://schemas.microsoft.com/office/drawing/2014/main" val="330794016"/>
                     </a:ext>
                   </a:extLst>
                 </a:gridCol>
                 <a:gridCol w="2413000">
                   <a:extLst>
                     <a:ext uri="{9D8B030D-6E8A-4147-A177-3AD203B41FA5}">
-                      <a16:colId xmlns:a16="http://schemas.microsoft.com/office/drawing/2014/main" val="1685868824"/>
+                      <a16:colId xmlns:a16="http://schemas.microsoft.com/office/drawing/2014/main" val="2407549083"/>
                     </a:ext>
                   </a:extLst>
                 </a:gridCol>
                 <a:gridCol w="2032000">
                   <a:extLst>
                     <a:ext uri="{9D8B030D-6E8A-4147-A177-3AD203B41FA5}">
-                      <a16:colId xmlns:a16="http://schemas.microsoft.com/office/drawing/2014/main" val="466614331"/>
+                      <a16:colId xmlns:a16="http://schemas.microsoft.com/office/drawing/2014/main" val="2365986701"/>
                     </a:ext>
                   </a:extLst>
                 </a:gridCol>
@@ -13127,7 +13127,7 @@
                 </a:tc>
                 <a:extLst>
                   <a:ext uri="{0D108BD9-81ED-4DB2-BD59-A6C34878D82A}">
-                    <a16:rowId xmlns:a16="http://schemas.microsoft.com/office/drawing/2014/main" val="4214236672"/>
+                    <a16:rowId xmlns:a16="http://schemas.microsoft.com/office/drawing/2014/main" val="1494971268"/>
                   </a:ext>
                 </a:extLst>
               </a:tr>
@@ -13212,7 +13212,7 @@
                 </a:tc>
                 <a:extLst>
                   <a:ext uri="{0D108BD9-81ED-4DB2-BD59-A6C34878D82A}">
-                    <a16:rowId xmlns:a16="http://schemas.microsoft.com/office/drawing/2014/main" val="3875446484"/>
+                    <a16:rowId xmlns:a16="http://schemas.microsoft.com/office/drawing/2014/main" val="3890085175"/>
                   </a:ext>
                 </a:extLst>
               </a:tr>
@@ -13229,7 +13229,7 @@
                           </a:solidFill>
                           <a:latin typeface="Calibri" panose="020F0502020204030204" pitchFamily="34" charset="0"/>
                         </a:rPr>
-                        <a:t>False alarms</a:t>
+                        <a:t>False discrepancies</a:t>
                       </a:r>
                     </a:p>
                   </a:txBody>
@@ -13251,7 +13251,7 @@
                           </a:solidFill>
                           <a:latin typeface="Calibri" panose="020F0502020204030204" pitchFamily="34" charset="0"/>
                         </a:rPr>
-                        <a:t>0 of 46 defects; 0 across 16 perturbation modes</a:t>
+                        <a:t>0 of 46 discrepancies; 0 across 16 perturbation modes</a:t>
                       </a:r>
                       <a:endParaRPr lang="en-MY" sz="1050">
                         <a:solidFill>
@@ -13291,7 +13291,7 @@
                 </a:tc>
                 <a:extLst>
                   <a:ext uri="{0D108BD9-81ED-4DB2-BD59-A6C34878D82A}">
-                    <a16:rowId xmlns:a16="http://schemas.microsoft.com/office/drawing/2014/main" val="3087260214"/>
+                    <a16:rowId xmlns:a16="http://schemas.microsoft.com/office/drawing/2014/main" val="3893426597"/>
                   </a:ext>
                 </a:extLst>
               </a:tr>
@@ -13370,7 +13370,7 @@
                 </a:tc>
                 <a:extLst>
                   <a:ext uri="{0D108BD9-81ED-4DB2-BD59-A6C34878D82A}">
-                    <a16:rowId xmlns:a16="http://schemas.microsoft.com/office/drawing/2014/main" val="1379968979"/>
+                    <a16:rowId xmlns:a16="http://schemas.microsoft.com/office/drawing/2014/main" val="2947507371"/>
                   </a:ext>
                 </a:extLst>
               </a:tr>
@@ -13383,7 +13383,7 @@
           <p:cNvPr id="11" name="Rectangle: Rounded Corners 10">
             <a:extLst>
               <a:ext uri="{FF2B5EF4-FFF2-40B4-BE49-F238E27FC236}">
-                <a16:creationId xmlns:a16="http://schemas.microsoft.com/office/drawing/2014/main" id="{A08336D7-FC38-AF0A-A521-AA40F1BD0A02}"/>
+                <a16:creationId xmlns:a16="http://schemas.microsoft.com/office/drawing/2014/main" id="{E4A387D9-70EA-22C4-F1EC-B5FA5ECC7F24}"/>
               </a:ext>
             </a:extLst>
           </p:cNvPr>
@@ -13453,7 +13453,7 @@
           <p:cNvPr id="12" name="TextBox 11">
             <a:extLst>
               <a:ext uri="{FF2B5EF4-FFF2-40B4-BE49-F238E27FC236}">
-                <a16:creationId xmlns:a16="http://schemas.microsoft.com/office/drawing/2014/main" id="{7701BFF2-1998-8590-1F64-834E4688D65B}"/>
+                <a16:creationId xmlns:a16="http://schemas.microsoft.com/office/drawing/2014/main" id="{54F7A28C-B1B4-97C9-6433-28A41AD7E9E4}"/>
               </a:ext>
             </a:extLst>
           </p:cNvPr>
@@ -13493,7 +13493,7 @@
           <p:cNvPr id="13" name="Oval 12">
             <a:extLst>
               <a:ext uri="{FF2B5EF4-FFF2-40B4-BE49-F238E27FC236}">
-                <a16:creationId xmlns:a16="http://schemas.microsoft.com/office/drawing/2014/main" id="{7303B453-60DE-242E-2518-0A89230BA2A2}"/>
+                <a16:creationId xmlns:a16="http://schemas.microsoft.com/office/drawing/2014/main" id="{22F1D60B-0A4A-2537-9762-A57281E14AAA}"/>
               </a:ext>
             </a:extLst>
           </p:cNvPr>
@@ -13569,7 +13569,7 @@
           <p:cNvPr id="14" name="TextBox 13">
             <a:extLst>
               <a:ext uri="{FF2B5EF4-FFF2-40B4-BE49-F238E27FC236}">
-                <a16:creationId xmlns:a16="http://schemas.microsoft.com/office/drawing/2014/main" id="{22661D1E-DC82-0EB4-5242-D84BA2379B05}"/>
+                <a16:creationId xmlns:a16="http://schemas.microsoft.com/office/drawing/2014/main" id="{B4279B3F-AC01-EAB1-DBE4-BB592F3A2F18}"/>
               </a:ext>
             </a:extLst>
           </p:cNvPr>
@@ -13609,7 +13609,7 @@
           <p:cNvPr id="15" name="TextBox 14">
             <a:extLst>
               <a:ext uri="{FF2B5EF4-FFF2-40B4-BE49-F238E27FC236}">
-                <a16:creationId xmlns:a16="http://schemas.microsoft.com/office/drawing/2014/main" id="{0D06813F-0442-3771-C98C-3F88D77AEBC6}"/>
+                <a16:creationId xmlns:a16="http://schemas.microsoft.com/office/drawing/2014/main" id="{295843E1-6945-2BCC-2BE7-D928F1559596}"/>
               </a:ext>
             </a:extLst>
           </p:cNvPr>
@@ -13655,7 +13655,7 @@
           <p:cNvPr id="16" name="Oval 15">
             <a:extLst>
               <a:ext uri="{FF2B5EF4-FFF2-40B4-BE49-F238E27FC236}">
-                <a16:creationId xmlns:a16="http://schemas.microsoft.com/office/drawing/2014/main" id="{3F26B9A4-DC1C-CC14-0244-1401CD0BDA80}"/>
+                <a16:creationId xmlns:a16="http://schemas.microsoft.com/office/drawing/2014/main" id="{9CFDA732-80AD-9463-9253-5F8D0A0DEA7D}"/>
               </a:ext>
             </a:extLst>
           </p:cNvPr>
@@ -13731,7 +13731,7 @@
           <p:cNvPr id="17" name="TextBox 16">
             <a:extLst>
               <a:ext uri="{FF2B5EF4-FFF2-40B4-BE49-F238E27FC236}">
-                <a16:creationId xmlns:a16="http://schemas.microsoft.com/office/drawing/2014/main" id="{D11C9934-37E9-B1A3-1CB6-C53C65A47005}"/>
+                <a16:creationId xmlns:a16="http://schemas.microsoft.com/office/drawing/2014/main" id="{82FC66AD-7348-231A-BEBF-EEB140947544}"/>
               </a:ext>
             </a:extLst>
           </p:cNvPr>
@@ -13777,7 +13777,7 @@
           <p:cNvPr id="18" name="TextBox 17">
             <a:extLst>
               <a:ext uri="{FF2B5EF4-FFF2-40B4-BE49-F238E27FC236}">
-                <a16:creationId xmlns:a16="http://schemas.microsoft.com/office/drawing/2014/main" id="{D616EE68-E849-355A-40FF-7A2810E91781}"/>
+                <a16:creationId xmlns:a16="http://schemas.microsoft.com/office/drawing/2014/main" id="{AD70F94A-250E-D4D3-F906-E200FAE23885}"/>
               </a:ext>
             </a:extLst>
           </p:cNvPr>
@@ -13823,7 +13823,7 @@
           <p:cNvPr id="19" name="Oval 18">
             <a:extLst>
               <a:ext uri="{FF2B5EF4-FFF2-40B4-BE49-F238E27FC236}">
-                <a16:creationId xmlns:a16="http://schemas.microsoft.com/office/drawing/2014/main" id="{D51C04D3-4E12-6C55-45B5-FFA2A50ABB5B}"/>
+                <a16:creationId xmlns:a16="http://schemas.microsoft.com/office/drawing/2014/main" id="{4290918D-0E39-1A02-47F3-628C64B41319}"/>
               </a:ext>
             </a:extLst>
           </p:cNvPr>
@@ -13899,7 +13899,7 @@
           <p:cNvPr id="20" name="TextBox 19">
             <a:extLst>
               <a:ext uri="{FF2B5EF4-FFF2-40B4-BE49-F238E27FC236}">
-                <a16:creationId xmlns:a16="http://schemas.microsoft.com/office/drawing/2014/main" id="{A4A95E48-80A3-D72B-211D-C3C7E8A0842C}"/>
+                <a16:creationId xmlns:a16="http://schemas.microsoft.com/office/drawing/2014/main" id="{85914F31-D969-D72B-897F-05222933E60A}"/>
               </a:ext>
             </a:extLst>
           </p:cNvPr>
@@ -13939,7 +13939,7 @@
           <p:cNvPr id="21" name="TextBox 20">
             <a:extLst>
               <a:ext uri="{FF2B5EF4-FFF2-40B4-BE49-F238E27FC236}">
-                <a16:creationId xmlns:a16="http://schemas.microsoft.com/office/drawing/2014/main" id="{AB7AD622-B911-0D98-B56B-6FC760EB1C45}"/>
+                <a16:creationId xmlns:a16="http://schemas.microsoft.com/office/drawing/2014/main" id="{CD70EB40-FC7D-E5E8-7566-80FAC7BA85D6}"/>
               </a:ext>
             </a:extLst>
           </p:cNvPr>
@@ -13985,7 +13985,7 @@
           <p:cNvPr id="22" name="TextBox 21">
             <a:extLst>
               <a:ext uri="{FF2B5EF4-FFF2-40B4-BE49-F238E27FC236}">
-                <a16:creationId xmlns:a16="http://schemas.microsoft.com/office/drawing/2014/main" id="{E3DD8344-12B6-C71F-DE9E-C34378B3B79E}"/>
+                <a16:creationId xmlns:a16="http://schemas.microsoft.com/office/drawing/2014/main" id="{337D35EC-AA68-93DA-11E5-46D22E1F1B47}"/>
               </a:ext>
             </a:extLst>
           </p:cNvPr>
@@ -14031,7 +14031,7 @@
           <p:cNvPr id="23" name="TextBox 22">
             <a:extLst>
               <a:ext uri="{FF2B5EF4-FFF2-40B4-BE49-F238E27FC236}">
-                <a16:creationId xmlns:a16="http://schemas.microsoft.com/office/drawing/2014/main" id="{042671B3-81A7-1313-980C-FF3C04A14877}"/>
+                <a16:creationId xmlns:a16="http://schemas.microsoft.com/office/drawing/2014/main" id="{18E193EC-BD97-8E31-DC2D-909F021B2DBF}"/>
               </a:ext>
             </a:extLst>
           </p:cNvPr>
@@ -14070,7 +14070,7 @@
     </p:spTree>
     <p:extLst>
       <p:ext uri="{BB962C8B-B14F-4D97-AF65-F5344CB8AC3E}">
-        <p14:creationId xmlns:p14="http://schemas.microsoft.com/office/powerpoint/2010/main" val="1296645062"/>
+        <p14:creationId xmlns:p14="http://schemas.microsoft.com/office/powerpoint/2010/main" val="878614124"/>
       </p:ext>
     </p:extLst>
   </p:cSld>
